--- a/Conference/GraphicsStudy/GraphicsHighLevelDesign.pptx
+++ b/Conference/GraphicsStudy/GraphicsHighLevelDesign.pptx
@@ -24,14 +24,18 @@
     <p:sldId id="273" r:id="rId18"/>
     <p:sldId id="274" r:id="rId19"/>
     <p:sldId id="263" r:id="rId20"/>
-    <p:sldId id="275" r:id="rId21"/>
-    <p:sldId id="276" r:id="rId22"/>
-    <p:sldId id="262" r:id="rId23"/>
-    <p:sldId id="259" r:id="rId24"/>
-    <p:sldId id="260" r:id="rId25"/>
-    <p:sldId id="278" r:id="rId26"/>
-    <p:sldId id="279" r:id="rId27"/>
-    <p:sldId id="281" r:id="rId28"/>
+    <p:sldId id="286" r:id="rId21"/>
+    <p:sldId id="275" r:id="rId22"/>
+    <p:sldId id="276" r:id="rId23"/>
+    <p:sldId id="262" r:id="rId24"/>
+    <p:sldId id="259" r:id="rId25"/>
+    <p:sldId id="260" r:id="rId26"/>
+    <p:sldId id="278" r:id="rId27"/>
+    <p:sldId id="283" r:id="rId28"/>
+    <p:sldId id="279" r:id="rId29"/>
+    <p:sldId id="284" r:id="rId30"/>
+    <p:sldId id="285" r:id="rId31"/>
+    <p:sldId id="281" r:id="rId32"/>
   </p:sldIdLst>
   <p:sldSz cx="12192000" cy="6858000"/>
   <p:notesSz cx="6858000" cy="9144000"/>
@@ -130,6 +134,11 @@
       </a:defRPr>
     </a:lvl9pPr>
   </p:defaultTextStyle>
+  <p:extLst>
+    <p:ext uri="{EFAFB233-063F-42B5-8137-9DF3F51BA10A}">
+      <p15:sldGuideLst xmlns:p15="http://schemas.microsoft.com/office/powerpoint/2012/main"/>
+    </p:ext>
+  </p:extLst>
 </p:presentation>
 </file>
 
@@ -280,7 +289,7 @@
           <a:p>
             <a:fld id="{D8810A9B-0CC6-4053-BA0B-965178095DC3}" type="datetimeFigureOut">
               <a:rPr lang="ko-KR" altLang="en-US" smtClean="0"/>
-              <a:t>2026-03-06</a:t>
+              <a:t>2026-03-07</a:t>
             </a:fld>
             <a:endParaRPr lang="ko-KR" altLang="en-US"/>
           </a:p>
@@ -478,7 +487,7 @@
           <a:p>
             <a:fld id="{D8810A9B-0CC6-4053-BA0B-965178095DC3}" type="datetimeFigureOut">
               <a:rPr lang="ko-KR" altLang="en-US" smtClean="0"/>
-              <a:t>2026-03-06</a:t>
+              <a:t>2026-03-07</a:t>
             </a:fld>
             <a:endParaRPr lang="ko-KR" altLang="en-US"/>
           </a:p>
@@ -686,7 +695,7 @@
           <a:p>
             <a:fld id="{D8810A9B-0CC6-4053-BA0B-965178095DC3}" type="datetimeFigureOut">
               <a:rPr lang="ko-KR" altLang="en-US" smtClean="0"/>
-              <a:t>2026-03-06</a:t>
+              <a:t>2026-03-07</a:t>
             </a:fld>
             <a:endParaRPr lang="ko-KR" altLang="en-US"/>
           </a:p>
@@ -884,7 +893,7 @@
           <a:p>
             <a:fld id="{D8810A9B-0CC6-4053-BA0B-965178095DC3}" type="datetimeFigureOut">
               <a:rPr lang="ko-KR" altLang="en-US" smtClean="0"/>
-              <a:t>2026-03-06</a:t>
+              <a:t>2026-03-07</a:t>
             </a:fld>
             <a:endParaRPr lang="ko-KR" altLang="en-US"/>
           </a:p>
@@ -1159,7 +1168,7 @@
           <a:p>
             <a:fld id="{D8810A9B-0CC6-4053-BA0B-965178095DC3}" type="datetimeFigureOut">
               <a:rPr lang="ko-KR" altLang="en-US" smtClean="0"/>
-              <a:t>2026-03-06</a:t>
+              <a:t>2026-03-07</a:t>
             </a:fld>
             <a:endParaRPr lang="ko-KR" altLang="en-US"/>
           </a:p>
@@ -1424,7 +1433,7 @@
           <a:p>
             <a:fld id="{D8810A9B-0CC6-4053-BA0B-965178095DC3}" type="datetimeFigureOut">
               <a:rPr lang="ko-KR" altLang="en-US" smtClean="0"/>
-              <a:t>2026-03-06</a:t>
+              <a:t>2026-03-07</a:t>
             </a:fld>
             <a:endParaRPr lang="ko-KR" altLang="en-US"/>
           </a:p>
@@ -1836,7 +1845,7 @@
           <a:p>
             <a:fld id="{D8810A9B-0CC6-4053-BA0B-965178095DC3}" type="datetimeFigureOut">
               <a:rPr lang="ko-KR" altLang="en-US" smtClean="0"/>
-              <a:t>2026-03-06</a:t>
+              <a:t>2026-03-07</a:t>
             </a:fld>
             <a:endParaRPr lang="ko-KR" altLang="en-US"/>
           </a:p>
@@ -1977,7 +1986,7 @@
           <a:p>
             <a:fld id="{D8810A9B-0CC6-4053-BA0B-965178095DC3}" type="datetimeFigureOut">
               <a:rPr lang="ko-KR" altLang="en-US" smtClean="0"/>
-              <a:t>2026-03-06</a:t>
+              <a:t>2026-03-07</a:t>
             </a:fld>
             <a:endParaRPr lang="ko-KR" altLang="en-US"/>
           </a:p>
@@ -2090,7 +2099,7 @@
           <a:p>
             <a:fld id="{D8810A9B-0CC6-4053-BA0B-965178095DC3}" type="datetimeFigureOut">
               <a:rPr lang="ko-KR" altLang="en-US" smtClean="0"/>
-              <a:t>2026-03-06</a:t>
+              <a:t>2026-03-07</a:t>
             </a:fld>
             <a:endParaRPr lang="ko-KR" altLang="en-US"/>
           </a:p>
@@ -2401,7 +2410,7 @@
           <a:p>
             <a:fld id="{D8810A9B-0CC6-4053-BA0B-965178095DC3}" type="datetimeFigureOut">
               <a:rPr lang="ko-KR" altLang="en-US" smtClean="0"/>
-              <a:t>2026-03-06</a:t>
+              <a:t>2026-03-07</a:t>
             </a:fld>
             <a:endParaRPr lang="ko-KR" altLang="en-US"/>
           </a:p>
@@ -2689,7 +2698,7 @@
           <a:p>
             <a:fld id="{D8810A9B-0CC6-4053-BA0B-965178095DC3}" type="datetimeFigureOut">
               <a:rPr lang="ko-KR" altLang="en-US" smtClean="0"/>
-              <a:t>2026-03-06</a:t>
+              <a:t>2026-03-07</a:t>
             </a:fld>
             <a:endParaRPr lang="ko-KR" altLang="en-US"/>
           </a:p>
@@ -2930,7 +2939,7 @@
           <a:p>
             <a:fld id="{D8810A9B-0CC6-4053-BA0B-965178095DC3}" type="datetimeFigureOut">
               <a:rPr lang="ko-KR" altLang="en-US" smtClean="0"/>
-              <a:t>2026-03-06</a:t>
+              <a:t>2026-03-07</a:t>
             </a:fld>
             <a:endParaRPr lang="ko-KR" altLang="en-US"/>
           </a:p>
@@ -3495,6 +3504,46 @@
           </a:p>
         </p:txBody>
       </p:sp>
+      <p:sp>
+        <p:nvSpPr>
+          <p:cNvPr id="3" name="TextBox 2">
+            <a:extLst>
+              <a:ext uri="{FF2B5EF4-FFF2-40B4-BE49-F238E27FC236}">
+                <a16:creationId xmlns:a16="http://schemas.microsoft.com/office/drawing/2014/main" id="{9155DF22-CBFA-20BB-DD37-3C4DBA847093}"/>
+              </a:ext>
+            </a:extLst>
+          </p:cNvPr>
+          <p:cNvSpPr txBox="1"/>
+          <p:nvPr/>
+        </p:nvSpPr>
+        <p:spPr>
+          <a:xfrm>
+            <a:off x="0" y="868680"/>
+            <a:ext cx="2327881" cy="369332"/>
+          </a:xfrm>
+          <a:prstGeom prst="rect">
+            <a:avLst/>
+          </a:prstGeom>
+          <a:noFill/>
+        </p:spPr>
+        <p:txBody>
+          <a:bodyPr wrap="none" rtlCol="0">
+            <a:spAutoFit/>
+          </a:bodyPr>
+          <a:lstStyle/>
+          <a:p>
+            <a:r>
+              <a:rPr lang="ko-KR" altLang="en-US" dirty="0"/>
+              <a:t>아직 실현되지 못함</a:t>
+            </a:r>
+            <a:r>
+              <a:rPr lang="en-US" altLang="ko-KR" dirty="0"/>
+              <a:t>.</a:t>
+            </a:r>
+            <a:endParaRPr lang="ko-KR" altLang="en-US" dirty="0"/>
+          </a:p>
+        </p:txBody>
+      </p:sp>
     </p:spTree>
     <p:extLst>
       <p:ext uri="{BB962C8B-B14F-4D97-AF65-F5344CB8AC3E}">
@@ -3643,6 +3692,46 @@
           </a:p>
         </p:txBody>
       </p:sp>
+      <p:sp>
+        <p:nvSpPr>
+          <p:cNvPr id="3" name="TextBox 2">
+            <a:extLst>
+              <a:ext uri="{FF2B5EF4-FFF2-40B4-BE49-F238E27FC236}">
+                <a16:creationId xmlns:a16="http://schemas.microsoft.com/office/drawing/2014/main" id="{F166ADAE-70E3-CF4B-B423-1A220BE1DEFD}"/>
+              </a:ext>
+            </a:extLst>
+          </p:cNvPr>
+          <p:cNvSpPr txBox="1"/>
+          <p:nvPr/>
+        </p:nvSpPr>
+        <p:spPr>
+          <a:xfrm>
+            <a:off x="0" y="868680"/>
+            <a:ext cx="2327881" cy="369332"/>
+          </a:xfrm>
+          <a:prstGeom prst="rect">
+            <a:avLst/>
+          </a:prstGeom>
+          <a:noFill/>
+        </p:spPr>
+        <p:txBody>
+          <a:bodyPr wrap="none" rtlCol="0">
+            <a:spAutoFit/>
+          </a:bodyPr>
+          <a:lstStyle/>
+          <a:p>
+            <a:r>
+              <a:rPr lang="ko-KR" altLang="en-US" dirty="0"/>
+              <a:t>아직 실현되지 못함</a:t>
+            </a:r>
+            <a:r>
+              <a:rPr lang="en-US" altLang="ko-KR" dirty="0"/>
+              <a:t>.</a:t>
+            </a:r>
+            <a:endParaRPr lang="ko-KR" altLang="en-US" dirty="0"/>
+          </a:p>
+        </p:txBody>
+      </p:sp>
     </p:spTree>
     <p:extLst>
       <p:ext uri="{BB962C8B-B14F-4D97-AF65-F5344CB8AC3E}">
@@ -4079,6 +4168,50 @@
           </a:p>
         </p:txBody>
       </p:sp>
+      <p:sp>
+        <p:nvSpPr>
+          <p:cNvPr id="3" name="TextBox 2">
+            <a:extLst>
+              <a:ext uri="{FF2B5EF4-FFF2-40B4-BE49-F238E27FC236}">
+                <a16:creationId xmlns:a16="http://schemas.microsoft.com/office/drawing/2014/main" id="{CD284927-6AF3-F87B-3315-B8AB439EFC04}"/>
+              </a:ext>
+            </a:extLst>
+          </p:cNvPr>
+          <p:cNvSpPr txBox="1"/>
+          <p:nvPr/>
+        </p:nvSpPr>
+        <p:spPr>
+          <a:xfrm>
+            <a:off x="0" y="868680"/>
+            <a:ext cx="2476960" cy="369332"/>
+          </a:xfrm>
+          <a:prstGeom prst="rect">
+            <a:avLst/>
+          </a:prstGeom>
+          <a:noFill/>
+        </p:spPr>
+        <p:txBody>
+          <a:bodyPr wrap="none" rtlCol="0">
+            <a:spAutoFit/>
+          </a:bodyPr>
+          <a:lstStyle/>
+          <a:p>
+            <a:r>
+              <a:rPr lang="ko-KR" altLang="en-US" dirty="0"/>
+              <a:t>동건아 이거 </a:t>
+            </a:r>
+            <a:r>
+              <a:rPr lang="ko-KR" altLang="en-US" dirty="0" err="1"/>
+              <a:t>적어주셈</a:t>
+            </a:r>
+            <a:r>
+              <a:rPr lang="en-US" altLang="ko-KR" dirty="0"/>
+              <a:t>.</a:t>
+            </a:r>
+            <a:endParaRPr lang="ko-KR" altLang="en-US" dirty="0"/>
+          </a:p>
+        </p:txBody>
+      </p:sp>
     </p:spTree>
     <p:extLst>
       <p:ext uri="{BB962C8B-B14F-4D97-AF65-F5344CB8AC3E}">
@@ -4428,8 +4561,8 @@
           </a:p>
         </p:txBody>
       </p:sp>
-      <mc:AlternateContent xmlns:mc="http://schemas.openxmlformats.org/markup-compatibility/2006">
-        <mc:Choice xmlns:pslz="http://schemas.microsoft.com/office/powerpoint/2016/slidezoom" Requires="pslz">
+      <mc:AlternateContent xmlns:mc="http://schemas.openxmlformats.org/markup-compatibility/2006" xmlns:pslz="http://schemas.microsoft.com/office/powerpoint/2016/slidezoom">
+        <mc:Choice Requires="pslz">
           <p:graphicFrame>
             <p:nvGraphicFramePr>
               <p:cNvPr id="10" name="슬라이드 확대/축소 9">
@@ -4486,7 +4619,7 @@
             </a:graphic>
           </p:graphicFrame>
         </mc:Choice>
-        <mc:Fallback>
+        <mc:Fallback xmlns="">
           <p:pic>
             <p:nvPicPr>
               <p:cNvPr id="10" name="슬라이드 확대/축소 9">
@@ -4503,7 +4636,7 @@
               <p:nvPr/>
             </p:nvPicPr>
             <p:blipFill>
-              <a:blip r:embed="rId2"/>
+              <a:blip r:embed="rId4"/>
               <a:stretch>
                 <a:fillRect/>
               </a:stretch>
@@ -4525,8 +4658,8 @@
           </p:pic>
         </mc:Fallback>
       </mc:AlternateContent>
-      <mc:AlternateContent xmlns:mc="http://schemas.openxmlformats.org/markup-compatibility/2006">
-        <mc:Choice xmlns:pslz="http://schemas.microsoft.com/office/powerpoint/2016/slidezoom" Requires="pslz">
+      <mc:AlternateContent xmlns:mc="http://schemas.openxmlformats.org/markup-compatibility/2006" xmlns:pslz="http://schemas.microsoft.com/office/powerpoint/2016/slidezoom">
+        <mc:Choice Requires="pslz">
           <p:graphicFrame>
             <p:nvGraphicFramePr>
               <p:cNvPr id="12" name="슬라이드 확대/축소 11">
@@ -4557,7 +4690,7 @@
                   <pslz:sldZmObj sldId="276" cId="904325592">
                     <pslz:zmPr id="{9E0EBCD9-BD83-4563-B14E-89E01394AE33}" returnToParent="0" transitionDur="1000">
                       <p166:blipFill xmlns:p166="http://schemas.microsoft.com/office/powerpoint/2016/6/main">
-                        <a:blip r:embed="rId4"/>
+                        <a:blip r:embed="rId5"/>
                         <a:stretch>
                           <a:fillRect/>
                         </a:stretch>
@@ -4583,11 +4716,11 @@
             </a:graphic>
           </p:graphicFrame>
         </mc:Choice>
-        <mc:Fallback>
+        <mc:Fallback xmlns="">
           <p:pic>
             <p:nvPicPr>
               <p:cNvPr id="12" name="슬라이드 확대/축소 11">
-                <a:hlinkClick r:id="rId5" action="ppaction://hlinksldjump"/>
+                <a:hlinkClick r:id="rId6" action="ppaction://hlinksldjump"/>
                 <a:extLst>
                   <a:ext uri="{FF2B5EF4-FFF2-40B4-BE49-F238E27FC236}">
                     <a16:creationId xmlns:a16="http://schemas.microsoft.com/office/drawing/2014/main" id="{8F29BC11-36B9-45F7-4879-A46D2C89FB68}"/>
@@ -4600,7 +4733,7 @@
               <p:nvPr/>
             </p:nvPicPr>
             <p:blipFill>
-              <a:blip r:embed="rId4"/>
+              <a:blip r:embed="rId7"/>
               <a:stretch>
                 <a:fillRect/>
               </a:stretch>
@@ -4636,8 +4769,8 @@
         </p:nvSpPr>
         <p:spPr>
           <a:xfrm>
-            <a:off x="180092" y="1453140"/>
-            <a:ext cx="1526380" cy="369332"/>
+            <a:off x="91601" y="1467599"/>
+            <a:ext cx="5779018" cy="923330"/>
           </a:xfrm>
           <a:prstGeom prst="rect">
             <a:avLst/>
@@ -4651,76 +4784,156 @@
           <a:lstStyle/>
           <a:p>
             <a:r>
-              <a:rPr lang="ko-KR" altLang="en-US" dirty="0"/>
-              <a:t>이거</a:t>
+              <a:rPr lang="en-US" altLang="ko-KR" dirty="0" err="1"/>
+              <a:t>SkinMesh</a:t>
+            </a:r>
+            <a:r>
+              <a:rPr lang="ko-KR" altLang="en-US" dirty="0"/>
+              <a:t>의 </a:t>
             </a:r>
             <a:r>
               <a:rPr lang="en-US" altLang="ko-KR" dirty="0"/>
-              <a:t> </a:t>
-            </a:r>
-            <a:r>
-              <a:rPr lang="ko-KR" altLang="en-US" dirty="0"/>
-              <a:t>필요함</a:t>
+              <a:t>BLAS Update</a:t>
+            </a:r>
+            <a:r>
+              <a:rPr lang="ko-KR" altLang="en-US" dirty="0"/>
+              <a:t>의 경우 </a:t>
+            </a:r>
+            <a:r>
+              <a:rPr lang="en-US" altLang="ko-KR" dirty="0" err="1"/>
+              <a:t>game.RenderTour</a:t>
+            </a:r>
+            <a:r>
+              <a:rPr lang="ko-KR" altLang="en-US" dirty="0"/>
+              <a:t>를</a:t>
+            </a:r>
+            <a:endParaRPr lang="en-US" altLang="ko-KR" dirty="0"/>
+          </a:p>
+          <a:p>
+            <a:r>
+              <a:rPr lang="ko-KR" altLang="en-US" dirty="0"/>
+              <a:t>사용해 보이는 스킨 </a:t>
+            </a:r>
+            <a:r>
+              <a:rPr lang="ko-KR" altLang="en-US" dirty="0" err="1"/>
+              <a:t>메쉬에</a:t>
+            </a:r>
+            <a:r>
+              <a:rPr lang="ko-KR" altLang="en-US" dirty="0"/>
+              <a:t> 대해서만 </a:t>
+            </a:r>
+            <a:endParaRPr lang="en-US" altLang="ko-KR" dirty="0"/>
+          </a:p>
+          <a:p>
+            <a:r>
+              <a:rPr lang="ko-KR" altLang="en-US" dirty="0"/>
+              <a:t>업데이트를 수행한다</a:t>
             </a:r>
             <a:r>
               <a:rPr lang="en-US" altLang="ko-KR" dirty="0"/>
-              <a:t>?</a:t>
+              <a:t>.</a:t>
             </a:r>
             <a:endParaRPr lang="ko-KR" altLang="en-US" dirty="0"/>
           </a:p>
         </p:txBody>
       </p:sp>
-      <p:sp>
-        <p:nvSpPr>
-          <p:cNvPr id="14" name="TextBox 13">
-            <a:extLst>
-              <a:ext uri="{FF2B5EF4-FFF2-40B4-BE49-F238E27FC236}">
-                <a16:creationId xmlns:a16="http://schemas.microsoft.com/office/drawing/2014/main" id="{1A0998AD-A07F-1BD6-CC03-61628BF4B0BC}"/>
-              </a:ext>
-            </a:extLst>
-          </p:cNvPr>
-          <p:cNvSpPr txBox="1"/>
-          <p:nvPr/>
-        </p:nvSpPr>
-        <p:spPr>
-          <a:xfrm>
-            <a:off x="6096000" y="1467599"/>
-            <a:ext cx="2032223" cy="923330"/>
-          </a:xfrm>
-          <a:prstGeom prst="rect">
-            <a:avLst/>
-          </a:prstGeom>
-          <a:noFill/>
-        </p:spPr>
-        <p:txBody>
-          <a:bodyPr wrap="none" rtlCol="0">
-            <a:spAutoFit/>
-          </a:bodyPr>
-          <a:lstStyle/>
-          <a:p>
-            <a:r>
-              <a:rPr lang="en-US" altLang="ko-KR" dirty="0"/>
-              <a:t>Vertex Buffer SRV</a:t>
-            </a:r>
-          </a:p>
-          <a:p>
-            <a:r>
-              <a:rPr lang="en-US" altLang="ko-KR" dirty="0"/>
-              <a:t>Index Buffer SRV</a:t>
-            </a:r>
-          </a:p>
-          <a:p>
-            <a:r>
-              <a:rPr lang="ko-KR" altLang="en-US" dirty="0" err="1"/>
-              <a:t>셰이더에</a:t>
-            </a:r>
-            <a:r>
-              <a:rPr lang="ko-KR" altLang="en-US" dirty="0"/>
-              <a:t> 바인딩</a:t>
-            </a:r>
-          </a:p>
-        </p:txBody>
-      </p:sp>
+      <mc:AlternateContent xmlns:mc="http://schemas.openxmlformats.org/markup-compatibility/2006">
+        <mc:Choice xmlns:pslz="http://schemas.microsoft.com/office/powerpoint/2016/slidezoom" Requires="pslz">
+          <p:graphicFrame>
+            <p:nvGraphicFramePr>
+              <p:cNvPr id="11" name="슬라이드 확대/축소 10">
+                <a:extLst>
+                  <a:ext uri="{FF2B5EF4-FFF2-40B4-BE49-F238E27FC236}">
+                    <a16:creationId xmlns:a16="http://schemas.microsoft.com/office/drawing/2014/main" id="{5D85872A-69A6-B12A-6362-54B353177F6F}"/>
+                  </a:ext>
+                </a:extLst>
+              </p:cNvPr>
+              <p:cNvGraphicFramePr>
+                <a:graphicFrameLocks noChangeAspect="1"/>
+              </p:cNvGraphicFramePr>
+              <p:nvPr>
+                <p:extLst>
+                  <p:ext uri="{D42A27DB-BD31-4B8C-83A1-F6EECF244321}">
+                    <p14:modId xmlns:p14="http://schemas.microsoft.com/office/powerpoint/2010/main" val="1374667222"/>
+                  </p:ext>
+                </p:extLst>
+              </p:nvPr>
+            </p:nvGraphicFramePr>
+            <p:xfrm>
+              <a:off x="6096000" y="1520347"/>
+              <a:ext cx="2778325" cy="1562808"/>
+            </p:xfrm>
+            <a:graphic>
+              <a:graphicData uri="http://schemas.microsoft.com/office/powerpoint/2016/slidezoom">
+                <pslz:sldZm>
+                  <pslz:sldZmObj sldId="286" cId="471672495">
+                    <pslz:zmPr id="{47ADBA83-62CC-4C39-B974-4F5B113AD202}" returnToParent="0" transitionDur="1000">
+                      <p166:blipFill xmlns:p166="http://schemas.microsoft.com/office/powerpoint/2016/6/main">
+                        <a:blip r:embed="rId8"/>
+                        <a:stretch>
+                          <a:fillRect/>
+                        </a:stretch>
+                      </p166:blipFill>
+                      <p166:spPr xmlns:p166="http://schemas.microsoft.com/office/powerpoint/2016/6/main">
+                        <a:xfrm>
+                          <a:off x="0" y="0"/>
+                          <a:ext cx="2778325" cy="1562808"/>
+                        </a:xfrm>
+                        <a:prstGeom prst="rect">
+                          <a:avLst/>
+                        </a:prstGeom>
+                        <a:ln w="3175">
+                          <a:solidFill>
+                            <a:prstClr val="ltGray"/>
+                          </a:solidFill>
+                        </a:ln>
+                      </p166:spPr>
+                    </pslz:zmPr>
+                  </pslz:sldZmObj>
+                </pslz:sldZm>
+              </a:graphicData>
+            </a:graphic>
+          </p:graphicFrame>
+        </mc:Choice>
+        <mc:Fallback>
+          <p:pic>
+            <p:nvPicPr>
+              <p:cNvPr id="11" name="슬라이드 확대/축소 10">
+                <a:hlinkClick r:id="rId3" action="ppaction://hlinksldjump"/>
+                <a:extLst>
+                  <a:ext uri="{FF2B5EF4-FFF2-40B4-BE49-F238E27FC236}">
+                    <a16:creationId xmlns:a16="http://schemas.microsoft.com/office/drawing/2014/main" id="{5D85872A-69A6-B12A-6362-54B353177F6F}"/>
+                  </a:ext>
+                </a:extLst>
+              </p:cNvPr>
+              <p:cNvPicPr>
+                <a:picLocks noGrp="1" noRot="1" noChangeAspect="1" noMove="1" noResize="1" noEditPoints="1" noAdjustHandles="1" noChangeArrowheads="1" noChangeShapeType="1"/>
+              </p:cNvPicPr>
+              <p:nvPr/>
+            </p:nvPicPr>
+            <p:blipFill>
+              <a:blip r:embed="rId8"/>
+              <a:stretch>
+                <a:fillRect/>
+              </a:stretch>
+            </p:blipFill>
+            <p:spPr>
+              <a:xfrm>
+                <a:off x="6096000" y="1520347"/>
+                <a:ext cx="2778325" cy="1562808"/>
+              </a:xfrm>
+              <a:prstGeom prst="rect">
+                <a:avLst/>
+              </a:prstGeom>
+              <a:ln w="3175">
+                <a:solidFill>
+                  <a:prstClr val="ltGray"/>
+                </a:solidFill>
+              </a:ln>
+            </p:spPr>
+          </p:pic>
+        </mc:Fallback>
+      </mc:AlternateContent>
     </p:spTree>
     <p:extLst>
       <p:ext uri="{BB962C8B-B14F-4D97-AF65-F5344CB8AC3E}">
@@ -4785,8 +4998,8 @@
           </a:p>
         </p:txBody>
       </p:sp>
-      <mc:AlternateContent xmlns:mc="http://schemas.openxmlformats.org/markup-compatibility/2006">
-        <mc:Choice xmlns:pslz="http://schemas.microsoft.com/office/powerpoint/2016/slidezoom" Requires="pslz">
+      <mc:AlternateContent xmlns:mc="http://schemas.openxmlformats.org/markup-compatibility/2006" xmlns:pslz="http://schemas.microsoft.com/office/powerpoint/2016/slidezoom">
+        <mc:Choice Requires="pslz">
           <p:graphicFrame>
             <p:nvGraphicFramePr>
               <p:cNvPr id="5" name="슬라이드 확대/축소 4">
@@ -4843,7 +5056,7 @@
             </a:graphic>
           </p:graphicFrame>
         </mc:Choice>
-        <mc:Fallback>
+        <mc:Fallback xmlns="">
           <p:pic>
             <p:nvPicPr>
               <p:cNvPr id="5" name="슬라이드 확대/축소 4">
@@ -4860,7 +5073,7 @@
               <p:nvPr/>
             </p:nvPicPr>
             <p:blipFill>
-              <a:blip r:embed="rId2"/>
+              <a:blip r:embed="rId4"/>
               <a:stretch>
                 <a:fillRect/>
               </a:stretch>
@@ -4882,8 +5095,8 @@
           </p:pic>
         </mc:Fallback>
       </mc:AlternateContent>
-      <mc:AlternateContent xmlns:mc="http://schemas.openxmlformats.org/markup-compatibility/2006">
-        <mc:Choice xmlns:pslz="http://schemas.microsoft.com/office/powerpoint/2016/slidezoom" Requires="pslz">
+      <mc:AlternateContent xmlns:mc="http://schemas.openxmlformats.org/markup-compatibility/2006" xmlns:pslz="http://schemas.microsoft.com/office/powerpoint/2016/slidezoom">
+        <mc:Choice Requires="pslz">
           <p:graphicFrame>
             <p:nvGraphicFramePr>
               <p:cNvPr id="7" name="슬라이드 확대/축소 6">
@@ -4914,7 +5127,7 @@
                   <pslz:sldZmObj sldId="259" cId="2433842180">
                     <pslz:zmPr id="{9592065C-C584-4DF5-A15A-E16791647284}" returnToParent="0" transitionDur="1000">
                       <p166:blipFill xmlns:p166="http://schemas.microsoft.com/office/powerpoint/2016/6/main">
-                        <a:blip r:embed="rId4"/>
+                        <a:blip r:embed="rId5"/>
                         <a:stretch>
                           <a:fillRect/>
                         </a:stretch>
@@ -4940,11 +5153,11 @@
             </a:graphic>
           </p:graphicFrame>
         </mc:Choice>
-        <mc:Fallback>
+        <mc:Fallback xmlns="">
           <p:pic>
             <p:nvPicPr>
               <p:cNvPr id="7" name="슬라이드 확대/축소 6">
-                <a:hlinkClick r:id="rId5" action="ppaction://hlinksldjump"/>
+                <a:hlinkClick r:id="rId6" action="ppaction://hlinksldjump"/>
                 <a:extLst>
                   <a:ext uri="{FF2B5EF4-FFF2-40B4-BE49-F238E27FC236}">
                     <a16:creationId xmlns:a16="http://schemas.microsoft.com/office/drawing/2014/main" id="{099CA36F-9802-FBA9-6C3B-B7C08A48B94D}"/>
@@ -4957,7 +5170,7 @@
               <p:nvPr/>
             </p:nvPicPr>
             <p:blipFill>
-              <a:blip r:embed="rId4"/>
+              <a:blip r:embed="rId7"/>
               <a:stretch>
                 <a:fillRect/>
               </a:stretch>
@@ -4979,8 +5192,8 @@
           </p:pic>
         </mc:Fallback>
       </mc:AlternateContent>
-      <mc:AlternateContent xmlns:mc="http://schemas.openxmlformats.org/markup-compatibility/2006">
-        <mc:Choice xmlns:pslz="http://schemas.microsoft.com/office/powerpoint/2016/slidezoom" Requires="pslz">
+      <mc:AlternateContent xmlns:mc="http://schemas.openxmlformats.org/markup-compatibility/2006" xmlns:pslz="http://schemas.microsoft.com/office/powerpoint/2016/slidezoom">
+        <mc:Choice Requires="pslz">
           <p:graphicFrame>
             <p:nvGraphicFramePr>
               <p:cNvPr id="9" name="슬라이드 확대/축소 8">
@@ -5011,7 +5224,7 @@
                   <pslz:sldZmObj sldId="260" cId="2758334147">
                     <pslz:zmPr id="{230FFD24-AFDE-44C3-B5BB-C0CA796D3700}" returnToParent="0" transitionDur="1000">
                       <p166:blipFill xmlns:p166="http://schemas.microsoft.com/office/powerpoint/2016/6/main">
-                        <a:blip r:embed="rId6"/>
+                        <a:blip r:embed="rId8"/>
                         <a:stretch>
                           <a:fillRect/>
                         </a:stretch>
@@ -5037,11 +5250,11 @@
             </a:graphic>
           </p:graphicFrame>
         </mc:Choice>
-        <mc:Fallback>
+        <mc:Fallback xmlns="">
           <p:pic>
             <p:nvPicPr>
               <p:cNvPr id="9" name="슬라이드 확대/축소 8">
-                <a:hlinkClick r:id="rId7" action="ppaction://hlinksldjump"/>
+                <a:hlinkClick r:id="rId9" action="ppaction://hlinksldjump"/>
                 <a:extLst>
                   <a:ext uri="{FF2B5EF4-FFF2-40B4-BE49-F238E27FC236}">
                     <a16:creationId xmlns:a16="http://schemas.microsoft.com/office/drawing/2014/main" id="{D1C1B1AA-7BD2-1858-C0B3-6BB9B3E60AD7}"/>
@@ -5054,7 +5267,7 @@
               <p:nvPr/>
             </p:nvPicPr>
             <p:blipFill>
-              <a:blip r:embed="rId6"/>
+              <a:blip r:embed="rId10"/>
               <a:stretch>
                 <a:fillRect/>
               </a:stretch>
@@ -5097,6 +5310,536 @@
         <p:cNvPr id="1" name="">
           <a:extLst>
             <a:ext uri="{FF2B5EF4-FFF2-40B4-BE49-F238E27FC236}">
+              <a16:creationId xmlns:a16="http://schemas.microsoft.com/office/drawing/2014/main" id="{128D3EA2-2F9A-BBA9-FCED-EA621E860D7B}"/>
+            </a:ext>
+          </a:extLst>
+        </p:cNvPr>
+        <p:cNvGrpSpPr/>
+        <p:nvPr/>
+      </p:nvGrpSpPr>
+      <p:grpSpPr>
+        <a:xfrm>
+          <a:off x="0" y="0"/>
+          <a:ext cx="0" cy="0"/>
+          <a:chOff x="0" y="0"/>
+          <a:chExt cx="0" cy="0"/>
+        </a:xfrm>
+      </p:grpSpPr>
+      <p:sp>
+        <p:nvSpPr>
+          <p:cNvPr id="2" name="제목 1">
+            <a:extLst>
+              <a:ext uri="{FF2B5EF4-FFF2-40B4-BE49-F238E27FC236}">
+                <a16:creationId xmlns:a16="http://schemas.microsoft.com/office/drawing/2014/main" id="{A338507F-D2F3-0813-40BE-C41B7850B7FF}"/>
+              </a:ext>
+            </a:extLst>
+          </p:cNvPr>
+          <p:cNvSpPr>
+            <a:spLocks noGrp="1"/>
+          </p:cNvSpPr>
+          <p:nvPr>
+            <p:ph type="title"/>
+          </p:nvPr>
+        </p:nvSpPr>
+        <p:spPr>
+          <a:xfrm>
+            <a:off x="0" y="18255"/>
+            <a:ext cx="10515600" cy="850425"/>
+          </a:xfrm>
+        </p:spPr>
+        <p:txBody>
+          <a:bodyPr>
+            <a:normAutofit/>
+          </a:bodyPr>
+          <a:lstStyle/>
+          <a:p>
+            <a:r>
+              <a:rPr lang="en-US" altLang="ko-KR" sz="5400" dirty="0"/>
+              <a:t>DXR – Vertex</a:t>
+            </a:r>
+            <a:r>
+              <a:rPr lang="ko-KR" altLang="en-US" sz="5400" dirty="0"/>
+              <a:t> </a:t>
+            </a:r>
+            <a:r>
+              <a:rPr lang="en-US" altLang="ko-KR" sz="5400" dirty="0"/>
+              <a:t>Compute</a:t>
+            </a:r>
+            <a:endParaRPr lang="ko-KR" altLang="en-US" sz="5400" dirty="0"/>
+          </a:p>
+        </p:txBody>
+      </p:sp>
+      <p:sp>
+        <p:nvSpPr>
+          <p:cNvPr id="14" name="TextBox 13">
+            <a:extLst>
+              <a:ext uri="{FF2B5EF4-FFF2-40B4-BE49-F238E27FC236}">
+                <a16:creationId xmlns:a16="http://schemas.microsoft.com/office/drawing/2014/main" id="{1A0998AD-A07F-1BD6-CC03-61628BF4B0BC}"/>
+              </a:ext>
+            </a:extLst>
+          </p:cNvPr>
+          <p:cNvSpPr txBox="1"/>
+          <p:nvPr/>
+        </p:nvSpPr>
+        <p:spPr>
+          <a:xfrm>
+            <a:off x="206477" y="868680"/>
+            <a:ext cx="11344832" cy="5078313"/>
+          </a:xfrm>
+          <a:prstGeom prst="rect">
+            <a:avLst/>
+          </a:prstGeom>
+          <a:noFill/>
+        </p:spPr>
+        <p:txBody>
+          <a:bodyPr wrap="square" rtlCol="0">
+            <a:spAutoFit/>
+          </a:bodyPr>
+          <a:lstStyle/>
+          <a:p>
+            <a:r>
+              <a:rPr lang="ko-KR" altLang="en-US" dirty="0" err="1"/>
+              <a:t>메쉬를</a:t>
+            </a:r>
+            <a:r>
+              <a:rPr lang="ko-KR" altLang="en-US" dirty="0"/>
+              <a:t> </a:t>
+            </a:r>
+            <a:r>
+              <a:rPr lang="ko-KR" altLang="en-US" dirty="0" err="1"/>
+              <a:t>만들때마다</a:t>
+            </a:r>
+            <a:r>
+              <a:rPr lang="ko-KR" altLang="en-US" dirty="0"/>
+              <a:t> </a:t>
+            </a:r>
+            <a:r>
+              <a:rPr lang="en-US" altLang="ko-KR" dirty="0"/>
+              <a:t>BLAS</a:t>
+            </a:r>
+            <a:r>
+              <a:rPr lang="ko-KR" altLang="en-US" dirty="0"/>
+              <a:t>를 함께 빌드하며</a:t>
+            </a:r>
+            <a:r>
+              <a:rPr lang="en-US" altLang="ko-KR" dirty="0"/>
+              <a:t>, </a:t>
+            </a:r>
+            <a:r>
+              <a:rPr lang="ko-KR" altLang="en-US" dirty="0" err="1"/>
+              <a:t>메쉬의</a:t>
+            </a:r>
+            <a:r>
+              <a:rPr lang="ko-KR" altLang="en-US" dirty="0"/>
+              <a:t> </a:t>
+            </a:r>
+            <a:r>
+              <a:rPr lang="ko-KR" altLang="en-US" dirty="0" err="1"/>
+              <a:t>버택스</a:t>
+            </a:r>
+            <a:r>
+              <a:rPr lang="ko-KR" altLang="en-US" dirty="0"/>
+              <a:t> </a:t>
+            </a:r>
+            <a:r>
+              <a:rPr lang="en-US" altLang="ko-KR" dirty="0"/>
+              <a:t>/</a:t>
+            </a:r>
+            <a:r>
+              <a:rPr lang="ko-KR" altLang="en-US" dirty="0"/>
+              <a:t> 인덱스 데이터를 </a:t>
+            </a:r>
+            <a:endParaRPr lang="en-US" altLang="ko-KR" dirty="0"/>
+          </a:p>
+          <a:p>
+            <a:r>
+              <a:rPr lang="ko-KR" altLang="en-US" dirty="0"/>
+              <a:t>두개의 </a:t>
+            </a:r>
+            <a:r>
+              <a:rPr lang="en-US" altLang="ko-KR" dirty="0" err="1"/>
+              <a:t>GPURes</a:t>
+            </a:r>
+            <a:r>
+              <a:rPr lang="ko-KR" altLang="en-US" dirty="0"/>
+              <a:t>인 풀에 집어넣는다</a:t>
+            </a:r>
+            <a:r>
+              <a:rPr lang="en-US" altLang="ko-KR" dirty="0"/>
+              <a:t>. &gt;&gt; </a:t>
+            </a:r>
+            <a:r>
+              <a:rPr lang="ko-KR" altLang="en-US" dirty="0"/>
+              <a:t>때문에 모든 </a:t>
+            </a:r>
+            <a:r>
+              <a:rPr lang="ko-KR" altLang="en-US" dirty="0" err="1"/>
+              <a:t>버택스</a:t>
+            </a:r>
+            <a:r>
+              <a:rPr lang="ko-KR" altLang="en-US" dirty="0"/>
+              <a:t> 데이터</a:t>
+            </a:r>
+            <a:r>
+              <a:rPr lang="en-US" altLang="ko-KR" dirty="0"/>
+              <a:t>, </a:t>
+            </a:r>
+            <a:r>
+              <a:rPr lang="ko-KR" altLang="en-US" dirty="0"/>
+              <a:t>모든 인덱스 데이터가 이 두 리소스 내에 있다</a:t>
+            </a:r>
+            <a:r>
+              <a:rPr lang="en-US" altLang="ko-KR" dirty="0"/>
+              <a:t>.</a:t>
+            </a:r>
+          </a:p>
+          <a:p>
+            <a:r>
+              <a:rPr lang="en-US" altLang="ko-KR" dirty="0"/>
+              <a:t>	- </a:t>
+            </a:r>
+            <a:r>
+              <a:rPr lang="ko-KR" altLang="en-US" dirty="0"/>
+              <a:t>다만 이 </a:t>
+            </a:r>
+            <a:r>
+              <a:rPr lang="ko-KR" altLang="en-US" dirty="0" err="1"/>
+              <a:t>메쉬의</a:t>
+            </a:r>
+            <a:r>
+              <a:rPr lang="ko-KR" altLang="en-US" dirty="0"/>
+              <a:t> 데이터를 레스터 렌더링에서도 재활용하기 위해서는 </a:t>
+            </a:r>
+            <a:endParaRPr lang="en-US" altLang="ko-KR" dirty="0"/>
+          </a:p>
+          <a:p>
+            <a:r>
+              <a:rPr lang="en-US" altLang="ko-KR" dirty="0"/>
+              <a:t>		</a:t>
+            </a:r>
+            <a:r>
+              <a:rPr lang="ko-KR" altLang="en-US" dirty="0" err="1"/>
+              <a:t>메쉬마다</a:t>
+            </a:r>
+            <a:r>
+              <a:rPr lang="ko-KR" altLang="en-US" dirty="0"/>
+              <a:t> </a:t>
+            </a:r>
+            <a:r>
+              <a:rPr lang="en-US" altLang="ko-KR" dirty="0" err="1"/>
+              <a:t>VertexBufferView</a:t>
+            </a:r>
+            <a:r>
+              <a:rPr lang="en-US" altLang="ko-KR" dirty="0"/>
+              <a:t>, </a:t>
+            </a:r>
+            <a:r>
+              <a:rPr lang="en-US" altLang="ko-KR" dirty="0" err="1"/>
+              <a:t>IndexBufferView</a:t>
+            </a:r>
+            <a:r>
+              <a:rPr lang="ko-KR" altLang="en-US" dirty="0"/>
+              <a:t>를 만들어야 했는데 그러기 위해서는 </a:t>
+            </a:r>
+            <a:endParaRPr lang="en-US" altLang="ko-KR" dirty="0"/>
+          </a:p>
+          <a:p>
+            <a:r>
+              <a:rPr lang="en-US" altLang="ko-KR" dirty="0"/>
+              <a:t>		</a:t>
+            </a:r>
+            <a:r>
+              <a:rPr lang="ko-KR" altLang="en-US" dirty="0"/>
+              <a:t>모든 </a:t>
+            </a:r>
+            <a:r>
+              <a:rPr lang="ko-KR" altLang="en-US" dirty="0" err="1"/>
+              <a:t>메쉬의</a:t>
+            </a:r>
+            <a:r>
+              <a:rPr lang="ko-KR" altLang="en-US" dirty="0"/>
+              <a:t> </a:t>
+            </a:r>
+            <a:r>
+              <a:rPr lang="ko-KR" altLang="en-US" dirty="0" err="1"/>
+              <a:t>버택스</a:t>
+            </a:r>
+            <a:r>
+              <a:rPr lang="ko-KR" altLang="en-US" dirty="0"/>
+              <a:t> 시작점</a:t>
+            </a:r>
+            <a:r>
+              <a:rPr lang="en-US" altLang="ko-KR" dirty="0"/>
+              <a:t>, </a:t>
+            </a:r>
+            <a:r>
+              <a:rPr lang="ko-KR" altLang="en-US" dirty="0"/>
+              <a:t>그 안의 모든 </a:t>
+            </a:r>
+            <a:r>
+              <a:rPr lang="ko-KR" altLang="en-US" dirty="0" err="1"/>
+              <a:t>서브메쉬들의</a:t>
+            </a:r>
+            <a:r>
+              <a:rPr lang="ko-KR" altLang="en-US" dirty="0"/>
+              <a:t> 인덱스 시작점들을 </a:t>
+            </a:r>
+            <a:endParaRPr lang="en-US" altLang="ko-KR" dirty="0"/>
+          </a:p>
+          <a:p>
+            <a:r>
+              <a:rPr lang="en-US" altLang="ko-KR" dirty="0"/>
+              <a:t>		256</a:t>
+            </a:r>
+            <a:r>
+              <a:rPr lang="ko-KR" altLang="en-US" dirty="0"/>
+              <a:t>바이트로 얼라인해야 했다</a:t>
+            </a:r>
+            <a:r>
+              <a:rPr lang="en-US" altLang="ko-KR" dirty="0"/>
+              <a:t>.</a:t>
+            </a:r>
+          </a:p>
+          <a:p>
+            <a:r>
+              <a:rPr lang="en-US" altLang="ko-KR" dirty="0"/>
+              <a:t>		</a:t>
+            </a:r>
+            <a:r>
+              <a:rPr lang="ko-KR" altLang="en-US" dirty="0"/>
+              <a:t>때문에 같은 </a:t>
+            </a:r>
+            <a:r>
+              <a:rPr lang="ko-KR" altLang="en-US" dirty="0" err="1"/>
+              <a:t>메쉬라도</a:t>
+            </a:r>
+            <a:r>
+              <a:rPr lang="ko-KR" altLang="en-US" dirty="0"/>
+              <a:t> 데이터가 연속적이지 않고 정렬되어 끊겨져 있을 것이다</a:t>
+            </a:r>
+            <a:r>
+              <a:rPr lang="en-US" altLang="ko-KR" dirty="0"/>
+              <a:t>. </a:t>
+            </a:r>
+          </a:p>
+          <a:p>
+            <a:endParaRPr lang="en-US" altLang="ko-KR" dirty="0"/>
+          </a:p>
+          <a:p>
+            <a:r>
+              <a:rPr lang="ko-KR" altLang="en-US" dirty="0" err="1"/>
+              <a:t>렌더를</a:t>
+            </a:r>
+            <a:r>
+              <a:rPr lang="ko-KR" altLang="en-US" dirty="0"/>
+              <a:t> 시작하면</a:t>
+            </a:r>
+            <a:endParaRPr lang="en-US" altLang="ko-KR" dirty="0"/>
+          </a:p>
+          <a:p>
+            <a:r>
+              <a:rPr lang="ko-KR" altLang="en-US" dirty="0" err="1"/>
+              <a:t>프러스텀</a:t>
+            </a:r>
+            <a:r>
+              <a:rPr lang="ko-KR" altLang="en-US" dirty="0"/>
+              <a:t> </a:t>
+            </a:r>
+            <a:r>
+              <a:rPr lang="ko-KR" altLang="en-US" dirty="0" err="1"/>
+              <a:t>컬링으로</a:t>
+            </a:r>
+            <a:r>
+              <a:rPr lang="ko-KR" altLang="en-US" dirty="0"/>
+              <a:t> 걸러낸 </a:t>
+            </a:r>
+            <a:r>
+              <a:rPr lang="ko-KR" altLang="en-US" dirty="0" err="1"/>
+              <a:t>스킨메쉬들의</a:t>
+            </a:r>
+            <a:r>
+              <a:rPr lang="ko-KR" altLang="en-US" dirty="0"/>
+              <a:t> 데이터를 변형시키고</a:t>
+            </a:r>
+            <a:r>
+              <a:rPr lang="en-US" altLang="ko-KR" dirty="0"/>
+              <a:t>, BLAS refit</a:t>
+            </a:r>
+            <a:r>
+              <a:rPr lang="ko-KR" altLang="en-US" dirty="0"/>
+              <a:t>을 수행한다</a:t>
+            </a:r>
+            <a:r>
+              <a:rPr lang="en-US" altLang="ko-KR" dirty="0"/>
+              <a:t>.</a:t>
+            </a:r>
+          </a:p>
+          <a:p>
+            <a:endParaRPr lang="en-US" altLang="ko-KR" dirty="0"/>
+          </a:p>
+          <a:p>
+            <a:r>
+              <a:rPr lang="ko-KR" altLang="en-US" dirty="0"/>
+              <a:t>또한 각</a:t>
+            </a:r>
+            <a:r>
+              <a:rPr lang="en-US" altLang="ko-KR" dirty="0"/>
+              <a:t> </a:t>
+            </a:r>
+            <a:r>
+              <a:rPr lang="ko-KR" altLang="en-US" dirty="0"/>
+              <a:t>프레임마다</a:t>
+            </a:r>
+            <a:r>
+              <a:rPr lang="en-US" altLang="ko-KR" dirty="0"/>
+              <a:t> TLAS</a:t>
+            </a:r>
+            <a:r>
+              <a:rPr lang="ko-KR" altLang="en-US" dirty="0"/>
+              <a:t>를 빌드하고 </a:t>
+            </a:r>
+            <a:r>
+              <a:rPr lang="en-US" altLang="ko-KR" dirty="0"/>
+              <a:t>AS </a:t>
+            </a:r>
+            <a:r>
+              <a:rPr lang="ko-KR" altLang="en-US" dirty="0"/>
+              <a:t>바인딩</a:t>
+            </a:r>
+            <a:endParaRPr lang="en-US" altLang="ko-KR" dirty="0"/>
+          </a:p>
+          <a:p>
+            <a:r>
+              <a:rPr lang="ko-KR" altLang="en-US" dirty="0" err="1"/>
+              <a:t>메쉬들의</a:t>
+            </a:r>
+            <a:r>
+              <a:rPr lang="ko-KR" altLang="en-US" dirty="0"/>
+              <a:t> 데이터를 모아놓은 </a:t>
+            </a:r>
+            <a:r>
+              <a:rPr lang="en-US" altLang="ko-KR" dirty="0"/>
+              <a:t>Vertex Buffer SRV, Index Buffer SRV</a:t>
+            </a:r>
+            <a:r>
+              <a:rPr lang="ko-KR" altLang="en-US" dirty="0"/>
+              <a:t>를 </a:t>
+            </a:r>
+            <a:r>
+              <a:rPr lang="ko-KR" altLang="en-US" dirty="0" err="1"/>
+              <a:t>셰이더에</a:t>
+            </a:r>
+            <a:r>
+              <a:rPr lang="ko-KR" altLang="en-US" dirty="0"/>
+              <a:t> 바인딩을 하고</a:t>
+            </a:r>
+            <a:endParaRPr lang="en-US" altLang="ko-KR" dirty="0"/>
+          </a:p>
+          <a:p>
+            <a:r>
+              <a:rPr lang="ko-KR" altLang="en-US" dirty="0"/>
+              <a:t>렌더링을 시작한다</a:t>
+            </a:r>
+            <a:r>
+              <a:rPr lang="en-US" altLang="ko-KR" dirty="0"/>
+              <a:t>.</a:t>
+            </a:r>
+          </a:p>
+          <a:p>
+            <a:endParaRPr lang="en-US" altLang="ko-KR" dirty="0"/>
+          </a:p>
+          <a:p>
+            <a:r>
+              <a:rPr lang="ko-KR" altLang="en-US" dirty="0"/>
+              <a:t>화면에서 어떤 픽셀이 </a:t>
+            </a:r>
+            <a:r>
+              <a:rPr lang="ko-KR" altLang="en-US" dirty="0" err="1"/>
+              <a:t>메쉬내부에</a:t>
+            </a:r>
+            <a:r>
+              <a:rPr lang="ko-KR" altLang="en-US" dirty="0"/>
+              <a:t> 있는 점인지는 </a:t>
+            </a:r>
+            <a:r>
+              <a:rPr lang="en-US" altLang="ko-KR" dirty="0"/>
+              <a:t>BLAS</a:t>
+            </a:r>
+            <a:r>
+              <a:rPr lang="ko-KR" altLang="en-US" dirty="0"/>
+              <a:t>가 판단하며</a:t>
+            </a:r>
+            <a:r>
+              <a:rPr lang="en-US" altLang="ko-KR" dirty="0"/>
+              <a:t>, </a:t>
+            </a:r>
+            <a:r>
+              <a:rPr lang="ko-KR" altLang="en-US" dirty="0"/>
+              <a:t>해당 </a:t>
+            </a:r>
+            <a:r>
+              <a:rPr lang="ko-KR" altLang="en-US" dirty="0" err="1"/>
+              <a:t>버택스들의</a:t>
+            </a:r>
+            <a:r>
+              <a:rPr lang="ko-KR" altLang="en-US" dirty="0"/>
+              <a:t> 자세한 데이터들은 </a:t>
+            </a:r>
+            <a:endParaRPr lang="en-US" altLang="ko-KR" dirty="0"/>
+          </a:p>
+          <a:p>
+            <a:r>
+              <a:rPr lang="en-US" altLang="ko-KR" dirty="0"/>
+              <a:t>Vertex Buffer SRV, Index Buffer SRV</a:t>
+            </a:r>
+            <a:r>
+              <a:rPr lang="ko-KR" altLang="en-US" dirty="0"/>
+              <a:t>들을 </a:t>
+            </a:r>
+            <a:r>
+              <a:rPr lang="en-US" altLang="ko-KR" dirty="0"/>
+              <a:t>Shader</a:t>
+            </a:r>
+            <a:r>
+              <a:rPr lang="ko-KR" altLang="en-US" dirty="0"/>
+              <a:t>에서 </a:t>
+            </a:r>
+            <a:r>
+              <a:rPr lang="en-US" altLang="ko-KR" dirty="0" err="1"/>
+              <a:t>StructuredBuffer</a:t>
+            </a:r>
+            <a:r>
+              <a:rPr lang="ko-KR" altLang="en-US" dirty="0"/>
+              <a:t>로 바인딩하여 알아볼 수 있다</a:t>
+            </a:r>
+            <a:r>
+              <a:rPr lang="en-US" altLang="ko-KR" dirty="0"/>
+              <a:t>.</a:t>
+            </a:r>
+          </a:p>
+        </p:txBody>
+      </p:sp>
+    </p:spTree>
+    <p:extLst>
+      <p:ext uri="{BB962C8B-B14F-4D97-AF65-F5344CB8AC3E}">
+        <p14:creationId xmlns:p14="http://schemas.microsoft.com/office/powerpoint/2010/main" val="471672495"/>
+      </p:ext>
+    </p:extLst>
+  </p:cSld>
+  <p:clrMapOvr>
+    <a:masterClrMapping/>
+  </p:clrMapOvr>
+</p:sld>
+</file>
+
+<file path=ppt/slides/slide21.xml><?xml version="1.0" encoding="utf-8"?>
+<p:sld xmlns:a="http://schemas.openxmlformats.org/drawingml/2006/main" xmlns:r="http://schemas.openxmlformats.org/officeDocument/2006/relationships" xmlns:p="http://schemas.openxmlformats.org/presentationml/2006/main">
+  <p:cSld>
+    <p:spTree>
+      <p:nvGrpSpPr>
+        <p:cNvPr id="1" name="">
+          <a:extLst>
+            <a:ext uri="{FF2B5EF4-FFF2-40B4-BE49-F238E27FC236}">
               <a16:creationId xmlns:a16="http://schemas.microsoft.com/office/drawing/2014/main" id="{F0B7CB50-1033-5F70-E3A4-665999B4ACC6}"/>
             </a:ext>
           </a:extLst>
@@ -5161,7 +5904,7 @@
 </p:sld>
 </file>
 
-<file path=ppt/slides/slide21.xml><?xml version="1.0" encoding="utf-8"?>
+<file path=ppt/slides/slide22.xml><?xml version="1.0" encoding="utf-8"?>
 <p:sld xmlns:a="http://schemas.openxmlformats.org/drawingml/2006/main" xmlns:r="http://schemas.openxmlformats.org/officeDocument/2006/relationships" xmlns:p="http://schemas.openxmlformats.org/presentationml/2006/main">
   <p:cSld>
     <p:spTree>
@@ -5237,7 +5980,7 @@
 </p:sld>
 </file>
 
-<file path=ppt/slides/slide22.xml><?xml version="1.0" encoding="utf-8"?>
+<file path=ppt/slides/slide23.xml><?xml version="1.0" encoding="utf-8"?>
 <p:sld xmlns:a="http://schemas.openxmlformats.org/drawingml/2006/main" xmlns:r="http://schemas.openxmlformats.org/officeDocument/2006/relationships" xmlns:p="http://schemas.openxmlformats.org/presentationml/2006/main">
   <p:cSld>
     <p:spTree>
@@ -5309,7 +6052,7 @@
 </p:sld>
 </file>
 
-<file path=ppt/slides/slide23.xml><?xml version="1.0" encoding="utf-8"?>
+<file path=ppt/slides/slide24.xml><?xml version="1.0" encoding="utf-8"?>
 <p:sld xmlns:a="http://schemas.openxmlformats.org/drawingml/2006/main" xmlns:r="http://schemas.openxmlformats.org/officeDocument/2006/relationships" xmlns:p="http://schemas.openxmlformats.org/presentationml/2006/main">
   <p:cSld>
     <p:spTree>
@@ -5411,7 +6154,7 @@
 </p:sld>
 </file>
 
-<file path=ppt/slides/slide24.xml><?xml version="1.0" encoding="utf-8"?>
+<file path=ppt/slides/slide25.xml><?xml version="1.0" encoding="utf-8"?>
 <p:sld xmlns:a="http://schemas.openxmlformats.org/drawingml/2006/main" xmlns:r="http://schemas.openxmlformats.org/officeDocument/2006/relationships" xmlns:p="http://schemas.openxmlformats.org/presentationml/2006/main">
   <p:cSld>
     <p:spTree>
@@ -5470,8 +6213,8 @@
           </a:p>
         </p:txBody>
       </p:sp>
-      <mc:AlternateContent xmlns:mc="http://schemas.openxmlformats.org/markup-compatibility/2006">
-        <mc:Choice xmlns:pslz="http://schemas.microsoft.com/office/powerpoint/2016/slidezoom" Requires="pslz">
+      <mc:AlternateContent xmlns:mc="http://schemas.openxmlformats.org/markup-compatibility/2006" xmlns:pslz="http://schemas.microsoft.com/office/powerpoint/2016/slidezoom">
+        <mc:Choice Requires="pslz">
           <p:graphicFrame>
             <p:nvGraphicFramePr>
               <p:cNvPr id="4" name="슬라이드 확대/축소 3">
@@ -5528,7 +6271,7 @@
             </a:graphic>
           </p:graphicFrame>
         </mc:Choice>
-        <mc:Fallback>
+        <mc:Fallback xmlns="">
           <p:pic>
             <p:nvPicPr>
               <p:cNvPr id="4" name="슬라이드 확대/축소 3">
@@ -5545,7 +6288,7 @@
               <p:nvPr/>
             </p:nvPicPr>
             <p:blipFill>
-              <a:blip r:embed="rId2"/>
+              <a:blip r:embed="rId4"/>
               <a:stretch>
                 <a:fillRect/>
               </a:stretch>
@@ -5567,8 +6310,8 @@
           </p:pic>
         </mc:Fallback>
       </mc:AlternateContent>
-      <mc:AlternateContent xmlns:mc="http://schemas.openxmlformats.org/markup-compatibility/2006">
-        <mc:Choice xmlns:pslz="http://schemas.microsoft.com/office/powerpoint/2016/slidezoom" Requires="pslz">
+      <mc:AlternateContent xmlns:mc="http://schemas.openxmlformats.org/markup-compatibility/2006" xmlns:pslz="http://schemas.microsoft.com/office/powerpoint/2016/slidezoom">
+        <mc:Choice Requires="pslz">
           <p:graphicFrame>
             <p:nvGraphicFramePr>
               <p:cNvPr id="6" name="슬라이드 확대/축소 5">
@@ -5599,7 +6342,7 @@
                   <pslz:sldZmObj sldId="279" cId="2927238059">
                     <pslz:zmPr id="{EFAEE96A-68E4-4BA0-AD76-B19B21DBD83D}" returnToParent="0" transitionDur="1000">
                       <p166:blipFill xmlns:p166="http://schemas.microsoft.com/office/powerpoint/2016/6/main">
-                        <a:blip r:embed="rId4"/>
+                        <a:blip r:embed="rId5"/>
                         <a:stretch>
                           <a:fillRect/>
                         </a:stretch>
@@ -5625,11 +6368,11 @@
             </a:graphic>
           </p:graphicFrame>
         </mc:Choice>
-        <mc:Fallback>
+        <mc:Fallback xmlns="">
           <p:pic>
             <p:nvPicPr>
               <p:cNvPr id="6" name="슬라이드 확대/축소 5">
-                <a:hlinkClick r:id="rId5" action="ppaction://hlinksldjump"/>
+                <a:hlinkClick r:id="rId6" action="ppaction://hlinksldjump"/>
                 <a:extLst>
                   <a:ext uri="{FF2B5EF4-FFF2-40B4-BE49-F238E27FC236}">
                     <a16:creationId xmlns:a16="http://schemas.microsoft.com/office/drawing/2014/main" id="{DDF32986-FF6C-E5A3-849B-D60E77632BCB}"/>
@@ -5642,7 +6385,7 @@
               <p:nvPr/>
             </p:nvPicPr>
             <p:blipFill>
-              <a:blip r:embed="rId4"/>
+              <a:blip r:embed="rId7"/>
               <a:stretch>
                 <a:fillRect/>
               </a:stretch>
@@ -5677,7 +6420,7 @@
 </p:sld>
 </file>
 
-<file path=ppt/slides/slide25.xml><?xml version="1.0" encoding="utf-8"?>
+<file path=ppt/slides/slide26.xml><?xml version="1.0" encoding="utf-8"?>
 <p:sld xmlns:a="http://schemas.openxmlformats.org/drawingml/2006/main" xmlns:r="http://schemas.openxmlformats.org/officeDocument/2006/relationships" xmlns:p="http://schemas.openxmlformats.org/presentationml/2006/main">
   <p:cSld>
     <p:spTree>
@@ -5736,6 +6479,344 @@
           </a:p>
         </p:txBody>
       </p:sp>
+      <p:sp>
+        <p:nvSpPr>
+          <p:cNvPr id="4" name="TextBox 3">
+            <a:extLst>
+              <a:ext uri="{FF2B5EF4-FFF2-40B4-BE49-F238E27FC236}">
+                <a16:creationId xmlns:a16="http://schemas.microsoft.com/office/drawing/2014/main" id="{03D14BEE-5B9D-F77C-1F44-F02DDDD9145C}"/>
+              </a:ext>
+            </a:extLst>
+          </p:cNvPr>
+          <p:cNvSpPr txBox="1"/>
+          <p:nvPr/>
+        </p:nvSpPr>
+        <p:spPr>
+          <a:xfrm>
+            <a:off x="137160" y="868680"/>
+            <a:ext cx="12317796" cy="2031325"/>
+          </a:xfrm>
+          <a:prstGeom prst="rect">
+            <a:avLst/>
+          </a:prstGeom>
+          <a:noFill/>
+        </p:spPr>
+        <p:txBody>
+          <a:bodyPr wrap="none" rtlCol="0">
+            <a:spAutoFit/>
+          </a:bodyPr>
+          <a:lstStyle/>
+          <a:p>
+            <a:r>
+              <a:rPr lang="en-US" altLang="ko-KR" dirty="0" err="1"/>
+              <a:t>bitAlloter</a:t>
+            </a:r>
+            <a:r>
+              <a:rPr lang="ko-KR" altLang="en-US" dirty="0"/>
+              <a:t>는 각 배열의 자리의 활성</a:t>
+            </a:r>
+            <a:r>
+              <a:rPr lang="en-US" altLang="ko-KR" dirty="0"/>
+              <a:t>/</a:t>
+            </a:r>
+            <a:r>
+              <a:rPr lang="ko-KR" altLang="en-US" dirty="0"/>
+              <a:t>비활성 혹은 할당</a:t>
+            </a:r>
+            <a:r>
+              <a:rPr lang="en-US" altLang="ko-KR" dirty="0"/>
+              <a:t>/</a:t>
+            </a:r>
+            <a:r>
+              <a:rPr lang="ko-KR" altLang="en-US" dirty="0" err="1"/>
+              <a:t>비할당</a:t>
+            </a:r>
+            <a:r>
+              <a:rPr lang="ko-KR" altLang="en-US" dirty="0"/>
+              <a:t> 여부를 </a:t>
+            </a:r>
+            <a:r>
+              <a:rPr lang="en-US" altLang="ko-KR" dirty="0"/>
+              <a:t>bit </a:t>
+            </a:r>
+            <a:r>
+              <a:rPr lang="ko-KR" altLang="en-US" dirty="0"/>
+              <a:t>배열로 나타낸다</a:t>
+            </a:r>
+            <a:r>
+              <a:rPr lang="en-US" altLang="ko-KR" dirty="0"/>
+              <a:t>.</a:t>
+            </a:r>
+          </a:p>
+          <a:p>
+            <a:r>
+              <a:rPr lang="en-US" altLang="ko-KR" dirty="0" err="1"/>
+              <a:t>Alloc</a:t>
+            </a:r>
+            <a:r>
+              <a:rPr lang="en-US" altLang="ko-KR" dirty="0"/>
+              <a:t>()</a:t>
+            </a:r>
+            <a:r>
+              <a:rPr lang="ko-KR" altLang="en-US" dirty="0"/>
+              <a:t>을 하면 비트가 </a:t>
+            </a:r>
+            <a:r>
+              <a:rPr lang="en-US" altLang="ko-KR" dirty="0"/>
+              <a:t>0</a:t>
+            </a:r>
+            <a:r>
+              <a:rPr lang="ko-KR" altLang="en-US" dirty="0"/>
+              <a:t>인 자리를 선택하여 </a:t>
+            </a:r>
+            <a:r>
+              <a:rPr lang="en-US" altLang="ko-KR" dirty="0"/>
+              <a:t>1</a:t>
+            </a:r>
+            <a:r>
+              <a:rPr lang="ko-KR" altLang="en-US" dirty="0"/>
+              <a:t>로 만들고 해당 위치를 </a:t>
+            </a:r>
+            <a:r>
+              <a:rPr lang="en-US" altLang="ko-KR" dirty="0"/>
+              <a:t>int </a:t>
+            </a:r>
+            <a:r>
+              <a:rPr lang="ko-KR" altLang="en-US" dirty="0"/>
+              <a:t>인덱스로 반환한다</a:t>
+            </a:r>
+            <a:r>
+              <a:rPr lang="en-US" altLang="ko-KR" dirty="0"/>
+              <a:t>.</a:t>
+            </a:r>
+          </a:p>
+          <a:p>
+            <a:r>
+              <a:rPr lang="ko-KR" altLang="en-US" dirty="0"/>
+              <a:t>그 인덱스를 오브젝트가 가지고 있다가 </a:t>
+            </a:r>
+            <a:r>
+              <a:rPr lang="en-US" altLang="ko-KR" dirty="0"/>
+              <a:t>Free(index) </a:t>
+            </a:r>
+            <a:r>
+              <a:rPr lang="ko-KR" altLang="en-US" dirty="0"/>
+              <a:t>를 호출하여 다시 해제할 수 있다</a:t>
+            </a:r>
+            <a:r>
+              <a:rPr lang="en-US" altLang="ko-KR" dirty="0"/>
+              <a:t>.</a:t>
+            </a:r>
+          </a:p>
+          <a:p>
+            <a:r>
+              <a:rPr lang="ko-KR" altLang="en-US" dirty="0"/>
+              <a:t>할당과정은 꽤나 빠르다</a:t>
+            </a:r>
+            <a:r>
+              <a:rPr lang="en-US" altLang="ko-KR" dirty="0"/>
+              <a:t>. </a:t>
+            </a:r>
+            <a:r>
+              <a:rPr lang="ko-KR" altLang="en-US" dirty="0"/>
+              <a:t>왜냐하면 가장 마지막 </a:t>
+            </a:r>
+            <a:r>
+              <a:rPr lang="en-US" altLang="ko-KR" dirty="0"/>
+              <a:t>0</a:t>
+            </a:r>
+            <a:r>
+              <a:rPr lang="ko-KR" altLang="en-US" dirty="0"/>
+              <a:t>을 항상 저장하게끔 알고리즘이 </a:t>
+            </a:r>
+            <a:r>
+              <a:rPr lang="ko-KR" altLang="en-US" dirty="0" err="1"/>
+              <a:t>짜여있기도</a:t>
+            </a:r>
+            <a:r>
+              <a:rPr lang="ko-KR" altLang="en-US" dirty="0"/>
+              <a:t> 하고</a:t>
+            </a:r>
+            <a:r>
+              <a:rPr lang="en-US" altLang="ko-KR" dirty="0"/>
+              <a:t>, (</a:t>
+            </a:r>
+            <a:r>
+              <a:rPr lang="ko-KR" altLang="en-US" dirty="0"/>
+              <a:t>곧바로 그걸 선택</a:t>
+            </a:r>
+            <a:r>
+              <a:rPr lang="en-US" altLang="ko-KR" dirty="0"/>
+              <a:t>)</a:t>
+            </a:r>
+          </a:p>
+          <a:p>
+            <a:r>
+              <a:rPr lang="ko-KR" altLang="en-US" dirty="0"/>
+              <a:t>또한 </a:t>
+            </a:r>
+            <a:r>
+              <a:rPr lang="en-US" altLang="ko-KR" dirty="0"/>
+              <a:t>bit </a:t>
+            </a:r>
+            <a:r>
+              <a:rPr lang="ko-KR" altLang="en-US" dirty="0"/>
+              <a:t>배열로 되어있기 때문에 </a:t>
+            </a:r>
+            <a:r>
+              <a:rPr lang="en-US" altLang="ko-KR" dirty="0"/>
+              <a:t>32</a:t>
+            </a:r>
+            <a:r>
+              <a:rPr lang="ko-KR" altLang="en-US" dirty="0"/>
+              <a:t>개의 오브젝트의 할당여부를 한번에 검사할 수 있다</a:t>
+            </a:r>
+            <a:r>
+              <a:rPr lang="en-US" altLang="ko-KR" dirty="0"/>
+              <a:t>. 0xFFFFFFFF</a:t>
+            </a:r>
+            <a:r>
+              <a:rPr lang="ko-KR" altLang="en-US" dirty="0"/>
+              <a:t>가 아니라면</a:t>
+            </a:r>
+            <a:endParaRPr lang="en-US" altLang="ko-KR" dirty="0"/>
+          </a:p>
+          <a:p>
+            <a:r>
+              <a:rPr lang="ko-KR" altLang="en-US" dirty="0"/>
+              <a:t>그곳에 </a:t>
+            </a:r>
+            <a:r>
+              <a:rPr lang="en-US" altLang="ko-KR" dirty="0"/>
+              <a:t>0</a:t>
+            </a:r>
+            <a:r>
+              <a:rPr lang="ko-KR" altLang="en-US" dirty="0"/>
+              <a:t>이 있다는 것이니 해당 </a:t>
+            </a:r>
+            <a:r>
+              <a:rPr lang="en-US" altLang="ko-KR" dirty="0"/>
+              <a:t>doubleword </a:t>
+            </a:r>
+            <a:r>
+              <a:rPr lang="ko-KR" altLang="en-US" dirty="0"/>
+              <a:t>를 </a:t>
+            </a:r>
+            <a:r>
+              <a:rPr lang="en-US" altLang="ko-KR" dirty="0"/>
+              <a:t>bit </a:t>
+            </a:r>
+            <a:r>
+              <a:rPr lang="ko-KR" altLang="en-US" dirty="0"/>
+              <a:t>순회한다</a:t>
+            </a:r>
+            <a:r>
+              <a:rPr lang="en-US" altLang="ko-KR" dirty="0"/>
+              <a:t>.</a:t>
+            </a:r>
+          </a:p>
+          <a:p>
+            <a:endParaRPr lang="en-US" altLang="ko-KR" dirty="0"/>
+          </a:p>
+        </p:txBody>
+      </p:sp>
+      <mc:AlternateContent xmlns:mc="http://schemas.openxmlformats.org/markup-compatibility/2006">
+        <mc:Choice xmlns:pslz="http://schemas.microsoft.com/office/powerpoint/2016/slidezoom" Requires="pslz">
+          <p:graphicFrame>
+            <p:nvGraphicFramePr>
+              <p:cNvPr id="8" name="슬라이드 확대/축소 7">
+                <a:extLst>
+                  <a:ext uri="{FF2B5EF4-FFF2-40B4-BE49-F238E27FC236}">
+                    <a16:creationId xmlns:a16="http://schemas.microsoft.com/office/drawing/2014/main" id="{D507B324-09B3-7B73-FD30-77FD1CC0027B}"/>
+                  </a:ext>
+                </a:extLst>
+              </p:cNvPr>
+              <p:cNvGraphicFramePr>
+                <a:graphicFrameLocks noChangeAspect="1"/>
+              </p:cNvGraphicFramePr>
+              <p:nvPr>
+                <p:extLst>
+                  <p:ext uri="{D42A27DB-BD31-4B8C-83A1-F6EECF244321}">
+                    <p14:modId xmlns:p14="http://schemas.microsoft.com/office/powerpoint/2010/main" val="3257729037"/>
+                  </p:ext>
+                </p:extLst>
+              </p:nvPr>
+            </p:nvGraphicFramePr>
+            <p:xfrm>
+              <a:off x="205986" y="2768395"/>
+              <a:ext cx="6617109" cy="3722124"/>
+            </p:xfrm>
+            <a:graphic>
+              <a:graphicData uri="http://schemas.microsoft.com/office/powerpoint/2016/slidezoom">
+                <pslz:sldZm>
+                  <pslz:sldZmObj sldId="283" cId="977256668">
+                    <pslz:zmPr id="{64EB6C04-2ACE-4F0E-BEC1-03A316A8B18C}" returnToParent="0" transitionDur="1000">
+                      <p166:blipFill xmlns:p166="http://schemas.microsoft.com/office/powerpoint/2016/6/main">
+                        <a:blip r:embed="rId2"/>
+                        <a:stretch>
+                          <a:fillRect/>
+                        </a:stretch>
+                      </p166:blipFill>
+                      <p166:spPr xmlns:p166="http://schemas.microsoft.com/office/powerpoint/2016/6/main">
+                        <a:xfrm>
+                          <a:off x="0" y="0"/>
+                          <a:ext cx="6617109" cy="3722124"/>
+                        </a:xfrm>
+                        <a:prstGeom prst="rect">
+                          <a:avLst/>
+                        </a:prstGeom>
+                        <a:ln w="3175">
+                          <a:solidFill>
+                            <a:prstClr val="ltGray"/>
+                          </a:solidFill>
+                        </a:ln>
+                      </p166:spPr>
+                    </pslz:zmPr>
+                  </pslz:sldZmObj>
+                </pslz:sldZm>
+              </a:graphicData>
+            </a:graphic>
+          </p:graphicFrame>
+        </mc:Choice>
+        <mc:Fallback>
+          <p:pic>
+            <p:nvPicPr>
+              <p:cNvPr id="8" name="슬라이드 확대/축소 7">
+                <a:hlinkClick r:id="rId3" action="ppaction://hlinksldjump"/>
+                <a:extLst>
+                  <a:ext uri="{FF2B5EF4-FFF2-40B4-BE49-F238E27FC236}">
+                    <a16:creationId xmlns:a16="http://schemas.microsoft.com/office/drawing/2014/main" id="{D507B324-09B3-7B73-FD30-77FD1CC0027B}"/>
+                  </a:ext>
+                </a:extLst>
+              </p:cNvPr>
+              <p:cNvPicPr>
+                <a:picLocks noGrp="1" noRot="1" noChangeAspect="1" noMove="1" noResize="1" noEditPoints="1" noAdjustHandles="1" noChangeArrowheads="1" noChangeShapeType="1"/>
+              </p:cNvPicPr>
+              <p:nvPr/>
+            </p:nvPicPr>
+            <p:blipFill>
+              <a:blip r:embed="rId2"/>
+              <a:stretch>
+                <a:fillRect/>
+              </a:stretch>
+            </p:blipFill>
+            <p:spPr>
+              <a:xfrm>
+                <a:off x="205986" y="2768395"/>
+                <a:ext cx="6617109" cy="3722124"/>
+              </a:xfrm>
+              <a:prstGeom prst="rect">
+                <a:avLst/>
+              </a:prstGeom>
+              <a:ln w="3175">
+                <a:solidFill>
+                  <a:prstClr val="ltGray"/>
+                </a:solidFill>
+              </a:ln>
+            </p:spPr>
+          </p:pic>
+        </mc:Fallback>
+      </mc:AlternateContent>
     </p:spTree>
     <p:extLst>
       <p:ext uri="{BB962C8B-B14F-4D97-AF65-F5344CB8AC3E}">
@@ -5749,7 +6830,249 @@
 </p:sld>
 </file>
 
-<file path=ppt/slides/slide26.xml><?xml version="1.0" encoding="utf-8"?>
+<file path=ppt/slides/slide27.xml><?xml version="1.0" encoding="utf-8"?>
+<p:sld xmlns:a="http://schemas.openxmlformats.org/drawingml/2006/main" xmlns:r="http://schemas.openxmlformats.org/officeDocument/2006/relationships" xmlns:p="http://schemas.openxmlformats.org/presentationml/2006/main">
+  <p:cSld>
+    <p:spTree>
+      <p:nvGrpSpPr>
+        <p:cNvPr id="1" name="">
+          <a:extLst>
+            <a:ext uri="{FF2B5EF4-FFF2-40B4-BE49-F238E27FC236}">
+              <a16:creationId xmlns:a16="http://schemas.microsoft.com/office/drawing/2014/main" id="{DF16BDEE-4E30-B33C-786A-A062222B609B}"/>
+            </a:ext>
+          </a:extLst>
+        </p:cNvPr>
+        <p:cNvGrpSpPr/>
+        <p:nvPr/>
+      </p:nvGrpSpPr>
+      <p:grpSpPr>
+        <a:xfrm>
+          <a:off x="0" y="0"/>
+          <a:ext cx="0" cy="0"/>
+          <a:chOff x="0" y="0"/>
+          <a:chExt cx="0" cy="0"/>
+        </a:xfrm>
+      </p:grpSpPr>
+      <p:sp>
+        <p:nvSpPr>
+          <p:cNvPr id="2" name="제목 1">
+            <a:extLst>
+              <a:ext uri="{FF2B5EF4-FFF2-40B4-BE49-F238E27FC236}">
+                <a16:creationId xmlns:a16="http://schemas.microsoft.com/office/drawing/2014/main" id="{FDF51FA0-2288-B9C4-6639-D7C68CFC2A26}"/>
+              </a:ext>
+            </a:extLst>
+          </p:cNvPr>
+          <p:cNvSpPr>
+            <a:spLocks noGrp="1"/>
+          </p:cNvSpPr>
+          <p:nvPr>
+            <p:ph type="title"/>
+          </p:nvPr>
+        </p:nvSpPr>
+        <p:spPr>
+          <a:xfrm>
+            <a:off x="0" y="18255"/>
+            <a:ext cx="10515600" cy="850425"/>
+          </a:xfrm>
+        </p:spPr>
+        <p:txBody>
+          <a:bodyPr>
+            <a:normAutofit/>
+          </a:bodyPr>
+          <a:lstStyle/>
+          <a:p>
+            <a:r>
+              <a:rPr lang="en-US" altLang="ko-KR" sz="5400" dirty="0" err="1"/>
+              <a:t>BitAlloter</a:t>
+            </a:r>
+            <a:r>
+              <a:rPr lang="ko-KR" altLang="en-US" sz="5400" dirty="0"/>
+              <a:t>의 순회 방법</a:t>
+            </a:r>
+          </a:p>
+        </p:txBody>
+      </p:sp>
+      <p:sp>
+        <p:nvSpPr>
+          <p:cNvPr id="4" name="TextBox 3">
+            <a:extLst>
+              <a:ext uri="{FF2B5EF4-FFF2-40B4-BE49-F238E27FC236}">
+                <a16:creationId xmlns:a16="http://schemas.microsoft.com/office/drawing/2014/main" id="{8207CD42-075F-59E4-8451-B20704309C2E}"/>
+              </a:ext>
+            </a:extLst>
+          </p:cNvPr>
+          <p:cNvSpPr txBox="1"/>
+          <p:nvPr/>
+        </p:nvSpPr>
+        <p:spPr>
+          <a:xfrm>
+            <a:off x="159773" y="970455"/>
+            <a:ext cx="11766755" cy="1200329"/>
+          </a:xfrm>
+          <a:prstGeom prst="rect">
+            <a:avLst/>
+          </a:prstGeom>
+          <a:noFill/>
+        </p:spPr>
+        <p:txBody>
+          <a:bodyPr wrap="square">
+            <a:spAutoFit/>
+          </a:bodyPr>
+          <a:lstStyle/>
+          <a:p>
+            <a:r>
+              <a:rPr lang="en-US" altLang="ko-KR" dirty="0" err="1"/>
+              <a:t>bitAlloter</a:t>
+            </a:r>
+            <a:r>
+              <a:rPr lang="ko-KR" altLang="en-US" dirty="0"/>
+              <a:t>로 관리되는 오브젝트의 순회는 결국 활성화 비트 </a:t>
+            </a:r>
+            <a:r>
+              <a:rPr lang="en-US" altLang="ko-KR" dirty="0"/>
+              <a:t>(1)</a:t>
+            </a:r>
+            <a:r>
+              <a:rPr lang="ko-KR" altLang="en-US" dirty="0"/>
+              <a:t>로 켜진 오브젝트만을 대상으로 이루어지는데</a:t>
+            </a:r>
+            <a:r>
+              <a:rPr lang="en-US" altLang="ko-KR" dirty="0"/>
+              <a:t>,</a:t>
+            </a:r>
+          </a:p>
+          <a:p>
+            <a:r>
+              <a:rPr lang="ko-KR" altLang="en-US" dirty="0"/>
+              <a:t>이는 </a:t>
+            </a:r>
+            <a:r>
+              <a:rPr lang="en-US" altLang="ko-KR" dirty="0" err="1"/>
+              <a:t>IndexRange</a:t>
+            </a:r>
+            <a:r>
+              <a:rPr lang="ko-KR" altLang="en-US" dirty="0"/>
+              <a:t>의 배열로 해당하는 오브젝트 대상을 미리 뽑아두고 순회를 할 수 있다</a:t>
+            </a:r>
+            <a:r>
+              <a:rPr lang="en-US" altLang="ko-KR" dirty="0"/>
+              <a:t>. (</a:t>
+            </a:r>
+            <a:r>
+              <a:rPr lang="ko-KR" altLang="en-US" dirty="0"/>
+              <a:t>가장 빠른 방식</a:t>
+            </a:r>
+            <a:r>
+              <a:rPr lang="en-US" altLang="ko-KR" dirty="0"/>
+              <a:t>)</a:t>
+            </a:r>
+          </a:p>
+          <a:p>
+            <a:r>
+              <a:rPr lang="en-US" altLang="ko-KR" dirty="0" err="1"/>
+              <a:t>GetTourPairs</a:t>
+            </a:r>
+            <a:r>
+              <a:rPr lang="en-US" altLang="ko-KR" dirty="0"/>
+              <a:t> range</a:t>
+            </a:r>
+            <a:r>
+              <a:rPr lang="ko-KR" altLang="en-US" dirty="0"/>
+              <a:t>의 </a:t>
+            </a:r>
+            <a:r>
+              <a:rPr lang="en-US" altLang="ko-KR" dirty="0" err="1"/>
+              <a:t>startindex</a:t>
+            </a:r>
+            <a:r>
+              <a:rPr lang="en-US" altLang="ko-KR" dirty="0"/>
+              <a:t>, </a:t>
+            </a:r>
+            <a:r>
+              <a:rPr lang="en-US" altLang="ko-KR" dirty="0" err="1"/>
+              <a:t>endindex</a:t>
+            </a:r>
+            <a:r>
+              <a:rPr lang="ko-KR" altLang="en-US" dirty="0"/>
+              <a:t>를 담은 </a:t>
+            </a:r>
+            <a:r>
+              <a:rPr lang="en-US" altLang="ko-KR" dirty="0"/>
+              <a:t>pair</a:t>
+            </a:r>
+            <a:r>
+              <a:rPr lang="ko-KR" altLang="en-US" dirty="0"/>
+              <a:t>들을 순회하며 오브젝트를 처리하면 된다</a:t>
+            </a:r>
+            <a:r>
+              <a:rPr lang="en-US" altLang="ko-KR" dirty="0"/>
+              <a:t>.</a:t>
+            </a:r>
+          </a:p>
+          <a:p>
+            <a:r>
+              <a:rPr lang="ko-KR" altLang="en-US" dirty="0"/>
+              <a:t>아래 코드 </a:t>
+            </a:r>
+            <a:r>
+              <a:rPr lang="ko-KR" altLang="en-US" dirty="0" err="1"/>
+              <a:t>처럼</a:t>
+            </a:r>
+            <a:r>
+              <a:rPr lang="ko-KR" altLang="en-US" dirty="0"/>
+              <a:t> 사용된다</a:t>
+            </a:r>
+            <a:r>
+              <a:rPr lang="en-US" altLang="ko-KR" dirty="0"/>
+              <a:t>.</a:t>
+            </a:r>
+          </a:p>
+        </p:txBody>
+      </p:sp>
+      <p:pic>
+        <p:nvPicPr>
+          <p:cNvPr id="6" name="그림 5">
+            <a:extLst>
+              <a:ext uri="{FF2B5EF4-FFF2-40B4-BE49-F238E27FC236}">
+                <a16:creationId xmlns:a16="http://schemas.microsoft.com/office/drawing/2014/main" id="{048A0B7B-D6B7-55EF-F9E4-3607956E6BB7}"/>
+              </a:ext>
+            </a:extLst>
+          </p:cNvPr>
+          <p:cNvPicPr>
+            <a:picLocks noChangeAspect="1"/>
+          </p:cNvPicPr>
+          <p:nvPr/>
+        </p:nvPicPr>
+        <p:blipFill>
+          <a:blip r:embed="rId2"/>
+          <a:stretch>
+            <a:fillRect/>
+          </a:stretch>
+        </p:blipFill>
+        <p:spPr>
+          <a:xfrm>
+            <a:off x="159773" y="2247697"/>
+            <a:ext cx="7025640" cy="2362605"/>
+          </a:xfrm>
+          <a:prstGeom prst="rect">
+            <a:avLst/>
+          </a:prstGeom>
+        </p:spPr>
+      </p:pic>
+    </p:spTree>
+    <p:extLst>
+      <p:ext uri="{BB962C8B-B14F-4D97-AF65-F5344CB8AC3E}">
+        <p14:creationId xmlns:p14="http://schemas.microsoft.com/office/powerpoint/2010/main" val="977256668"/>
+      </p:ext>
+    </p:extLst>
+  </p:cSld>
+  <p:clrMapOvr>
+    <a:masterClrMapping/>
+  </p:clrMapOvr>
+</p:sld>
+</file>
+
+<file path=ppt/slides/slide28.xml><?xml version="1.0" encoding="utf-8"?>
 <p:sld xmlns:a="http://schemas.openxmlformats.org/drawingml/2006/main" xmlns:r="http://schemas.openxmlformats.org/officeDocument/2006/relationships" xmlns:p="http://schemas.openxmlformats.org/presentationml/2006/main">
   <p:cSld>
     <p:spTree>
@@ -5808,6 +7131,342 @@
           </a:p>
         </p:txBody>
       </p:sp>
+      <p:sp>
+        <p:nvSpPr>
+          <p:cNvPr id="3" name="TextBox 2">
+            <a:extLst>
+              <a:ext uri="{FF2B5EF4-FFF2-40B4-BE49-F238E27FC236}">
+                <a16:creationId xmlns:a16="http://schemas.microsoft.com/office/drawing/2014/main" id="{AAD7D6DC-84FB-9AB3-5CDA-77D37639647D}"/>
+              </a:ext>
+            </a:extLst>
+          </p:cNvPr>
+          <p:cNvSpPr txBox="1"/>
+          <p:nvPr/>
+        </p:nvSpPr>
+        <p:spPr>
+          <a:xfrm>
+            <a:off x="0" y="868680"/>
+            <a:ext cx="10257936" cy="2308324"/>
+          </a:xfrm>
+          <a:prstGeom prst="rect">
+            <a:avLst/>
+          </a:prstGeom>
+          <a:noFill/>
+        </p:spPr>
+        <p:txBody>
+          <a:bodyPr wrap="none" rtlCol="0">
+            <a:spAutoFit/>
+          </a:bodyPr>
+          <a:lstStyle/>
+          <a:p>
+            <a:r>
+              <a:rPr lang="ko-KR" altLang="en-US" dirty="0"/>
+              <a:t>공간을 </a:t>
+            </a:r>
+            <a:r>
+              <a:rPr lang="ko-KR" altLang="en-US" dirty="0" err="1"/>
+              <a:t>청크로</a:t>
+            </a:r>
+            <a:r>
+              <a:rPr lang="ko-KR" altLang="en-US" dirty="0"/>
+              <a:t> 나누었다</a:t>
+            </a:r>
+            <a:r>
+              <a:rPr lang="en-US" altLang="ko-KR" dirty="0"/>
+              <a:t>.</a:t>
+            </a:r>
+          </a:p>
+          <a:p>
+            <a:r>
+              <a:rPr lang="en-US" altLang="ko-KR" dirty="0"/>
+              <a:t>&gt;&gt; </a:t>
+            </a:r>
+            <a:r>
+              <a:rPr lang="ko-KR" altLang="en-US" dirty="0"/>
+              <a:t>왜 나누었는가</a:t>
+            </a:r>
+            <a:r>
+              <a:rPr lang="en-US" altLang="ko-KR" dirty="0"/>
+              <a:t>?</a:t>
+            </a:r>
+          </a:p>
+          <a:p>
+            <a:r>
+              <a:rPr lang="en-US" altLang="ko-KR" dirty="0"/>
+              <a:t>1. Render</a:t>
+            </a:r>
+            <a:r>
+              <a:rPr lang="ko-KR" altLang="en-US" dirty="0"/>
+              <a:t>에서 오브젝트가 많아지더라도 뷰 </a:t>
+            </a:r>
+            <a:r>
+              <a:rPr lang="ko-KR" altLang="en-US" dirty="0" err="1"/>
+              <a:t>프러스텀</a:t>
+            </a:r>
+            <a:r>
+              <a:rPr lang="ko-KR" altLang="en-US" dirty="0"/>
+              <a:t> </a:t>
+            </a:r>
+            <a:r>
+              <a:rPr lang="ko-KR" altLang="en-US" dirty="0" err="1"/>
+              <a:t>컬링을</a:t>
+            </a:r>
+            <a:r>
+              <a:rPr lang="ko-KR" altLang="en-US" dirty="0"/>
+              <a:t> 빠르게 하고 싶었음</a:t>
+            </a:r>
+            <a:r>
+              <a:rPr lang="en-US" altLang="ko-KR" dirty="0"/>
+              <a:t>.</a:t>
+            </a:r>
+          </a:p>
+          <a:p>
+            <a:r>
+              <a:rPr lang="en-US" altLang="ko-KR" dirty="0"/>
+              <a:t>	</a:t>
+            </a:r>
+            <a:r>
+              <a:rPr lang="ko-KR" altLang="en-US" dirty="0"/>
+              <a:t>만약 </a:t>
+            </a:r>
+            <a:r>
+              <a:rPr lang="ko-KR" altLang="en-US" dirty="0" err="1"/>
+              <a:t>청크가</a:t>
+            </a:r>
+            <a:r>
+              <a:rPr lang="ko-KR" altLang="en-US" dirty="0"/>
+              <a:t> 없다면 오브젝트마다 </a:t>
+            </a:r>
+            <a:r>
+              <a:rPr lang="ko-KR" altLang="en-US" dirty="0" err="1"/>
+              <a:t>프러스텀에</a:t>
+            </a:r>
+            <a:r>
+              <a:rPr lang="ko-KR" altLang="en-US" dirty="0"/>
+              <a:t> 들어가는지 체크를 했어야 했음</a:t>
+            </a:r>
+            <a:r>
+              <a:rPr lang="en-US" altLang="ko-KR" dirty="0"/>
+              <a:t>.</a:t>
+            </a:r>
+          </a:p>
+          <a:p>
+            <a:r>
+              <a:rPr lang="en-US" altLang="ko-KR" dirty="0"/>
+              <a:t>2. </a:t>
+            </a:r>
+            <a:r>
+              <a:rPr lang="ko-KR" altLang="en-US" dirty="0"/>
+              <a:t>서버에서 충돌검사를 할 것을 염두에 두었다</a:t>
+            </a:r>
+            <a:r>
+              <a:rPr lang="en-US" altLang="ko-KR" dirty="0"/>
+              <a:t>. </a:t>
+            </a:r>
+            <a:r>
+              <a:rPr lang="ko-KR" altLang="en-US" dirty="0"/>
+              <a:t>충돌의 검사는 </a:t>
+            </a:r>
+            <a:r>
+              <a:rPr lang="en-US" altLang="ko-KR" dirty="0"/>
+              <a:t>O(N^2)</a:t>
+            </a:r>
+            <a:r>
+              <a:rPr lang="ko-KR" altLang="en-US" dirty="0"/>
+              <a:t>의 복잡도를 가지기 때문에</a:t>
+            </a:r>
+            <a:endParaRPr lang="en-US" altLang="ko-KR" dirty="0"/>
+          </a:p>
+          <a:p>
+            <a:r>
+              <a:rPr lang="en-US" altLang="ko-KR" dirty="0"/>
+              <a:t>	</a:t>
+            </a:r>
+            <a:r>
+              <a:rPr lang="ko-KR" altLang="en-US" dirty="0"/>
+              <a:t>작업을 잘게 분할을 하지 않으면 </a:t>
+            </a:r>
+            <a:r>
+              <a:rPr lang="en-US" altLang="ko-KR" dirty="0" err="1"/>
+              <a:t>cpu</a:t>
+            </a:r>
+            <a:r>
+              <a:rPr lang="en-US" altLang="ko-KR" dirty="0"/>
+              <a:t> </a:t>
+            </a:r>
+            <a:r>
+              <a:rPr lang="ko-KR" altLang="en-US" dirty="0"/>
+              <a:t>의 부담이 심해질 것 같았다</a:t>
+            </a:r>
+            <a:r>
+              <a:rPr lang="en-US" altLang="ko-KR" dirty="0"/>
+              <a:t>.</a:t>
+            </a:r>
+          </a:p>
+          <a:p>
+            <a:r>
+              <a:rPr lang="en-US" altLang="ko-KR" dirty="0"/>
+              <a:t>&gt;&gt; </a:t>
+            </a:r>
+            <a:r>
+              <a:rPr lang="ko-KR" altLang="en-US" dirty="0"/>
+              <a:t>때문에 기본적으로 모든 오브젝트들은 </a:t>
+            </a:r>
+            <a:r>
+              <a:rPr lang="en-US" altLang="ko-KR" dirty="0"/>
+              <a:t>Chunk </a:t>
+            </a:r>
+            <a:r>
+              <a:rPr lang="ko-KR" altLang="en-US" dirty="0"/>
+              <a:t>안에 있어야 했고</a:t>
+            </a:r>
+            <a:r>
+              <a:rPr lang="en-US" altLang="ko-KR" dirty="0"/>
+              <a:t>, </a:t>
+            </a:r>
+            <a:r>
+              <a:rPr lang="en-US" altLang="ko-KR" dirty="0" err="1"/>
+              <a:t>chunck</a:t>
+            </a:r>
+            <a:r>
+              <a:rPr lang="en-US" altLang="ko-KR" dirty="0"/>
+              <a:t> </a:t>
+            </a:r>
+            <a:r>
+              <a:rPr lang="ko-KR" altLang="en-US" dirty="0"/>
+              <a:t>안에 </a:t>
+            </a:r>
+            <a:endParaRPr lang="en-US" altLang="ko-KR" dirty="0"/>
+          </a:p>
+          <a:p>
+            <a:r>
+              <a:rPr lang="en-US" altLang="ko-KR" dirty="0" err="1"/>
+              <a:t>StaticObjectVecset</a:t>
+            </a:r>
+            <a:r>
+              <a:rPr lang="en-US" altLang="ko-KR" dirty="0"/>
+              <a:t>, </a:t>
+            </a:r>
+            <a:r>
+              <a:rPr lang="en-US" altLang="ko-KR" dirty="0" err="1"/>
+              <a:t>DynamicObjectVecset</a:t>
+            </a:r>
+            <a:r>
+              <a:rPr lang="en-US" altLang="ko-KR" dirty="0"/>
+              <a:t>, </a:t>
+            </a:r>
+            <a:r>
+              <a:rPr lang="en-US" altLang="ko-KR" dirty="0" err="1"/>
+              <a:t>SkinMeshObjectVecset</a:t>
+            </a:r>
+            <a:r>
+              <a:rPr lang="ko-KR" altLang="en-US" dirty="0"/>
+              <a:t>을 분리하여 저장한다</a:t>
+            </a:r>
+            <a:r>
+              <a:rPr lang="en-US" altLang="ko-KR" dirty="0"/>
+              <a:t>.</a:t>
+            </a:r>
+          </a:p>
+        </p:txBody>
+      </p:sp>
+      <mc:AlternateContent xmlns:mc="http://schemas.openxmlformats.org/markup-compatibility/2006">
+        <mc:Choice xmlns:pslz="http://schemas.microsoft.com/office/powerpoint/2016/slidezoom" Requires="pslz">
+          <p:graphicFrame>
+            <p:nvGraphicFramePr>
+              <p:cNvPr id="5" name="슬라이드 확대/축소 4">
+                <a:extLst>
+                  <a:ext uri="{FF2B5EF4-FFF2-40B4-BE49-F238E27FC236}">
+                    <a16:creationId xmlns:a16="http://schemas.microsoft.com/office/drawing/2014/main" id="{A32FD096-4D7D-DA8D-5C6D-B259A786D223}"/>
+                  </a:ext>
+                </a:extLst>
+              </p:cNvPr>
+              <p:cNvGraphicFramePr>
+                <a:graphicFrameLocks noChangeAspect="1"/>
+              </p:cNvGraphicFramePr>
+              <p:nvPr>
+                <p:extLst>
+                  <p:ext uri="{D42A27DB-BD31-4B8C-83A1-F6EECF244321}">
+                    <p14:modId xmlns:p14="http://schemas.microsoft.com/office/powerpoint/2010/main" val="331875436"/>
+                  </p:ext>
+                </p:extLst>
+              </p:nvPr>
+            </p:nvGraphicFramePr>
+            <p:xfrm>
+              <a:off x="176980" y="3177004"/>
+              <a:ext cx="6235507" cy="3507473"/>
+            </p:xfrm>
+            <a:graphic>
+              <a:graphicData uri="http://schemas.microsoft.com/office/powerpoint/2016/slidezoom">
+                <pslz:sldZm>
+                  <pslz:sldZmObj sldId="284" cId="1005892815">
+                    <pslz:zmPr id="{FE25BFE4-38C9-478C-8B0E-F498B0B711D0}" returnToParent="0" transitionDur="1000">
+                      <p166:blipFill xmlns:p166="http://schemas.microsoft.com/office/powerpoint/2016/6/main">
+                        <a:blip r:embed="rId2"/>
+                        <a:stretch>
+                          <a:fillRect/>
+                        </a:stretch>
+                      </p166:blipFill>
+                      <p166:spPr xmlns:p166="http://schemas.microsoft.com/office/powerpoint/2016/6/main">
+                        <a:xfrm>
+                          <a:off x="0" y="0"/>
+                          <a:ext cx="6235507" cy="3507473"/>
+                        </a:xfrm>
+                        <a:prstGeom prst="rect">
+                          <a:avLst/>
+                        </a:prstGeom>
+                        <a:ln w="3175">
+                          <a:solidFill>
+                            <a:prstClr val="ltGray"/>
+                          </a:solidFill>
+                        </a:ln>
+                      </p166:spPr>
+                    </pslz:zmPr>
+                  </pslz:sldZmObj>
+                </pslz:sldZm>
+              </a:graphicData>
+            </a:graphic>
+          </p:graphicFrame>
+        </mc:Choice>
+        <mc:Fallback>
+          <p:pic>
+            <p:nvPicPr>
+              <p:cNvPr id="5" name="슬라이드 확대/축소 4">
+                <a:hlinkClick r:id="rId3" action="ppaction://hlinksldjump"/>
+                <a:extLst>
+                  <a:ext uri="{FF2B5EF4-FFF2-40B4-BE49-F238E27FC236}">
+                    <a16:creationId xmlns:a16="http://schemas.microsoft.com/office/drawing/2014/main" id="{A32FD096-4D7D-DA8D-5C6D-B259A786D223}"/>
+                  </a:ext>
+                </a:extLst>
+              </p:cNvPr>
+              <p:cNvPicPr>
+                <a:picLocks noGrp="1" noRot="1" noChangeAspect="1" noMove="1" noResize="1" noEditPoints="1" noAdjustHandles="1" noChangeArrowheads="1" noChangeShapeType="1"/>
+              </p:cNvPicPr>
+              <p:nvPr/>
+            </p:nvPicPr>
+            <p:blipFill>
+              <a:blip r:embed="rId2"/>
+              <a:stretch>
+                <a:fillRect/>
+              </a:stretch>
+            </p:blipFill>
+            <p:spPr>
+              <a:xfrm>
+                <a:off x="176980" y="3177004"/>
+                <a:ext cx="6235507" cy="3507473"/>
+              </a:xfrm>
+              <a:prstGeom prst="rect">
+                <a:avLst/>
+              </a:prstGeom>
+              <a:ln w="3175">
+                <a:solidFill>
+                  <a:prstClr val="ltGray"/>
+                </a:solidFill>
+              </a:ln>
+            </p:spPr>
+          </p:pic>
+        </mc:Fallback>
+      </mc:AlternateContent>
     </p:spTree>
     <p:extLst>
       <p:ext uri="{BB962C8B-B14F-4D97-AF65-F5344CB8AC3E}">
@@ -5821,7 +7480,7 @@
 </p:sld>
 </file>
 
-<file path=ppt/slides/slide27.xml><?xml version="1.0" encoding="utf-8"?>
+<file path=ppt/slides/slide29.xml><?xml version="1.0" encoding="utf-8"?>
 <p:sld xmlns:a="http://schemas.openxmlformats.org/drawingml/2006/main" xmlns:r="http://schemas.openxmlformats.org/officeDocument/2006/relationships" xmlns:p="http://schemas.openxmlformats.org/presentationml/2006/main">
   <p:cSld>
     <p:spTree>
@@ -5829,7 +7488,7 @@
         <p:cNvPr id="1" name="">
           <a:extLst>
             <a:ext uri="{FF2B5EF4-FFF2-40B4-BE49-F238E27FC236}">
-              <a16:creationId xmlns:a16="http://schemas.microsoft.com/office/drawing/2014/main" id="{E50CB74A-4402-F9C6-688E-EB4955211B46}"/>
+              <a16:creationId xmlns:a16="http://schemas.microsoft.com/office/drawing/2014/main" id="{599985CC-4D03-1292-E226-C319E963240D}"/>
             </a:ext>
           </a:extLst>
         </p:cNvPr>
@@ -5849,7 +7508,7 @@
           <p:cNvPr id="2" name="제목 1">
             <a:extLst>
               <a:ext uri="{FF2B5EF4-FFF2-40B4-BE49-F238E27FC236}">
-                <a16:creationId xmlns:a16="http://schemas.microsoft.com/office/drawing/2014/main" id="{5A8DA8AC-A393-9337-7348-EFCF4D458A04}"/>
+                <a16:creationId xmlns:a16="http://schemas.microsoft.com/office/drawing/2014/main" id="{350DCC37-3080-F4E8-AA7B-4FF66D6E925E}"/>
               </a:ext>
             </a:extLst>
           </p:cNvPr>
@@ -5873,17 +7532,331 @@
           <a:lstStyle/>
           <a:p>
             <a:r>
-              <a:rPr lang="en-US" altLang="ko-KR" sz="5400" dirty="0"/>
-              <a:t>TimeLine</a:t>
-            </a:r>
-            <a:endParaRPr lang="ko-KR" altLang="en-US" sz="5400" dirty="0"/>
-          </a:p>
-        </p:txBody>
-      </p:sp>
+              <a:rPr lang="en-US" altLang="ko-KR" sz="5400" dirty="0" err="1"/>
+              <a:t>Chunck</a:t>
+            </a:r>
+            <a:r>
+              <a:rPr lang="ko-KR" altLang="en-US" sz="5400" dirty="0"/>
+              <a:t>의 문제점과 해결</a:t>
+            </a:r>
+          </a:p>
+        </p:txBody>
+      </p:sp>
+      <p:sp>
+        <p:nvSpPr>
+          <p:cNvPr id="4" name="TextBox 3">
+            <a:extLst>
+              <a:ext uri="{FF2B5EF4-FFF2-40B4-BE49-F238E27FC236}">
+                <a16:creationId xmlns:a16="http://schemas.microsoft.com/office/drawing/2014/main" id="{FB24A892-2A66-07AB-B5AA-3F07562002E2}"/>
+              </a:ext>
+            </a:extLst>
+          </p:cNvPr>
+          <p:cNvSpPr txBox="1"/>
+          <p:nvPr/>
+        </p:nvSpPr>
+        <p:spPr>
+          <a:xfrm>
+            <a:off x="1" y="868680"/>
+            <a:ext cx="12090400" cy="2308324"/>
+          </a:xfrm>
+          <a:prstGeom prst="rect">
+            <a:avLst/>
+          </a:prstGeom>
+          <a:noFill/>
+        </p:spPr>
+        <p:txBody>
+          <a:bodyPr wrap="square" rtlCol="0">
+            <a:spAutoFit/>
+          </a:bodyPr>
+          <a:lstStyle/>
+          <a:p>
+            <a:r>
+              <a:rPr lang="ko-KR" altLang="en-US" dirty="0"/>
+              <a:t>다만 특정 오브젝트는 여러 </a:t>
+            </a:r>
+            <a:r>
+              <a:rPr lang="ko-KR" altLang="en-US" dirty="0" err="1"/>
+              <a:t>청크에</a:t>
+            </a:r>
+            <a:r>
+              <a:rPr lang="ko-KR" altLang="en-US" dirty="0"/>
+              <a:t> 속해 있을 수 있다</a:t>
+            </a:r>
+            <a:r>
+              <a:rPr lang="en-US" altLang="ko-KR" dirty="0"/>
+              <a:t>. (</a:t>
+            </a:r>
+            <a:r>
+              <a:rPr lang="ko-KR" altLang="en-US" dirty="0"/>
+              <a:t>중간에 걸친 경우</a:t>
+            </a:r>
+            <a:r>
+              <a:rPr lang="en-US" altLang="ko-KR" dirty="0"/>
+              <a:t>)</a:t>
+            </a:r>
+          </a:p>
+          <a:p>
+            <a:r>
+              <a:rPr lang="ko-KR" altLang="en-US" dirty="0"/>
+              <a:t>이럴 경우 오브젝트의 일부를 포함하는 모든 </a:t>
+            </a:r>
+            <a:r>
+              <a:rPr lang="ko-KR" altLang="en-US" dirty="0" err="1"/>
+              <a:t>청크들의</a:t>
+            </a:r>
+            <a:r>
+              <a:rPr lang="ko-KR" altLang="en-US" dirty="0"/>
+              <a:t> </a:t>
+            </a:r>
+            <a:r>
+              <a:rPr lang="en-US" altLang="ko-KR" dirty="0" err="1"/>
+              <a:t>vecset</a:t>
+            </a:r>
+            <a:r>
+              <a:rPr lang="ko-KR" altLang="en-US" dirty="0"/>
+              <a:t>에 해당 오브젝트가 들어가게 된다</a:t>
+            </a:r>
+            <a:r>
+              <a:rPr lang="en-US" altLang="ko-KR" dirty="0"/>
+              <a:t>.</a:t>
+            </a:r>
+          </a:p>
+          <a:p>
+            <a:r>
+              <a:rPr lang="ko-KR" altLang="en-US" dirty="0"/>
+              <a:t>다만 이럴 경우 여러 문제가 생기는데</a:t>
+            </a:r>
+            <a:r>
+              <a:rPr lang="en-US" altLang="ko-KR" dirty="0"/>
+              <a:t>, </a:t>
+            </a:r>
+            <a:r>
+              <a:rPr lang="ko-KR" altLang="en-US" dirty="0"/>
+              <a:t>그것은 다음과 같다</a:t>
+            </a:r>
+            <a:r>
+              <a:rPr lang="en-US" altLang="ko-KR" dirty="0"/>
+              <a:t>.</a:t>
+            </a:r>
+          </a:p>
+          <a:p>
+            <a:pPr marL="342900" indent="-342900">
+              <a:buAutoNum type="arabicPeriod"/>
+            </a:pPr>
+            <a:r>
+              <a:rPr lang="ko-KR" altLang="en-US" dirty="0"/>
+              <a:t>오브젝트마다 한번씩 </a:t>
+            </a:r>
+            <a:r>
+              <a:rPr lang="en-US" altLang="ko-KR" dirty="0"/>
+              <a:t>Update</a:t>
+            </a:r>
+            <a:r>
+              <a:rPr lang="ko-KR" altLang="en-US" dirty="0"/>
+              <a:t>나 </a:t>
+            </a:r>
+            <a:r>
+              <a:rPr lang="en-US" altLang="ko-KR" dirty="0"/>
+              <a:t>Render</a:t>
+            </a:r>
+            <a:r>
+              <a:rPr lang="ko-KR" altLang="en-US" dirty="0"/>
+              <a:t>를 수행해야 </a:t>
+            </a:r>
+            <a:r>
+              <a:rPr lang="ko-KR" altLang="en-US" dirty="0" err="1"/>
+              <a:t>할때는</a:t>
+            </a:r>
+            <a:r>
+              <a:rPr lang="ko-KR" altLang="en-US" dirty="0"/>
+              <a:t> 어떻게 하는가</a:t>
+            </a:r>
+            <a:r>
+              <a:rPr lang="en-US" altLang="ko-KR" dirty="0"/>
+              <a:t>? </a:t>
+            </a:r>
+            <a:r>
+              <a:rPr lang="ko-KR" altLang="en-US" dirty="0"/>
+              <a:t>그럴 때마다 각자가 이미 해당 동작을</a:t>
+            </a:r>
+            <a:r>
+              <a:rPr lang="en-US" altLang="ko-KR" dirty="0"/>
+              <a:t> </a:t>
+            </a:r>
+            <a:r>
+              <a:rPr lang="ko-KR" altLang="en-US" dirty="0"/>
+              <a:t>수행했다는 표시를 해야 하는데</a:t>
+            </a:r>
+            <a:r>
+              <a:rPr lang="en-US" altLang="ko-KR" dirty="0"/>
+              <a:t>, </a:t>
+            </a:r>
+            <a:r>
+              <a:rPr lang="ko-KR" altLang="en-US" dirty="0"/>
+              <a:t>어디에 어떻게 할 것인가</a:t>
+            </a:r>
+            <a:endParaRPr lang="en-US" altLang="ko-KR" dirty="0"/>
+          </a:p>
+          <a:p>
+            <a:pPr marL="342900" indent="-342900">
+              <a:buAutoNum type="arabicPeriod"/>
+            </a:pPr>
+            <a:r>
+              <a:rPr lang="ko-KR" altLang="en-US" dirty="0"/>
+              <a:t>해당 오브젝트가 이동을 하게 된다면</a:t>
+            </a:r>
+            <a:r>
+              <a:rPr lang="en-US" altLang="ko-KR" dirty="0"/>
+              <a:t>, </a:t>
+            </a:r>
+            <a:r>
+              <a:rPr lang="ko-KR" altLang="en-US" dirty="0" err="1"/>
+              <a:t>청크에서</a:t>
+            </a:r>
+            <a:r>
+              <a:rPr lang="ko-KR" altLang="en-US" dirty="0"/>
+              <a:t> 해당 오브젝트가 빠져나가야 한다</a:t>
+            </a:r>
+            <a:r>
+              <a:rPr lang="en-US" altLang="ko-KR" dirty="0"/>
+              <a:t>. </a:t>
+            </a:r>
+            <a:r>
+              <a:rPr lang="ko-KR" altLang="en-US" dirty="0"/>
+              <a:t>그러나 </a:t>
+            </a:r>
+            <a:r>
+              <a:rPr lang="en-US" altLang="ko-KR" dirty="0" err="1"/>
+              <a:t>vecset</a:t>
+            </a:r>
+            <a:r>
+              <a:rPr lang="ko-KR" altLang="en-US" dirty="0"/>
+              <a:t>은 해당 오브젝트가 자신이 어떤 인덱스를 가지고 있었는지 기억해야만 </a:t>
+            </a:r>
+            <a:r>
+              <a:rPr lang="en-US" altLang="ko-KR" dirty="0"/>
+              <a:t>Free</a:t>
+            </a:r>
+            <a:r>
+              <a:rPr lang="ko-KR" altLang="en-US" dirty="0"/>
+              <a:t>를 할 수 있었다</a:t>
+            </a:r>
+            <a:r>
+              <a:rPr lang="en-US" altLang="ko-KR" dirty="0"/>
+              <a:t>. </a:t>
+            </a:r>
+            <a:r>
+              <a:rPr lang="ko-KR" altLang="en-US" dirty="0"/>
+              <a:t>그럼 어떻게 이동을 정상적으로 처리할 수 있겠는가</a:t>
+            </a:r>
+            <a:r>
+              <a:rPr lang="en-US" altLang="ko-KR" dirty="0"/>
+              <a:t>?</a:t>
+            </a:r>
+          </a:p>
+        </p:txBody>
+      </p:sp>
+      <mc:AlternateContent xmlns:mc="http://schemas.openxmlformats.org/markup-compatibility/2006">
+        <mc:Choice xmlns:pslz="http://schemas.microsoft.com/office/powerpoint/2016/slidezoom" Requires="pslz">
+          <p:graphicFrame>
+            <p:nvGraphicFramePr>
+              <p:cNvPr id="6" name="슬라이드 확대/축소 5">
+                <a:extLst>
+                  <a:ext uri="{FF2B5EF4-FFF2-40B4-BE49-F238E27FC236}">
+                    <a16:creationId xmlns:a16="http://schemas.microsoft.com/office/drawing/2014/main" id="{0354CA0C-3B8C-BF9F-4B32-34158CC93393}"/>
+                  </a:ext>
+                </a:extLst>
+              </p:cNvPr>
+              <p:cNvGraphicFramePr>
+                <a:graphicFrameLocks noChangeAspect="1"/>
+              </p:cNvGraphicFramePr>
+              <p:nvPr>
+                <p:extLst>
+                  <p:ext uri="{D42A27DB-BD31-4B8C-83A1-F6EECF244321}">
+                    <p14:modId xmlns:p14="http://schemas.microsoft.com/office/powerpoint/2010/main" val="2554558329"/>
+                  </p:ext>
+                </p:extLst>
+              </p:nvPr>
+            </p:nvGraphicFramePr>
+            <p:xfrm>
+              <a:off x="101599" y="3177004"/>
+              <a:ext cx="6381135" cy="3589388"/>
+            </p:xfrm>
+            <a:graphic>
+              <a:graphicData uri="http://schemas.microsoft.com/office/powerpoint/2016/slidezoom">
+                <pslz:sldZm>
+                  <pslz:sldZmObj sldId="285" cId="1008121533">
+                    <pslz:zmPr id="{1F90038D-034A-4EAB-AB1E-5F294533117C}" returnToParent="0" transitionDur="1000">
+                      <p166:blipFill xmlns:p166="http://schemas.microsoft.com/office/powerpoint/2016/6/main">
+                        <a:blip r:embed="rId2"/>
+                        <a:stretch>
+                          <a:fillRect/>
+                        </a:stretch>
+                      </p166:blipFill>
+                      <p166:spPr xmlns:p166="http://schemas.microsoft.com/office/powerpoint/2016/6/main">
+                        <a:xfrm>
+                          <a:off x="0" y="0"/>
+                          <a:ext cx="6381135" cy="3589388"/>
+                        </a:xfrm>
+                        <a:prstGeom prst="rect">
+                          <a:avLst/>
+                        </a:prstGeom>
+                        <a:ln w="3175">
+                          <a:solidFill>
+                            <a:prstClr val="ltGray"/>
+                          </a:solidFill>
+                        </a:ln>
+                      </p166:spPr>
+                    </pslz:zmPr>
+                  </pslz:sldZmObj>
+                </pslz:sldZm>
+              </a:graphicData>
+            </a:graphic>
+          </p:graphicFrame>
+        </mc:Choice>
+        <mc:Fallback>
+          <p:pic>
+            <p:nvPicPr>
+              <p:cNvPr id="6" name="슬라이드 확대/축소 5">
+                <a:hlinkClick r:id="rId3" action="ppaction://hlinksldjump"/>
+                <a:extLst>
+                  <a:ext uri="{FF2B5EF4-FFF2-40B4-BE49-F238E27FC236}">
+                    <a16:creationId xmlns:a16="http://schemas.microsoft.com/office/drawing/2014/main" id="{0354CA0C-3B8C-BF9F-4B32-34158CC93393}"/>
+                  </a:ext>
+                </a:extLst>
+              </p:cNvPr>
+              <p:cNvPicPr>
+                <a:picLocks noGrp="1" noRot="1" noChangeAspect="1" noMove="1" noResize="1" noEditPoints="1" noAdjustHandles="1" noChangeArrowheads="1" noChangeShapeType="1"/>
+              </p:cNvPicPr>
+              <p:nvPr/>
+            </p:nvPicPr>
+            <p:blipFill>
+              <a:blip r:embed="rId2"/>
+              <a:stretch>
+                <a:fillRect/>
+              </a:stretch>
+            </p:blipFill>
+            <p:spPr>
+              <a:xfrm>
+                <a:off x="101599" y="3177004"/>
+                <a:ext cx="6381135" cy="3589388"/>
+              </a:xfrm>
+              <a:prstGeom prst="rect">
+                <a:avLst/>
+              </a:prstGeom>
+              <a:ln w="3175">
+                <a:solidFill>
+                  <a:prstClr val="ltGray"/>
+                </a:solidFill>
+              </a:ln>
+            </p:spPr>
+          </p:pic>
+        </mc:Fallback>
+      </mc:AlternateContent>
     </p:spTree>
     <p:extLst>
       <p:ext uri="{BB962C8B-B14F-4D97-AF65-F5344CB8AC3E}">
-        <p14:creationId xmlns:p14="http://schemas.microsoft.com/office/powerpoint/2010/main" val="3849585021"/>
+        <p14:creationId xmlns:p14="http://schemas.microsoft.com/office/powerpoint/2010/main" val="1005892815"/>
       </p:ext>
     </p:extLst>
   </p:cSld>
@@ -5946,8 +7919,8 @@
           </a:p>
         </p:txBody>
       </p:sp>
-      <mc:AlternateContent xmlns:mc="http://schemas.openxmlformats.org/markup-compatibility/2006">
-        <mc:Choice xmlns:pslz="http://schemas.microsoft.com/office/powerpoint/2016/slidezoom" Requires="pslz">
+      <mc:AlternateContent xmlns:mc="http://schemas.openxmlformats.org/markup-compatibility/2006" xmlns:pslz="http://schemas.microsoft.com/office/powerpoint/2016/slidezoom">
+        <mc:Choice Requires="pslz">
           <p:graphicFrame>
             <p:nvGraphicFramePr>
               <p:cNvPr id="5" name="슬라이드 확대/축소 4">
@@ -6004,7 +7977,7 @@
             </a:graphic>
           </p:graphicFrame>
         </mc:Choice>
-        <mc:Fallback>
+        <mc:Fallback xmlns="">
           <p:pic>
             <p:nvPicPr>
               <p:cNvPr id="5" name="슬라이드 확대/축소 4">
@@ -6021,7 +7994,7 @@
               <p:nvPr/>
             </p:nvPicPr>
             <p:blipFill>
-              <a:blip r:embed="rId2"/>
+              <a:blip r:embed="rId4"/>
               <a:stretch>
                 <a:fillRect/>
               </a:stretch>
@@ -6043,8 +8016,8 @@
           </p:pic>
         </mc:Fallback>
       </mc:AlternateContent>
-      <mc:AlternateContent xmlns:mc="http://schemas.openxmlformats.org/markup-compatibility/2006">
-        <mc:Choice xmlns:pslz="http://schemas.microsoft.com/office/powerpoint/2016/slidezoom" Requires="pslz">
+      <mc:AlternateContent xmlns:mc="http://schemas.openxmlformats.org/markup-compatibility/2006" xmlns:pslz="http://schemas.microsoft.com/office/powerpoint/2016/slidezoom">
+        <mc:Choice Requires="pslz">
           <p:graphicFrame>
             <p:nvGraphicFramePr>
               <p:cNvPr id="7" name="슬라이드 확대/축소 6">
@@ -6075,7 +8048,7 @@
                   <pslz:sldZmObj sldId="262" cId="1872162543">
                     <pslz:zmPr id="{BDC9DA41-B291-4C0C-B1ED-02A85E5FF9C0}" returnToParent="0" transitionDur="1000">
                       <p166:blipFill xmlns:p166="http://schemas.microsoft.com/office/powerpoint/2016/6/main">
-                        <a:blip r:embed="rId4"/>
+                        <a:blip r:embed="rId5"/>
                         <a:stretch>
                           <a:fillRect/>
                         </a:stretch>
@@ -6101,11 +8074,11 @@
             </a:graphic>
           </p:graphicFrame>
         </mc:Choice>
-        <mc:Fallback>
+        <mc:Fallback xmlns="">
           <p:pic>
             <p:nvPicPr>
               <p:cNvPr id="7" name="슬라이드 확대/축소 6">
-                <a:hlinkClick r:id="rId5" action="ppaction://hlinksldjump"/>
+                <a:hlinkClick r:id="rId6" action="ppaction://hlinksldjump"/>
                 <a:extLst>
                   <a:ext uri="{FF2B5EF4-FFF2-40B4-BE49-F238E27FC236}">
                     <a16:creationId xmlns:a16="http://schemas.microsoft.com/office/drawing/2014/main" id="{5C497EDE-4B29-D25D-0F65-A42F6799D2DD}"/>
@@ -6118,7 +8091,7 @@
               <p:nvPr/>
             </p:nvPicPr>
             <p:blipFill>
-              <a:blip r:embed="rId4"/>
+              <a:blip r:embed="rId7"/>
               <a:stretch>
                 <a:fillRect/>
               </a:stretch>
@@ -6189,6 +8162,558 @@
     <p:extLst>
       <p:ext uri="{BB962C8B-B14F-4D97-AF65-F5344CB8AC3E}">
         <p14:creationId xmlns:p14="http://schemas.microsoft.com/office/powerpoint/2010/main" val="1942532360"/>
+      </p:ext>
+    </p:extLst>
+  </p:cSld>
+  <p:clrMapOvr>
+    <a:masterClrMapping/>
+  </p:clrMapOvr>
+</p:sld>
+</file>
+
+<file path=ppt/slides/slide30.xml><?xml version="1.0" encoding="utf-8"?>
+<p:sld xmlns:a="http://schemas.openxmlformats.org/drawingml/2006/main" xmlns:r="http://schemas.openxmlformats.org/officeDocument/2006/relationships" xmlns:p="http://schemas.openxmlformats.org/presentationml/2006/main">
+  <p:cSld>
+    <p:spTree>
+      <p:nvGrpSpPr>
+        <p:cNvPr id="1" name="">
+          <a:extLst>
+            <a:ext uri="{FF2B5EF4-FFF2-40B4-BE49-F238E27FC236}">
+              <a16:creationId xmlns:a16="http://schemas.microsoft.com/office/drawing/2014/main" id="{B038583A-7194-4E96-4BF8-C3EB893F3FC1}"/>
+            </a:ext>
+          </a:extLst>
+        </p:cNvPr>
+        <p:cNvGrpSpPr/>
+        <p:nvPr/>
+      </p:nvGrpSpPr>
+      <p:grpSpPr>
+        <a:xfrm>
+          <a:off x="0" y="0"/>
+          <a:ext cx="0" cy="0"/>
+          <a:chOff x="0" y="0"/>
+          <a:chExt cx="0" cy="0"/>
+        </a:xfrm>
+      </p:grpSpPr>
+      <p:sp>
+        <p:nvSpPr>
+          <p:cNvPr id="2" name="제목 1">
+            <a:extLst>
+              <a:ext uri="{FF2B5EF4-FFF2-40B4-BE49-F238E27FC236}">
+                <a16:creationId xmlns:a16="http://schemas.microsoft.com/office/drawing/2014/main" id="{A6F28DFD-DCCC-E85F-7428-B796C9192ADA}"/>
+              </a:ext>
+            </a:extLst>
+          </p:cNvPr>
+          <p:cNvSpPr>
+            <a:spLocks noGrp="1"/>
+          </p:cNvSpPr>
+          <p:nvPr>
+            <p:ph type="title"/>
+          </p:nvPr>
+        </p:nvSpPr>
+        <p:spPr>
+          <a:xfrm>
+            <a:off x="-1" y="18255"/>
+            <a:ext cx="12309987" cy="850425"/>
+          </a:xfrm>
+        </p:spPr>
+        <p:txBody>
+          <a:bodyPr>
+            <a:normAutofit fontScale="90000"/>
+          </a:bodyPr>
+          <a:lstStyle/>
+          <a:p>
+            <a:r>
+              <a:rPr lang="en-US" altLang="ko-KR" sz="5400" dirty="0" err="1"/>
+              <a:t>Chunck</a:t>
+            </a:r>
+            <a:r>
+              <a:rPr lang="ko-KR" altLang="en-US" sz="5400" dirty="0"/>
+              <a:t>에 들어가기 위한 </a:t>
+            </a:r>
+            <a:r>
+              <a:rPr lang="en-US" altLang="ko-KR" sz="5400" dirty="0" err="1"/>
+              <a:t>GameObject</a:t>
+            </a:r>
+            <a:r>
+              <a:rPr lang="en-US" altLang="ko-KR" sz="5400" dirty="0"/>
+              <a:t> </a:t>
+            </a:r>
+            <a:r>
+              <a:rPr lang="ko-KR" altLang="en-US" sz="5400" dirty="0"/>
+              <a:t>구조</a:t>
+            </a:r>
+          </a:p>
+        </p:txBody>
+      </p:sp>
+      <p:sp>
+        <p:nvSpPr>
+          <p:cNvPr id="4" name="TextBox 3">
+            <a:extLst>
+              <a:ext uri="{FF2B5EF4-FFF2-40B4-BE49-F238E27FC236}">
+                <a16:creationId xmlns:a16="http://schemas.microsoft.com/office/drawing/2014/main" id="{1808B6FB-BE27-2E62-CE2E-7CF75573670C}"/>
+              </a:ext>
+            </a:extLst>
+          </p:cNvPr>
+          <p:cNvSpPr txBox="1"/>
+          <p:nvPr/>
+        </p:nvSpPr>
+        <p:spPr>
+          <a:xfrm>
+            <a:off x="1" y="868680"/>
+            <a:ext cx="12090400" cy="369332"/>
+          </a:xfrm>
+          <a:prstGeom prst="rect">
+            <a:avLst/>
+          </a:prstGeom>
+          <a:noFill/>
+        </p:spPr>
+        <p:txBody>
+          <a:bodyPr wrap="square" rtlCol="0">
+            <a:spAutoFit/>
+          </a:bodyPr>
+          <a:lstStyle/>
+          <a:p>
+            <a:r>
+              <a:rPr lang="ko-KR" altLang="en-US" dirty="0"/>
+              <a:t>그것은 다음과 같은 </a:t>
+            </a:r>
+            <a:r>
+              <a:rPr lang="en-US" altLang="ko-KR" dirty="0" err="1"/>
+              <a:t>GameObject</a:t>
+            </a:r>
+            <a:r>
+              <a:rPr lang="en-US" altLang="ko-KR" dirty="0"/>
+              <a:t> </a:t>
+            </a:r>
+            <a:r>
+              <a:rPr lang="ko-KR" altLang="en-US" dirty="0"/>
+              <a:t>구조로 해결한다</a:t>
+            </a:r>
+            <a:r>
+              <a:rPr lang="en-US" altLang="ko-KR" dirty="0"/>
+              <a:t>.</a:t>
+            </a:r>
+          </a:p>
+        </p:txBody>
+      </p:sp>
+      <p:pic>
+        <p:nvPicPr>
+          <p:cNvPr id="5" name="그림 4">
+            <a:extLst>
+              <a:ext uri="{FF2B5EF4-FFF2-40B4-BE49-F238E27FC236}">
+                <a16:creationId xmlns:a16="http://schemas.microsoft.com/office/drawing/2014/main" id="{13325B53-DC7C-5E0F-193E-47B984BD604A}"/>
+              </a:ext>
+            </a:extLst>
+          </p:cNvPr>
+          <p:cNvPicPr>
+            <a:picLocks noChangeAspect="1"/>
+          </p:cNvPicPr>
+          <p:nvPr/>
+        </p:nvPicPr>
+        <p:blipFill>
+          <a:blip r:embed="rId2"/>
+          <a:stretch>
+            <a:fillRect/>
+          </a:stretch>
+        </p:blipFill>
+        <p:spPr>
+          <a:xfrm>
+            <a:off x="101599" y="1238012"/>
+            <a:ext cx="8209281" cy="3128402"/>
+          </a:xfrm>
+          <a:prstGeom prst="rect">
+            <a:avLst/>
+          </a:prstGeom>
+        </p:spPr>
+      </p:pic>
+      <p:sp>
+        <p:nvSpPr>
+          <p:cNvPr id="6" name="TextBox 5">
+            <a:extLst>
+              <a:ext uri="{FF2B5EF4-FFF2-40B4-BE49-F238E27FC236}">
+                <a16:creationId xmlns:a16="http://schemas.microsoft.com/office/drawing/2014/main" id="{F85F6586-A141-DF33-A5D4-18BFC127592F}"/>
+              </a:ext>
+            </a:extLst>
+          </p:cNvPr>
+          <p:cNvSpPr txBox="1"/>
+          <p:nvPr/>
+        </p:nvSpPr>
+        <p:spPr>
+          <a:xfrm>
+            <a:off x="0" y="4366414"/>
+            <a:ext cx="9737025" cy="738664"/>
+          </a:xfrm>
+          <a:prstGeom prst="rect">
+            <a:avLst/>
+          </a:prstGeom>
+          <a:noFill/>
+        </p:spPr>
+        <p:txBody>
+          <a:bodyPr wrap="none" rtlCol="0">
+            <a:spAutoFit/>
+          </a:bodyPr>
+          <a:lstStyle/>
+          <a:p>
+            <a:r>
+              <a:rPr lang="en-US" altLang="ko-KR" sz="1400" dirty="0" err="1"/>
+              <a:t>TourID</a:t>
+            </a:r>
+            <a:r>
+              <a:rPr lang="en-US" altLang="ko-KR" sz="1400" dirty="0"/>
+              <a:t> : </a:t>
+            </a:r>
+            <a:r>
+              <a:rPr lang="ko-KR" altLang="en-US" sz="1400" dirty="0"/>
+              <a:t>해당 작업에 하나의</a:t>
+            </a:r>
+            <a:r>
+              <a:rPr lang="en-US" altLang="ko-KR" sz="1400" dirty="0"/>
+              <a:t> </a:t>
+            </a:r>
+            <a:r>
+              <a:rPr lang="en-US" altLang="ko-KR" sz="1400" dirty="0" err="1"/>
+              <a:t>TourID</a:t>
+            </a:r>
+            <a:r>
+              <a:rPr lang="ko-KR" altLang="en-US" sz="1400" dirty="0"/>
+              <a:t>를 </a:t>
+            </a:r>
+            <a:r>
+              <a:rPr lang="ko-KR" altLang="en-US" sz="1400" dirty="0" err="1"/>
+              <a:t>할당받는다</a:t>
+            </a:r>
+            <a:r>
+              <a:rPr lang="en-US" altLang="ko-KR" sz="1400" dirty="0"/>
+              <a:t>. </a:t>
+            </a:r>
+            <a:r>
+              <a:rPr lang="ko-KR" altLang="en-US" sz="1400" dirty="0"/>
+              <a:t>그리고 만약 해당 작업의 </a:t>
+            </a:r>
+            <a:r>
+              <a:rPr lang="en-US" altLang="ko-KR" sz="1400" dirty="0" err="1"/>
+              <a:t>TourID</a:t>
+            </a:r>
+            <a:r>
+              <a:rPr lang="ko-KR" altLang="en-US" sz="1400" dirty="0"/>
+              <a:t>와 오브젝트의 </a:t>
+            </a:r>
+            <a:r>
+              <a:rPr lang="en-US" altLang="ko-KR" sz="1400" dirty="0" err="1"/>
+              <a:t>TourID</a:t>
+            </a:r>
+            <a:r>
+              <a:rPr lang="ko-KR" altLang="en-US" sz="1400" dirty="0"/>
+              <a:t>가 다르다면</a:t>
+            </a:r>
+            <a:endParaRPr lang="en-US" altLang="ko-KR" sz="1400" dirty="0"/>
+          </a:p>
+          <a:p>
+            <a:r>
+              <a:rPr lang="ko-KR" altLang="en-US" sz="1400" dirty="0"/>
+              <a:t>작업을 수행한 후 오브젝트의 </a:t>
+            </a:r>
+            <a:r>
+              <a:rPr lang="en-US" altLang="ko-KR" sz="1400" dirty="0" err="1"/>
+              <a:t>TourID</a:t>
+            </a:r>
+            <a:r>
+              <a:rPr lang="ko-KR" altLang="en-US" sz="1400" dirty="0"/>
+              <a:t>를 작업의 </a:t>
+            </a:r>
+            <a:r>
+              <a:rPr lang="en-US" altLang="ko-KR" sz="1400" dirty="0" err="1"/>
+              <a:t>TourID</a:t>
+            </a:r>
+            <a:r>
+              <a:rPr lang="ko-KR" altLang="en-US" sz="1400" dirty="0"/>
+              <a:t>로 바꾼다</a:t>
+            </a:r>
+            <a:r>
+              <a:rPr lang="en-US" altLang="ko-KR" sz="1400" dirty="0"/>
+              <a:t>. </a:t>
+            </a:r>
+            <a:r>
+              <a:rPr lang="ko-KR" altLang="en-US" sz="1400" dirty="0"/>
+              <a:t>그러면 다른 </a:t>
+            </a:r>
+            <a:r>
+              <a:rPr lang="ko-KR" altLang="en-US" sz="1400" dirty="0" err="1"/>
+              <a:t>청크에서</a:t>
+            </a:r>
+            <a:r>
+              <a:rPr lang="ko-KR" altLang="en-US" sz="1400" dirty="0"/>
+              <a:t> 해당 오브젝트를 참조하더라도</a:t>
+            </a:r>
+            <a:r>
+              <a:rPr lang="en-US" altLang="ko-KR" sz="1400" dirty="0"/>
+              <a:t>, </a:t>
+            </a:r>
+          </a:p>
+          <a:p>
+            <a:r>
+              <a:rPr lang="en-US" altLang="ko-KR" sz="1400" dirty="0" err="1"/>
+              <a:t>TourID</a:t>
+            </a:r>
+            <a:r>
+              <a:rPr lang="ko-KR" altLang="en-US" sz="1400" dirty="0"/>
+              <a:t>가 같으니 작업을 수행하지 않고</a:t>
+            </a:r>
+            <a:r>
+              <a:rPr lang="en-US" altLang="ko-KR" sz="1400" dirty="0"/>
+              <a:t>, </a:t>
+            </a:r>
+            <a:r>
+              <a:rPr lang="ko-KR" altLang="en-US" sz="1400" dirty="0"/>
+              <a:t>결과적으로 어떤 작업이든 모든 오브젝트에 대해 한번씩 수행이 가능하다</a:t>
+            </a:r>
+            <a:r>
+              <a:rPr lang="en-US" altLang="ko-KR" sz="1400" dirty="0"/>
+              <a:t>.</a:t>
+            </a:r>
+          </a:p>
+        </p:txBody>
+      </p:sp>
+      <p:pic>
+        <p:nvPicPr>
+          <p:cNvPr id="8" name="그림 7">
+            <a:extLst>
+              <a:ext uri="{FF2B5EF4-FFF2-40B4-BE49-F238E27FC236}">
+                <a16:creationId xmlns:a16="http://schemas.microsoft.com/office/drawing/2014/main" id="{B089B979-258E-D8D2-B5A0-4D3994A8D429}"/>
+              </a:ext>
+            </a:extLst>
+          </p:cNvPr>
+          <p:cNvPicPr>
+            <a:picLocks noChangeAspect="1"/>
+          </p:cNvPicPr>
+          <p:nvPr/>
+        </p:nvPicPr>
+        <p:blipFill>
+          <a:blip r:embed="rId3"/>
+          <a:stretch>
+            <a:fillRect/>
+          </a:stretch>
+        </p:blipFill>
+        <p:spPr>
+          <a:xfrm>
+            <a:off x="111758" y="5260657"/>
+            <a:ext cx="2257425" cy="1457325"/>
+          </a:xfrm>
+          <a:prstGeom prst="rect">
+            <a:avLst/>
+          </a:prstGeom>
+        </p:spPr>
+      </p:pic>
+      <p:pic>
+        <p:nvPicPr>
+          <p:cNvPr id="10" name="그림 9">
+            <a:extLst>
+              <a:ext uri="{FF2B5EF4-FFF2-40B4-BE49-F238E27FC236}">
+                <a16:creationId xmlns:a16="http://schemas.microsoft.com/office/drawing/2014/main" id="{95EF7EBE-9AA6-8EC3-90DB-41E0FB4C63E1}"/>
+              </a:ext>
+            </a:extLst>
+          </p:cNvPr>
+          <p:cNvPicPr>
+            <a:picLocks noChangeAspect="1"/>
+          </p:cNvPicPr>
+          <p:nvPr/>
+        </p:nvPicPr>
+        <p:blipFill>
+          <a:blip r:embed="rId4"/>
+          <a:stretch>
+            <a:fillRect/>
+          </a:stretch>
+        </p:blipFill>
+        <p:spPr>
+          <a:xfrm>
+            <a:off x="2480941" y="6060757"/>
+            <a:ext cx="2790825" cy="657225"/>
+          </a:xfrm>
+          <a:prstGeom prst="rect">
+            <a:avLst/>
+          </a:prstGeom>
+        </p:spPr>
+      </p:pic>
+      <p:sp>
+        <p:nvSpPr>
+          <p:cNvPr id="11" name="TextBox 10">
+            <a:extLst>
+              <a:ext uri="{FF2B5EF4-FFF2-40B4-BE49-F238E27FC236}">
+                <a16:creationId xmlns:a16="http://schemas.microsoft.com/office/drawing/2014/main" id="{A49783B8-1844-1FF7-3056-C781CE636D96}"/>
+              </a:ext>
+            </a:extLst>
+          </p:cNvPr>
+          <p:cNvSpPr txBox="1"/>
+          <p:nvPr/>
+        </p:nvSpPr>
+        <p:spPr>
+          <a:xfrm>
+            <a:off x="2480941" y="5260657"/>
+            <a:ext cx="5124385" cy="738664"/>
+          </a:xfrm>
+          <a:prstGeom prst="rect">
+            <a:avLst/>
+          </a:prstGeom>
+          <a:noFill/>
+        </p:spPr>
+        <p:txBody>
+          <a:bodyPr wrap="square" rtlCol="0">
+            <a:spAutoFit/>
+          </a:bodyPr>
+          <a:lstStyle/>
+          <a:p>
+            <a:r>
+              <a:rPr lang="ko-KR" altLang="en-US" sz="1400" dirty="0"/>
+              <a:t>이동시의 문제는 각 축마다 최소와 길이를 가지는 범위와</a:t>
+            </a:r>
+            <a:r>
+              <a:rPr lang="en-US" altLang="ko-KR" sz="1400" dirty="0"/>
+              <a:t>, </a:t>
+            </a:r>
+            <a:r>
+              <a:rPr lang="ko-KR" altLang="en-US" sz="1400" dirty="0"/>
+              <a:t>해당 범위에 </a:t>
+            </a:r>
+            <a:r>
+              <a:rPr lang="ko-KR" altLang="en-US" sz="1400" dirty="0" err="1"/>
+              <a:t>청크들에서</a:t>
+            </a:r>
+            <a:r>
+              <a:rPr lang="ko-KR" altLang="en-US" sz="1400" dirty="0"/>
+              <a:t> 해당 오브젝트가 어떤 인덱스에 있는지 저장하는 배열을 </a:t>
+            </a:r>
+            <a:r>
+              <a:rPr lang="ko-KR" altLang="en-US" sz="1400" dirty="0" err="1"/>
+              <a:t>힙</a:t>
+            </a:r>
+            <a:r>
+              <a:rPr lang="ko-KR" altLang="en-US" sz="1400" dirty="0"/>
+              <a:t> 메모리로 할당하여 해결한다</a:t>
+            </a:r>
+            <a:r>
+              <a:rPr lang="en-US" altLang="ko-KR" sz="1400" dirty="0"/>
+              <a:t>.</a:t>
+            </a:r>
+            <a:endParaRPr lang="ko-KR" altLang="en-US" sz="1400" dirty="0"/>
+          </a:p>
+        </p:txBody>
+      </p:sp>
+    </p:spTree>
+    <p:extLst>
+      <p:ext uri="{BB962C8B-B14F-4D97-AF65-F5344CB8AC3E}">
+        <p14:creationId xmlns:p14="http://schemas.microsoft.com/office/powerpoint/2010/main" val="1008121533"/>
+      </p:ext>
+    </p:extLst>
+  </p:cSld>
+  <p:clrMapOvr>
+    <a:masterClrMapping/>
+  </p:clrMapOvr>
+</p:sld>
+</file>
+
+<file path=ppt/slides/slide31.xml><?xml version="1.0" encoding="utf-8"?>
+<p:sld xmlns:a="http://schemas.openxmlformats.org/drawingml/2006/main" xmlns:r="http://schemas.openxmlformats.org/officeDocument/2006/relationships" xmlns:p="http://schemas.openxmlformats.org/presentationml/2006/main">
+  <p:cSld>
+    <p:spTree>
+      <p:nvGrpSpPr>
+        <p:cNvPr id="1" name="">
+          <a:extLst>
+            <a:ext uri="{FF2B5EF4-FFF2-40B4-BE49-F238E27FC236}">
+              <a16:creationId xmlns:a16="http://schemas.microsoft.com/office/drawing/2014/main" id="{E50CB74A-4402-F9C6-688E-EB4955211B46}"/>
+            </a:ext>
+          </a:extLst>
+        </p:cNvPr>
+        <p:cNvGrpSpPr/>
+        <p:nvPr/>
+      </p:nvGrpSpPr>
+      <p:grpSpPr>
+        <a:xfrm>
+          <a:off x="0" y="0"/>
+          <a:ext cx="0" cy="0"/>
+          <a:chOff x="0" y="0"/>
+          <a:chExt cx="0" cy="0"/>
+        </a:xfrm>
+      </p:grpSpPr>
+      <p:sp>
+        <p:nvSpPr>
+          <p:cNvPr id="2" name="제목 1">
+            <a:extLst>
+              <a:ext uri="{FF2B5EF4-FFF2-40B4-BE49-F238E27FC236}">
+                <a16:creationId xmlns:a16="http://schemas.microsoft.com/office/drawing/2014/main" id="{5A8DA8AC-A393-9337-7348-EFCF4D458A04}"/>
+              </a:ext>
+            </a:extLst>
+          </p:cNvPr>
+          <p:cNvSpPr>
+            <a:spLocks noGrp="1"/>
+          </p:cNvSpPr>
+          <p:nvPr>
+            <p:ph type="title"/>
+          </p:nvPr>
+        </p:nvSpPr>
+        <p:spPr>
+          <a:xfrm>
+            <a:off x="0" y="18255"/>
+            <a:ext cx="10515600" cy="850425"/>
+          </a:xfrm>
+        </p:spPr>
+        <p:txBody>
+          <a:bodyPr>
+            <a:normAutofit/>
+          </a:bodyPr>
+          <a:lstStyle/>
+          <a:p>
+            <a:r>
+              <a:rPr lang="en-US" altLang="ko-KR" sz="5400" dirty="0"/>
+              <a:t>TimeLine</a:t>
+            </a:r>
+            <a:endParaRPr lang="ko-KR" altLang="en-US" sz="5400" dirty="0"/>
+          </a:p>
+        </p:txBody>
+      </p:sp>
+      <p:sp>
+        <p:nvSpPr>
+          <p:cNvPr id="3" name="TextBox 2">
+            <a:extLst>
+              <a:ext uri="{FF2B5EF4-FFF2-40B4-BE49-F238E27FC236}">
+                <a16:creationId xmlns:a16="http://schemas.microsoft.com/office/drawing/2014/main" id="{A8AD6AEC-D4E7-CD96-5EEE-F49C9D7D504D}"/>
+              </a:ext>
+            </a:extLst>
+          </p:cNvPr>
+          <p:cNvSpPr txBox="1"/>
+          <p:nvPr/>
+        </p:nvSpPr>
+        <p:spPr>
+          <a:xfrm>
+            <a:off x="0" y="776749"/>
+            <a:ext cx="2989921" cy="369332"/>
+          </a:xfrm>
+          <a:prstGeom prst="rect">
+            <a:avLst/>
+          </a:prstGeom>
+          <a:noFill/>
+        </p:spPr>
+        <p:txBody>
+          <a:bodyPr wrap="none" rtlCol="0">
+            <a:spAutoFit/>
+          </a:bodyPr>
+          <a:lstStyle/>
+          <a:p>
+            <a:r>
+              <a:rPr lang="ko-KR" altLang="en-US" dirty="0"/>
+              <a:t>전체 타임라인을 보여준다</a:t>
+            </a:r>
+            <a:r>
+              <a:rPr lang="en-US" altLang="ko-KR" dirty="0"/>
+              <a:t>.</a:t>
+            </a:r>
+            <a:endParaRPr lang="ko-KR" altLang="en-US" dirty="0"/>
+          </a:p>
+        </p:txBody>
+      </p:sp>
+    </p:spTree>
+    <p:extLst>
+      <p:ext uri="{BB962C8B-B14F-4D97-AF65-F5344CB8AC3E}">
+        <p14:creationId xmlns:p14="http://schemas.microsoft.com/office/powerpoint/2010/main" val="3849585021"/>
       </p:ext>
     </p:extLst>
   </p:cSld>
@@ -6382,8 +8907,8 @@
           </a:p>
         </p:txBody>
       </p:sp>
-      <mc:AlternateContent xmlns:mc="http://schemas.openxmlformats.org/markup-compatibility/2006">
-        <mc:Choice xmlns:pslz="http://schemas.microsoft.com/office/powerpoint/2016/slidezoom" Requires="pslz">
+      <mc:AlternateContent xmlns:mc="http://schemas.openxmlformats.org/markup-compatibility/2006" xmlns:pslz="http://schemas.microsoft.com/office/powerpoint/2016/slidezoom">
+        <mc:Choice Requires="pslz">
           <p:graphicFrame>
             <p:nvGraphicFramePr>
               <p:cNvPr id="14" name="슬라이드 확대/축소 13">
@@ -6440,7 +8965,7 @@
             </a:graphic>
           </p:graphicFrame>
         </mc:Choice>
-        <mc:Fallback>
+        <mc:Fallback xmlns="">
           <p:pic>
             <p:nvPicPr>
               <p:cNvPr id="14" name="슬라이드 확대/축소 13">
@@ -6457,7 +8982,7 @@
               <p:nvPr/>
             </p:nvPicPr>
             <p:blipFill>
-              <a:blip r:embed="rId2"/>
+              <a:blip r:embed="rId4"/>
               <a:stretch>
                 <a:fillRect/>
               </a:stretch>
@@ -6479,8 +9004,8 @@
           </p:pic>
         </mc:Fallback>
       </mc:AlternateContent>
-      <mc:AlternateContent xmlns:mc="http://schemas.openxmlformats.org/markup-compatibility/2006">
-        <mc:Choice xmlns:pslz="http://schemas.microsoft.com/office/powerpoint/2016/slidezoom" Requires="pslz">
+      <mc:AlternateContent xmlns:mc="http://schemas.openxmlformats.org/markup-compatibility/2006" xmlns:pslz="http://schemas.microsoft.com/office/powerpoint/2016/slidezoom">
+        <mc:Choice Requires="pslz">
           <p:graphicFrame>
             <p:nvGraphicFramePr>
               <p:cNvPr id="16" name="슬라이드 확대/축소 15">
@@ -6511,7 +9036,7 @@
                   <pslz:sldZmObj sldId="263" cId="3813102566">
                     <pslz:zmPr id="{C2D96DEF-A3A8-4D0C-A6FC-CA1F606221B8}" returnToParent="0" transitionDur="1000">
                       <p166:blipFill xmlns:p166="http://schemas.microsoft.com/office/powerpoint/2016/6/main">
-                        <a:blip r:embed="rId4"/>
+                        <a:blip r:embed="rId5"/>
                         <a:stretch>
                           <a:fillRect/>
                         </a:stretch>
@@ -6537,11 +9062,11 @@
             </a:graphic>
           </p:graphicFrame>
         </mc:Choice>
-        <mc:Fallback>
+        <mc:Fallback xmlns="">
           <p:pic>
             <p:nvPicPr>
               <p:cNvPr id="16" name="슬라이드 확대/축소 15">
-                <a:hlinkClick r:id="rId5" action="ppaction://hlinksldjump"/>
+                <a:hlinkClick r:id="rId6" action="ppaction://hlinksldjump"/>
                 <a:extLst>
                   <a:ext uri="{FF2B5EF4-FFF2-40B4-BE49-F238E27FC236}">
                     <a16:creationId xmlns:a16="http://schemas.microsoft.com/office/drawing/2014/main" id="{1F2766D2-D008-AEC7-46EF-052E4AB5DEF1}"/>
@@ -6554,7 +9079,7 @@
               <p:nvPr/>
             </p:nvPicPr>
             <p:blipFill>
-              <a:blip r:embed="rId4"/>
+              <a:blip r:embed="rId7"/>
               <a:stretch>
                 <a:fillRect/>
               </a:stretch>
@@ -6593,14 +9118,14 @@
               <p:nvPr>
                 <p:extLst>
                   <p:ext uri="{D42A27DB-BD31-4B8C-83A1-F6EECF244321}">
-                    <p14:modId xmlns:p14="http://schemas.microsoft.com/office/powerpoint/2010/main" val="2647137410"/>
+                    <p14:modId xmlns:p14="http://schemas.microsoft.com/office/powerpoint/2010/main" val="2638548891"/>
                   </p:ext>
                 </p:extLst>
               </p:nvPr>
             </p:nvGraphicFramePr>
             <p:xfrm>
-              <a:off x="0" y="4286250"/>
-              <a:ext cx="4572000" cy="2571750"/>
+              <a:off x="180091" y="4407135"/>
+              <a:ext cx="4324639" cy="2432610"/>
             </p:xfrm>
             <a:graphic>
               <a:graphicData uri="http://schemas.microsoft.com/office/powerpoint/2016/slidezoom">
@@ -6608,7 +9133,7 @@
                   <pslz:sldZmObj sldId="277" cId="2880208972">
                     <pslz:zmPr id="{141A5183-2B03-4ADA-A208-45830EEB14E8}" returnToParent="0" transitionDur="1000">
                       <p166:blipFill xmlns:p166="http://schemas.microsoft.com/office/powerpoint/2016/6/main">
-                        <a:blip r:embed="rId6"/>
+                        <a:blip r:embed="rId8"/>
                         <a:stretch>
                           <a:fillRect/>
                         </a:stretch>
@@ -6616,7 +9141,7 @@
                       <p166:spPr xmlns:p166="http://schemas.microsoft.com/office/powerpoint/2016/6/main">
                         <a:xfrm>
                           <a:off x="0" y="0"/>
-                          <a:ext cx="4572000" cy="2571750"/>
+                          <a:ext cx="4324639" cy="2432610"/>
                         </a:xfrm>
                         <a:prstGeom prst="rect">
                           <a:avLst/>
@@ -6638,7 +9163,7 @@
           <p:pic>
             <p:nvPicPr>
               <p:cNvPr id="18" name="슬라이드 확대/축소 17">
-                <a:hlinkClick r:id="rId7" action="ppaction://hlinksldjump"/>
+                <a:hlinkClick r:id="rId9" action="ppaction://hlinksldjump"/>
                 <a:extLst>
                   <a:ext uri="{FF2B5EF4-FFF2-40B4-BE49-F238E27FC236}">
                     <a16:creationId xmlns:a16="http://schemas.microsoft.com/office/drawing/2014/main" id="{B72E0C2E-6C14-ED9C-31C9-A36C4BDAD061}"/>
@@ -6651,15 +9176,15 @@
               <p:nvPr/>
             </p:nvPicPr>
             <p:blipFill>
-              <a:blip r:embed="rId6"/>
+              <a:blip r:embed="rId8"/>
               <a:stretch>
                 <a:fillRect/>
               </a:stretch>
             </p:blipFill>
             <p:spPr>
               <a:xfrm>
-                <a:off x="0" y="4286250"/>
-                <a:ext cx="4572000" cy="2571750"/>
+                <a:off x="180091" y="4407135"/>
+                <a:ext cx="4324639" cy="2432610"/>
               </a:xfrm>
               <a:prstGeom prst="rect">
                 <a:avLst/>
@@ -6709,6 +9234,46 @@
             <a:r>
               <a:rPr lang="ko-KR" altLang="en-US" dirty="0"/>
               <a:t>비동기 렌더링</a:t>
+            </a:r>
+          </a:p>
+        </p:txBody>
+      </p:sp>
+      <p:sp>
+        <p:nvSpPr>
+          <p:cNvPr id="3" name="TextBox 2">
+            <a:extLst>
+              <a:ext uri="{FF2B5EF4-FFF2-40B4-BE49-F238E27FC236}">
+                <a16:creationId xmlns:a16="http://schemas.microsoft.com/office/drawing/2014/main" id="{318B3F80-6E45-2A12-2B78-E94693FE19EE}"/>
+              </a:ext>
+            </a:extLst>
+          </p:cNvPr>
+          <p:cNvSpPr txBox="1"/>
+          <p:nvPr/>
+        </p:nvSpPr>
+        <p:spPr>
+          <a:xfrm>
+            <a:off x="0" y="4062646"/>
+            <a:ext cx="1420582" cy="369332"/>
+          </a:xfrm>
+          <a:prstGeom prst="rect">
+            <a:avLst/>
+          </a:prstGeom>
+          <a:noFill/>
+          <a:ln w="25400">
+            <a:solidFill>
+              <a:schemeClr val="tx1"/>
+            </a:solidFill>
+          </a:ln>
+        </p:spPr>
+        <p:txBody>
+          <a:bodyPr wrap="none" rtlCol="0">
+            <a:spAutoFit/>
+          </a:bodyPr>
+          <a:lstStyle/>
+          <a:p>
+            <a:r>
+              <a:rPr lang="ko-KR" altLang="en-US" dirty="0"/>
+              <a:t>리소스 관리</a:t>
             </a:r>
           </a:p>
         </p:txBody>
@@ -7160,8 +9725,8 @@
           </a:p>
         </p:txBody>
       </p:sp>
-      <mc:AlternateContent xmlns:mc="http://schemas.openxmlformats.org/markup-compatibility/2006">
-        <mc:Choice xmlns:pslz="http://schemas.microsoft.com/office/powerpoint/2016/slidezoom" Requires="pslz">
+      <mc:AlternateContent xmlns:mc="http://schemas.openxmlformats.org/markup-compatibility/2006" xmlns:pslz="http://schemas.microsoft.com/office/powerpoint/2016/slidezoom">
+        <mc:Choice Requires="pslz">
           <p:graphicFrame>
             <p:nvGraphicFramePr>
               <p:cNvPr id="7" name="슬라이드 확대/축소 6">
@@ -7218,7 +9783,7 @@
             </a:graphic>
           </p:graphicFrame>
         </mc:Choice>
-        <mc:Fallback>
+        <mc:Fallback xmlns="">
           <p:pic>
             <p:nvPicPr>
               <p:cNvPr id="7" name="슬라이드 확대/축소 6">
@@ -7235,7 +9800,7 @@
               <p:nvPr/>
             </p:nvPicPr>
             <p:blipFill>
-              <a:blip r:embed="rId3"/>
+              <a:blip r:embed="rId5"/>
               <a:stretch>
                 <a:fillRect/>
               </a:stretch>
@@ -7257,8 +9822,8 @@
           </p:pic>
         </mc:Fallback>
       </mc:AlternateContent>
-      <mc:AlternateContent xmlns:mc="http://schemas.openxmlformats.org/markup-compatibility/2006">
-        <mc:Choice xmlns:pslz="http://schemas.microsoft.com/office/powerpoint/2016/slidezoom" Requires="pslz">
+      <mc:AlternateContent xmlns:mc="http://schemas.openxmlformats.org/markup-compatibility/2006" xmlns:pslz="http://schemas.microsoft.com/office/powerpoint/2016/slidezoom">
+        <mc:Choice Requires="pslz">
           <p:graphicFrame>
             <p:nvGraphicFramePr>
               <p:cNvPr id="9" name="슬라이드 확대/축소 8">
@@ -7289,7 +9854,7 @@
                   <pslz:sldZmObj sldId="282" cId="825479797">
                     <pslz:zmPr id="{CE5D8C70-59BB-47C2-87D2-7CA7FF77941B}" returnToParent="0" transitionDur="1000">
                       <p166:blipFill xmlns:p166="http://schemas.microsoft.com/office/powerpoint/2016/6/main">
-                        <a:blip r:embed="rId5"/>
+                        <a:blip r:embed="rId6"/>
                         <a:stretch>
                           <a:fillRect/>
                         </a:stretch>
@@ -7315,11 +9880,11 @@
             </a:graphic>
           </p:graphicFrame>
         </mc:Choice>
-        <mc:Fallback>
+        <mc:Fallback xmlns="">
           <p:pic>
             <p:nvPicPr>
               <p:cNvPr id="9" name="슬라이드 확대/축소 8">
-                <a:hlinkClick r:id="rId6" action="ppaction://hlinksldjump"/>
+                <a:hlinkClick r:id="rId7" action="ppaction://hlinksldjump"/>
                 <a:extLst>
                   <a:ext uri="{FF2B5EF4-FFF2-40B4-BE49-F238E27FC236}">
                     <a16:creationId xmlns:a16="http://schemas.microsoft.com/office/drawing/2014/main" id="{C9C5A58F-C6A3-86E1-87F3-43464A84862D}"/>
@@ -7332,7 +9897,7 @@
               <p:nvPr/>
             </p:nvPicPr>
             <p:blipFill>
-              <a:blip r:embed="rId5"/>
+              <a:blip r:embed="rId8"/>
               <a:stretch>
                 <a:fillRect/>
               </a:stretch>
@@ -9950,24 +12515,59 @@
             </a:r>
           </a:p>
           <a:p>
-            <a:endParaRPr lang="en-US" altLang="ko-KR" sz="1200" dirty="0"/>
-          </a:p>
-          <a:p>
+            <a:r>
+              <a:rPr lang="ko-KR" altLang="en-US" sz="1200" dirty="0"/>
+              <a:t>이걸 하기 위해 </a:t>
+            </a:r>
             <a:r>
               <a:rPr lang="en-US" altLang="ko-KR" sz="1200" dirty="0"/>
-              <a:t>&gt;&gt; </a:t>
+              <a:t>Game </a:t>
             </a:r>
             <a:r>
               <a:rPr lang="ko-KR" altLang="en-US" sz="1200" dirty="0"/>
-              <a:t>잘 </a:t>
+              <a:t>구조체에 반영구적인 리소스들의 구조체에 </a:t>
+            </a:r>
+            <a:r>
+              <a:rPr lang="en-US" altLang="ko-KR" sz="1200" dirty="0" err="1"/>
+              <a:t>DescIndex</a:t>
+            </a:r>
+            <a:r>
+              <a:rPr lang="ko-KR" altLang="en-US" sz="1200" dirty="0"/>
+              <a:t>가 있다</a:t>
+            </a:r>
+            <a:r>
+              <a:rPr lang="en-US" altLang="ko-KR" sz="1200" dirty="0"/>
+              <a:t>.</a:t>
+            </a:r>
+          </a:p>
+          <a:p>
+            <a:r>
+              <a:rPr lang="ko-KR" altLang="en-US" sz="1200" dirty="0"/>
+              <a:t>구조가 </a:t>
             </a:r>
             <a:r>
               <a:rPr lang="ko-KR" altLang="en-US" sz="1200" dirty="0" err="1"/>
-              <a:t>이해될려나</a:t>
+              <a:t>바뀔때</a:t>
+            </a:r>
+            <a:r>
+              <a:rPr lang="ko-KR" altLang="en-US" sz="1200" dirty="0"/>
+              <a:t> 해당 리소스들을 순회하면서 </a:t>
+            </a:r>
+            <a:r>
+              <a:rPr lang="en-US" altLang="ko-KR" sz="1200" dirty="0" err="1"/>
+              <a:t>DescIndex</a:t>
+            </a:r>
+            <a:r>
+              <a:rPr lang="ko-KR" altLang="en-US" sz="1200" dirty="0"/>
+              <a:t>를 알맞게 </a:t>
+            </a:r>
+            <a:r>
+              <a:rPr lang="ko-KR" altLang="en-US" sz="1200" dirty="0" err="1"/>
+              <a:t>이격해준다</a:t>
             </a:r>
             <a:r>
               <a:rPr lang="en-US" altLang="ko-KR" sz="1200" dirty="0"/>
-              <a:t>?</a:t>
+              <a:t>.</a:t>
             </a:r>
           </a:p>
         </p:txBody>
@@ -10566,7 +13166,7 @@
         </p:nvSpPr>
         <p:spPr>
           <a:xfrm>
-            <a:off x="0" y="18255"/>
+            <a:off x="0" y="0"/>
             <a:ext cx="10515600" cy="850425"/>
           </a:xfrm>
         </p:spPr>
@@ -10861,8 +13461,8 @@
           </a:p>
         </p:txBody>
       </p:sp>
-      <mc:AlternateContent xmlns:mc="http://schemas.openxmlformats.org/markup-compatibility/2006">
-        <mc:Choice xmlns:pslz="http://schemas.microsoft.com/office/powerpoint/2016/slidezoom" Requires="pslz">
+      <mc:AlternateContent xmlns:mc="http://schemas.openxmlformats.org/markup-compatibility/2006" xmlns:pslz="http://schemas.microsoft.com/office/powerpoint/2016/slidezoom">
+        <mc:Choice Requires="pslz">
           <p:graphicFrame>
             <p:nvGraphicFramePr>
               <p:cNvPr id="10" name="슬라이드 확대/축소 9">
@@ -10919,7 +13519,7 @@
             </a:graphic>
           </p:graphicFrame>
         </mc:Choice>
-        <mc:Fallback>
+        <mc:Fallback xmlns="">
           <p:pic>
             <p:nvPicPr>
               <p:cNvPr id="10" name="슬라이드 확대/축소 9">
@@ -10936,7 +13536,7 @@
               <p:nvPr/>
             </p:nvPicPr>
             <p:blipFill>
-              <a:blip r:embed="rId2"/>
+              <a:blip r:embed="rId4"/>
               <a:stretch>
                 <a:fillRect/>
               </a:stretch>
@@ -10958,8 +13558,8 @@
           </p:pic>
         </mc:Fallback>
       </mc:AlternateContent>
-      <mc:AlternateContent xmlns:mc="http://schemas.openxmlformats.org/markup-compatibility/2006">
-        <mc:Choice xmlns:pslz="http://schemas.microsoft.com/office/powerpoint/2016/slidezoom" Requires="pslz">
+      <mc:AlternateContent xmlns:mc="http://schemas.openxmlformats.org/markup-compatibility/2006" xmlns:pslz="http://schemas.microsoft.com/office/powerpoint/2016/slidezoom">
+        <mc:Choice Requires="pslz">
           <p:graphicFrame>
             <p:nvGraphicFramePr>
               <p:cNvPr id="12" name="슬라이드 확대/축소 11">
@@ -10990,7 +13590,7 @@
                   <pslz:sldZmObj sldId="266" cId="2502613761">
                     <pslz:zmPr id="{3DF0F88A-C4B4-4B73-8457-00D116026201}" returnToParent="0" transitionDur="1000">
                       <p166:blipFill xmlns:p166="http://schemas.microsoft.com/office/powerpoint/2016/6/main">
-                        <a:blip r:embed="rId4"/>
+                        <a:blip r:embed="rId5"/>
                         <a:stretch>
                           <a:fillRect/>
                         </a:stretch>
@@ -11016,11 +13616,11 @@
             </a:graphic>
           </p:graphicFrame>
         </mc:Choice>
-        <mc:Fallback>
+        <mc:Fallback xmlns="">
           <p:pic>
             <p:nvPicPr>
               <p:cNvPr id="12" name="슬라이드 확대/축소 11">
-                <a:hlinkClick r:id="rId5" action="ppaction://hlinksldjump"/>
+                <a:hlinkClick r:id="rId6" action="ppaction://hlinksldjump"/>
                 <a:extLst>
                   <a:ext uri="{FF2B5EF4-FFF2-40B4-BE49-F238E27FC236}">
                     <a16:creationId xmlns:a16="http://schemas.microsoft.com/office/drawing/2014/main" id="{C51DCB39-E942-FDA7-1A76-5358BBA4881C}"/>
@@ -11033,7 +13633,7 @@
               <p:nvPr/>
             </p:nvPicPr>
             <p:blipFill>
-              <a:blip r:embed="rId4"/>
+              <a:blip r:embed="rId7"/>
               <a:stretch>
                 <a:fillRect/>
               </a:stretch>
@@ -11055,8 +13655,8 @@
           </p:pic>
         </mc:Fallback>
       </mc:AlternateContent>
-      <mc:AlternateContent xmlns:mc="http://schemas.openxmlformats.org/markup-compatibility/2006">
-        <mc:Choice xmlns:pslz="http://schemas.microsoft.com/office/powerpoint/2016/slidezoom" Requires="pslz">
+      <mc:AlternateContent xmlns:mc="http://schemas.openxmlformats.org/markup-compatibility/2006" xmlns:pslz="http://schemas.microsoft.com/office/powerpoint/2016/slidezoom">
+        <mc:Choice Requires="pslz">
           <p:graphicFrame>
             <p:nvGraphicFramePr>
               <p:cNvPr id="14" name="슬라이드 확대/축소 13">
@@ -11087,7 +13687,7 @@
                   <pslz:sldZmObj sldId="267" cId="553687500">
                     <pslz:zmPr id="{2E8E69AB-0855-4BA1-8AD9-35242E1A23E1}" returnToParent="0" transitionDur="1000">
                       <p166:blipFill xmlns:p166="http://schemas.microsoft.com/office/powerpoint/2016/6/main">
-                        <a:blip r:embed="rId6"/>
+                        <a:blip r:embed="rId8"/>
                         <a:stretch>
                           <a:fillRect/>
                         </a:stretch>
@@ -11113,11 +13713,11 @@
             </a:graphic>
           </p:graphicFrame>
         </mc:Choice>
-        <mc:Fallback>
+        <mc:Fallback xmlns="">
           <p:pic>
             <p:nvPicPr>
               <p:cNvPr id="14" name="슬라이드 확대/축소 13">
-                <a:hlinkClick r:id="rId7" action="ppaction://hlinksldjump"/>
+                <a:hlinkClick r:id="rId9" action="ppaction://hlinksldjump"/>
                 <a:extLst>
                   <a:ext uri="{FF2B5EF4-FFF2-40B4-BE49-F238E27FC236}">
                     <a16:creationId xmlns:a16="http://schemas.microsoft.com/office/drawing/2014/main" id="{3A0C60E9-4CCD-9FCA-D82D-4FDF9CC5D6A4}"/>
@@ -11130,7 +13730,7 @@
               <p:nvPr/>
             </p:nvPicPr>
             <p:blipFill>
-              <a:blip r:embed="rId6"/>
+              <a:blip r:embed="rId10"/>
               <a:stretch>
                 <a:fillRect/>
               </a:stretch>
@@ -11152,8 +13752,8 @@
           </p:pic>
         </mc:Fallback>
       </mc:AlternateContent>
-      <mc:AlternateContent xmlns:mc="http://schemas.openxmlformats.org/markup-compatibility/2006">
-        <mc:Choice xmlns:pslz="http://schemas.microsoft.com/office/powerpoint/2016/slidezoom" Requires="pslz">
+      <mc:AlternateContent xmlns:mc="http://schemas.openxmlformats.org/markup-compatibility/2006" xmlns:pslz="http://schemas.microsoft.com/office/powerpoint/2016/slidezoom">
+        <mc:Choice Requires="pslz">
           <p:graphicFrame>
             <p:nvGraphicFramePr>
               <p:cNvPr id="16" name="슬라이드 확대/축소 15">
@@ -11184,7 +13784,7 @@
                   <pslz:sldZmObj sldId="268" cId="1408819320">
                     <pslz:zmPr id="{7AF5255F-B81A-4905-9CB3-DA9548B249DD}" returnToParent="0" transitionDur="1000">
                       <p166:blipFill xmlns:p166="http://schemas.microsoft.com/office/powerpoint/2016/6/main">
-                        <a:blip r:embed="rId8"/>
+                        <a:blip r:embed="rId11"/>
                         <a:stretch>
                           <a:fillRect/>
                         </a:stretch>
@@ -11210,11 +13810,11 @@
             </a:graphic>
           </p:graphicFrame>
         </mc:Choice>
-        <mc:Fallback>
+        <mc:Fallback xmlns="">
           <p:pic>
             <p:nvPicPr>
               <p:cNvPr id="16" name="슬라이드 확대/축소 15">
-                <a:hlinkClick r:id="rId9" action="ppaction://hlinksldjump"/>
+                <a:hlinkClick r:id="rId12" action="ppaction://hlinksldjump"/>
                 <a:extLst>
                   <a:ext uri="{FF2B5EF4-FFF2-40B4-BE49-F238E27FC236}">
                     <a16:creationId xmlns:a16="http://schemas.microsoft.com/office/drawing/2014/main" id="{32EBC4D6-83AD-7410-0B85-375DF64E846E}"/>
@@ -11227,7 +13827,7 @@
               <p:nvPr/>
             </p:nvPicPr>
             <p:blipFill>
-              <a:blip r:embed="rId8"/>
+              <a:blip r:embed="rId13"/>
               <a:stretch>
                 <a:fillRect/>
               </a:stretch>
@@ -11249,8 +13849,8 @@
           </p:pic>
         </mc:Fallback>
       </mc:AlternateContent>
-      <mc:AlternateContent xmlns:mc="http://schemas.openxmlformats.org/markup-compatibility/2006">
-        <mc:Choice xmlns:pslz="http://schemas.microsoft.com/office/powerpoint/2016/slidezoom" Requires="pslz">
+      <mc:AlternateContent xmlns:mc="http://schemas.openxmlformats.org/markup-compatibility/2006" xmlns:pslz="http://schemas.microsoft.com/office/powerpoint/2016/slidezoom">
+        <mc:Choice Requires="pslz">
           <p:graphicFrame>
             <p:nvGraphicFramePr>
               <p:cNvPr id="18" name="슬라이드 확대/축소 17">
@@ -11281,7 +13881,7 @@
                   <pslz:sldZmObj sldId="269" cId="2067884293">
                     <pslz:zmPr id="{93AF7E91-8F99-4C22-8120-C7F863FEA8A4}" returnToParent="0" transitionDur="1000">
                       <p166:blipFill xmlns:p166="http://schemas.microsoft.com/office/powerpoint/2016/6/main">
-                        <a:blip r:embed="rId10"/>
+                        <a:blip r:embed="rId14"/>
                         <a:stretch>
                           <a:fillRect/>
                         </a:stretch>
@@ -11307,11 +13907,11 @@
             </a:graphic>
           </p:graphicFrame>
         </mc:Choice>
-        <mc:Fallback>
+        <mc:Fallback xmlns="">
           <p:pic>
             <p:nvPicPr>
               <p:cNvPr id="18" name="슬라이드 확대/축소 17">
-                <a:hlinkClick r:id="rId11" action="ppaction://hlinksldjump"/>
+                <a:hlinkClick r:id="rId15" action="ppaction://hlinksldjump"/>
                 <a:extLst>
                   <a:ext uri="{FF2B5EF4-FFF2-40B4-BE49-F238E27FC236}">
                     <a16:creationId xmlns:a16="http://schemas.microsoft.com/office/drawing/2014/main" id="{E3ABA768-448A-8C95-D4DF-4AADB0CABC92}"/>
@@ -11324,7 +13924,7 @@
               <p:nvPr/>
             </p:nvPicPr>
             <p:blipFill>
-              <a:blip r:embed="rId10"/>
+              <a:blip r:embed="rId16"/>
               <a:stretch>
                 <a:fillRect/>
               </a:stretch>
@@ -11346,8 +13946,8 @@
           </p:pic>
         </mc:Fallback>
       </mc:AlternateContent>
-      <mc:AlternateContent xmlns:mc="http://schemas.openxmlformats.org/markup-compatibility/2006">
-        <mc:Choice xmlns:pslz="http://schemas.microsoft.com/office/powerpoint/2016/slidezoom" Requires="pslz">
+      <mc:AlternateContent xmlns:mc="http://schemas.openxmlformats.org/markup-compatibility/2006" xmlns:pslz="http://schemas.microsoft.com/office/powerpoint/2016/slidezoom">
+        <mc:Choice Requires="pslz">
           <p:graphicFrame>
             <p:nvGraphicFramePr>
               <p:cNvPr id="20" name="슬라이드 확대/축소 19">
@@ -11378,7 +13978,7 @@
                   <pslz:sldZmObj sldId="270" cId="4125104201">
                     <pslz:zmPr id="{3ECA6620-0ABA-4E04-813F-EADB7CE9CF63}" returnToParent="0" transitionDur="1000">
                       <p166:blipFill xmlns:p166="http://schemas.microsoft.com/office/powerpoint/2016/6/main">
-                        <a:blip r:embed="rId12"/>
+                        <a:blip r:embed="rId17"/>
                         <a:stretch>
                           <a:fillRect/>
                         </a:stretch>
@@ -11404,11 +14004,11 @@
             </a:graphic>
           </p:graphicFrame>
         </mc:Choice>
-        <mc:Fallback>
+        <mc:Fallback xmlns="">
           <p:pic>
             <p:nvPicPr>
               <p:cNvPr id="20" name="슬라이드 확대/축소 19">
-                <a:hlinkClick r:id="rId13" action="ppaction://hlinksldjump"/>
+                <a:hlinkClick r:id="rId18" action="ppaction://hlinksldjump"/>
                 <a:extLst>
                   <a:ext uri="{FF2B5EF4-FFF2-40B4-BE49-F238E27FC236}">
                     <a16:creationId xmlns:a16="http://schemas.microsoft.com/office/drawing/2014/main" id="{59C39FA5-0760-1928-8B3F-B56EAB6C80C7}"/>
@@ -11421,7 +14021,7 @@
               <p:nvPr/>
             </p:nvPicPr>
             <p:blipFill>
-              <a:blip r:embed="rId12"/>
+              <a:blip r:embed="rId19"/>
               <a:stretch>
                 <a:fillRect/>
               </a:stretch>
@@ -11443,8 +14043,8 @@
           </p:pic>
         </mc:Fallback>
       </mc:AlternateContent>
-      <mc:AlternateContent xmlns:mc="http://schemas.openxmlformats.org/markup-compatibility/2006">
-        <mc:Choice xmlns:pslz="http://schemas.microsoft.com/office/powerpoint/2016/slidezoom" Requires="pslz">
+      <mc:AlternateContent xmlns:mc="http://schemas.openxmlformats.org/markup-compatibility/2006" xmlns:pslz="http://schemas.microsoft.com/office/powerpoint/2016/slidezoom">
+        <mc:Choice Requires="pslz">
           <p:graphicFrame>
             <p:nvGraphicFramePr>
               <p:cNvPr id="22" name="슬라이드 확대/축소 21">
@@ -11475,7 +14075,7 @@
                   <pslz:sldZmObj sldId="271" cId="1815665238">
                     <pslz:zmPr id="{D690743E-41F9-4BAE-8242-679BCA3314E1}" returnToParent="0" transitionDur="1000">
                       <p166:blipFill xmlns:p166="http://schemas.microsoft.com/office/powerpoint/2016/6/main">
-                        <a:blip r:embed="rId14"/>
+                        <a:blip r:embed="rId20"/>
                         <a:stretch>
                           <a:fillRect/>
                         </a:stretch>
@@ -11501,11 +14101,11 @@
             </a:graphic>
           </p:graphicFrame>
         </mc:Choice>
-        <mc:Fallback>
+        <mc:Fallback xmlns="">
           <p:pic>
             <p:nvPicPr>
               <p:cNvPr id="22" name="슬라이드 확대/축소 21">
-                <a:hlinkClick r:id="rId15" action="ppaction://hlinksldjump"/>
+                <a:hlinkClick r:id="rId21" action="ppaction://hlinksldjump"/>
                 <a:extLst>
                   <a:ext uri="{FF2B5EF4-FFF2-40B4-BE49-F238E27FC236}">
                     <a16:creationId xmlns:a16="http://schemas.microsoft.com/office/drawing/2014/main" id="{604035B8-239E-68C6-0F7C-1B5A3AF20E87}"/>
@@ -11518,7 +14118,7 @@
               <p:nvPr/>
             </p:nvPicPr>
             <p:blipFill>
-              <a:blip r:embed="rId14"/>
+              <a:blip r:embed="rId22"/>
               <a:stretch>
                 <a:fillRect/>
               </a:stretch>
@@ -11540,8 +14140,8 @@
           </p:pic>
         </mc:Fallback>
       </mc:AlternateContent>
-      <mc:AlternateContent xmlns:mc="http://schemas.openxmlformats.org/markup-compatibility/2006">
-        <mc:Choice xmlns:pslz="http://schemas.microsoft.com/office/powerpoint/2016/slidezoom" Requires="pslz">
+      <mc:AlternateContent xmlns:mc="http://schemas.openxmlformats.org/markup-compatibility/2006" xmlns:pslz="http://schemas.microsoft.com/office/powerpoint/2016/slidezoom">
+        <mc:Choice Requires="pslz">
           <p:graphicFrame>
             <p:nvGraphicFramePr>
               <p:cNvPr id="24" name="슬라이드 확대/축소 23">
@@ -11572,7 +14172,7 @@
                   <pslz:sldZmObj sldId="272" cId="1441472548">
                     <pslz:zmPr id="{66D908C9-8FC9-4375-A6D9-E08696BEBFD6}" returnToParent="0" transitionDur="1000">
                       <p166:blipFill xmlns:p166="http://schemas.microsoft.com/office/powerpoint/2016/6/main">
-                        <a:blip r:embed="rId16"/>
+                        <a:blip r:embed="rId23"/>
                         <a:stretch>
                           <a:fillRect/>
                         </a:stretch>
@@ -11598,11 +14198,11 @@
             </a:graphic>
           </p:graphicFrame>
         </mc:Choice>
-        <mc:Fallback>
+        <mc:Fallback xmlns="">
           <p:pic>
             <p:nvPicPr>
               <p:cNvPr id="24" name="슬라이드 확대/축소 23">
-                <a:hlinkClick r:id="rId17" action="ppaction://hlinksldjump"/>
+                <a:hlinkClick r:id="rId24" action="ppaction://hlinksldjump"/>
                 <a:extLst>
                   <a:ext uri="{FF2B5EF4-FFF2-40B4-BE49-F238E27FC236}">
                     <a16:creationId xmlns:a16="http://schemas.microsoft.com/office/drawing/2014/main" id="{B671F9B6-EB52-FCB9-BBD7-0E50EC64E97F}"/>
@@ -11615,7 +14215,7 @@
               <p:nvPr/>
             </p:nvPicPr>
             <p:blipFill>
-              <a:blip r:embed="rId16"/>
+              <a:blip r:embed="rId25"/>
               <a:stretch>
                 <a:fillRect/>
               </a:stretch>
@@ -11637,8 +14237,8 @@
           </p:pic>
         </mc:Fallback>
       </mc:AlternateContent>
-      <mc:AlternateContent xmlns:mc="http://schemas.openxmlformats.org/markup-compatibility/2006">
-        <mc:Choice xmlns:pslz="http://schemas.microsoft.com/office/powerpoint/2016/slidezoom" Requires="pslz">
+      <mc:AlternateContent xmlns:mc="http://schemas.openxmlformats.org/markup-compatibility/2006" xmlns:pslz="http://schemas.microsoft.com/office/powerpoint/2016/slidezoom">
+        <mc:Choice Requires="pslz">
           <p:graphicFrame>
             <p:nvGraphicFramePr>
               <p:cNvPr id="26" name="슬라이드 확대/축소 25">
@@ -11669,7 +14269,7 @@
                   <pslz:sldZmObj sldId="273" cId="533062821">
                     <pslz:zmPr id="{5F53CD1A-DB62-4CA5-81C2-8000346DE2CB}" returnToParent="0" transitionDur="1000">
                       <p166:blipFill xmlns:p166="http://schemas.microsoft.com/office/powerpoint/2016/6/main">
-                        <a:blip r:embed="rId18"/>
+                        <a:blip r:embed="rId26"/>
                         <a:stretch>
                           <a:fillRect/>
                         </a:stretch>
@@ -11695,11 +14295,11 @@
             </a:graphic>
           </p:graphicFrame>
         </mc:Choice>
-        <mc:Fallback>
+        <mc:Fallback xmlns="">
           <p:pic>
             <p:nvPicPr>
               <p:cNvPr id="26" name="슬라이드 확대/축소 25">
-                <a:hlinkClick r:id="rId19" action="ppaction://hlinksldjump"/>
+                <a:hlinkClick r:id="rId27" action="ppaction://hlinksldjump"/>
                 <a:extLst>
                   <a:ext uri="{FF2B5EF4-FFF2-40B4-BE49-F238E27FC236}">
                     <a16:creationId xmlns:a16="http://schemas.microsoft.com/office/drawing/2014/main" id="{ED5ABB81-9220-E126-B9B6-67934342BCC2}"/>
@@ -11712,7 +14312,7 @@
               <p:nvPr/>
             </p:nvPicPr>
             <p:blipFill>
-              <a:blip r:embed="rId18"/>
+              <a:blip r:embed="rId28"/>
               <a:stretch>
                 <a:fillRect/>
               </a:stretch>
@@ -11734,8 +14334,8 @@
           </p:pic>
         </mc:Fallback>
       </mc:AlternateContent>
-      <mc:AlternateContent xmlns:mc="http://schemas.openxmlformats.org/markup-compatibility/2006">
-        <mc:Choice xmlns:pslz="http://schemas.microsoft.com/office/powerpoint/2016/slidezoom" Requires="pslz">
+      <mc:AlternateContent xmlns:mc="http://schemas.openxmlformats.org/markup-compatibility/2006" xmlns:pslz="http://schemas.microsoft.com/office/powerpoint/2016/slidezoom">
+        <mc:Choice Requires="pslz">
           <p:graphicFrame>
             <p:nvGraphicFramePr>
               <p:cNvPr id="28" name="슬라이드 확대/축소 27">
@@ -11766,7 +14366,7 @@
                   <pslz:sldZmObj sldId="274" cId="2958472303">
                     <pslz:zmPr id="{40C1809C-2EF7-4796-9DA2-52B9603AB8D1}" returnToParent="0" transitionDur="1000">
                       <p166:blipFill xmlns:p166="http://schemas.microsoft.com/office/powerpoint/2016/6/main">
-                        <a:blip r:embed="rId20"/>
+                        <a:blip r:embed="rId29"/>
                         <a:stretch>
                           <a:fillRect/>
                         </a:stretch>
@@ -11792,11 +14392,11 @@
             </a:graphic>
           </p:graphicFrame>
         </mc:Choice>
-        <mc:Fallback>
+        <mc:Fallback xmlns="">
           <p:pic>
             <p:nvPicPr>
               <p:cNvPr id="28" name="슬라이드 확대/축소 27">
-                <a:hlinkClick r:id="rId21" action="ppaction://hlinksldjump"/>
+                <a:hlinkClick r:id="rId30" action="ppaction://hlinksldjump"/>
                 <a:extLst>
                   <a:ext uri="{FF2B5EF4-FFF2-40B4-BE49-F238E27FC236}">
                     <a16:creationId xmlns:a16="http://schemas.microsoft.com/office/drawing/2014/main" id="{54DA1A88-CDE0-047B-2EDF-C1A1595113E2}"/>
@@ -11809,7 +14409,7 @@
               <p:nvPr/>
             </p:nvPicPr>
             <p:blipFill>
-              <a:blip r:embed="rId20"/>
+              <a:blip r:embed="rId31"/>
               <a:stretch>
                 <a:fillRect/>
               </a:stretch>
@@ -11916,6 +14516,378 @@
               <a:t>Culling</a:t>
             </a:r>
             <a:endParaRPr lang="ko-KR" altLang="en-US" sz="5400" dirty="0"/>
+          </a:p>
+        </p:txBody>
+      </p:sp>
+      <p:sp>
+        <p:nvSpPr>
+          <p:cNvPr id="3" name="TextBox 2">
+            <a:extLst>
+              <a:ext uri="{FF2B5EF4-FFF2-40B4-BE49-F238E27FC236}">
+                <a16:creationId xmlns:a16="http://schemas.microsoft.com/office/drawing/2014/main" id="{CAC6FA67-470F-213F-77A3-0454538B1C1D}"/>
+              </a:ext>
+            </a:extLst>
+          </p:cNvPr>
+          <p:cNvSpPr txBox="1"/>
+          <p:nvPr/>
+        </p:nvSpPr>
+        <p:spPr>
+          <a:xfrm>
+            <a:off x="12404" y="796412"/>
+            <a:ext cx="11704999" cy="3970318"/>
+          </a:xfrm>
+          <a:prstGeom prst="rect">
+            <a:avLst/>
+          </a:prstGeom>
+          <a:noFill/>
+        </p:spPr>
+        <p:txBody>
+          <a:bodyPr wrap="none" rtlCol="0">
+            <a:spAutoFit/>
+          </a:bodyPr>
+          <a:lstStyle/>
+          <a:p>
+            <a:r>
+              <a:rPr lang="ko-KR" altLang="en-US" dirty="0"/>
+              <a:t>하나의 뷰 포트는 두개의 </a:t>
+            </a:r>
+            <a:r>
+              <a:rPr lang="ko-KR" altLang="en-US" dirty="0" err="1"/>
+              <a:t>프러스텀을</a:t>
+            </a:r>
+            <a:r>
+              <a:rPr lang="ko-KR" altLang="en-US" dirty="0"/>
+              <a:t> 가질 수 있다</a:t>
+            </a:r>
+            <a:r>
+              <a:rPr lang="en-US" altLang="ko-KR" dirty="0"/>
+              <a:t>.</a:t>
+            </a:r>
+          </a:p>
+          <a:p>
+            <a:pPr marL="342900" indent="-342900">
+              <a:buAutoNum type="arabicPeriod"/>
+            </a:pPr>
+            <a:r>
+              <a:rPr lang="ko-KR" altLang="en-US" dirty="0"/>
+              <a:t>직교 </a:t>
+            </a:r>
+            <a:r>
+              <a:rPr lang="ko-KR" altLang="en-US" dirty="0" err="1"/>
+              <a:t>프러스텀</a:t>
+            </a:r>
+            <a:endParaRPr lang="en-US" altLang="ko-KR" dirty="0"/>
+          </a:p>
+          <a:p>
+            <a:pPr marL="342900" indent="-342900">
+              <a:buAutoNum type="arabicPeriod"/>
+            </a:pPr>
+            <a:r>
+              <a:rPr lang="ko-KR" altLang="en-US" dirty="0"/>
+              <a:t>원근 </a:t>
+            </a:r>
+            <a:r>
+              <a:rPr lang="ko-KR" altLang="en-US" dirty="0" err="1"/>
+              <a:t>프러스텀</a:t>
+            </a:r>
+            <a:endParaRPr lang="en-US" altLang="ko-KR" dirty="0"/>
+          </a:p>
+          <a:p>
+            <a:r>
+              <a:rPr lang="ko-KR" altLang="en-US" dirty="0"/>
+              <a:t>직교는 </a:t>
+            </a:r>
+            <a:r>
+              <a:rPr lang="ko-KR" altLang="en-US" dirty="0" err="1"/>
+              <a:t>디렉션</a:t>
+            </a:r>
+            <a:r>
+              <a:rPr lang="ko-KR" altLang="en-US" dirty="0"/>
+              <a:t> </a:t>
+            </a:r>
+            <a:r>
+              <a:rPr lang="ko-KR" altLang="en-US" dirty="0" err="1"/>
+              <a:t>라이팅의</a:t>
+            </a:r>
+            <a:r>
+              <a:rPr lang="ko-KR" altLang="en-US" dirty="0"/>
+              <a:t> 쉐도우 매핑과 같은 작업을 </a:t>
+            </a:r>
+            <a:r>
+              <a:rPr lang="ko-KR" altLang="en-US" dirty="0" err="1"/>
+              <a:t>할때</a:t>
+            </a:r>
+            <a:r>
+              <a:rPr lang="ko-KR" altLang="en-US" dirty="0"/>
+              <a:t> 오브젝트들을 직교로 거르기 위해 사용된다</a:t>
+            </a:r>
+            <a:r>
+              <a:rPr lang="en-US" altLang="ko-KR" dirty="0"/>
+              <a:t>.</a:t>
+            </a:r>
+          </a:p>
+          <a:p>
+            <a:r>
+              <a:rPr lang="ko-KR" altLang="en-US" dirty="0"/>
+              <a:t>원근은 화면 렌더링</a:t>
+            </a:r>
+            <a:r>
+              <a:rPr lang="en-US" altLang="ko-KR" dirty="0"/>
+              <a:t>, </a:t>
+            </a:r>
+            <a:r>
+              <a:rPr lang="ko-KR" altLang="en-US" dirty="0" err="1"/>
+              <a:t>오쿨루션</a:t>
+            </a:r>
+            <a:r>
+              <a:rPr lang="ko-KR" altLang="en-US" dirty="0"/>
+              <a:t> </a:t>
+            </a:r>
+            <a:r>
+              <a:rPr lang="ko-KR" altLang="en-US" dirty="0" err="1"/>
+              <a:t>컬링</a:t>
+            </a:r>
+            <a:r>
+              <a:rPr lang="en-US" altLang="ko-KR" dirty="0"/>
+              <a:t>, </a:t>
+            </a:r>
+            <a:r>
+              <a:rPr lang="ko-KR" altLang="en-US" dirty="0"/>
+              <a:t>그리고 </a:t>
+            </a:r>
+            <a:r>
+              <a:rPr lang="ko-KR" altLang="en-US" dirty="0" err="1"/>
+              <a:t>레이트레이싱에서</a:t>
+            </a:r>
+            <a:r>
+              <a:rPr lang="ko-KR" altLang="en-US" dirty="0"/>
+              <a:t> </a:t>
+            </a:r>
+            <a:r>
+              <a:rPr lang="en-US" altLang="ko-KR" dirty="0" err="1"/>
+              <a:t>SkinMeshBLASUpdate</a:t>
+            </a:r>
+            <a:r>
+              <a:rPr lang="ko-KR" altLang="en-US" dirty="0"/>
+              <a:t>를 위해 사용된다</a:t>
+            </a:r>
+            <a:r>
+              <a:rPr lang="en-US" altLang="ko-KR" dirty="0"/>
+              <a:t>.</a:t>
+            </a:r>
+          </a:p>
+          <a:p>
+            <a:r>
+              <a:rPr lang="ko-KR" altLang="en-US" dirty="0"/>
+              <a:t>직교나 원근이나 </a:t>
+            </a:r>
+            <a:r>
+              <a:rPr lang="ko-KR" altLang="en-US" dirty="0" err="1"/>
+              <a:t>프러스텀</a:t>
+            </a:r>
+            <a:r>
+              <a:rPr lang="ko-KR" altLang="en-US" dirty="0"/>
+              <a:t> </a:t>
+            </a:r>
+            <a:r>
+              <a:rPr lang="ko-KR" altLang="en-US" dirty="0" err="1"/>
+              <a:t>컬링을</a:t>
+            </a:r>
+            <a:r>
+              <a:rPr lang="ko-KR" altLang="en-US" dirty="0"/>
+              <a:t> 하는 방법은 간단하다</a:t>
+            </a:r>
+            <a:r>
+              <a:rPr lang="en-US" altLang="ko-KR" dirty="0"/>
+              <a:t>.</a:t>
+            </a:r>
+          </a:p>
+          <a:p>
+            <a:r>
+              <a:rPr lang="ko-KR" altLang="en-US" dirty="0"/>
+              <a:t>그저 </a:t>
+            </a:r>
+            <a:r>
+              <a:rPr lang="en-US" altLang="ko-KR" dirty="0"/>
+              <a:t>Game </a:t>
+            </a:r>
+            <a:r>
+              <a:rPr lang="ko-KR" altLang="en-US" dirty="0"/>
+              <a:t>구조체에 있는 </a:t>
+            </a:r>
+            <a:r>
+              <a:rPr lang="en-US" altLang="ko-KR" dirty="0" err="1"/>
+              <a:t>RenderTour</a:t>
+            </a:r>
+            <a:r>
+              <a:rPr lang="en-US" altLang="ko-KR" dirty="0"/>
+              <a:t> </a:t>
+            </a:r>
+            <a:r>
+              <a:rPr lang="ko-KR" altLang="en-US" dirty="0"/>
+              <a:t>함수를 호출하면 된다</a:t>
+            </a:r>
+            <a:r>
+              <a:rPr lang="en-US" altLang="ko-KR" dirty="0"/>
+              <a:t>.</a:t>
+            </a:r>
+          </a:p>
+          <a:p>
+            <a:endParaRPr lang="en-US" altLang="ko-KR" dirty="0"/>
+          </a:p>
+          <a:p>
+            <a:r>
+              <a:rPr lang="ko-KR" altLang="en-US" dirty="0"/>
+              <a:t>그럼 오브젝트마다 클래스의 </a:t>
+            </a:r>
+            <a:r>
+              <a:rPr lang="en-US" altLang="ko-KR" dirty="0"/>
+              <a:t>inline static </a:t>
+            </a:r>
+            <a:r>
+              <a:rPr lang="ko-KR" altLang="en-US" dirty="0"/>
+              <a:t>함수 포인터를 이용해 자신의 </a:t>
+            </a:r>
+            <a:r>
+              <a:rPr lang="ko-KR" altLang="en-US" dirty="0" err="1"/>
+              <a:t>맴버함수처럼</a:t>
+            </a:r>
+            <a:r>
+              <a:rPr lang="ko-KR" altLang="en-US" dirty="0"/>
+              <a:t> 호출을 하게 된다</a:t>
+            </a:r>
+            <a:r>
+              <a:rPr lang="en-US" altLang="ko-KR" dirty="0"/>
+              <a:t>.</a:t>
+            </a:r>
+          </a:p>
+          <a:p>
+            <a:r>
+              <a:rPr lang="ko-KR" altLang="en-US" dirty="0"/>
+              <a:t>해당 </a:t>
+            </a:r>
+            <a:r>
+              <a:rPr lang="ko-KR" altLang="en-US" dirty="0" err="1"/>
+              <a:t>함수포인터는</a:t>
+            </a:r>
+            <a:r>
+              <a:rPr lang="ko-KR" altLang="en-US" dirty="0"/>
+              <a:t> 작업을 시작하기 전에 프로그래머가 정할 수 있으며</a:t>
+            </a:r>
+            <a:r>
+              <a:rPr lang="en-US" altLang="ko-KR" dirty="0"/>
+              <a:t>, </a:t>
+            </a:r>
+            <a:r>
+              <a:rPr lang="ko-KR" altLang="en-US" dirty="0"/>
+              <a:t>그것은 </a:t>
+            </a:r>
+            <a:r>
+              <a:rPr lang="en-US" altLang="ko-KR" dirty="0"/>
+              <a:t>Update, Render, </a:t>
+            </a:r>
+            <a:r>
+              <a:rPr lang="en-US" altLang="ko-KR" dirty="0" err="1"/>
+              <a:t>BLASUpdate</a:t>
+            </a:r>
+            <a:r>
+              <a:rPr lang="ko-KR" altLang="en-US" dirty="0"/>
+              <a:t>등</a:t>
+            </a:r>
+            <a:endParaRPr lang="en-US" altLang="ko-KR" dirty="0"/>
+          </a:p>
+          <a:p>
+            <a:r>
+              <a:rPr lang="ko-KR" altLang="en-US" dirty="0"/>
+              <a:t>다양한 작업을 할 수 있다</a:t>
+            </a:r>
+            <a:r>
+              <a:rPr lang="en-US" altLang="ko-KR" dirty="0"/>
+              <a:t>.</a:t>
+            </a:r>
+          </a:p>
+          <a:p>
+            <a:r>
+              <a:rPr lang="ko-KR" altLang="en-US" dirty="0"/>
+              <a:t>또한 </a:t>
+            </a:r>
+            <a:r>
+              <a:rPr lang="en-US" altLang="ko-KR" dirty="0" err="1"/>
+              <a:t>RenderTour</a:t>
+            </a:r>
+            <a:r>
+              <a:rPr lang="en-US" altLang="ko-KR" dirty="0"/>
+              <a:t> </a:t>
+            </a:r>
+            <a:r>
+              <a:rPr lang="ko-KR" altLang="en-US" dirty="0"/>
+              <a:t>함수는 </a:t>
+            </a:r>
+            <a:r>
+              <a:rPr lang="en-US" altLang="ko-KR" dirty="0"/>
+              <a:t>template</a:t>
+            </a:r>
+            <a:r>
+              <a:rPr lang="ko-KR" altLang="en-US" dirty="0"/>
+              <a:t>함수이기 때문에</a:t>
+            </a:r>
+            <a:r>
+              <a:rPr lang="en-US" altLang="ko-KR" dirty="0"/>
+              <a:t>, </a:t>
+            </a:r>
+            <a:r>
+              <a:rPr lang="ko-KR" altLang="en-US" dirty="0" err="1"/>
+              <a:t>탬플릿</a:t>
+            </a:r>
+            <a:r>
+              <a:rPr lang="ko-KR" altLang="en-US" dirty="0"/>
+              <a:t> 변수로 </a:t>
+            </a:r>
+            <a:endParaRPr lang="en-US" altLang="ko-KR" dirty="0"/>
+          </a:p>
+          <a:p>
+            <a:r>
+              <a:rPr lang="ko-KR" altLang="en-US" dirty="0"/>
+              <a:t>어떤 오브젝트에 대해 연산을 </a:t>
+            </a:r>
+            <a:r>
+              <a:rPr lang="ko-KR" altLang="en-US" dirty="0" err="1"/>
+              <a:t>수행할건지도</a:t>
+            </a:r>
+            <a:r>
+              <a:rPr lang="ko-KR" altLang="en-US" dirty="0"/>
+              <a:t> 선택이 가능하다</a:t>
+            </a:r>
+            <a:r>
+              <a:rPr lang="en-US" altLang="ko-KR" dirty="0"/>
+              <a:t>.</a:t>
+            </a:r>
+          </a:p>
+          <a:p>
+            <a:r>
+              <a:rPr lang="ko-KR" altLang="en-US" dirty="0"/>
+              <a:t>내부적으로 </a:t>
+            </a:r>
+            <a:r>
+              <a:rPr lang="en-US" altLang="ko-KR" dirty="0"/>
+              <a:t>if </a:t>
+            </a:r>
+            <a:r>
+              <a:rPr lang="en-US" altLang="ko-KR" dirty="0" err="1"/>
+              <a:t>constexpr</a:t>
+            </a:r>
+            <a:r>
+              <a:rPr lang="en-US" altLang="ko-KR" dirty="0"/>
+              <a:t> </a:t>
+            </a:r>
+            <a:r>
+              <a:rPr lang="ko-KR" altLang="en-US" dirty="0"/>
+              <a:t>로 되어있어서 변수가 다르면 컴파일러는 다른 코드를 만든다</a:t>
+            </a:r>
+            <a:r>
+              <a:rPr lang="en-US" altLang="ko-KR" dirty="0"/>
+              <a:t>.</a:t>
+            </a:r>
           </a:p>
         </p:txBody>
       </p:sp>

--- a/Conference/GraphicsStudy/GraphicsHighLevelDesign.pptx
+++ b/Conference/GraphicsStudy/GraphicsHighLevelDesign.pptx
@@ -289,7 +289,7 @@
           <a:p>
             <a:fld id="{D8810A9B-0CC6-4053-BA0B-965178095DC3}" type="datetimeFigureOut">
               <a:rPr lang="ko-KR" altLang="en-US" smtClean="0"/>
-              <a:t>2026-03-07</a:t>
+              <a:t>2026-03-12</a:t>
             </a:fld>
             <a:endParaRPr lang="ko-KR" altLang="en-US"/>
           </a:p>
@@ -487,7 +487,7 @@
           <a:p>
             <a:fld id="{D8810A9B-0CC6-4053-BA0B-965178095DC3}" type="datetimeFigureOut">
               <a:rPr lang="ko-KR" altLang="en-US" smtClean="0"/>
-              <a:t>2026-03-07</a:t>
+              <a:t>2026-03-12</a:t>
             </a:fld>
             <a:endParaRPr lang="ko-KR" altLang="en-US"/>
           </a:p>
@@ -695,7 +695,7 @@
           <a:p>
             <a:fld id="{D8810A9B-0CC6-4053-BA0B-965178095DC3}" type="datetimeFigureOut">
               <a:rPr lang="ko-KR" altLang="en-US" smtClean="0"/>
-              <a:t>2026-03-07</a:t>
+              <a:t>2026-03-12</a:t>
             </a:fld>
             <a:endParaRPr lang="ko-KR" altLang="en-US"/>
           </a:p>
@@ -893,7 +893,7 @@
           <a:p>
             <a:fld id="{D8810A9B-0CC6-4053-BA0B-965178095DC3}" type="datetimeFigureOut">
               <a:rPr lang="ko-KR" altLang="en-US" smtClean="0"/>
-              <a:t>2026-03-07</a:t>
+              <a:t>2026-03-12</a:t>
             </a:fld>
             <a:endParaRPr lang="ko-KR" altLang="en-US"/>
           </a:p>
@@ -1168,7 +1168,7 @@
           <a:p>
             <a:fld id="{D8810A9B-0CC6-4053-BA0B-965178095DC3}" type="datetimeFigureOut">
               <a:rPr lang="ko-KR" altLang="en-US" smtClean="0"/>
-              <a:t>2026-03-07</a:t>
+              <a:t>2026-03-12</a:t>
             </a:fld>
             <a:endParaRPr lang="ko-KR" altLang="en-US"/>
           </a:p>
@@ -1433,7 +1433,7 @@
           <a:p>
             <a:fld id="{D8810A9B-0CC6-4053-BA0B-965178095DC3}" type="datetimeFigureOut">
               <a:rPr lang="ko-KR" altLang="en-US" smtClean="0"/>
-              <a:t>2026-03-07</a:t>
+              <a:t>2026-03-12</a:t>
             </a:fld>
             <a:endParaRPr lang="ko-KR" altLang="en-US"/>
           </a:p>
@@ -1845,7 +1845,7 @@
           <a:p>
             <a:fld id="{D8810A9B-0CC6-4053-BA0B-965178095DC3}" type="datetimeFigureOut">
               <a:rPr lang="ko-KR" altLang="en-US" smtClean="0"/>
-              <a:t>2026-03-07</a:t>
+              <a:t>2026-03-12</a:t>
             </a:fld>
             <a:endParaRPr lang="ko-KR" altLang="en-US"/>
           </a:p>
@@ -1986,7 +1986,7 @@
           <a:p>
             <a:fld id="{D8810A9B-0CC6-4053-BA0B-965178095DC3}" type="datetimeFigureOut">
               <a:rPr lang="ko-KR" altLang="en-US" smtClean="0"/>
-              <a:t>2026-03-07</a:t>
+              <a:t>2026-03-12</a:t>
             </a:fld>
             <a:endParaRPr lang="ko-KR" altLang="en-US"/>
           </a:p>
@@ -2099,7 +2099,7 @@
           <a:p>
             <a:fld id="{D8810A9B-0CC6-4053-BA0B-965178095DC3}" type="datetimeFigureOut">
               <a:rPr lang="ko-KR" altLang="en-US" smtClean="0"/>
-              <a:t>2026-03-07</a:t>
+              <a:t>2026-03-12</a:t>
             </a:fld>
             <a:endParaRPr lang="ko-KR" altLang="en-US"/>
           </a:p>
@@ -2410,7 +2410,7 @@
           <a:p>
             <a:fld id="{D8810A9B-0CC6-4053-BA0B-965178095DC3}" type="datetimeFigureOut">
               <a:rPr lang="ko-KR" altLang="en-US" smtClean="0"/>
-              <a:t>2026-03-07</a:t>
+              <a:t>2026-03-12</a:t>
             </a:fld>
             <a:endParaRPr lang="ko-KR" altLang="en-US"/>
           </a:p>
@@ -2698,7 +2698,7 @@
           <a:p>
             <a:fld id="{D8810A9B-0CC6-4053-BA0B-965178095DC3}" type="datetimeFigureOut">
               <a:rPr lang="ko-KR" altLang="en-US" smtClean="0"/>
-              <a:t>2026-03-07</a:t>
+              <a:t>2026-03-12</a:t>
             </a:fld>
             <a:endParaRPr lang="ko-KR" altLang="en-US"/>
           </a:p>
@@ -2939,7 +2939,7 @@
           <a:p>
             <a:fld id="{D8810A9B-0CC6-4053-BA0B-965178095DC3}" type="datetimeFigureOut">
               <a:rPr lang="ko-KR" altLang="en-US" smtClean="0"/>
-              <a:t>2026-03-07</a:t>
+              <a:t>2026-03-12</a:t>
             </a:fld>
             <a:endParaRPr lang="ko-KR" altLang="en-US"/>
           </a:p>
@@ -4837,8 +4837,8 @@
           </a:p>
         </p:txBody>
       </p:sp>
-      <mc:AlternateContent xmlns:mc="http://schemas.openxmlformats.org/markup-compatibility/2006">
-        <mc:Choice xmlns:pslz="http://schemas.microsoft.com/office/powerpoint/2016/slidezoom" Requires="pslz">
+      <mc:AlternateContent xmlns:mc="http://schemas.openxmlformats.org/markup-compatibility/2006" xmlns:pslz="http://schemas.microsoft.com/office/powerpoint/2016/slidezoom">
+        <mc:Choice Requires="pslz">
           <p:graphicFrame>
             <p:nvGraphicFramePr>
               <p:cNvPr id="11" name="슬라이드 확대/축소 10">
@@ -4895,7 +4895,7 @@
             </a:graphic>
           </p:graphicFrame>
         </mc:Choice>
-        <mc:Fallback>
+        <mc:Fallback xmlns="">
           <p:pic>
             <p:nvPicPr>
               <p:cNvPr id="11" name="슬라이드 확대/축소 10">
@@ -4912,7 +4912,7 @@
               <p:nvPr/>
             </p:nvPicPr>
             <p:blipFill>
-              <a:blip r:embed="rId8"/>
+              <a:blip r:embed="rId9"/>
               <a:stretch>
                 <a:fillRect/>
               </a:stretch>
@@ -6720,8 +6720,8 @@
           </a:p>
         </p:txBody>
       </p:sp>
-      <mc:AlternateContent xmlns:mc="http://schemas.openxmlformats.org/markup-compatibility/2006">
-        <mc:Choice xmlns:pslz="http://schemas.microsoft.com/office/powerpoint/2016/slidezoom" Requires="pslz">
+      <mc:AlternateContent xmlns:mc="http://schemas.openxmlformats.org/markup-compatibility/2006" xmlns:pslz="http://schemas.microsoft.com/office/powerpoint/2016/slidezoom">
+        <mc:Choice Requires="pslz">
           <p:graphicFrame>
             <p:nvGraphicFramePr>
               <p:cNvPr id="8" name="슬라이드 확대/축소 7">
@@ -6778,7 +6778,7 @@
             </a:graphic>
           </p:graphicFrame>
         </mc:Choice>
-        <mc:Fallback>
+        <mc:Fallback xmlns="">
           <p:pic>
             <p:nvPicPr>
               <p:cNvPr id="8" name="슬라이드 확대/축소 7">
@@ -6795,7 +6795,7 @@
               <p:nvPr/>
             </p:nvPicPr>
             <p:blipFill>
-              <a:blip r:embed="rId2"/>
+              <a:blip r:embed="rId4"/>
               <a:stretch>
                 <a:fillRect/>
               </a:stretch>
@@ -7370,8 +7370,8 @@
           </a:p>
         </p:txBody>
       </p:sp>
-      <mc:AlternateContent xmlns:mc="http://schemas.openxmlformats.org/markup-compatibility/2006">
-        <mc:Choice xmlns:pslz="http://schemas.microsoft.com/office/powerpoint/2016/slidezoom" Requires="pslz">
+      <mc:AlternateContent xmlns:mc="http://schemas.openxmlformats.org/markup-compatibility/2006" xmlns:pslz="http://schemas.microsoft.com/office/powerpoint/2016/slidezoom">
+        <mc:Choice Requires="pslz">
           <p:graphicFrame>
             <p:nvGraphicFramePr>
               <p:cNvPr id="5" name="슬라이드 확대/축소 4">
@@ -7428,7 +7428,7 @@
             </a:graphic>
           </p:graphicFrame>
         </mc:Choice>
-        <mc:Fallback>
+        <mc:Fallback xmlns="">
           <p:pic>
             <p:nvPicPr>
               <p:cNvPr id="5" name="슬라이드 확대/축소 4">
@@ -7445,7 +7445,7 @@
               <p:nvPr/>
             </p:nvPicPr>
             <p:blipFill>
-              <a:blip r:embed="rId2"/>
+              <a:blip r:embed="rId4"/>
               <a:stretch>
                 <a:fillRect/>
               </a:stretch>
@@ -7756,8 +7756,8 @@
           </a:p>
         </p:txBody>
       </p:sp>
-      <mc:AlternateContent xmlns:mc="http://schemas.openxmlformats.org/markup-compatibility/2006">
-        <mc:Choice xmlns:pslz="http://schemas.microsoft.com/office/powerpoint/2016/slidezoom" Requires="pslz">
+      <mc:AlternateContent xmlns:mc="http://schemas.openxmlformats.org/markup-compatibility/2006" xmlns:pslz="http://schemas.microsoft.com/office/powerpoint/2016/slidezoom">
+        <mc:Choice Requires="pslz">
           <p:graphicFrame>
             <p:nvGraphicFramePr>
               <p:cNvPr id="6" name="슬라이드 확대/축소 5">
@@ -7814,7 +7814,7 @@
             </a:graphic>
           </p:graphicFrame>
         </mc:Choice>
-        <mc:Fallback>
+        <mc:Fallback xmlns="">
           <p:pic>
             <p:nvPicPr>
               <p:cNvPr id="6" name="슬라이드 확대/축소 5">
@@ -7831,7 +7831,7 @@
               <p:nvPr/>
             </p:nvPicPr>
             <p:blipFill>
-              <a:blip r:embed="rId2"/>
+              <a:blip r:embed="rId4"/>
               <a:stretch>
                 <a:fillRect/>
               </a:stretch>
@@ -8685,7 +8685,7 @@
         <p:spPr>
           <a:xfrm>
             <a:off x="0" y="776749"/>
-            <a:ext cx="2989921" cy="369332"/>
+            <a:ext cx="3712876" cy="369332"/>
           </a:xfrm>
           <a:prstGeom prst="rect">
             <a:avLst/>
@@ -8700,7 +8700,7 @@
           <a:p>
             <a:r>
               <a:rPr lang="ko-KR" altLang="en-US" dirty="0"/>
-              <a:t>전체 타임라인을 보여준다</a:t>
+              <a:t>전체 실행의 타임라인을 보여준다</a:t>
             </a:r>
             <a:r>
               <a:rPr lang="en-US" altLang="ko-KR" dirty="0"/>
@@ -9101,8 +9101,8 @@
           </p:pic>
         </mc:Fallback>
       </mc:AlternateContent>
-      <mc:AlternateContent xmlns:mc="http://schemas.openxmlformats.org/markup-compatibility/2006">
-        <mc:Choice xmlns:pslz="http://schemas.microsoft.com/office/powerpoint/2016/slidezoom" Requires="pslz">
+      <mc:AlternateContent xmlns:mc="http://schemas.openxmlformats.org/markup-compatibility/2006" xmlns:pslz="http://schemas.microsoft.com/office/powerpoint/2016/slidezoom">
+        <mc:Choice Requires="pslz">
           <p:graphicFrame>
             <p:nvGraphicFramePr>
               <p:cNvPr id="18" name="슬라이드 확대/축소 17">
@@ -9159,7 +9159,7 @@
             </a:graphic>
           </p:graphicFrame>
         </mc:Choice>
-        <mc:Fallback>
+        <mc:Fallback xmlns="">
           <p:pic>
             <p:nvPicPr>
               <p:cNvPr id="18" name="슬라이드 확대/축소 17">
@@ -9176,7 +9176,7 @@
               <p:nvPr/>
             </p:nvPicPr>
             <p:blipFill>
-              <a:blip r:embed="rId8"/>
+              <a:blip r:embed="rId10"/>
               <a:stretch>
                 <a:fillRect/>
               </a:stretch>

--- a/Conference/GraphicsStudy/GraphicsHighLevelDesign.pptx
+++ b/Conference/GraphicsStudy/GraphicsHighLevelDesign.pptx
@@ -289,7 +289,7 @@
           <a:p>
             <a:fld id="{D8810A9B-0CC6-4053-BA0B-965178095DC3}" type="datetimeFigureOut">
               <a:rPr lang="ko-KR" altLang="en-US" smtClean="0"/>
-              <a:t>2026-03-12</a:t>
+              <a:t>2026-03-16</a:t>
             </a:fld>
             <a:endParaRPr lang="ko-KR" altLang="en-US"/>
           </a:p>
@@ -487,7 +487,7 @@
           <a:p>
             <a:fld id="{D8810A9B-0CC6-4053-BA0B-965178095DC3}" type="datetimeFigureOut">
               <a:rPr lang="ko-KR" altLang="en-US" smtClean="0"/>
-              <a:t>2026-03-12</a:t>
+              <a:t>2026-03-16</a:t>
             </a:fld>
             <a:endParaRPr lang="ko-KR" altLang="en-US"/>
           </a:p>
@@ -695,7 +695,7 @@
           <a:p>
             <a:fld id="{D8810A9B-0CC6-4053-BA0B-965178095DC3}" type="datetimeFigureOut">
               <a:rPr lang="ko-KR" altLang="en-US" smtClean="0"/>
-              <a:t>2026-03-12</a:t>
+              <a:t>2026-03-16</a:t>
             </a:fld>
             <a:endParaRPr lang="ko-KR" altLang="en-US"/>
           </a:p>
@@ -893,7 +893,7 @@
           <a:p>
             <a:fld id="{D8810A9B-0CC6-4053-BA0B-965178095DC3}" type="datetimeFigureOut">
               <a:rPr lang="ko-KR" altLang="en-US" smtClean="0"/>
-              <a:t>2026-03-12</a:t>
+              <a:t>2026-03-16</a:t>
             </a:fld>
             <a:endParaRPr lang="ko-KR" altLang="en-US"/>
           </a:p>
@@ -1168,7 +1168,7 @@
           <a:p>
             <a:fld id="{D8810A9B-0CC6-4053-BA0B-965178095DC3}" type="datetimeFigureOut">
               <a:rPr lang="ko-KR" altLang="en-US" smtClean="0"/>
-              <a:t>2026-03-12</a:t>
+              <a:t>2026-03-16</a:t>
             </a:fld>
             <a:endParaRPr lang="ko-KR" altLang="en-US"/>
           </a:p>
@@ -1433,7 +1433,7 @@
           <a:p>
             <a:fld id="{D8810A9B-0CC6-4053-BA0B-965178095DC3}" type="datetimeFigureOut">
               <a:rPr lang="ko-KR" altLang="en-US" smtClean="0"/>
-              <a:t>2026-03-12</a:t>
+              <a:t>2026-03-16</a:t>
             </a:fld>
             <a:endParaRPr lang="ko-KR" altLang="en-US"/>
           </a:p>
@@ -1845,7 +1845,7 @@
           <a:p>
             <a:fld id="{D8810A9B-0CC6-4053-BA0B-965178095DC3}" type="datetimeFigureOut">
               <a:rPr lang="ko-KR" altLang="en-US" smtClean="0"/>
-              <a:t>2026-03-12</a:t>
+              <a:t>2026-03-16</a:t>
             </a:fld>
             <a:endParaRPr lang="ko-KR" altLang="en-US"/>
           </a:p>
@@ -1986,7 +1986,7 @@
           <a:p>
             <a:fld id="{D8810A9B-0CC6-4053-BA0B-965178095DC3}" type="datetimeFigureOut">
               <a:rPr lang="ko-KR" altLang="en-US" smtClean="0"/>
-              <a:t>2026-03-12</a:t>
+              <a:t>2026-03-16</a:t>
             </a:fld>
             <a:endParaRPr lang="ko-KR" altLang="en-US"/>
           </a:p>
@@ -2099,7 +2099,7 @@
           <a:p>
             <a:fld id="{D8810A9B-0CC6-4053-BA0B-965178095DC3}" type="datetimeFigureOut">
               <a:rPr lang="ko-KR" altLang="en-US" smtClean="0"/>
-              <a:t>2026-03-12</a:t>
+              <a:t>2026-03-16</a:t>
             </a:fld>
             <a:endParaRPr lang="ko-KR" altLang="en-US"/>
           </a:p>
@@ -2410,7 +2410,7 @@
           <a:p>
             <a:fld id="{D8810A9B-0CC6-4053-BA0B-965178095DC3}" type="datetimeFigureOut">
               <a:rPr lang="ko-KR" altLang="en-US" smtClean="0"/>
-              <a:t>2026-03-12</a:t>
+              <a:t>2026-03-16</a:t>
             </a:fld>
             <a:endParaRPr lang="ko-KR" altLang="en-US"/>
           </a:p>
@@ -2698,7 +2698,7 @@
           <a:p>
             <a:fld id="{D8810A9B-0CC6-4053-BA0B-965178095DC3}" type="datetimeFigureOut">
               <a:rPr lang="ko-KR" altLang="en-US" smtClean="0"/>
-              <a:t>2026-03-12</a:t>
+              <a:t>2026-03-16</a:t>
             </a:fld>
             <a:endParaRPr lang="ko-KR" altLang="en-US"/>
           </a:p>
@@ -2939,7 +2939,7 @@
           <a:p>
             <a:fld id="{D8810A9B-0CC6-4053-BA0B-965178095DC3}" type="datetimeFigureOut">
               <a:rPr lang="ko-KR" altLang="en-US" smtClean="0"/>
-              <a:t>2026-03-12</a:t>
+              <a:t>2026-03-16</a:t>
             </a:fld>
             <a:endParaRPr lang="ko-KR" altLang="en-US"/>
           </a:p>
@@ -4182,8 +4182,8 @@
         </p:nvSpPr>
         <p:spPr>
           <a:xfrm>
-            <a:off x="0" y="868680"/>
-            <a:ext cx="2476960" cy="369332"/>
+            <a:off x="104237" y="868680"/>
+            <a:ext cx="12087763" cy="2031325"/>
           </a:xfrm>
           <a:prstGeom prst="rect">
             <a:avLst/>
@@ -4191,24 +4191,534 @@
           <a:noFill/>
         </p:spPr>
         <p:txBody>
-          <a:bodyPr wrap="none" rtlCol="0">
+          <a:bodyPr wrap="square" rtlCol="0">
             <a:spAutoFit/>
           </a:bodyPr>
           <a:lstStyle/>
           <a:p>
             <a:r>
-              <a:rPr lang="ko-KR" altLang="en-US" dirty="0"/>
-              <a:t>동건아 이거 </a:t>
-            </a:r>
-            <a:r>
-              <a:rPr lang="ko-KR" altLang="en-US" dirty="0" err="1"/>
-              <a:t>적어주셈</a:t>
-            </a:r>
-            <a:r>
-              <a:rPr lang="en-US" altLang="ko-KR" dirty="0"/>
+              <a:rPr lang="en-US" altLang="ko-KR" b="1"/>
+              <a:t>Particle Management &amp; Update</a:t>
+            </a:r>
+          </a:p>
+          <a:p>
+            <a:r>
+              <a:rPr lang="ko-KR" altLang="en-US"/>
+              <a:t>모든 파티클 데이터는 </a:t>
+            </a:r>
+            <a:r>
+              <a:rPr lang="en-US" altLang="ko-KR" b="1"/>
+              <a:t>StructuredBuffer</a:t>
+            </a:r>
+            <a:r>
+              <a:rPr lang="ko-KR" altLang="en-US"/>
+              <a:t> 형태로 </a:t>
+            </a:r>
+            <a:r>
+              <a:rPr lang="en-US" altLang="ko-KR"/>
+              <a:t>GPU </a:t>
+            </a:r>
+            <a:r>
+              <a:rPr lang="ko-KR" altLang="en-US"/>
+              <a:t>전용 메모리에 상주하며</a:t>
+            </a:r>
+            <a:r>
+              <a:rPr lang="en-US" altLang="ko-KR"/>
+              <a:t>, </a:t>
+            </a:r>
+            <a:r>
+              <a:rPr lang="en-US" altLang="ko-KR" b="1"/>
+              <a:t>Compute Shader</a:t>
+            </a:r>
+            <a:r>
+              <a:rPr lang="ko-KR" altLang="en-US"/>
+              <a:t>를 통해 </a:t>
+            </a:r>
+            <a:r>
+              <a:rPr lang="en-US" altLang="ko-KR"/>
+              <a:t>CPU </a:t>
+            </a:r>
+            <a:r>
+              <a:rPr lang="ko-KR" altLang="en-US"/>
+              <a:t>개입 없이 업데이트됨</a:t>
+            </a:r>
+            <a:endParaRPr lang="en-US" altLang="ko-KR"/>
+          </a:p>
+          <a:p>
+            <a:r>
+              <a:rPr lang="en-US" altLang="ko-KR" b="1"/>
+              <a:t>Update Logic</a:t>
+            </a:r>
+            <a:r>
+              <a:rPr lang="en-US" altLang="ko-KR"/>
+              <a:t>: </a:t>
+            </a:r>
+            <a:r>
+              <a:rPr lang="ko-KR" altLang="en-US"/>
+              <a:t>매 프레임 </a:t>
+            </a:r>
+            <a:r>
+              <a:rPr lang="en-US" altLang="ko-KR"/>
+              <a:t>TimeCB</a:t>
+            </a:r>
+            <a:r>
+              <a:rPr lang="ko-KR" altLang="en-US"/>
+              <a:t>로부터 </a:t>
+            </a:r>
+            <a:r>
+              <a:rPr lang="en-US" altLang="ko-KR"/>
+              <a:t>dt(DeltaTime)</a:t>
+            </a:r>
+            <a:r>
+              <a:rPr lang="ko-KR" altLang="en-US"/>
+              <a:t>를 전달받아 위치 연산</a:t>
+            </a:r>
+            <a:r>
+              <a:rPr lang="en-US" altLang="ko-KR"/>
+              <a:t>, </a:t>
+            </a:r>
+            <a:r>
+              <a:rPr lang="ko-KR" altLang="en-US"/>
+              <a:t>수명</a:t>
+            </a:r>
+            <a:r>
+              <a:rPr lang="en-US" altLang="ko-KR"/>
+              <a:t>(Life/Age) </a:t>
+            </a:r>
+            <a:r>
+              <a:rPr lang="ko-KR" altLang="en-US"/>
+              <a:t>계산</a:t>
+            </a:r>
+            <a:r>
+              <a:rPr lang="en-US" altLang="ko-KR"/>
+              <a:t>, </a:t>
+            </a:r>
+            <a:r>
+              <a:rPr lang="ko-KR" altLang="en-US"/>
+              <a:t>물리 시뮬레이션</a:t>
+            </a:r>
+            <a:r>
+              <a:rPr lang="en-US" altLang="ko-KR"/>
+              <a:t>(</a:t>
+            </a:r>
+            <a:r>
+              <a:rPr lang="ko-KR" altLang="en-US"/>
+              <a:t>중력</a:t>
+            </a:r>
+            <a:r>
+              <a:rPr lang="en-US" altLang="ko-KR"/>
+              <a:t>, </a:t>
+            </a:r>
+            <a:r>
+              <a:rPr lang="ko-KR" altLang="en-US"/>
+              <a:t>감쇠</a:t>
+            </a:r>
+            <a:r>
+              <a:rPr lang="en-US" altLang="ko-KR"/>
+              <a:t>)</a:t>
+            </a:r>
+            <a:r>
+              <a:rPr lang="ko-KR" altLang="en-US"/>
+              <a:t>을 병렬로 수행</a:t>
+            </a:r>
+            <a:r>
+              <a:rPr lang="en-US" altLang="ko-KR"/>
               <a:t>.</a:t>
             </a:r>
+          </a:p>
+          <a:p>
+            <a:r>
+              <a:rPr lang="en-US" altLang="ko-KR" b="1"/>
+              <a:t>Dispatch Strategy</a:t>
+            </a:r>
+            <a:r>
+              <a:rPr lang="en-US" altLang="ko-KR"/>
+              <a:t>: </a:t>
+            </a:r>
+            <a:r>
+              <a:rPr lang="ko-KR" altLang="en-US"/>
+              <a:t>대량의 파티클을 처리하기 위해 파티클 개수에 맞춰 </a:t>
+            </a:r>
+            <a:r>
+              <a:rPr lang="en-US" altLang="ko-KR"/>
+              <a:t>Thread Group</a:t>
+            </a:r>
+            <a:r>
+              <a:rPr lang="ko-KR" altLang="en-US"/>
+              <a:t>을 최적화하여 호출</a:t>
+            </a:r>
+            <a:r>
+              <a:rPr lang="en-US" altLang="ko-KR"/>
+              <a:t>.</a:t>
+            </a:r>
+          </a:p>
+          <a:p>
+            <a:r>
+              <a:rPr lang="en-US" altLang="ko-KR"/>
+              <a:t>.</a:t>
+            </a:r>
             <a:endParaRPr lang="ko-KR" altLang="en-US" dirty="0"/>
+          </a:p>
+        </p:txBody>
+      </p:sp>
+      <p:sp>
+        <p:nvSpPr>
+          <p:cNvPr id="5" name="TextBox 4">
+            <a:extLst>
+              <a:ext uri="{FF2B5EF4-FFF2-40B4-BE49-F238E27FC236}">
+                <a16:creationId xmlns:a16="http://schemas.microsoft.com/office/drawing/2014/main" id="{1330DBC7-DC95-8B9C-5FC6-18A01CB67F68}"/>
+              </a:ext>
+            </a:extLst>
+          </p:cNvPr>
+          <p:cNvSpPr txBox="1"/>
+          <p:nvPr/>
+        </p:nvSpPr>
+        <p:spPr>
+          <a:xfrm>
+            <a:off x="0" y="2826633"/>
+            <a:ext cx="12087763" cy="3416320"/>
+          </a:xfrm>
+          <a:prstGeom prst="rect">
+            <a:avLst/>
+          </a:prstGeom>
+          <a:noFill/>
+        </p:spPr>
+        <p:txBody>
+          <a:bodyPr wrap="square">
+            <a:spAutoFit/>
+          </a:bodyPr>
+          <a:lstStyle/>
+          <a:p>
+            <a:pPr>
+              <a:buNone/>
+            </a:pPr>
+            <a:r>
+              <a:rPr lang="en-US" altLang="ko-KR" b="1"/>
+              <a:t>Resource &amp; Rendering Pipeline</a:t>
+            </a:r>
+          </a:p>
+          <a:p>
+            <a:pPr>
+              <a:buNone/>
+            </a:pPr>
+            <a:r>
+              <a:rPr lang="en-US" altLang="ko-KR"/>
+              <a:t>CPU</a:t>
+            </a:r>
+            <a:r>
+              <a:rPr lang="ko-KR" altLang="en-US"/>
+              <a:t>는 최소한의 상수 데이터만 갱신하고</a:t>
+            </a:r>
+            <a:r>
+              <a:rPr lang="en-US" altLang="ko-KR"/>
+              <a:t>, </a:t>
+            </a:r>
+            <a:r>
+              <a:rPr lang="ko-KR" altLang="en-US"/>
+              <a:t>실제 렌더링에 필요한 모든 연산은 </a:t>
+            </a:r>
+            <a:r>
+              <a:rPr lang="en-US" altLang="ko-KR"/>
+              <a:t>GPU </a:t>
+            </a:r>
+            <a:r>
+              <a:rPr lang="ko-KR" altLang="en-US"/>
+              <a:t>내에서 완결</a:t>
+            </a:r>
+            <a:r>
+              <a:rPr lang="en-US" altLang="ko-KR"/>
+              <a:t>.</a:t>
+            </a:r>
+          </a:p>
+          <a:p>
+            <a:pPr>
+              <a:buFont typeface="Arial" panose="020B0604020202020204" pitchFamily="34" charset="0"/>
+              <a:buChar char="•"/>
+            </a:pPr>
+            <a:r>
+              <a:rPr lang="en-US" altLang="ko-KR" b="1"/>
+              <a:t>Root Signature Design</a:t>
+            </a:r>
+            <a:r>
+              <a:rPr lang="en-US" altLang="ko-KR"/>
+              <a:t>:</a:t>
+            </a:r>
+          </a:p>
+          <a:p>
+            <a:pPr marL="742950" lvl="1" indent="-285750">
+              <a:buFont typeface="Arial" panose="020B0604020202020204" pitchFamily="34" charset="0"/>
+              <a:buChar char="•"/>
+            </a:pPr>
+            <a:r>
+              <a:rPr lang="en-US" altLang="ko-KR" b="1"/>
+              <a:t>UAV (u0)</a:t>
+            </a:r>
+            <a:r>
+              <a:rPr lang="en-US" altLang="ko-KR"/>
+              <a:t>: </a:t>
+            </a:r>
+            <a:r>
+              <a:rPr lang="ko-KR" altLang="en-US"/>
+              <a:t>파티클 데이터 쓰기</a:t>
+            </a:r>
+            <a:r>
+              <a:rPr lang="en-US" altLang="ko-KR"/>
+              <a:t>/</a:t>
+            </a:r>
+            <a:r>
+              <a:rPr lang="ko-KR" altLang="en-US"/>
+              <a:t>읽기용 </a:t>
+            </a:r>
+            <a:r>
+              <a:rPr lang="en-US" altLang="ko-KR"/>
+              <a:t>(Compute)</a:t>
+            </a:r>
+          </a:p>
+          <a:p>
+            <a:pPr marL="742950" lvl="1" indent="-285750">
+              <a:buFont typeface="Arial" panose="020B0604020202020204" pitchFamily="34" charset="0"/>
+              <a:buChar char="•"/>
+            </a:pPr>
+            <a:r>
+              <a:rPr lang="en-US" altLang="ko-KR" b="1"/>
+              <a:t>SRV (t0)</a:t>
+            </a:r>
+            <a:r>
+              <a:rPr lang="en-US" altLang="ko-KR"/>
+              <a:t>: </a:t>
+            </a:r>
+            <a:r>
+              <a:rPr lang="ko-KR" altLang="en-US"/>
+              <a:t>업데이트된 데이터를 </a:t>
+            </a:r>
+            <a:r>
+              <a:rPr lang="en-US" altLang="ko-KR"/>
+              <a:t>Vertex Shader</a:t>
+            </a:r>
+            <a:r>
+              <a:rPr lang="ko-KR" altLang="en-US"/>
+              <a:t>에서 참조 </a:t>
+            </a:r>
+            <a:r>
+              <a:rPr lang="en-US" altLang="ko-KR"/>
+              <a:t>(Rendering)</a:t>
+            </a:r>
+          </a:p>
+          <a:p>
+            <a:pPr marL="742950" lvl="1" indent="-285750">
+              <a:buFont typeface="Arial" panose="020B0604020202020204" pitchFamily="34" charset="0"/>
+              <a:buChar char="•"/>
+            </a:pPr>
+            <a:r>
+              <a:rPr lang="en-US" altLang="ko-KR" b="1"/>
+              <a:t>CBV (b0, b1)</a:t>
+            </a:r>
+            <a:r>
+              <a:rPr lang="en-US" altLang="ko-KR"/>
+              <a:t>: </a:t>
+            </a:r>
+            <a:r>
+              <a:rPr lang="ko-KR" altLang="en-US"/>
+              <a:t>시간 데이터</a:t>
+            </a:r>
+            <a:r>
+              <a:rPr lang="en-US" altLang="ko-KR"/>
+              <a:t>(</a:t>
+            </a:r>
+            <a:r>
+              <a:rPr lang="en-US" altLang="ko-KR">
+                <a:latin typeface="Courier New" panose="02070309020205020404" pitchFamily="49" charset="0"/>
+              </a:rPr>
+              <a:t>TimeCB</a:t>
+            </a:r>
+            <a:r>
+              <a:rPr lang="en-US" altLang="ko-KR"/>
+              <a:t>) </a:t>
+            </a:r>
+            <a:r>
+              <a:rPr lang="ko-KR" altLang="en-US"/>
+              <a:t>및 특정 이벤트 데이터</a:t>
+            </a:r>
+            <a:r>
+              <a:rPr lang="en-US" altLang="ko-KR"/>
+              <a:t>(</a:t>
+            </a:r>
+            <a:r>
+              <a:rPr lang="en-US" altLang="ko-KR">
+                <a:latin typeface="Courier New" panose="02070309020205020404" pitchFamily="49" charset="0"/>
+              </a:rPr>
+              <a:t>MuzzleCB</a:t>
+            </a:r>
+            <a:r>
+              <a:rPr lang="en-US" altLang="ko-KR"/>
+              <a:t>) </a:t>
+            </a:r>
+            <a:r>
+              <a:rPr lang="ko-KR" altLang="en-US"/>
+              <a:t>바인딩</a:t>
+            </a:r>
+          </a:p>
+          <a:p>
+            <a:pPr>
+              <a:buFont typeface="Arial" panose="020B0604020202020204" pitchFamily="34" charset="0"/>
+              <a:buChar char="•"/>
+            </a:pPr>
+            <a:r>
+              <a:rPr lang="en-US" altLang="ko-KR" b="1"/>
+              <a:t>Geometry-less Rendering</a:t>
+            </a:r>
+            <a:r>
+              <a:rPr lang="en-US" altLang="ko-KR"/>
+              <a:t>:</a:t>
+            </a:r>
+          </a:p>
+          <a:p>
+            <a:pPr marL="742950" lvl="1" indent="-285750">
+              <a:buFont typeface="Arial" panose="020B0604020202020204" pitchFamily="34" charset="0"/>
+              <a:buChar char="•"/>
+            </a:pPr>
+            <a:r>
+              <a:rPr lang="ko-KR" altLang="en-US"/>
+              <a:t>별도의 </a:t>
+            </a:r>
+            <a:r>
+              <a:rPr lang="en-US" altLang="ko-KR"/>
+              <a:t>Vertex Buffer </a:t>
+            </a:r>
+            <a:r>
+              <a:rPr lang="ko-KR" altLang="en-US"/>
+              <a:t>없이 </a:t>
+            </a:r>
+            <a:r>
+              <a:rPr lang="en-US" altLang="ko-KR">
+                <a:latin typeface="Courier New" panose="02070309020205020404" pitchFamily="49" charset="0"/>
+              </a:rPr>
+              <a:t>SV_VertexID</a:t>
+            </a:r>
+            <a:r>
+              <a:rPr lang="ko-KR" altLang="en-US"/>
+              <a:t>를 사용하여 셰이더 내부에서 빌보드</a:t>
+            </a:r>
+            <a:r>
+              <a:rPr lang="en-US" altLang="ko-KR"/>
+              <a:t>(Billboard) </a:t>
+            </a:r>
+            <a:r>
+              <a:rPr lang="ko-KR" altLang="en-US"/>
+              <a:t>정점을 실시간 생성</a:t>
+            </a:r>
+            <a:r>
+              <a:rPr lang="en-US" altLang="ko-KR"/>
+              <a:t>.</a:t>
+            </a:r>
+            <a:r>
+              <a:rPr lang="ko-KR" altLang="en-US"/>
+              <a:t> </a:t>
+            </a:r>
+            <a:r>
+              <a:rPr lang="en-US" altLang="ko-KR" b="1"/>
+              <a:t>Instanced Drawing</a:t>
+            </a:r>
+            <a:r>
+              <a:rPr lang="en-US" altLang="ko-KR"/>
+              <a:t>: </a:t>
+            </a:r>
+            <a:r>
+              <a:rPr lang="ko-KR" altLang="en-US"/>
+              <a:t>파티클 개수만큼 </a:t>
+            </a:r>
+            <a:r>
+              <a:rPr lang="en-US" altLang="ko-KR">
+                <a:latin typeface="Courier New" panose="02070309020205020404" pitchFamily="49" charset="0"/>
+              </a:rPr>
+              <a:t>DrawInstanced</a:t>
+            </a:r>
+            <a:r>
+              <a:rPr lang="ko-KR" altLang="en-US"/>
+              <a:t>를 호출하여 기하학적 메모리 점유율을 최소화</a:t>
+            </a:r>
+            <a:r>
+              <a:rPr lang="en-US" altLang="ko-KR"/>
+              <a:t>.</a:t>
+            </a:r>
+          </a:p>
+          <a:p>
+            <a:pPr>
+              <a:buFont typeface="Arial" panose="020B0604020202020204" pitchFamily="34" charset="0"/>
+              <a:buChar char="•"/>
+            </a:pPr>
+            <a:r>
+              <a:rPr lang="en-US" altLang="ko-KR" b="1"/>
+              <a:t>Visual Optimization</a:t>
+            </a:r>
+            <a:r>
+              <a:rPr lang="en-US" altLang="ko-KR"/>
+              <a:t>:</a:t>
+            </a:r>
+          </a:p>
+          <a:p>
+            <a:pPr marL="742950" lvl="1" indent="-285750">
+              <a:buFont typeface="Arial" panose="020B0604020202020204" pitchFamily="34" charset="0"/>
+              <a:buChar char="•"/>
+            </a:pPr>
+            <a:r>
+              <a:rPr lang="en-US" altLang="ko-KR" b="1"/>
+              <a:t>Additive Blending</a:t>
+            </a:r>
+            <a:r>
+              <a:rPr lang="en-US" altLang="ko-KR"/>
+              <a:t>: </a:t>
+            </a:r>
+            <a:r>
+              <a:rPr lang="ko-KR" altLang="en-US"/>
+              <a:t>빛의 중첩 표현을 위해 가산 혼합 적용</a:t>
+            </a:r>
+            <a:r>
+              <a:rPr lang="en-US" altLang="ko-KR"/>
+              <a:t>.</a:t>
+            </a:r>
+          </a:p>
+          <a:p>
+            <a:pPr marL="742950" lvl="1" indent="-285750">
+              <a:buFont typeface="Arial" panose="020B0604020202020204" pitchFamily="34" charset="0"/>
+              <a:buChar char="•"/>
+            </a:pPr>
+            <a:r>
+              <a:rPr lang="en-US" altLang="ko-KR" b="1"/>
+              <a:t>Depth Stencil</a:t>
+            </a:r>
+            <a:r>
+              <a:rPr lang="en-US" altLang="ko-KR"/>
+              <a:t>: </a:t>
+            </a:r>
+            <a:r>
+              <a:rPr lang="ko-KR" altLang="en-US"/>
+              <a:t>파티클 간의 불필요한 가림을 방지하고 부드러운 합성을 위해 </a:t>
+            </a:r>
+            <a:r>
+              <a:rPr lang="en-US" altLang="ko-KR">
+                <a:latin typeface="Courier New" panose="02070309020205020404" pitchFamily="49" charset="0"/>
+              </a:rPr>
+              <a:t>DepthWrite</a:t>
+            </a:r>
+            <a:r>
+              <a:rPr lang="ko-KR" altLang="en-US"/>
+              <a:t>를 비활성화</a:t>
+            </a:r>
+            <a:r>
+              <a:rPr lang="en-US" altLang="ko-KR"/>
+              <a:t>(</a:t>
+            </a:r>
+            <a:r>
+              <a:rPr lang="en-US" altLang="ko-KR">
+                <a:latin typeface="Courier New" panose="02070309020205020404" pitchFamily="49" charset="0"/>
+              </a:rPr>
+              <a:t>ZERO</a:t>
+            </a:r>
+            <a:r>
+              <a:rPr lang="en-US" altLang="ko-KR"/>
+              <a:t>)</a:t>
+            </a:r>
           </a:p>
         </p:txBody>
       </p:sp>

--- a/Conference/GraphicsStudy/GraphicsHighLevelDesign.pptx
+++ b/Conference/GraphicsStudy/GraphicsHighLevelDesign.pptx
@@ -4,6 +4,9 @@
   <p:sldMasterIdLst>
     <p:sldMasterId id="2147483648" r:id="rId1"/>
   </p:sldMasterIdLst>
+  <p:notesMasterIdLst>
+    <p:notesMasterId r:id="rId36"/>
+  </p:notesMasterIdLst>
   <p:sldIdLst>
     <p:sldId id="256" r:id="rId2"/>
     <p:sldId id="257" r:id="rId3"/>
@@ -36,6 +39,9 @@
     <p:sldId id="284" r:id="rId30"/>
     <p:sldId id="285" r:id="rId31"/>
     <p:sldId id="281" r:id="rId32"/>
+    <p:sldId id="287" r:id="rId33"/>
+    <p:sldId id="288" r:id="rId34"/>
+    <p:sldId id="289" r:id="rId35"/>
   </p:sldIdLst>
   <p:sldSz cx="12192000" cy="6858000"/>
   <p:notesSz cx="6858000" cy="9144000"/>
@@ -142,6 +148,439 @@
 </p:presentation>
 </file>
 
+<file path=ppt/notesMasters/notesMaster1.xml><?xml version="1.0" encoding="utf-8"?>
+<p:notesMaster xmlns:a="http://schemas.openxmlformats.org/drawingml/2006/main" xmlns:r="http://schemas.openxmlformats.org/officeDocument/2006/relationships" xmlns:p="http://schemas.openxmlformats.org/presentationml/2006/main">
+  <p:cSld>
+    <p:bg>
+      <p:bgRef idx="1001">
+        <a:schemeClr val="bg1"/>
+      </p:bgRef>
+    </p:bg>
+    <p:spTree>
+      <p:nvGrpSpPr>
+        <p:cNvPr id="1" name=""/>
+        <p:cNvGrpSpPr/>
+        <p:nvPr/>
+      </p:nvGrpSpPr>
+      <p:grpSpPr>
+        <a:xfrm>
+          <a:off x="0" y="0"/>
+          <a:ext cx="0" cy="0"/>
+          <a:chOff x="0" y="0"/>
+          <a:chExt cx="0" cy="0"/>
+        </a:xfrm>
+      </p:grpSpPr>
+      <p:sp>
+        <p:nvSpPr>
+          <p:cNvPr id="2" name="머리글 개체 틀 1"/>
+          <p:cNvSpPr>
+            <a:spLocks noGrp="1"/>
+          </p:cNvSpPr>
+          <p:nvPr>
+            <p:ph type="hdr" sz="quarter"/>
+          </p:nvPr>
+        </p:nvSpPr>
+        <p:spPr>
+          <a:xfrm>
+            <a:off x="0" y="0"/>
+            <a:ext cx="2971800" cy="458788"/>
+          </a:xfrm>
+          <a:prstGeom prst="rect">
+            <a:avLst/>
+          </a:prstGeom>
+        </p:spPr>
+        <p:txBody>
+          <a:bodyPr vert="horz" lIns="91440" tIns="45720" rIns="91440" bIns="45720" rtlCol="0"/>
+          <a:lstStyle>
+            <a:lvl1pPr algn="l">
+              <a:defRPr sz="1200"/>
+            </a:lvl1pPr>
+          </a:lstStyle>
+          <a:p>
+            <a:endParaRPr lang="ko-KR" altLang="en-US"/>
+          </a:p>
+        </p:txBody>
+      </p:sp>
+      <p:sp>
+        <p:nvSpPr>
+          <p:cNvPr id="3" name="날짜 개체 틀 2"/>
+          <p:cNvSpPr>
+            <a:spLocks noGrp="1"/>
+          </p:cNvSpPr>
+          <p:nvPr>
+            <p:ph type="dt" idx="1"/>
+          </p:nvPr>
+        </p:nvSpPr>
+        <p:spPr>
+          <a:xfrm>
+            <a:off x="3884613" y="0"/>
+            <a:ext cx="2971800" cy="458788"/>
+          </a:xfrm>
+          <a:prstGeom prst="rect">
+            <a:avLst/>
+          </a:prstGeom>
+        </p:spPr>
+        <p:txBody>
+          <a:bodyPr vert="horz" lIns="91440" tIns="45720" rIns="91440" bIns="45720" rtlCol="0"/>
+          <a:lstStyle>
+            <a:lvl1pPr algn="r">
+              <a:defRPr sz="1200"/>
+            </a:lvl1pPr>
+          </a:lstStyle>
+          <a:p>
+            <a:fld id="{708C81D3-5E4D-495D-8DE1-4F2327BCEE89}" type="datetimeFigureOut">
+              <a:rPr lang="ko-KR" altLang="en-US" smtClean="0"/>
+              <a:t>2026-04-09</a:t>
+            </a:fld>
+            <a:endParaRPr lang="ko-KR" altLang="en-US"/>
+          </a:p>
+        </p:txBody>
+      </p:sp>
+      <p:sp>
+        <p:nvSpPr>
+          <p:cNvPr id="4" name="슬라이드 이미지 개체 틀 3"/>
+          <p:cNvSpPr>
+            <a:spLocks noGrp="1" noRot="1" noChangeAspect="1"/>
+          </p:cNvSpPr>
+          <p:nvPr>
+            <p:ph type="sldImg" idx="2"/>
+          </p:nvPr>
+        </p:nvSpPr>
+        <p:spPr>
+          <a:xfrm>
+            <a:off x="685800" y="1143000"/>
+            <a:ext cx="5486400" cy="3086100"/>
+          </a:xfrm>
+          <a:prstGeom prst="rect">
+            <a:avLst/>
+          </a:prstGeom>
+          <a:noFill/>
+          <a:ln w="12700">
+            <a:solidFill>
+              <a:prstClr val="black"/>
+            </a:solidFill>
+          </a:ln>
+        </p:spPr>
+        <p:txBody>
+          <a:bodyPr vert="horz" lIns="91440" tIns="45720" rIns="91440" bIns="45720" rtlCol="0" anchor="ctr"/>
+          <a:lstStyle/>
+          <a:p>
+            <a:endParaRPr lang="ko-KR" altLang="en-US"/>
+          </a:p>
+        </p:txBody>
+      </p:sp>
+      <p:sp>
+        <p:nvSpPr>
+          <p:cNvPr id="5" name="슬라이드 노트 개체 틀 4"/>
+          <p:cNvSpPr>
+            <a:spLocks noGrp="1"/>
+          </p:cNvSpPr>
+          <p:nvPr>
+            <p:ph type="body" sz="quarter" idx="3"/>
+          </p:nvPr>
+        </p:nvSpPr>
+        <p:spPr>
+          <a:xfrm>
+            <a:off x="685800" y="4400550"/>
+            <a:ext cx="5486400" cy="3600450"/>
+          </a:xfrm>
+          <a:prstGeom prst="rect">
+            <a:avLst/>
+          </a:prstGeom>
+        </p:spPr>
+        <p:txBody>
+          <a:bodyPr vert="horz" lIns="91440" tIns="45720" rIns="91440" bIns="45720" rtlCol="0"/>
+          <a:lstStyle/>
+          <a:p>
+            <a:pPr lvl="0"/>
+            <a:r>
+              <a:rPr lang="ko-KR" altLang="en-US"/>
+              <a:t>마스터 텍스트 스타일을 편집하려면 클릭</a:t>
+            </a:r>
+          </a:p>
+          <a:p>
+            <a:pPr lvl="1"/>
+            <a:r>
+              <a:rPr lang="ko-KR" altLang="en-US"/>
+              <a:t>두 번째 수준</a:t>
+            </a:r>
+          </a:p>
+          <a:p>
+            <a:pPr lvl="2"/>
+            <a:r>
+              <a:rPr lang="ko-KR" altLang="en-US"/>
+              <a:t>세 번째 수준</a:t>
+            </a:r>
+          </a:p>
+          <a:p>
+            <a:pPr lvl="3"/>
+            <a:r>
+              <a:rPr lang="ko-KR" altLang="en-US"/>
+              <a:t>네 번째 수준</a:t>
+            </a:r>
+          </a:p>
+          <a:p>
+            <a:pPr lvl="4"/>
+            <a:r>
+              <a:rPr lang="ko-KR" altLang="en-US"/>
+              <a:t>다섯 번째 수준</a:t>
+            </a:r>
+          </a:p>
+        </p:txBody>
+      </p:sp>
+      <p:sp>
+        <p:nvSpPr>
+          <p:cNvPr id="6" name="바닥글 개체 틀 5"/>
+          <p:cNvSpPr>
+            <a:spLocks noGrp="1"/>
+          </p:cNvSpPr>
+          <p:nvPr>
+            <p:ph type="ftr" sz="quarter" idx="4"/>
+          </p:nvPr>
+        </p:nvSpPr>
+        <p:spPr>
+          <a:xfrm>
+            <a:off x="0" y="8685213"/>
+            <a:ext cx="2971800" cy="458787"/>
+          </a:xfrm>
+          <a:prstGeom prst="rect">
+            <a:avLst/>
+          </a:prstGeom>
+        </p:spPr>
+        <p:txBody>
+          <a:bodyPr vert="horz" lIns="91440" tIns="45720" rIns="91440" bIns="45720" rtlCol="0" anchor="b"/>
+          <a:lstStyle>
+            <a:lvl1pPr algn="l">
+              <a:defRPr sz="1200"/>
+            </a:lvl1pPr>
+          </a:lstStyle>
+          <a:p>
+            <a:endParaRPr lang="ko-KR" altLang="en-US"/>
+          </a:p>
+        </p:txBody>
+      </p:sp>
+      <p:sp>
+        <p:nvSpPr>
+          <p:cNvPr id="7" name="슬라이드 번호 개체 틀 6"/>
+          <p:cNvSpPr>
+            <a:spLocks noGrp="1"/>
+          </p:cNvSpPr>
+          <p:nvPr>
+            <p:ph type="sldNum" sz="quarter" idx="5"/>
+          </p:nvPr>
+        </p:nvSpPr>
+        <p:spPr>
+          <a:xfrm>
+            <a:off x="3884613" y="8685213"/>
+            <a:ext cx="2971800" cy="458787"/>
+          </a:xfrm>
+          <a:prstGeom prst="rect">
+            <a:avLst/>
+          </a:prstGeom>
+        </p:spPr>
+        <p:txBody>
+          <a:bodyPr vert="horz" lIns="91440" tIns="45720" rIns="91440" bIns="45720" rtlCol="0" anchor="b"/>
+          <a:lstStyle>
+            <a:lvl1pPr algn="r">
+              <a:defRPr sz="1200"/>
+            </a:lvl1pPr>
+          </a:lstStyle>
+          <a:p>
+            <a:fld id="{DF195A5E-4983-45AC-854B-86DE2CB70077}" type="slidenum">
+              <a:rPr lang="ko-KR" altLang="en-US" smtClean="0"/>
+              <a:t>‹#›</a:t>
+            </a:fld>
+            <a:endParaRPr lang="ko-KR" altLang="en-US"/>
+          </a:p>
+        </p:txBody>
+      </p:sp>
+    </p:spTree>
+    <p:extLst>
+      <p:ext uri="{BB962C8B-B14F-4D97-AF65-F5344CB8AC3E}">
+        <p14:creationId xmlns:p14="http://schemas.microsoft.com/office/powerpoint/2010/main" val="720886930"/>
+      </p:ext>
+    </p:extLst>
+  </p:cSld>
+  <p:clrMap bg1="lt1" tx1="dk1" bg2="lt2" tx2="dk2" accent1="accent1" accent2="accent2" accent3="accent3" accent4="accent4" accent5="accent5" accent6="accent6" hlink="hlink" folHlink="folHlink"/>
+  <p:notesStyle>
+    <a:lvl1pPr marL="0" algn="l" defTabSz="914400" rtl="0" eaLnBrk="1" latinLnBrk="1" hangingPunct="1">
+      <a:defRPr sz="1200" kern="1200">
+        <a:solidFill>
+          <a:schemeClr val="tx1"/>
+        </a:solidFill>
+        <a:latin typeface="+mn-lt"/>
+        <a:ea typeface="+mn-ea"/>
+        <a:cs typeface="+mn-cs"/>
+      </a:defRPr>
+    </a:lvl1pPr>
+    <a:lvl2pPr marL="457200" algn="l" defTabSz="914400" rtl="0" eaLnBrk="1" latinLnBrk="1" hangingPunct="1">
+      <a:defRPr sz="1200" kern="1200">
+        <a:solidFill>
+          <a:schemeClr val="tx1"/>
+        </a:solidFill>
+        <a:latin typeface="+mn-lt"/>
+        <a:ea typeface="+mn-ea"/>
+        <a:cs typeface="+mn-cs"/>
+      </a:defRPr>
+    </a:lvl2pPr>
+    <a:lvl3pPr marL="914400" algn="l" defTabSz="914400" rtl="0" eaLnBrk="1" latinLnBrk="1" hangingPunct="1">
+      <a:defRPr sz="1200" kern="1200">
+        <a:solidFill>
+          <a:schemeClr val="tx1"/>
+        </a:solidFill>
+        <a:latin typeface="+mn-lt"/>
+        <a:ea typeface="+mn-ea"/>
+        <a:cs typeface="+mn-cs"/>
+      </a:defRPr>
+    </a:lvl3pPr>
+    <a:lvl4pPr marL="1371600" algn="l" defTabSz="914400" rtl="0" eaLnBrk="1" latinLnBrk="1" hangingPunct="1">
+      <a:defRPr sz="1200" kern="1200">
+        <a:solidFill>
+          <a:schemeClr val="tx1"/>
+        </a:solidFill>
+        <a:latin typeface="+mn-lt"/>
+        <a:ea typeface="+mn-ea"/>
+        <a:cs typeface="+mn-cs"/>
+      </a:defRPr>
+    </a:lvl4pPr>
+    <a:lvl5pPr marL="1828800" algn="l" defTabSz="914400" rtl="0" eaLnBrk="1" latinLnBrk="1" hangingPunct="1">
+      <a:defRPr sz="1200" kern="1200">
+        <a:solidFill>
+          <a:schemeClr val="tx1"/>
+        </a:solidFill>
+        <a:latin typeface="+mn-lt"/>
+        <a:ea typeface="+mn-ea"/>
+        <a:cs typeface="+mn-cs"/>
+      </a:defRPr>
+    </a:lvl5pPr>
+    <a:lvl6pPr marL="2286000" algn="l" defTabSz="914400" rtl="0" eaLnBrk="1" latinLnBrk="1" hangingPunct="1">
+      <a:defRPr sz="1200" kern="1200">
+        <a:solidFill>
+          <a:schemeClr val="tx1"/>
+        </a:solidFill>
+        <a:latin typeface="+mn-lt"/>
+        <a:ea typeface="+mn-ea"/>
+        <a:cs typeface="+mn-cs"/>
+      </a:defRPr>
+    </a:lvl6pPr>
+    <a:lvl7pPr marL="2743200" algn="l" defTabSz="914400" rtl="0" eaLnBrk="1" latinLnBrk="1" hangingPunct="1">
+      <a:defRPr sz="1200" kern="1200">
+        <a:solidFill>
+          <a:schemeClr val="tx1"/>
+        </a:solidFill>
+        <a:latin typeface="+mn-lt"/>
+        <a:ea typeface="+mn-ea"/>
+        <a:cs typeface="+mn-cs"/>
+      </a:defRPr>
+    </a:lvl7pPr>
+    <a:lvl8pPr marL="3200400" algn="l" defTabSz="914400" rtl="0" eaLnBrk="1" latinLnBrk="1" hangingPunct="1">
+      <a:defRPr sz="1200" kern="1200">
+        <a:solidFill>
+          <a:schemeClr val="tx1"/>
+        </a:solidFill>
+        <a:latin typeface="+mn-lt"/>
+        <a:ea typeface="+mn-ea"/>
+        <a:cs typeface="+mn-cs"/>
+      </a:defRPr>
+    </a:lvl8pPr>
+    <a:lvl9pPr marL="3657600" algn="l" defTabSz="914400" rtl="0" eaLnBrk="1" latinLnBrk="1" hangingPunct="1">
+      <a:defRPr sz="1200" kern="1200">
+        <a:solidFill>
+          <a:schemeClr val="tx1"/>
+        </a:solidFill>
+        <a:latin typeface="+mn-lt"/>
+        <a:ea typeface="+mn-ea"/>
+        <a:cs typeface="+mn-cs"/>
+      </a:defRPr>
+    </a:lvl9pPr>
+  </p:notesStyle>
+</p:notesMaster>
+</file>
+
+<file path=ppt/notesSlides/notesSlide1.xml><?xml version="1.0" encoding="utf-8"?>
+<p:notes xmlns:a="http://schemas.openxmlformats.org/drawingml/2006/main" xmlns:r="http://schemas.openxmlformats.org/officeDocument/2006/relationships" xmlns:p="http://schemas.openxmlformats.org/presentationml/2006/main">
+  <p:cSld>
+    <p:spTree>
+      <p:nvGrpSpPr>
+        <p:cNvPr id="1" name=""/>
+        <p:cNvGrpSpPr/>
+        <p:nvPr/>
+      </p:nvGrpSpPr>
+      <p:grpSpPr>
+        <a:xfrm>
+          <a:off x="0" y="0"/>
+          <a:ext cx="0" cy="0"/>
+          <a:chOff x="0" y="0"/>
+          <a:chExt cx="0" cy="0"/>
+        </a:xfrm>
+      </p:grpSpPr>
+      <p:sp>
+        <p:nvSpPr>
+          <p:cNvPr id="2" name="슬라이드 이미지 개체 틀 1"/>
+          <p:cNvSpPr>
+            <a:spLocks noGrp="1" noRot="1" noChangeAspect="1"/>
+          </p:cNvSpPr>
+          <p:nvPr>
+            <p:ph type="sldImg"/>
+          </p:nvPr>
+        </p:nvSpPr>
+        <p:spPr/>
+      </p:sp>
+      <p:sp>
+        <p:nvSpPr>
+          <p:cNvPr id="3" name="슬라이드 노트 개체 틀 2"/>
+          <p:cNvSpPr>
+            <a:spLocks noGrp="1"/>
+          </p:cNvSpPr>
+          <p:nvPr>
+            <p:ph type="body" idx="1"/>
+          </p:nvPr>
+        </p:nvSpPr>
+        <p:spPr/>
+        <p:txBody>
+          <a:bodyPr/>
+          <a:lstStyle/>
+          <a:p>
+            <a:endParaRPr lang="ko-KR" altLang="en-US" dirty="0"/>
+          </a:p>
+        </p:txBody>
+      </p:sp>
+      <p:sp>
+        <p:nvSpPr>
+          <p:cNvPr id="4" name="슬라이드 번호 개체 틀 3"/>
+          <p:cNvSpPr>
+            <a:spLocks noGrp="1"/>
+          </p:cNvSpPr>
+          <p:nvPr>
+            <p:ph type="sldNum" sz="quarter" idx="5"/>
+          </p:nvPr>
+        </p:nvSpPr>
+        <p:spPr/>
+        <p:txBody>
+          <a:bodyPr/>
+          <a:lstStyle/>
+          <a:p>
+            <a:fld id="{DF195A5E-4983-45AC-854B-86DE2CB70077}" type="slidenum">
+              <a:rPr lang="ko-KR" altLang="en-US" smtClean="0"/>
+              <a:t>33</a:t>
+            </a:fld>
+            <a:endParaRPr lang="ko-KR" altLang="en-US"/>
+          </a:p>
+        </p:txBody>
+      </p:sp>
+    </p:spTree>
+    <p:extLst>
+      <p:ext uri="{BB962C8B-B14F-4D97-AF65-F5344CB8AC3E}">
+        <p14:creationId xmlns:p14="http://schemas.microsoft.com/office/powerpoint/2010/main" val="825300628"/>
+      </p:ext>
+    </p:extLst>
+  </p:cSld>
+  <p:clrMapOvr>
+    <a:masterClrMapping/>
+  </p:clrMapOvr>
+</p:notes>
+</file>
+
 <file path=ppt/slideLayouts/slideLayout1.xml><?xml version="1.0" encoding="utf-8"?>
 <p:sldLayout xmlns:a="http://schemas.openxmlformats.org/drawingml/2006/main" xmlns:r="http://schemas.openxmlformats.org/officeDocument/2006/relationships" xmlns:p="http://schemas.openxmlformats.org/presentationml/2006/main" type="title" preserve="1">
   <p:cSld name="제목 슬라이드">
@@ -289,7 +728,7 @@
           <a:p>
             <a:fld id="{D8810A9B-0CC6-4053-BA0B-965178095DC3}" type="datetimeFigureOut">
               <a:rPr lang="ko-KR" altLang="en-US" smtClean="0"/>
-              <a:t>2026-03-16</a:t>
+              <a:t>2026-04-09</a:t>
             </a:fld>
             <a:endParaRPr lang="ko-KR" altLang="en-US"/>
           </a:p>
@@ -487,7 +926,7 @@
           <a:p>
             <a:fld id="{D8810A9B-0CC6-4053-BA0B-965178095DC3}" type="datetimeFigureOut">
               <a:rPr lang="ko-KR" altLang="en-US" smtClean="0"/>
-              <a:t>2026-03-16</a:t>
+              <a:t>2026-04-09</a:t>
             </a:fld>
             <a:endParaRPr lang="ko-KR" altLang="en-US"/>
           </a:p>
@@ -695,7 +1134,7 @@
           <a:p>
             <a:fld id="{D8810A9B-0CC6-4053-BA0B-965178095DC3}" type="datetimeFigureOut">
               <a:rPr lang="ko-KR" altLang="en-US" smtClean="0"/>
-              <a:t>2026-03-16</a:t>
+              <a:t>2026-04-09</a:t>
             </a:fld>
             <a:endParaRPr lang="ko-KR" altLang="en-US"/>
           </a:p>
@@ -893,7 +1332,7 @@
           <a:p>
             <a:fld id="{D8810A9B-0CC6-4053-BA0B-965178095DC3}" type="datetimeFigureOut">
               <a:rPr lang="ko-KR" altLang="en-US" smtClean="0"/>
-              <a:t>2026-03-16</a:t>
+              <a:t>2026-04-09</a:t>
             </a:fld>
             <a:endParaRPr lang="ko-KR" altLang="en-US"/>
           </a:p>
@@ -1168,7 +1607,7 @@
           <a:p>
             <a:fld id="{D8810A9B-0CC6-4053-BA0B-965178095DC3}" type="datetimeFigureOut">
               <a:rPr lang="ko-KR" altLang="en-US" smtClean="0"/>
-              <a:t>2026-03-16</a:t>
+              <a:t>2026-04-09</a:t>
             </a:fld>
             <a:endParaRPr lang="ko-KR" altLang="en-US"/>
           </a:p>
@@ -1433,7 +1872,7 @@
           <a:p>
             <a:fld id="{D8810A9B-0CC6-4053-BA0B-965178095DC3}" type="datetimeFigureOut">
               <a:rPr lang="ko-KR" altLang="en-US" smtClean="0"/>
-              <a:t>2026-03-16</a:t>
+              <a:t>2026-04-09</a:t>
             </a:fld>
             <a:endParaRPr lang="ko-KR" altLang="en-US"/>
           </a:p>
@@ -1845,7 +2284,7 @@
           <a:p>
             <a:fld id="{D8810A9B-0CC6-4053-BA0B-965178095DC3}" type="datetimeFigureOut">
               <a:rPr lang="ko-KR" altLang="en-US" smtClean="0"/>
-              <a:t>2026-03-16</a:t>
+              <a:t>2026-04-09</a:t>
             </a:fld>
             <a:endParaRPr lang="ko-KR" altLang="en-US"/>
           </a:p>
@@ -1986,7 +2425,7 @@
           <a:p>
             <a:fld id="{D8810A9B-0CC6-4053-BA0B-965178095DC3}" type="datetimeFigureOut">
               <a:rPr lang="ko-KR" altLang="en-US" smtClean="0"/>
-              <a:t>2026-03-16</a:t>
+              <a:t>2026-04-09</a:t>
             </a:fld>
             <a:endParaRPr lang="ko-KR" altLang="en-US"/>
           </a:p>
@@ -2099,7 +2538,7 @@
           <a:p>
             <a:fld id="{D8810A9B-0CC6-4053-BA0B-965178095DC3}" type="datetimeFigureOut">
               <a:rPr lang="ko-KR" altLang="en-US" smtClean="0"/>
-              <a:t>2026-03-16</a:t>
+              <a:t>2026-04-09</a:t>
             </a:fld>
             <a:endParaRPr lang="ko-KR" altLang="en-US"/>
           </a:p>
@@ -2410,7 +2849,7 @@
           <a:p>
             <a:fld id="{D8810A9B-0CC6-4053-BA0B-965178095DC3}" type="datetimeFigureOut">
               <a:rPr lang="ko-KR" altLang="en-US" smtClean="0"/>
-              <a:t>2026-03-16</a:t>
+              <a:t>2026-04-09</a:t>
             </a:fld>
             <a:endParaRPr lang="ko-KR" altLang="en-US"/>
           </a:p>
@@ -2698,7 +3137,7 @@
           <a:p>
             <a:fld id="{D8810A9B-0CC6-4053-BA0B-965178095DC3}" type="datetimeFigureOut">
               <a:rPr lang="ko-KR" altLang="en-US" smtClean="0"/>
-              <a:t>2026-03-16</a:t>
+              <a:t>2026-04-09</a:t>
             </a:fld>
             <a:endParaRPr lang="ko-KR" altLang="en-US"/>
           </a:p>
@@ -2939,7 +3378,7 @@
           <a:p>
             <a:fld id="{D8810A9B-0CC6-4053-BA0B-965178095DC3}" type="datetimeFigureOut">
               <a:rPr lang="ko-KR" altLang="en-US" smtClean="0"/>
-              <a:t>2026-03-16</a:t>
+              <a:t>2026-04-09</a:t>
             </a:fld>
             <a:endParaRPr lang="ko-KR" altLang="en-US"/>
           </a:p>
@@ -4197,164 +4636,196 @@
           <a:lstStyle/>
           <a:p>
             <a:r>
-              <a:rPr lang="en-US" altLang="ko-KR" b="1"/>
+              <a:rPr lang="en-US" altLang="ko-KR" b="1" dirty="0"/>
               <a:t>Particle Management &amp; Update</a:t>
             </a:r>
           </a:p>
           <a:p>
             <a:r>
-              <a:rPr lang="ko-KR" altLang="en-US"/>
-              <a:t>모든 파티클 데이터는 </a:t>
-            </a:r>
-            <a:r>
-              <a:rPr lang="en-US" altLang="ko-KR" b="1"/>
+              <a:rPr lang="ko-KR" altLang="en-US" dirty="0"/>
+              <a:t>모든 </a:t>
+            </a:r>
+            <a:r>
+              <a:rPr lang="ko-KR" altLang="en-US" dirty="0" err="1"/>
+              <a:t>파티클</a:t>
+            </a:r>
+            <a:r>
+              <a:rPr lang="ko-KR" altLang="en-US" dirty="0"/>
+              <a:t> 데이터는 </a:t>
+            </a:r>
+            <a:r>
+              <a:rPr lang="en-US" altLang="ko-KR" b="1" dirty="0" err="1"/>
               <a:t>StructuredBuffer</a:t>
             </a:r>
             <a:r>
-              <a:rPr lang="ko-KR" altLang="en-US"/>
+              <a:rPr lang="ko-KR" altLang="en-US" dirty="0"/>
               <a:t> 형태로 </a:t>
             </a:r>
             <a:r>
-              <a:rPr lang="en-US" altLang="ko-KR"/>
+              <a:rPr lang="en-US" altLang="ko-KR" dirty="0"/>
               <a:t>GPU </a:t>
             </a:r>
             <a:r>
-              <a:rPr lang="ko-KR" altLang="en-US"/>
+              <a:rPr lang="ko-KR" altLang="en-US" dirty="0"/>
               <a:t>전용 메모리에 상주하며</a:t>
             </a:r>
             <a:r>
-              <a:rPr lang="en-US" altLang="ko-KR"/>
+              <a:rPr lang="en-US" altLang="ko-KR" dirty="0"/>
               <a:t>, </a:t>
             </a:r>
             <a:r>
-              <a:rPr lang="en-US" altLang="ko-KR" b="1"/>
+              <a:rPr lang="en-US" altLang="ko-KR" b="1" dirty="0"/>
               <a:t>Compute Shader</a:t>
             </a:r>
             <a:r>
-              <a:rPr lang="ko-KR" altLang="en-US"/>
+              <a:rPr lang="ko-KR" altLang="en-US" dirty="0"/>
               <a:t>를 통해 </a:t>
             </a:r>
             <a:r>
-              <a:rPr lang="en-US" altLang="ko-KR"/>
+              <a:rPr lang="en-US" altLang="ko-KR" dirty="0"/>
               <a:t>CPU </a:t>
             </a:r>
             <a:r>
-              <a:rPr lang="ko-KR" altLang="en-US"/>
+              <a:rPr lang="ko-KR" altLang="en-US" dirty="0"/>
               <a:t>개입 없이 업데이트됨</a:t>
             </a:r>
-            <a:endParaRPr lang="en-US" altLang="ko-KR"/>
-          </a:p>
-          <a:p>
-            <a:r>
-              <a:rPr lang="en-US" altLang="ko-KR" b="1"/>
+            <a:endParaRPr lang="en-US" altLang="ko-KR" dirty="0"/>
+          </a:p>
+          <a:p>
+            <a:r>
+              <a:rPr lang="en-US" altLang="ko-KR" b="1" dirty="0"/>
               <a:t>Update Logic</a:t>
             </a:r>
             <a:r>
-              <a:rPr lang="en-US" altLang="ko-KR"/>
+              <a:rPr lang="en-US" altLang="ko-KR" dirty="0"/>
               <a:t>: </a:t>
             </a:r>
             <a:r>
-              <a:rPr lang="ko-KR" altLang="en-US"/>
+              <a:rPr lang="ko-KR" altLang="en-US" dirty="0"/>
               <a:t>매 프레임 </a:t>
             </a:r>
             <a:r>
-              <a:rPr lang="en-US" altLang="ko-KR"/>
+              <a:rPr lang="en-US" altLang="ko-KR" dirty="0" err="1"/>
               <a:t>TimeCB</a:t>
             </a:r>
             <a:r>
-              <a:rPr lang="ko-KR" altLang="en-US"/>
+              <a:rPr lang="ko-KR" altLang="en-US" dirty="0"/>
               <a:t>로부터 </a:t>
             </a:r>
             <a:r>
-              <a:rPr lang="en-US" altLang="ko-KR"/>
-              <a:t>dt(DeltaTime)</a:t>
-            </a:r>
-            <a:r>
-              <a:rPr lang="ko-KR" altLang="en-US"/>
+              <a:rPr lang="en-US" altLang="ko-KR" dirty="0"/>
+              <a:t>dt(</a:t>
+            </a:r>
+            <a:r>
+              <a:rPr lang="en-US" altLang="ko-KR" dirty="0" err="1"/>
+              <a:t>DeltaTime</a:t>
+            </a:r>
+            <a:r>
+              <a:rPr lang="en-US" altLang="ko-KR" dirty="0"/>
+              <a:t>)</a:t>
+            </a:r>
+            <a:r>
+              <a:rPr lang="ko-KR" altLang="en-US" dirty="0"/>
               <a:t>를 전달받아 위치 연산</a:t>
             </a:r>
             <a:r>
-              <a:rPr lang="en-US" altLang="ko-KR"/>
+              <a:rPr lang="en-US" altLang="ko-KR" dirty="0"/>
               <a:t>, </a:t>
             </a:r>
             <a:r>
-              <a:rPr lang="ko-KR" altLang="en-US"/>
+              <a:rPr lang="ko-KR" altLang="en-US" dirty="0"/>
               <a:t>수명</a:t>
             </a:r>
             <a:r>
-              <a:rPr lang="en-US" altLang="ko-KR"/>
+              <a:rPr lang="en-US" altLang="ko-KR" dirty="0"/>
               <a:t>(Life/Age) </a:t>
             </a:r>
             <a:r>
-              <a:rPr lang="ko-KR" altLang="en-US"/>
+              <a:rPr lang="ko-KR" altLang="en-US" dirty="0"/>
               <a:t>계산</a:t>
             </a:r>
             <a:r>
-              <a:rPr lang="en-US" altLang="ko-KR"/>
+              <a:rPr lang="en-US" altLang="ko-KR" dirty="0"/>
               <a:t>, </a:t>
             </a:r>
             <a:r>
-              <a:rPr lang="ko-KR" altLang="en-US"/>
+              <a:rPr lang="ko-KR" altLang="en-US" dirty="0"/>
               <a:t>물리 시뮬레이션</a:t>
             </a:r>
             <a:r>
-              <a:rPr lang="en-US" altLang="ko-KR"/>
+              <a:rPr lang="en-US" altLang="ko-KR" dirty="0"/>
               <a:t>(</a:t>
             </a:r>
             <a:r>
-              <a:rPr lang="ko-KR" altLang="en-US"/>
+              <a:rPr lang="ko-KR" altLang="en-US" dirty="0"/>
               <a:t>중력</a:t>
             </a:r>
             <a:r>
-              <a:rPr lang="en-US" altLang="ko-KR"/>
+              <a:rPr lang="en-US" altLang="ko-KR" dirty="0"/>
               <a:t>, </a:t>
             </a:r>
             <a:r>
-              <a:rPr lang="ko-KR" altLang="en-US"/>
+              <a:rPr lang="ko-KR" altLang="en-US" dirty="0"/>
               <a:t>감쇠</a:t>
             </a:r>
             <a:r>
-              <a:rPr lang="en-US" altLang="ko-KR"/>
+              <a:rPr lang="en-US" altLang="ko-KR" dirty="0"/>
               <a:t>)</a:t>
             </a:r>
             <a:r>
-              <a:rPr lang="ko-KR" altLang="en-US"/>
+              <a:rPr lang="ko-KR" altLang="en-US" dirty="0"/>
               <a:t>을 병렬로 수행</a:t>
             </a:r>
             <a:r>
-              <a:rPr lang="en-US" altLang="ko-KR"/>
+              <a:rPr lang="en-US" altLang="ko-KR" dirty="0"/>
               <a:t>.</a:t>
             </a:r>
           </a:p>
           <a:p>
             <a:r>
-              <a:rPr lang="en-US" altLang="ko-KR" b="1"/>
+              <a:rPr lang="en-US" altLang="ko-KR" b="1" dirty="0"/>
               <a:t>Dispatch Strategy</a:t>
             </a:r>
             <a:r>
-              <a:rPr lang="en-US" altLang="ko-KR"/>
+              <a:rPr lang="en-US" altLang="ko-KR" dirty="0"/>
               <a:t>: </a:t>
             </a:r>
             <a:r>
-              <a:rPr lang="ko-KR" altLang="en-US"/>
-              <a:t>대량의 파티클을 처리하기 위해 파티클 개수에 맞춰 </a:t>
-            </a:r>
-            <a:r>
-              <a:rPr lang="en-US" altLang="ko-KR"/>
+              <a:rPr lang="ko-KR" altLang="en-US" dirty="0"/>
+              <a:t>대량의 </a:t>
+            </a:r>
+            <a:r>
+              <a:rPr lang="ko-KR" altLang="en-US" dirty="0" err="1"/>
+              <a:t>파티클을</a:t>
+            </a:r>
+            <a:r>
+              <a:rPr lang="ko-KR" altLang="en-US" dirty="0"/>
+              <a:t> 처리하기 위해 </a:t>
+            </a:r>
+            <a:r>
+              <a:rPr lang="ko-KR" altLang="en-US" dirty="0" err="1"/>
+              <a:t>파티클</a:t>
+            </a:r>
+            <a:r>
+              <a:rPr lang="ko-KR" altLang="en-US" dirty="0"/>
+              <a:t> 개수에 맞춰 </a:t>
+            </a:r>
+            <a:r>
+              <a:rPr lang="en-US" altLang="ko-KR" dirty="0"/>
               <a:t>Thread Group</a:t>
             </a:r>
             <a:r>
-              <a:rPr lang="ko-KR" altLang="en-US"/>
+              <a:rPr lang="ko-KR" altLang="en-US" dirty="0"/>
               <a:t>을 최적화하여 호출</a:t>
             </a:r>
             <a:r>
-              <a:rPr lang="en-US" altLang="ko-KR"/>
+              <a:rPr lang="en-US" altLang="ko-KR" dirty="0"/>
               <a:t>.</a:t>
             </a:r>
           </a:p>
           <a:p>
             <a:r>
-              <a:rPr lang="en-US" altLang="ko-KR"/>
+              <a:rPr lang="en-US" altLang="ko-KR" dirty="0"/>
               <a:t>.</a:t>
             </a:r>
             <a:endParaRPr lang="ko-KR" altLang="en-US" dirty="0"/>
@@ -4393,7 +4864,7 @@
               <a:buNone/>
             </a:pPr>
             <a:r>
-              <a:rPr lang="en-US" altLang="ko-KR" b="1"/>
+              <a:rPr lang="en-US" altLang="ko-KR" b="1" dirty="0"/>
               <a:t>Resource &amp; Rendering Pipeline</a:t>
             </a:r>
           </a:p>
@@ -4402,31 +4873,31 @@
               <a:buNone/>
             </a:pPr>
             <a:r>
-              <a:rPr lang="en-US" altLang="ko-KR"/>
+              <a:rPr lang="en-US" altLang="ko-KR" dirty="0"/>
               <a:t>CPU</a:t>
             </a:r>
             <a:r>
-              <a:rPr lang="ko-KR" altLang="en-US"/>
+              <a:rPr lang="ko-KR" altLang="en-US" dirty="0"/>
               <a:t>는 최소한의 상수 데이터만 갱신하고</a:t>
             </a:r>
             <a:r>
-              <a:rPr lang="en-US" altLang="ko-KR"/>
+              <a:rPr lang="en-US" altLang="ko-KR" dirty="0"/>
               <a:t>, </a:t>
             </a:r>
             <a:r>
-              <a:rPr lang="ko-KR" altLang="en-US"/>
+              <a:rPr lang="ko-KR" altLang="en-US" dirty="0"/>
               <a:t>실제 렌더링에 필요한 모든 연산은 </a:t>
             </a:r>
             <a:r>
-              <a:rPr lang="en-US" altLang="ko-KR"/>
+              <a:rPr lang="en-US" altLang="ko-KR" dirty="0"/>
               <a:t>GPU </a:t>
             </a:r>
             <a:r>
-              <a:rPr lang="ko-KR" altLang="en-US"/>
+              <a:rPr lang="ko-KR" altLang="en-US" dirty="0"/>
               <a:t>내에서 완결</a:t>
             </a:r>
             <a:r>
-              <a:rPr lang="en-US" altLang="ko-KR"/>
+              <a:rPr lang="en-US" altLang="ko-KR" dirty="0"/>
               <a:t>.</a:t>
             </a:r>
           </a:p>
@@ -4436,11 +4907,11 @@
               <a:buChar char="•"/>
             </a:pPr>
             <a:r>
-              <a:rPr lang="en-US" altLang="ko-KR" b="1"/>
+              <a:rPr lang="en-US" altLang="ko-KR" b="1" dirty="0"/>
               <a:t>Root Signature Design</a:t>
             </a:r>
             <a:r>
-              <a:rPr lang="en-US" altLang="ko-KR"/>
+              <a:rPr lang="en-US" altLang="ko-KR" dirty="0"/>
               <a:t>:</a:t>
             </a:r>
           </a:p>
@@ -4450,27 +4921,31 @@
               <a:buChar char="•"/>
             </a:pPr>
             <a:r>
-              <a:rPr lang="en-US" altLang="ko-KR" b="1"/>
+              <a:rPr lang="en-US" altLang="ko-KR" b="1" dirty="0"/>
               <a:t>UAV (u0)</a:t>
             </a:r>
             <a:r>
-              <a:rPr lang="en-US" altLang="ko-KR"/>
+              <a:rPr lang="en-US" altLang="ko-KR" dirty="0"/>
               <a:t>: </a:t>
             </a:r>
             <a:r>
-              <a:rPr lang="ko-KR" altLang="en-US"/>
-              <a:t>파티클 데이터 쓰기</a:t>
-            </a:r>
-            <a:r>
-              <a:rPr lang="en-US" altLang="ko-KR"/>
+              <a:rPr lang="ko-KR" altLang="en-US" dirty="0" err="1"/>
+              <a:t>파티클</a:t>
+            </a:r>
+            <a:r>
+              <a:rPr lang="ko-KR" altLang="en-US" dirty="0"/>
+              <a:t> 데이터 쓰기</a:t>
+            </a:r>
+            <a:r>
+              <a:rPr lang="en-US" altLang="ko-KR" dirty="0"/>
               <a:t>/</a:t>
             </a:r>
             <a:r>
-              <a:rPr lang="ko-KR" altLang="en-US"/>
+              <a:rPr lang="ko-KR" altLang="en-US" dirty="0"/>
               <a:t>읽기용 </a:t>
             </a:r>
             <a:r>
-              <a:rPr lang="en-US" altLang="ko-KR"/>
+              <a:rPr lang="en-US" altLang="ko-KR" dirty="0"/>
               <a:t>(Compute)</a:t>
             </a:r>
           </a:p>
@@ -4480,27 +4955,27 @@
               <a:buChar char="•"/>
             </a:pPr>
             <a:r>
-              <a:rPr lang="en-US" altLang="ko-KR" b="1"/>
+              <a:rPr lang="en-US" altLang="ko-KR" b="1" dirty="0"/>
               <a:t>SRV (t0)</a:t>
             </a:r>
             <a:r>
-              <a:rPr lang="en-US" altLang="ko-KR"/>
+              <a:rPr lang="en-US" altLang="ko-KR" dirty="0"/>
               <a:t>: </a:t>
             </a:r>
             <a:r>
-              <a:rPr lang="ko-KR" altLang="en-US"/>
+              <a:rPr lang="ko-KR" altLang="en-US" dirty="0"/>
               <a:t>업데이트된 데이터를 </a:t>
             </a:r>
             <a:r>
-              <a:rPr lang="en-US" altLang="ko-KR"/>
+              <a:rPr lang="en-US" altLang="ko-KR" dirty="0"/>
               <a:t>Vertex Shader</a:t>
             </a:r>
             <a:r>
-              <a:rPr lang="ko-KR" altLang="en-US"/>
+              <a:rPr lang="ko-KR" altLang="en-US" dirty="0"/>
               <a:t>에서 참조 </a:t>
             </a:r>
             <a:r>
-              <a:rPr lang="en-US" altLang="ko-KR"/>
+              <a:rPr lang="en-US" altLang="ko-KR" dirty="0"/>
               <a:t>(Rendering)</a:t>
             </a:r>
           </a:p>
@@ -4510,51 +4985,51 @@
               <a:buChar char="•"/>
             </a:pPr>
             <a:r>
-              <a:rPr lang="en-US" altLang="ko-KR" b="1"/>
+              <a:rPr lang="en-US" altLang="ko-KR" b="1" dirty="0"/>
               <a:t>CBV (b0, b1)</a:t>
             </a:r>
             <a:r>
-              <a:rPr lang="en-US" altLang="ko-KR"/>
+              <a:rPr lang="en-US" altLang="ko-KR" dirty="0"/>
               <a:t>: </a:t>
             </a:r>
             <a:r>
-              <a:rPr lang="ko-KR" altLang="en-US"/>
+              <a:rPr lang="ko-KR" altLang="en-US" dirty="0"/>
               <a:t>시간 데이터</a:t>
             </a:r>
             <a:r>
-              <a:rPr lang="en-US" altLang="ko-KR"/>
+              <a:rPr lang="en-US" altLang="ko-KR" dirty="0"/>
               <a:t>(</a:t>
             </a:r>
             <a:r>
-              <a:rPr lang="en-US" altLang="ko-KR">
+              <a:rPr lang="en-US" altLang="ko-KR" dirty="0" err="1">
                 <a:latin typeface="Courier New" panose="02070309020205020404" pitchFamily="49" charset="0"/>
               </a:rPr>
               <a:t>TimeCB</a:t>
             </a:r>
             <a:r>
-              <a:rPr lang="en-US" altLang="ko-KR"/>
+              <a:rPr lang="en-US" altLang="ko-KR" dirty="0"/>
               <a:t>) </a:t>
             </a:r>
             <a:r>
-              <a:rPr lang="ko-KR" altLang="en-US"/>
+              <a:rPr lang="ko-KR" altLang="en-US" dirty="0"/>
               <a:t>및 특정 이벤트 데이터</a:t>
             </a:r>
             <a:r>
-              <a:rPr lang="en-US" altLang="ko-KR"/>
+              <a:rPr lang="en-US" altLang="ko-KR" dirty="0"/>
               <a:t>(</a:t>
             </a:r>
             <a:r>
-              <a:rPr lang="en-US" altLang="ko-KR">
+              <a:rPr lang="en-US" altLang="ko-KR" dirty="0" err="1">
                 <a:latin typeface="Courier New" panose="02070309020205020404" pitchFamily="49" charset="0"/>
               </a:rPr>
               <a:t>MuzzleCB</a:t>
             </a:r>
             <a:r>
-              <a:rPr lang="en-US" altLang="ko-KR"/>
+              <a:rPr lang="en-US" altLang="ko-KR" dirty="0"/>
               <a:t>) </a:t>
             </a:r>
             <a:r>
-              <a:rPr lang="ko-KR" altLang="en-US"/>
+              <a:rPr lang="ko-KR" altLang="en-US" dirty="0"/>
               <a:t>바인딩</a:t>
             </a:r>
           </a:p>
@@ -4564,11 +5039,11 @@
               <a:buChar char="•"/>
             </a:pPr>
             <a:r>
-              <a:rPr lang="en-US" altLang="ko-KR" b="1"/>
+              <a:rPr lang="en-US" altLang="ko-KR" b="1" dirty="0"/>
               <a:t>Geometry-less Rendering</a:t>
             </a:r>
             <a:r>
-              <a:rPr lang="en-US" altLang="ko-KR"/>
+              <a:rPr lang="en-US" altLang="ko-KR" dirty="0"/>
               <a:t>:</a:t>
             </a:r>
           </a:p>
@@ -4578,67 +5053,79 @@
               <a:buChar char="•"/>
             </a:pPr>
             <a:r>
-              <a:rPr lang="ko-KR" altLang="en-US"/>
+              <a:rPr lang="ko-KR" altLang="en-US" dirty="0"/>
               <a:t>별도의 </a:t>
             </a:r>
             <a:r>
-              <a:rPr lang="en-US" altLang="ko-KR"/>
+              <a:rPr lang="en-US" altLang="ko-KR" dirty="0"/>
               <a:t>Vertex Buffer </a:t>
             </a:r>
             <a:r>
-              <a:rPr lang="ko-KR" altLang="en-US"/>
+              <a:rPr lang="ko-KR" altLang="en-US" dirty="0"/>
               <a:t>없이 </a:t>
             </a:r>
             <a:r>
-              <a:rPr lang="en-US" altLang="ko-KR">
+              <a:rPr lang="en-US" altLang="ko-KR" dirty="0" err="1">
                 <a:latin typeface="Courier New" panose="02070309020205020404" pitchFamily="49" charset="0"/>
               </a:rPr>
               <a:t>SV_VertexID</a:t>
             </a:r>
             <a:r>
-              <a:rPr lang="ko-KR" altLang="en-US"/>
-              <a:t>를 사용하여 셰이더 내부에서 빌보드</a:t>
-            </a:r>
-            <a:r>
-              <a:rPr lang="en-US" altLang="ko-KR"/>
+              <a:rPr lang="ko-KR" altLang="en-US" dirty="0"/>
+              <a:t>를 사용하여 </a:t>
+            </a:r>
+            <a:r>
+              <a:rPr lang="ko-KR" altLang="en-US" dirty="0" err="1"/>
+              <a:t>셰이더</a:t>
+            </a:r>
+            <a:r>
+              <a:rPr lang="ko-KR" altLang="en-US" dirty="0"/>
+              <a:t> 내부에서 빌보드</a:t>
+            </a:r>
+            <a:r>
+              <a:rPr lang="en-US" altLang="ko-KR" dirty="0"/>
               <a:t>(Billboard) </a:t>
             </a:r>
             <a:r>
-              <a:rPr lang="ko-KR" altLang="en-US"/>
+              <a:rPr lang="ko-KR" altLang="en-US" dirty="0"/>
               <a:t>정점을 실시간 생성</a:t>
             </a:r>
             <a:r>
-              <a:rPr lang="en-US" altLang="ko-KR"/>
+              <a:rPr lang="en-US" altLang="ko-KR" dirty="0"/>
               <a:t>.</a:t>
             </a:r>
             <a:r>
-              <a:rPr lang="ko-KR" altLang="en-US"/>
+              <a:rPr lang="ko-KR" altLang="en-US" dirty="0"/>
               <a:t> </a:t>
             </a:r>
             <a:r>
-              <a:rPr lang="en-US" altLang="ko-KR" b="1"/>
+              <a:rPr lang="en-US" altLang="ko-KR" b="1" dirty="0"/>
               <a:t>Instanced Drawing</a:t>
             </a:r>
             <a:r>
-              <a:rPr lang="en-US" altLang="ko-KR"/>
+              <a:rPr lang="en-US" altLang="ko-KR" dirty="0"/>
               <a:t>: </a:t>
             </a:r>
             <a:r>
-              <a:rPr lang="ko-KR" altLang="en-US"/>
-              <a:t>파티클 개수만큼 </a:t>
-            </a:r>
-            <a:r>
-              <a:rPr lang="en-US" altLang="ko-KR">
+              <a:rPr lang="ko-KR" altLang="en-US" dirty="0" err="1"/>
+              <a:t>파티클</a:t>
+            </a:r>
+            <a:r>
+              <a:rPr lang="ko-KR" altLang="en-US" dirty="0"/>
+              <a:t> 개수만큼 </a:t>
+            </a:r>
+            <a:r>
+              <a:rPr lang="en-US" altLang="ko-KR" dirty="0" err="1">
                 <a:latin typeface="Courier New" panose="02070309020205020404" pitchFamily="49" charset="0"/>
               </a:rPr>
               <a:t>DrawInstanced</a:t>
             </a:r>
             <a:r>
-              <a:rPr lang="ko-KR" altLang="en-US"/>
+              <a:rPr lang="ko-KR" altLang="en-US" dirty="0"/>
               <a:t>를 호출하여 기하학적 메모리 점유율을 최소화</a:t>
             </a:r>
             <a:r>
-              <a:rPr lang="en-US" altLang="ko-KR"/>
+              <a:rPr lang="en-US" altLang="ko-KR" dirty="0"/>
               <a:t>.</a:t>
             </a:r>
           </a:p>
@@ -4648,11 +5135,11 @@
               <a:buChar char="•"/>
             </a:pPr>
             <a:r>
-              <a:rPr lang="en-US" altLang="ko-KR" b="1"/>
+              <a:rPr lang="en-US" altLang="ko-KR" b="1" dirty="0"/>
               <a:t>Visual Optimization</a:t>
             </a:r>
             <a:r>
-              <a:rPr lang="en-US" altLang="ko-KR"/>
+              <a:rPr lang="en-US" altLang="ko-KR" dirty="0"/>
               <a:t>:</a:t>
             </a:r>
           </a:p>
@@ -4662,19 +5149,19 @@
               <a:buChar char="•"/>
             </a:pPr>
             <a:r>
-              <a:rPr lang="en-US" altLang="ko-KR" b="1"/>
+              <a:rPr lang="en-US" altLang="ko-KR" b="1" dirty="0"/>
               <a:t>Additive Blending</a:t>
             </a:r>
             <a:r>
-              <a:rPr lang="en-US" altLang="ko-KR"/>
+              <a:rPr lang="en-US" altLang="ko-KR" dirty="0"/>
               <a:t>: </a:t>
             </a:r>
             <a:r>
-              <a:rPr lang="ko-KR" altLang="en-US"/>
+              <a:rPr lang="ko-KR" altLang="en-US" dirty="0"/>
               <a:t>빛의 중첩 표현을 위해 가산 혼합 적용</a:t>
             </a:r>
             <a:r>
-              <a:rPr lang="en-US" altLang="ko-KR"/>
+              <a:rPr lang="en-US" altLang="ko-KR" dirty="0"/>
               <a:t>.</a:t>
             </a:r>
           </a:p>
@@ -4684,39 +5171,43 @@
               <a:buChar char="•"/>
             </a:pPr>
             <a:r>
-              <a:rPr lang="en-US" altLang="ko-KR" b="1"/>
+              <a:rPr lang="en-US" altLang="ko-KR" b="1" dirty="0"/>
               <a:t>Depth Stencil</a:t>
             </a:r>
             <a:r>
-              <a:rPr lang="en-US" altLang="ko-KR"/>
+              <a:rPr lang="en-US" altLang="ko-KR" dirty="0"/>
               <a:t>: </a:t>
             </a:r>
             <a:r>
-              <a:rPr lang="ko-KR" altLang="en-US"/>
-              <a:t>파티클 간의 불필요한 가림을 방지하고 부드러운 합성을 위해 </a:t>
-            </a:r>
-            <a:r>
-              <a:rPr lang="en-US" altLang="ko-KR">
+              <a:rPr lang="ko-KR" altLang="en-US" dirty="0" err="1"/>
+              <a:t>파티클</a:t>
+            </a:r>
+            <a:r>
+              <a:rPr lang="ko-KR" altLang="en-US" dirty="0"/>
+              <a:t> 간의 불필요한 가림을 방지하고 부드러운 합성을 위해 </a:t>
+            </a:r>
+            <a:r>
+              <a:rPr lang="en-US" altLang="ko-KR" dirty="0" err="1">
                 <a:latin typeface="Courier New" panose="02070309020205020404" pitchFamily="49" charset="0"/>
               </a:rPr>
               <a:t>DepthWrite</a:t>
             </a:r>
             <a:r>
-              <a:rPr lang="ko-KR" altLang="en-US"/>
+              <a:rPr lang="ko-KR" altLang="en-US" dirty="0"/>
               <a:t>를 비활성화</a:t>
             </a:r>
             <a:r>
-              <a:rPr lang="en-US" altLang="ko-KR"/>
+              <a:rPr lang="en-US" altLang="ko-KR" dirty="0"/>
               <a:t>(</a:t>
             </a:r>
             <a:r>
-              <a:rPr lang="en-US" altLang="ko-KR">
+              <a:rPr lang="en-US" altLang="ko-KR" dirty="0">
                 <a:latin typeface="Courier New" panose="02070309020205020404" pitchFamily="49" charset="0"/>
               </a:rPr>
               <a:t>ZERO</a:t>
             </a:r>
             <a:r>
-              <a:rPr lang="en-US" altLang="ko-KR"/>
+              <a:rPr lang="en-US" altLang="ko-KR" dirty="0"/>
               <a:t>)</a:t>
             </a:r>
           </a:p>
@@ -9220,10 +9711,3404 @@
           </a:p>
         </p:txBody>
       </p:sp>
+      <mc:AlternateContent xmlns:mc="http://schemas.openxmlformats.org/markup-compatibility/2006" xmlns:pslz="http://schemas.microsoft.com/office/powerpoint/2016/slidezoom">
+        <mc:Choice Requires="pslz">
+          <p:graphicFrame>
+            <p:nvGraphicFramePr>
+              <p:cNvPr id="5" name="슬라이드 확대/축소 4">
+                <a:extLst>
+                  <a:ext uri="{FF2B5EF4-FFF2-40B4-BE49-F238E27FC236}">
+                    <a16:creationId xmlns:a16="http://schemas.microsoft.com/office/drawing/2014/main" id="{06B53281-40B2-6971-D5AC-410CAAA059DC}"/>
+                  </a:ext>
+                </a:extLst>
+              </p:cNvPr>
+              <p:cNvGraphicFramePr>
+                <a:graphicFrameLocks noChangeAspect="1"/>
+              </p:cNvGraphicFramePr>
+              <p:nvPr>
+                <p:extLst>
+                  <p:ext uri="{D42A27DB-BD31-4B8C-83A1-F6EECF244321}">
+                    <p14:modId xmlns:p14="http://schemas.microsoft.com/office/powerpoint/2010/main" val="3985626009"/>
+                  </p:ext>
+                </p:extLst>
+              </p:nvPr>
+            </p:nvGraphicFramePr>
+            <p:xfrm>
+              <a:off x="123824" y="1317531"/>
+              <a:ext cx="4402667" cy="2476500"/>
+            </p:xfrm>
+            <a:graphic>
+              <a:graphicData uri="http://schemas.microsoft.com/office/powerpoint/2016/slidezoom">
+                <pslz:sldZm>
+                  <pslz:sldZmObj sldId="287" cId="1981946874">
+                    <pslz:zmPr id="{9AB2BB01-AAEA-4BCF-A481-2D917BD7A4B3}" returnToParent="0" transitionDur="1000">
+                      <p166:blipFill xmlns:p166="http://schemas.microsoft.com/office/powerpoint/2016/6/main">
+                        <a:blip r:embed="rId2"/>
+                        <a:stretch>
+                          <a:fillRect/>
+                        </a:stretch>
+                      </p166:blipFill>
+                      <p166:spPr xmlns:p166="http://schemas.microsoft.com/office/powerpoint/2016/6/main">
+                        <a:xfrm>
+                          <a:off x="0" y="0"/>
+                          <a:ext cx="4402667" cy="2476500"/>
+                        </a:xfrm>
+                        <a:prstGeom prst="rect">
+                          <a:avLst/>
+                        </a:prstGeom>
+                        <a:ln w="3175">
+                          <a:solidFill>
+                            <a:prstClr val="ltGray"/>
+                          </a:solidFill>
+                        </a:ln>
+                      </p166:spPr>
+                    </pslz:zmPr>
+                  </pslz:sldZmObj>
+                </pslz:sldZm>
+              </a:graphicData>
+            </a:graphic>
+          </p:graphicFrame>
+        </mc:Choice>
+        <mc:Fallback xmlns="">
+          <p:pic>
+            <p:nvPicPr>
+              <p:cNvPr id="5" name="슬라이드 확대/축소 4">
+                <a:hlinkClick r:id="rId3" action="ppaction://hlinksldjump"/>
+                <a:extLst>
+                  <a:ext uri="{FF2B5EF4-FFF2-40B4-BE49-F238E27FC236}">
+                    <a16:creationId xmlns:a16="http://schemas.microsoft.com/office/drawing/2014/main" id="{06B53281-40B2-6971-D5AC-410CAAA059DC}"/>
+                  </a:ext>
+                </a:extLst>
+              </p:cNvPr>
+              <p:cNvPicPr>
+                <a:picLocks noGrp="1" noRot="1" noChangeAspect="1" noMove="1" noResize="1" noEditPoints="1" noAdjustHandles="1" noChangeArrowheads="1" noChangeShapeType="1"/>
+              </p:cNvPicPr>
+              <p:nvPr/>
+            </p:nvPicPr>
+            <p:blipFill>
+              <a:blip r:embed="rId4"/>
+              <a:stretch>
+                <a:fillRect/>
+              </a:stretch>
+            </p:blipFill>
+            <p:spPr>
+              <a:xfrm>
+                <a:off x="123824" y="1317531"/>
+                <a:ext cx="4402667" cy="2476500"/>
+              </a:xfrm>
+              <a:prstGeom prst="rect">
+                <a:avLst/>
+              </a:prstGeom>
+              <a:ln w="3175">
+                <a:solidFill>
+                  <a:prstClr val="ltGray"/>
+                </a:solidFill>
+              </a:ln>
+            </p:spPr>
+          </p:pic>
+        </mc:Fallback>
+      </mc:AlternateContent>
     </p:spTree>
     <p:extLst>
       <p:ext uri="{BB962C8B-B14F-4D97-AF65-F5344CB8AC3E}">
         <p14:creationId xmlns:p14="http://schemas.microsoft.com/office/powerpoint/2010/main" val="3849585021"/>
+      </p:ext>
+    </p:extLst>
+  </p:cSld>
+  <p:clrMapOvr>
+    <a:masterClrMapping/>
+  </p:clrMapOvr>
+</p:sld>
+</file>
+
+<file path=ppt/slides/slide32.xml><?xml version="1.0" encoding="utf-8"?>
+<p:sld xmlns:a="http://schemas.openxmlformats.org/drawingml/2006/main" xmlns:r="http://schemas.openxmlformats.org/officeDocument/2006/relationships" xmlns:p="http://schemas.openxmlformats.org/presentationml/2006/main">
+  <p:cSld>
+    <p:spTree>
+      <p:nvGrpSpPr>
+        <p:cNvPr id="1" name="">
+          <a:extLst>
+            <a:ext uri="{FF2B5EF4-FFF2-40B4-BE49-F238E27FC236}">
+              <a16:creationId xmlns:a16="http://schemas.microsoft.com/office/drawing/2014/main" id="{3F588F47-C363-F150-04AB-A90895D6FA48}"/>
+            </a:ext>
+          </a:extLst>
+        </p:cNvPr>
+        <p:cNvGrpSpPr/>
+        <p:nvPr/>
+      </p:nvGrpSpPr>
+      <p:grpSpPr>
+        <a:xfrm>
+          <a:off x="0" y="0"/>
+          <a:ext cx="0" cy="0"/>
+          <a:chOff x="0" y="0"/>
+          <a:chExt cx="0" cy="0"/>
+        </a:xfrm>
+      </p:grpSpPr>
+      <p:sp>
+        <p:nvSpPr>
+          <p:cNvPr id="2" name="제목 1">
+            <a:extLst>
+              <a:ext uri="{FF2B5EF4-FFF2-40B4-BE49-F238E27FC236}">
+                <a16:creationId xmlns:a16="http://schemas.microsoft.com/office/drawing/2014/main" id="{B00E8A86-30E7-D60A-818F-3797DD69BCDB}"/>
+              </a:ext>
+            </a:extLst>
+          </p:cNvPr>
+          <p:cNvSpPr>
+            <a:spLocks noGrp="1"/>
+          </p:cNvSpPr>
+          <p:nvPr>
+            <p:ph type="title"/>
+          </p:nvPr>
+        </p:nvSpPr>
+        <p:spPr>
+          <a:xfrm>
+            <a:off x="0" y="18255"/>
+            <a:ext cx="10515600" cy="850425"/>
+          </a:xfrm>
+        </p:spPr>
+        <p:txBody>
+          <a:bodyPr>
+            <a:normAutofit/>
+          </a:bodyPr>
+          <a:lstStyle/>
+          <a:p>
+            <a:r>
+              <a:rPr lang="en-US" altLang="ko-KR" sz="5400" dirty="0"/>
+              <a:t>TimeLine-</a:t>
+            </a:r>
+            <a:r>
+              <a:rPr lang="en-US" altLang="ko-KR" sz="5400" dirty="0" err="1"/>
+              <a:t>RenderPass</a:t>
+            </a:r>
+            <a:endParaRPr lang="ko-KR" altLang="en-US" sz="5400" dirty="0"/>
+          </a:p>
+        </p:txBody>
+      </p:sp>
+      <p:sp>
+        <p:nvSpPr>
+          <p:cNvPr id="3" name="TextBox 2">
+            <a:extLst>
+              <a:ext uri="{FF2B5EF4-FFF2-40B4-BE49-F238E27FC236}">
+                <a16:creationId xmlns:a16="http://schemas.microsoft.com/office/drawing/2014/main" id="{4B14D78D-8D37-8A07-FCB6-E6714F2004C6}"/>
+              </a:ext>
+            </a:extLst>
+          </p:cNvPr>
+          <p:cNvSpPr txBox="1"/>
+          <p:nvPr/>
+        </p:nvSpPr>
+        <p:spPr>
+          <a:xfrm>
+            <a:off x="0" y="953913"/>
+            <a:ext cx="2194832" cy="369332"/>
+          </a:xfrm>
+          <a:prstGeom prst="rect">
+            <a:avLst/>
+          </a:prstGeom>
+          <a:noFill/>
+        </p:spPr>
+        <p:txBody>
+          <a:bodyPr wrap="none" rtlCol="0">
+            <a:spAutoFit/>
+          </a:bodyPr>
+          <a:lstStyle/>
+          <a:p>
+            <a:r>
+              <a:rPr lang="ko-KR" altLang="en-US" dirty="0"/>
+              <a:t>레스터 </a:t>
+            </a:r>
+            <a:r>
+              <a:rPr lang="ko-KR" altLang="en-US"/>
+              <a:t>렌더링</a:t>
+            </a:r>
+            <a:r>
+              <a:rPr lang="en-US" altLang="ko-KR" dirty="0"/>
+              <a:t> </a:t>
+            </a:r>
+            <a:r>
+              <a:rPr lang="ko-KR" altLang="en-US" dirty="0"/>
+              <a:t>패스</a:t>
+            </a:r>
+          </a:p>
+        </p:txBody>
+      </p:sp>
+      <p:sp>
+        <p:nvSpPr>
+          <p:cNvPr id="4" name="TextBox 3">
+            <a:extLst>
+              <a:ext uri="{FF2B5EF4-FFF2-40B4-BE49-F238E27FC236}">
+                <a16:creationId xmlns:a16="http://schemas.microsoft.com/office/drawing/2014/main" id="{EC5C655C-EF8A-900B-E9C3-276D9679831D}"/>
+              </a:ext>
+            </a:extLst>
+          </p:cNvPr>
+          <p:cNvSpPr txBox="1"/>
+          <p:nvPr/>
+        </p:nvSpPr>
+        <p:spPr>
+          <a:xfrm>
+            <a:off x="219850" y="1442508"/>
+            <a:ext cx="1420582" cy="369332"/>
+          </a:xfrm>
+          <a:prstGeom prst="rect">
+            <a:avLst/>
+          </a:prstGeom>
+          <a:noFill/>
+          <a:ln w="25400">
+            <a:solidFill>
+              <a:schemeClr val="tx1"/>
+            </a:solidFill>
+          </a:ln>
+        </p:spPr>
+        <p:txBody>
+          <a:bodyPr wrap="none" rtlCol="0">
+            <a:spAutoFit/>
+          </a:bodyPr>
+          <a:lstStyle/>
+          <a:p>
+            <a:r>
+              <a:rPr lang="ko-KR" altLang="en-US" dirty="0" err="1"/>
+              <a:t>셰도우</a:t>
+            </a:r>
+            <a:r>
+              <a:rPr lang="ko-KR" altLang="en-US" dirty="0"/>
+              <a:t> 패스</a:t>
+            </a:r>
+          </a:p>
+        </p:txBody>
+      </p:sp>
+      <p:sp>
+        <p:nvSpPr>
+          <p:cNvPr id="5" name="TextBox 4">
+            <a:extLst>
+              <a:ext uri="{FF2B5EF4-FFF2-40B4-BE49-F238E27FC236}">
+                <a16:creationId xmlns:a16="http://schemas.microsoft.com/office/drawing/2014/main" id="{4E58BD38-31ED-9A26-447E-C340B72A4CA8}"/>
+              </a:ext>
+            </a:extLst>
+          </p:cNvPr>
+          <p:cNvSpPr txBox="1"/>
+          <p:nvPr/>
+        </p:nvSpPr>
+        <p:spPr>
+          <a:xfrm>
+            <a:off x="3274475" y="1442508"/>
+            <a:ext cx="1189749" cy="369332"/>
+          </a:xfrm>
+          <a:prstGeom prst="rect">
+            <a:avLst/>
+          </a:prstGeom>
+          <a:noFill/>
+          <a:ln w="25400">
+            <a:solidFill>
+              <a:schemeClr val="tx1"/>
+            </a:solidFill>
+          </a:ln>
+        </p:spPr>
+        <p:txBody>
+          <a:bodyPr wrap="none" rtlCol="0">
+            <a:spAutoFit/>
+          </a:bodyPr>
+          <a:lstStyle/>
+          <a:p>
+            <a:r>
+              <a:rPr lang="ko-KR" altLang="en-US" dirty="0" err="1"/>
+              <a:t>렌더</a:t>
+            </a:r>
+            <a:r>
+              <a:rPr lang="ko-KR" altLang="en-US" dirty="0"/>
+              <a:t> 패스</a:t>
+            </a:r>
+          </a:p>
+        </p:txBody>
+      </p:sp>
+      <p:sp>
+        <p:nvSpPr>
+          <p:cNvPr id="6" name="TextBox 5">
+            <a:extLst>
+              <a:ext uri="{FF2B5EF4-FFF2-40B4-BE49-F238E27FC236}">
+                <a16:creationId xmlns:a16="http://schemas.microsoft.com/office/drawing/2014/main" id="{69463E17-72F8-96B3-631D-F7E71EFB2BD5}"/>
+              </a:ext>
+            </a:extLst>
+          </p:cNvPr>
+          <p:cNvSpPr txBox="1"/>
+          <p:nvPr/>
+        </p:nvSpPr>
+        <p:spPr>
+          <a:xfrm>
+            <a:off x="6098267" y="1442508"/>
+            <a:ext cx="1420582" cy="369332"/>
+          </a:xfrm>
+          <a:prstGeom prst="rect">
+            <a:avLst/>
+          </a:prstGeom>
+          <a:noFill/>
+          <a:ln w="25400">
+            <a:solidFill>
+              <a:schemeClr val="tx1"/>
+            </a:solidFill>
+          </a:ln>
+        </p:spPr>
+        <p:txBody>
+          <a:bodyPr wrap="none" rtlCol="0">
+            <a:spAutoFit/>
+          </a:bodyPr>
+          <a:lstStyle/>
+          <a:p>
+            <a:r>
+              <a:rPr lang="ko-KR" altLang="en-US" dirty="0" err="1"/>
+              <a:t>컴퓨트</a:t>
+            </a:r>
+            <a:r>
+              <a:rPr lang="ko-KR" altLang="en-US" dirty="0"/>
+              <a:t> 패스</a:t>
+            </a:r>
+          </a:p>
+        </p:txBody>
+      </p:sp>
+      <p:sp>
+        <p:nvSpPr>
+          <p:cNvPr id="7" name="TextBox 6">
+            <a:extLst>
+              <a:ext uri="{FF2B5EF4-FFF2-40B4-BE49-F238E27FC236}">
+                <a16:creationId xmlns:a16="http://schemas.microsoft.com/office/drawing/2014/main" id="{9EB1B0FD-A24B-D3A6-4E3C-F1DFA7BB9CA8}"/>
+              </a:ext>
+            </a:extLst>
+          </p:cNvPr>
+          <p:cNvSpPr txBox="1"/>
+          <p:nvPr/>
+        </p:nvSpPr>
+        <p:spPr>
+          <a:xfrm>
+            <a:off x="9046260" y="1442508"/>
+            <a:ext cx="952505" cy="369332"/>
+          </a:xfrm>
+          <a:prstGeom prst="rect">
+            <a:avLst/>
+          </a:prstGeom>
+          <a:noFill/>
+          <a:ln w="25400">
+            <a:solidFill>
+              <a:schemeClr val="tx1"/>
+            </a:solidFill>
+          </a:ln>
+        </p:spPr>
+        <p:txBody>
+          <a:bodyPr wrap="none" rtlCol="0">
+            <a:spAutoFit/>
+          </a:bodyPr>
+          <a:lstStyle/>
+          <a:p>
+            <a:r>
+              <a:rPr lang="en-US" altLang="ko-KR" dirty="0"/>
+              <a:t>UI</a:t>
+            </a:r>
+            <a:r>
+              <a:rPr lang="ko-KR" altLang="en-US" dirty="0"/>
+              <a:t> 패스</a:t>
+            </a:r>
+          </a:p>
+        </p:txBody>
+      </p:sp>
+      <p:cxnSp>
+        <p:nvCxnSpPr>
+          <p:cNvPr id="9" name="직선 화살표 연결선 8">
+            <a:extLst>
+              <a:ext uri="{FF2B5EF4-FFF2-40B4-BE49-F238E27FC236}">
+                <a16:creationId xmlns:a16="http://schemas.microsoft.com/office/drawing/2014/main" id="{2DB76ECD-3C20-52F4-FF4E-AB0ACA976361}"/>
+              </a:ext>
+            </a:extLst>
+          </p:cNvPr>
+          <p:cNvCxnSpPr>
+            <a:stCxn id="4" idx="3"/>
+            <a:endCxn id="5" idx="1"/>
+          </p:cNvCxnSpPr>
+          <p:nvPr/>
+        </p:nvCxnSpPr>
+        <p:spPr>
+          <a:xfrm>
+            <a:off x="1640432" y="1627174"/>
+            <a:ext cx="1634043" cy="0"/>
+          </a:xfrm>
+          <a:prstGeom prst="straightConnector1">
+            <a:avLst/>
+          </a:prstGeom>
+          <a:ln w="44450">
+            <a:solidFill>
+              <a:schemeClr val="tx1"/>
+            </a:solidFill>
+            <a:tailEnd type="triangle"/>
+          </a:ln>
+        </p:spPr>
+        <p:style>
+          <a:lnRef idx="2">
+            <a:schemeClr val="accent1"/>
+          </a:lnRef>
+          <a:fillRef idx="0">
+            <a:schemeClr val="accent1"/>
+          </a:fillRef>
+          <a:effectRef idx="1">
+            <a:schemeClr val="accent1"/>
+          </a:effectRef>
+          <a:fontRef idx="minor">
+            <a:schemeClr val="tx1"/>
+          </a:fontRef>
+        </p:style>
+      </p:cxnSp>
+      <p:cxnSp>
+        <p:nvCxnSpPr>
+          <p:cNvPr id="10" name="직선 화살표 연결선 9">
+            <a:extLst>
+              <a:ext uri="{FF2B5EF4-FFF2-40B4-BE49-F238E27FC236}">
+                <a16:creationId xmlns:a16="http://schemas.microsoft.com/office/drawing/2014/main" id="{371A4A26-4BAE-4346-752F-376667868C6D}"/>
+              </a:ext>
+            </a:extLst>
+          </p:cNvPr>
+          <p:cNvCxnSpPr>
+            <a:cxnSpLocks/>
+            <a:stCxn id="5" idx="3"/>
+            <a:endCxn id="6" idx="1"/>
+          </p:cNvCxnSpPr>
+          <p:nvPr/>
+        </p:nvCxnSpPr>
+        <p:spPr>
+          <a:xfrm>
+            <a:off x="4464224" y="1627174"/>
+            <a:ext cx="1634043" cy="0"/>
+          </a:xfrm>
+          <a:prstGeom prst="straightConnector1">
+            <a:avLst/>
+          </a:prstGeom>
+          <a:ln w="44450">
+            <a:solidFill>
+              <a:schemeClr val="tx1"/>
+            </a:solidFill>
+            <a:tailEnd type="triangle"/>
+          </a:ln>
+        </p:spPr>
+        <p:style>
+          <a:lnRef idx="2">
+            <a:schemeClr val="accent1"/>
+          </a:lnRef>
+          <a:fillRef idx="0">
+            <a:schemeClr val="accent1"/>
+          </a:fillRef>
+          <a:effectRef idx="1">
+            <a:schemeClr val="accent1"/>
+          </a:effectRef>
+          <a:fontRef idx="minor">
+            <a:schemeClr val="tx1"/>
+          </a:fontRef>
+        </p:style>
+      </p:cxnSp>
+      <p:cxnSp>
+        <p:nvCxnSpPr>
+          <p:cNvPr id="13" name="직선 화살표 연결선 12">
+            <a:extLst>
+              <a:ext uri="{FF2B5EF4-FFF2-40B4-BE49-F238E27FC236}">
+                <a16:creationId xmlns:a16="http://schemas.microsoft.com/office/drawing/2014/main" id="{F5C1783E-FDF1-9206-BEF0-CDD19E9C1634}"/>
+              </a:ext>
+            </a:extLst>
+          </p:cNvPr>
+          <p:cNvCxnSpPr>
+            <a:cxnSpLocks/>
+            <a:stCxn id="6" idx="3"/>
+            <a:endCxn id="7" idx="1"/>
+          </p:cNvCxnSpPr>
+          <p:nvPr/>
+        </p:nvCxnSpPr>
+        <p:spPr>
+          <a:xfrm>
+            <a:off x="7518849" y="1627174"/>
+            <a:ext cx="1527411" cy="0"/>
+          </a:xfrm>
+          <a:prstGeom prst="straightConnector1">
+            <a:avLst/>
+          </a:prstGeom>
+          <a:ln w="44450">
+            <a:solidFill>
+              <a:schemeClr val="tx1"/>
+            </a:solidFill>
+            <a:tailEnd type="triangle"/>
+          </a:ln>
+        </p:spPr>
+        <p:style>
+          <a:lnRef idx="2">
+            <a:schemeClr val="accent1"/>
+          </a:lnRef>
+          <a:fillRef idx="0">
+            <a:schemeClr val="accent1"/>
+          </a:fillRef>
+          <a:effectRef idx="1">
+            <a:schemeClr val="accent1"/>
+          </a:effectRef>
+          <a:fontRef idx="minor">
+            <a:schemeClr val="tx1"/>
+          </a:fontRef>
+        </p:style>
+      </p:cxnSp>
+      <p:sp>
+        <p:nvSpPr>
+          <p:cNvPr id="27" name="TextBox 26">
+            <a:extLst>
+              <a:ext uri="{FF2B5EF4-FFF2-40B4-BE49-F238E27FC236}">
+                <a16:creationId xmlns:a16="http://schemas.microsoft.com/office/drawing/2014/main" id="{C433F918-5EDD-28A3-E6FB-9339ADE6528B}"/>
+              </a:ext>
+            </a:extLst>
+          </p:cNvPr>
+          <p:cNvSpPr txBox="1"/>
+          <p:nvPr/>
+        </p:nvSpPr>
+        <p:spPr>
+          <a:xfrm>
+            <a:off x="10878373" y="1442508"/>
+            <a:ext cx="954044" cy="369332"/>
+          </a:xfrm>
+          <a:prstGeom prst="rect">
+            <a:avLst/>
+          </a:prstGeom>
+          <a:noFill/>
+          <a:ln w="25400">
+            <a:solidFill>
+              <a:schemeClr val="tx1"/>
+            </a:solidFill>
+          </a:ln>
+        </p:spPr>
+        <p:txBody>
+          <a:bodyPr wrap="none" rtlCol="0">
+            <a:spAutoFit/>
+          </a:bodyPr>
+          <a:lstStyle/>
+          <a:p>
+            <a:r>
+              <a:rPr lang="en-US" altLang="ko-KR" dirty="0"/>
+              <a:t>Present</a:t>
+            </a:r>
+            <a:endParaRPr lang="ko-KR" altLang="en-US" dirty="0"/>
+          </a:p>
+        </p:txBody>
+      </p:sp>
+      <p:cxnSp>
+        <p:nvCxnSpPr>
+          <p:cNvPr id="28" name="직선 화살표 연결선 27">
+            <a:extLst>
+              <a:ext uri="{FF2B5EF4-FFF2-40B4-BE49-F238E27FC236}">
+                <a16:creationId xmlns:a16="http://schemas.microsoft.com/office/drawing/2014/main" id="{D70EE693-388A-83A0-7676-736685BC6CB7}"/>
+              </a:ext>
+            </a:extLst>
+          </p:cNvPr>
+          <p:cNvCxnSpPr>
+            <a:cxnSpLocks/>
+            <a:stCxn id="7" idx="3"/>
+            <a:endCxn id="27" idx="1"/>
+          </p:cNvCxnSpPr>
+          <p:nvPr/>
+        </p:nvCxnSpPr>
+        <p:spPr>
+          <a:xfrm>
+            <a:off x="9998765" y="1627174"/>
+            <a:ext cx="879608" cy="0"/>
+          </a:xfrm>
+          <a:prstGeom prst="straightConnector1">
+            <a:avLst/>
+          </a:prstGeom>
+          <a:ln w="44450">
+            <a:solidFill>
+              <a:schemeClr val="tx1"/>
+            </a:solidFill>
+            <a:tailEnd type="triangle"/>
+          </a:ln>
+        </p:spPr>
+        <p:style>
+          <a:lnRef idx="2">
+            <a:schemeClr val="accent1"/>
+          </a:lnRef>
+          <a:fillRef idx="0">
+            <a:schemeClr val="accent1"/>
+          </a:fillRef>
+          <a:effectRef idx="1">
+            <a:schemeClr val="accent1"/>
+          </a:effectRef>
+          <a:fontRef idx="minor">
+            <a:schemeClr val="tx1"/>
+          </a:fontRef>
+        </p:style>
+      </p:cxnSp>
+      <p:sp>
+        <p:nvSpPr>
+          <p:cNvPr id="33" name="TextBox 32">
+            <a:extLst>
+              <a:ext uri="{FF2B5EF4-FFF2-40B4-BE49-F238E27FC236}">
+                <a16:creationId xmlns:a16="http://schemas.microsoft.com/office/drawing/2014/main" id="{8FB9B2A4-30C1-768D-8FC6-2F5E8BF6B02C}"/>
+              </a:ext>
+            </a:extLst>
+          </p:cNvPr>
+          <p:cNvSpPr txBox="1"/>
+          <p:nvPr/>
+        </p:nvSpPr>
+        <p:spPr>
+          <a:xfrm>
+            <a:off x="219850" y="1865701"/>
+            <a:ext cx="2438488" cy="1277273"/>
+          </a:xfrm>
+          <a:prstGeom prst="rect">
+            <a:avLst/>
+          </a:prstGeom>
+          <a:noFill/>
+        </p:spPr>
+        <p:txBody>
+          <a:bodyPr wrap="none" rtlCol="0">
+            <a:spAutoFit/>
+          </a:bodyPr>
+          <a:lstStyle/>
+          <a:p>
+            <a:r>
+              <a:rPr lang="ko-KR" altLang="en-US" sz="1100" dirty="0" err="1"/>
+              <a:t>레스터에서</a:t>
+            </a:r>
+            <a:r>
+              <a:rPr lang="ko-KR" altLang="en-US" sz="1100" dirty="0"/>
+              <a:t> </a:t>
+            </a:r>
+            <a:r>
+              <a:rPr lang="ko-KR" altLang="en-US" sz="1100" dirty="0" err="1"/>
+              <a:t>셰도우</a:t>
+            </a:r>
+            <a:r>
+              <a:rPr lang="ko-KR" altLang="en-US" sz="1100" dirty="0"/>
+              <a:t> 맵 렌더링</a:t>
+            </a:r>
+            <a:endParaRPr lang="en-US" altLang="ko-KR" sz="1100" dirty="0"/>
+          </a:p>
+          <a:p>
+            <a:r>
+              <a:rPr lang="en-US" altLang="ko-KR" sz="1100" dirty="0"/>
+              <a:t> - </a:t>
+            </a:r>
+            <a:r>
+              <a:rPr lang="en-US" altLang="ko-KR" sz="1100" dirty="0" err="1"/>
+              <a:t>DirLight</a:t>
+            </a:r>
+            <a:endParaRPr lang="en-US" altLang="ko-KR" sz="1100" dirty="0"/>
+          </a:p>
+          <a:p>
+            <a:r>
+              <a:rPr lang="en-US" altLang="ko-KR" sz="1100" dirty="0"/>
+              <a:t> - </a:t>
+            </a:r>
+            <a:r>
+              <a:rPr lang="en-US" altLang="ko-KR" sz="1100" dirty="0" err="1"/>
+              <a:t>PointLight</a:t>
+            </a:r>
+            <a:endParaRPr lang="en-US" altLang="ko-KR" sz="1100" dirty="0"/>
+          </a:p>
+          <a:p>
+            <a:r>
+              <a:rPr lang="en-US" altLang="ko-KR" sz="1100" dirty="0"/>
+              <a:t> - </a:t>
+            </a:r>
+            <a:r>
+              <a:rPr lang="en-US" altLang="ko-KR" sz="1100" dirty="0" err="1"/>
+              <a:t>SpotLight</a:t>
+            </a:r>
+            <a:endParaRPr lang="en-US" altLang="ko-KR" sz="1100" dirty="0"/>
+          </a:p>
+          <a:p>
+            <a:r>
+              <a:rPr lang="en-US" altLang="ko-KR" sz="1100" dirty="0"/>
+              <a:t> : </a:t>
+            </a:r>
+            <a:r>
+              <a:rPr lang="ko-KR" altLang="en-US" sz="1100" dirty="0"/>
+              <a:t>이건 빛 방향의 </a:t>
+            </a:r>
+            <a:r>
+              <a:rPr lang="ko-KR" altLang="en-US" sz="1100" dirty="0" err="1"/>
+              <a:t>직교투영컬링수행</a:t>
+            </a:r>
+            <a:endParaRPr lang="en-US" altLang="ko-KR" sz="1100" dirty="0"/>
+          </a:p>
+          <a:p>
+            <a:r>
+              <a:rPr lang="en-US" altLang="ko-KR" sz="1100" dirty="0"/>
+              <a:t> : </a:t>
+            </a:r>
+            <a:r>
+              <a:rPr lang="ko-KR" altLang="en-US" sz="1100" dirty="0"/>
+              <a:t>또한 </a:t>
+            </a:r>
+            <a:r>
+              <a:rPr lang="en-US" altLang="ko-KR" sz="1100" dirty="0"/>
+              <a:t>LOD,</a:t>
+            </a:r>
+            <a:r>
+              <a:rPr lang="ko-KR" altLang="en-US" sz="1100" dirty="0"/>
+              <a:t> </a:t>
+            </a:r>
+            <a:r>
+              <a:rPr lang="en-US" altLang="ko-KR" sz="1100" dirty="0"/>
+              <a:t>Instancing</a:t>
+            </a:r>
+            <a:r>
+              <a:rPr lang="ko-KR" altLang="en-US" sz="1100" dirty="0"/>
+              <a:t>을 </a:t>
+            </a:r>
+            <a:endParaRPr lang="en-US" altLang="ko-KR" sz="1100" dirty="0"/>
+          </a:p>
+          <a:p>
+            <a:r>
+              <a:rPr lang="en-US" altLang="ko-KR" sz="1100" dirty="0"/>
+              <a:t> : </a:t>
+            </a:r>
+            <a:r>
+              <a:rPr lang="ko-KR" altLang="en-US" sz="1100" dirty="0"/>
+              <a:t>적극 사용해 수행해야 함</a:t>
+            </a:r>
+            <a:r>
+              <a:rPr lang="en-US" altLang="ko-KR" sz="1100" dirty="0"/>
+              <a:t>.</a:t>
+            </a:r>
+          </a:p>
+        </p:txBody>
+      </p:sp>
+      <p:sp>
+        <p:nvSpPr>
+          <p:cNvPr id="34" name="TextBox 33">
+            <a:extLst>
+              <a:ext uri="{FF2B5EF4-FFF2-40B4-BE49-F238E27FC236}">
+                <a16:creationId xmlns:a16="http://schemas.microsoft.com/office/drawing/2014/main" id="{CACE8DBE-C1E7-0251-BCF5-81A23D8BAA1B}"/>
+              </a:ext>
+            </a:extLst>
+          </p:cNvPr>
+          <p:cNvSpPr txBox="1"/>
+          <p:nvPr/>
+        </p:nvSpPr>
+        <p:spPr>
+          <a:xfrm>
+            <a:off x="3231283" y="1846657"/>
+            <a:ext cx="2640466" cy="938719"/>
+          </a:xfrm>
+          <a:prstGeom prst="rect">
+            <a:avLst/>
+          </a:prstGeom>
+          <a:noFill/>
+        </p:spPr>
+        <p:txBody>
+          <a:bodyPr wrap="none" rtlCol="0">
+            <a:spAutoFit/>
+          </a:bodyPr>
+          <a:lstStyle/>
+          <a:p>
+            <a:r>
+              <a:rPr lang="ko-KR" altLang="en-US" sz="1100" dirty="0"/>
+              <a:t>스카이 박스 렌더링</a:t>
+            </a:r>
+            <a:endParaRPr lang="en-US" altLang="ko-KR" sz="1100" dirty="0"/>
+          </a:p>
+          <a:p>
+            <a:r>
+              <a:rPr lang="ko-KR" altLang="en-US" sz="1100" dirty="0"/>
+              <a:t>뷰 </a:t>
+            </a:r>
+            <a:r>
+              <a:rPr lang="ko-KR" altLang="en-US" sz="1100" dirty="0" err="1"/>
+              <a:t>프러스텀</a:t>
+            </a:r>
+            <a:r>
+              <a:rPr lang="ko-KR" altLang="en-US" sz="1100" dirty="0"/>
+              <a:t> </a:t>
+            </a:r>
+            <a:r>
+              <a:rPr lang="ko-KR" altLang="en-US" sz="1100" dirty="0" err="1"/>
+              <a:t>컬링으로</a:t>
+            </a:r>
+            <a:r>
+              <a:rPr lang="ko-KR" altLang="en-US" sz="1100" dirty="0"/>
+              <a:t> 오브젝트 렌더링</a:t>
+            </a:r>
+            <a:endParaRPr lang="en-US" altLang="ko-KR" sz="1100" dirty="0"/>
+          </a:p>
+          <a:p>
+            <a:r>
+              <a:rPr lang="ko-KR" altLang="en-US" sz="1100" dirty="0"/>
+              <a:t>빌보드 출력 </a:t>
+            </a:r>
+            <a:r>
+              <a:rPr lang="en-US" altLang="ko-KR" sz="1100" dirty="0"/>
+              <a:t>(ex&gt; </a:t>
+            </a:r>
+            <a:r>
+              <a:rPr lang="ko-KR" altLang="en-US" sz="1100" dirty="0"/>
+              <a:t>적 </a:t>
+            </a:r>
+            <a:r>
+              <a:rPr lang="en-US" altLang="ko-KR" sz="1100" dirty="0"/>
+              <a:t>HP)</a:t>
+            </a:r>
+          </a:p>
+          <a:p>
+            <a:r>
+              <a:rPr lang="ko-KR" altLang="en-US" sz="1100" dirty="0"/>
+              <a:t>총알 궤적 출력</a:t>
+            </a:r>
+            <a:endParaRPr lang="en-US" altLang="ko-KR" sz="1100" dirty="0"/>
+          </a:p>
+          <a:p>
+            <a:r>
+              <a:rPr lang="ko-KR" altLang="en-US" sz="1100" dirty="0" err="1"/>
+              <a:t>파티클</a:t>
+            </a:r>
+            <a:r>
+              <a:rPr lang="ko-KR" altLang="en-US" sz="1100" dirty="0"/>
+              <a:t> 입자 출력</a:t>
+            </a:r>
+            <a:endParaRPr lang="en-US" altLang="ko-KR" sz="1100" dirty="0"/>
+          </a:p>
+        </p:txBody>
+      </p:sp>
+      <p:sp>
+        <p:nvSpPr>
+          <p:cNvPr id="35" name="TextBox 34">
+            <a:extLst>
+              <a:ext uri="{FF2B5EF4-FFF2-40B4-BE49-F238E27FC236}">
+                <a16:creationId xmlns:a16="http://schemas.microsoft.com/office/drawing/2014/main" id="{DE8DE7E5-C5B6-139F-70F7-A51B07A84272}"/>
+              </a:ext>
+            </a:extLst>
+          </p:cNvPr>
+          <p:cNvSpPr txBox="1"/>
+          <p:nvPr/>
+        </p:nvSpPr>
+        <p:spPr>
+          <a:xfrm>
+            <a:off x="6096000" y="1865701"/>
+            <a:ext cx="3121367" cy="938719"/>
+          </a:xfrm>
+          <a:prstGeom prst="rect">
+            <a:avLst/>
+          </a:prstGeom>
+          <a:noFill/>
+        </p:spPr>
+        <p:txBody>
+          <a:bodyPr wrap="none" rtlCol="0">
+            <a:spAutoFit/>
+          </a:bodyPr>
+          <a:lstStyle/>
+          <a:p>
+            <a:r>
+              <a:rPr lang="ko-KR" altLang="en-US" sz="1100" dirty="0"/>
+              <a:t>모션 </a:t>
+            </a:r>
+            <a:r>
+              <a:rPr lang="ko-KR" altLang="en-US" sz="1100" dirty="0" err="1"/>
+              <a:t>블러</a:t>
+            </a:r>
+            <a:r>
+              <a:rPr lang="ko-KR" altLang="en-US" sz="1100" dirty="0"/>
+              <a:t> </a:t>
+            </a:r>
+            <a:r>
+              <a:rPr lang="en-US" altLang="ko-KR" sz="1100" dirty="0"/>
+              <a:t>/</a:t>
+            </a:r>
+            <a:r>
+              <a:rPr lang="ko-KR" altLang="en-US" sz="1100" dirty="0"/>
+              <a:t> 거리에 따른 </a:t>
+            </a:r>
+            <a:r>
+              <a:rPr lang="ko-KR" altLang="en-US" sz="1100" dirty="0" err="1"/>
+              <a:t>합성곱연산</a:t>
+            </a:r>
+            <a:endParaRPr lang="en-US" altLang="ko-KR" sz="1100" dirty="0"/>
+          </a:p>
+          <a:p>
+            <a:r>
+              <a:rPr lang="en-US" altLang="ko-KR" sz="1100" dirty="0"/>
+              <a:t>GPU</a:t>
+            </a:r>
+            <a:r>
+              <a:rPr lang="ko-KR" altLang="en-US" sz="1100" dirty="0"/>
+              <a:t> 애니메이션 </a:t>
+            </a:r>
+            <a:r>
+              <a:rPr lang="ko-KR" altLang="en-US" sz="1100" dirty="0" err="1"/>
+              <a:t>블랜딩</a:t>
+            </a:r>
+            <a:endParaRPr lang="en-US" altLang="ko-KR" sz="1100" dirty="0"/>
+          </a:p>
+          <a:p>
+            <a:r>
+              <a:rPr lang="en-US" altLang="ko-KR" sz="1100" dirty="0"/>
+              <a:t>GPU </a:t>
+            </a:r>
+            <a:r>
+              <a:rPr lang="ko-KR" altLang="en-US" sz="1100" dirty="0"/>
+              <a:t>애니메이션 </a:t>
+            </a:r>
+            <a:r>
+              <a:rPr lang="en-US" altLang="ko-KR" sz="1100" dirty="0" err="1"/>
+              <a:t>ToWorld</a:t>
+            </a:r>
+            <a:r>
+              <a:rPr lang="ko-KR" altLang="en-US" sz="1100" dirty="0"/>
+              <a:t> 트리누적연산</a:t>
+            </a:r>
+            <a:endParaRPr lang="en-US" altLang="ko-KR" sz="1100" dirty="0"/>
+          </a:p>
+          <a:p>
+            <a:r>
+              <a:rPr lang="ko-KR" altLang="en-US" sz="1100" dirty="0" err="1"/>
+              <a:t>파티클</a:t>
+            </a:r>
+            <a:r>
+              <a:rPr lang="ko-KR" altLang="en-US" sz="1100" dirty="0"/>
+              <a:t> 움직임 연산 </a:t>
+            </a:r>
+            <a:r>
+              <a:rPr lang="en-US" altLang="ko-KR" sz="1100" dirty="0"/>
+              <a:t>(</a:t>
+            </a:r>
+            <a:r>
+              <a:rPr lang="ko-KR" altLang="en-US" sz="1100" dirty="0"/>
+              <a:t>이걸 하면 좋겠음</a:t>
+            </a:r>
+            <a:r>
+              <a:rPr lang="en-US" altLang="ko-KR" sz="1100" dirty="0"/>
+              <a:t>.)</a:t>
+            </a:r>
+          </a:p>
+          <a:p>
+            <a:r>
+              <a:rPr lang="en-US" altLang="ko-KR" sz="1100" dirty="0"/>
+              <a:t>+ </a:t>
+            </a:r>
+            <a:r>
+              <a:rPr lang="ko-KR" altLang="en-US" sz="1100" dirty="0"/>
+              <a:t>후에 포스트 프로세싱을 하면 여기에 </a:t>
+            </a:r>
+            <a:r>
+              <a:rPr lang="ko-KR" altLang="en-US" sz="1100" dirty="0" err="1"/>
+              <a:t>들어감</a:t>
+            </a:r>
+            <a:r>
+              <a:rPr lang="en-US" altLang="ko-KR" sz="1100" dirty="0"/>
+              <a:t>.</a:t>
+            </a:r>
+          </a:p>
+        </p:txBody>
+      </p:sp>
+      <p:sp>
+        <p:nvSpPr>
+          <p:cNvPr id="36" name="TextBox 35">
+            <a:extLst>
+              <a:ext uri="{FF2B5EF4-FFF2-40B4-BE49-F238E27FC236}">
+                <a16:creationId xmlns:a16="http://schemas.microsoft.com/office/drawing/2014/main" id="{530045E0-9861-FE66-9674-80FE6C1FF18C}"/>
+              </a:ext>
+            </a:extLst>
+          </p:cNvPr>
+          <p:cNvSpPr txBox="1"/>
+          <p:nvPr/>
+        </p:nvSpPr>
+        <p:spPr>
+          <a:xfrm>
+            <a:off x="8951843" y="1846657"/>
+            <a:ext cx="654346" cy="261610"/>
+          </a:xfrm>
+          <a:prstGeom prst="rect">
+            <a:avLst/>
+          </a:prstGeom>
+          <a:noFill/>
+        </p:spPr>
+        <p:txBody>
+          <a:bodyPr wrap="none" rtlCol="0">
+            <a:spAutoFit/>
+          </a:bodyPr>
+          <a:lstStyle/>
+          <a:p>
+            <a:r>
+              <a:rPr lang="en-US" altLang="ko-KR" sz="1100" dirty="0"/>
+              <a:t>UI </a:t>
+            </a:r>
+            <a:r>
+              <a:rPr lang="ko-KR" altLang="en-US" sz="1100" dirty="0"/>
+              <a:t>출력</a:t>
+            </a:r>
+            <a:endParaRPr lang="en-US" altLang="ko-KR" sz="1100" dirty="0"/>
+          </a:p>
+        </p:txBody>
+      </p:sp>
+      <p:sp>
+        <p:nvSpPr>
+          <p:cNvPr id="37" name="TextBox 36">
+            <a:extLst>
+              <a:ext uri="{FF2B5EF4-FFF2-40B4-BE49-F238E27FC236}">
+                <a16:creationId xmlns:a16="http://schemas.microsoft.com/office/drawing/2014/main" id="{64FB49A6-83B0-5D1C-CFCB-568DC3D7AD3F}"/>
+              </a:ext>
+            </a:extLst>
+          </p:cNvPr>
+          <p:cNvSpPr txBox="1"/>
+          <p:nvPr/>
+        </p:nvSpPr>
+        <p:spPr>
+          <a:xfrm>
+            <a:off x="0" y="3530361"/>
+            <a:ext cx="2969083" cy="369332"/>
+          </a:xfrm>
+          <a:prstGeom prst="rect">
+            <a:avLst/>
+          </a:prstGeom>
+          <a:noFill/>
+        </p:spPr>
+        <p:txBody>
+          <a:bodyPr wrap="none" rtlCol="0">
+            <a:spAutoFit/>
+          </a:bodyPr>
+          <a:lstStyle/>
+          <a:p>
+            <a:r>
+              <a:rPr lang="ko-KR" altLang="en-US" dirty="0" err="1"/>
+              <a:t>레이트레이싱</a:t>
+            </a:r>
+            <a:r>
+              <a:rPr lang="ko-KR" altLang="en-US" dirty="0"/>
+              <a:t> 렌더링</a:t>
+            </a:r>
+            <a:r>
+              <a:rPr lang="en-US" altLang="ko-KR" dirty="0"/>
+              <a:t> </a:t>
+            </a:r>
+            <a:r>
+              <a:rPr lang="ko-KR" altLang="en-US" dirty="0"/>
+              <a:t>패스</a:t>
+            </a:r>
+          </a:p>
+        </p:txBody>
+      </p:sp>
+      <p:sp>
+        <p:nvSpPr>
+          <p:cNvPr id="38" name="TextBox 37">
+            <a:extLst>
+              <a:ext uri="{FF2B5EF4-FFF2-40B4-BE49-F238E27FC236}">
+                <a16:creationId xmlns:a16="http://schemas.microsoft.com/office/drawing/2014/main" id="{1FFBCA5B-3CB5-22CC-96C6-BF46432DF167}"/>
+              </a:ext>
+            </a:extLst>
+          </p:cNvPr>
+          <p:cNvSpPr txBox="1"/>
+          <p:nvPr/>
+        </p:nvSpPr>
+        <p:spPr>
+          <a:xfrm>
+            <a:off x="219850" y="4018956"/>
+            <a:ext cx="1189749" cy="369332"/>
+          </a:xfrm>
+          <a:prstGeom prst="rect">
+            <a:avLst/>
+          </a:prstGeom>
+          <a:noFill/>
+          <a:ln w="25400">
+            <a:solidFill>
+              <a:schemeClr val="tx1"/>
+            </a:solidFill>
+          </a:ln>
+        </p:spPr>
+        <p:txBody>
+          <a:bodyPr wrap="none" rtlCol="0">
+            <a:spAutoFit/>
+          </a:bodyPr>
+          <a:lstStyle/>
+          <a:p>
+            <a:r>
+              <a:rPr lang="ko-KR" altLang="en-US" dirty="0" err="1"/>
+              <a:t>렌더</a:t>
+            </a:r>
+            <a:r>
+              <a:rPr lang="ko-KR" altLang="en-US" dirty="0"/>
+              <a:t> 패스</a:t>
+            </a:r>
+          </a:p>
+        </p:txBody>
+      </p:sp>
+      <p:sp>
+        <p:nvSpPr>
+          <p:cNvPr id="39" name="TextBox 38">
+            <a:extLst>
+              <a:ext uri="{FF2B5EF4-FFF2-40B4-BE49-F238E27FC236}">
+                <a16:creationId xmlns:a16="http://schemas.microsoft.com/office/drawing/2014/main" id="{16DA9D43-DD70-5D68-42A2-E8A2E521D027}"/>
+              </a:ext>
+            </a:extLst>
+          </p:cNvPr>
+          <p:cNvSpPr txBox="1"/>
+          <p:nvPr/>
+        </p:nvSpPr>
+        <p:spPr>
+          <a:xfrm>
+            <a:off x="6098267" y="4018956"/>
+            <a:ext cx="1420582" cy="369332"/>
+          </a:xfrm>
+          <a:prstGeom prst="rect">
+            <a:avLst/>
+          </a:prstGeom>
+          <a:noFill/>
+          <a:ln w="25400">
+            <a:solidFill>
+              <a:schemeClr val="tx1"/>
+            </a:solidFill>
+          </a:ln>
+        </p:spPr>
+        <p:txBody>
+          <a:bodyPr wrap="none" rtlCol="0">
+            <a:spAutoFit/>
+          </a:bodyPr>
+          <a:lstStyle/>
+          <a:p>
+            <a:r>
+              <a:rPr lang="ko-KR" altLang="en-US" dirty="0" err="1"/>
+              <a:t>컴퓨트</a:t>
+            </a:r>
+            <a:r>
+              <a:rPr lang="ko-KR" altLang="en-US" dirty="0"/>
+              <a:t> 패스</a:t>
+            </a:r>
+          </a:p>
+        </p:txBody>
+      </p:sp>
+      <p:sp>
+        <p:nvSpPr>
+          <p:cNvPr id="40" name="TextBox 39">
+            <a:extLst>
+              <a:ext uri="{FF2B5EF4-FFF2-40B4-BE49-F238E27FC236}">
+                <a16:creationId xmlns:a16="http://schemas.microsoft.com/office/drawing/2014/main" id="{B739DAEA-EA24-A21B-409C-70F6878574A0}"/>
+              </a:ext>
+            </a:extLst>
+          </p:cNvPr>
+          <p:cNvSpPr txBox="1"/>
+          <p:nvPr/>
+        </p:nvSpPr>
+        <p:spPr>
+          <a:xfrm>
+            <a:off x="9046260" y="4018956"/>
+            <a:ext cx="952505" cy="369332"/>
+          </a:xfrm>
+          <a:prstGeom prst="rect">
+            <a:avLst/>
+          </a:prstGeom>
+          <a:noFill/>
+          <a:ln w="25400">
+            <a:solidFill>
+              <a:schemeClr val="tx1"/>
+            </a:solidFill>
+          </a:ln>
+        </p:spPr>
+        <p:txBody>
+          <a:bodyPr wrap="none" rtlCol="0">
+            <a:spAutoFit/>
+          </a:bodyPr>
+          <a:lstStyle/>
+          <a:p>
+            <a:r>
+              <a:rPr lang="en-US" altLang="ko-KR" dirty="0"/>
+              <a:t>UI</a:t>
+            </a:r>
+            <a:r>
+              <a:rPr lang="ko-KR" altLang="en-US" dirty="0"/>
+              <a:t> 패스</a:t>
+            </a:r>
+          </a:p>
+        </p:txBody>
+      </p:sp>
+      <p:cxnSp>
+        <p:nvCxnSpPr>
+          <p:cNvPr id="41" name="직선 화살표 연결선 40">
+            <a:extLst>
+              <a:ext uri="{FF2B5EF4-FFF2-40B4-BE49-F238E27FC236}">
+                <a16:creationId xmlns:a16="http://schemas.microsoft.com/office/drawing/2014/main" id="{3FA9F540-5E07-F3FD-267E-4F311C088766}"/>
+              </a:ext>
+            </a:extLst>
+          </p:cNvPr>
+          <p:cNvCxnSpPr>
+            <a:cxnSpLocks/>
+            <a:stCxn id="39" idx="3"/>
+            <a:endCxn id="40" idx="1"/>
+          </p:cNvCxnSpPr>
+          <p:nvPr/>
+        </p:nvCxnSpPr>
+        <p:spPr>
+          <a:xfrm>
+            <a:off x="7518849" y="4203622"/>
+            <a:ext cx="1527411" cy="0"/>
+          </a:xfrm>
+          <a:prstGeom prst="straightConnector1">
+            <a:avLst/>
+          </a:prstGeom>
+          <a:ln w="44450">
+            <a:solidFill>
+              <a:schemeClr val="tx1"/>
+            </a:solidFill>
+            <a:tailEnd type="triangle"/>
+          </a:ln>
+        </p:spPr>
+        <p:style>
+          <a:lnRef idx="2">
+            <a:schemeClr val="accent1"/>
+          </a:lnRef>
+          <a:fillRef idx="0">
+            <a:schemeClr val="accent1"/>
+          </a:fillRef>
+          <a:effectRef idx="1">
+            <a:schemeClr val="accent1"/>
+          </a:effectRef>
+          <a:fontRef idx="minor">
+            <a:schemeClr val="tx1"/>
+          </a:fontRef>
+        </p:style>
+      </p:cxnSp>
+      <p:sp>
+        <p:nvSpPr>
+          <p:cNvPr id="42" name="TextBox 41">
+            <a:extLst>
+              <a:ext uri="{FF2B5EF4-FFF2-40B4-BE49-F238E27FC236}">
+                <a16:creationId xmlns:a16="http://schemas.microsoft.com/office/drawing/2014/main" id="{DA355410-C3EB-9E06-C15A-07D0A26B3EB1}"/>
+              </a:ext>
+            </a:extLst>
+          </p:cNvPr>
+          <p:cNvSpPr txBox="1"/>
+          <p:nvPr/>
+        </p:nvSpPr>
+        <p:spPr>
+          <a:xfrm>
+            <a:off x="10878373" y="4018956"/>
+            <a:ext cx="954044" cy="369332"/>
+          </a:xfrm>
+          <a:prstGeom prst="rect">
+            <a:avLst/>
+          </a:prstGeom>
+          <a:noFill/>
+          <a:ln w="25400">
+            <a:solidFill>
+              <a:schemeClr val="tx1"/>
+            </a:solidFill>
+          </a:ln>
+        </p:spPr>
+        <p:txBody>
+          <a:bodyPr wrap="none" rtlCol="0">
+            <a:spAutoFit/>
+          </a:bodyPr>
+          <a:lstStyle/>
+          <a:p>
+            <a:r>
+              <a:rPr lang="en-US" altLang="ko-KR" dirty="0"/>
+              <a:t>Present</a:t>
+            </a:r>
+            <a:endParaRPr lang="ko-KR" altLang="en-US" dirty="0"/>
+          </a:p>
+        </p:txBody>
+      </p:sp>
+      <p:cxnSp>
+        <p:nvCxnSpPr>
+          <p:cNvPr id="43" name="직선 화살표 연결선 42">
+            <a:extLst>
+              <a:ext uri="{FF2B5EF4-FFF2-40B4-BE49-F238E27FC236}">
+                <a16:creationId xmlns:a16="http://schemas.microsoft.com/office/drawing/2014/main" id="{CA50EBDE-EE00-1C2D-DF7A-5DB01213739B}"/>
+              </a:ext>
+            </a:extLst>
+          </p:cNvPr>
+          <p:cNvCxnSpPr>
+            <a:cxnSpLocks/>
+            <a:stCxn id="40" idx="3"/>
+            <a:endCxn id="42" idx="1"/>
+          </p:cNvCxnSpPr>
+          <p:nvPr/>
+        </p:nvCxnSpPr>
+        <p:spPr>
+          <a:xfrm>
+            <a:off x="9998765" y="4203622"/>
+            <a:ext cx="879608" cy="0"/>
+          </a:xfrm>
+          <a:prstGeom prst="straightConnector1">
+            <a:avLst/>
+          </a:prstGeom>
+          <a:ln w="44450">
+            <a:solidFill>
+              <a:schemeClr val="tx1"/>
+            </a:solidFill>
+            <a:tailEnd type="triangle"/>
+          </a:ln>
+        </p:spPr>
+        <p:style>
+          <a:lnRef idx="2">
+            <a:schemeClr val="accent1"/>
+          </a:lnRef>
+          <a:fillRef idx="0">
+            <a:schemeClr val="accent1"/>
+          </a:fillRef>
+          <a:effectRef idx="1">
+            <a:schemeClr val="accent1"/>
+          </a:effectRef>
+          <a:fontRef idx="minor">
+            <a:schemeClr val="tx1"/>
+          </a:fontRef>
+        </p:style>
+      </p:cxnSp>
+      <p:sp>
+        <p:nvSpPr>
+          <p:cNvPr id="44" name="TextBox 43">
+            <a:extLst>
+              <a:ext uri="{FF2B5EF4-FFF2-40B4-BE49-F238E27FC236}">
+                <a16:creationId xmlns:a16="http://schemas.microsoft.com/office/drawing/2014/main" id="{ADC63604-0C18-795A-FA19-32D76B1AA08D}"/>
+              </a:ext>
+            </a:extLst>
+          </p:cNvPr>
+          <p:cNvSpPr txBox="1"/>
+          <p:nvPr/>
+        </p:nvSpPr>
+        <p:spPr>
+          <a:xfrm>
+            <a:off x="6096000" y="4442149"/>
+            <a:ext cx="2714205" cy="600164"/>
+          </a:xfrm>
+          <a:prstGeom prst="rect">
+            <a:avLst/>
+          </a:prstGeom>
+          <a:noFill/>
+        </p:spPr>
+        <p:txBody>
+          <a:bodyPr wrap="none" rtlCol="0">
+            <a:spAutoFit/>
+          </a:bodyPr>
+          <a:lstStyle/>
+          <a:p>
+            <a:r>
+              <a:rPr lang="ko-KR" altLang="en-US" sz="1100" dirty="0"/>
+              <a:t>모션 </a:t>
+            </a:r>
+            <a:r>
+              <a:rPr lang="ko-KR" altLang="en-US" sz="1100" dirty="0" err="1"/>
+              <a:t>블러</a:t>
+            </a:r>
+            <a:r>
+              <a:rPr lang="ko-KR" altLang="en-US" sz="1100" dirty="0"/>
+              <a:t> </a:t>
+            </a:r>
+            <a:r>
+              <a:rPr lang="en-US" altLang="ko-KR" sz="1100" dirty="0"/>
+              <a:t>/</a:t>
+            </a:r>
+            <a:r>
+              <a:rPr lang="ko-KR" altLang="en-US" sz="1100" dirty="0"/>
+              <a:t> 거리에 따른 </a:t>
+            </a:r>
+            <a:r>
+              <a:rPr lang="ko-KR" altLang="en-US" sz="1100" dirty="0" err="1"/>
+              <a:t>합성곱연산</a:t>
+            </a:r>
+            <a:endParaRPr lang="en-US" altLang="ko-KR" sz="1100" dirty="0"/>
+          </a:p>
+          <a:p>
+            <a:r>
+              <a:rPr lang="en-US" altLang="ko-KR" sz="1100" dirty="0"/>
+              <a:t>GPU</a:t>
+            </a:r>
+            <a:r>
+              <a:rPr lang="ko-KR" altLang="en-US" sz="1100" dirty="0"/>
+              <a:t> 애니메이션 </a:t>
+            </a:r>
+            <a:r>
+              <a:rPr lang="ko-KR" altLang="en-US" sz="1100" dirty="0" err="1"/>
+              <a:t>블랜딩</a:t>
+            </a:r>
+            <a:endParaRPr lang="en-US" altLang="ko-KR" sz="1100" dirty="0"/>
+          </a:p>
+          <a:p>
+            <a:r>
+              <a:rPr lang="en-US" altLang="ko-KR" sz="1100" dirty="0"/>
+              <a:t>GPU </a:t>
+            </a:r>
+            <a:r>
+              <a:rPr lang="ko-KR" altLang="en-US" sz="1100" dirty="0"/>
+              <a:t>애니메이션 </a:t>
+            </a:r>
+            <a:r>
+              <a:rPr lang="en-US" altLang="ko-KR" sz="1100" dirty="0" err="1"/>
+              <a:t>ToWorld</a:t>
+            </a:r>
+            <a:r>
+              <a:rPr lang="ko-KR" altLang="en-US" sz="1100" dirty="0"/>
+              <a:t> 트리누적연산</a:t>
+            </a:r>
+            <a:endParaRPr lang="en-US" altLang="ko-KR" sz="1100" dirty="0"/>
+          </a:p>
+        </p:txBody>
+      </p:sp>
+      <p:sp>
+        <p:nvSpPr>
+          <p:cNvPr id="45" name="TextBox 44">
+            <a:extLst>
+              <a:ext uri="{FF2B5EF4-FFF2-40B4-BE49-F238E27FC236}">
+                <a16:creationId xmlns:a16="http://schemas.microsoft.com/office/drawing/2014/main" id="{7ACFF6EA-2F1E-B668-E3B2-82BEC5C4B514}"/>
+              </a:ext>
+            </a:extLst>
+          </p:cNvPr>
+          <p:cNvSpPr txBox="1"/>
+          <p:nvPr/>
+        </p:nvSpPr>
+        <p:spPr>
+          <a:xfrm>
+            <a:off x="8951843" y="4423105"/>
+            <a:ext cx="654346" cy="261610"/>
+          </a:xfrm>
+          <a:prstGeom prst="rect">
+            <a:avLst/>
+          </a:prstGeom>
+          <a:noFill/>
+        </p:spPr>
+        <p:txBody>
+          <a:bodyPr wrap="none" rtlCol="0">
+            <a:spAutoFit/>
+          </a:bodyPr>
+          <a:lstStyle/>
+          <a:p>
+            <a:r>
+              <a:rPr lang="en-US" altLang="ko-KR" sz="1100" dirty="0"/>
+              <a:t>UI </a:t>
+            </a:r>
+            <a:r>
+              <a:rPr lang="ko-KR" altLang="en-US" sz="1100" dirty="0"/>
+              <a:t>출력</a:t>
+            </a:r>
+            <a:endParaRPr lang="en-US" altLang="ko-KR" sz="1100" dirty="0"/>
+          </a:p>
+        </p:txBody>
+      </p:sp>
+      <p:cxnSp>
+        <p:nvCxnSpPr>
+          <p:cNvPr id="46" name="직선 화살표 연결선 45">
+            <a:extLst>
+              <a:ext uri="{FF2B5EF4-FFF2-40B4-BE49-F238E27FC236}">
+                <a16:creationId xmlns:a16="http://schemas.microsoft.com/office/drawing/2014/main" id="{A8337250-34BB-1B5A-AC7D-766D63BEB2D2}"/>
+              </a:ext>
+            </a:extLst>
+          </p:cNvPr>
+          <p:cNvCxnSpPr>
+            <a:cxnSpLocks/>
+            <a:stCxn id="38" idx="3"/>
+            <a:endCxn id="39" idx="1"/>
+          </p:cNvCxnSpPr>
+          <p:nvPr/>
+        </p:nvCxnSpPr>
+        <p:spPr>
+          <a:xfrm>
+            <a:off x="1409599" y="4203622"/>
+            <a:ext cx="4688668" cy="0"/>
+          </a:xfrm>
+          <a:prstGeom prst="straightConnector1">
+            <a:avLst/>
+          </a:prstGeom>
+          <a:ln w="44450">
+            <a:solidFill>
+              <a:schemeClr val="tx1"/>
+            </a:solidFill>
+            <a:tailEnd type="triangle"/>
+          </a:ln>
+        </p:spPr>
+        <p:style>
+          <a:lnRef idx="2">
+            <a:schemeClr val="accent1"/>
+          </a:lnRef>
+          <a:fillRef idx="0">
+            <a:schemeClr val="accent1"/>
+          </a:fillRef>
+          <a:effectRef idx="1">
+            <a:schemeClr val="accent1"/>
+          </a:effectRef>
+          <a:fontRef idx="minor">
+            <a:schemeClr val="tx1"/>
+          </a:fontRef>
+        </p:style>
+      </p:cxnSp>
+      <p:sp>
+        <p:nvSpPr>
+          <p:cNvPr id="49" name="TextBox 48">
+            <a:extLst>
+              <a:ext uri="{FF2B5EF4-FFF2-40B4-BE49-F238E27FC236}">
+                <a16:creationId xmlns:a16="http://schemas.microsoft.com/office/drawing/2014/main" id="{CB8032F4-4E67-DE59-85A9-42AF7D16C4ED}"/>
+              </a:ext>
+            </a:extLst>
+          </p:cNvPr>
+          <p:cNvSpPr txBox="1"/>
+          <p:nvPr/>
+        </p:nvSpPr>
+        <p:spPr>
+          <a:xfrm>
+            <a:off x="219850" y="4442149"/>
+            <a:ext cx="1077539" cy="261610"/>
+          </a:xfrm>
+          <a:prstGeom prst="rect">
+            <a:avLst/>
+          </a:prstGeom>
+          <a:noFill/>
+        </p:spPr>
+        <p:txBody>
+          <a:bodyPr wrap="none" rtlCol="0">
+            <a:spAutoFit/>
+          </a:bodyPr>
+          <a:lstStyle/>
+          <a:p>
+            <a:r>
+              <a:rPr lang="en-US" altLang="ko-KR" sz="1100" dirty="0"/>
+              <a:t>Dispatch Rays</a:t>
+            </a:r>
+          </a:p>
+        </p:txBody>
+      </p:sp>
+      <p:sp>
+        <p:nvSpPr>
+          <p:cNvPr id="50" name="TextBox 49">
+            <a:extLst>
+              <a:ext uri="{FF2B5EF4-FFF2-40B4-BE49-F238E27FC236}">
+                <a16:creationId xmlns:a16="http://schemas.microsoft.com/office/drawing/2014/main" id="{6391AED2-70A2-D509-91C8-9618C6C19E8A}"/>
+              </a:ext>
+            </a:extLst>
+          </p:cNvPr>
+          <p:cNvSpPr txBox="1"/>
+          <p:nvPr/>
+        </p:nvSpPr>
+        <p:spPr>
+          <a:xfrm>
+            <a:off x="219850" y="5361823"/>
+            <a:ext cx="8440131" cy="1200329"/>
+          </a:xfrm>
+          <a:prstGeom prst="rect">
+            <a:avLst/>
+          </a:prstGeom>
+          <a:noFill/>
+        </p:spPr>
+        <p:txBody>
+          <a:bodyPr wrap="none" rtlCol="0">
+            <a:spAutoFit/>
+          </a:bodyPr>
+          <a:lstStyle/>
+          <a:p>
+            <a:r>
+              <a:rPr lang="ko-KR" altLang="en-US" dirty="0"/>
+              <a:t>나중에 비동기 렌더링을 하게 된다면 한 프레임당 하나의 패스를 실행해야 한다</a:t>
+            </a:r>
+            <a:r>
+              <a:rPr lang="en-US" altLang="ko-KR" dirty="0"/>
+              <a:t>.</a:t>
+            </a:r>
+          </a:p>
+          <a:p>
+            <a:r>
+              <a:rPr lang="ko-KR" altLang="en-US" dirty="0" err="1"/>
+              <a:t>렌더가</a:t>
+            </a:r>
+            <a:r>
+              <a:rPr lang="ko-KR" altLang="en-US" dirty="0"/>
+              <a:t> 되는 건 </a:t>
+            </a:r>
+            <a:r>
+              <a:rPr lang="en-US" altLang="ko-KR" dirty="0"/>
+              <a:t>UI </a:t>
+            </a:r>
+            <a:r>
+              <a:rPr lang="ko-KR" altLang="en-US" dirty="0"/>
+              <a:t>패스를 끝내게 되면 바로 </a:t>
+            </a:r>
+            <a:r>
+              <a:rPr lang="en-US" altLang="ko-KR" dirty="0"/>
+              <a:t>Present</a:t>
+            </a:r>
+            <a:r>
+              <a:rPr lang="ko-KR" altLang="en-US" dirty="0"/>
+              <a:t>를 한다</a:t>
+            </a:r>
+            <a:r>
+              <a:rPr lang="en-US" altLang="ko-KR" dirty="0"/>
+              <a:t>.</a:t>
+            </a:r>
+          </a:p>
+          <a:p>
+            <a:r>
+              <a:rPr lang="ko-KR" altLang="en-US" dirty="0"/>
+              <a:t>렌더링을 하기 위해 </a:t>
+            </a:r>
+            <a:r>
+              <a:rPr lang="en-US" altLang="ko-KR" dirty="0"/>
+              <a:t>3~4 </a:t>
+            </a:r>
+            <a:r>
+              <a:rPr lang="ko-KR" altLang="en-US" dirty="0"/>
+              <a:t>프레임이 소요 되며</a:t>
+            </a:r>
+            <a:r>
+              <a:rPr lang="en-US" altLang="ko-KR" dirty="0"/>
+              <a:t>,</a:t>
+            </a:r>
+          </a:p>
+          <a:p>
+            <a:endParaRPr lang="en-US" altLang="ko-KR" dirty="0"/>
+          </a:p>
+        </p:txBody>
+      </p:sp>
+      <mc:AlternateContent xmlns:mc="http://schemas.openxmlformats.org/markup-compatibility/2006" xmlns:pslz="http://schemas.microsoft.com/office/powerpoint/2016/slidezoom">
+        <mc:Choice Requires="pslz">
+          <p:graphicFrame>
+            <p:nvGraphicFramePr>
+              <p:cNvPr id="52" name="슬라이드 확대/축소 51">
+                <a:extLst>
+                  <a:ext uri="{FF2B5EF4-FFF2-40B4-BE49-F238E27FC236}">
+                    <a16:creationId xmlns:a16="http://schemas.microsoft.com/office/drawing/2014/main" id="{3717895E-BF62-6881-47D4-8314385C8258}"/>
+                  </a:ext>
+                </a:extLst>
+              </p:cNvPr>
+              <p:cNvGraphicFramePr>
+                <a:graphicFrameLocks noChangeAspect="1"/>
+              </p:cNvGraphicFramePr>
+              <p:nvPr>
+                <p:extLst>
+                  <p:ext uri="{D42A27DB-BD31-4B8C-83A1-F6EECF244321}">
+                    <p14:modId xmlns:p14="http://schemas.microsoft.com/office/powerpoint/2010/main" val="1708231777"/>
+                  </p:ext>
+                </p:extLst>
+              </p:nvPr>
+            </p:nvGraphicFramePr>
+            <p:xfrm>
+              <a:off x="8951843" y="4914853"/>
+              <a:ext cx="3048000" cy="1714500"/>
+            </p:xfrm>
+            <a:graphic>
+              <a:graphicData uri="http://schemas.microsoft.com/office/powerpoint/2016/slidezoom">
+                <pslz:sldZm>
+                  <pslz:sldZmObj sldId="288" cId="1454281042">
+                    <pslz:zmPr id="{A8BB8807-490E-45C0-81DB-7FD4BC50EE99}" returnToParent="0" transitionDur="1000">
+                      <p166:blipFill xmlns:p166="http://schemas.microsoft.com/office/powerpoint/2016/6/main">
+                        <a:blip r:embed="rId2"/>
+                        <a:stretch>
+                          <a:fillRect/>
+                        </a:stretch>
+                      </p166:blipFill>
+                      <p166:spPr xmlns:p166="http://schemas.microsoft.com/office/powerpoint/2016/6/main">
+                        <a:xfrm>
+                          <a:off x="0" y="0"/>
+                          <a:ext cx="3048000" cy="1714500"/>
+                        </a:xfrm>
+                        <a:prstGeom prst="rect">
+                          <a:avLst/>
+                        </a:prstGeom>
+                        <a:ln w="3175">
+                          <a:solidFill>
+                            <a:prstClr val="ltGray"/>
+                          </a:solidFill>
+                        </a:ln>
+                      </p166:spPr>
+                    </pslz:zmPr>
+                  </pslz:sldZmObj>
+                </pslz:sldZm>
+              </a:graphicData>
+            </a:graphic>
+          </p:graphicFrame>
+        </mc:Choice>
+        <mc:Fallback xmlns="">
+          <p:pic>
+            <p:nvPicPr>
+              <p:cNvPr id="52" name="슬라이드 확대/축소 51">
+                <a:hlinkClick r:id="rId3" action="ppaction://hlinksldjump"/>
+                <a:extLst>
+                  <a:ext uri="{FF2B5EF4-FFF2-40B4-BE49-F238E27FC236}">
+                    <a16:creationId xmlns:a16="http://schemas.microsoft.com/office/drawing/2014/main" id="{3717895E-BF62-6881-47D4-8314385C8258}"/>
+                  </a:ext>
+                </a:extLst>
+              </p:cNvPr>
+              <p:cNvPicPr>
+                <a:picLocks noGrp="1" noRot="1" noChangeAspect="1" noMove="1" noResize="1" noEditPoints="1" noAdjustHandles="1" noChangeArrowheads="1" noChangeShapeType="1"/>
+              </p:cNvPicPr>
+              <p:nvPr/>
+            </p:nvPicPr>
+            <p:blipFill>
+              <a:blip r:embed="rId4"/>
+              <a:stretch>
+                <a:fillRect/>
+              </a:stretch>
+            </p:blipFill>
+            <p:spPr>
+              <a:xfrm>
+                <a:off x="8951843" y="4914853"/>
+                <a:ext cx="3048000" cy="1714500"/>
+              </a:xfrm>
+              <a:prstGeom prst="rect">
+                <a:avLst/>
+              </a:prstGeom>
+              <a:ln w="3175">
+                <a:solidFill>
+                  <a:prstClr val="ltGray"/>
+                </a:solidFill>
+              </a:ln>
+            </p:spPr>
+          </p:pic>
+        </mc:Fallback>
+      </mc:AlternateContent>
+    </p:spTree>
+    <p:extLst>
+      <p:ext uri="{BB962C8B-B14F-4D97-AF65-F5344CB8AC3E}">
+        <p14:creationId xmlns:p14="http://schemas.microsoft.com/office/powerpoint/2010/main" val="1981946874"/>
+      </p:ext>
+    </p:extLst>
+  </p:cSld>
+  <p:clrMapOvr>
+    <a:masterClrMapping/>
+  </p:clrMapOvr>
+</p:sld>
+</file>
+
+<file path=ppt/slides/slide33.xml><?xml version="1.0" encoding="utf-8"?>
+<p:sld xmlns:a="http://schemas.openxmlformats.org/drawingml/2006/main" xmlns:r="http://schemas.openxmlformats.org/officeDocument/2006/relationships" xmlns:p="http://schemas.openxmlformats.org/presentationml/2006/main">
+  <p:cSld>
+    <p:spTree>
+      <p:nvGrpSpPr>
+        <p:cNvPr id="1" name="">
+          <a:extLst>
+            <a:ext uri="{FF2B5EF4-FFF2-40B4-BE49-F238E27FC236}">
+              <a16:creationId xmlns:a16="http://schemas.microsoft.com/office/drawing/2014/main" id="{1433AFE1-AA15-B5BF-1D27-F53DD591EED2}"/>
+            </a:ext>
+          </a:extLst>
+        </p:cNvPr>
+        <p:cNvGrpSpPr/>
+        <p:nvPr/>
+      </p:nvGrpSpPr>
+      <p:grpSpPr>
+        <a:xfrm>
+          <a:off x="0" y="0"/>
+          <a:ext cx="0" cy="0"/>
+          <a:chOff x="0" y="0"/>
+          <a:chExt cx="0" cy="0"/>
+        </a:xfrm>
+      </p:grpSpPr>
+      <p:sp>
+        <p:nvSpPr>
+          <p:cNvPr id="93" name="직사각형 92">
+            <a:extLst>
+              <a:ext uri="{FF2B5EF4-FFF2-40B4-BE49-F238E27FC236}">
+                <a16:creationId xmlns:a16="http://schemas.microsoft.com/office/drawing/2014/main" id="{0186797B-395B-7FCD-49AD-B9A6BA7E4A34}"/>
+              </a:ext>
+            </a:extLst>
+          </p:cNvPr>
+          <p:cNvSpPr/>
+          <p:nvPr/>
+        </p:nvSpPr>
+        <p:spPr>
+          <a:xfrm>
+            <a:off x="5534025" y="1238249"/>
+            <a:ext cx="2260485" cy="2369269"/>
+          </a:xfrm>
+          <a:prstGeom prst="rect">
+            <a:avLst/>
+          </a:prstGeom>
+          <a:solidFill>
+            <a:schemeClr val="accent1">
+              <a:lumMod val="20000"/>
+              <a:lumOff val="80000"/>
+              <a:alpha val="67000"/>
+            </a:schemeClr>
+          </a:solidFill>
+          <a:ln>
+            <a:noFill/>
+          </a:ln>
+        </p:spPr>
+        <p:style>
+          <a:lnRef idx="2">
+            <a:schemeClr val="accent1">
+              <a:shade val="15000"/>
+            </a:schemeClr>
+          </a:lnRef>
+          <a:fillRef idx="1">
+            <a:schemeClr val="accent1"/>
+          </a:fillRef>
+          <a:effectRef idx="0">
+            <a:schemeClr val="accent1"/>
+          </a:effectRef>
+          <a:fontRef idx="minor">
+            <a:schemeClr val="lt1"/>
+          </a:fontRef>
+        </p:style>
+        <p:txBody>
+          <a:bodyPr rtlCol="0" anchor="ctr"/>
+          <a:lstStyle/>
+          <a:p>
+            <a:pPr algn="ctr"/>
+            <a:endParaRPr lang="ko-KR" altLang="en-US"/>
+          </a:p>
+        </p:txBody>
+      </p:sp>
+      <p:sp>
+        <p:nvSpPr>
+          <p:cNvPr id="2" name="제목 1">
+            <a:extLst>
+              <a:ext uri="{FF2B5EF4-FFF2-40B4-BE49-F238E27FC236}">
+                <a16:creationId xmlns:a16="http://schemas.microsoft.com/office/drawing/2014/main" id="{3662D7DB-CEBC-F976-2827-A4A3306D04BA}"/>
+              </a:ext>
+            </a:extLst>
+          </p:cNvPr>
+          <p:cNvSpPr>
+            <a:spLocks noGrp="1"/>
+          </p:cNvSpPr>
+          <p:nvPr>
+            <p:ph type="title"/>
+          </p:nvPr>
+        </p:nvSpPr>
+        <p:spPr>
+          <a:xfrm>
+            <a:off x="0" y="18255"/>
+            <a:ext cx="11601450" cy="850425"/>
+          </a:xfrm>
+        </p:spPr>
+        <p:txBody>
+          <a:bodyPr>
+            <a:normAutofit fontScale="90000"/>
+          </a:bodyPr>
+          <a:lstStyle/>
+          <a:p>
+            <a:r>
+              <a:rPr lang="en-US" altLang="ko-KR" sz="5400" dirty="0"/>
+              <a:t>TimeLine-</a:t>
+            </a:r>
+            <a:r>
+              <a:rPr lang="en-US" altLang="ko-KR" sz="5400" dirty="0" err="1"/>
+              <a:t>RenderPass</a:t>
+            </a:r>
+            <a:r>
+              <a:rPr lang="en-US" altLang="ko-KR" sz="5400" dirty="0"/>
+              <a:t>- </a:t>
+            </a:r>
+            <a:r>
+              <a:rPr lang="ko-KR" altLang="en-US" sz="5400" dirty="0"/>
+              <a:t>비동기 렌더링</a:t>
+            </a:r>
+          </a:p>
+        </p:txBody>
+      </p:sp>
+      <p:sp>
+        <p:nvSpPr>
+          <p:cNvPr id="3" name="TextBox 2">
+            <a:extLst>
+              <a:ext uri="{FF2B5EF4-FFF2-40B4-BE49-F238E27FC236}">
+                <a16:creationId xmlns:a16="http://schemas.microsoft.com/office/drawing/2014/main" id="{67C83826-4BAF-CDFB-C313-74345C07A0BC}"/>
+              </a:ext>
+            </a:extLst>
+          </p:cNvPr>
+          <p:cNvSpPr txBox="1"/>
+          <p:nvPr/>
+        </p:nvSpPr>
+        <p:spPr>
+          <a:xfrm>
+            <a:off x="0" y="953913"/>
+            <a:ext cx="2194832" cy="369332"/>
+          </a:xfrm>
+          <a:prstGeom prst="rect">
+            <a:avLst/>
+          </a:prstGeom>
+          <a:noFill/>
+        </p:spPr>
+        <p:txBody>
+          <a:bodyPr wrap="none" rtlCol="0">
+            <a:spAutoFit/>
+          </a:bodyPr>
+          <a:lstStyle/>
+          <a:p>
+            <a:r>
+              <a:rPr lang="ko-KR" altLang="en-US" dirty="0"/>
+              <a:t>비동기 렌더링 작동</a:t>
+            </a:r>
+          </a:p>
+        </p:txBody>
+      </p:sp>
+      <p:sp>
+        <p:nvSpPr>
+          <p:cNvPr id="4" name="TextBox 3">
+            <a:extLst>
+              <a:ext uri="{FF2B5EF4-FFF2-40B4-BE49-F238E27FC236}">
+                <a16:creationId xmlns:a16="http://schemas.microsoft.com/office/drawing/2014/main" id="{7C929899-BECB-A7EA-BDE5-83DEB0F26F36}"/>
+              </a:ext>
+            </a:extLst>
+          </p:cNvPr>
+          <p:cNvSpPr txBox="1"/>
+          <p:nvPr/>
+        </p:nvSpPr>
+        <p:spPr>
+          <a:xfrm>
+            <a:off x="219850" y="1442508"/>
+            <a:ext cx="1420582" cy="369332"/>
+          </a:xfrm>
+          <a:prstGeom prst="rect">
+            <a:avLst/>
+          </a:prstGeom>
+          <a:noFill/>
+          <a:ln w="25400">
+            <a:solidFill>
+              <a:schemeClr val="tx1"/>
+            </a:solidFill>
+          </a:ln>
+        </p:spPr>
+        <p:txBody>
+          <a:bodyPr wrap="none" rtlCol="0">
+            <a:spAutoFit/>
+          </a:bodyPr>
+          <a:lstStyle/>
+          <a:p>
+            <a:r>
+              <a:rPr lang="ko-KR" altLang="en-US" dirty="0" err="1"/>
+              <a:t>셰도우</a:t>
+            </a:r>
+            <a:r>
+              <a:rPr lang="ko-KR" altLang="en-US" dirty="0"/>
+              <a:t> 패스</a:t>
+            </a:r>
+          </a:p>
+        </p:txBody>
+      </p:sp>
+      <p:sp>
+        <p:nvSpPr>
+          <p:cNvPr id="5" name="TextBox 4">
+            <a:extLst>
+              <a:ext uri="{FF2B5EF4-FFF2-40B4-BE49-F238E27FC236}">
+                <a16:creationId xmlns:a16="http://schemas.microsoft.com/office/drawing/2014/main" id="{F66C4C9C-1EC8-3460-C2A7-14E4FB43B749}"/>
+              </a:ext>
+            </a:extLst>
+          </p:cNvPr>
+          <p:cNvSpPr txBox="1"/>
+          <p:nvPr/>
+        </p:nvSpPr>
+        <p:spPr>
+          <a:xfrm>
+            <a:off x="2084726" y="1442508"/>
+            <a:ext cx="1420582" cy="369332"/>
+          </a:xfrm>
+          <a:prstGeom prst="rect">
+            <a:avLst/>
+          </a:prstGeom>
+          <a:noFill/>
+          <a:ln w="25400">
+            <a:solidFill>
+              <a:schemeClr val="tx1"/>
+            </a:solidFill>
+          </a:ln>
+        </p:spPr>
+        <p:txBody>
+          <a:bodyPr wrap="square" rtlCol="0">
+            <a:spAutoFit/>
+          </a:bodyPr>
+          <a:lstStyle/>
+          <a:p>
+            <a:r>
+              <a:rPr lang="ko-KR" altLang="en-US" dirty="0" err="1"/>
+              <a:t>렌더</a:t>
+            </a:r>
+            <a:r>
+              <a:rPr lang="ko-KR" altLang="en-US" dirty="0"/>
+              <a:t> 패스</a:t>
+            </a:r>
+          </a:p>
+        </p:txBody>
+      </p:sp>
+      <p:sp>
+        <p:nvSpPr>
+          <p:cNvPr id="6" name="TextBox 5">
+            <a:extLst>
+              <a:ext uri="{FF2B5EF4-FFF2-40B4-BE49-F238E27FC236}">
+                <a16:creationId xmlns:a16="http://schemas.microsoft.com/office/drawing/2014/main" id="{1C258ECF-C82C-3C4B-E37E-24C42034F049}"/>
+              </a:ext>
+            </a:extLst>
+          </p:cNvPr>
+          <p:cNvSpPr txBox="1"/>
+          <p:nvPr/>
+        </p:nvSpPr>
+        <p:spPr>
+          <a:xfrm>
+            <a:off x="3949602" y="1442508"/>
+            <a:ext cx="1420582" cy="369332"/>
+          </a:xfrm>
+          <a:prstGeom prst="rect">
+            <a:avLst/>
+          </a:prstGeom>
+          <a:noFill/>
+          <a:ln w="25400">
+            <a:solidFill>
+              <a:schemeClr val="tx1"/>
+            </a:solidFill>
+          </a:ln>
+        </p:spPr>
+        <p:txBody>
+          <a:bodyPr wrap="none" rtlCol="0">
+            <a:spAutoFit/>
+          </a:bodyPr>
+          <a:lstStyle/>
+          <a:p>
+            <a:r>
+              <a:rPr lang="ko-KR" altLang="en-US" dirty="0" err="1"/>
+              <a:t>컴퓨트</a:t>
+            </a:r>
+            <a:r>
+              <a:rPr lang="ko-KR" altLang="en-US" dirty="0"/>
+              <a:t> 패스</a:t>
+            </a:r>
+          </a:p>
+        </p:txBody>
+      </p:sp>
+      <p:sp>
+        <p:nvSpPr>
+          <p:cNvPr id="7" name="TextBox 6">
+            <a:extLst>
+              <a:ext uri="{FF2B5EF4-FFF2-40B4-BE49-F238E27FC236}">
+                <a16:creationId xmlns:a16="http://schemas.microsoft.com/office/drawing/2014/main" id="{9582F13E-3F1A-2AB5-6945-8B68EF983BD4}"/>
+              </a:ext>
+            </a:extLst>
+          </p:cNvPr>
+          <p:cNvSpPr txBox="1"/>
+          <p:nvPr/>
+        </p:nvSpPr>
+        <p:spPr>
+          <a:xfrm>
+            <a:off x="5635774" y="1442508"/>
+            <a:ext cx="2074542" cy="369332"/>
+          </a:xfrm>
+          <a:prstGeom prst="rect">
+            <a:avLst/>
+          </a:prstGeom>
+          <a:noFill/>
+          <a:ln w="25400">
+            <a:solidFill>
+              <a:schemeClr val="tx1"/>
+            </a:solidFill>
+          </a:ln>
+        </p:spPr>
+        <p:txBody>
+          <a:bodyPr wrap="none" rtlCol="0">
+            <a:spAutoFit/>
+          </a:bodyPr>
+          <a:lstStyle/>
+          <a:p>
+            <a:r>
+              <a:rPr lang="en-US" altLang="ko-KR" dirty="0"/>
+              <a:t>UI</a:t>
+            </a:r>
+            <a:r>
+              <a:rPr lang="ko-KR" altLang="en-US" dirty="0"/>
+              <a:t> 패스 </a:t>
+            </a:r>
+            <a:r>
+              <a:rPr lang="en-US" altLang="ko-KR" dirty="0"/>
+              <a:t>&amp; Present</a:t>
+            </a:r>
+            <a:endParaRPr lang="ko-KR" altLang="en-US" dirty="0"/>
+          </a:p>
+        </p:txBody>
+      </p:sp>
+      <p:cxnSp>
+        <p:nvCxnSpPr>
+          <p:cNvPr id="9" name="직선 화살표 연결선 8">
+            <a:extLst>
+              <a:ext uri="{FF2B5EF4-FFF2-40B4-BE49-F238E27FC236}">
+                <a16:creationId xmlns:a16="http://schemas.microsoft.com/office/drawing/2014/main" id="{0385E2DB-A81A-81EA-2A07-2321646653AF}"/>
+              </a:ext>
+            </a:extLst>
+          </p:cNvPr>
+          <p:cNvCxnSpPr>
+            <a:cxnSpLocks/>
+            <a:stCxn id="4" idx="3"/>
+            <a:endCxn id="5" idx="1"/>
+          </p:cNvCxnSpPr>
+          <p:nvPr/>
+        </p:nvCxnSpPr>
+        <p:spPr>
+          <a:xfrm>
+            <a:off x="1640432" y="1627174"/>
+            <a:ext cx="444294" cy="0"/>
+          </a:xfrm>
+          <a:prstGeom prst="straightConnector1">
+            <a:avLst/>
+          </a:prstGeom>
+          <a:ln w="44450">
+            <a:solidFill>
+              <a:schemeClr val="tx1"/>
+            </a:solidFill>
+            <a:tailEnd type="triangle"/>
+          </a:ln>
+        </p:spPr>
+        <p:style>
+          <a:lnRef idx="2">
+            <a:schemeClr val="accent1"/>
+          </a:lnRef>
+          <a:fillRef idx="0">
+            <a:schemeClr val="accent1"/>
+          </a:fillRef>
+          <a:effectRef idx="1">
+            <a:schemeClr val="accent1"/>
+          </a:effectRef>
+          <a:fontRef idx="minor">
+            <a:schemeClr val="tx1"/>
+          </a:fontRef>
+        </p:style>
+      </p:cxnSp>
+      <p:cxnSp>
+        <p:nvCxnSpPr>
+          <p:cNvPr id="10" name="직선 화살표 연결선 9">
+            <a:extLst>
+              <a:ext uri="{FF2B5EF4-FFF2-40B4-BE49-F238E27FC236}">
+                <a16:creationId xmlns:a16="http://schemas.microsoft.com/office/drawing/2014/main" id="{BCC371D4-5698-127B-1EDD-002301528B7A}"/>
+              </a:ext>
+            </a:extLst>
+          </p:cNvPr>
+          <p:cNvCxnSpPr>
+            <a:cxnSpLocks/>
+            <a:stCxn id="5" idx="3"/>
+            <a:endCxn id="6" idx="1"/>
+          </p:cNvCxnSpPr>
+          <p:nvPr/>
+        </p:nvCxnSpPr>
+        <p:spPr>
+          <a:xfrm>
+            <a:off x="3505308" y="1627174"/>
+            <a:ext cx="444294" cy="0"/>
+          </a:xfrm>
+          <a:prstGeom prst="straightConnector1">
+            <a:avLst/>
+          </a:prstGeom>
+          <a:ln w="44450">
+            <a:solidFill>
+              <a:schemeClr val="tx1"/>
+            </a:solidFill>
+            <a:tailEnd type="triangle"/>
+          </a:ln>
+        </p:spPr>
+        <p:style>
+          <a:lnRef idx="2">
+            <a:schemeClr val="accent1"/>
+          </a:lnRef>
+          <a:fillRef idx="0">
+            <a:schemeClr val="accent1"/>
+          </a:fillRef>
+          <a:effectRef idx="1">
+            <a:schemeClr val="accent1"/>
+          </a:effectRef>
+          <a:fontRef idx="minor">
+            <a:schemeClr val="tx1"/>
+          </a:fontRef>
+        </p:style>
+      </p:cxnSp>
+      <p:cxnSp>
+        <p:nvCxnSpPr>
+          <p:cNvPr id="13" name="직선 화살표 연결선 12">
+            <a:extLst>
+              <a:ext uri="{FF2B5EF4-FFF2-40B4-BE49-F238E27FC236}">
+                <a16:creationId xmlns:a16="http://schemas.microsoft.com/office/drawing/2014/main" id="{CEC8B670-4A3A-BEF9-1A68-2FDF20A9D26B}"/>
+              </a:ext>
+            </a:extLst>
+          </p:cNvPr>
+          <p:cNvCxnSpPr>
+            <a:cxnSpLocks/>
+            <a:stCxn id="6" idx="3"/>
+            <a:endCxn id="7" idx="1"/>
+          </p:cNvCxnSpPr>
+          <p:nvPr/>
+        </p:nvCxnSpPr>
+        <p:spPr>
+          <a:xfrm>
+            <a:off x="5370184" y="1627174"/>
+            <a:ext cx="265590" cy="0"/>
+          </a:xfrm>
+          <a:prstGeom prst="straightConnector1">
+            <a:avLst/>
+          </a:prstGeom>
+          <a:ln w="44450">
+            <a:solidFill>
+              <a:schemeClr val="tx1"/>
+            </a:solidFill>
+            <a:tailEnd type="triangle"/>
+          </a:ln>
+        </p:spPr>
+        <p:style>
+          <a:lnRef idx="2">
+            <a:schemeClr val="accent1"/>
+          </a:lnRef>
+          <a:fillRef idx="0">
+            <a:schemeClr val="accent1"/>
+          </a:fillRef>
+          <a:effectRef idx="1">
+            <a:schemeClr val="accent1"/>
+          </a:effectRef>
+          <a:fontRef idx="minor">
+            <a:schemeClr val="tx1"/>
+          </a:fontRef>
+        </p:style>
+      </p:cxnSp>
+      <p:sp>
+        <p:nvSpPr>
+          <p:cNvPr id="50" name="TextBox 49">
+            <a:extLst>
+              <a:ext uri="{FF2B5EF4-FFF2-40B4-BE49-F238E27FC236}">
+                <a16:creationId xmlns:a16="http://schemas.microsoft.com/office/drawing/2014/main" id="{7E222BC4-51E0-C692-CF4F-9D131B9DC780}"/>
+              </a:ext>
+            </a:extLst>
+          </p:cNvPr>
+          <p:cNvSpPr txBox="1"/>
+          <p:nvPr/>
+        </p:nvSpPr>
+        <p:spPr>
+          <a:xfrm>
+            <a:off x="2819262" y="3739545"/>
+            <a:ext cx="7747634" cy="1477328"/>
+          </a:xfrm>
+          <a:prstGeom prst="rect">
+            <a:avLst/>
+          </a:prstGeom>
+          <a:noFill/>
+        </p:spPr>
+        <p:txBody>
+          <a:bodyPr wrap="none" rtlCol="0">
+            <a:spAutoFit/>
+          </a:bodyPr>
+          <a:lstStyle/>
+          <a:p>
+            <a:r>
+              <a:rPr lang="ko-KR" altLang="en-US" dirty="0"/>
+              <a:t>루프당 각자 다른 프레임의 각자 다른 패스를 병렬적으로 실행할 수 있다</a:t>
+            </a:r>
+            <a:r>
+              <a:rPr lang="en-US" altLang="ko-KR" dirty="0"/>
+              <a:t>.</a:t>
+            </a:r>
+          </a:p>
+          <a:p>
+            <a:r>
+              <a:rPr lang="ko-KR" altLang="en-US" dirty="0"/>
+              <a:t>의존성이 없으니까</a:t>
+            </a:r>
+            <a:r>
+              <a:rPr lang="en-US" altLang="ko-KR" dirty="0"/>
+              <a:t>. </a:t>
+            </a:r>
+          </a:p>
+          <a:p>
+            <a:r>
+              <a:rPr lang="ko-KR" altLang="en-US" dirty="0" err="1"/>
+              <a:t>멀티스레드</a:t>
+            </a:r>
+            <a:r>
+              <a:rPr lang="ko-KR" altLang="en-US" dirty="0"/>
+              <a:t> 활용</a:t>
+            </a:r>
+            <a:r>
+              <a:rPr lang="en-US" altLang="ko-KR" dirty="0"/>
+              <a:t>?</a:t>
+            </a:r>
+          </a:p>
+          <a:p>
+            <a:r>
+              <a:rPr lang="ko-KR" altLang="en-US" dirty="0"/>
+              <a:t>또한 특정 </a:t>
+            </a:r>
+            <a:r>
+              <a:rPr lang="en-US" altLang="ko-KR" dirty="0"/>
+              <a:t>Pass</a:t>
+            </a:r>
+            <a:r>
+              <a:rPr lang="ko-KR" altLang="en-US" dirty="0"/>
+              <a:t>의 </a:t>
+            </a:r>
+            <a:r>
+              <a:rPr lang="en-US" altLang="ko-KR" dirty="0" err="1"/>
+              <a:t>WaitForGPUComplete</a:t>
+            </a:r>
+            <a:r>
+              <a:rPr lang="ko-KR" altLang="en-US" dirty="0"/>
+              <a:t>는 다음 패스가 </a:t>
+            </a:r>
+            <a:r>
+              <a:rPr lang="ko-KR" altLang="en-US" dirty="0" err="1"/>
+              <a:t>시작할때</a:t>
+            </a:r>
+            <a:r>
+              <a:rPr lang="ko-KR" altLang="en-US" dirty="0"/>
+              <a:t> </a:t>
+            </a:r>
+            <a:endParaRPr lang="en-US" altLang="ko-KR" dirty="0"/>
+          </a:p>
+          <a:p>
+            <a:r>
+              <a:rPr lang="ko-KR" altLang="en-US" dirty="0"/>
+              <a:t>호출되도록 한다</a:t>
+            </a:r>
+            <a:r>
+              <a:rPr lang="en-US" altLang="ko-KR" dirty="0"/>
+              <a:t>.</a:t>
+            </a:r>
+          </a:p>
+        </p:txBody>
+      </p:sp>
+      <p:sp>
+        <p:nvSpPr>
+          <p:cNvPr id="18" name="TextBox 17">
+            <a:extLst>
+              <a:ext uri="{FF2B5EF4-FFF2-40B4-BE49-F238E27FC236}">
+                <a16:creationId xmlns:a16="http://schemas.microsoft.com/office/drawing/2014/main" id="{7DC61935-8CDE-F8CD-BB49-A0BEC0322F27}"/>
+              </a:ext>
+            </a:extLst>
+          </p:cNvPr>
+          <p:cNvSpPr txBox="1"/>
+          <p:nvPr/>
+        </p:nvSpPr>
+        <p:spPr>
+          <a:xfrm>
+            <a:off x="2084726" y="1931103"/>
+            <a:ext cx="1420582" cy="369332"/>
+          </a:xfrm>
+          <a:prstGeom prst="rect">
+            <a:avLst/>
+          </a:prstGeom>
+          <a:noFill/>
+          <a:ln w="25400">
+            <a:solidFill>
+              <a:schemeClr val="tx1"/>
+            </a:solidFill>
+          </a:ln>
+        </p:spPr>
+        <p:txBody>
+          <a:bodyPr wrap="none" rtlCol="0">
+            <a:spAutoFit/>
+          </a:bodyPr>
+          <a:lstStyle/>
+          <a:p>
+            <a:r>
+              <a:rPr lang="ko-KR" altLang="en-US" dirty="0" err="1"/>
+              <a:t>셰도우</a:t>
+            </a:r>
+            <a:r>
+              <a:rPr lang="ko-KR" altLang="en-US" dirty="0"/>
+              <a:t> 패스</a:t>
+            </a:r>
+          </a:p>
+        </p:txBody>
+      </p:sp>
+      <p:sp>
+        <p:nvSpPr>
+          <p:cNvPr id="19" name="TextBox 18">
+            <a:extLst>
+              <a:ext uri="{FF2B5EF4-FFF2-40B4-BE49-F238E27FC236}">
+                <a16:creationId xmlns:a16="http://schemas.microsoft.com/office/drawing/2014/main" id="{0B72601F-3DF5-005D-1128-8101F49877A7}"/>
+              </a:ext>
+            </a:extLst>
+          </p:cNvPr>
+          <p:cNvSpPr txBox="1"/>
+          <p:nvPr/>
+        </p:nvSpPr>
+        <p:spPr>
+          <a:xfrm>
+            <a:off x="3949602" y="1931103"/>
+            <a:ext cx="1420582" cy="369332"/>
+          </a:xfrm>
+          <a:prstGeom prst="rect">
+            <a:avLst/>
+          </a:prstGeom>
+          <a:noFill/>
+          <a:ln w="25400">
+            <a:solidFill>
+              <a:schemeClr val="tx1"/>
+            </a:solidFill>
+          </a:ln>
+        </p:spPr>
+        <p:txBody>
+          <a:bodyPr wrap="square" rtlCol="0">
+            <a:spAutoFit/>
+          </a:bodyPr>
+          <a:lstStyle/>
+          <a:p>
+            <a:r>
+              <a:rPr lang="ko-KR" altLang="en-US" dirty="0" err="1"/>
+              <a:t>렌더</a:t>
+            </a:r>
+            <a:r>
+              <a:rPr lang="ko-KR" altLang="en-US" dirty="0"/>
+              <a:t> 패스</a:t>
+            </a:r>
+          </a:p>
+        </p:txBody>
+      </p:sp>
+      <p:sp>
+        <p:nvSpPr>
+          <p:cNvPr id="20" name="TextBox 19">
+            <a:extLst>
+              <a:ext uri="{FF2B5EF4-FFF2-40B4-BE49-F238E27FC236}">
+                <a16:creationId xmlns:a16="http://schemas.microsoft.com/office/drawing/2014/main" id="{07A3CBAC-72E5-E1C9-7A4A-4142DB2624A1}"/>
+              </a:ext>
+            </a:extLst>
+          </p:cNvPr>
+          <p:cNvSpPr txBox="1"/>
+          <p:nvPr/>
+        </p:nvSpPr>
+        <p:spPr>
+          <a:xfrm>
+            <a:off x="5635773" y="1931103"/>
+            <a:ext cx="2074541" cy="369332"/>
+          </a:xfrm>
+          <a:prstGeom prst="rect">
+            <a:avLst/>
+          </a:prstGeom>
+          <a:noFill/>
+          <a:ln w="25400">
+            <a:solidFill>
+              <a:schemeClr val="tx1"/>
+            </a:solidFill>
+          </a:ln>
+        </p:spPr>
+        <p:txBody>
+          <a:bodyPr wrap="square" rtlCol="0">
+            <a:spAutoFit/>
+          </a:bodyPr>
+          <a:lstStyle/>
+          <a:p>
+            <a:r>
+              <a:rPr lang="ko-KR" altLang="en-US" dirty="0" err="1"/>
+              <a:t>컴퓨트</a:t>
+            </a:r>
+            <a:r>
+              <a:rPr lang="ko-KR" altLang="en-US" dirty="0"/>
+              <a:t> 패스</a:t>
+            </a:r>
+          </a:p>
+        </p:txBody>
+      </p:sp>
+      <p:sp>
+        <p:nvSpPr>
+          <p:cNvPr id="21" name="TextBox 20">
+            <a:extLst>
+              <a:ext uri="{FF2B5EF4-FFF2-40B4-BE49-F238E27FC236}">
+                <a16:creationId xmlns:a16="http://schemas.microsoft.com/office/drawing/2014/main" id="{F3D9FE8C-79BE-D2B6-1101-E1F6DB44E2FF}"/>
+              </a:ext>
+            </a:extLst>
+          </p:cNvPr>
+          <p:cNvSpPr txBox="1"/>
+          <p:nvPr/>
+        </p:nvSpPr>
+        <p:spPr>
+          <a:xfrm>
+            <a:off x="8060100" y="1931103"/>
+            <a:ext cx="2074542" cy="369332"/>
+          </a:xfrm>
+          <a:prstGeom prst="rect">
+            <a:avLst/>
+          </a:prstGeom>
+          <a:noFill/>
+          <a:ln w="25400">
+            <a:solidFill>
+              <a:schemeClr val="tx1"/>
+            </a:solidFill>
+          </a:ln>
+        </p:spPr>
+        <p:txBody>
+          <a:bodyPr wrap="none" rtlCol="0">
+            <a:spAutoFit/>
+          </a:bodyPr>
+          <a:lstStyle/>
+          <a:p>
+            <a:r>
+              <a:rPr lang="en-US" altLang="ko-KR" dirty="0"/>
+              <a:t>UI</a:t>
+            </a:r>
+            <a:r>
+              <a:rPr lang="ko-KR" altLang="en-US" dirty="0"/>
+              <a:t> 패스 </a:t>
+            </a:r>
+            <a:r>
+              <a:rPr lang="en-US" altLang="ko-KR" dirty="0"/>
+              <a:t>&amp; Present</a:t>
+            </a:r>
+            <a:endParaRPr lang="ko-KR" altLang="en-US" dirty="0"/>
+          </a:p>
+        </p:txBody>
+      </p:sp>
+      <p:cxnSp>
+        <p:nvCxnSpPr>
+          <p:cNvPr id="22" name="직선 화살표 연결선 21">
+            <a:extLst>
+              <a:ext uri="{FF2B5EF4-FFF2-40B4-BE49-F238E27FC236}">
+                <a16:creationId xmlns:a16="http://schemas.microsoft.com/office/drawing/2014/main" id="{8719B22E-0468-9219-F012-4916C5BA6AAC}"/>
+              </a:ext>
+            </a:extLst>
+          </p:cNvPr>
+          <p:cNvCxnSpPr>
+            <a:cxnSpLocks/>
+            <a:stCxn id="18" idx="3"/>
+            <a:endCxn id="19" idx="1"/>
+          </p:cNvCxnSpPr>
+          <p:nvPr/>
+        </p:nvCxnSpPr>
+        <p:spPr>
+          <a:xfrm>
+            <a:off x="3505308" y="2115769"/>
+            <a:ext cx="444294" cy="0"/>
+          </a:xfrm>
+          <a:prstGeom prst="straightConnector1">
+            <a:avLst/>
+          </a:prstGeom>
+          <a:ln w="44450">
+            <a:solidFill>
+              <a:schemeClr val="tx1"/>
+            </a:solidFill>
+            <a:tailEnd type="triangle"/>
+          </a:ln>
+        </p:spPr>
+        <p:style>
+          <a:lnRef idx="2">
+            <a:schemeClr val="accent1"/>
+          </a:lnRef>
+          <a:fillRef idx="0">
+            <a:schemeClr val="accent1"/>
+          </a:fillRef>
+          <a:effectRef idx="1">
+            <a:schemeClr val="accent1"/>
+          </a:effectRef>
+          <a:fontRef idx="minor">
+            <a:schemeClr val="tx1"/>
+          </a:fontRef>
+        </p:style>
+      </p:cxnSp>
+      <p:cxnSp>
+        <p:nvCxnSpPr>
+          <p:cNvPr id="23" name="직선 화살표 연결선 22">
+            <a:extLst>
+              <a:ext uri="{FF2B5EF4-FFF2-40B4-BE49-F238E27FC236}">
+                <a16:creationId xmlns:a16="http://schemas.microsoft.com/office/drawing/2014/main" id="{20F3C0FB-126A-E49D-CD5F-F2965A3B1F83}"/>
+              </a:ext>
+            </a:extLst>
+          </p:cNvPr>
+          <p:cNvCxnSpPr>
+            <a:cxnSpLocks/>
+            <a:stCxn id="19" idx="3"/>
+            <a:endCxn id="20" idx="1"/>
+          </p:cNvCxnSpPr>
+          <p:nvPr/>
+        </p:nvCxnSpPr>
+        <p:spPr>
+          <a:xfrm>
+            <a:off x="5370184" y="2115769"/>
+            <a:ext cx="265589" cy="0"/>
+          </a:xfrm>
+          <a:prstGeom prst="straightConnector1">
+            <a:avLst/>
+          </a:prstGeom>
+          <a:ln w="44450">
+            <a:solidFill>
+              <a:schemeClr val="tx1"/>
+            </a:solidFill>
+            <a:tailEnd type="triangle"/>
+          </a:ln>
+        </p:spPr>
+        <p:style>
+          <a:lnRef idx="2">
+            <a:schemeClr val="accent1"/>
+          </a:lnRef>
+          <a:fillRef idx="0">
+            <a:schemeClr val="accent1"/>
+          </a:fillRef>
+          <a:effectRef idx="1">
+            <a:schemeClr val="accent1"/>
+          </a:effectRef>
+          <a:fontRef idx="minor">
+            <a:schemeClr val="tx1"/>
+          </a:fontRef>
+        </p:style>
+      </p:cxnSp>
+      <p:cxnSp>
+        <p:nvCxnSpPr>
+          <p:cNvPr id="24" name="직선 화살표 연결선 23">
+            <a:extLst>
+              <a:ext uri="{FF2B5EF4-FFF2-40B4-BE49-F238E27FC236}">
+                <a16:creationId xmlns:a16="http://schemas.microsoft.com/office/drawing/2014/main" id="{7AF70D80-94E8-0919-7D39-E528394032D8}"/>
+              </a:ext>
+            </a:extLst>
+          </p:cNvPr>
+          <p:cNvCxnSpPr>
+            <a:cxnSpLocks/>
+            <a:stCxn id="20" idx="3"/>
+            <a:endCxn id="21" idx="1"/>
+          </p:cNvCxnSpPr>
+          <p:nvPr/>
+        </p:nvCxnSpPr>
+        <p:spPr>
+          <a:xfrm>
+            <a:off x="7710314" y="2115769"/>
+            <a:ext cx="349786" cy="0"/>
+          </a:xfrm>
+          <a:prstGeom prst="straightConnector1">
+            <a:avLst/>
+          </a:prstGeom>
+          <a:ln w="44450">
+            <a:solidFill>
+              <a:schemeClr val="tx1"/>
+            </a:solidFill>
+            <a:tailEnd type="triangle"/>
+          </a:ln>
+        </p:spPr>
+        <p:style>
+          <a:lnRef idx="2">
+            <a:schemeClr val="accent1"/>
+          </a:lnRef>
+          <a:fillRef idx="0">
+            <a:schemeClr val="accent1"/>
+          </a:fillRef>
+          <a:effectRef idx="1">
+            <a:schemeClr val="accent1"/>
+          </a:effectRef>
+          <a:fontRef idx="minor">
+            <a:schemeClr val="tx1"/>
+          </a:fontRef>
+        </p:style>
+      </p:cxnSp>
+      <p:sp>
+        <p:nvSpPr>
+          <p:cNvPr id="76" name="TextBox 75">
+            <a:extLst>
+              <a:ext uri="{FF2B5EF4-FFF2-40B4-BE49-F238E27FC236}">
+                <a16:creationId xmlns:a16="http://schemas.microsoft.com/office/drawing/2014/main" id="{9EF8AC47-428D-F39D-364A-D646A864D8F7}"/>
+              </a:ext>
+            </a:extLst>
+          </p:cNvPr>
+          <p:cNvSpPr txBox="1"/>
+          <p:nvPr/>
+        </p:nvSpPr>
+        <p:spPr>
+          <a:xfrm>
+            <a:off x="3949602" y="2438317"/>
+            <a:ext cx="1420582" cy="369332"/>
+          </a:xfrm>
+          <a:prstGeom prst="rect">
+            <a:avLst/>
+          </a:prstGeom>
+          <a:noFill/>
+          <a:ln w="25400">
+            <a:solidFill>
+              <a:schemeClr val="tx1"/>
+            </a:solidFill>
+          </a:ln>
+        </p:spPr>
+        <p:txBody>
+          <a:bodyPr wrap="none" rtlCol="0">
+            <a:spAutoFit/>
+          </a:bodyPr>
+          <a:lstStyle/>
+          <a:p>
+            <a:r>
+              <a:rPr lang="ko-KR" altLang="en-US" dirty="0" err="1"/>
+              <a:t>셰도우</a:t>
+            </a:r>
+            <a:r>
+              <a:rPr lang="ko-KR" altLang="en-US" dirty="0"/>
+              <a:t> 패스</a:t>
+            </a:r>
+          </a:p>
+        </p:txBody>
+      </p:sp>
+      <p:sp>
+        <p:nvSpPr>
+          <p:cNvPr id="77" name="TextBox 76">
+            <a:extLst>
+              <a:ext uri="{FF2B5EF4-FFF2-40B4-BE49-F238E27FC236}">
+                <a16:creationId xmlns:a16="http://schemas.microsoft.com/office/drawing/2014/main" id="{B09F4CCD-A549-C3A9-63B0-7BAE8DED7FA1}"/>
+              </a:ext>
+            </a:extLst>
+          </p:cNvPr>
+          <p:cNvSpPr txBox="1"/>
+          <p:nvPr/>
+        </p:nvSpPr>
+        <p:spPr>
+          <a:xfrm>
+            <a:off x="5635292" y="2438317"/>
+            <a:ext cx="1420582" cy="369332"/>
+          </a:xfrm>
+          <a:prstGeom prst="rect">
+            <a:avLst/>
+          </a:prstGeom>
+          <a:noFill/>
+          <a:ln w="25400">
+            <a:solidFill>
+              <a:schemeClr val="tx1"/>
+            </a:solidFill>
+          </a:ln>
+        </p:spPr>
+        <p:txBody>
+          <a:bodyPr wrap="square" rtlCol="0">
+            <a:spAutoFit/>
+          </a:bodyPr>
+          <a:lstStyle/>
+          <a:p>
+            <a:r>
+              <a:rPr lang="ko-KR" altLang="en-US" dirty="0" err="1"/>
+              <a:t>렌더</a:t>
+            </a:r>
+            <a:r>
+              <a:rPr lang="ko-KR" altLang="en-US" dirty="0"/>
+              <a:t> 패스</a:t>
+            </a:r>
+          </a:p>
+        </p:txBody>
+      </p:sp>
+      <p:sp>
+        <p:nvSpPr>
+          <p:cNvPr id="78" name="TextBox 77">
+            <a:extLst>
+              <a:ext uri="{FF2B5EF4-FFF2-40B4-BE49-F238E27FC236}">
+                <a16:creationId xmlns:a16="http://schemas.microsoft.com/office/drawing/2014/main" id="{6DEB23DF-3AD5-C088-7D87-56D63E9CA7FF}"/>
+              </a:ext>
+            </a:extLst>
+          </p:cNvPr>
+          <p:cNvSpPr txBox="1"/>
+          <p:nvPr/>
+        </p:nvSpPr>
+        <p:spPr>
+          <a:xfrm>
+            <a:off x="8060100" y="2415670"/>
+            <a:ext cx="1420582" cy="369332"/>
+          </a:xfrm>
+          <a:prstGeom prst="rect">
+            <a:avLst/>
+          </a:prstGeom>
+          <a:noFill/>
+          <a:ln w="25400">
+            <a:solidFill>
+              <a:schemeClr val="tx1"/>
+            </a:solidFill>
+          </a:ln>
+        </p:spPr>
+        <p:txBody>
+          <a:bodyPr wrap="none" rtlCol="0">
+            <a:spAutoFit/>
+          </a:bodyPr>
+          <a:lstStyle/>
+          <a:p>
+            <a:r>
+              <a:rPr lang="ko-KR" altLang="en-US" dirty="0" err="1"/>
+              <a:t>컴퓨트</a:t>
+            </a:r>
+            <a:r>
+              <a:rPr lang="ko-KR" altLang="en-US" dirty="0"/>
+              <a:t> 패스</a:t>
+            </a:r>
+          </a:p>
+        </p:txBody>
+      </p:sp>
+      <p:sp>
+        <p:nvSpPr>
+          <p:cNvPr id="79" name="TextBox 78">
+            <a:extLst>
+              <a:ext uri="{FF2B5EF4-FFF2-40B4-BE49-F238E27FC236}">
+                <a16:creationId xmlns:a16="http://schemas.microsoft.com/office/drawing/2014/main" id="{52B1EFD2-2D4C-ABDD-CC83-92C7CDA9EFF4}"/>
+              </a:ext>
+            </a:extLst>
+          </p:cNvPr>
+          <p:cNvSpPr txBox="1"/>
+          <p:nvPr/>
+        </p:nvSpPr>
+        <p:spPr>
+          <a:xfrm>
+            <a:off x="9746272" y="2415670"/>
+            <a:ext cx="2074542" cy="369332"/>
+          </a:xfrm>
+          <a:prstGeom prst="rect">
+            <a:avLst/>
+          </a:prstGeom>
+          <a:noFill/>
+          <a:ln w="25400">
+            <a:solidFill>
+              <a:schemeClr val="tx1"/>
+            </a:solidFill>
+          </a:ln>
+        </p:spPr>
+        <p:txBody>
+          <a:bodyPr wrap="none" rtlCol="0">
+            <a:spAutoFit/>
+          </a:bodyPr>
+          <a:lstStyle/>
+          <a:p>
+            <a:r>
+              <a:rPr lang="en-US" altLang="ko-KR" dirty="0"/>
+              <a:t>UI</a:t>
+            </a:r>
+            <a:r>
+              <a:rPr lang="ko-KR" altLang="en-US" dirty="0"/>
+              <a:t> 패스 </a:t>
+            </a:r>
+            <a:r>
+              <a:rPr lang="en-US" altLang="ko-KR" dirty="0"/>
+              <a:t>&amp; Present</a:t>
+            </a:r>
+            <a:endParaRPr lang="ko-KR" altLang="en-US" dirty="0"/>
+          </a:p>
+        </p:txBody>
+      </p:sp>
+      <p:cxnSp>
+        <p:nvCxnSpPr>
+          <p:cNvPr id="80" name="직선 화살표 연결선 79">
+            <a:extLst>
+              <a:ext uri="{FF2B5EF4-FFF2-40B4-BE49-F238E27FC236}">
+                <a16:creationId xmlns:a16="http://schemas.microsoft.com/office/drawing/2014/main" id="{166872D1-C138-D993-08F0-21F619C33F49}"/>
+              </a:ext>
+            </a:extLst>
+          </p:cNvPr>
+          <p:cNvCxnSpPr>
+            <a:cxnSpLocks/>
+            <a:stCxn id="76" idx="3"/>
+            <a:endCxn id="77" idx="1"/>
+          </p:cNvCxnSpPr>
+          <p:nvPr/>
+        </p:nvCxnSpPr>
+        <p:spPr>
+          <a:xfrm>
+            <a:off x="5370184" y="2622983"/>
+            <a:ext cx="265108" cy="0"/>
+          </a:xfrm>
+          <a:prstGeom prst="straightConnector1">
+            <a:avLst/>
+          </a:prstGeom>
+          <a:ln w="44450">
+            <a:solidFill>
+              <a:schemeClr val="tx1"/>
+            </a:solidFill>
+            <a:tailEnd type="triangle"/>
+          </a:ln>
+        </p:spPr>
+        <p:style>
+          <a:lnRef idx="2">
+            <a:schemeClr val="accent1"/>
+          </a:lnRef>
+          <a:fillRef idx="0">
+            <a:schemeClr val="accent1"/>
+          </a:fillRef>
+          <a:effectRef idx="1">
+            <a:schemeClr val="accent1"/>
+          </a:effectRef>
+          <a:fontRef idx="minor">
+            <a:schemeClr val="tx1"/>
+          </a:fontRef>
+        </p:style>
+      </p:cxnSp>
+      <p:cxnSp>
+        <p:nvCxnSpPr>
+          <p:cNvPr id="81" name="직선 화살표 연결선 80">
+            <a:extLst>
+              <a:ext uri="{FF2B5EF4-FFF2-40B4-BE49-F238E27FC236}">
+                <a16:creationId xmlns:a16="http://schemas.microsoft.com/office/drawing/2014/main" id="{DDBE9807-6028-9476-B5D5-8A45DEAA6A7B}"/>
+              </a:ext>
+            </a:extLst>
+          </p:cNvPr>
+          <p:cNvCxnSpPr>
+            <a:cxnSpLocks/>
+            <a:stCxn id="77" idx="3"/>
+            <a:endCxn id="78" idx="1"/>
+          </p:cNvCxnSpPr>
+          <p:nvPr/>
+        </p:nvCxnSpPr>
+        <p:spPr>
+          <a:xfrm flipV="1">
+            <a:off x="7055874" y="2600336"/>
+            <a:ext cx="1004226" cy="22647"/>
+          </a:xfrm>
+          <a:prstGeom prst="straightConnector1">
+            <a:avLst/>
+          </a:prstGeom>
+          <a:ln w="44450">
+            <a:solidFill>
+              <a:schemeClr val="tx1"/>
+            </a:solidFill>
+            <a:tailEnd type="triangle"/>
+          </a:ln>
+        </p:spPr>
+        <p:style>
+          <a:lnRef idx="2">
+            <a:schemeClr val="accent1"/>
+          </a:lnRef>
+          <a:fillRef idx="0">
+            <a:schemeClr val="accent1"/>
+          </a:fillRef>
+          <a:effectRef idx="1">
+            <a:schemeClr val="accent1"/>
+          </a:effectRef>
+          <a:fontRef idx="minor">
+            <a:schemeClr val="tx1"/>
+          </a:fontRef>
+        </p:style>
+      </p:cxnSp>
+      <p:cxnSp>
+        <p:nvCxnSpPr>
+          <p:cNvPr id="82" name="직선 화살표 연결선 81">
+            <a:extLst>
+              <a:ext uri="{FF2B5EF4-FFF2-40B4-BE49-F238E27FC236}">
+                <a16:creationId xmlns:a16="http://schemas.microsoft.com/office/drawing/2014/main" id="{0D7D9367-5075-5A34-7A47-738CC7A08D9E}"/>
+              </a:ext>
+            </a:extLst>
+          </p:cNvPr>
+          <p:cNvCxnSpPr>
+            <a:cxnSpLocks/>
+            <a:stCxn id="78" idx="3"/>
+            <a:endCxn id="79" idx="1"/>
+          </p:cNvCxnSpPr>
+          <p:nvPr/>
+        </p:nvCxnSpPr>
+        <p:spPr>
+          <a:xfrm>
+            <a:off x="9480682" y="2600336"/>
+            <a:ext cx="265590" cy="0"/>
+          </a:xfrm>
+          <a:prstGeom prst="straightConnector1">
+            <a:avLst/>
+          </a:prstGeom>
+          <a:ln w="44450">
+            <a:solidFill>
+              <a:schemeClr val="tx1"/>
+            </a:solidFill>
+            <a:tailEnd type="triangle"/>
+          </a:ln>
+        </p:spPr>
+        <p:style>
+          <a:lnRef idx="2">
+            <a:schemeClr val="accent1"/>
+          </a:lnRef>
+          <a:fillRef idx="0">
+            <a:schemeClr val="accent1"/>
+          </a:fillRef>
+          <a:effectRef idx="1">
+            <a:schemeClr val="accent1"/>
+          </a:effectRef>
+          <a:fontRef idx="minor">
+            <a:schemeClr val="tx1"/>
+          </a:fontRef>
+        </p:style>
+      </p:cxnSp>
+      <p:sp>
+        <p:nvSpPr>
+          <p:cNvPr id="83" name="TextBox 82">
+            <a:extLst>
+              <a:ext uri="{FF2B5EF4-FFF2-40B4-BE49-F238E27FC236}">
+                <a16:creationId xmlns:a16="http://schemas.microsoft.com/office/drawing/2014/main" id="{6C79E8C0-1540-D1AB-CEC8-E3FEEAE83FEB}"/>
+              </a:ext>
+            </a:extLst>
+          </p:cNvPr>
+          <p:cNvSpPr txBox="1"/>
+          <p:nvPr/>
+        </p:nvSpPr>
+        <p:spPr>
+          <a:xfrm>
+            <a:off x="5635292" y="2926912"/>
+            <a:ext cx="1420582" cy="369332"/>
+          </a:xfrm>
+          <a:prstGeom prst="rect">
+            <a:avLst/>
+          </a:prstGeom>
+          <a:noFill/>
+          <a:ln w="25400">
+            <a:solidFill>
+              <a:schemeClr val="tx1"/>
+            </a:solidFill>
+          </a:ln>
+        </p:spPr>
+        <p:txBody>
+          <a:bodyPr wrap="none" rtlCol="0">
+            <a:spAutoFit/>
+          </a:bodyPr>
+          <a:lstStyle/>
+          <a:p>
+            <a:r>
+              <a:rPr lang="ko-KR" altLang="en-US" dirty="0" err="1"/>
+              <a:t>셰도우</a:t>
+            </a:r>
+            <a:r>
+              <a:rPr lang="ko-KR" altLang="en-US" dirty="0"/>
+              <a:t> 패스</a:t>
+            </a:r>
+          </a:p>
+        </p:txBody>
+      </p:sp>
+      <p:sp>
+        <p:nvSpPr>
+          <p:cNvPr id="84" name="TextBox 83">
+            <a:extLst>
+              <a:ext uri="{FF2B5EF4-FFF2-40B4-BE49-F238E27FC236}">
+                <a16:creationId xmlns:a16="http://schemas.microsoft.com/office/drawing/2014/main" id="{EBB3D9E5-33A0-55C3-A85B-69456D70A279}"/>
+              </a:ext>
+            </a:extLst>
+          </p:cNvPr>
+          <p:cNvSpPr txBox="1"/>
+          <p:nvPr/>
+        </p:nvSpPr>
+        <p:spPr>
+          <a:xfrm>
+            <a:off x="8060100" y="2904265"/>
+            <a:ext cx="1420582" cy="369332"/>
+          </a:xfrm>
+          <a:prstGeom prst="rect">
+            <a:avLst/>
+          </a:prstGeom>
+          <a:noFill/>
+          <a:ln w="25400">
+            <a:solidFill>
+              <a:schemeClr val="tx1"/>
+            </a:solidFill>
+          </a:ln>
+        </p:spPr>
+        <p:txBody>
+          <a:bodyPr wrap="square" rtlCol="0">
+            <a:spAutoFit/>
+          </a:bodyPr>
+          <a:lstStyle/>
+          <a:p>
+            <a:r>
+              <a:rPr lang="ko-KR" altLang="en-US" dirty="0" err="1"/>
+              <a:t>렌더</a:t>
+            </a:r>
+            <a:r>
+              <a:rPr lang="ko-KR" altLang="en-US" dirty="0"/>
+              <a:t> 패스</a:t>
+            </a:r>
+          </a:p>
+        </p:txBody>
+      </p:sp>
+      <p:sp>
+        <p:nvSpPr>
+          <p:cNvPr id="85" name="TextBox 84">
+            <a:extLst>
+              <a:ext uri="{FF2B5EF4-FFF2-40B4-BE49-F238E27FC236}">
+                <a16:creationId xmlns:a16="http://schemas.microsoft.com/office/drawing/2014/main" id="{3828A69C-6EE5-3EAA-9CB7-F3F193D55A8A}"/>
+              </a:ext>
+            </a:extLst>
+          </p:cNvPr>
+          <p:cNvSpPr txBox="1"/>
+          <p:nvPr/>
+        </p:nvSpPr>
+        <p:spPr>
+          <a:xfrm>
+            <a:off x="9746271" y="2904265"/>
+            <a:ext cx="2074541" cy="369332"/>
+          </a:xfrm>
+          <a:prstGeom prst="rect">
+            <a:avLst/>
+          </a:prstGeom>
+          <a:noFill/>
+          <a:ln w="25400">
+            <a:solidFill>
+              <a:schemeClr val="tx1"/>
+            </a:solidFill>
+          </a:ln>
+        </p:spPr>
+        <p:txBody>
+          <a:bodyPr wrap="square" rtlCol="0">
+            <a:spAutoFit/>
+          </a:bodyPr>
+          <a:lstStyle/>
+          <a:p>
+            <a:r>
+              <a:rPr lang="ko-KR" altLang="en-US" dirty="0" err="1"/>
+              <a:t>컴퓨트</a:t>
+            </a:r>
+            <a:r>
+              <a:rPr lang="ko-KR" altLang="en-US" dirty="0"/>
+              <a:t> 패스</a:t>
+            </a:r>
+          </a:p>
+        </p:txBody>
+      </p:sp>
+      <p:cxnSp>
+        <p:nvCxnSpPr>
+          <p:cNvPr id="87" name="직선 화살표 연결선 86">
+            <a:extLst>
+              <a:ext uri="{FF2B5EF4-FFF2-40B4-BE49-F238E27FC236}">
+                <a16:creationId xmlns:a16="http://schemas.microsoft.com/office/drawing/2014/main" id="{16C3C39D-AEC5-97F5-870A-B9EB1E60B2A7}"/>
+              </a:ext>
+            </a:extLst>
+          </p:cNvPr>
+          <p:cNvCxnSpPr>
+            <a:cxnSpLocks/>
+            <a:stCxn id="83" idx="3"/>
+            <a:endCxn id="84" idx="1"/>
+          </p:cNvCxnSpPr>
+          <p:nvPr/>
+        </p:nvCxnSpPr>
+        <p:spPr>
+          <a:xfrm flipV="1">
+            <a:off x="7055874" y="3088931"/>
+            <a:ext cx="1004226" cy="22647"/>
+          </a:xfrm>
+          <a:prstGeom prst="straightConnector1">
+            <a:avLst/>
+          </a:prstGeom>
+          <a:ln w="44450">
+            <a:solidFill>
+              <a:schemeClr val="tx1"/>
+            </a:solidFill>
+            <a:tailEnd type="triangle"/>
+          </a:ln>
+        </p:spPr>
+        <p:style>
+          <a:lnRef idx="2">
+            <a:schemeClr val="accent1"/>
+          </a:lnRef>
+          <a:fillRef idx="0">
+            <a:schemeClr val="accent1"/>
+          </a:fillRef>
+          <a:effectRef idx="1">
+            <a:schemeClr val="accent1"/>
+          </a:effectRef>
+          <a:fontRef idx="minor">
+            <a:schemeClr val="tx1"/>
+          </a:fontRef>
+        </p:style>
+      </p:cxnSp>
+      <p:cxnSp>
+        <p:nvCxnSpPr>
+          <p:cNvPr id="88" name="직선 화살표 연결선 87">
+            <a:extLst>
+              <a:ext uri="{FF2B5EF4-FFF2-40B4-BE49-F238E27FC236}">
+                <a16:creationId xmlns:a16="http://schemas.microsoft.com/office/drawing/2014/main" id="{3D7C4CDD-8149-8F12-0340-8EBC392A999C}"/>
+              </a:ext>
+            </a:extLst>
+          </p:cNvPr>
+          <p:cNvCxnSpPr>
+            <a:cxnSpLocks/>
+            <a:stCxn id="84" idx="3"/>
+            <a:endCxn id="85" idx="1"/>
+          </p:cNvCxnSpPr>
+          <p:nvPr/>
+        </p:nvCxnSpPr>
+        <p:spPr>
+          <a:xfrm>
+            <a:off x="9480682" y="3088931"/>
+            <a:ext cx="265589" cy="0"/>
+          </a:xfrm>
+          <a:prstGeom prst="straightConnector1">
+            <a:avLst/>
+          </a:prstGeom>
+          <a:ln w="44450">
+            <a:solidFill>
+              <a:schemeClr val="tx1"/>
+            </a:solidFill>
+            <a:tailEnd type="triangle"/>
+          </a:ln>
+        </p:spPr>
+        <p:style>
+          <a:lnRef idx="2">
+            <a:schemeClr val="accent1"/>
+          </a:lnRef>
+          <a:fillRef idx="0">
+            <a:schemeClr val="accent1"/>
+          </a:fillRef>
+          <a:effectRef idx="1">
+            <a:schemeClr val="accent1"/>
+          </a:effectRef>
+          <a:fontRef idx="minor">
+            <a:schemeClr val="tx1"/>
+          </a:fontRef>
+        </p:style>
+      </p:cxnSp>
+      <p:cxnSp>
+        <p:nvCxnSpPr>
+          <p:cNvPr id="89" name="직선 화살표 연결선 88">
+            <a:extLst>
+              <a:ext uri="{FF2B5EF4-FFF2-40B4-BE49-F238E27FC236}">
+                <a16:creationId xmlns:a16="http://schemas.microsoft.com/office/drawing/2014/main" id="{3DC8F132-7C7B-EBAB-70F0-A061BA82F850}"/>
+              </a:ext>
+            </a:extLst>
+          </p:cNvPr>
+          <p:cNvCxnSpPr>
+            <a:cxnSpLocks/>
+            <a:stCxn id="85" idx="3"/>
+          </p:cNvCxnSpPr>
+          <p:nvPr/>
+        </p:nvCxnSpPr>
+        <p:spPr>
+          <a:xfrm>
+            <a:off x="11820812" y="3088931"/>
+            <a:ext cx="349786" cy="0"/>
+          </a:xfrm>
+          <a:prstGeom prst="straightConnector1">
+            <a:avLst/>
+          </a:prstGeom>
+          <a:ln w="44450">
+            <a:solidFill>
+              <a:schemeClr val="tx1"/>
+            </a:solidFill>
+            <a:tailEnd type="triangle"/>
+          </a:ln>
+        </p:spPr>
+        <p:style>
+          <a:lnRef idx="2">
+            <a:schemeClr val="accent1"/>
+          </a:lnRef>
+          <a:fillRef idx="0">
+            <a:schemeClr val="accent1"/>
+          </a:fillRef>
+          <a:effectRef idx="1">
+            <a:schemeClr val="accent1"/>
+          </a:effectRef>
+          <a:fontRef idx="minor">
+            <a:schemeClr val="tx1"/>
+          </a:fontRef>
+        </p:style>
+      </p:cxnSp>
+      <p:sp>
+        <p:nvSpPr>
+          <p:cNvPr id="94" name="TextBox 93">
+            <a:extLst>
+              <a:ext uri="{FF2B5EF4-FFF2-40B4-BE49-F238E27FC236}">
+                <a16:creationId xmlns:a16="http://schemas.microsoft.com/office/drawing/2014/main" id="{E6A54125-A5C5-B9FA-F89C-9CC77823DF7B}"/>
+              </a:ext>
+            </a:extLst>
+          </p:cNvPr>
+          <p:cNvSpPr txBox="1"/>
+          <p:nvPr/>
+        </p:nvSpPr>
+        <p:spPr>
+          <a:xfrm>
+            <a:off x="5969626" y="906050"/>
+            <a:ext cx="1189749" cy="369332"/>
+          </a:xfrm>
+          <a:prstGeom prst="rect">
+            <a:avLst/>
+          </a:prstGeom>
+          <a:noFill/>
+        </p:spPr>
+        <p:txBody>
+          <a:bodyPr wrap="none" rtlCol="0">
+            <a:spAutoFit/>
+          </a:bodyPr>
+          <a:lstStyle/>
+          <a:p>
+            <a:r>
+              <a:rPr lang="ko-KR" altLang="en-US" dirty="0" err="1"/>
+              <a:t>렌더</a:t>
+            </a:r>
+            <a:r>
+              <a:rPr lang="ko-KR" altLang="en-US" dirty="0"/>
+              <a:t> 루프</a:t>
+            </a:r>
+            <a:endParaRPr lang="en-US" altLang="ko-KR" dirty="0"/>
+          </a:p>
+        </p:txBody>
+      </p:sp>
+    </p:spTree>
+    <p:extLst>
+      <p:ext uri="{BB962C8B-B14F-4D97-AF65-F5344CB8AC3E}">
+        <p14:creationId xmlns:p14="http://schemas.microsoft.com/office/powerpoint/2010/main" val="1454281042"/>
+      </p:ext>
+    </p:extLst>
+  </p:cSld>
+  <p:clrMapOvr>
+    <a:masterClrMapping/>
+  </p:clrMapOvr>
+</p:sld>
+</file>
+
+<file path=ppt/slides/slide34.xml><?xml version="1.0" encoding="utf-8"?>
+<p:sld xmlns:a="http://schemas.openxmlformats.org/drawingml/2006/main" xmlns:r="http://schemas.openxmlformats.org/officeDocument/2006/relationships" xmlns:p="http://schemas.openxmlformats.org/presentationml/2006/main">
+  <p:cSld>
+    <p:spTree>
+      <p:nvGrpSpPr>
+        <p:cNvPr id="1" name=""/>
+        <p:cNvGrpSpPr/>
+        <p:nvPr/>
+      </p:nvGrpSpPr>
+      <p:grpSpPr>
+        <a:xfrm>
+          <a:off x="0" y="0"/>
+          <a:ext cx="0" cy="0"/>
+          <a:chOff x="0" y="0"/>
+          <a:chExt cx="0" cy="0"/>
+        </a:xfrm>
+      </p:grpSpPr>
+      <p:sp>
+        <p:nvSpPr>
+          <p:cNvPr id="2" name="제목 1">
+            <a:extLst>
+              <a:ext uri="{FF2B5EF4-FFF2-40B4-BE49-F238E27FC236}">
+                <a16:creationId xmlns:a16="http://schemas.microsoft.com/office/drawing/2014/main" id="{958EEAAD-7A05-9BEB-B2B5-9B625380D6CF}"/>
+              </a:ext>
+            </a:extLst>
+          </p:cNvPr>
+          <p:cNvSpPr>
+            <a:spLocks noGrp="1"/>
+          </p:cNvSpPr>
+          <p:nvPr>
+            <p:ph type="title"/>
+          </p:nvPr>
+        </p:nvSpPr>
+        <p:spPr/>
+        <p:txBody>
+          <a:bodyPr/>
+          <a:lstStyle/>
+          <a:p>
+            <a:r>
+              <a:rPr lang="en-US" altLang="ko-KR"/>
+              <a:t>Shape?</a:t>
+            </a:r>
+            <a:endParaRPr lang="ko-KR" altLang="en-US"/>
+          </a:p>
+        </p:txBody>
+      </p:sp>
+      <p:sp>
+        <p:nvSpPr>
+          <p:cNvPr id="5" name="TextBox 4">
+            <a:extLst>
+              <a:ext uri="{FF2B5EF4-FFF2-40B4-BE49-F238E27FC236}">
+                <a16:creationId xmlns:a16="http://schemas.microsoft.com/office/drawing/2014/main" id="{17B39B80-7E02-C967-8CF6-AA97124D098D}"/>
+              </a:ext>
+            </a:extLst>
+          </p:cNvPr>
+          <p:cNvSpPr txBox="1"/>
+          <p:nvPr/>
+        </p:nvSpPr>
+        <p:spPr>
+          <a:xfrm>
+            <a:off x="3049292" y="2107246"/>
+            <a:ext cx="6098582" cy="2031325"/>
+          </a:xfrm>
+          <a:prstGeom prst="rect">
+            <a:avLst/>
+          </a:prstGeom>
+          <a:noFill/>
+        </p:spPr>
+        <p:txBody>
+          <a:bodyPr wrap="square">
+            <a:spAutoFit/>
+          </a:bodyPr>
+          <a:lstStyle/>
+          <a:p>
+            <a:r>
+              <a:rPr lang="ko-KR" altLang="en-US"/>
+              <a:t>SetShape 순서</a:t>
+            </a:r>
+          </a:p>
+          <a:p>
+            <a:r>
+              <a:rPr lang="ko-KR" altLang="en-US"/>
+              <a:t>1. 모델의 경우</a:t>
+            </a:r>
+          </a:p>
+          <a:p>
+            <a:r>
+              <a:rPr lang="ko-KR" altLang="en-US"/>
+              <a:t>	1-1. innerTransform의 메모리를 만들고 원하는 행렬들을 만든다.</a:t>
+            </a:r>
+          </a:p>
+          <a:p>
+            <a:r>
+              <a:rPr lang="ko-KR" altLang="en-US"/>
+              <a:t>	1-2. SetShape를 한다.</a:t>
+            </a:r>
+          </a:p>
+          <a:p>
+            <a:r>
+              <a:rPr lang="ko-KR" altLang="en-US"/>
+              <a:t>		- SetShape에서 만약 innerTransform이 없으면 만들고 모델의 transform을 사용한다.</a:t>
+            </a:r>
+          </a:p>
+        </p:txBody>
+      </p:sp>
+    </p:spTree>
+    <p:extLst>
+      <p:ext uri="{BB962C8B-B14F-4D97-AF65-F5344CB8AC3E}">
+        <p14:creationId xmlns:p14="http://schemas.microsoft.com/office/powerpoint/2010/main" val="4127959828"/>
       </p:ext>
     </p:extLst>
   </p:cSld>
@@ -15727,4 +19612,319 @@
     </a:ext>
   </a:extLst>
 </a:theme>
+</file>
+
+<file path=ppt/theme/theme2.xml><?xml version="1.0" encoding="utf-8"?>
+<a:theme xmlns:a="http://schemas.openxmlformats.org/drawingml/2006/main" name="Office 테마">
+  <a:themeElements>
+    <a:clrScheme name="Office">
+      <a:dk1>
+        <a:sysClr val="windowText" lastClr="000000"/>
+      </a:dk1>
+      <a:lt1>
+        <a:sysClr val="window" lastClr="FFFFFF"/>
+      </a:lt1>
+      <a:dk2>
+        <a:srgbClr val="0E2841"/>
+      </a:dk2>
+      <a:lt2>
+        <a:srgbClr val="E8E8E8"/>
+      </a:lt2>
+      <a:accent1>
+        <a:srgbClr val="156082"/>
+      </a:accent1>
+      <a:accent2>
+        <a:srgbClr val="E97132"/>
+      </a:accent2>
+      <a:accent3>
+        <a:srgbClr val="196B24"/>
+      </a:accent3>
+      <a:accent4>
+        <a:srgbClr val="0F9ED5"/>
+      </a:accent4>
+      <a:accent5>
+        <a:srgbClr val="A02B93"/>
+      </a:accent5>
+      <a:accent6>
+        <a:srgbClr val="4EA72E"/>
+      </a:accent6>
+      <a:hlink>
+        <a:srgbClr val="467886"/>
+      </a:hlink>
+      <a:folHlink>
+        <a:srgbClr val="96607D"/>
+      </a:folHlink>
+    </a:clrScheme>
+    <a:fontScheme name="Office">
+      <a:majorFont>
+        <a:latin typeface="맑은 고딕" panose="02110004020202020204"/>
+        <a:ea typeface=""/>
+        <a:cs typeface=""/>
+        <a:font script="Jpan" typeface="游ゴシック Light"/>
+        <a:font script="Hang" typeface="맑은 고딕"/>
+        <a:font script="Hans" typeface="等线 Light"/>
+        <a:font script="Hant" typeface="新細明體"/>
+        <a:font script="Arab" typeface="Times New Roman"/>
+        <a:font script="Hebr" typeface="Times New Roman"/>
+        <a:font script="Thai" typeface="Angsana New"/>
+        <a:font script="Ethi" typeface="Nyala"/>
+        <a:font script="Beng" typeface="Vrinda"/>
+        <a:font script="Gujr" typeface="Shruti"/>
+        <a:font script="Khmr" typeface="MoolBoran"/>
+        <a:font script="Knda" typeface="Tunga"/>
+        <a:font script="Guru" typeface="Raavi"/>
+        <a:font script="Cans" typeface="Euphemia"/>
+        <a:font script="Cher" typeface="Plantagenet Cherokee"/>
+        <a:font script="Yiii" typeface="Microsoft Yi Baiti"/>
+        <a:font script="Tibt" typeface="Microsoft Himalaya"/>
+        <a:font script="Thaa" typeface="MV Boli"/>
+        <a:font script="Deva" typeface="Mangal"/>
+        <a:font script="Telu" typeface="Gautami"/>
+        <a:font script="Taml" typeface="Latha"/>
+        <a:font script="Syrc" typeface="Estrangelo Edessa"/>
+        <a:font script="Orya" typeface="Kalinga"/>
+        <a:font script="Mlym" typeface="Kartika"/>
+        <a:font script="Laoo" typeface="DokChampa"/>
+        <a:font script="Sinh" typeface="Iskoola Pota"/>
+        <a:font script="Mong" typeface="Mongolian Baiti"/>
+        <a:font script="Viet" typeface="Times New Roman"/>
+        <a:font script="Uigh" typeface="Microsoft Uighur"/>
+        <a:font script="Geor" typeface="Sylfaen"/>
+        <a:font script="Armn" typeface="Arial"/>
+        <a:font script="Bugi" typeface="Leelawadee UI"/>
+        <a:font script="Bopo" typeface="Microsoft JhengHei"/>
+        <a:font script="Java" typeface="Javanese Text"/>
+        <a:font script="Lisu" typeface="Segoe UI"/>
+        <a:font script="Mymr" typeface="Myanmar Text"/>
+        <a:font script="Nkoo" typeface="Ebrima"/>
+        <a:font script="Olck" typeface="Nirmala UI"/>
+        <a:font script="Osma" typeface="Ebrima"/>
+        <a:font script="Phag" typeface="Phagspa"/>
+        <a:font script="Syrn" typeface="Estrangelo Edessa"/>
+        <a:font script="Syrj" typeface="Estrangelo Edessa"/>
+        <a:font script="Syre" typeface="Estrangelo Edessa"/>
+        <a:font script="Sora" typeface="Nirmala UI"/>
+        <a:font script="Tale" typeface="Microsoft Tai Le"/>
+        <a:font script="Talu" typeface="Microsoft New Tai Lue"/>
+        <a:font script="Tfng" typeface="Ebrima"/>
+      </a:majorFont>
+      <a:minorFont>
+        <a:latin typeface="맑은 고딕" panose="02110004020202020204"/>
+        <a:ea typeface=""/>
+        <a:cs typeface=""/>
+        <a:font script="Jpan" typeface="游ゴシック"/>
+        <a:font script="Hang" typeface="맑은 고딕"/>
+        <a:font script="Hans" typeface="等线"/>
+        <a:font script="Hant" typeface="新細明體"/>
+        <a:font script="Arab" typeface="Arial"/>
+        <a:font script="Hebr" typeface="Arial"/>
+        <a:font script="Thai" typeface="Cordia New"/>
+        <a:font script="Ethi" typeface="Nyala"/>
+        <a:font script="Beng" typeface="Vrinda"/>
+        <a:font script="Gujr" typeface="Shruti"/>
+        <a:font script="Khmr" typeface="DaunPenh"/>
+        <a:font script="Knda" typeface="Tunga"/>
+        <a:font script="Guru" typeface="Raavi"/>
+        <a:font script="Cans" typeface="Euphemia"/>
+        <a:font script="Cher" typeface="Plantagenet Cherokee"/>
+        <a:font script="Yiii" typeface="Microsoft Yi Baiti"/>
+        <a:font script="Tibt" typeface="Microsoft Himalaya"/>
+        <a:font script="Thaa" typeface="MV Boli"/>
+        <a:font script="Deva" typeface="Mangal"/>
+        <a:font script="Telu" typeface="Gautami"/>
+        <a:font script="Taml" typeface="Latha"/>
+        <a:font script="Syrc" typeface="Estrangelo Edessa"/>
+        <a:font script="Orya" typeface="Kalinga"/>
+        <a:font script="Mlym" typeface="Kartika"/>
+        <a:font script="Laoo" typeface="DokChampa"/>
+        <a:font script="Sinh" typeface="Iskoola Pota"/>
+        <a:font script="Mong" typeface="Mongolian Baiti"/>
+        <a:font script="Viet" typeface="Arial"/>
+        <a:font script="Uigh" typeface="Microsoft Uighur"/>
+        <a:font script="Geor" typeface="Sylfaen"/>
+        <a:font script="Armn" typeface="Arial"/>
+        <a:font script="Bugi" typeface="Leelawadee UI"/>
+        <a:font script="Bopo" typeface="Microsoft JhengHei"/>
+        <a:font script="Java" typeface="Javanese Text"/>
+        <a:font script="Lisu" typeface="Segoe UI"/>
+        <a:font script="Mymr" typeface="Myanmar Text"/>
+        <a:font script="Nkoo" typeface="Ebrima"/>
+        <a:font script="Olck" typeface="Nirmala UI"/>
+        <a:font script="Osma" typeface="Ebrima"/>
+        <a:font script="Phag" typeface="Phagspa"/>
+        <a:font script="Syrn" typeface="Estrangelo Edessa"/>
+        <a:font script="Syrj" typeface="Estrangelo Edessa"/>
+        <a:font script="Syre" typeface="Estrangelo Edessa"/>
+        <a:font script="Sora" typeface="Nirmala UI"/>
+        <a:font script="Tale" typeface="Microsoft Tai Le"/>
+        <a:font script="Talu" typeface="Microsoft New Tai Lue"/>
+        <a:font script="Tfng" typeface="Ebrima"/>
+      </a:minorFont>
+    </a:fontScheme>
+    <a:fmtScheme name="Office">
+      <a:fillStyleLst>
+        <a:solidFill>
+          <a:schemeClr val="phClr"/>
+        </a:solidFill>
+        <a:gradFill rotWithShape="1">
+          <a:gsLst>
+            <a:gs pos="0">
+              <a:schemeClr val="phClr">
+                <a:lumMod val="110000"/>
+                <a:satMod val="105000"/>
+                <a:tint val="67000"/>
+              </a:schemeClr>
+            </a:gs>
+            <a:gs pos="50000">
+              <a:schemeClr val="phClr">
+                <a:lumMod val="105000"/>
+                <a:satMod val="103000"/>
+                <a:tint val="73000"/>
+              </a:schemeClr>
+            </a:gs>
+            <a:gs pos="100000">
+              <a:schemeClr val="phClr">
+                <a:lumMod val="105000"/>
+                <a:satMod val="109000"/>
+                <a:tint val="81000"/>
+              </a:schemeClr>
+            </a:gs>
+          </a:gsLst>
+          <a:lin ang="5400000" scaled="0"/>
+        </a:gradFill>
+        <a:gradFill rotWithShape="1">
+          <a:gsLst>
+            <a:gs pos="0">
+              <a:schemeClr val="phClr">
+                <a:satMod val="103000"/>
+                <a:lumMod val="102000"/>
+                <a:tint val="94000"/>
+              </a:schemeClr>
+            </a:gs>
+            <a:gs pos="50000">
+              <a:schemeClr val="phClr">
+                <a:satMod val="110000"/>
+                <a:lumMod val="100000"/>
+                <a:shade val="100000"/>
+              </a:schemeClr>
+            </a:gs>
+            <a:gs pos="100000">
+              <a:schemeClr val="phClr">
+                <a:lumMod val="99000"/>
+                <a:satMod val="120000"/>
+                <a:shade val="78000"/>
+              </a:schemeClr>
+            </a:gs>
+          </a:gsLst>
+          <a:lin ang="5400000" scaled="0"/>
+        </a:gradFill>
+      </a:fillStyleLst>
+      <a:lnStyleLst>
+        <a:ln w="12700" cap="flat" cmpd="sng" algn="ctr">
+          <a:solidFill>
+            <a:schemeClr val="phClr"/>
+          </a:solidFill>
+          <a:prstDash val="solid"/>
+          <a:miter lim="800000"/>
+        </a:ln>
+        <a:ln w="19050" cap="flat" cmpd="sng" algn="ctr">
+          <a:solidFill>
+            <a:schemeClr val="phClr"/>
+          </a:solidFill>
+          <a:prstDash val="solid"/>
+          <a:miter lim="800000"/>
+        </a:ln>
+        <a:ln w="25400" cap="flat" cmpd="sng" algn="ctr">
+          <a:solidFill>
+            <a:schemeClr val="phClr"/>
+          </a:solidFill>
+          <a:prstDash val="solid"/>
+          <a:miter lim="800000"/>
+        </a:ln>
+      </a:lnStyleLst>
+      <a:effectStyleLst>
+        <a:effectStyle>
+          <a:effectLst/>
+        </a:effectStyle>
+        <a:effectStyle>
+          <a:effectLst/>
+        </a:effectStyle>
+        <a:effectStyle>
+          <a:effectLst>
+            <a:outerShdw blurRad="57150" dist="19050" dir="5400000" algn="ctr" rotWithShape="0">
+              <a:srgbClr val="000000">
+                <a:alpha val="63000"/>
+              </a:srgbClr>
+            </a:outerShdw>
+          </a:effectLst>
+        </a:effectStyle>
+      </a:effectStyleLst>
+      <a:bgFillStyleLst>
+        <a:solidFill>
+          <a:schemeClr val="phClr"/>
+        </a:solidFill>
+        <a:solidFill>
+          <a:schemeClr val="phClr">
+            <a:tint val="95000"/>
+            <a:satMod val="170000"/>
+          </a:schemeClr>
+        </a:solidFill>
+        <a:gradFill rotWithShape="1">
+          <a:gsLst>
+            <a:gs pos="0">
+              <a:schemeClr val="phClr">
+                <a:tint val="93000"/>
+                <a:satMod val="150000"/>
+                <a:shade val="98000"/>
+                <a:lumMod val="102000"/>
+              </a:schemeClr>
+            </a:gs>
+            <a:gs pos="50000">
+              <a:schemeClr val="phClr">
+                <a:tint val="98000"/>
+                <a:satMod val="130000"/>
+                <a:shade val="90000"/>
+                <a:lumMod val="103000"/>
+              </a:schemeClr>
+            </a:gs>
+            <a:gs pos="100000">
+              <a:schemeClr val="phClr">
+                <a:shade val="63000"/>
+                <a:satMod val="120000"/>
+              </a:schemeClr>
+            </a:gs>
+          </a:gsLst>
+          <a:lin ang="5400000" scaled="0"/>
+        </a:gradFill>
+      </a:bgFillStyleLst>
+    </a:fmtScheme>
+  </a:themeElements>
+  <a:objectDefaults>
+    <a:lnDef>
+      <a:spPr/>
+      <a:bodyPr/>
+      <a:lstStyle/>
+      <a:style>
+        <a:lnRef idx="2">
+          <a:schemeClr val="accent1"/>
+        </a:lnRef>
+        <a:fillRef idx="0">
+          <a:schemeClr val="accent1"/>
+        </a:fillRef>
+        <a:effectRef idx="1">
+          <a:schemeClr val="accent1"/>
+        </a:effectRef>
+        <a:fontRef idx="minor">
+          <a:schemeClr val="tx1"/>
+        </a:fontRef>
+      </a:style>
+    </a:lnDef>
+  </a:objectDefaults>
+  <a:extraClrSchemeLst/>
+  <a:extLst>
+    <a:ext uri="{05A4C25C-085E-4340-85A3-A5531E510DB2}">
+      <thm15:themeFamily xmlns:thm15="http://schemas.microsoft.com/office/thememl/2012/main" name="Office Theme" id="{2E142A2C-CD16-42D6-873A-C26D2A0506FA}" vid="{1BDDFF52-6CD6-40A5-AB3C-68EB2F1E4D0A}"/>
+    </a:ext>
+  </a:extLst>
+</a:theme>
 </file>
--- a/Conference/GraphicsStudy/GraphicsHighLevelDesign.pptx
+++ b/Conference/GraphicsStudy/GraphicsHighLevelDesign.pptx
@@ -5,7 +5,7 @@
     <p:sldMasterId id="2147483648" r:id="rId1"/>
   </p:sldMasterIdLst>
   <p:notesMasterIdLst>
-    <p:notesMasterId r:id="rId36"/>
+    <p:notesMasterId r:id="rId40"/>
   </p:notesMasterIdLst>
   <p:sldIdLst>
     <p:sldId id="256" r:id="rId2"/>
@@ -31,17 +31,21 @@
     <p:sldId id="275" r:id="rId22"/>
     <p:sldId id="276" r:id="rId23"/>
     <p:sldId id="262" r:id="rId24"/>
-    <p:sldId id="259" r:id="rId25"/>
-    <p:sldId id="260" r:id="rId26"/>
-    <p:sldId id="278" r:id="rId27"/>
-    <p:sldId id="283" r:id="rId28"/>
-    <p:sldId id="279" r:id="rId29"/>
-    <p:sldId id="284" r:id="rId30"/>
-    <p:sldId id="285" r:id="rId31"/>
-    <p:sldId id="281" r:id="rId32"/>
-    <p:sldId id="287" r:id="rId33"/>
-    <p:sldId id="288" r:id="rId34"/>
-    <p:sldId id="289" r:id="rId35"/>
+    <p:sldId id="290" r:id="rId25"/>
+    <p:sldId id="291" r:id="rId26"/>
+    <p:sldId id="292" r:id="rId27"/>
+    <p:sldId id="293" r:id="rId28"/>
+    <p:sldId id="259" r:id="rId29"/>
+    <p:sldId id="260" r:id="rId30"/>
+    <p:sldId id="278" r:id="rId31"/>
+    <p:sldId id="283" r:id="rId32"/>
+    <p:sldId id="279" r:id="rId33"/>
+    <p:sldId id="284" r:id="rId34"/>
+    <p:sldId id="285" r:id="rId35"/>
+    <p:sldId id="281" r:id="rId36"/>
+    <p:sldId id="287" r:id="rId37"/>
+    <p:sldId id="288" r:id="rId38"/>
+    <p:sldId id="289" r:id="rId39"/>
   </p:sldIdLst>
   <p:sldSz cx="12192000" cy="6858000"/>
   <p:notesSz cx="6858000" cy="9144000"/>
@@ -230,7 +234,7 @@
           <a:p>
             <a:fld id="{708C81D3-5E4D-495D-8DE1-4F2327BCEE89}" type="datetimeFigureOut">
               <a:rPr lang="ko-KR" altLang="en-US" smtClean="0"/>
-              <a:t>2026-04-09</a:t>
+              <a:t>2026-04-13</a:t>
             </a:fld>
             <a:endParaRPr lang="ko-KR" altLang="en-US"/>
           </a:p>
@@ -562,7 +566,7 @@
           <a:p>
             <a:fld id="{DF195A5E-4983-45AC-854B-86DE2CB70077}" type="slidenum">
               <a:rPr lang="ko-KR" altLang="en-US" smtClean="0"/>
-              <a:t>33</a:t>
+              <a:t>37</a:t>
             </a:fld>
             <a:endParaRPr lang="ko-KR" altLang="en-US"/>
           </a:p>
@@ -728,7 +732,7 @@
           <a:p>
             <a:fld id="{D8810A9B-0CC6-4053-BA0B-965178095DC3}" type="datetimeFigureOut">
               <a:rPr lang="ko-KR" altLang="en-US" smtClean="0"/>
-              <a:t>2026-04-09</a:t>
+              <a:t>2026-04-13</a:t>
             </a:fld>
             <a:endParaRPr lang="ko-KR" altLang="en-US"/>
           </a:p>
@@ -926,7 +930,7 @@
           <a:p>
             <a:fld id="{D8810A9B-0CC6-4053-BA0B-965178095DC3}" type="datetimeFigureOut">
               <a:rPr lang="ko-KR" altLang="en-US" smtClean="0"/>
-              <a:t>2026-04-09</a:t>
+              <a:t>2026-04-13</a:t>
             </a:fld>
             <a:endParaRPr lang="ko-KR" altLang="en-US"/>
           </a:p>
@@ -1134,7 +1138,7 @@
           <a:p>
             <a:fld id="{D8810A9B-0CC6-4053-BA0B-965178095DC3}" type="datetimeFigureOut">
               <a:rPr lang="ko-KR" altLang="en-US" smtClean="0"/>
-              <a:t>2026-04-09</a:t>
+              <a:t>2026-04-13</a:t>
             </a:fld>
             <a:endParaRPr lang="ko-KR" altLang="en-US"/>
           </a:p>
@@ -1208,7 +1212,7 @@
 </file>
 
 <file path=ppt/slideLayouts/slideLayout2.xml><?xml version="1.0" encoding="utf-8"?>
-<p:sldLayout xmlns:a="http://schemas.openxmlformats.org/drawingml/2006/main" xmlns:r="http://schemas.openxmlformats.org/officeDocument/2006/relationships" xmlns:p="http://schemas.openxmlformats.org/presentationml/2006/main" type="obj" preserve="1">
+<p:sldLayout xmlns:a="http://schemas.openxmlformats.org/drawingml/2006/main" xmlns:r="http://schemas.openxmlformats.org/officeDocument/2006/relationships" xmlns:p="http://schemas.openxmlformats.org/presentationml/2006/main" preserve="1" userDrawn="1">
   <p:cSld name="제목 및 내용">
     <p:spTree>
       <p:nvGrpSpPr>
@@ -1224,174 +1228,6 @@
           <a:chExt cx="0" cy="0"/>
         </a:xfrm>
       </p:grpSpPr>
-      <p:sp>
-        <p:nvSpPr>
-          <p:cNvPr id="2" name="제목 1">
-            <a:extLst>
-              <a:ext uri="{FF2B5EF4-FFF2-40B4-BE49-F238E27FC236}">
-                <a16:creationId xmlns:a16="http://schemas.microsoft.com/office/drawing/2014/main" id="{B29F4E73-0AEA-7FF5-52FF-5457F6EEDFAF}"/>
-              </a:ext>
-            </a:extLst>
-          </p:cNvPr>
-          <p:cNvSpPr>
-            <a:spLocks noGrp="1"/>
-          </p:cNvSpPr>
-          <p:nvPr>
-            <p:ph type="title"/>
-          </p:nvPr>
-        </p:nvSpPr>
-        <p:spPr/>
-        <p:txBody>
-          <a:bodyPr/>
-          <a:lstStyle/>
-          <a:p>
-            <a:r>
-              <a:rPr lang="ko-KR" altLang="en-US"/>
-              <a:t>마스터 제목 스타일 편집</a:t>
-            </a:r>
-          </a:p>
-        </p:txBody>
-      </p:sp>
-      <p:sp>
-        <p:nvSpPr>
-          <p:cNvPr id="3" name="내용 개체 틀 2">
-            <a:extLst>
-              <a:ext uri="{FF2B5EF4-FFF2-40B4-BE49-F238E27FC236}">
-                <a16:creationId xmlns:a16="http://schemas.microsoft.com/office/drawing/2014/main" id="{2553178C-91E5-5D4C-CAA8-062A4AAB80D5}"/>
-              </a:ext>
-            </a:extLst>
-          </p:cNvPr>
-          <p:cNvSpPr>
-            <a:spLocks noGrp="1"/>
-          </p:cNvSpPr>
-          <p:nvPr>
-            <p:ph idx="1"/>
-          </p:nvPr>
-        </p:nvSpPr>
-        <p:spPr/>
-        <p:txBody>
-          <a:bodyPr/>
-          <a:lstStyle/>
-          <a:p>
-            <a:pPr lvl="0"/>
-            <a:r>
-              <a:rPr lang="ko-KR" altLang="en-US"/>
-              <a:t>마스터 텍스트 스타일을 편집하려면 클릭</a:t>
-            </a:r>
-          </a:p>
-          <a:p>
-            <a:pPr lvl="1"/>
-            <a:r>
-              <a:rPr lang="ko-KR" altLang="en-US"/>
-              <a:t>두 번째 수준</a:t>
-            </a:r>
-          </a:p>
-          <a:p>
-            <a:pPr lvl="2"/>
-            <a:r>
-              <a:rPr lang="ko-KR" altLang="en-US"/>
-              <a:t>세 번째 수준</a:t>
-            </a:r>
-          </a:p>
-          <a:p>
-            <a:pPr lvl="3"/>
-            <a:r>
-              <a:rPr lang="ko-KR" altLang="en-US"/>
-              <a:t>네 번째 수준</a:t>
-            </a:r>
-          </a:p>
-          <a:p>
-            <a:pPr lvl="4"/>
-            <a:r>
-              <a:rPr lang="ko-KR" altLang="en-US"/>
-              <a:t>다섯 번째 수준</a:t>
-            </a:r>
-          </a:p>
-        </p:txBody>
-      </p:sp>
-      <p:sp>
-        <p:nvSpPr>
-          <p:cNvPr id="4" name="날짜 개체 틀 3">
-            <a:extLst>
-              <a:ext uri="{FF2B5EF4-FFF2-40B4-BE49-F238E27FC236}">
-                <a16:creationId xmlns:a16="http://schemas.microsoft.com/office/drawing/2014/main" id="{D8A52C38-2A74-3DBD-C1D7-02ABBF5D3430}"/>
-              </a:ext>
-            </a:extLst>
-          </p:cNvPr>
-          <p:cNvSpPr>
-            <a:spLocks noGrp="1"/>
-          </p:cNvSpPr>
-          <p:nvPr>
-            <p:ph type="dt" sz="half" idx="10"/>
-          </p:nvPr>
-        </p:nvSpPr>
-        <p:spPr/>
-        <p:txBody>
-          <a:bodyPr/>
-          <a:lstStyle/>
-          <a:p>
-            <a:fld id="{D8810A9B-0CC6-4053-BA0B-965178095DC3}" type="datetimeFigureOut">
-              <a:rPr lang="ko-KR" altLang="en-US" smtClean="0"/>
-              <a:t>2026-04-09</a:t>
-            </a:fld>
-            <a:endParaRPr lang="ko-KR" altLang="en-US"/>
-          </a:p>
-        </p:txBody>
-      </p:sp>
-      <p:sp>
-        <p:nvSpPr>
-          <p:cNvPr id="5" name="바닥글 개체 틀 4">
-            <a:extLst>
-              <a:ext uri="{FF2B5EF4-FFF2-40B4-BE49-F238E27FC236}">
-                <a16:creationId xmlns:a16="http://schemas.microsoft.com/office/drawing/2014/main" id="{AF5674CD-85BE-303B-4583-A1C457606BEA}"/>
-              </a:ext>
-            </a:extLst>
-          </p:cNvPr>
-          <p:cNvSpPr>
-            <a:spLocks noGrp="1"/>
-          </p:cNvSpPr>
-          <p:nvPr>
-            <p:ph type="ftr" sz="quarter" idx="11"/>
-          </p:nvPr>
-        </p:nvSpPr>
-        <p:spPr/>
-        <p:txBody>
-          <a:bodyPr/>
-          <a:lstStyle/>
-          <a:p>
-            <a:endParaRPr lang="ko-KR" altLang="en-US"/>
-          </a:p>
-        </p:txBody>
-      </p:sp>
-      <p:sp>
-        <p:nvSpPr>
-          <p:cNvPr id="6" name="슬라이드 번호 개체 틀 5">
-            <a:extLst>
-              <a:ext uri="{FF2B5EF4-FFF2-40B4-BE49-F238E27FC236}">
-                <a16:creationId xmlns:a16="http://schemas.microsoft.com/office/drawing/2014/main" id="{C6CC368F-C738-A21E-D418-C142FFEF85AE}"/>
-              </a:ext>
-            </a:extLst>
-          </p:cNvPr>
-          <p:cNvSpPr>
-            <a:spLocks noGrp="1"/>
-          </p:cNvSpPr>
-          <p:nvPr>
-            <p:ph type="sldNum" sz="quarter" idx="12"/>
-          </p:nvPr>
-        </p:nvSpPr>
-        <p:spPr/>
-        <p:txBody>
-          <a:bodyPr/>
-          <a:lstStyle/>
-          <a:p>
-            <a:fld id="{8103D46D-42EC-4B9A-8C93-1DB66FB43B40}" type="slidenum">
-              <a:rPr lang="ko-KR" altLang="en-US" smtClean="0"/>
-              <a:t>‹#›</a:t>
-            </a:fld>
-            <a:endParaRPr lang="ko-KR" altLang="en-US"/>
-          </a:p>
-        </p:txBody>
-      </p:sp>
     </p:spTree>
     <p:extLst>
       <p:ext uri="{BB962C8B-B14F-4D97-AF65-F5344CB8AC3E}">
@@ -1607,7 +1443,7 @@
           <a:p>
             <a:fld id="{D8810A9B-0CC6-4053-BA0B-965178095DC3}" type="datetimeFigureOut">
               <a:rPr lang="ko-KR" altLang="en-US" smtClean="0"/>
-              <a:t>2026-04-09</a:t>
+              <a:t>2026-04-13</a:t>
             </a:fld>
             <a:endParaRPr lang="ko-KR" altLang="en-US"/>
           </a:p>
@@ -1872,7 +1708,7 @@
           <a:p>
             <a:fld id="{D8810A9B-0CC6-4053-BA0B-965178095DC3}" type="datetimeFigureOut">
               <a:rPr lang="ko-KR" altLang="en-US" smtClean="0"/>
-              <a:t>2026-04-09</a:t>
+              <a:t>2026-04-13</a:t>
             </a:fld>
             <a:endParaRPr lang="ko-KR" altLang="en-US"/>
           </a:p>
@@ -2284,7 +2120,7 @@
           <a:p>
             <a:fld id="{D8810A9B-0CC6-4053-BA0B-965178095DC3}" type="datetimeFigureOut">
               <a:rPr lang="ko-KR" altLang="en-US" smtClean="0"/>
-              <a:t>2026-04-09</a:t>
+              <a:t>2026-04-13</a:t>
             </a:fld>
             <a:endParaRPr lang="ko-KR" altLang="en-US"/>
           </a:p>
@@ -2425,7 +2261,7 @@
           <a:p>
             <a:fld id="{D8810A9B-0CC6-4053-BA0B-965178095DC3}" type="datetimeFigureOut">
               <a:rPr lang="ko-KR" altLang="en-US" smtClean="0"/>
-              <a:t>2026-04-09</a:t>
+              <a:t>2026-04-13</a:t>
             </a:fld>
             <a:endParaRPr lang="ko-KR" altLang="en-US"/>
           </a:p>
@@ -2538,7 +2374,7 @@
           <a:p>
             <a:fld id="{D8810A9B-0CC6-4053-BA0B-965178095DC3}" type="datetimeFigureOut">
               <a:rPr lang="ko-KR" altLang="en-US" smtClean="0"/>
-              <a:t>2026-04-09</a:t>
+              <a:t>2026-04-13</a:t>
             </a:fld>
             <a:endParaRPr lang="ko-KR" altLang="en-US"/>
           </a:p>
@@ -2849,7 +2685,7 @@
           <a:p>
             <a:fld id="{D8810A9B-0CC6-4053-BA0B-965178095DC3}" type="datetimeFigureOut">
               <a:rPr lang="ko-KR" altLang="en-US" smtClean="0"/>
-              <a:t>2026-04-09</a:t>
+              <a:t>2026-04-13</a:t>
             </a:fld>
             <a:endParaRPr lang="ko-KR" altLang="en-US"/>
           </a:p>
@@ -3137,7 +2973,7 @@
           <a:p>
             <a:fld id="{D8810A9B-0CC6-4053-BA0B-965178095DC3}" type="datetimeFigureOut">
               <a:rPr lang="ko-KR" altLang="en-US" smtClean="0"/>
-              <a:t>2026-04-09</a:t>
+              <a:t>2026-04-13</a:t>
             </a:fld>
             <a:endParaRPr lang="ko-KR" altLang="en-US"/>
           </a:p>
@@ -3378,7 +3214,7 @@
           <a:p>
             <a:fld id="{D8810A9B-0CC6-4053-BA0B-965178095DC3}" type="datetimeFigureOut">
               <a:rPr lang="ko-KR" altLang="en-US" smtClean="0"/>
-              <a:t>2026-04-09</a:t>
+              <a:t>2026-04-13</a:t>
             </a:fld>
             <a:endParaRPr lang="ko-KR" altLang="en-US"/>
           </a:p>
@@ -3916,7 +3752,7 @@
             <a:spLocks noGrp="1"/>
           </p:cNvSpPr>
           <p:nvPr>
-            <p:ph type="title"/>
+            <p:ph type="title" idx="4294967295"/>
           </p:nvPr>
         </p:nvSpPr>
         <p:spPr>
@@ -4032,7 +3868,7 @@
             <a:spLocks noGrp="1"/>
           </p:cNvSpPr>
           <p:nvPr>
-            <p:ph type="title"/>
+            <p:ph type="title" idx="4294967295"/>
           </p:nvPr>
         </p:nvSpPr>
         <p:spPr>
@@ -4104,7 +3940,7 @@
             <a:spLocks noGrp="1"/>
           </p:cNvSpPr>
           <p:nvPr>
-            <p:ph type="title"/>
+            <p:ph type="title" idx="4294967295"/>
           </p:nvPr>
         </p:nvSpPr>
         <p:spPr>
@@ -4220,7 +4056,7 @@
             <a:spLocks noGrp="1"/>
           </p:cNvSpPr>
           <p:nvPr>
-            <p:ph type="title"/>
+            <p:ph type="title" idx="4294967295"/>
           </p:nvPr>
         </p:nvSpPr>
         <p:spPr>
@@ -4292,7 +4128,7 @@
             <a:spLocks noGrp="1"/>
           </p:cNvSpPr>
           <p:nvPr>
-            <p:ph type="title"/>
+            <p:ph type="title" idx="4294967295"/>
           </p:nvPr>
         </p:nvSpPr>
         <p:spPr>
@@ -4364,7 +4200,7 @@
             <a:spLocks noGrp="1"/>
           </p:cNvSpPr>
           <p:nvPr>
-            <p:ph type="title"/>
+            <p:ph type="title" idx="4294967295"/>
           </p:nvPr>
         </p:nvSpPr>
         <p:spPr>
@@ -4436,7 +4272,7 @@
             <a:spLocks noGrp="1"/>
           </p:cNvSpPr>
           <p:nvPr>
-            <p:ph type="title"/>
+            <p:ph type="title" idx="4294967295"/>
           </p:nvPr>
         </p:nvSpPr>
         <p:spPr>
@@ -4512,7 +4348,7 @@
             <a:spLocks noGrp="1"/>
           </p:cNvSpPr>
           <p:nvPr>
-            <p:ph type="title"/>
+            <p:ph type="title" idx="4294967295"/>
           </p:nvPr>
         </p:nvSpPr>
         <p:spPr>
@@ -4584,7 +4420,7 @@
             <a:spLocks noGrp="1"/>
           </p:cNvSpPr>
           <p:nvPr>
-            <p:ph type="title"/>
+            <p:ph type="title" idx="4294967295"/>
           </p:nvPr>
         </p:nvSpPr>
         <p:spPr>
@@ -5262,7 +5098,7 @@
             <a:spLocks noGrp="1"/>
           </p:cNvSpPr>
           <p:nvPr>
-            <p:ph type="title"/>
+            <p:ph type="title" idx="4294967295"/>
           </p:nvPr>
         </p:nvSpPr>
         <p:spPr>
@@ -5978,7 +5814,7 @@
             <a:spLocks noGrp="1"/>
           </p:cNvSpPr>
           <p:nvPr>
-            <p:ph type="title"/>
+            <p:ph type="title" idx="4294967295"/>
           </p:nvPr>
         </p:nvSpPr>
         <p:spPr>
@@ -6339,7 +6175,7 @@
             <a:spLocks noGrp="1"/>
           </p:cNvSpPr>
           <p:nvPr>
-            <p:ph type="title"/>
+            <p:ph type="title" idx="4294967295"/>
           </p:nvPr>
         </p:nvSpPr>
         <p:spPr>
@@ -6869,7 +6705,7 @@
             <a:spLocks noGrp="1"/>
           </p:cNvSpPr>
           <p:nvPr>
-            <p:ph type="title"/>
+            <p:ph type="title" idx="4294967295"/>
           </p:nvPr>
         </p:nvSpPr>
         <p:spPr>
@@ -6941,7 +6777,7 @@
             <a:spLocks noGrp="1"/>
           </p:cNvSpPr>
           <p:nvPr>
-            <p:ph type="title"/>
+            <p:ph type="title" idx="4294967295"/>
           </p:nvPr>
         </p:nvSpPr>
         <p:spPr>
@@ -7017,7 +6853,7 @@
             <a:spLocks noGrp="1"/>
           </p:cNvSpPr>
           <p:nvPr>
-            <p:ph type="title"/>
+            <p:ph type="title" idx="4294967295"/>
           </p:nvPr>
         </p:nvSpPr>
         <p:spPr>
@@ -7040,6 +6876,103 @@
           </a:p>
         </p:txBody>
       </p:sp>
+      <mc:AlternateContent xmlns:mc="http://schemas.openxmlformats.org/markup-compatibility/2006" xmlns:pslz="http://schemas.microsoft.com/office/powerpoint/2016/slidezoom">
+        <mc:Choice Requires="pslz">
+          <p:graphicFrame>
+            <p:nvGraphicFramePr>
+              <p:cNvPr id="4" name="슬라이드 확대/축소 3">
+                <a:extLst>
+                  <a:ext uri="{FF2B5EF4-FFF2-40B4-BE49-F238E27FC236}">
+                    <a16:creationId xmlns:a16="http://schemas.microsoft.com/office/drawing/2014/main" id="{D987D80D-0EE6-0BE3-6EC8-CB606ACCC617}"/>
+                  </a:ext>
+                </a:extLst>
+              </p:cNvPr>
+              <p:cNvGraphicFramePr>
+                <a:graphicFrameLocks noChangeAspect="1"/>
+              </p:cNvGraphicFramePr>
+              <p:nvPr>
+                <p:extLst>
+                  <p:ext uri="{D42A27DB-BD31-4B8C-83A1-F6EECF244321}">
+                    <p14:modId xmlns:p14="http://schemas.microsoft.com/office/powerpoint/2010/main" val="384271985"/>
+                  </p:ext>
+                </p:extLst>
+              </p:nvPr>
+            </p:nvGraphicFramePr>
+            <p:xfrm>
+              <a:off x="228600" y="1011305"/>
+              <a:ext cx="9881706" cy="5558460"/>
+            </p:xfrm>
+            <a:graphic>
+              <a:graphicData uri="http://schemas.microsoft.com/office/powerpoint/2016/slidezoom">
+                <pslz:sldZm>
+                  <pslz:sldZmObj sldId="290" cId="53786630">
+                    <pslz:zmPr id="{DDBEFDEF-232B-4277-A610-6EE99BB4F3A1}" returnToParent="0" transitionDur="1000">
+                      <p166:blipFill xmlns:p166="http://schemas.microsoft.com/office/powerpoint/2016/6/main">
+                        <a:blip r:embed="rId2"/>
+                        <a:stretch>
+                          <a:fillRect/>
+                        </a:stretch>
+                      </p166:blipFill>
+                      <p166:spPr xmlns:p166="http://schemas.microsoft.com/office/powerpoint/2016/6/main">
+                        <a:xfrm>
+                          <a:off x="0" y="0"/>
+                          <a:ext cx="9881706" cy="5558460"/>
+                        </a:xfrm>
+                        <a:prstGeom prst="rect">
+                          <a:avLst/>
+                        </a:prstGeom>
+                        <a:ln w="3175">
+                          <a:solidFill>
+                            <a:prstClr val="ltGray"/>
+                          </a:solidFill>
+                        </a:ln>
+                      </p166:spPr>
+                    </pslz:zmPr>
+                  </pslz:sldZmObj>
+                </pslz:sldZm>
+              </a:graphicData>
+            </a:graphic>
+          </p:graphicFrame>
+        </mc:Choice>
+        <mc:Fallback xmlns="">
+          <p:pic>
+            <p:nvPicPr>
+              <p:cNvPr id="4" name="슬라이드 확대/축소 3">
+                <a:hlinkClick r:id="rId3" action="ppaction://hlinksldjump"/>
+                <a:extLst>
+                  <a:ext uri="{FF2B5EF4-FFF2-40B4-BE49-F238E27FC236}">
+                    <a16:creationId xmlns:a16="http://schemas.microsoft.com/office/drawing/2014/main" id="{D987D80D-0EE6-0BE3-6EC8-CB606ACCC617}"/>
+                  </a:ext>
+                </a:extLst>
+              </p:cNvPr>
+              <p:cNvPicPr>
+                <a:picLocks noGrp="1" noRot="1" noChangeAspect="1" noMove="1" noResize="1" noEditPoints="1" noAdjustHandles="1" noChangeArrowheads="1" noChangeShapeType="1"/>
+              </p:cNvPicPr>
+              <p:nvPr/>
+            </p:nvPicPr>
+            <p:blipFill>
+              <a:blip r:embed="rId4"/>
+              <a:stretch>
+                <a:fillRect/>
+              </a:stretch>
+            </p:blipFill>
+            <p:spPr>
+              <a:xfrm>
+                <a:off x="228600" y="1011305"/>
+                <a:ext cx="9881706" cy="5558460"/>
+              </a:xfrm>
+              <a:prstGeom prst="rect">
+                <a:avLst/>
+              </a:prstGeom>
+              <a:ln w="3175">
+                <a:solidFill>
+                  <a:prstClr val="ltGray"/>
+                </a:solidFill>
+              </a:ln>
+            </p:spPr>
+          </p:pic>
+        </mc:Fallback>
+      </mc:AlternateContent>
     </p:spTree>
     <p:extLst>
       <p:ext uri="{BB962C8B-B14F-4D97-AF65-F5344CB8AC3E}">
@@ -7054,6 +6987,3976 @@
 </file>
 
 <file path=ppt/slides/slide24.xml><?xml version="1.0" encoding="utf-8"?>
+<p:sld xmlns:a="http://schemas.openxmlformats.org/drawingml/2006/main" xmlns:r="http://schemas.openxmlformats.org/officeDocument/2006/relationships" xmlns:p="http://schemas.openxmlformats.org/presentationml/2006/main">
+  <p:cSld>
+    <p:spTree>
+      <p:nvGrpSpPr>
+        <p:cNvPr id="1" name=""/>
+        <p:cNvGrpSpPr/>
+        <p:nvPr/>
+      </p:nvGrpSpPr>
+      <p:grpSpPr>
+        <a:xfrm>
+          <a:off x="0" y="0"/>
+          <a:ext cx="0" cy="0"/>
+          <a:chOff x="0" y="0"/>
+          <a:chExt cx="0" cy="0"/>
+        </a:xfrm>
+      </p:grpSpPr>
+      <p:sp>
+        <p:nvSpPr>
+          <p:cNvPr id="21" name="TextBox 20">
+            <a:extLst>
+              <a:ext uri="{FF2B5EF4-FFF2-40B4-BE49-F238E27FC236}">
+                <a16:creationId xmlns:a16="http://schemas.microsoft.com/office/drawing/2014/main" id="{725FC84E-5001-D609-3CBA-91CEC1EDE130}"/>
+              </a:ext>
+            </a:extLst>
+          </p:cNvPr>
+          <p:cNvSpPr txBox="1"/>
+          <p:nvPr/>
+        </p:nvSpPr>
+        <p:spPr>
+          <a:xfrm>
+            <a:off x="2598615" y="3959033"/>
+            <a:ext cx="4358776" cy="2444972"/>
+          </a:xfrm>
+          <a:prstGeom prst="rect">
+            <a:avLst/>
+          </a:prstGeom>
+          <a:noFill/>
+          <a:ln w="25400">
+            <a:solidFill>
+              <a:schemeClr val="tx1"/>
+            </a:solidFill>
+          </a:ln>
+        </p:spPr>
+        <p:txBody>
+          <a:bodyPr wrap="square" rtlCol="0">
+            <a:spAutoFit/>
+          </a:bodyPr>
+          <a:lstStyle/>
+          <a:p>
+            <a:endParaRPr lang="ko-KR" altLang="en-US" dirty="0"/>
+          </a:p>
+        </p:txBody>
+      </p:sp>
+      <p:sp>
+        <p:nvSpPr>
+          <p:cNvPr id="2" name="제목 1">
+            <a:extLst>
+              <a:ext uri="{FF2B5EF4-FFF2-40B4-BE49-F238E27FC236}">
+                <a16:creationId xmlns:a16="http://schemas.microsoft.com/office/drawing/2014/main" id="{E89AA414-D269-BA3B-EDE8-410C2E5D5420}"/>
+              </a:ext>
+            </a:extLst>
+          </p:cNvPr>
+          <p:cNvSpPr txBox="1">
+            <a:spLocks/>
+          </p:cNvSpPr>
+          <p:nvPr/>
+        </p:nvSpPr>
+        <p:spPr>
+          <a:xfrm>
+            <a:off x="0" y="18255"/>
+            <a:ext cx="10515600" cy="850425"/>
+          </a:xfrm>
+          <a:prstGeom prst="rect">
+            <a:avLst/>
+          </a:prstGeom>
+        </p:spPr>
+        <p:txBody>
+          <a:bodyPr vert="horz" lIns="91440" tIns="45720" rIns="91440" bIns="45720" rtlCol="0" anchor="ctr">
+            <a:normAutofit/>
+          </a:bodyPr>
+          <a:lstStyle>
+            <a:lvl1pPr algn="l" defTabSz="914400" rtl="0" eaLnBrk="1" latinLnBrk="1" hangingPunct="1">
+              <a:lnSpc>
+                <a:spcPct val="90000"/>
+              </a:lnSpc>
+              <a:spcBef>
+                <a:spcPct val="0"/>
+              </a:spcBef>
+              <a:buNone/>
+              <a:defRPr sz="4400" kern="1200">
+                <a:solidFill>
+                  <a:schemeClr val="tx1"/>
+                </a:solidFill>
+                <a:latin typeface="+mj-lt"/>
+                <a:ea typeface="+mj-ea"/>
+                <a:cs typeface="+mj-cs"/>
+              </a:defRPr>
+            </a:lvl1pPr>
+          </a:lstStyle>
+          <a:p>
+            <a:r>
+              <a:rPr lang="en-US" altLang="ko-KR" sz="5400"/>
+              <a:t>UI System</a:t>
+            </a:r>
+            <a:endParaRPr lang="ko-KR" altLang="en-US" sz="5400" dirty="0"/>
+          </a:p>
+        </p:txBody>
+      </p:sp>
+      <p:sp>
+        <p:nvSpPr>
+          <p:cNvPr id="3" name="TextBox 2">
+            <a:extLst>
+              <a:ext uri="{FF2B5EF4-FFF2-40B4-BE49-F238E27FC236}">
+                <a16:creationId xmlns:a16="http://schemas.microsoft.com/office/drawing/2014/main" id="{96769BFB-CDA3-6465-4FC4-C21087A12300}"/>
+              </a:ext>
+            </a:extLst>
+          </p:cNvPr>
+          <p:cNvSpPr txBox="1"/>
+          <p:nvPr/>
+        </p:nvSpPr>
+        <p:spPr>
+          <a:xfrm>
+            <a:off x="249664" y="3002735"/>
+            <a:ext cx="1320715" cy="646331"/>
+          </a:xfrm>
+          <a:prstGeom prst="rect">
+            <a:avLst/>
+          </a:prstGeom>
+          <a:noFill/>
+          <a:ln w="25400">
+            <a:solidFill>
+              <a:schemeClr val="tx1"/>
+            </a:solidFill>
+          </a:ln>
+        </p:spPr>
+        <p:txBody>
+          <a:bodyPr wrap="square" rtlCol="0">
+            <a:spAutoFit/>
+          </a:bodyPr>
+          <a:lstStyle/>
+          <a:p>
+            <a:r>
+              <a:rPr lang="en-US" altLang="ko-KR"/>
+              <a:t>Main</a:t>
+            </a:r>
+            <a:r>
+              <a:rPr lang="ko-KR" altLang="en-US"/>
+              <a:t> </a:t>
+            </a:r>
+            <a:r>
+              <a:rPr lang="en-US" altLang="ko-KR"/>
+              <a:t>PageStack</a:t>
+            </a:r>
+            <a:endParaRPr lang="ko-KR" altLang="en-US" dirty="0"/>
+          </a:p>
+        </p:txBody>
+      </p:sp>
+      <p:sp>
+        <p:nvSpPr>
+          <p:cNvPr id="4" name="TextBox 3">
+            <a:extLst>
+              <a:ext uri="{FF2B5EF4-FFF2-40B4-BE49-F238E27FC236}">
+                <a16:creationId xmlns:a16="http://schemas.microsoft.com/office/drawing/2014/main" id="{34ADC134-7754-E0E3-7E4C-134D83EA462E}"/>
+              </a:ext>
+            </a:extLst>
+          </p:cNvPr>
+          <p:cNvSpPr txBox="1"/>
+          <p:nvPr/>
+        </p:nvSpPr>
+        <p:spPr>
+          <a:xfrm>
+            <a:off x="249667" y="2158540"/>
+            <a:ext cx="1320715" cy="369332"/>
+          </a:xfrm>
+          <a:prstGeom prst="rect">
+            <a:avLst/>
+          </a:prstGeom>
+          <a:noFill/>
+          <a:ln w="25400">
+            <a:solidFill>
+              <a:schemeClr val="tx1"/>
+            </a:solidFill>
+          </a:ln>
+        </p:spPr>
+        <p:txBody>
+          <a:bodyPr wrap="square" rtlCol="0">
+            <a:spAutoFit/>
+          </a:bodyPr>
+          <a:lstStyle/>
+          <a:p>
+            <a:r>
+              <a:rPr lang="en-US" altLang="ko-KR"/>
+              <a:t>mainpage</a:t>
+            </a:r>
+            <a:endParaRPr lang="ko-KR" altLang="en-US" dirty="0"/>
+          </a:p>
+        </p:txBody>
+      </p:sp>
+      <p:sp>
+        <p:nvSpPr>
+          <p:cNvPr id="5" name="TextBox 4">
+            <a:extLst>
+              <a:ext uri="{FF2B5EF4-FFF2-40B4-BE49-F238E27FC236}">
+                <a16:creationId xmlns:a16="http://schemas.microsoft.com/office/drawing/2014/main" id="{E20573FA-E2EC-7C85-2553-DCEED84834F6}"/>
+              </a:ext>
+            </a:extLst>
+          </p:cNvPr>
+          <p:cNvSpPr txBox="1"/>
+          <p:nvPr/>
+        </p:nvSpPr>
+        <p:spPr>
+          <a:xfrm>
+            <a:off x="249666" y="1789208"/>
+            <a:ext cx="1320715" cy="369332"/>
+          </a:xfrm>
+          <a:prstGeom prst="rect">
+            <a:avLst/>
+          </a:prstGeom>
+          <a:noFill/>
+          <a:ln w="25400">
+            <a:solidFill>
+              <a:schemeClr val="tx1"/>
+            </a:solidFill>
+          </a:ln>
+        </p:spPr>
+        <p:txBody>
+          <a:bodyPr wrap="square" rtlCol="0">
+            <a:spAutoFit/>
+          </a:bodyPr>
+          <a:lstStyle/>
+          <a:p>
+            <a:r>
+              <a:rPr lang="en-US" altLang="ko-KR"/>
+              <a:t>subpage0</a:t>
+            </a:r>
+            <a:endParaRPr lang="ko-KR" altLang="en-US" dirty="0"/>
+          </a:p>
+        </p:txBody>
+      </p:sp>
+      <p:sp>
+        <p:nvSpPr>
+          <p:cNvPr id="6" name="TextBox 5">
+            <a:extLst>
+              <a:ext uri="{FF2B5EF4-FFF2-40B4-BE49-F238E27FC236}">
+                <a16:creationId xmlns:a16="http://schemas.microsoft.com/office/drawing/2014/main" id="{FC11EC5B-DBDF-33A0-2E00-05E55D365A7A}"/>
+              </a:ext>
+            </a:extLst>
+          </p:cNvPr>
+          <p:cNvSpPr txBox="1"/>
+          <p:nvPr/>
+        </p:nvSpPr>
+        <p:spPr>
+          <a:xfrm>
+            <a:off x="249665" y="1419876"/>
+            <a:ext cx="1320715" cy="369332"/>
+          </a:xfrm>
+          <a:prstGeom prst="rect">
+            <a:avLst/>
+          </a:prstGeom>
+          <a:noFill/>
+          <a:ln w="25400">
+            <a:solidFill>
+              <a:schemeClr val="tx1"/>
+            </a:solidFill>
+          </a:ln>
+        </p:spPr>
+        <p:txBody>
+          <a:bodyPr wrap="square" rtlCol="0">
+            <a:spAutoFit/>
+          </a:bodyPr>
+          <a:lstStyle/>
+          <a:p>
+            <a:r>
+              <a:rPr lang="en-US" altLang="ko-KR"/>
+              <a:t>subpage1</a:t>
+            </a:r>
+            <a:endParaRPr lang="ko-KR" altLang="en-US" dirty="0"/>
+          </a:p>
+        </p:txBody>
+      </p:sp>
+      <p:sp>
+        <p:nvSpPr>
+          <p:cNvPr id="7" name="TextBox 6">
+            <a:extLst>
+              <a:ext uri="{FF2B5EF4-FFF2-40B4-BE49-F238E27FC236}">
+                <a16:creationId xmlns:a16="http://schemas.microsoft.com/office/drawing/2014/main" id="{48859A53-F8D1-7ECB-D191-CD27F6624B2E}"/>
+              </a:ext>
+            </a:extLst>
+          </p:cNvPr>
+          <p:cNvSpPr txBox="1"/>
+          <p:nvPr/>
+        </p:nvSpPr>
+        <p:spPr>
+          <a:xfrm>
+            <a:off x="249664" y="1050544"/>
+            <a:ext cx="1320715" cy="369332"/>
+          </a:xfrm>
+          <a:prstGeom prst="rect">
+            <a:avLst/>
+          </a:prstGeom>
+          <a:noFill/>
+          <a:ln w="25400">
+            <a:solidFill>
+              <a:schemeClr val="tx1"/>
+            </a:solidFill>
+          </a:ln>
+        </p:spPr>
+        <p:txBody>
+          <a:bodyPr wrap="square" rtlCol="0">
+            <a:spAutoFit/>
+          </a:bodyPr>
+          <a:lstStyle/>
+          <a:p>
+            <a:r>
+              <a:rPr lang="en-US" altLang="ko-KR"/>
+              <a:t>...</a:t>
+            </a:r>
+            <a:endParaRPr lang="ko-KR" altLang="en-US" dirty="0"/>
+          </a:p>
+        </p:txBody>
+      </p:sp>
+      <p:cxnSp>
+        <p:nvCxnSpPr>
+          <p:cNvPr id="8" name="직선 화살표 연결선 7">
+            <a:extLst>
+              <a:ext uri="{FF2B5EF4-FFF2-40B4-BE49-F238E27FC236}">
+                <a16:creationId xmlns:a16="http://schemas.microsoft.com/office/drawing/2014/main" id="{7AA26241-78CC-13D5-2F83-B2DA6900C3ED}"/>
+              </a:ext>
+            </a:extLst>
+          </p:cNvPr>
+          <p:cNvCxnSpPr>
+            <a:cxnSpLocks/>
+          </p:cNvCxnSpPr>
+          <p:nvPr/>
+        </p:nvCxnSpPr>
+        <p:spPr>
+          <a:xfrm flipV="1">
+            <a:off x="1709532" y="1050544"/>
+            <a:ext cx="0" cy="1016795"/>
+          </a:xfrm>
+          <a:prstGeom prst="straightConnector1">
+            <a:avLst/>
+          </a:prstGeom>
+          <a:ln w="47625">
+            <a:solidFill>
+              <a:schemeClr val="tx1"/>
+            </a:solidFill>
+            <a:tailEnd type="triangle"/>
+          </a:ln>
+        </p:spPr>
+        <p:style>
+          <a:lnRef idx="2">
+            <a:schemeClr val="accent1"/>
+          </a:lnRef>
+          <a:fillRef idx="0">
+            <a:schemeClr val="accent1"/>
+          </a:fillRef>
+          <a:effectRef idx="1">
+            <a:schemeClr val="accent1"/>
+          </a:effectRef>
+          <a:fontRef idx="minor">
+            <a:schemeClr val="tx1"/>
+          </a:fontRef>
+        </p:style>
+      </p:cxnSp>
+      <p:sp>
+        <p:nvSpPr>
+          <p:cNvPr id="11" name="TextBox 10">
+            <a:extLst>
+              <a:ext uri="{FF2B5EF4-FFF2-40B4-BE49-F238E27FC236}">
+                <a16:creationId xmlns:a16="http://schemas.microsoft.com/office/drawing/2014/main" id="{4F71D20B-71C1-9A7B-A336-45C7C1D61FD8}"/>
+              </a:ext>
+            </a:extLst>
+          </p:cNvPr>
+          <p:cNvSpPr txBox="1"/>
+          <p:nvPr/>
+        </p:nvSpPr>
+        <p:spPr>
+          <a:xfrm>
+            <a:off x="1746740" y="888751"/>
+            <a:ext cx="5030544" cy="1754326"/>
+          </a:xfrm>
+          <a:prstGeom prst="rect">
+            <a:avLst/>
+          </a:prstGeom>
+          <a:noFill/>
+        </p:spPr>
+        <p:txBody>
+          <a:bodyPr wrap="none" rtlCol="0">
+            <a:spAutoFit/>
+          </a:bodyPr>
+          <a:lstStyle/>
+          <a:p>
+            <a:r>
+              <a:rPr lang="ko-KR" altLang="en-US"/>
+              <a:t>페이지는 스택처럼 </a:t>
+            </a:r>
+            <a:r>
+              <a:rPr lang="en-US" altLang="ko-KR"/>
+              <a:t>Page</a:t>
+            </a:r>
+            <a:r>
+              <a:rPr lang="ko-KR" altLang="en-US"/>
+              <a:t>를 쌓아올릴 수 있다</a:t>
+            </a:r>
+            <a:endParaRPr lang="en-US" altLang="ko-KR"/>
+          </a:p>
+          <a:p>
+            <a:r>
+              <a:rPr lang="ko-KR" altLang="en-US"/>
+              <a:t>쌓아올라진 페이지는 아래 부터 출력한다</a:t>
+            </a:r>
+            <a:r>
+              <a:rPr lang="en-US" altLang="ko-KR"/>
+              <a:t>.</a:t>
+            </a:r>
+          </a:p>
+          <a:p>
+            <a:r>
+              <a:rPr lang="en-US" altLang="ko-KR"/>
+              <a:t>(</a:t>
+            </a:r>
+            <a:r>
+              <a:rPr lang="ko-KR" altLang="en-US"/>
+              <a:t>위가 가장 잘 보이게</a:t>
+            </a:r>
+            <a:r>
+              <a:rPr lang="en-US" altLang="ko-KR"/>
+              <a:t>.)</a:t>
+            </a:r>
+          </a:p>
+          <a:p>
+            <a:r>
+              <a:rPr lang="ko-KR" altLang="en-US"/>
+              <a:t>페이지를 전환할때는 페이지를 지우고 </a:t>
+            </a:r>
+            <a:endParaRPr lang="en-US" altLang="ko-KR"/>
+          </a:p>
+          <a:p>
+            <a:r>
+              <a:rPr lang="ko-KR" altLang="en-US"/>
+              <a:t>새로운 페이지를 스택에 삽입한다</a:t>
+            </a:r>
+            <a:r>
+              <a:rPr lang="en-US" altLang="ko-KR"/>
+              <a:t>.</a:t>
+            </a:r>
+          </a:p>
+          <a:p>
+            <a:r>
+              <a:rPr lang="ko-KR" altLang="en-US"/>
+              <a:t>해당 페이지 스택은 전체화면을 대상으로 한다</a:t>
+            </a:r>
+            <a:r>
+              <a:rPr lang="en-US" altLang="ko-KR"/>
+              <a:t>.</a:t>
+            </a:r>
+          </a:p>
+        </p:txBody>
+      </p:sp>
+      <p:cxnSp>
+        <p:nvCxnSpPr>
+          <p:cNvPr id="13" name="직선 화살표 연결선 12">
+            <a:extLst>
+              <a:ext uri="{FF2B5EF4-FFF2-40B4-BE49-F238E27FC236}">
+                <a16:creationId xmlns:a16="http://schemas.microsoft.com/office/drawing/2014/main" id="{88E38FA3-82CF-2B92-8ADD-1F38041A5E1A}"/>
+              </a:ext>
+            </a:extLst>
+          </p:cNvPr>
+          <p:cNvCxnSpPr>
+            <a:cxnSpLocks/>
+            <a:stCxn id="4" idx="2"/>
+          </p:cNvCxnSpPr>
+          <p:nvPr/>
+        </p:nvCxnSpPr>
+        <p:spPr>
+          <a:xfrm>
+            <a:off x="910025" y="2527872"/>
+            <a:ext cx="2260558" cy="1061829"/>
+          </a:xfrm>
+          <a:prstGeom prst="straightConnector1">
+            <a:avLst/>
+          </a:prstGeom>
+          <a:ln w="47625">
+            <a:solidFill>
+              <a:schemeClr val="tx1"/>
+            </a:solidFill>
+            <a:tailEnd type="triangle"/>
+          </a:ln>
+        </p:spPr>
+        <p:style>
+          <a:lnRef idx="2">
+            <a:schemeClr val="accent1"/>
+          </a:lnRef>
+          <a:fillRef idx="0">
+            <a:schemeClr val="accent1"/>
+          </a:fillRef>
+          <a:effectRef idx="1">
+            <a:schemeClr val="accent1"/>
+          </a:effectRef>
+          <a:fontRef idx="minor">
+            <a:schemeClr val="tx1"/>
+          </a:fontRef>
+        </p:style>
+      </p:cxnSp>
+      <p:sp>
+        <p:nvSpPr>
+          <p:cNvPr id="16" name="TextBox 15">
+            <a:extLst>
+              <a:ext uri="{FF2B5EF4-FFF2-40B4-BE49-F238E27FC236}">
+                <a16:creationId xmlns:a16="http://schemas.microsoft.com/office/drawing/2014/main" id="{99018B04-5BE8-6078-2ACD-427DA7148EDE}"/>
+              </a:ext>
+            </a:extLst>
+          </p:cNvPr>
+          <p:cNvSpPr txBox="1"/>
+          <p:nvPr/>
+        </p:nvSpPr>
+        <p:spPr>
+          <a:xfrm>
+            <a:off x="2598615" y="3589701"/>
+            <a:ext cx="1320715" cy="369332"/>
+          </a:xfrm>
+          <a:prstGeom prst="rect">
+            <a:avLst/>
+          </a:prstGeom>
+          <a:noFill/>
+          <a:ln w="25400">
+            <a:solidFill>
+              <a:schemeClr val="tx1"/>
+            </a:solidFill>
+          </a:ln>
+        </p:spPr>
+        <p:txBody>
+          <a:bodyPr wrap="square" rtlCol="0">
+            <a:spAutoFit/>
+          </a:bodyPr>
+          <a:lstStyle/>
+          <a:p>
+            <a:r>
+              <a:rPr lang="en-US" altLang="ko-KR"/>
+              <a:t>mainpage</a:t>
+            </a:r>
+            <a:endParaRPr lang="ko-KR" altLang="en-US" dirty="0"/>
+          </a:p>
+        </p:txBody>
+      </p:sp>
+      <p:sp>
+        <p:nvSpPr>
+          <p:cNvPr id="17" name="TextBox 16">
+            <a:extLst>
+              <a:ext uri="{FF2B5EF4-FFF2-40B4-BE49-F238E27FC236}">
+                <a16:creationId xmlns:a16="http://schemas.microsoft.com/office/drawing/2014/main" id="{0E5156C6-0D5C-7793-CF76-24E8CCEFF10F}"/>
+              </a:ext>
+            </a:extLst>
+          </p:cNvPr>
+          <p:cNvSpPr txBox="1"/>
+          <p:nvPr/>
+        </p:nvSpPr>
+        <p:spPr>
+          <a:xfrm>
+            <a:off x="3082433" y="4282198"/>
+            <a:ext cx="1320715" cy="369332"/>
+          </a:xfrm>
+          <a:prstGeom prst="rect">
+            <a:avLst/>
+          </a:prstGeom>
+          <a:noFill/>
+          <a:ln w="25400">
+            <a:solidFill>
+              <a:schemeClr val="tx1"/>
+            </a:solidFill>
+          </a:ln>
+        </p:spPr>
+        <p:txBody>
+          <a:bodyPr wrap="square" rtlCol="0">
+            <a:spAutoFit/>
+          </a:bodyPr>
+          <a:lstStyle/>
+          <a:p>
+            <a:r>
+              <a:rPr lang="en-US" altLang="ko-KR"/>
+              <a:t>UI-Btn0</a:t>
+            </a:r>
+            <a:endParaRPr lang="ko-KR" altLang="en-US" dirty="0"/>
+          </a:p>
+        </p:txBody>
+      </p:sp>
+      <p:sp>
+        <p:nvSpPr>
+          <p:cNvPr id="18" name="TextBox 17">
+            <a:extLst>
+              <a:ext uri="{FF2B5EF4-FFF2-40B4-BE49-F238E27FC236}">
+                <a16:creationId xmlns:a16="http://schemas.microsoft.com/office/drawing/2014/main" id="{4B9D1A2A-C56D-F18C-697A-6B2D3DA190C9}"/>
+              </a:ext>
+            </a:extLst>
+          </p:cNvPr>
+          <p:cNvSpPr txBox="1"/>
+          <p:nvPr/>
+        </p:nvSpPr>
+        <p:spPr>
+          <a:xfrm>
+            <a:off x="3393859" y="5160155"/>
+            <a:ext cx="1320715" cy="369332"/>
+          </a:xfrm>
+          <a:prstGeom prst="rect">
+            <a:avLst/>
+          </a:prstGeom>
+          <a:noFill/>
+          <a:ln w="25400">
+            <a:solidFill>
+              <a:schemeClr val="tx1"/>
+            </a:solidFill>
+          </a:ln>
+        </p:spPr>
+        <p:txBody>
+          <a:bodyPr wrap="square" rtlCol="0">
+            <a:spAutoFit/>
+          </a:bodyPr>
+          <a:lstStyle/>
+          <a:p>
+            <a:r>
+              <a:rPr lang="en-US" altLang="ko-KR"/>
+              <a:t>UI-Edit0</a:t>
+            </a:r>
+            <a:endParaRPr lang="ko-KR" altLang="en-US" dirty="0"/>
+          </a:p>
+        </p:txBody>
+      </p:sp>
+      <p:sp>
+        <p:nvSpPr>
+          <p:cNvPr id="19" name="TextBox 18">
+            <a:extLst>
+              <a:ext uri="{FF2B5EF4-FFF2-40B4-BE49-F238E27FC236}">
+                <a16:creationId xmlns:a16="http://schemas.microsoft.com/office/drawing/2014/main" id="{F36F14E4-52B9-0AE2-F24F-B69B3BFD25F4}"/>
+              </a:ext>
+            </a:extLst>
+          </p:cNvPr>
+          <p:cNvSpPr txBox="1"/>
+          <p:nvPr/>
+        </p:nvSpPr>
+        <p:spPr>
+          <a:xfrm>
+            <a:off x="5013280" y="5681109"/>
+            <a:ext cx="1320715" cy="369332"/>
+          </a:xfrm>
+          <a:prstGeom prst="rect">
+            <a:avLst/>
+          </a:prstGeom>
+          <a:noFill/>
+          <a:ln w="25400">
+            <a:solidFill>
+              <a:schemeClr val="tx1"/>
+            </a:solidFill>
+          </a:ln>
+        </p:spPr>
+        <p:txBody>
+          <a:bodyPr wrap="square" rtlCol="0">
+            <a:spAutoFit/>
+          </a:bodyPr>
+          <a:lstStyle/>
+          <a:p>
+            <a:r>
+              <a:rPr lang="en-US" altLang="ko-KR"/>
+              <a:t>UI-Slider0</a:t>
+            </a:r>
+            <a:endParaRPr lang="ko-KR" altLang="en-US" dirty="0"/>
+          </a:p>
+        </p:txBody>
+      </p:sp>
+      <p:sp>
+        <p:nvSpPr>
+          <p:cNvPr id="20" name="TextBox 19">
+            <a:extLst>
+              <a:ext uri="{FF2B5EF4-FFF2-40B4-BE49-F238E27FC236}">
+                <a16:creationId xmlns:a16="http://schemas.microsoft.com/office/drawing/2014/main" id="{6FA0F385-FC41-6104-707B-DF6E5EDE9960}"/>
+              </a:ext>
+            </a:extLst>
+          </p:cNvPr>
+          <p:cNvSpPr txBox="1"/>
+          <p:nvPr/>
+        </p:nvSpPr>
+        <p:spPr>
+          <a:xfrm>
+            <a:off x="4886964" y="4790823"/>
+            <a:ext cx="1573345" cy="369332"/>
+          </a:xfrm>
+          <a:prstGeom prst="rect">
+            <a:avLst/>
+          </a:prstGeom>
+          <a:noFill/>
+          <a:ln w="25400">
+            <a:solidFill>
+              <a:schemeClr val="tx1"/>
+            </a:solidFill>
+          </a:ln>
+        </p:spPr>
+        <p:txBody>
+          <a:bodyPr wrap="square" rtlCol="0">
+            <a:spAutoFit/>
+          </a:bodyPr>
+          <a:lstStyle/>
+          <a:p>
+            <a:r>
+              <a:rPr lang="en-US" altLang="ko-KR"/>
+              <a:t>UI-Window0</a:t>
+            </a:r>
+            <a:endParaRPr lang="ko-KR" altLang="en-US" dirty="0"/>
+          </a:p>
+        </p:txBody>
+      </p:sp>
+      <p:sp>
+        <p:nvSpPr>
+          <p:cNvPr id="22" name="TextBox 21">
+            <a:extLst>
+              <a:ext uri="{FF2B5EF4-FFF2-40B4-BE49-F238E27FC236}">
+                <a16:creationId xmlns:a16="http://schemas.microsoft.com/office/drawing/2014/main" id="{8F9B5539-B0F9-9275-A2D2-61C5C415663E}"/>
+              </a:ext>
+            </a:extLst>
+          </p:cNvPr>
+          <p:cNvSpPr txBox="1"/>
+          <p:nvPr/>
+        </p:nvSpPr>
+        <p:spPr>
+          <a:xfrm>
+            <a:off x="6965613" y="6034673"/>
+            <a:ext cx="4185761" cy="738664"/>
+          </a:xfrm>
+          <a:prstGeom prst="rect">
+            <a:avLst/>
+          </a:prstGeom>
+          <a:noFill/>
+        </p:spPr>
+        <p:txBody>
+          <a:bodyPr wrap="none" rtlCol="0">
+            <a:spAutoFit/>
+          </a:bodyPr>
+          <a:lstStyle/>
+          <a:p>
+            <a:r>
+              <a:rPr lang="ko-KR" altLang="en-US" sz="1400"/>
+              <a:t>하나의 페이지에는 여러개의 </a:t>
+            </a:r>
+            <a:r>
+              <a:rPr lang="en-US" altLang="ko-KR" sz="1400"/>
+              <a:t>UI</a:t>
+            </a:r>
+            <a:r>
+              <a:rPr lang="ko-KR" altLang="en-US" sz="1400"/>
+              <a:t>가 존재할 수 있다</a:t>
+            </a:r>
+            <a:r>
+              <a:rPr lang="en-US" altLang="ko-KR" sz="1400"/>
+              <a:t>.</a:t>
+            </a:r>
+          </a:p>
+          <a:p>
+            <a:r>
+              <a:rPr lang="ko-KR" altLang="en-US" sz="1400"/>
+              <a:t>여러 </a:t>
+            </a:r>
+            <a:r>
+              <a:rPr lang="en-US" altLang="ko-KR" sz="1400"/>
+              <a:t>UI</a:t>
+            </a:r>
+            <a:r>
+              <a:rPr lang="ko-KR" altLang="en-US" sz="1400"/>
+              <a:t>는 개발자의 설계에 따라 다양한 모습을 </a:t>
+            </a:r>
+            <a:endParaRPr lang="en-US" altLang="ko-KR" sz="1400"/>
+          </a:p>
+          <a:p>
+            <a:r>
+              <a:rPr lang="ko-KR" altLang="en-US" sz="1400"/>
+              <a:t>가질 수 있고</a:t>
+            </a:r>
+            <a:r>
+              <a:rPr lang="en-US" altLang="ko-KR" sz="1400"/>
+              <a:t>, </a:t>
+            </a:r>
+            <a:r>
+              <a:rPr lang="ko-KR" altLang="en-US" sz="1400"/>
+              <a:t>다양한 상호작용이 가능하다</a:t>
+            </a:r>
+            <a:r>
+              <a:rPr lang="en-US" altLang="ko-KR" sz="1400"/>
+              <a:t>.</a:t>
+            </a:r>
+          </a:p>
+        </p:txBody>
+      </p:sp>
+      <p:cxnSp>
+        <p:nvCxnSpPr>
+          <p:cNvPr id="23" name="직선 화살표 연결선 22">
+            <a:extLst>
+              <a:ext uri="{FF2B5EF4-FFF2-40B4-BE49-F238E27FC236}">
+                <a16:creationId xmlns:a16="http://schemas.microsoft.com/office/drawing/2014/main" id="{B729F0B9-4F90-F9FC-B7AB-74E016E59EA9}"/>
+              </a:ext>
+            </a:extLst>
+          </p:cNvPr>
+          <p:cNvCxnSpPr>
+            <a:cxnSpLocks/>
+            <a:stCxn id="20" idx="0"/>
+            <a:endCxn id="26" idx="1"/>
+          </p:cNvCxnSpPr>
+          <p:nvPr/>
+        </p:nvCxnSpPr>
+        <p:spPr>
+          <a:xfrm flipV="1">
+            <a:off x="5673637" y="590280"/>
+            <a:ext cx="1780937" cy="4200543"/>
+          </a:xfrm>
+          <a:prstGeom prst="straightConnector1">
+            <a:avLst/>
+          </a:prstGeom>
+          <a:ln w="47625">
+            <a:solidFill>
+              <a:schemeClr val="tx1"/>
+            </a:solidFill>
+            <a:tailEnd type="triangle"/>
+          </a:ln>
+        </p:spPr>
+        <p:style>
+          <a:lnRef idx="2">
+            <a:schemeClr val="accent1"/>
+          </a:lnRef>
+          <a:fillRef idx="0">
+            <a:schemeClr val="accent1"/>
+          </a:fillRef>
+          <a:effectRef idx="1">
+            <a:schemeClr val="accent1"/>
+          </a:effectRef>
+          <a:fontRef idx="minor">
+            <a:schemeClr val="tx1"/>
+          </a:fontRef>
+        </p:style>
+      </p:cxnSp>
+      <p:sp>
+        <p:nvSpPr>
+          <p:cNvPr id="26" name="TextBox 25">
+            <a:extLst>
+              <a:ext uri="{FF2B5EF4-FFF2-40B4-BE49-F238E27FC236}">
+                <a16:creationId xmlns:a16="http://schemas.microsoft.com/office/drawing/2014/main" id="{A4B4666A-FCFD-BA78-A584-15B89936B106}"/>
+              </a:ext>
+            </a:extLst>
+          </p:cNvPr>
+          <p:cNvSpPr txBox="1"/>
+          <p:nvPr/>
+        </p:nvSpPr>
+        <p:spPr>
+          <a:xfrm>
+            <a:off x="7454574" y="405614"/>
+            <a:ext cx="1573345" cy="369332"/>
+          </a:xfrm>
+          <a:prstGeom prst="rect">
+            <a:avLst/>
+          </a:prstGeom>
+          <a:noFill/>
+          <a:ln w="25400">
+            <a:solidFill>
+              <a:schemeClr val="tx1"/>
+            </a:solidFill>
+          </a:ln>
+        </p:spPr>
+        <p:txBody>
+          <a:bodyPr wrap="square" rtlCol="0">
+            <a:spAutoFit/>
+          </a:bodyPr>
+          <a:lstStyle/>
+          <a:p>
+            <a:r>
+              <a:rPr lang="en-US" altLang="ko-KR"/>
+              <a:t>UI-Window0</a:t>
+            </a:r>
+            <a:endParaRPr lang="ko-KR" altLang="en-US" dirty="0"/>
+          </a:p>
+        </p:txBody>
+      </p:sp>
+      <p:sp>
+        <p:nvSpPr>
+          <p:cNvPr id="27" name="TextBox 26">
+            <a:extLst>
+              <a:ext uri="{FF2B5EF4-FFF2-40B4-BE49-F238E27FC236}">
+                <a16:creationId xmlns:a16="http://schemas.microsoft.com/office/drawing/2014/main" id="{78CE9057-74CE-4416-78DB-5A5B7EE5796E}"/>
+              </a:ext>
+            </a:extLst>
+          </p:cNvPr>
+          <p:cNvSpPr txBox="1"/>
+          <p:nvPr/>
+        </p:nvSpPr>
+        <p:spPr>
+          <a:xfrm>
+            <a:off x="7464289" y="774946"/>
+            <a:ext cx="2268749" cy="2444972"/>
+          </a:xfrm>
+          <a:prstGeom prst="rect">
+            <a:avLst/>
+          </a:prstGeom>
+          <a:noFill/>
+          <a:ln w="25400">
+            <a:solidFill>
+              <a:schemeClr val="tx1"/>
+            </a:solidFill>
+          </a:ln>
+        </p:spPr>
+        <p:txBody>
+          <a:bodyPr wrap="square" rtlCol="0">
+            <a:spAutoFit/>
+          </a:bodyPr>
+          <a:lstStyle/>
+          <a:p>
+            <a:endParaRPr lang="ko-KR" altLang="en-US" dirty="0"/>
+          </a:p>
+        </p:txBody>
+      </p:sp>
+      <p:sp>
+        <p:nvSpPr>
+          <p:cNvPr id="28" name="TextBox 27">
+            <a:extLst>
+              <a:ext uri="{FF2B5EF4-FFF2-40B4-BE49-F238E27FC236}">
+                <a16:creationId xmlns:a16="http://schemas.microsoft.com/office/drawing/2014/main" id="{806AA3C1-F713-1938-93F9-5A35F1DDC1E8}"/>
+              </a:ext>
+            </a:extLst>
+          </p:cNvPr>
+          <p:cNvSpPr txBox="1"/>
+          <p:nvPr/>
+        </p:nvSpPr>
+        <p:spPr>
+          <a:xfrm>
+            <a:off x="7621598" y="2096852"/>
+            <a:ext cx="1667409" cy="369332"/>
+          </a:xfrm>
+          <a:prstGeom prst="rect">
+            <a:avLst/>
+          </a:prstGeom>
+          <a:noFill/>
+          <a:ln w="25400">
+            <a:solidFill>
+              <a:schemeClr val="tx1"/>
+            </a:solidFill>
+          </a:ln>
+        </p:spPr>
+        <p:txBody>
+          <a:bodyPr wrap="square" rtlCol="0">
+            <a:spAutoFit/>
+          </a:bodyPr>
+          <a:lstStyle/>
+          <a:p>
+            <a:r>
+              <a:rPr lang="en-US" altLang="ko-KR"/>
+              <a:t>win mainpage</a:t>
+            </a:r>
+            <a:endParaRPr lang="ko-KR" altLang="en-US" dirty="0"/>
+          </a:p>
+        </p:txBody>
+      </p:sp>
+      <p:sp>
+        <p:nvSpPr>
+          <p:cNvPr id="29" name="TextBox 28">
+            <a:extLst>
+              <a:ext uri="{FF2B5EF4-FFF2-40B4-BE49-F238E27FC236}">
+                <a16:creationId xmlns:a16="http://schemas.microsoft.com/office/drawing/2014/main" id="{CFF524A9-CAD1-0C5B-F84C-AC82386B7D08}"/>
+              </a:ext>
+            </a:extLst>
+          </p:cNvPr>
+          <p:cNvSpPr txBox="1"/>
+          <p:nvPr/>
+        </p:nvSpPr>
+        <p:spPr>
+          <a:xfrm>
+            <a:off x="7621597" y="1727520"/>
+            <a:ext cx="1667409" cy="369332"/>
+          </a:xfrm>
+          <a:prstGeom prst="rect">
+            <a:avLst/>
+          </a:prstGeom>
+          <a:noFill/>
+          <a:ln w="25400">
+            <a:solidFill>
+              <a:schemeClr val="tx1"/>
+            </a:solidFill>
+          </a:ln>
+        </p:spPr>
+        <p:txBody>
+          <a:bodyPr wrap="square" rtlCol="0">
+            <a:spAutoFit/>
+          </a:bodyPr>
+          <a:lstStyle/>
+          <a:p>
+            <a:r>
+              <a:rPr lang="en-US" altLang="ko-KR"/>
+              <a:t>win subpage0</a:t>
+            </a:r>
+            <a:endParaRPr lang="ko-KR" altLang="en-US" dirty="0"/>
+          </a:p>
+        </p:txBody>
+      </p:sp>
+      <p:sp>
+        <p:nvSpPr>
+          <p:cNvPr id="30" name="TextBox 29">
+            <a:extLst>
+              <a:ext uri="{FF2B5EF4-FFF2-40B4-BE49-F238E27FC236}">
+                <a16:creationId xmlns:a16="http://schemas.microsoft.com/office/drawing/2014/main" id="{7E39A52C-DB41-6801-716D-92503B1CB0D9}"/>
+              </a:ext>
+            </a:extLst>
+          </p:cNvPr>
+          <p:cNvSpPr txBox="1"/>
+          <p:nvPr/>
+        </p:nvSpPr>
+        <p:spPr>
+          <a:xfrm>
+            <a:off x="7621596" y="1362836"/>
+            <a:ext cx="1667409" cy="369332"/>
+          </a:xfrm>
+          <a:prstGeom prst="rect">
+            <a:avLst/>
+          </a:prstGeom>
+          <a:noFill/>
+          <a:ln w="25400">
+            <a:solidFill>
+              <a:schemeClr val="tx1"/>
+            </a:solidFill>
+          </a:ln>
+        </p:spPr>
+        <p:txBody>
+          <a:bodyPr wrap="square" rtlCol="0">
+            <a:spAutoFit/>
+          </a:bodyPr>
+          <a:lstStyle/>
+          <a:p>
+            <a:r>
+              <a:rPr lang="en-US" altLang="ko-KR"/>
+              <a:t>win subpage1</a:t>
+            </a:r>
+            <a:endParaRPr lang="ko-KR" altLang="en-US" dirty="0"/>
+          </a:p>
+        </p:txBody>
+      </p:sp>
+      <p:sp>
+        <p:nvSpPr>
+          <p:cNvPr id="31" name="TextBox 30">
+            <a:extLst>
+              <a:ext uri="{FF2B5EF4-FFF2-40B4-BE49-F238E27FC236}">
+                <a16:creationId xmlns:a16="http://schemas.microsoft.com/office/drawing/2014/main" id="{754CBB5F-F08C-079A-E489-084F78852F98}"/>
+              </a:ext>
+            </a:extLst>
+          </p:cNvPr>
+          <p:cNvSpPr txBox="1"/>
+          <p:nvPr/>
+        </p:nvSpPr>
+        <p:spPr>
+          <a:xfrm>
+            <a:off x="7627692" y="2468973"/>
+            <a:ext cx="1671030" cy="646331"/>
+          </a:xfrm>
+          <a:prstGeom prst="rect">
+            <a:avLst/>
+          </a:prstGeom>
+          <a:noFill/>
+          <a:ln w="25400">
+            <a:solidFill>
+              <a:schemeClr val="tx1"/>
+            </a:solidFill>
+          </a:ln>
+        </p:spPr>
+        <p:txBody>
+          <a:bodyPr wrap="square" rtlCol="0">
+            <a:spAutoFit/>
+          </a:bodyPr>
+          <a:lstStyle/>
+          <a:p>
+            <a:r>
+              <a:rPr lang="en-US" altLang="ko-KR"/>
+              <a:t>Window</a:t>
+            </a:r>
+            <a:r>
+              <a:rPr lang="ko-KR" altLang="en-US"/>
+              <a:t> </a:t>
+            </a:r>
+            <a:r>
+              <a:rPr lang="en-US" altLang="ko-KR"/>
+              <a:t>PageStack</a:t>
+            </a:r>
+            <a:endParaRPr lang="ko-KR" altLang="en-US" dirty="0"/>
+          </a:p>
+        </p:txBody>
+      </p:sp>
+      <p:cxnSp>
+        <p:nvCxnSpPr>
+          <p:cNvPr id="32" name="직선 화살표 연결선 31">
+            <a:extLst>
+              <a:ext uri="{FF2B5EF4-FFF2-40B4-BE49-F238E27FC236}">
+                <a16:creationId xmlns:a16="http://schemas.microsoft.com/office/drawing/2014/main" id="{71FB0A14-FA1B-84A5-03A1-CE9C95281141}"/>
+              </a:ext>
+            </a:extLst>
+          </p:cNvPr>
+          <p:cNvCxnSpPr>
+            <a:cxnSpLocks/>
+          </p:cNvCxnSpPr>
+          <p:nvPr/>
+        </p:nvCxnSpPr>
+        <p:spPr>
+          <a:xfrm flipV="1">
+            <a:off x="9465368" y="1419876"/>
+            <a:ext cx="0" cy="1016795"/>
+          </a:xfrm>
+          <a:prstGeom prst="straightConnector1">
+            <a:avLst/>
+          </a:prstGeom>
+          <a:ln w="47625">
+            <a:solidFill>
+              <a:schemeClr val="tx1"/>
+            </a:solidFill>
+            <a:tailEnd type="triangle"/>
+          </a:ln>
+        </p:spPr>
+        <p:style>
+          <a:lnRef idx="2">
+            <a:schemeClr val="accent1"/>
+          </a:lnRef>
+          <a:fillRef idx="0">
+            <a:schemeClr val="accent1"/>
+          </a:fillRef>
+          <a:effectRef idx="1">
+            <a:schemeClr val="accent1"/>
+          </a:effectRef>
+          <a:fontRef idx="minor">
+            <a:schemeClr val="tx1"/>
+          </a:fontRef>
+        </p:style>
+      </p:cxnSp>
+      <p:sp>
+        <p:nvSpPr>
+          <p:cNvPr id="33" name="TextBox 32">
+            <a:extLst>
+              <a:ext uri="{FF2B5EF4-FFF2-40B4-BE49-F238E27FC236}">
+                <a16:creationId xmlns:a16="http://schemas.microsoft.com/office/drawing/2014/main" id="{22F88F35-CD10-C1B4-2478-5C60231B198D}"/>
+              </a:ext>
+            </a:extLst>
+          </p:cNvPr>
+          <p:cNvSpPr txBox="1"/>
+          <p:nvPr/>
+        </p:nvSpPr>
+        <p:spPr>
+          <a:xfrm>
+            <a:off x="9696919" y="1129727"/>
+            <a:ext cx="2306118" cy="1815882"/>
+          </a:xfrm>
+          <a:prstGeom prst="rect">
+            <a:avLst/>
+          </a:prstGeom>
+          <a:noFill/>
+        </p:spPr>
+        <p:txBody>
+          <a:bodyPr wrap="square" rtlCol="0">
+            <a:spAutoFit/>
+          </a:bodyPr>
+          <a:lstStyle/>
+          <a:p>
+            <a:r>
+              <a:rPr lang="ko-KR" altLang="en-US" sz="1400"/>
+              <a:t>윈도우에는 해당 윈도우 전용 페이지 스택이</a:t>
+            </a:r>
+            <a:endParaRPr lang="en-US" altLang="ko-KR" sz="1400"/>
+          </a:p>
+          <a:p>
+            <a:r>
+              <a:rPr lang="ko-KR" altLang="en-US" sz="1400"/>
+              <a:t>존재한다</a:t>
+            </a:r>
+            <a:r>
+              <a:rPr lang="en-US" altLang="ko-KR" sz="1400"/>
+              <a:t>. </a:t>
+            </a:r>
+          </a:p>
+          <a:p>
+            <a:r>
+              <a:rPr lang="ko-KR" altLang="en-US" sz="1400"/>
+              <a:t>해당 페이지들은 윈도우의 영역 안에서만 </a:t>
+            </a:r>
+            <a:endParaRPr lang="en-US" altLang="ko-KR" sz="1400"/>
+          </a:p>
+          <a:p>
+            <a:r>
+              <a:rPr lang="ko-KR" altLang="en-US" sz="1400"/>
+              <a:t>상호작용이 가능하며</a:t>
+            </a:r>
+            <a:r>
+              <a:rPr lang="en-US" altLang="ko-KR" sz="1400"/>
+              <a:t>, </a:t>
+            </a:r>
+          </a:p>
+          <a:p>
+            <a:r>
+              <a:rPr lang="ko-KR" altLang="en-US" sz="1400"/>
+              <a:t>윈도우가 선택되어야만 상호작용이 가능하다</a:t>
+            </a:r>
+            <a:r>
+              <a:rPr lang="en-US" altLang="ko-KR" sz="1400"/>
+              <a:t>.</a:t>
+            </a:r>
+          </a:p>
+        </p:txBody>
+      </p:sp>
+      <p:sp>
+        <p:nvSpPr>
+          <p:cNvPr id="34" name="직사각형 33">
+            <a:extLst>
+              <a:ext uri="{FF2B5EF4-FFF2-40B4-BE49-F238E27FC236}">
+                <a16:creationId xmlns:a16="http://schemas.microsoft.com/office/drawing/2014/main" id="{1246102B-E926-837E-A7DC-B129878DAC7A}"/>
+              </a:ext>
+            </a:extLst>
+          </p:cNvPr>
+          <p:cNvSpPr/>
+          <p:nvPr/>
+        </p:nvSpPr>
+        <p:spPr>
+          <a:xfrm>
+            <a:off x="1161599" y="4529398"/>
+            <a:ext cx="4121427" cy="2328601"/>
+          </a:xfrm>
+          <a:prstGeom prst="rect">
+            <a:avLst/>
+          </a:prstGeom>
+          <a:solidFill>
+            <a:schemeClr val="tx1">
+              <a:lumMod val="75000"/>
+              <a:lumOff val="25000"/>
+              <a:alpha val="46000"/>
+            </a:schemeClr>
+          </a:solidFill>
+          <a:ln>
+            <a:noFill/>
+          </a:ln>
+        </p:spPr>
+        <p:style>
+          <a:lnRef idx="2">
+            <a:schemeClr val="accent1">
+              <a:shade val="15000"/>
+            </a:schemeClr>
+          </a:lnRef>
+          <a:fillRef idx="1">
+            <a:schemeClr val="accent1"/>
+          </a:fillRef>
+          <a:effectRef idx="0">
+            <a:schemeClr val="accent1"/>
+          </a:effectRef>
+          <a:fontRef idx="minor">
+            <a:schemeClr val="lt1"/>
+          </a:fontRef>
+        </p:style>
+        <p:txBody>
+          <a:bodyPr rtlCol="0" anchor="ctr"/>
+          <a:lstStyle/>
+          <a:p>
+            <a:pPr algn="ctr"/>
+            <a:endParaRPr lang="ko-KR" altLang="en-US"/>
+          </a:p>
+        </p:txBody>
+      </p:sp>
+      <p:sp>
+        <p:nvSpPr>
+          <p:cNvPr id="35" name="TextBox 34">
+            <a:extLst>
+              <a:ext uri="{FF2B5EF4-FFF2-40B4-BE49-F238E27FC236}">
+                <a16:creationId xmlns:a16="http://schemas.microsoft.com/office/drawing/2014/main" id="{11AAF6E8-E126-CE40-F7D2-C745F8101180}"/>
+              </a:ext>
+            </a:extLst>
+          </p:cNvPr>
+          <p:cNvSpPr txBox="1"/>
+          <p:nvPr/>
+        </p:nvSpPr>
+        <p:spPr>
+          <a:xfrm>
+            <a:off x="1170549" y="4166993"/>
+            <a:ext cx="1320715" cy="369332"/>
+          </a:xfrm>
+          <a:prstGeom prst="rect">
+            <a:avLst/>
+          </a:prstGeom>
+          <a:noFill/>
+          <a:ln w="25400">
+            <a:solidFill>
+              <a:schemeClr val="tx1"/>
+            </a:solidFill>
+          </a:ln>
+        </p:spPr>
+        <p:txBody>
+          <a:bodyPr wrap="square" rtlCol="0">
+            <a:spAutoFit/>
+          </a:bodyPr>
+          <a:lstStyle/>
+          <a:p>
+            <a:r>
+              <a:rPr lang="en-US" altLang="ko-KR"/>
+              <a:t>subpage0</a:t>
+            </a:r>
+            <a:endParaRPr lang="ko-KR" altLang="en-US" dirty="0"/>
+          </a:p>
+        </p:txBody>
+      </p:sp>
+      <p:sp>
+        <p:nvSpPr>
+          <p:cNvPr id="36" name="직사각형 35">
+            <a:extLst>
+              <a:ext uri="{FF2B5EF4-FFF2-40B4-BE49-F238E27FC236}">
+                <a16:creationId xmlns:a16="http://schemas.microsoft.com/office/drawing/2014/main" id="{ADF19E20-67AC-9129-43D9-9DDF62847C2B}"/>
+              </a:ext>
+            </a:extLst>
+          </p:cNvPr>
+          <p:cNvSpPr/>
+          <p:nvPr/>
+        </p:nvSpPr>
+        <p:spPr>
+          <a:xfrm>
+            <a:off x="-15684" y="5085756"/>
+            <a:ext cx="4121427" cy="1772243"/>
+          </a:xfrm>
+          <a:prstGeom prst="rect">
+            <a:avLst/>
+          </a:prstGeom>
+          <a:solidFill>
+            <a:schemeClr val="tx1">
+              <a:lumMod val="75000"/>
+              <a:lumOff val="25000"/>
+              <a:alpha val="46000"/>
+            </a:schemeClr>
+          </a:solidFill>
+          <a:ln>
+            <a:noFill/>
+          </a:ln>
+        </p:spPr>
+        <p:style>
+          <a:lnRef idx="2">
+            <a:schemeClr val="accent1">
+              <a:shade val="15000"/>
+            </a:schemeClr>
+          </a:lnRef>
+          <a:fillRef idx="1">
+            <a:schemeClr val="accent1"/>
+          </a:fillRef>
+          <a:effectRef idx="0">
+            <a:schemeClr val="accent1"/>
+          </a:effectRef>
+          <a:fontRef idx="minor">
+            <a:schemeClr val="lt1"/>
+          </a:fontRef>
+        </p:style>
+        <p:txBody>
+          <a:bodyPr rtlCol="0" anchor="ctr"/>
+          <a:lstStyle/>
+          <a:p>
+            <a:pPr algn="ctr"/>
+            <a:endParaRPr lang="ko-KR" altLang="en-US"/>
+          </a:p>
+        </p:txBody>
+      </p:sp>
+      <p:sp>
+        <p:nvSpPr>
+          <p:cNvPr id="37" name="TextBox 36">
+            <a:extLst>
+              <a:ext uri="{FF2B5EF4-FFF2-40B4-BE49-F238E27FC236}">
+                <a16:creationId xmlns:a16="http://schemas.microsoft.com/office/drawing/2014/main" id="{852CC255-4CA1-5880-EC62-9B96EF2CC269}"/>
+              </a:ext>
+            </a:extLst>
+          </p:cNvPr>
+          <p:cNvSpPr txBox="1"/>
+          <p:nvPr/>
+        </p:nvSpPr>
+        <p:spPr>
+          <a:xfrm>
+            <a:off x="-30628" y="4723351"/>
+            <a:ext cx="1320715" cy="369332"/>
+          </a:xfrm>
+          <a:prstGeom prst="rect">
+            <a:avLst/>
+          </a:prstGeom>
+          <a:noFill/>
+          <a:ln w="25400">
+            <a:solidFill>
+              <a:schemeClr val="tx1"/>
+            </a:solidFill>
+          </a:ln>
+        </p:spPr>
+        <p:txBody>
+          <a:bodyPr wrap="square" rtlCol="0">
+            <a:spAutoFit/>
+          </a:bodyPr>
+          <a:lstStyle/>
+          <a:p>
+            <a:r>
+              <a:rPr lang="en-US" altLang="ko-KR"/>
+              <a:t>subpage1</a:t>
+            </a:r>
+            <a:endParaRPr lang="ko-KR" altLang="en-US" dirty="0"/>
+          </a:p>
+        </p:txBody>
+      </p:sp>
+      <p:sp>
+        <p:nvSpPr>
+          <p:cNvPr id="38" name="TextBox 37">
+            <a:extLst>
+              <a:ext uri="{FF2B5EF4-FFF2-40B4-BE49-F238E27FC236}">
+                <a16:creationId xmlns:a16="http://schemas.microsoft.com/office/drawing/2014/main" id="{1D2A3C84-DE22-46AF-77BC-53E395B997B1}"/>
+              </a:ext>
+            </a:extLst>
+          </p:cNvPr>
+          <p:cNvSpPr txBox="1"/>
+          <p:nvPr/>
+        </p:nvSpPr>
+        <p:spPr>
+          <a:xfrm>
+            <a:off x="3410649" y="-16213"/>
+            <a:ext cx="2327881" cy="369332"/>
+          </a:xfrm>
+          <a:prstGeom prst="rect">
+            <a:avLst/>
+          </a:prstGeom>
+          <a:noFill/>
+        </p:spPr>
+        <p:txBody>
+          <a:bodyPr wrap="none" rtlCol="0">
+            <a:spAutoFit/>
+          </a:bodyPr>
+          <a:lstStyle/>
+          <a:p>
+            <a:r>
+              <a:rPr lang="ko-KR" altLang="en-US" dirty="0"/>
+              <a:t>아직 실현되지 못함</a:t>
+            </a:r>
+            <a:r>
+              <a:rPr lang="en-US" altLang="ko-KR" dirty="0"/>
+              <a:t>.</a:t>
+            </a:r>
+            <a:endParaRPr lang="ko-KR" altLang="en-US" dirty="0"/>
+          </a:p>
+        </p:txBody>
+      </p:sp>
+      <mc:AlternateContent xmlns:mc="http://schemas.openxmlformats.org/markup-compatibility/2006">
+        <mc:Choice xmlns:pslz="http://schemas.microsoft.com/office/powerpoint/2016/slidezoom" Requires="pslz">
+          <p:graphicFrame>
+            <p:nvGraphicFramePr>
+              <p:cNvPr id="41" name="슬라이드 확대/축소 40">
+                <a:extLst>
+                  <a:ext uri="{FF2B5EF4-FFF2-40B4-BE49-F238E27FC236}">
+                    <a16:creationId xmlns:a16="http://schemas.microsoft.com/office/drawing/2014/main" id="{E4D31A5E-FB59-3868-F147-5629C48AC39C}"/>
+                  </a:ext>
+                </a:extLst>
+              </p:cNvPr>
+              <p:cNvGraphicFramePr>
+                <a:graphicFrameLocks noChangeAspect="1"/>
+              </p:cNvGraphicFramePr>
+              <p:nvPr>
+                <p:extLst>
+                  <p:ext uri="{D42A27DB-BD31-4B8C-83A1-F6EECF244321}">
+                    <p14:modId xmlns:p14="http://schemas.microsoft.com/office/powerpoint/2010/main" val="3065303103"/>
+                  </p:ext>
+                </p:extLst>
+              </p:nvPr>
+            </p:nvGraphicFramePr>
+            <p:xfrm>
+              <a:off x="7151913" y="3262916"/>
+              <a:ext cx="4851124" cy="2728758"/>
+            </p:xfrm>
+            <a:graphic>
+              <a:graphicData uri="http://schemas.microsoft.com/office/powerpoint/2016/slidezoom">
+                <pslz:sldZm>
+                  <pslz:sldZmObj sldId="291" cId="1776988636">
+                    <pslz:zmPr id="{A659AF16-7EC3-4AFE-A886-E6C624CE7401}" returnToParent="0" transitionDur="1000">
+                      <p166:blipFill xmlns:p166="http://schemas.microsoft.com/office/powerpoint/2016/6/main">
+                        <a:blip r:embed="rId2"/>
+                        <a:stretch>
+                          <a:fillRect/>
+                        </a:stretch>
+                      </p166:blipFill>
+                      <p166:spPr xmlns:p166="http://schemas.microsoft.com/office/powerpoint/2016/6/main">
+                        <a:xfrm>
+                          <a:off x="0" y="0"/>
+                          <a:ext cx="4851124" cy="2728758"/>
+                        </a:xfrm>
+                        <a:prstGeom prst="rect">
+                          <a:avLst/>
+                        </a:prstGeom>
+                        <a:ln w="3175">
+                          <a:solidFill>
+                            <a:prstClr val="ltGray"/>
+                          </a:solidFill>
+                        </a:ln>
+                      </p166:spPr>
+                    </pslz:zmPr>
+                  </pslz:sldZmObj>
+                </pslz:sldZm>
+              </a:graphicData>
+            </a:graphic>
+          </p:graphicFrame>
+        </mc:Choice>
+        <mc:Fallback>
+          <p:pic>
+            <p:nvPicPr>
+              <p:cNvPr id="41" name="슬라이드 확대/축소 40">
+                <a:hlinkClick r:id="rId3" action="ppaction://hlinksldjump"/>
+                <a:extLst>
+                  <a:ext uri="{FF2B5EF4-FFF2-40B4-BE49-F238E27FC236}">
+                    <a16:creationId xmlns:a16="http://schemas.microsoft.com/office/drawing/2014/main" id="{E4D31A5E-FB59-3868-F147-5629C48AC39C}"/>
+                  </a:ext>
+                </a:extLst>
+              </p:cNvPr>
+              <p:cNvPicPr>
+                <a:picLocks noGrp="1" noRot="1" noChangeAspect="1" noMove="1" noResize="1" noEditPoints="1" noAdjustHandles="1" noChangeArrowheads="1" noChangeShapeType="1"/>
+              </p:cNvPicPr>
+              <p:nvPr/>
+            </p:nvPicPr>
+            <p:blipFill>
+              <a:blip r:embed="rId2"/>
+              <a:stretch>
+                <a:fillRect/>
+              </a:stretch>
+            </p:blipFill>
+            <p:spPr>
+              <a:xfrm>
+                <a:off x="7151913" y="3262916"/>
+                <a:ext cx="4851124" cy="2728758"/>
+              </a:xfrm>
+              <a:prstGeom prst="rect">
+                <a:avLst/>
+              </a:prstGeom>
+              <a:ln w="3175">
+                <a:solidFill>
+                  <a:prstClr val="ltGray"/>
+                </a:solidFill>
+              </a:ln>
+            </p:spPr>
+          </p:pic>
+        </mc:Fallback>
+      </mc:AlternateContent>
+    </p:spTree>
+    <p:extLst>
+      <p:ext uri="{BB962C8B-B14F-4D97-AF65-F5344CB8AC3E}">
+        <p14:creationId xmlns:p14="http://schemas.microsoft.com/office/powerpoint/2010/main" val="53786630"/>
+      </p:ext>
+    </p:extLst>
+  </p:cSld>
+  <p:clrMapOvr>
+    <a:masterClrMapping/>
+  </p:clrMapOvr>
+</p:sld>
+</file>
+
+<file path=ppt/slides/slide25.xml><?xml version="1.0" encoding="utf-8"?>
+<p:sld xmlns:a="http://schemas.openxmlformats.org/drawingml/2006/main" xmlns:r="http://schemas.openxmlformats.org/officeDocument/2006/relationships" xmlns:p="http://schemas.openxmlformats.org/presentationml/2006/main">
+  <p:cSld>
+    <p:spTree>
+      <p:nvGrpSpPr>
+        <p:cNvPr id="1" name=""/>
+        <p:cNvGrpSpPr/>
+        <p:nvPr/>
+      </p:nvGrpSpPr>
+      <p:grpSpPr>
+        <a:xfrm>
+          <a:off x="0" y="0"/>
+          <a:ext cx="0" cy="0"/>
+          <a:chOff x="0" y="0"/>
+          <a:chExt cx="0" cy="0"/>
+        </a:xfrm>
+      </p:grpSpPr>
+      <p:sp>
+        <p:nvSpPr>
+          <p:cNvPr id="2" name="제목 1">
+            <a:extLst>
+              <a:ext uri="{FF2B5EF4-FFF2-40B4-BE49-F238E27FC236}">
+                <a16:creationId xmlns:a16="http://schemas.microsoft.com/office/drawing/2014/main" id="{1E836BA4-811D-39F2-86EE-21C38847FD90}"/>
+              </a:ext>
+            </a:extLst>
+          </p:cNvPr>
+          <p:cNvSpPr txBox="1">
+            <a:spLocks/>
+          </p:cNvSpPr>
+          <p:nvPr/>
+        </p:nvSpPr>
+        <p:spPr>
+          <a:xfrm>
+            <a:off x="0" y="18255"/>
+            <a:ext cx="10515600" cy="850425"/>
+          </a:xfrm>
+          <a:prstGeom prst="rect">
+            <a:avLst/>
+          </a:prstGeom>
+        </p:spPr>
+        <p:txBody>
+          <a:bodyPr vert="horz" lIns="91440" tIns="45720" rIns="91440" bIns="45720" rtlCol="0" anchor="ctr">
+            <a:normAutofit/>
+          </a:bodyPr>
+          <a:lstStyle>
+            <a:lvl1pPr algn="l" defTabSz="914400" rtl="0" eaLnBrk="1" latinLnBrk="1" hangingPunct="1">
+              <a:lnSpc>
+                <a:spcPct val="90000"/>
+              </a:lnSpc>
+              <a:spcBef>
+                <a:spcPct val="0"/>
+              </a:spcBef>
+              <a:buNone/>
+              <a:defRPr sz="4400" kern="1200">
+                <a:solidFill>
+                  <a:schemeClr val="tx1"/>
+                </a:solidFill>
+                <a:latin typeface="+mj-lt"/>
+                <a:ea typeface="+mj-ea"/>
+                <a:cs typeface="+mj-cs"/>
+              </a:defRPr>
+            </a:lvl1pPr>
+          </a:lstStyle>
+          <a:p>
+            <a:r>
+              <a:rPr lang="en-US" altLang="ko-KR" sz="5400"/>
+              <a:t>UI Structure</a:t>
+            </a:r>
+            <a:endParaRPr lang="ko-KR" altLang="en-US" sz="5400" dirty="0"/>
+          </a:p>
+        </p:txBody>
+      </p:sp>
+      <mc:AlternateContent xmlns:mc="http://schemas.openxmlformats.org/markup-compatibility/2006">
+        <mc:Choice xmlns:pslz="http://schemas.microsoft.com/office/powerpoint/2016/slidezoom" Requires="pslz">
+          <p:graphicFrame>
+            <p:nvGraphicFramePr>
+              <p:cNvPr id="4" name="슬라이드 확대/축소 3">
+                <a:extLst>
+                  <a:ext uri="{FF2B5EF4-FFF2-40B4-BE49-F238E27FC236}">
+                    <a16:creationId xmlns:a16="http://schemas.microsoft.com/office/drawing/2014/main" id="{F15FAF58-0634-C8AB-E7F8-57E8F87E7A70}"/>
+                  </a:ext>
+                </a:extLst>
+              </p:cNvPr>
+              <p:cNvGraphicFramePr>
+                <a:graphicFrameLocks noChangeAspect="1"/>
+              </p:cNvGraphicFramePr>
+              <p:nvPr>
+                <p:extLst>
+                  <p:ext uri="{D42A27DB-BD31-4B8C-83A1-F6EECF244321}">
+                    <p14:modId xmlns:p14="http://schemas.microsoft.com/office/powerpoint/2010/main" val="2842581265"/>
+                  </p:ext>
+                </p:extLst>
+              </p:nvPr>
+            </p:nvGraphicFramePr>
+            <p:xfrm>
+              <a:off x="6096001" y="0"/>
+              <a:ext cx="6096000" cy="3429000"/>
+            </p:xfrm>
+            <a:graphic>
+              <a:graphicData uri="http://schemas.microsoft.com/office/powerpoint/2016/slidezoom">
+                <pslz:sldZm>
+                  <pslz:sldZmObj sldId="292" cId="1125029623">
+                    <pslz:zmPr id="{93C0DF16-85AB-4D2A-99EA-2F62B06E7977}" returnToParent="0" transitionDur="1000">
+                      <p166:blipFill xmlns:p166="http://schemas.microsoft.com/office/powerpoint/2016/6/main">
+                        <a:blip r:embed="rId2"/>
+                        <a:stretch>
+                          <a:fillRect/>
+                        </a:stretch>
+                      </p166:blipFill>
+                      <p166:spPr xmlns:p166="http://schemas.microsoft.com/office/powerpoint/2016/6/main">
+                        <a:xfrm>
+                          <a:off x="0" y="0"/>
+                          <a:ext cx="6096000" cy="3429000"/>
+                        </a:xfrm>
+                        <a:prstGeom prst="rect">
+                          <a:avLst/>
+                        </a:prstGeom>
+                        <a:ln w="3175">
+                          <a:solidFill>
+                            <a:prstClr val="ltGray"/>
+                          </a:solidFill>
+                        </a:ln>
+                      </p166:spPr>
+                    </pslz:zmPr>
+                  </pslz:sldZmObj>
+                </pslz:sldZm>
+              </a:graphicData>
+            </a:graphic>
+          </p:graphicFrame>
+        </mc:Choice>
+        <mc:Fallback>
+          <p:pic>
+            <p:nvPicPr>
+              <p:cNvPr id="4" name="슬라이드 확대/축소 3">
+                <a:hlinkClick r:id="rId3" action="ppaction://hlinksldjump"/>
+                <a:extLst>
+                  <a:ext uri="{FF2B5EF4-FFF2-40B4-BE49-F238E27FC236}">
+                    <a16:creationId xmlns:a16="http://schemas.microsoft.com/office/drawing/2014/main" id="{F15FAF58-0634-C8AB-E7F8-57E8F87E7A70}"/>
+                  </a:ext>
+                </a:extLst>
+              </p:cNvPr>
+              <p:cNvPicPr>
+                <a:picLocks noGrp="1" noRot="1" noChangeAspect="1" noMove="1" noResize="1" noEditPoints="1" noAdjustHandles="1" noChangeArrowheads="1" noChangeShapeType="1"/>
+              </p:cNvPicPr>
+              <p:nvPr/>
+            </p:nvPicPr>
+            <p:blipFill>
+              <a:blip r:embed="rId2"/>
+              <a:stretch>
+                <a:fillRect/>
+              </a:stretch>
+            </p:blipFill>
+            <p:spPr>
+              <a:xfrm>
+                <a:off x="6096001" y="0"/>
+                <a:ext cx="6096000" cy="3429000"/>
+              </a:xfrm>
+              <a:prstGeom prst="rect">
+                <a:avLst/>
+              </a:prstGeom>
+              <a:ln w="3175">
+                <a:solidFill>
+                  <a:prstClr val="ltGray"/>
+                </a:solidFill>
+              </a:ln>
+            </p:spPr>
+          </p:pic>
+        </mc:Fallback>
+      </mc:AlternateContent>
+      <mc:AlternateContent xmlns:mc="http://schemas.openxmlformats.org/markup-compatibility/2006">
+        <mc:Choice xmlns:pslz="http://schemas.microsoft.com/office/powerpoint/2016/slidezoom" Requires="pslz">
+          <p:graphicFrame>
+            <p:nvGraphicFramePr>
+              <p:cNvPr id="6" name="슬라이드 확대/축소 5">
+                <a:extLst>
+                  <a:ext uri="{FF2B5EF4-FFF2-40B4-BE49-F238E27FC236}">
+                    <a16:creationId xmlns:a16="http://schemas.microsoft.com/office/drawing/2014/main" id="{CBA8C4E7-233E-71CC-52E3-C51F7996FA49}"/>
+                  </a:ext>
+                </a:extLst>
+              </p:cNvPr>
+              <p:cNvGraphicFramePr>
+                <a:graphicFrameLocks noChangeAspect="1"/>
+              </p:cNvGraphicFramePr>
+              <p:nvPr>
+                <p:extLst>
+                  <p:ext uri="{D42A27DB-BD31-4B8C-83A1-F6EECF244321}">
+                    <p14:modId xmlns:p14="http://schemas.microsoft.com/office/powerpoint/2010/main" val="585531493"/>
+                  </p:ext>
+                </p:extLst>
+              </p:nvPr>
+            </p:nvGraphicFramePr>
+            <p:xfrm>
+              <a:off x="6096000" y="3447255"/>
+              <a:ext cx="6096000" cy="3429000"/>
+            </p:xfrm>
+            <a:graphic>
+              <a:graphicData uri="http://schemas.microsoft.com/office/powerpoint/2016/slidezoom">
+                <pslz:sldZm>
+                  <pslz:sldZmObj sldId="293" cId="1363661584">
+                    <pslz:zmPr id="{34B19A3E-D23A-4CB2-B7BE-6C99D0540849}" returnToParent="0" transitionDur="1000">
+                      <p166:blipFill xmlns:p166="http://schemas.microsoft.com/office/powerpoint/2016/6/main">
+                        <a:blip r:embed="rId4"/>
+                        <a:stretch>
+                          <a:fillRect/>
+                        </a:stretch>
+                      </p166:blipFill>
+                      <p166:spPr xmlns:p166="http://schemas.microsoft.com/office/powerpoint/2016/6/main">
+                        <a:xfrm>
+                          <a:off x="0" y="0"/>
+                          <a:ext cx="6096000" cy="3429000"/>
+                        </a:xfrm>
+                        <a:prstGeom prst="rect">
+                          <a:avLst/>
+                        </a:prstGeom>
+                        <a:ln w="3175">
+                          <a:solidFill>
+                            <a:prstClr val="ltGray"/>
+                          </a:solidFill>
+                        </a:ln>
+                      </p166:spPr>
+                    </pslz:zmPr>
+                  </pslz:sldZmObj>
+                </pslz:sldZm>
+              </a:graphicData>
+            </a:graphic>
+          </p:graphicFrame>
+        </mc:Choice>
+        <mc:Fallback>
+          <p:pic>
+            <p:nvPicPr>
+              <p:cNvPr id="6" name="슬라이드 확대/축소 5">
+                <a:hlinkClick r:id="rId5" action="ppaction://hlinksldjump"/>
+                <a:extLst>
+                  <a:ext uri="{FF2B5EF4-FFF2-40B4-BE49-F238E27FC236}">
+                    <a16:creationId xmlns:a16="http://schemas.microsoft.com/office/drawing/2014/main" id="{CBA8C4E7-233E-71CC-52E3-C51F7996FA49}"/>
+                  </a:ext>
+                </a:extLst>
+              </p:cNvPr>
+              <p:cNvPicPr>
+                <a:picLocks noGrp="1" noRot="1" noChangeAspect="1" noMove="1" noResize="1" noEditPoints="1" noAdjustHandles="1" noChangeArrowheads="1" noChangeShapeType="1"/>
+              </p:cNvPicPr>
+              <p:nvPr/>
+            </p:nvPicPr>
+            <p:blipFill>
+              <a:blip r:embed="rId4"/>
+              <a:stretch>
+                <a:fillRect/>
+              </a:stretch>
+            </p:blipFill>
+            <p:spPr>
+              <a:xfrm>
+                <a:off x="6096000" y="3447255"/>
+                <a:ext cx="6096000" cy="3429000"/>
+              </a:xfrm>
+              <a:prstGeom prst="rect">
+                <a:avLst/>
+              </a:prstGeom>
+              <a:ln w="3175">
+                <a:solidFill>
+                  <a:prstClr val="ltGray"/>
+                </a:solidFill>
+              </a:ln>
+            </p:spPr>
+          </p:pic>
+        </mc:Fallback>
+      </mc:AlternateContent>
+      <p:pic>
+        <p:nvPicPr>
+          <p:cNvPr id="10" name="그림 9">
+            <a:extLst>
+              <a:ext uri="{FF2B5EF4-FFF2-40B4-BE49-F238E27FC236}">
+                <a16:creationId xmlns:a16="http://schemas.microsoft.com/office/drawing/2014/main" id="{7E9286D1-9FEE-14A0-64CD-1C8E0EE0D16A}"/>
+              </a:ext>
+            </a:extLst>
+          </p:cNvPr>
+          <p:cNvPicPr>
+            <a:picLocks noChangeAspect="1"/>
+          </p:cNvPicPr>
+          <p:nvPr/>
+        </p:nvPicPr>
+        <p:blipFill>
+          <a:blip r:embed="rId6"/>
+          <a:stretch>
+            <a:fillRect/>
+          </a:stretch>
+        </p:blipFill>
+        <p:spPr>
+          <a:xfrm>
+            <a:off x="109330" y="833075"/>
+            <a:ext cx="3419952" cy="5191850"/>
+          </a:xfrm>
+          <a:prstGeom prst="rect">
+            <a:avLst/>
+          </a:prstGeom>
+        </p:spPr>
+      </p:pic>
+      <p:pic>
+        <p:nvPicPr>
+          <p:cNvPr id="12" name="그림 11">
+            <a:extLst>
+              <a:ext uri="{FF2B5EF4-FFF2-40B4-BE49-F238E27FC236}">
+                <a16:creationId xmlns:a16="http://schemas.microsoft.com/office/drawing/2014/main" id="{249712BA-8426-9877-9D1C-EA1295DDFDF2}"/>
+              </a:ext>
+            </a:extLst>
+          </p:cNvPr>
+          <p:cNvPicPr>
+            <a:picLocks noChangeAspect="1"/>
+          </p:cNvPicPr>
+          <p:nvPr/>
+        </p:nvPicPr>
+        <p:blipFill>
+          <a:blip r:embed="rId7"/>
+          <a:stretch>
+            <a:fillRect/>
+          </a:stretch>
+        </p:blipFill>
+        <p:spPr>
+          <a:xfrm>
+            <a:off x="3529282" y="4611215"/>
+            <a:ext cx="2457793" cy="1810003"/>
+          </a:xfrm>
+          <a:prstGeom prst="rect">
+            <a:avLst/>
+          </a:prstGeom>
+        </p:spPr>
+      </p:pic>
+      <p:cxnSp>
+        <p:nvCxnSpPr>
+          <p:cNvPr id="13" name="직선 화살표 연결선 12">
+            <a:extLst>
+              <a:ext uri="{FF2B5EF4-FFF2-40B4-BE49-F238E27FC236}">
+                <a16:creationId xmlns:a16="http://schemas.microsoft.com/office/drawing/2014/main" id="{37BB68EC-A900-A4CE-09A5-3D917C69F50C}"/>
+              </a:ext>
+            </a:extLst>
+          </p:cNvPr>
+          <p:cNvCxnSpPr>
+            <a:cxnSpLocks/>
+          </p:cNvCxnSpPr>
+          <p:nvPr/>
+        </p:nvCxnSpPr>
+        <p:spPr>
+          <a:xfrm flipH="1">
+            <a:off x="2564296" y="4681330"/>
+            <a:ext cx="1073911" cy="0"/>
+          </a:xfrm>
+          <a:prstGeom prst="straightConnector1">
+            <a:avLst/>
+          </a:prstGeom>
+          <a:ln w="47625">
+            <a:solidFill>
+              <a:schemeClr val="bg1"/>
+            </a:solidFill>
+            <a:tailEnd type="triangle"/>
+          </a:ln>
+        </p:spPr>
+        <p:style>
+          <a:lnRef idx="2">
+            <a:schemeClr val="accent1"/>
+          </a:lnRef>
+          <a:fillRef idx="0">
+            <a:schemeClr val="accent1"/>
+          </a:fillRef>
+          <a:effectRef idx="1">
+            <a:schemeClr val="accent1"/>
+          </a:effectRef>
+          <a:fontRef idx="minor">
+            <a:schemeClr val="tx1"/>
+          </a:fontRef>
+        </p:style>
+      </p:cxnSp>
+      <p:sp>
+        <p:nvSpPr>
+          <p:cNvPr id="18" name="TextBox 17">
+            <a:extLst>
+              <a:ext uri="{FF2B5EF4-FFF2-40B4-BE49-F238E27FC236}">
+                <a16:creationId xmlns:a16="http://schemas.microsoft.com/office/drawing/2014/main" id="{EA6C37AF-2D69-ED92-477E-694A609CD9D3}"/>
+              </a:ext>
+            </a:extLst>
+          </p:cNvPr>
+          <p:cNvSpPr txBox="1"/>
+          <p:nvPr/>
+        </p:nvSpPr>
+        <p:spPr>
+          <a:xfrm>
+            <a:off x="3529282" y="2871328"/>
+            <a:ext cx="2449710" cy="1600438"/>
+          </a:xfrm>
+          <a:prstGeom prst="rect">
+            <a:avLst/>
+          </a:prstGeom>
+          <a:noFill/>
+        </p:spPr>
+        <p:txBody>
+          <a:bodyPr wrap="none" rtlCol="0">
+            <a:spAutoFit/>
+          </a:bodyPr>
+          <a:lstStyle/>
+          <a:p>
+            <a:r>
+              <a:rPr lang="en-US" altLang="ko-KR" sz="1400"/>
+              <a:t>ParamData</a:t>
+            </a:r>
+            <a:r>
+              <a:rPr lang="ko-KR" altLang="en-US" sz="1400"/>
+              <a:t>에 </a:t>
+            </a:r>
+            <a:endParaRPr lang="en-US" altLang="ko-KR" sz="1400"/>
+          </a:p>
+          <a:p>
+            <a:r>
+              <a:rPr lang="ko-KR" altLang="en-US" sz="1400"/>
+              <a:t>다양한 </a:t>
+            </a:r>
+            <a:r>
+              <a:rPr lang="en-US" altLang="ko-KR" sz="1400"/>
+              <a:t>UI</a:t>
+            </a:r>
+            <a:r>
+              <a:rPr lang="ko-KR" altLang="en-US" sz="1400"/>
+              <a:t>의 </a:t>
+            </a:r>
+            <a:r>
+              <a:rPr lang="en-US" altLang="ko-KR" sz="1400"/>
+              <a:t>Param</a:t>
+            </a:r>
+            <a:r>
+              <a:rPr lang="ko-KR" altLang="en-US" sz="1400"/>
+              <a:t>을 넣어</a:t>
+            </a:r>
+            <a:endParaRPr lang="en-US" altLang="ko-KR" sz="1400"/>
+          </a:p>
+          <a:p>
+            <a:r>
+              <a:rPr lang="ko-KR" altLang="en-US" sz="1400"/>
+              <a:t>여러 모습으로 만들 수 있다</a:t>
+            </a:r>
+            <a:r>
+              <a:rPr lang="en-US" altLang="ko-KR" sz="1400"/>
+              <a:t>.</a:t>
+            </a:r>
+          </a:p>
+          <a:p>
+            <a:r>
+              <a:rPr lang="en-US" altLang="ko-KR" sz="1400"/>
+              <a:t>Render, Update, Event</a:t>
+            </a:r>
+            <a:r>
+              <a:rPr lang="ko-KR" altLang="en-US" sz="1400"/>
+              <a:t>를 </a:t>
+            </a:r>
+            <a:endParaRPr lang="en-US" altLang="ko-KR" sz="1400"/>
+          </a:p>
+          <a:p>
+            <a:r>
+              <a:rPr lang="ko-KR" altLang="en-US" sz="1400"/>
+              <a:t>수행하는 함수포인터를 </a:t>
+            </a:r>
+            <a:endParaRPr lang="en-US" altLang="ko-KR" sz="1400"/>
+          </a:p>
+          <a:p>
+            <a:r>
+              <a:rPr lang="ko-KR" altLang="en-US" sz="1400"/>
+              <a:t>커스텀으로 만들어서 넣을 </a:t>
+            </a:r>
+            <a:endParaRPr lang="en-US" altLang="ko-KR" sz="1400"/>
+          </a:p>
+          <a:p>
+            <a:r>
+              <a:rPr lang="ko-KR" altLang="en-US" sz="1400"/>
+              <a:t>수 있다</a:t>
+            </a:r>
+            <a:r>
+              <a:rPr lang="en-US" altLang="ko-KR" sz="1400"/>
+              <a:t>.</a:t>
+            </a:r>
+          </a:p>
+        </p:txBody>
+      </p:sp>
+    </p:spTree>
+    <p:extLst>
+      <p:ext uri="{BB962C8B-B14F-4D97-AF65-F5344CB8AC3E}">
+        <p14:creationId xmlns:p14="http://schemas.microsoft.com/office/powerpoint/2010/main" val="1776988636"/>
+      </p:ext>
+    </p:extLst>
+  </p:cSld>
+  <p:clrMapOvr>
+    <a:masterClrMapping/>
+  </p:clrMapOvr>
+</p:sld>
+</file>
+
+<file path=ppt/slides/slide26.xml><?xml version="1.0" encoding="utf-8"?>
+<p:sld xmlns:a="http://schemas.openxmlformats.org/drawingml/2006/main" xmlns:r="http://schemas.openxmlformats.org/officeDocument/2006/relationships" xmlns:p="http://schemas.openxmlformats.org/presentationml/2006/main">
+  <p:cSld>
+    <p:spTree>
+      <p:nvGrpSpPr>
+        <p:cNvPr id="1" name="">
+          <a:extLst>
+            <a:ext uri="{FF2B5EF4-FFF2-40B4-BE49-F238E27FC236}">
+              <a16:creationId xmlns:a16="http://schemas.microsoft.com/office/drawing/2014/main" id="{79DB0599-0182-417D-62CA-B4873EA962C0}"/>
+            </a:ext>
+          </a:extLst>
+        </p:cNvPr>
+        <p:cNvGrpSpPr/>
+        <p:nvPr/>
+      </p:nvGrpSpPr>
+      <p:grpSpPr>
+        <a:xfrm>
+          <a:off x="0" y="0"/>
+          <a:ext cx="0" cy="0"/>
+          <a:chOff x="0" y="0"/>
+          <a:chExt cx="0" cy="0"/>
+        </a:xfrm>
+      </p:grpSpPr>
+      <p:sp>
+        <p:nvSpPr>
+          <p:cNvPr id="8" name="제목 1">
+            <a:extLst>
+              <a:ext uri="{FF2B5EF4-FFF2-40B4-BE49-F238E27FC236}">
+                <a16:creationId xmlns:a16="http://schemas.microsoft.com/office/drawing/2014/main" id="{2EB0A81F-3370-D5A4-57D9-EA3CCDB0DCE1}"/>
+              </a:ext>
+            </a:extLst>
+          </p:cNvPr>
+          <p:cNvSpPr txBox="1">
+            <a:spLocks/>
+          </p:cNvSpPr>
+          <p:nvPr/>
+        </p:nvSpPr>
+        <p:spPr>
+          <a:xfrm>
+            <a:off x="0" y="18255"/>
+            <a:ext cx="10515600" cy="850425"/>
+          </a:xfrm>
+          <a:prstGeom prst="rect">
+            <a:avLst/>
+          </a:prstGeom>
+        </p:spPr>
+        <p:txBody>
+          <a:bodyPr vert="horz" lIns="91440" tIns="45720" rIns="91440" bIns="45720" rtlCol="0" anchor="ctr">
+            <a:normAutofit/>
+          </a:bodyPr>
+          <a:lstStyle>
+            <a:lvl1pPr algn="l" defTabSz="914400" rtl="0" eaLnBrk="1" latinLnBrk="1" hangingPunct="1">
+              <a:lnSpc>
+                <a:spcPct val="90000"/>
+              </a:lnSpc>
+              <a:spcBef>
+                <a:spcPct val="0"/>
+              </a:spcBef>
+              <a:buNone/>
+              <a:defRPr sz="4400" kern="1200">
+                <a:solidFill>
+                  <a:schemeClr val="tx1"/>
+                </a:solidFill>
+                <a:latin typeface="+mj-lt"/>
+                <a:ea typeface="+mj-ea"/>
+                <a:cs typeface="+mj-cs"/>
+              </a:defRPr>
+            </a:lvl1pPr>
+          </a:lstStyle>
+          <a:p>
+            <a:r>
+              <a:rPr lang="en-US" altLang="ko-KR" sz="5400"/>
+              <a:t>UI Render</a:t>
+            </a:r>
+            <a:endParaRPr lang="ko-KR" altLang="en-US" sz="5400" dirty="0"/>
+          </a:p>
+        </p:txBody>
+      </p:sp>
+      <p:sp>
+        <p:nvSpPr>
+          <p:cNvPr id="9" name="TextBox 8">
+            <a:extLst>
+              <a:ext uri="{FF2B5EF4-FFF2-40B4-BE49-F238E27FC236}">
+                <a16:creationId xmlns:a16="http://schemas.microsoft.com/office/drawing/2014/main" id="{5740E91D-3B92-2868-CCC3-0EA5EC4BF8DA}"/>
+              </a:ext>
+            </a:extLst>
+          </p:cNvPr>
+          <p:cNvSpPr txBox="1"/>
+          <p:nvPr/>
+        </p:nvSpPr>
+        <p:spPr>
+          <a:xfrm>
+            <a:off x="110221" y="868680"/>
+            <a:ext cx="5078634" cy="738664"/>
+          </a:xfrm>
+          <a:prstGeom prst="rect">
+            <a:avLst/>
+          </a:prstGeom>
+          <a:noFill/>
+        </p:spPr>
+        <p:txBody>
+          <a:bodyPr wrap="none" rtlCol="0">
+            <a:spAutoFit/>
+          </a:bodyPr>
+          <a:lstStyle/>
+          <a:p>
+            <a:r>
+              <a:rPr lang="en-US" altLang="ko-KR" sz="1400"/>
+              <a:t>UI Rendering</a:t>
+            </a:r>
+            <a:r>
+              <a:rPr lang="ko-KR" altLang="en-US" sz="1400"/>
+              <a:t> 다음과 같은 </a:t>
+            </a:r>
+            <a:r>
+              <a:rPr lang="en-US" altLang="ko-KR" sz="1400"/>
+              <a:t>4</a:t>
+            </a:r>
+            <a:r>
+              <a:rPr lang="ko-KR" altLang="en-US" sz="1400"/>
+              <a:t>가지 셰이더로 나누어진다</a:t>
+            </a:r>
+            <a:r>
+              <a:rPr lang="en-US" altLang="ko-KR" sz="1400"/>
+              <a:t>.</a:t>
+            </a:r>
+          </a:p>
+          <a:p>
+            <a:r>
+              <a:rPr lang="en-US" altLang="ko-KR" sz="1400"/>
+              <a:t>4</a:t>
+            </a:r>
+            <a:r>
+              <a:rPr lang="ko-KR" altLang="en-US" sz="1400"/>
+              <a:t>개의 셰이더 모두 인스턴싱을 통해 렌더링을 수행한다</a:t>
+            </a:r>
+            <a:r>
+              <a:rPr lang="en-US" altLang="ko-KR" sz="1400"/>
+              <a:t>.</a:t>
+            </a:r>
+          </a:p>
+          <a:p>
+            <a:r>
+              <a:rPr lang="ko-KR" altLang="en-US" sz="1400"/>
+              <a:t>때문에 매 프레임마다 인스턴스들의 데이터를 </a:t>
+            </a:r>
+            <a:r>
+              <a:rPr lang="en-US" altLang="ko-KR" sz="1400"/>
+              <a:t>Push</a:t>
+            </a:r>
+            <a:r>
+              <a:rPr lang="ko-KR" altLang="en-US" sz="1400"/>
+              <a:t>할 것이다</a:t>
+            </a:r>
+            <a:r>
+              <a:rPr lang="en-US" altLang="ko-KR" sz="1400"/>
+              <a:t>.</a:t>
+            </a:r>
+          </a:p>
+        </p:txBody>
+      </p:sp>
+      <p:graphicFrame>
+        <p:nvGraphicFramePr>
+          <p:cNvPr id="10" name="표 9">
+            <a:extLst>
+              <a:ext uri="{FF2B5EF4-FFF2-40B4-BE49-F238E27FC236}">
+                <a16:creationId xmlns:a16="http://schemas.microsoft.com/office/drawing/2014/main" id="{4F8F01E5-0345-7302-8798-A9F1E519EBEB}"/>
+              </a:ext>
+            </a:extLst>
+          </p:cNvPr>
+          <p:cNvGraphicFramePr>
+            <a:graphicFrameLocks noGrp="1"/>
+          </p:cNvGraphicFramePr>
+          <p:nvPr>
+            <p:extLst>
+              <p:ext uri="{D42A27DB-BD31-4B8C-83A1-F6EECF244321}">
+                <p14:modId xmlns:p14="http://schemas.microsoft.com/office/powerpoint/2010/main" val="758152255"/>
+              </p:ext>
+            </p:extLst>
+          </p:nvPr>
+        </p:nvGraphicFramePr>
+        <p:xfrm>
+          <a:off x="183322" y="1719104"/>
+          <a:ext cx="7121939" cy="4711513"/>
+        </p:xfrm>
+        <a:graphic>
+          <a:graphicData uri="http://schemas.openxmlformats.org/drawingml/2006/table">
+            <a:tbl>
+              <a:tblPr firstRow="1" bandRow="1">
+                <a:tableStyleId>{5C22544A-7EE6-4342-B048-85BDC9FD1C3A}</a:tableStyleId>
+              </a:tblPr>
+              <a:tblGrid>
+                <a:gridCol w="1633222">
+                  <a:extLst>
+                    <a:ext uri="{9D8B030D-6E8A-4147-A177-3AD203B41FA5}">
+                      <a16:colId xmlns:a16="http://schemas.microsoft.com/office/drawing/2014/main" val="874733780"/>
+                    </a:ext>
+                  </a:extLst>
+                </a:gridCol>
+                <a:gridCol w="2735578">
+                  <a:extLst>
+                    <a:ext uri="{9D8B030D-6E8A-4147-A177-3AD203B41FA5}">
+                      <a16:colId xmlns:a16="http://schemas.microsoft.com/office/drawing/2014/main" val="395432226"/>
+                    </a:ext>
+                  </a:extLst>
+                </a:gridCol>
+                <a:gridCol w="2753139">
+                  <a:extLst>
+                    <a:ext uri="{9D8B030D-6E8A-4147-A177-3AD203B41FA5}">
+                      <a16:colId xmlns:a16="http://schemas.microsoft.com/office/drawing/2014/main" val="722743406"/>
+                    </a:ext>
+                  </a:extLst>
+                </a:gridCol>
+              </a:tblGrid>
+              <a:tr h="854069">
+                <a:tc>
+                  <a:txBody>
+                    <a:bodyPr/>
+                    <a:lstStyle/>
+                    <a:p>
+                      <a:pPr latinLnBrk="1"/>
+                      <a:endParaRPr lang="ko-KR" altLang="en-US" b="0">
+                        <a:solidFill>
+                          <a:schemeClr val="tx1"/>
+                        </a:solidFill>
+                      </a:endParaRPr>
+                    </a:p>
+                  </a:txBody>
+                  <a:tcPr>
+                    <a:lnL w="12700" cap="flat" cmpd="sng" algn="ctr">
+                      <a:solidFill>
+                        <a:schemeClr val="tx1"/>
+                      </a:solidFill>
+                      <a:prstDash val="solid"/>
+                      <a:round/>
+                      <a:headEnd type="none" w="med" len="med"/>
+                      <a:tailEnd type="none" w="med" len="med"/>
+                    </a:lnL>
+                    <a:lnR w="12700" cap="flat" cmpd="sng" algn="ctr">
+                      <a:solidFill>
+                        <a:schemeClr val="tx1"/>
+                      </a:solidFill>
+                      <a:prstDash val="solid"/>
+                      <a:round/>
+                      <a:headEnd type="none" w="med" len="med"/>
+                      <a:tailEnd type="none" w="med" len="med"/>
+                    </a:lnR>
+                    <a:lnT w="12700" cap="flat" cmpd="sng" algn="ctr">
+                      <a:solidFill>
+                        <a:schemeClr val="tx1"/>
+                      </a:solidFill>
+                      <a:prstDash val="solid"/>
+                      <a:round/>
+                      <a:headEnd type="none" w="med" len="med"/>
+                      <a:tailEnd type="none" w="med" len="med"/>
+                    </a:lnT>
+                    <a:lnB w="12700" cap="flat" cmpd="sng" algn="ctr">
+                      <a:solidFill>
+                        <a:schemeClr val="tx1"/>
+                      </a:solidFill>
+                      <a:prstDash val="solid"/>
+                      <a:round/>
+                      <a:headEnd type="none" w="med" len="med"/>
+                      <a:tailEnd type="none" w="med" len="med"/>
+                    </a:lnB>
+                    <a:lnTlToBr w="12700" cmpd="sng">
+                      <a:noFill/>
+                      <a:prstDash val="solid"/>
+                    </a:lnTlToBr>
+                    <a:lnBlToTr w="12700" cmpd="sng">
+                      <a:noFill/>
+                      <a:prstDash val="solid"/>
+                    </a:lnBlToTr>
+                    <a:noFill/>
+                  </a:tcPr>
+                </a:tc>
+                <a:tc>
+                  <a:txBody>
+                    <a:bodyPr/>
+                    <a:lstStyle/>
+                    <a:p>
+                      <a:pPr latinLnBrk="1"/>
+                      <a:r>
+                        <a:rPr lang="en-US" altLang="ko-KR" b="0">
+                          <a:solidFill>
+                            <a:schemeClr val="tx1"/>
+                          </a:solidFill>
+                        </a:rPr>
+                        <a:t>TEXT</a:t>
+                      </a:r>
+                      <a:endParaRPr lang="ko-KR" altLang="en-US" b="0">
+                        <a:solidFill>
+                          <a:schemeClr val="tx1"/>
+                        </a:solidFill>
+                      </a:endParaRPr>
+                    </a:p>
+                  </a:txBody>
+                  <a:tcPr>
+                    <a:lnL w="12700" cap="flat" cmpd="sng" algn="ctr">
+                      <a:solidFill>
+                        <a:schemeClr val="tx1"/>
+                      </a:solidFill>
+                      <a:prstDash val="solid"/>
+                      <a:round/>
+                      <a:headEnd type="none" w="med" len="med"/>
+                      <a:tailEnd type="none" w="med" len="med"/>
+                    </a:lnL>
+                    <a:lnR w="12700" cap="flat" cmpd="sng" algn="ctr">
+                      <a:solidFill>
+                        <a:schemeClr val="tx1"/>
+                      </a:solidFill>
+                      <a:prstDash val="solid"/>
+                      <a:round/>
+                      <a:headEnd type="none" w="med" len="med"/>
+                      <a:tailEnd type="none" w="med" len="med"/>
+                    </a:lnR>
+                    <a:lnT w="12700" cap="flat" cmpd="sng" algn="ctr">
+                      <a:solidFill>
+                        <a:schemeClr val="tx1"/>
+                      </a:solidFill>
+                      <a:prstDash val="solid"/>
+                      <a:round/>
+                      <a:headEnd type="none" w="med" len="med"/>
+                      <a:tailEnd type="none" w="med" len="med"/>
+                    </a:lnT>
+                    <a:lnB w="12700" cap="flat" cmpd="sng" algn="ctr">
+                      <a:solidFill>
+                        <a:schemeClr val="tx1"/>
+                      </a:solidFill>
+                      <a:prstDash val="solid"/>
+                      <a:round/>
+                      <a:headEnd type="none" w="med" len="med"/>
+                      <a:tailEnd type="none" w="med" len="med"/>
+                    </a:lnB>
+                    <a:lnTlToBr w="12700" cmpd="sng">
+                      <a:noFill/>
+                      <a:prstDash val="solid"/>
+                    </a:lnTlToBr>
+                    <a:lnBlToTr w="12700" cmpd="sng">
+                      <a:noFill/>
+                      <a:prstDash val="solid"/>
+                    </a:lnBlToTr>
+                    <a:noFill/>
+                  </a:tcPr>
+                </a:tc>
+                <a:tc>
+                  <a:txBody>
+                    <a:bodyPr/>
+                    <a:lstStyle/>
+                    <a:p>
+                      <a:pPr latinLnBrk="1"/>
+                      <a:r>
+                        <a:rPr lang="en-US" altLang="ko-KR" b="0">
+                          <a:solidFill>
+                            <a:schemeClr val="tx1"/>
+                          </a:solidFill>
+                        </a:rPr>
+                        <a:t>TEXTURE</a:t>
+                      </a:r>
+                      <a:endParaRPr lang="ko-KR" altLang="en-US" b="0">
+                        <a:solidFill>
+                          <a:schemeClr val="tx1"/>
+                        </a:solidFill>
+                      </a:endParaRPr>
+                    </a:p>
+                  </a:txBody>
+                  <a:tcPr>
+                    <a:lnL w="12700" cap="flat" cmpd="sng" algn="ctr">
+                      <a:solidFill>
+                        <a:schemeClr val="tx1"/>
+                      </a:solidFill>
+                      <a:prstDash val="solid"/>
+                      <a:round/>
+                      <a:headEnd type="none" w="med" len="med"/>
+                      <a:tailEnd type="none" w="med" len="med"/>
+                    </a:lnL>
+                    <a:lnR w="12700" cap="flat" cmpd="sng" algn="ctr">
+                      <a:solidFill>
+                        <a:schemeClr val="tx1"/>
+                      </a:solidFill>
+                      <a:prstDash val="solid"/>
+                      <a:round/>
+                      <a:headEnd type="none" w="med" len="med"/>
+                      <a:tailEnd type="none" w="med" len="med"/>
+                    </a:lnR>
+                    <a:lnT w="12700" cap="flat" cmpd="sng" algn="ctr">
+                      <a:solidFill>
+                        <a:schemeClr val="tx1"/>
+                      </a:solidFill>
+                      <a:prstDash val="solid"/>
+                      <a:round/>
+                      <a:headEnd type="none" w="med" len="med"/>
+                      <a:tailEnd type="none" w="med" len="med"/>
+                    </a:lnT>
+                    <a:lnB w="12700" cap="flat" cmpd="sng" algn="ctr">
+                      <a:solidFill>
+                        <a:schemeClr val="tx1"/>
+                      </a:solidFill>
+                      <a:prstDash val="solid"/>
+                      <a:round/>
+                      <a:headEnd type="none" w="med" len="med"/>
+                      <a:tailEnd type="none" w="med" len="med"/>
+                    </a:lnB>
+                    <a:lnTlToBr w="12700" cmpd="sng">
+                      <a:noFill/>
+                      <a:prstDash val="solid"/>
+                    </a:lnTlToBr>
+                    <a:lnBlToTr w="12700" cmpd="sng">
+                      <a:noFill/>
+                      <a:prstDash val="solid"/>
+                    </a:lnBlToTr>
+                    <a:noFill/>
+                  </a:tcPr>
+                </a:tc>
+                <a:extLst>
+                  <a:ext uri="{0D108BD9-81ED-4DB2-BD59-A6C34878D82A}">
+                    <a16:rowId xmlns:a16="http://schemas.microsoft.com/office/drawing/2014/main" val="3415633731"/>
+                  </a:ext>
+                </a:extLst>
+              </a:tr>
+              <a:tr h="1928722">
+                <a:tc>
+                  <a:txBody>
+                    <a:bodyPr/>
+                    <a:lstStyle/>
+                    <a:p>
+                      <a:pPr latinLnBrk="1"/>
+                      <a:r>
+                        <a:rPr lang="en-US" altLang="ko-KR">
+                          <a:solidFill>
+                            <a:schemeClr val="tx1"/>
+                          </a:solidFill>
+                        </a:rPr>
+                        <a:t>Normal Render</a:t>
+                      </a:r>
+                      <a:endParaRPr lang="ko-KR" altLang="en-US">
+                        <a:solidFill>
+                          <a:schemeClr val="tx1"/>
+                        </a:solidFill>
+                      </a:endParaRPr>
+                    </a:p>
+                  </a:txBody>
+                  <a:tcPr>
+                    <a:lnL w="12700" cap="flat" cmpd="sng" algn="ctr">
+                      <a:solidFill>
+                        <a:schemeClr val="tx1"/>
+                      </a:solidFill>
+                      <a:prstDash val="solid"/>
+                      <a:round/>
+                      <a:headEnd type="none" w="med" len="med"/>
+                      <a:tailEnd type="none" w="med" len="med"/>
+                    </a:lnL>
+                    <a:lnR w="12700" cap="flat" cmpd="sng" algn="ctr">
+                      <a:solidFill>
+                        <a:schemeClr val="tx1"/>
+                      </a:solidFill>
+                      <a:prstDash val="solid"/>
+                      <a:round/>
+                      <a:headEnd type="none" w="med" len="med"/>
+                      <a:tailEnd type="none" w="med" len="med"/>
+                    </a:lnR>
+                    <a:lnT w="12700" cap="flat" cmpd="sng" algn="ctr">
+                      <a:solidFill>
+                        <a:schemeClr val="tx1"/>
+                      </a:solidFill>
+                      <a:prstDash val="solid"/>
+                      <a:round/>
+                      <a:headEnd type="none" w="med" len="med"/>
+                      <a:tailEnd type="none" w="med" len="med"/>
+                    </a:lnT>
+                    <a:lnB w="12700" cap="flat" cmpd="sng" algn="ctr">
+                      <a:solidFill>
+                        <a:schemeClr val="tx1"/>
+                      </a:solidFill>
+                      <a:prstDash val="solid"/>
+                      <a:round/>
+                      <a:headEnd type="none" w="med" len="med"/>
+                      <a:tailEnd type="none" w="med" len="med"/>
+                    </a:lnB>
+                    <a:lnTlToBr w="12700" cmpd="sng">
+                      <a:noFill/>
+                      <a:prstDash val="solid"/>
+                    </a:lnTlToBr>
+                    <a:lnBlToTr w="12700" cmpd="sng">
+                      <a:noFill/>
+                      <a:prstDash val="solid"/>
+                    </a:lnBlToTr>
+                    <a:noFill/>
+                  </a:tcPr>
+                </a:tc>
+                <a:tc>
+                  <a:txBody>
+                    <a:bodyPr/>
+                    <a:lstStyle/>
+                    <a:p>
+                      <a:pPr latinLnBrk="1"/>
+                      <a:r>
+                        <a:rPr lang="en-US" altLang="ko-KR">
+                          <a:solidFill>
+                            <a:schemeClr val="tx1"/>
+                          </a:solidFill>
+                        </a:rPr>
+                        <a:t>SDF Text-NormalRendering</a:t>
+                      </a:r>
+                      <a:endParaRPr lang="ko-KR" altLang="en-US">
+                        <a:solidFill>
+                          <a:schemeClr val="tx1"/>
+                        </a:solidFill>
+                      </a:endParaRPr>
+                    </a:p>
+                  </a:txBody>
+                  <a:tcPr>
+                    <a:lnL w="12700" cap="flat" cmpd="sng" algn="ctr">
+                      <a:solidFill>
+                        <a:schemeClr val="tx1"/>
+                      </a:solidFill>
+                      <a:prstDash val="solid"/>
+                      <a:round/>
+                      <a:headEnd type="none" w="med" len="med"/>
+                      <a:tailEnd type="none" w="med" len="med"/>
+                    </a:lnL>
+                    <a:lnR w="12700" cap="flat" cmpd="sng" algn="ctr">
+                      <a:solidFill>
+                        <a:schemeClr val="tx1"/>
+                      </a:solidFill>
+                      <a:prstDash val="solid"/>
+                      <a:round/>
+                      <a:headEnd type="none" w="med" len="med"/>
+                      <a:tailEnd type="none" w="med" len="med"/>
+                    </a:lnR>
+                    <a:lnT w="12700" cap="flat" cmpd="sng" algn="ctr">
+                      <a:solidFill>
+                        <a:schemeClr val="tx1"/>
+                      </a:solidFill>
+                      <a:prstDash val="solid"/>
+                      <a:round/>
+                      <a:headEnd type="none" w="med" len="med"/>
+                      <a:tailEnd type="none" w="med" len="med"/>
+                    </a:lnT>
+                    <a:lnB w="12700" cap="flat" cmpd="sng" algn="ctr">
+                      <a:solidFill>
+                        <a:schemeClr val="tx1"/>
+                      </a:solidFill>
+                      <a:prstDash val="solid"/>
+                      <a:round/>
+                      <a:headEnd type="none" w="med" len="med"/>
+                      <a:tailEnd type="none" w="med" len="med"/>
+                    </a:lnB>
+                    <a:lnTlToBr w="12700" cmpd="sng">
+                      <a:noFill/>
+                      <a:prstDash val="solid"/>
+                    </a:lnTlToBr>
+                    <a:lnBlToTr w="12700" cmpd="sng">
+                      <a:noFill/>
+                      <a:prstDash val="solid"/>
+                    </a:lnBlToTr>
+                    <a:noFill/>
+                  </a:tcPr>
+                </a:tc>
+                <a:tc>
+                  <a:txBody>
+                    <a:bodyPr/>
+                    <a:lstStyle/>
+                    <a:p>
+                      <a:pPr latinLnBrk="1"/>
+                      <a:r>
+                        <a:rPr lang="en-US" altLang="ko-KR">
+                          <a:solidFill>
+                            <a:schemeClr val="tx1"/>
+                          </a:solidFill>
+                        </a:rPr>
+                        <a:t>Diffuse Screen Render</a:t>
+                      </a:r>
+                      <a:endParaRPr lang="ko-KR" altLang="en-US">
+                        <a:solidFill>
+                          <a:schemeClr val="tx1"/>
+                        </a:solidFill>
+                      </a:endParaRPr>
+                    </a:p>
+                  </a:txBody>
+                  <a:tcPr>
+                    <a:lnL w="12700" cap="flat" cmpd="sng" algn="ctr">
+                      <a:solidFill>
+                        <a:schemeClr val="tx1"/>
+                      </a:solidFill>
+                      <a:prstDash val="solid"/>
+                      <a:round/>
+                      <a:headEnd type="none" w="med" len="med"/>
+                      <a:tailEnd type="none" w="med" len="med"/>
+                    </a:lnL>
+                    <a:lnR w="12700" cap="flat" cmpd="sng" algn="ctr">
+                      <a:solidFill>
+                        <a:schemeClr val="tx1"/>
+                      </a:solidFill>
+                      <a:prstDash val="solid"/>
+                      <a:round/>
+                      <a:headEnd type="none" w="med" len="med"/>
+                      <a:tailEnd type="none" w="med" len="med"/>
+                    </a:lnR>
+                    <a:lnT w="12700" cap="flat" cmpd="sng" algn="ctr">
+                      <a:solidFill>
+                        <a:schemeClr val="tx1"/>
+                      </a:solidFill>
+                      <a:prstDash val="solid"/>
+                      <a:round/>
+                      <a:headEnd type="none" w="med" len="med"/>
+                      <a:tailEnd type="none" w="med" len="med"/>
+                    </a:lnT>
+                    <a:lnB w="12700" cap="flat" cmpd="sng" algn="ctr">
+                      <a:solidFill>
+                        <a:schemeClr val="tx1"/>
+                      </a:solidFill>
+                      <a:prstDash val="solid"/>
+                      <a:round/>
+                      <a:headEnd type="none" w="med" len="med"/>
+                      <a:tailEnd type="none" w="med" len="med"/>
+                    </a:lnB>
+                    <a:lnTlToBr w="12700" cmpd="sng">
+                      <a:noFill/>
+                      <a:prstDash val="solid"/>
+                    </a:lnTlToBr>
+                    <a:lnBlToTr w="12700" cmpd="sng">
+                      <a:noFill/>
+                      <a:prstDash val="solid"/>
+                    </a:lnBlToTr>
+                    <a:noFill/>
+                  </a:tcPr>
+                </a:tc>
+                <a:extLst>
+                  <a:ext uri="{0D108BD9-81ED-4DB2-BD59-A6C34878D82A}">
+                    <a16:rowId xmlns:a16="http://schemas.microsoft.com/office/drawing/2014/main" val="2487918053"/>
+                  </a:ext>
+                </a:extLst>
+              </a:tr>
+              <a:tr h="1928722">
+                <a:tc>
+                  <a:txBody>
+                    <a:bodyPr/>
+                    <a:lstStyle/>
+                    <a:p>
+                      <a:pPr latinLnBrk="1"/>
+                      <a:r>
+                        <a:rPr lang="en-US" altLang="ko-KR">
+                          <a:solidFill>
+                            <a:schemeClr val="tx1"/>
+                          </a:solidFill>
+                        </a:rPr>
+                        <a:t>Effect</a:t>
+                      </a:r>
+                      <a:endParaRPr lang="ko-KR" altLang="en-US">
+                        <a:solidFill>
+                          <a:schemeClr val="tx1"/>
+                        </a:solidFill>
+                      </a:endParaRPr>
+                    </a:p>
+                  </a:txBody>
+                  <a:tcPr>
+                    <a:lnL w="12700" cap="flat" cmpd="sng" algn="ctr">
+                      <a:solidFill>
+                        <a:schemeClr val="tx1"/>
+                      </a:solidFill>
+                      <a:prstDash val="solid"/>
+                      <a:round/>
+                      <a:headEnd type="none" w="med" len="med"/>
+                      <a:tailEnd type="none" w="med" len="med"/>
+                    </a:lnL>
+                    <a:lnR w="12700" cap="flat" cmpd="sng" algn="ctr">
+                      <a:solidFill>
+                        <a:schemeClr val="tx1"/>
+                      </a:solidFill>
+                      <a:prstDash val="solid"/>
+                      <a:round/>
+                      <a:headEnd type="none" w="med" len="med"/>
+                      <a:tailEnd type="none" w="med" len="med"/>
+                    </a:lnR>
+                    <a:lnT w="12700" cap="flat" cmpd="sng" algn="ctr">
+                      <a:solidFill>
+                        <a:schemeClr val="tx1"/>
+                      </a:solidFill>
+                      <a:prstDash val="solid"/>
+                      <a:round/>
+                      <a:headEnd type="none" w="med" len="med"/>
+                      <a:tailEnd type="none" w="med" len="med"/>
+                    </a:lnT>
+                    <a:lnB w="12700" cap="flat" cmpd="sng" algn="ctr">
+                      <a:solidFill>
+                        <a:schemeClr val="tx1"/>
+                      </a:solidFill>
+                      <a:prstDash val="solid"/>
+                      <a:round/>
+                      <a:headEnd type="none" w="med" len="med"/>
+                      <a:tailEnd type="none" w="med" len="med"/>
+                    </a:lnB>
+                    <a:lnTlToBr w="12700" cmpd="sng">
+                      <a:noFill/>
+                      <a:prstDash val="solid"/>
+                    </a:lnTlToBr>
+                    <a:lnBlToTr w="12700" cmpd="sng">
+                      <a:noFill/>
+                      <a:prstDash val="solid"/>
+                    </a:lnBlToTr>
+                    <a:noFill/>
+                  </a:tcPr>
+                </a:tc>
+                <a:tc>
+                  <a:txBody>
+                    <a:bodyPr/>
+                    <a:lstStyle/>
+                    <a:p>
+                      <a:pPr latinLnBrk="1"/>
+                      <a:r>
+                        <a:rPr lang="en-US" altLang="ko-KR">
+                          <a:solidFill>
+                            <a:schemeClr val="tx1"/>
+                          </a:solidFill>
+                        </a:rPr>
+                        <a:t>SDF Effect Text Rendering</a:t>
+                      </a:r>
+                      <a:endParaRPr lang="ko-KR" altLang="en-US">
+                        <a:solidFill>
+                          <a:schemeClr val="tx1"/>
+                        </a:solidFill>
+                      </a:endParaRPr>
+                    </a:p>
+                  </a:txBody>
+                  <a:tcPr>
+                    <a:lnL w="12700" cap="flat" cmpd="sng" algn="ctr">
+                      <a:solidFill>
+                        <a:schemeClr val="tx1"/>
+                      </a:solidFill>
+                      <a:prstDash val="solid"/>
+                      <a:round/>
+                      <a:headEnd type="none" w="med" len="med"/>
+                      <a:tailEnd type="none" w="med" len="med"/>
+                    </a:lnL>
+                    <a:lnR w="12700" cap="flat" cmpd="sng" algn="ctr">
+                      <a:solidFill>
+                        <a:schemeClr val="tx1"/>
+                      </a:solidFill>
+                      <a:prstDash val="solid"/>
+                      <a:round/>
+                      <a:headEnd type="none" w="med" len="med"/>
+                      <a:tailEnd type="none" w="med" len="med"/>
+                    </a:lnR>
+                    <a:lnT w="12700" cap="flat" cmpd="sng" algn="ctr">
+                      <a:solidFill>
+                        <a:schemeClr val="tx1"/>
+                      </a:solidFill>
+                      <a:prstDash val="solid"/>
+                      <a:round/>
+                      <a:headEnd type="none" w="med" len="med"/>
+                      <a:tailEnd type="none" w="med" len="med"/>
+                    </a:lnT>
+                    <a:lnB w="12700" cap="flat" cmpd="sng" algn="ctr">
+                      <a:solidFill>
+                        <a:schemeClr val="tx1"/>
+                      </a:solidFill>
+                      <a:prstDash val="solid"/>
+                      <a:round/>
+                      <a:headEnd type="none" w="med" len="med"/>
+                      <a:tailEnd type="none" w="med" len="med"/>
+                    </a:lnB>
+                    <a:lnTlToBr w="12700" cmpd="sng">
+                      <a:noFill/>
+                      <a:prstDash val="solid"/>
+                    </a:lnTlToBr>
+                    <a:lnBlToTr w="12700" cmpd="sng">
+                      <a:noFill/>
+                      <a:prstDash val="solid"/>
+                    </a:lnBlToTr>
+                    <a:noFill/>
+                  </a:tcPr>
+                </a:tc>
+                <a:tc>
+                  <a:txBody>
+                    <a:bodyPr/>
+                    <a:lstStyle/>
+                    <a:p>
+                      <a:pPr latinLnBrk="1"/>
+                      <a:r>
+                        <a:rPr lang="en-US" altLang="ko-KR">
+                          <a:solidFill>
+                            <a:schemeClr val="tx1"/>
+                          </a:solidFill>
+                        </a:rPr>
+                        <a:t>Pixel Effect Texture Render ( </a:t>
+                      </a:r>
+                      <a:r>
+                        <a:rPr lang="ko-KR" altLang="en-US">
+                          <a:solidFill>
+                            <a:schemeClr val="tx1"/>
+                          </a:solidFill>
+                        </a:rPr>
+                        <a:t>이거 굳이 필요하냐</a:t>
+                      </a:r>
+                      <a:r>
+                        <a:rPr lang="en-US" altLang="ko-KR">
+                          <a:solidFill>
+                            <a:schemeClr val="tx1"/>
+                          </a:solidFill>
+                        </a:rPr>
+                        <a:t>? </a:t>
+                      </a:r>
+                      <a:r>
+                        <a:rPr lang="ko-KR" altLang="en-US">
+                          <a:solidFill>
+                            <a:schemeClr val="tx1"/>
+                          </a:solidFill>
+                        </a:rPr>
+                        <a:t>흠</a:t>
+                      </a:r>
+                      <a:r>
+                        <a:rPr lang="en-US" altLang="ko-KR">
+                          <a:solidFill>
+                            <a:schemeClr val="tx1"/>
+                          </a:solidFill>
+                        </a:rPr>
+                        <a:t>..)</a:t>
+                      </a:r>
+                      <a:endParaRPr lang="ko-KR" altLang="en-US">
+                        <a:solidFill>
+                          <a:schemeClr val="tx1"/>
+                        </a:solidFill>
+                      </a:endParaRPr>
+                    </a:p>
+                  </a:txBody>
+                  <a:tcPr>
+                    <a:lnL w="12700" cap="flat" cmpd="sng" algn="ctr">
+                      <a:solidFill>
+                        <a:schemeClr val="tx1"/>
+                      </a:solidFill>
+                      <a:prstDash val="solid"/>
+                      <a:round/>
+                      <a:headEnd type="none" w="med" len="med"/>
+                      <a:tailEnd type="none" w="med" len="med"/>
+                    </a:lnL>
+                    <a:lnR w="12700" cap="flat" cmpd="sng" algn="ctr">
+                      <a:solidFill>
+                        <a:schemeClr val="tx1"/>
+                      </a:solidFill>
+                      <a:prstDash val="solid"/>
+                      <a:round/>
+                      <a:headEnd type="none" w="med" len="med"/>
+                      <a:tailEnd type="none" w="med" len="med"/>
+                    </a:lnR>
+                    <a:lnT w="12700" cap="flat" cmpd="sng" algn="ctr">
+                      <a:solidFill>
+                        <a:schemeClr val="tx1"/>
+                      </a:solidFill>
+                      <a:prstDash val="solid"/>
+                      <a:round/>
+                      <a:headEnd type="none" w="med" len="med"/>
+                      <a:tailEnd type="none" w="med" len="med"/>
+                    </a:lnT>
+                    <a:lnB w="12700" cap="flat" cmpd="sng" algn="ctr">
+                      <a:solidFill>
+                        <a:schemeClr val="tx1"/>
+                      </a:solidFill>
+                      <a:prstDash val="solid"/>
+                      <a:round/>
+                      <a:headEnd type="none" w="med" len="med"/>
+                      <a:tailEnd type="none" w="med" len="med"/>
+                    </a:lnB>
+                    <a:lnTlToBr w="12700" cmpd="sng">
+                      <a:noFill/>
+                      <a:prstDash val="solid"/>
+                    </a:lnTlToBr>
+                    <a:lnBlToTr w="12700" cmpd="sng">
+                      <a:noFill/>
+                      <a:prstDash val="solid"/>
+                    </a:lnBlToTr>
+                    <a:noFill/>
+                  </a:tcPr>
+                </a:tc>
+                <a:extLst>
+                  <a:ext uri="{0D108BD9-81ED-4DB2-BD59-A6C34878D82A}">
+                    <a16:rowId xmlns:a16="http://schemas.microsoft.com/office/drawing/2014/main" val="1573552042"/>
+                  </a:ext>
+                </a:extLst>
+              </a:tr>
+            </a:tbl>
+          </a:graphicData>
+        </a:graphic>
+      </p:graphicFrame>
+      <p:sp>
+        <p:nvSpPr>
+          <p:cNvPr id="12" name="TextBox 11">
+            <a:extLst>
+              <a:ext uri="{FF2B5EF4-FFF2-40B4-BE49-F238E27FC236}">
+                <a16:creationId xmlns:a16="http://schemas.microsoft.com/office/drawing/2014/main" id="{49D6BE3B-20C9-BE88-37E5-A5F0400C022E}"/>
+              </a:ext>
+            </a:extLst>
+          </p:cNvPr>
+          <p:cNvSpPr txBox="1"/>
+          <p:nvPr/>
+        </p:nvSpPr>
+        <p:spPr>
+          <a:xfrm>
+            <a:off x="7553966" y="1349772"/>
+            <a:ext cx="1228914" cy="369332"/>
+          </a:xfrm>
+          <a:prstGeom prst="rect">
+            <a:avLst/>
+          </a:prstGeom>
+          <a:noFill/>
+          <a:ln w="25400">
+            <a:solidFill>
+              <a:schemeClr val="tx1"/>
+            </a:solidFill>
+          </a:ln>
+        </p:spPr>
+        <p:txBody>
+          <a:bodyPr wrap="square" rtlCol="0">
+            <a:spAutoFit/>
+          </a:bodyPr>
+          <a:lstStyle/>
+          <a:p>
+            <a:r>
+              <a:rPr lang="en-US" altLang="ko-KR"/>
+              <a:t>InstanceA</a:t>
+            </a:r>
+            <a:endParaRPr lang="ko-KR" altLang="en-US" dirty="0"/>
+          </a:p>
+        </p:txBody>
+      </p:sp>
+      <p:sp>
+        <p:nvSpPr>
+          <p:cNvPr id="13" name="TextBox 12">
+            <a:extLst>
+              <a:ext uri="{FF2B5EF4-FFF2-40B4-BE49-F238E27FC236}">
+                <a16:creationId xmlns:a16="http://schemas.microsoft.com/office/drawing/2014/main" id="{95B66D40-AD38-B903-59D6-CC4CF3E961E3}"/>
+              </a:ext>
+            </a:extLst>
+          </p:cNvPr>
+          <p:cNvSpPr txBox="1"/>
+          <p:nvPr/>
+        </p:nvSpPr>
+        <p:spPr>
+          <a:xfrm>
+            <a:off x="8948757" y="3240157"/>
+            <a:ext cx="1228913" cy="369332"/>
+          </a:xfrm>
+          <a:prstGeom prst="rect">
+            <a:avLst/>
+          </a:prstGeom>
+          <a:noFill/>
+          <a:ln w="25400">
+            <a:solidFill>
+              <a:schemeClr val="tx1"/>
+            </a:solidFill>
+          </a:ln>
+        </p:spPr>
+        <p:txBody>
+          <a:bodyPr wrap="square" rtlCol="0">
+            <a:spAutoFit/>
+          </a:bodyPr>
+          <a:lstStyle/>
+          <a:p>
+            <a:r>
+              <a:rPr lang="en-US" altLang="ko-KR"/>
+              <a:t>InstanceB</a:t>
+            </a:r>
+            <a:endParaRPr lang="ko-KR" altLang="en-US" dirty="0"/>
+          </a:p>
+        </p:txBody>
+      </p:sp>
+      <p:sp>
+        <p:nvSpPr>
+          <p:cNvPr id="14" name="TextBox 13">
+            <a:extLst>
+              <a:ext uri="{FF2B5EF4-FFF2-40B4-BE49-F238E27FC236}">
+                <a16:creationId xmlns:a16="http://schemas.microsoft.com/office/drawing/2014/main" id="{8E4CF968-E4FA-C1A0-E1C5-7B7CBBCD48EA}"/>
+              </a:ext>
+            </a:extLst>
+          </p:cNvPr>
+          <p:cNvSpPr txBox="1"/>
+          <p:nvPr/>
+        </p:nvSpPr>
+        <p:spPr>
+          <a:xfrm>
+            <a:off x="10273975" y="2343685"/>
+            <a:ext cx="1228913" cy="369332"/>
+          </a:xfrm>
+          <a:prstGeom prst="rect">
+            <a:avLst/>
+          </a:prstGeom>
+          <a:noFill/>
+          <a:ln w="25400">
+            <a:solidFill>
+              <a:schemeClr val="tx1"/>
+            </a:solidFill>
+          </a:ln>
+        </p:spPr>
+        <p:txBody>
+          <a:bodyPr wrap="square" rtlCol="0">
+            <a:spAutoFit/>
+          </a:bodyPr>
+          <a:lstStyle/>
+          <a:p>
+            <a:r>
+              <a:rPr lang="en-US" altLang="ko-KR"/>
+              <a:t>InstanceC</a:t>
+            </a:r>
+            <a:endParaRPr lang="ko-KR" altLang="en-US" dirty="0"/>
+          </a:p>
+        </p:txBody>
+      </p:sp>
+      <p:cxnSp>
+        <p:nvCxnSpPr>
+          <p:cNvPr id="15" name="직선 화살표 연결선 14">
+            <a:extLst>
+              <a:ext uri="{FF2B5EF4-FFF2-40B4-BE49-F238E27FC236}">
+                <a16:creationId xmlns:a16="http://schemas.microsoft.com/office/drawing/2014/main" id="{11DB89AF-BAFA-7ABB-F5B8-94DBCA47C132}"/>
+              </a:ext>
+            </a:extLst>
+          </p:cNvPr>
+          <p:cNvCxnSpPr>
+            <a:cxnSpLocks/>
+            <a:stCxn id="12" idx="2"/>
+          </p:cNvCxnSpPr>
+          <p:nvPr/>
+        </p:nvCxnSpPr>
+        <p:spPr>
+          <a:xfrm>
+            <a:off x="8168423" y="1719104"/>
+            <a:ext cx="0" cy="4154922"/>
+          </a:xfrm>
+          <a:prstGeom prst="straightConnector1">
+            <a:avLst/>
+          </a:prstGeom>
+          <a:ln w="47625">
+            <a:solidFill>
+              <a:schemeClr val="tx1"/>
+            </a:solidFill>
+            <a:tailEnd type="triangle"/>
+          </a:ln>
+        </p:spPr>
+        <p:style>
+          <a:lnRef idx="2">
+            <a:schemeClr val="accent1"/>
+          </a:lnRef>
+          <a:fillRef idx="0">
+            <a:schemeClr val="accent1"/>
+          </a:fillRef>
+          <a:effectRef idx="1">
+            <a:schemeClr val="accent1"/>
+          </a:effectRef>
+          <a:fontRef idx="minor">
+            <a:schemeClr val="tx1"/>
+          </a:fontRef>
+        </p:style>
+      </p:cxnSp>
+      <p:cxnSp>
+        <p:nvCxnSpPr>
+          <p:cNvPr id="19" name="직선 화살표 연결선 18">
+            <a:extLst>
+              <a:ext uri="{FF2B5EF4-FFF2-40B4-BE49-F238E27FC236}">
+                <a16:creationId xmlns:a16="http://schemas.microsoft.com/office/drawing/2014/main" id="{D731DC11-2488-B375-EE09-77422E28B522}"/>
+              </a:ext>
+            </a:extLst>
+          </p:cNvPr>
+          <p:cNvCxnSpPr>
+            <a:cxnSpLocks/>
+          </p:cNvCxnSpPr>
+          <p:nvPr/>
+        </p:nvCxnSpPr>
+        <p:spPr>
+          <a:xfrm>
+            <a:off x="9611367" y="3617842"/>
+            <a:ext cx="0" cy="2256183"/>
+          </a:xfrm>
+          <a:prstGeom prst="straightConnector1">
+            <a:avLst/>
+          </a:prstGeom>
+          <a:ln w="47625">
+            <a:solidFill>
+              <a:schemeClr val="tx1"/>
+            </a:solidFill>
+            <a:tailEnd type="triangle"/>
+          </a:ln>
+        </p:spPr>
+        <p:style>
+          <a:lnRef idx="2">
+            <a:schemeClr val="accent1"/>
+          </a:lnRef>
+          <a:fillRef idx="0">
+            <a:schemeClr val="accent1"/>
+          </a:fillRef>
+          <a:effectRef idx="1">
+            <a:schemeClr val="accent1"/>
+          </a:effectRef>
+          <a:fontRef idx="minor">
+            <a:schemeClr val="tx1"/>
+          </a:fontRef>
+        </p:style>
+      </p:cxnSp>
+      <p:cxnSp>
+        <p:nvCxnSpPr>
+          <p:cNvPr id="20" name="직선 화살표 연결선 19">
+            <a:extLst>
+              <a:ext uri="{FF2B5EF4-FFF2-40B4-BE49-F238E27FC236}">
+                <a16:creationId xmlns:a16="http://schemas.microsoft.com/office/drawing/2014/main" id="{DBC2F622-20F1-0CB0-3FE7-F6AB8E5B9613}"/>
+              </a:ext>
+            </a:extLst>
+          </p:cNvPr>
+          <p:cNvCxnSpPr>
+            <a:cxnSpLocks/>
+            <a:stCxn id="14" idx="2"/>
+          </p:cNvCxnSpPr>
+          <p:nvPr/>
+        </p:nvCxnSpPr>
+        <p:spPr>
+          <a:xfrm>
+            <a:off x="10888432" y="2713017"/>
+            <a:ext cx="0" cy="3161009"/>
+          </a:xfrm>
+          <a:prstGeom prst="straightConnector1">
+            <a:avLst/>
+          </a:prstGeom>
+          <a:ln w="47625">
+            <a:solidFill>
+              <a:schemeClr val="tx1"/>
+            </a:solidFill>
+            <a:tailEnd type="triangle"/>
+          </a:ln>
+        </p:spPr>
+        <p:style>
+          <a:lnRef idx="2">
+            <a:schemeClr val="accent1"/>
+          </a:lnRef>
+          <a:fillRef idx="0">
+            <a:schemeClr val="accent1"/>
+          </a:fillRef>
+          <a:effectRef idx="1">
+            <a:schemeClr val="accent1"/>
+          </a:effectRef>
+          <a:fontRef idx="minor">
+            <a:schemeClr val="tx1"/>
+          </a:fontRef>
+        </p:style>
+      </p:cxnSp>
+      <p:sp>
+        <p:nvSpPr>
+          <p:cNvPr id="21" name="TextBox 20">
+            <a:extLst>
+              <a:ext uri="{FF2B5EF4-FFF2-40B4-BE49-F238E27FC236}">
+                <a16:creationId xmlns:a16="http://schemas.microsoft.com/office/drawing/2014/main" id="{A7AE3A93-EFBE-24C6-454B-7C5680072F49}"/>
+              </a:ext>
+            </a:extLst>
+          </p:cNvPr>
+          <p:cNvSpPr txBox="1"/>
+          <p:nvPr/>
+        </p:nvSpPr>
+        <p:spPr>
+          <a:xfrm>
+            <a:off x="7198460" y="980440"/>
+            <a:ext cx="4649991" cy="307777"/>
+          </a:xfrm>
+          <a:prstGeom prst="rect">
+            <a:avLst/>
+          </a:prstGeom>
+          <a:noFill/>
+        </p:spPr>
+        <p:txBody>
+          <a:bodyPr wrap="none" rtlCol="0">
+            <a:spAutoFit/>
+          </a:bodyPr>
+          <a:lstStyle/>
+          <a:p>
+            <a:r>
+              <a:rPr lang="en-US" altLang="ko-KR" sz="1400"/>
+              <a:t>UI Render Loop </a:t>
+            </a:r>
+            <a:r>
+              <a:rPr lang="ko-KR" altLang="en-US" sz="1400"/>
+              <a:t>를 돌면서 렌더할 인스턴스들을 모은다</a:t>
+            </a:r>
+            <a:r>
+              <a:rPr lang="en-US" altLang="ko-KR" sz="1400"/>
+              <a:t>.</a:t>
+            </a:r>
+          </a:p>
+        </p:txBody>
+      </p:sp>
+      <p:sp>
+        <p:nvSpPr>
+          <p:cNvPr id="22" name="TextBox 21">
+            <a:extLst>
+              <a:ext uri="{FF2B5EF4-FFF2-40B4-BE49-F238E27FC236}">
+                <a16:creationId xmlns:a16="http://schemas.microsoft.com/office/drawing/2014/main" id="{446383F0-3E65-14A7-B68C-385D92F29416}"/>
+              </a:ext>
+            </a:extLst>
+          </p:cNvPr>
+          <p:cNvSpPr txBox="1"/>
+          <p:nvPr/>
+        </p:nvSpPr>
+        <p:spPr>
+          <a:xfrm>
+            <a:off x="7553965" y="5874025"/>
+            <a:ext cx="3938980" cy="923330"/>
+          </a:xfrm>
+          <a:prstGeom prst="rect">
+            <a:avLst/>
+          </a:prstGeom>
+          <a:noFill/>
+          <a:ln w="25400">
+            <a:solidFill>
+              <a:schemeClr val="tx1"/>
+            </a:solidFill>
+          </a:ln>
+        </p:spPr>
+        <p:txBody>
+          <a:bodyPr wrap="square" rtlCol="0">
+            <a:spAutoFit/>
+          </a:bodyPr>
+          <a:lstStyle/>
+          <a:p>
+            <a:r>
+              <a:rPr lang="ko-KR" altLang="en-US"/>
+              <a:t>루프가 다 끝나면 </a:t>
+            </a:r>
+            <a:endParaRPr lang="en-US" altLang="ko-KR"/>
+          </a:p>
+          <a:p>
+            <a:r>
+              <a:rPr lang="ko-KR" altLang="en-US"/>
+              <a:t>인스턴싱 셰이더에서 모두 렌더링을 수행한다</a:t>
+            </a:r>
+            <a:r>
+              <a:rPr lang="en-US" altLang="ko-KR"/>
+              <a:t>.</a:t>
+            </a:r>
+            <a:endParaRPr lang="ko-KR" altLang="en-US" dirty="0"/>
+          </a:p>
+        </p:txBody>
+      </p:sp>
+      <p:sp>
+        <p:nvSpPr>
+          <p:cNvPr id="25" name="TextBox 24">
+            <a:extLst>
+              <a:ext uri="{FF2B5EF4-FFF2-40B4-BE49-F238E27FC236}">
+                <a16:creationId xmlns:a16="http://schemas.microsoft.com/office/drawing/2014/main" id="{43DB793D-7306-8593-713D-BC87645DC44D}"/>
+              </a:ext>
+            </a:extLst>
+          </p:cNvPr>
+          <p:cNvSpPr txBox="1"/>
+          <p:nvPr/>
+        </p:nvSpPr>
+        <p:spPr>
+          <a:xfrm>
+            <a:off x="8251362" y="4449225"/>
+            <a:ext cx="1228913" cy="369332"/>
+          </a:xfrm>
+          <a:prstGeom prst="rect">
+            <a:avLst/>
+          </a:prstGeom>
+          <a:noFill/>
+          <a:ln w="25400">
+            <a:solidFill>
+              <a:schemeClr val="tx1"/>
+            </a:solidFill>
+          </a:ln>
+        </p:spPr>
+        <p:txBody>
+          <a:bodyPr wrap="square" rtlCol="0">
+            <a:spAutoFit/>
+          </a:bodyPr>
+          <a:lstStyle/>
+          <a:p>
+            <a:r>
+              <a:rPr lang="en-US" altLang="ko-KR"/>
+              <a:t>InstanceD</a:t>
+            </a:r>
+            <a:endParaRPr lang="ko-KR" altLang="en-US" dirty="0"/>
+          </a:p>
+        </p:txBody>
+      </p:sp>
+      <p:sp>
+        <p:nvSpPr>
+          <p:cNvPr id="26" name="TextBox 25">
+            <a:extLst>
+              <a:ext uri="{FF2B5EF4-FFF2-40B4-BE49-F238E27FC236}">
+                <a16:creationId xmlns:a16="http://schemas.microsoft.com/office/drawing/2014/main" id="{58EF3D2F-D314-1C87-984A-768A2DA2571B}"/>
+              </a:ext>
+            </a:extLst>
+          </p:cNvPr>
+          <p:cNvSpPr txBox="1"/>
+          <p:nvPr/>
+        </p:nvSpPr>
+        <p:spPr>
+          <a:xfrm>
+            <a:off x="9611367" y="3844691"/>
+            <a:ext cx="1228913" cy="369332"/>
+          </a:xfrm>
+          <a:prstGeom prst="rect">
+            <a:avLst/>
+          </a:prstGeom>
+          <a:noFill/>
+          <a:ln w="25400">
+            <a:solidFill>
+              <a:schemeClr val="tx1"/>
+            </a:solidFill>
+          </a:ln>
+        </p:spPr>
+        <p:txBody>
+          <a:bodyPr wrap="square" rtlCol="0">
+            <a:spAutoFit/>
+          </a:bodyPr>
+          <a:lstStyle/>
+          <a:p>
+            <a:r>
+              <a:rPr lang="en-US" altLang="ko-KR"/>
+              <a:t>InstanceE</a:t>
+            </a:r>
+            <a:endParaRPr lang="ko-KR" altLang="en-US" dirty="0"/>
+          </a:p>
+        </p:txBody>
+      </p:sp>
+      <p:cxnSp>
+        <p:nvCxnSpPr>
+          <p:cNvPr id="27" name="직선 화살표 연결선 26">
+            <a:extLst>
+              <a:ext uri="{FF2B5EF4-FFF2-40B4-BE49-F238E27FC236}">
+                <a16:creationId xmlns:a16="http://schemas.microsoft.com/office/drawing/2014/main" id="{44586E16-4DAC-A9AD-D2D4-008ED9813202}"/>
+              </a:ext>
+            </a:extLst>
+          </p:cNvPr>
+          <p:cNvCxnSpPr>
+            <a:cxnSpLocks/>
+            <a:stCxn id="25" idx="2"/>
+          </p:cNvCxnSpPr>
+          <p:nvPr/>
+        </p:nvCxnSpPr>
+        <p:spPr>
+          <a:xfrm>
+            <a:off x="8865819" y="4818557"/>
+            <a:ext cx="13367" cy="1063821"/>
+          </a:xfrm>
+          <a:prstGeom prst="straightConnector1">
+            <a:avLst/>
+          </a:prstGeom>
+          <a:ln w="47625">
+            <a:solidFill>
+              <a:schemeClr val="tx1"/>
+            </a:solidFill>
+            <a:tailEnd type="triangle"/>
+          </a:ln>
+        </p:spPr>
+        <p:style>
+          <a:lnRef idx="2">
+            <a:schemeClr val="accent1"/>
+          </a:lnRef>
+          <a:fillRef idx="0">
+            <a:schemeClr val="accent1"/>
+          </a:fillRef>
+          <a:effectRef idx="1">
+            <a:schemeClr val="accent1"/>
+          </a:effectRef>
+          <a:fontRef idx="minor">
+            <a:schemeClr val="tx1"/>
+          </a:fontRef>
+        </p:style>
+      </p:cxnSp>
+      <p:cxnSp>
+        <p:nvCxnSpPr>
+          <p:cNvPr id="30" name="직선 화살표 연결선 29">
+            <a:extLst>
+              <a:ext uri="{FF2B5EF4-FFF2-40B4-BE49-F238E27FC236}">
+                <a16:creationId xmlns:a16="http://schemas.microsoft.com/office/drawing/2014/main" id="{E49BA83E-2894-8EEE-82A6-87436D22BC51}"/>
+              </a:ext>
+            </a:extLst>
+          </p:cNvPr>
+          <p:cNvCxnSpPr>
+            <a:cxnSpLocks/>
+            <a:stCxn id="26" idx="2"/>
+          </p:cNvCxnSpPr>
+          <p:nvPr/>
+        </p:nvCxnSpPr>
+        <p:spPr>
+          <a:xfrm flipH="1">
+            <a:off x="10212456" y="4214023"/>
+            <a:ext cx="13368" cy="1660001"/>
+          </a:xfrm>
+          <a:prstGeom prst="straightConnector1">
+            <a:avLst/>
+          </a:prstGeom>
+          <a:ln w="47625">
+            <a:solidFill>
+              <a:schemeClr val="tx1"/>
+            </a:solidFill>
+            <a:tailEnd type="triangle"/>
+          </a:ln>
+        </p:spPr>
+        <p:style>
+          <a:lnRef idx="2">
+            <a:schemeClr val="accent1"/>
+          </a:lnRef>
+          <a:fillRef idx="0">
+            <a:schemeClr val="accent1"/>
+          </a:fillRef>
+          <a:effectRef idx="1">
+            <a:schemeClr val="accent1"/>
+          </a:effectRef>
+          <a:fontRef idx="minor">
+            <a:schemeClr val="tx1"/>
+          </a:fontRef>
+        </p:style>
+      </p:cxnSp>
+      <p:sp>
+        <p:nvSpPr>
+          <p:cNvPr id="33" name="TextBox 32">
+            <a:extLst>
+              <a:ext uri="{FF2B5EF4-FFF2-40B4-BE49-F238E27FC236}">
+                <a16:creationId xmlns:a16="http://schemas.microsoft.com/office/drawing/2014/main" id="{2C919C5E-1DEE-7F07-C86F-8F90D50BB550}"/>
+              </a:ext>
+            </a:extLst>
+          </p:cNvPr>
+          <p:cNvSpPr txBox="1"/>
+          <p:nvPr/>
+        </p:nvSpPr>
+        <p:spPr>
+          <a:xfrm>
+            <a:off x="8124561" y="1797253"/>
+            <a:ext cx="2391039" cy="1384995"/>
+          </a:xfrm>
+          <a:prstGeom prst="rect">
+            <a:avLst/>
+          </a:prstGeom>
+          <a:noFill/>
+        </p:spPr>
+        <p:txBody>
+          <a:bodyPr wrap="none" rtlCol="0">
+            <a:spAutoFit/>
+          </a:bodyPr>
+          <a:lstStyle/>
+          <a:p>
+            <a:r>
+              <a:rPr lang="en-US" altLang="ko-KR" sz="1400"/>
+              <a:t>page</a:t>
+            </a:r>
+            <a:r>
+              <a:rPr lang="ko-KR" altLang="en-US" sz="1400"/>
+              <a:t>에 따라 서로 </a:t>
+            </a:r>
+            <a:r>
+              <a:rPr lang="en-US" altLang="ko-KR" sz="1400"/>
+              <a:t>depth</a:t>
+            </a:r>
+            <a:r>
+              <a:rPr lang="ko-KR" altLang="en-US" sz="1400"/>
+              <a:t>를 </a:t>
+            </a:r>
+            <a:endParaRPr lang="en-US" altLang="ko-KR" sz="1400"/>
+          </a:p>
+          <a:p>
+            <a:r>
+              <a:rPr lang="ko-KR" altLang="en-US" sz="1400"/>
+              <a:t>다르게 하여 앞뒤를 준다</a:t>
+            </a:r>
+            <a:r>
+              <a:rPr lang="en-US" altLang="ko-KR" sz="1400"/>
+              <a:t>.</a:t>
+            </a:r>
+          </a:p>
+          <a:p>
+            <a:r>
+              <a:rPr lang="en-US" altLang="ko-KR" sz="1400"/>
+              <a:t>&gt;&gt; </a:t>
+            </a:r>
+            <a:r>
+              <a:rPr lang="ko-KR" altLang="en-US" sz="1400"/>
+              <a:t>이미 </a:t>
+            </a:r>
+            <a:r>
+              <a:rPr lang="en-US" altLang="ko-KR" sz="1400"/>
+              <a:t>3D</a:t>
+            </a:r>
+            <a:r>
+              <a:rPr lang="ko-KR" altLang="en-US" sz="1400"/>
+              <a:t>는 렌더가</a:t>
+            </a:r>
+            <a:endParaRPr lang="en-US" altLang="ko-KR" sz="1400"/>
+          </a:p>
+          <a:p>
+            <a:r>
+              <a:rPr lang="ko-KR" altLang="en-US" sz="1400"/>
+              <a:t>끝난 상태고 </a:t>
+            </a:r>
+            <a:r>
+              <a:rPr lang="en-US" altLang="ko-KR" sz="1400"/>
+              <a:t>depth</a:t>
+            </a:r>
+            <a:r>
+              <a:rPr lang="ko-KR" altLang="en-US" sz="1400"/>
+              <a:t>는 </a:t>
+            </a:r>
+            <a:r>
+              <a:rPr lang="en-US" altLang="ko-KR" sz="1400"/>
+              <a:t>1.0</a:t>
+            </a:r>
+          </a:p>
+          <a:p>
+            <a:r>
+              <a:rPr lang="ko-KR" altLang="en-US" sz="1400"/>
+              <a:t>으로 클리어가 된 상태이다</a:t>
+            </a:r>
+            <a:r>
+              <a:rPr lang="en-US" altLang="ko-KR" sz="1400"/>
+              <a:t>.</a:t>
+            </a:r>
+          </a:p>
+          <a:p>
+            <a:r>
+              <a:rPr lang="ko-KR" altLang="en-US" sz="1400"/>
+              <a:t>크게 잡아도 무리는 없다</a:t>
+            </a:r>
+            <a:r>
+              <a:rPr lang="en-US" altLang="ko-KR" sz="1400"/>
+              <a:t>.</a:t>
+            </a:r>
+          </a:p>
+        </p:txBody>
+      </p:sp>
+    </p:spTree>
+    <p:extLst>
+      <p:ext uri="{BB962C8B-B14F-4D97-AF65-F5344CB8AC3E}">
+        <p14:creationId xmlns:p14="http://schemas.microsoft.com/office/powerpoint/2010/main" val="1125029623"/>
+      </p:ext>
+    </p:extLst>
+  </p:cSld>
+  <p:clrMapOvr>
+    <a:masterClrMapping/>
+  </p:clrMapOvr>
+</p:sld>
+</file>
+
+<file path=ppt/slides/slide27.xml><?xml version="1.0" encoding="utf-8"?>
+<p:sld xmlns:a="http://schemas.openxmlformats.org/drawingml/2006/main" xmlns:r="http://schemas.openxmlformats.org/officeDocument/2006/relationships" xmlns:p="http://schemas.openxmlformats.org/presentationml/2006/main">
+  <p:cSld>
+    <p:spTree>
+      <p:nvGrpSpPr>
+        <p:cNvPr id="1" name="">
+          <a:extLst>
+            <a:ext uri="{FF2B5EF4-FFF2-40B4-BE49-F238E27FC236}">
+              <a16:creationId xmlns:a16="http://schemas.microsoft.com/office/drawing/2014/main" id="{CC60C818-C18F-C4E6-7237-844B919E98A2}"/>
+            </a:ext>
+          </a:extLst>
+        </p:cNvPr>
+        <p:cNvGrpSpPr/>
+        <p:nvPr/>
+      </p:nvGrpSpPr>
+      <p:grpSpPr>
+        <a:xfrm>
+          <a:off x="0" y="0"/>
+          <a:ext cx="0" cy="0"/>
+          <a:chOff x="0" y="0"/>
+          <a:chExt cx="0" cy="0"/>
+        </a:xfrm>
+      </p:grpSpPr>
+      <p:sp>
+        <p:nvSpPr>
+          <p:cNvPr id="8" name="제목 1">
+            <a:extLst>
+              <a:ext uri="{FF2B5EF4-FFF2-40B4-BE49-F238E27FC236}">
+                <a16:creationId xmlns:a16="http://schemas.microsoft.com/office/drawing/2014/main" id="{73B55D80-AA5F-12F7-1FC4-0E3977755510}"/>
+              </a:ext>
+            </a:extLst>
+          </p:cNvPr>
+          <p:cNvSpPr txBox="1">
+            <a:spLocks/>
+          </p:cNvSpPr>
+          <p:nvPr/>
+        </p:nvSpPr>
+        <p:spPr>
+          <a:xfrm>
+            <a:off x="0" y="18255"/>
+            <a:ext cx="10515600" cy="850425"/>
+          </a:xfrm>
+          <a:prstGeom prst="rect">
+            <a:avLst/>
+          </a:prstGeom>
+        </p:spPr>
+        <p:txBody>
+          <a:bodyPr vert="horz" lIns="91440" tIns="45720" rIns="91440" bIns="45720" rtlCol="0" anchor="ctr">
+            <a:normAutofit/>
+          </a:bodyPr>
+          <a:lstStyle>
+            <a:lvl1pPr algn="l" defTabSz="914400" rtl="0" eaLnBrk="1" latinLnBrk="1" hangingPunct="1">
+              <a:lnSpc>
+                <a:spcPct val="90000"/>
+              </a:lnSpc>
+              <a:spcBef>
+                <a:spcPct val="0"/>
+              </a:spcBef>
+              <a:buNone/>
+              <a:defRPr sz="4400" kern="1200">
+                <a:solidFill>
+                  <a:schemeClr val="tx1"/>
+                </a:solidFill>
+                <a:latin typeface="+mj-lt"/>
+                <a:ea typeface="+mj-ea"/>
+                <a:cs typeface="+mj-cs"/>
+              </a:defRPr>
+            </a:lvl1pPr>
+          </a:lstStyle>
+          <a:p>
+            <a:r>
+              <a:rPr lang="en-US" altLang="ko-KR" sz="5400"/>
+              <a:t>UI Update/Event</a:t>
+            </a:r>
+            <a:endParaRPr lang="ko-KR" altLang="en-US" sz="5400" dirty="0"/>
+          </a:p>
+        </p:txBody>
+      </p:sp>
+      <p:sp>
+        <p:nvSpPr>
+          <p:cNvPr id="2" name="TextBox 1">
+            <a:extLst>
+              <a:ext uri="{FF2B5EF4-FFF2-40B4-BE49-F238E27FC236}">
+                <a16:creationId xmlns:a16="http://schemas.microsoft.com/office/drawing/2014/main" id="{76B6623B-217F-067C-22EC-4FAD59944568}"/>
+              </a:ext>
+            </a:extLst>
+          </p:cNvPr>
+          <p:cNvSpPr txBox="1"/>
+          <p:nvPr/>
+        </p:nvSpPr>
+        <p:spPr>
+          <a:xfrm>
+            <a:off x="6222122" y="946161"/>
+            <a:ext cx="1590035" cy="369332"/>
+          </a:xfrm>
+          <a:prstGeom prst="rect">
+            <a:avLst/>
+          </a:prstGeom>
+          <a:noFill/>
+          <a:ln w="25400">
+            <a:solidFill>
+              <a:schemeClr val="tx1"/>
+            </a:solidFill>
+          </a:ln>
+        </p:spPr>
+        <p:txBody>
+          <a:bodyPr wrap="square" rtlCol="0">
+            <a:spAutoFit/>
+          </a:bodyPr>
+          <a:lstStyle/>
+          <a:p>
+            <a:r>
+              <a:rPr lang="en-US" altLang="ko-KR"/>
+              <a:t>Global</a:t>
+            </a:r>
+            <a:r>
+              <a:rPr lang="ko-KR" altLang="en-US"/>
+              <a:t> </a:t>
+            </a:r>
+            <a:r>
+              <a:rPr lang="en-US" altLang="ko-KR"/>
+              <a:t>Event</a:t>
+            </a:r>
+            <a:endParaRPr lang="ko-KR" altLang="en-US" dirty="0"/>
+          </a:p>
+        </p:txBody>
+      </p:sp>
+      <p:sp>
+        <p:nvSpPr>
+          <p:cNvPr id="3" name="TextBox 2">
+            <a:extLst>
+              <a:ext uri="{FF2B5EF4-FFF2-40B4-BE49-F238E27FC236}">
+                <a16:creationId xmlns:a16="http://schemas.microsoft.com/office/drawing/2014/main" id="{D4CC5613-D6AC-FA07-29B8-6905F9AF4987}"/>
+              </a:ext>
+            </a:extLst>
+          </p:cNvPr>
+          <p:cNvSpPr txBox="1"/>
+          <p:nvPr/>
+        </p:nvSpPr>
+        <p:spPr>
+          <a:xfrm>
+            <a:off x="119269" y="966405"/>
+            <a:ext cx="4631635" cy="923330"/>
+          </a:xfrm>
+          <a:prstGeom prst="rect">
+            <a:avLst/>
+          </a:prstGeom>
+          <a:noFill/>
+          <a:ln w="25400">
+            <a:solidFill>
+              <a:schemeClr val="tx1"/>
+            </a:solidFill>
+          </a:ln>
+        </p:spPr>
+        <p:txBody>
+          <a:bodyPr wrap="square" rtlCol="0">
+            <a:spAutoFit/>
+          </a:bodyPr>
+          <a:lstStyle/>
+          <a:p>
+            <a:r>
+              <a:rPr lang="en-US" altLang="ko-KR"/>
+              <a:t>AnimOperUtil</a:t>
+            </a:r>
+          </a:p>
+          <a:p>
+            <a:r>
+              <a:rPr lang="en-US" altLang="ko-KR"/>
+              <a:t>: </a:t>
+            </a:r>
+            <a:r>
+              <a:rPr lang="ko-KR" altLang="en-US"/>
+              <a:t>애니메이션의 </a:t>
+            </a:r>
+            <a:r>
+              <a:rPr lang="en-US" altLang="ko-KR"/>
+              <a:t>Ease </a:t>
+            </a:r>
+            <a:r>
+              <a:rPr lang="ko-KR" altLang="en-US"/>
+              <a:t>무브를 구현</a:t>
+            </a:r>
+            <a:r>
+              <a:rPr lang="en-US" altLang="ko-KR"/>
+              <a:t>.</a:t>
+            </a:r>
+          </a:p>
+          <a:p>
+            <a:r>
+              <a:rPr lang="en-US" altLang="ko-KR"/>
+              <a:t>Update</a:t>
+            </a:r>
+            <a:r>
+              <a:rPr lang="ko-KR" altLang="en-US"/>
+              <a:t>시에 반응성을 극대화하는걸 돕는다</a:t>
+            </a:r>
+            <a:r>
+              <a:rPr lang="en-US" altLang="ko-KR"/>
+              <a:t>.</a:t>
+            </a:r>
+            <a:endParaRPr lang="ko-KR" altLang="en-US" dirty="0"/>
+          </a:p>
+        </p:txBody>
+      </p:sp>
+      <p:pic>
+        <p:nvPicPr>
+          <p:cNvPr id="5" name="그림 4">
+            <a:extLst>
+              <a:ext uri="{FF2B5EF4-FFF2-40B4-BE49-F238E27FC236}">
+                <a16:creationId xmlns:a16="http://schemas.microsoft.com/office/drawing/2014/main" id="{E6FB5361-5EBD-87FB-BEDA-2CB15876294D}"/>
+              </a:ext>
+            </a:extLst>
+          </p:cNvPr>
+          <p:cNvPicPr>
+            <a:picLocks noChangeAspect="1"/>
+          </p:cNvPicPr>
+          <p:nvPr/>
+        </p:nvPicPr>
+        <p:blipFill>
+          <a:blip r:embed="rId2"/>
+          <a:stretch>
+            <a:fillRect/>
+          </a:stretch>
+        </p:blipFill>
+        <p:spPr>
+          <a:xfrm>
+            <a:off x="119269" y="1987460"/>
+            <a:ext cx="5185779" cy="4751269"/>
+          </a:xfrm>
+          <a:prstGeom prst="rect">
+            <a:avLst/>
+          </a:prstGeom>
+        </p:spPr>
+      </p:pic>
+      <p:sp>
+        <p:nvSpPr>
+          <p:cNvPr id="6" name="TextBox 5">
+            <a:extLst>
+              <a:ext uri="{FF2B5EF4-FFF2-40B4-BE49-F238E27FC236}">
+                <a16:creationId xmlns:a16="http://schemas.microsoft.com/office/drawing/2014/main" id="{3956E45D-8CA0-3912-FD1F-639283341008}"/>
+              </a:ext>
+            </a:extLst>
+          </p:cNvPr>
+          <p:cNvSpPr txBox="1"/>
+          <p:nvPr/>
+        </p:nvSpPr>
+        <p:spPr>
+          <a:xfrm>
+            <a:off x="6222122" y="1428070"/>
+            <a:ext cx="5747727" cy="1815882"/>
+          </a:xfrm>
+          <a:prstGeom prst="rect">
+            <a:avLst/>
+          </a:prstGeom>
+          <a:noFill/>
+        </p:spPr>
+        <p:txBody>
+          <a:bodyPr wrap="none" rtlCol="0">
+            <a:spAutoFit/>
+          </a:bodyPr>
+          <a:lstStyle/>
+          <a:p>
+            <a:r>
+              <a:rPr lang="ko-KR" altLang="en-US" sz="1400"/>
+              <a:t>어짜피 </a:t>
+            </a:r>
+            <a:r>
+              <a:rPr lang="en-US" altLang="ko-KR" sz="1400"/>
+              <a:t>winproc</a:t>
+            </a:r>
+            <a:r>
+              <a:rPr lang="ko-KR" altLang="en-US" sz="1400"/>
+              <a:t>에서 이벤트가 발생되면 전달되는 이벤트는 모든 </a:t>
+            </a:r>
+            <a:r>
+              <a:rPr lang="en-US" altLang="ko-KR" sz="1400"/>
+              <a:t>UI</a:t>
+            </a:r>
+            <a:r>
+              <a:rPr lang="ko-KR" altLang="en-US" sz="1400"/>
+              <a:t>에</a:t>
+            </a:r>
+            <a:endParaRPr lang="en-US" altLang="ko-KR" sz="1400"/>
+          </a:p>
+          <a:p>
+            <a:r>
+              <a:rPr lang="ko-KR" altLang="en-US" sz="1400"/>
+              <a:t>대하여 모두 같을 것이니 </a:t>
+            </a:r>
+            <a:r>
+              <a:rPr lang="en-US" altLang="ko-KR" sz="1400"/>
+              <a:t>Global</a:t>
+            </a:r>
+            <a:r>
+              <a:rPr lang="ko-KR" altLang="en-US" sz="1400"/>
+              <a:t>로 빼둔다</a:t>
+            </a:r>
+            <a:r>
+              <a:rPr lang="en-US" altLang="ko-KR" sz="1400"/>
+              <a:t>.</a:t>
+            </a:r>
+          </a:p>
+          <a:p>
+            <a:r>
+              <a:rPr lang="ko-KR" altLang="en-US" sz="1400"/>
+              <a:t>기존 </a:t>
+            </a:r>
+            <a:r>
+              <a:rPr lang="en-US" altLang="ko-KR" sz="1400"/>
+              <a:t>hWnd, Message, wParam, lParam</a:t>
+            </a:r>
+            <a:r>
+              <a:rPr lang="ko-KR" altLang="en-US" sz="1400"/>
+              <a:t>도 있지만</a:t>
+            </a:r>
+            <a:r>
+              <a:rPr lang="en-US" altLang="ko-KR" sz="1400"/>
+              <a:t>,</a:t>
+            </a:r>
+          </a:p>
+          <a:p>
+            <a:r>
+              <a:rPr lang="ko-KR" altLang="en-US" sz="1400"/>
+              <a:t>현재 마우스의 위치와 상태</a:t>
+            </a:r>
+            <a:r>
+              <a:rPr lang="en-US" altLang="ko-KR" sz="1400"/>
+              <a:t>,</a:t>
+            </a:r>
+          </a:p>
+          <a:p>
+            <a:r>
+              <a:rPr lang="ko-KR" altLang="en-US" sz="1400"/>
+              <a:t>현재 키보드의 눌려진 상태등을 같이 보낸다</a:t>
+            </a:r>
+            <a:r>
+              <a:rPr lang="en-US" altLang="ko-KR" sz="1400"/>
+              <a:t>.</a:t>
+            </a:r>
+          </a:p>
+          <a:p>
+            <a:endParaRPr lang="en-US" altLang="ko-KR" sz="1400"/>
+          </a:p>
+          <a:p>
+            <a:r>
+              <a:rPr lang="en-US" altLang="ko-KR" sz="1400"/>
+              <a:t>Edit Box </a:t>
+            </a:r>
+            <a:r>
+              <a:rPr lang="ko-KR" altLang="en-US" sz="1400"/>
+              <a:t>같이 텍스트 입력이 필요할때는 </a:t>
+            </a:r>
+            <a:r>
+              <a:rPr lang="en-US" altLang="ko-KR" sz="1400"/>
+              <a:t>WM_CHAR</a:t>
+            </a:r>
+            <a:r>
+              <a:rPr lang="ko-KR" altLang="en-US" sz="1400"/>
+              <a:t>과 </a:t>
+            </a:r>
+            <a:endParaRPr lang="en-US" altLang="ko-KR" sz="1400"/>
+          </a:p>
+          <a:p>
+            <a:r>
+              <a:rPr lang="ko-KR" altLang="en-US" sz="1400"/>
+              <a:t>한글 입력시 </a:t>
+            </a:r>
+            <a:r>
+              <a:rPr lang="en-US" altLang="ko-KR" sz="1400"/>
+              <a:t>IME</a:t>
+            </a:r>
+            <a:r>
+              <a:rPr lang="ko-KR" altLang="en-US" sz="1400"/>
+              <a:t>의 이벤트를 사용하자</a:t>
+            </a:r>
+            <a:r>
+              <a:rPr lang="en-US" altLang="ko-KR" sz="1400"/>
+              <a:t>.</a:t>
+            </a:r>
+          </a:p>
+        </p:txBody>
+      </p:sp>
+    </p:spTree>
+    <p:extLst>
+      <p:ext uri="{BB962C8B-B14F-4D97-AF65-F5344CB8AC3E}">
+        <p14:creationId xmlns:p14="http://schemas.microsoft.com/office/powerpoint/2010/main" val="1363661584"/>
+      </p:ext>
+    </p:extLst>
+  </p:cSld>
+  <p:clrMapOvr>
+    <a:masterClrMapping/>
+  </p:clrMapOvr>
+</p:sld>
+</file>
+
+<file path=ppt/slides/slide28.xml><?xml version="1.0" encoding="utf-8"?>
 <p:sld xmlns:a="http://schemas.openxmlformats.org/drawingml/2006/main" xmlns:r="http://schemas.openxmlformats.org/officeDocument/2006/relationships" xmlns:p="http://schemas.openxmlformats.org/presentationml/2006/main">
   <p:cSld>
     <p:spTree>
@@ -7089,7 +10992,7 @@
             <a:spLocks noGrp="1"/>
           </p:cNvSpPr>
           <p:nvPr>
-            <p:ph type="title"/>
+            <p:ph type="title" idx="4294967295"/>
           </p:nvPr>
         </p:nvSpPr>
         <p:spPr>
@@ -7155,7 +11058,7 @@
 </p:sld>
 </file>
 
-<file path=ppt/slides/slide25.xml><?xml version="1.0" encoding="utf-8"?>
+<file path=ppt/slides/slide29.xml><?xml version="1.0" encoding="utf-8"?>
 <p:sld xmlns:a="http://schemas.openxmlformats.org/drawingml/2006/main" xmlns:r="http://schemas.openxmlformats.org/officeDocument/2006/relationships" xmlns:p="http://schemas.openxmlformats.org/presentationml/2006/main">
   <p:cSld>
     <p:spTree>
@@ -7191,7 +11094,7 @@
             <a:spLocks noGrp="1"/>
           </p:cNvSpPr>
           <p:nvPr>
-            <p:ph type="title"/>
+            <p:ph type="title" idx="4294967295"/>
           </p:nvPr>
         </p:nvSpPr>
         <p:spPr>
@@ -7421,1452 +11324,6 @@
 </p:sld>
 </file>
 
-<file path=ppt/slides/slide26.xml><?xml version="1.0" encoding="utf-8"?>
-<p:sld xmlns:a="http://schemas.openxmlformats.org/drawingml/2006/main" xmlns:r="http://schemas.openxmlformats.org/officeDocument/2006/relationships" xmlns:p="http://schemas.openxmlformats.org/presentationml/2006/main">
-  <p:cSld>
-    <p:spTree>
-      <p:nvGrpSpPr>
-        <p:cNvPr id="1" name="">
-          <a:extLst>
-            <a:ext uri="{FF2B5EF4-FFF2-40B4-BE49-F238E27FC236}">
-              <a16:creationId xmlns:a16="http://schemas.microsoft.com/office/drawing/2014/main" id="{096B4EB2-09FD-458F-0E89-D6CD0EE844E3}"/>
-            </a:ext>
-          </a:extLst>
-        </p:cNvPr>
-        <p:cNvGrpSpPr/>
-        <p:nvPr/>
-      </p:nvGrpSpPr>
-      <p:grpSpPr>
-        <a:xfrm>
-          <a:off x="0" y="0"/>
-          <a:ext cx="0" cy="0"/>
-          <a:chOff x="0" y="0"/>
-          <a:chExt cx="0" cy="0"/>
-        </a:xfrm>
-      </p:grpSpPr>
-      <p:sp>
-        <p:nvSpPr>
-          <p:cNvPr id="2" name="제목 1">
-            <a:extLst>
-              <a:ext uri="{FF2B5EF4-FFF2-40B4-BE49-F238E27FC236}">
-                <a16:creationId xmlns:a16="http://schemas.microsoft.com/office/drawing/2014/main" id="{9DC4AF71-758F-BA8D-6192-FEC04D1D8F92}"/>
-              </a:ext>
-            </a:extLst>
-          </p:cNvPr>
-          <p:cNvSpPr>
-            <a:spLocks noGrp="1"/>
-          </p:cNvSpPr>
-          <p:nvPr>
-            <p:ph type="title"/>
-          </p:nvPr>
-        </p:nvSpPr>
-        <p:spPr>
-          <a:xfrm>
-            <a:off x="0" y="18255"/>
-            <a:ext cx="10515600" cy="850425"/>
-          </a:xfrm>
-        </p:spPr>
-        <p:txBody>
-          <a:bodyPr>
-            <a:normAutofit/>
-          </a:bodyPr>
-          <a:lstStyle/>
-          <a:p>
-            <a:r>
-              <a:rPr lang="en-US" altLang="ko-KR" sz="5400" dirty="0" err="1"/>
-              <a:t>BitAlloter</a:t>
-            </a:r>
-            <a:endParaRPr lang="ko-KR" altLang="en-US" sz="5400" dirty="0"/>
-          </a:p>
-        </p:txBody>
-      </p:sp>
-      <p:sp>
-        <p:nvSpPr>
-          <p:cNvPr id="4" name="TextBox 3">
-            <a:extLst>
-              <a:ext uri="{FF2B5EF4-FFF2-40B4-BE49-F238E27FC236}">
-                <a16:creationId xmlns:a16="http://schemas.microsoft.com/office/drawing/2014/main" id="{03D14BEE-5B9D-F77C-1F44-F02DDDD9145C}"/>
-              </a:ext>
-            </a:extLst>
-          </p:cNvPr>
-          <p:cNvSpPr txBox="1"/>
-          <p:nvPr/>
-        </p:nvSpPr>
-        <p:spPr>
-          <a:xfrm>
-            <a:off x="137160" y="868680"/>
-            <a:ext cx="12317796" cy="2031325"/>
-          </a:xfrm>
-          <a:prstGeom prst="rect">
-            <a:avLst/>
-          </a:prstGeom>
-          <a:noFill/>
-        </p:spPr>
-        <p:txBody>
-          <a:bodyPr wrap="none" rtlCol="0">
-            <a:spAutoFit/>
-          </a:bodyPr>
-          <a:lstStyle/>
-          <a:p>
-            <a:r>
-              <a:rPr lang="en-US" altLang="ko-KR" dirty="0" err="1"/>
-              <a:t>bitAlloter</a:t>
-            </a:r>
-            <a:r>
-              <a:rPr lang="ko-KR" altLang="en-US" dirty="0"/>
-              <a:t>는 각 배열의 자리의 활성</a:t>
-            </a:r>
-            <a:r>
-              <a:rPr lang="en-US" altLang="ko-KR" dirty="0"/>
-              <a:t>/</a:t>
-            </a:r>
-            <a:r>
-              <a:rPr lang="ko-KR" altLang="en-US" dirty="0"/>
-              <a:t>비활성 혹은 할당</a:t>
-            </a:r>
-            <a:r>
-              <a:rPr lang="en-US" altLang="ko-KR" dirty="0"/>
-              <a:t>/</a:t>
-            </a:r>
-            <a:r>
-              <a:rPr lang="ko-KR" altLang="en-US" dirty="0" err="1"/>
-              <a:t>비할당</a:t>
-            </a:r>
-            <a:r>
-              <a:rPr lang="ko-KR" altLang="en-US" dirty="0"/>
-              <a:t> 여부를 </a:t>
-            </a:r>
-            <a:r>
-              <a:rPr lang="en-US" altLang="ko-KR" dirty="0"/>
-              <a:t>bit </a:t>
-            </a:r>
-            <a:r>
-              <a:rPr lang="ko-KR" altLang="en-US" dirty="0"/>
-              <a:t>배열로 나타낸다</a:t>
-            </a:r>
-            <a:r>
-              <a:rPr lang="en-US" altLang="ko-KR" dirty="0"/>
-              <a:t>.</a:t>
-            </a:r>
-          </a:p>
-          <a:p>
-            <a:r>
-              <a:rPr lang="en-US" altLang="ko-KR" dirty="0" err="1"/>
-              <a:t>Alloc</a:t>
-            </a:r>
-            <a:r>
-              <a:rPr lang="en-US" altLang="ko-KR" dirty="0"/>
-              <a:t>()</a:t>
-            </a:r>
-            <a:r>
-              <a:rPr lang="ko-KR" altLang="en-US" dirty="0"/>
-              <a:t>을 하면 비트가 </a:t>
-            </a:r>
-            <a:r>
-              <a:rPr lang="en-US" altLang="ko-KR" dirty="0"/>
-              <a:t>0</a:t>
-            </a:r>
-            <a:r>
-              <a:rPr lang="ko-KR" altLang="en-US" dirty="0"/>
-              <a:t>인 자리를 선택하여 </a:t>
-            </a:r>
-            <a:r>
-              <a:rPr lang="en-US" altLang="ko-KR" dirty="0"/>
-              <a:t>1</a:t>
-            </a:r>
-            <a:r>
-              <a:rPr lang="ko-KR" altLang="en-US" dirty="0"/>
-              <a:t>로 만들고 해당 위치를 </a:t>
-            </a:r>
-            <a:r>
-              <a:rPr lang="en-US" altLang="ko-KR" dirty="0"/>
-              <a:t>int </a:t>
-            </a:r>
-            <a:r>
-              <a:rPr lang="ko-KR" altLang="en-US" dirty="0"/>
-              <a:t>인덱스로 반환한다</a:t>
-            </a:r>
-            <a:r>
-              <a:rPr lang="en-US" altLang="ko-KR" dirty="0"/>
-              <a:t>.</a:t>
-            </a:r>
-          </a:p>
-          <a:p>
-            <a:r>
-              <a:rPr lang="ko-KR" altLang="en-US" dirty="0"/>
-              <a:t>그 인덱스를 오브젝트가 가지고 있다가 </a:t>
-            </a:r>
-            <a:r>
-              <a:rPr lang="en-US" altLang="ko-KR" dirty="0"/>
-              <a:t>Free(index) </a:t>
-            </a:r>
-            <a:r>
-              <a:rPr lang="ko-KR" altLang="en-US" dirty="0"/>
-              <a:t>를 호출하여 다시 해제할 수 있다</a:t>
-            </a:r>
-            <a:r>
-              <a:rPr lang="en-US" altLang="ko-KR" dirty="0"/>
-              <a:t>.</a:t>
-            </a:r>
-          </a:p>
-          <a:p>
-            <a:r>
-              <a:rPr lang="ko-KR" altLang="en-US" dirty="0"/>
-              <a:t>할당과정은 꽤나 빠르다</a:t>
-            </a:r>
-            <a:r>
-              <a:rPr lang="en-US" altLang="ko-KR" dirty="0"/>
-              <a:t>. </a:t>
-            </a:r>
-            <a:r>
-              <a:rPr lang="ko-KR" altLang="en-US" dirty="0"/>
-              <a:t>왜냐하면 가장 마지막 </a:t>
-            </a:r>
-            <a:r>
-              <a:rPr lang="en-US" altLang="ko-KR" dirty="0"/>
-              <a:t>0</a:t>
-            </a:r>
-            <a:r>
-              <a:rPr lang="ko-KR" altLang="en-US" dirty="0"/>
-              <a:t>을 항상 저장하게끔 알고리즘이 </a:t>
-            </a:r>
-            <a:r>
-              <a:rPr lang="ko-KR" altLang="en-US" dirty="0" err="1"/>
-              <a:t>짜여있기도</a:t>
-            </a:r>
-            <a:r>
-              <a:rPr lang="ko-KR" altLang="en-US" dirty="0"/>
-              <a:t> 하고</a:t>
-            </a:r>
-            <a:r>
-              <a:rPr lang="en-US" altLang="ko-KR" dirty="0"/>
-              <a:t>, (</a:t>
-            </a:r>
-            <a:r>
-              <a:rPr lang="ko-KR" altLang="en-US" dirty="0"/>
-              <a:t>곧바로 그걸 선택</a:t>
-            </a:r>
-            <a:r>
-              <a:rPr lang="en-US" altLang="ko-KR" dirty="0"/>
-              <a:t>)</a:t>
-            </a:r>
-          </a:p>
-          <a:p>
-            <a:r>
-              <a:rPr lang="ko-KR" altLang="en-US" dirty="0"/>
-              <a:t>또한 </a:t>
-            </a:r>
-            <a:r>
-              <a:rPr lang="en-US" altLang="ko-KR" dirty="0"/>
-              <a:t>bit </a:t>
-            </a:r>
-            <a:r>
-              <a:rPr lang="ko-KR" altLang="en-US" dirty="0"/>
-              <a:t>배열로 되어있기 때문에 </a:t>
-            </a:r>
-            <a:r>
-              <a:rPr lang="en-US" altLang="ko-KR" dirty="0"/>
-              <a:t>32</a:t>
-            </a:r>
-            <a:r>
-              <a:rPr lang="ko-KR" altLang="en-US" dirty="0"/>
-              <a:t>개의 오브젝트의 할당여부를 한번에 검사할 수 있다</a:t>
-            </a:r>
-            <a:r>
-              <a:rPr lang="en-US" altLang="ko-KR" dirty="0"/>
-              <a:t>. 0xFFFFFFFF</a:t>
-            </a:r>
-            <a:r>
-              <a:rPr lang="ko-KR" altLang="en-US" dirty="0"/>
-              <a:t>가 아니라면</a:t>
-            </a:r>
-            <a:endParaRPr lang="en-US" altLang="ko-KR" dirty="0"/>
-          </a:p>
-          <a:p>
-            <a:r>
-              <a:rPr lang="ko-KR" altLang="en-US" dirty="0"/>
-              <a:t>그곳에 </a:t>
-            </a:r>
-            <a:r>
-              <a:rPr lang="en-US" altLang="ko-KR" dirty="0"/>
-              <a:t>0</a:t>
-            </a:r>
-            <a:r>
-              <a:rPr lang="ko-KR" altLang="en-US" dirty="0"/>
-              <a:t>이 있다는 것이니 해당 </a:t>
-            </a:r>
-            <a:r>
-              <a:rPr lang="en-US" altLang="ko-KR" dirty="0"/>
-              <a:t>doubleword </a:t>
-            </a:r>
-            <a:r>
-              <a:rPr lang="ko-KR" altLang="en-US" dirty="0"/>
-              <a:t>를 </a:t>
-            </a:r>
-            <a:r>
-              <a:rPr lang="en-US" altLang="ko-KR" dirty="0"/>
-              <a:t>bit </a:t>
-            </a:r>
-            <a:r>
-              <a:rPr lang="ko-KR" altLang="en-US" dirty="0"/>
-              <a:t>순회한다</a:t>
-            </a:r>
-            <a:r>
-              <a:rPr lang="en-US" altLang="ko-KR" dirty="0"/>
-              <a:t>.</a:t>
-            </a:r>
-          </a:p>
-          <a:p>
-            <a:endParaRPr lang="en-US" altLang="ko-KR" dirty="0"/>
-          </a:p>
-        </p:txBody>
-      </p:sp>
-      <mc:AlternateContent xmlns:mc="http://schemas.openxmlformats.org/markup-compatibility/2006" xmlns:pslz="http://schemas.microsoft.com/office/powerpoint/2016/slidezoom">
-        <mc:Choice Requires="pslz">
-          <p:graphicFrame>
-            <p:nvGraphicFramePr>
-              <p:cNvPr id="8" name="슬라이드 확대/축소 7">
-                <a:extLst>
-                  <a:ext uri="{FF2B5EF4-FFF2-40B4-BE49-F238E27FC236}">
-                    <a16:creationId xmlns:a16="http://schemas.microsoft.com/office/drawing/2014/main" id="{D507B324-09B3-7B73-FD30-77FD1CC0027B}"/>
-                  </a:ext>
-                </a:extLst>
-              </p:cNvPr>
-              <p:cNvGraphicFramePr>
-                <a:graphicFrameLocks noChangeAspect="1"/>
-              </p:cNvGraphicFramePr>
-              <p:nvPr>
-                <p:extLst>
-                  <p:ext uri="{D42A27DB-BD31-4B8C-83A1-F6EECF244321}">
-                    <p14:modId xmlns:p14="http://schemas.microsoft.com/office/powerpoint/2010/main" val="3257729037"/>
-                  </p:ext>
-                </p:extLst>
-              </p:nvPr>
-            </p:nvGraphicFramePr>
-            <p:xfrm>
-              <a:off x="205986" y="2768395"/>
-              <a:ext cx="6617109" cy="3722124"/>
-            </p:xfrm>
-            <a:graphic>
-              <a:graphicData uri="http://schemas.microsoft.com/office/powerpoint/2016/slidezoom">
-                <pslz:sldZm>
-                  <pslz:sldZmObj sldId="283" cId="977256668">
-                    <pslz:zmPr id="{64EB6C04-2ACE-4F0E-BEC1-03A316A8B18C}" returnToParent="0" transitionDur="1000">
-                      <p166:blipFill xmlns:p166="http://schemas.microsoft.com/office/powerpoint/2016/6/main">
-                        <a:blip r:embed="rId2"/>
-                        <a:stretch>
-                          <a:fillRect/>
-                        </a:stretch>
-                      </p166:blipFill>
-                      <p166:spPr xmlns:p166="http://schemas.microsoft.com/office/powerpoint/2016/6/main">
-                        <a:xfrm>
-                          <a:off x="0" y="0"/>
-                          <a:ext cx="6617109" cy="3722124"/>
-                        </a:xfrm>
-                        <a:prstGeom prst="rect">
-                          <a:avLst/>
-                        </a:prstGeom>
-                        <a:ln w="3175">
-                          <a:solidFill>
-                            <a:prstClr val="ltGray"/>
-                          </a:solidFill>
-                        </a:ln>
-                      </p166:spPr>
-                    </pslz:zmPr>
-                  </pslz:sldZmObj>
-                </pslz:sldZm>
-              </a:graphicData>
-            </a:graphic>
-          </p:graphicFrame>
-        </mc:Choice>
-        <mc:Fallback xmlns="">
-          <p:pic>
-            <p:nvPicPr>
-              <p:cNvPr id="8" name="슬라이드 확대/축소 7">
-                <a:hlinkClick r:id="rId3" action="ppaction://hlinksldjump"/>
-                <a:extLst>
-                  <a:ext uri="{FF2B5EF4-FFF2-40B4-BE49-F238E27FC236}">
-                    <a16:creationId xmlns:a16="http://schemas.microsoft.com/office/drawing/2014/main" id="{D507B324-09B3-7B73-FD30-77FD1CC0027B}"/>
-                  </a:ext>
-                </a:extLst>
-              </p:cNvPr>
-              <p:cNvPicPr>
-                <a:picLocks noGrp="1" noRot="1" noChangeAspect="1" noMove="1" noResize="1" noEditPoints="1" noAdjustHandles="1" noChangeArrowheads="1" noChangeShapeType="1"/>
-              </p:cNvPicPr>
-              <p:nvPr/>
-            </p:nvPicPr>
-            <p:blipFill>
-              <a:blip r:embed="rId4"/>
-              <a:stretch>
-                <a:fillRect/>
-              </a:stretch>
-            </p:blipFill>
-            <p:spPr>
-              <a:xfrm>
-                <a:off x="205986" y="2768395"/>
-                <a:ext cx="6617109" cy="3722124"/>
-              </a:xfrm>
-              <a:prstGeom prst="rect">
-                <a:avLst/>
-              </a:prstGeom>
-              <a:ln w="3175">
-                <a:solidFill>
-                  <a:prstClr val="ltGray"/>
-                </a:solidFill>
-              </a:ln>
-            </p:spPr>
-          </p:pic>
-        </mc:Fallback>
-      </mc:AlternateContent>
-    </p:spTree>
-    <p:extLst>
-      <p:ext uri="{BB962C8B-B14F-4D97-AF65-F5344CB8AC3E}">
-        <p14:creationId xmlns:p14="http://schemas.microsoft.com/office/powerpoint/2010/main" val="3420612943"/>
-      </p:ext>
-    </p:extLst>
-  </p:cSld>
-  <p:clrMapOvr>
-    <a:masterClrMapping/>
-  </p:clrMapOvr>
-</p:sld>
-</file>
-
-<file path=ppt/slides/slide27.xml><?xml version="1.0" encoding="utf-8"?>
-<p:sld xmlns:a="http://schemas.openxmlformats.org/drawingml/2006/main" xmlns:r="http://schemas.openxmlformats.org/officeDocument/2006/relationships" xmlns:p="http://schemas.openxmlformats.org/presentationml/2006/main">
-  <p:cSld>
-    <p:spTree>
-      <p:nvGrpSpPr>
-        <p:cNvPr id="1" name="">
-          <a:extLst>
-            <a:ext uri="{FF2B5EF4-FFF2-40B4-BE49-F238E27FC236}">
-              <a16:creationId xmlns:a16="http://schemas.microsoft.com/office/drawing/2014/main" id="{DF16BDEE-4E30-B33C-786A-A062222B609B}"/>
-            </a:ext>
-          </a:extLst>
-        </p:cNvPr>
-        <p:cNvGrpSpPr/>
-        <p:nvPr/>
-      </p:nvGrpSpPr>
-      <p:grpSpPr>
-        <a:xfrm>
-          <a:off x="0" y="0"/>
-          <a:ext cx="0" cy="0"/>
-          <a:chOff x="0" y="0"/>
-          <a:chExt cx="0" cy="0"/>
-        </a:xfrm>
-      </p:grpSpPr>
-      <p:sp>
-        <p:nvSpPr>
-          <p:cNvPr id="2" name="제목 1">
-            <a:extLst>
-              <a:ext uri="{FF2B5EF4-FFF2-40B4-BE49-F238E27FC236}">
-                <a16:creationId xmlns:a16="http://schemas.microsoft.com/office/drawing/2014/main" id="{FDF51FA0-2288-B9C4-6639-D7C68CFC2A26}"/>
-              </a:ext>
-            </a:extLst>
-          </p:cNvPr>
-          <p:cNvSpPr>
-            <a:spLocks noGrp="1"/>
-          </p:cNvSpPr>
-          <p:nvPr>
-            <p:ph type="title"/>
-          </p:nvPr>
-        </p:nvSpPr>
-        <p:spPr>
-          <a:xfrm>
-            <a:off x="0" y="18255"/>
-            <a:ext cx="10515600" cy="850425"/>
-          </a:xfrm>
-        </p:spPr>
-        <p:txBody>
-          <a:bodyPr>
-            <a:normAutofit/>
-          </a:bodyPr>
-          <a:lstStyle/>
-          <a:p>
-            <a:r>
-              <a:rPr lang="en-US" altLang="ko-KR" sz="5400" dirty="0" err="1"/>
-              <a:t>BitAlloter</a:t>
-            </a:r>
-            <a:r>
-              <a:rPr lang="ko-KR" altLang="en-US" sz="5400" dirty="0"/>
-              <a:t>의 순회 방법</a:t>
-            </a:r>
-          </a:p>
-        </p:txBody>
-      </p:sp>
-      <p:sp>
-        <p:nvSpPr>
-          <p:cNvPr id="4" name="TextBox 3">
-            <a:extLst>
-              <a:ext uri="{FF2B5EF4-FFF2-40B4-BE49-F238E27FC236}">
-                <a16:creationId xmlns:a16="http://schemas.microsoft.com/office/drawing/2014/main" id="{8207CD42-075F-59E4-8451-B20704309C2E}"/>
-              </a:ext>
-            </a:extLst>
-          </p:cNvPr>
-          <p:cNvSpPr txBox="1"/>
-          <p:nvPr/>
-        </p:nvSpPr>
-        <p:spPr>
-          <a:xfrm>
-            <a:off x="159773" y="970455"/>
-            <a:ext cx="11766755" cy="1200329"/>
-          </a:xfrm>
-          <a:prstGeom prst="rect">
-            <a:avLst/>
-          </a:prstGeom>
-          <a:noFill/>
-        </p:spPr>
-        <p:txBody>
-          <a:bodyPr wrap="square">
-            <a:spAutoFit/>
-          </a:bodyPr>
-          <a:lstStyle/>
-          <a:p>
-            <a:r>
-              <a:rPr lang="en-US" altLang="ko-KR" dirty="0" err="1"/>
-              <a:t>bitAlloter</a:t>
-            </a:r>
-            <a:r>
-              <a:rPr lang="ko-KR" altLang="en-US" dirty="0"/>
-              <a:t>로 관리되는 오브젝트의 순회는 결국 활성화 비트 </a:t>
-            </a:r>
-            <a:r>
-              <a:rPr lang="en-US" altLang="ko-KR" dirty="0"/>
-              <a:t>(1)</a:t>
-            </a:r>
-            <a:r>
-              <a:rPr lang="ko-KR" altLang="en-US" dirty="0"/>
-              <a:t>로 켜진 오브젝트만을 대상으로 이루어지는데</a:t>
-            </a:r>
-            <a:r>
-              <a:rPr lang="en-US" altLang="ko-KR" dirty="0"/>
-              <a:t>,</a:t>
-            </a:r>
-          </a:p>
-          <a:p>
-            <a:r>
-              <a:rPr lang="ko-KR" altLang="en-US" dirty="0"/>
-              <a:t>이는 </a:t>
-            </a:r>
-            <a:r>
-              <a:rPr lang="en-US" altLang="ko-KR" dirty="0" err="1"/>
-              <a:t>IndexRange</a:t>
-            </a:r>
-            <a:r>
-              <a:rPr lang="ko-KR" altLang="en-US" dirty="0"/>
-              <a:t>의 배열로 해당하는 오브젝트 대상을 미리 뽑아두고 순회를 할 수 있다</a:t>
-            </a:r>
-            <a:r>
-              <a:rPr lang="en-US" altLang="ko-KR" dirty="0"/>
-              <a:t>. (</a:t>
-            </a:r>
-            <a:r>
-              <a:rPr lang="ko-KR" altLang="en-US" dirty="0"/>
-              <a:t>가장 빠른 방식</a:t>
-            </a:r>
-            <a:r>
-              <a:rPr lang="en-US" altLang="ko-KR" dirty="0"/>
-              <a:t>)</a:t>
-            </a:r>
-          </a:p>
-          <a:p>
-            <a:r>
-              <a:rPr lang="en-US" altLang="ko-KR" dirty="0" err="1"/>
-              <a:t>GetTourPairs</a:t>
-            </a:r>
-            <a:r>
-              <a:rPr lang="en-US" altLang="ko-KR" dirty="0"/>
-              <a:t> range</a:t>
-            </a:r>
-            <a:r>
-              <a:rPr lang="ko-KR" altLang="en-US" dirty="0"/>
-              <a:t>의 </a:t>
-            </a:r>
-            <a:r>
-              <a:rPr lang="en-US" altLang="ko-KR" dirty="0" err="1"/>
-              <a:t>startindex</a:t>
-            </a:r>
-            <a:r>
-              <a:rPr lang="en-US" altLang="ko-KR" dirty="0"/>
-              <a:t>, </a:t>
-            </a:r>
-            <a:r>
-              <a:rPr lang="en-US" altLang="ko-KR" dirty="0" err="1"/>
-              <a:t>endindex</a:t>
-            </a:r>
-            <a:r>
-              <a:rPr lang="ko-KR" altLang="en-US" dirty="0"/>
-              <a:t>를 담은 </a:t>
-            </a:r>
-            <a:r>
-              <a:rPr lang="en-US" altLang="ko-KR" dirty="0"/>
-              <a:t>pair</a:t>
-            </a:r>
-            <a:r>
-              <a:rPr lang="ko-KR" altLang="en-US" dirty="0"/>
-              <a:t>들을 순회하며 오브젝트를 처리하면 된다</a:t>
-            </a:r>
-            <a:r>
-              <a:rPr lang="en-US" altLang="ko-KR" dirty="0"/>
-              <a:t>.</a:t>
-            </a:r>
-          </a:p>
-          <a:p>
-            <a:r>
-              <a:rPr lang="ko-KR" altLang="en-US" dirty="0"/>
-              <a:t>아래 코드 </a:t>
-            </a:r>
-            <a:r>
-              <a:rPr lang="ko-KR" altLang="en-US" dirty="0" err="1"/>
-              <a:t>처럼</a:t>
-            </a:r>
-            <a:r>
-              <a:rPr lang="ko-KR" altLang="en-US" dirty="0"/>
-              <a:t> 사용된다</a:t>
-            </a:r>
-            <a:r>
-              <a:rPr lang="en-US" altLang="ko-KR" dirty="0"/>
-              <a:t>.</a:t>
-            </a:r>
-          </a:p>
-        </p:txBody>
-      </p:sp>
-      <p:pic>
-        <p:nvPicPr>
-          <p:cNvPr id="6" name="그림 5">
-            <a:extLst>
-              <a:ext uri="{FF2B5EF4-FFF2-40B4-BE49-F238E27FC236}">
-                <a16:creationId xmlns:a16="http://schemas.microsoft.com/office/drawing/2014/main" id="{048A0B7B-D6B7-55EF-F9E4-3607956E6BB7}"/>
-              </a:ext>
-            </a:extLst>
-          </p:cNvPr>
-          <p:cNvPicPr>
-            <a:picLocks noChangeAspect="1"/>
-          </p:cNvPicPr>
-          <p:nvPr/>
-        </p:nvPicPr>
-        <p:blipFill>
-          <a:blip r:embed="rId2"/>
-          <a:stretch>
-            <a:fillRect/>
-          </a:stretch>
-        </p:blipFill>
-        <p:spPr>
-          <a:xfrm>
-            <a:off x="159773" y="2247697"/>
-            <a:ext cx="7025640" cy="2362605"/>
-          </a:xfrm>
-          <a:prstGeom prst="rect">
-            <a:avLst/>
-          </a:prstGeom>
-        </p:spPr>
-      </p:pic>
-    </p:spTree>
-    <p:extLst>
-      <p:ext uri="{BB962C8B-B14F-4D97-AF65-F5344CB8AC3E}">
-        <p14:creationId xmlns:p14="http://schemas.microsoft.com/office/powerpoint/2010/main" val="977256668"/>
-      </p:ext>
-    </p:extLst>
-  </p:cSld>
-  <p:clrMapOvr>
-    <a:masterClrMapping/>
-  </p:clrMapOvr>
-</p:sld>
-</file>
-
-<file path=ppt/slides/slide28.xml><?xml version="1.0" encoding="utf-8"?>
-<p:sld xmlns:a="http://schemas.openxmlformats.org/drawingml/2006/main" xmlns:r="http://schemas.openxmlformats.org/officeDocument/2006/relationships" xmlns:p="http://schemas.openxmlformats.org/presentationml/2006/main">
-  <p:cSld>
-    <p:spTree>
-      <p:nvGrpSpPr>
-        <p:cNvPr id="1" name="">
-          <a:extLst>
-            <a:ext uri="{FF2B5EF4-FFF2-40B4-BE49-F238E27FC236}">
-              <a16:creationId xmlns:a16="http://schemas.microsoft.com/office/drawing/2014/main" id="{78F40CFE-B1DF-AF97-9299-369ACD561ADB}"/>
-            </a:ext>
-          </a:extLst>
-        </p:cNvPr>
-        <p:cNvGrpSpPr/>
-        <p:nvPr/>
-      </p:nvGrpSpPr>
-      <p:grpSpPr>
-        <a:xfrm>
-          <a:off x="0" y="0"/>
-          <a:ext cx="0" cy="0"/>
-          <a:chOff x="0" y="0"/>
-          <a:chExt cx="0" cy="0"/>
-        </a:xfrm>
-      </p:grpSpPr>
-      <p:sp>
-        <p:nvSpPr>
-          <p:cNvPr id="2" name="제목 1">
-            <a:extLst>
-              <a:ext uri="{FF2B5EF4-FFF2-40B4-BE49-F238E27FC236}">
-                <a16:creationId xmlns:a16="http://schemas.microsoft.com/office/drawing/2014/main" id="{0A894679-0F0F-9BFC-2144-B64E52D6530D}"/>
-              </a:ext>
-            </a:extLst>
-          </p:cNvPr>
-          <p:cNvSpPr>
-            <a:spLocks noGrp="1"/>
-          </p:cNvSpPr>
-          <p:nvPr>
-            <p:ph type="title"/>
-          </p:nvPr>
-        </p:nvSpPr>
-        <p:spPr>
-          <a:xfrm>
-            <a:off x="0" y="18255"/>
-            <a:ext cx="10515600" cy="850425"/>
-          </a:xfrm>
-        </p:spPr>
-        <p:txBody>
-          <a:bodyPr>
-            <a:normAutofit/>
-          </a:bodyPr>
-          <a:lstStyle/>
-          <a:p>
-            <a:r>
-              <a:rPr lang="en-US" altLang="ko-KR" sz="5400" dirty="0" err="1"/>
-              <a:t>Chunck</a:t>
-            </a:r>
-            <a:endParaRPr lang="ko-KR" altLang="en-US" sz="5400" dirty="0"/>
-          </a:p>
-        </p:txBody>
-      </p:sp>
-      <p:sp>
-        <p:nvSpPr>
-          <p:cNvPr id="3" name="TextBox 2">
-            <a:extLst>
-              <a:ext uri="{FF2B5EF4-FFF2-40B4-BE49-F238E27FC236}">
-                <a16:creationId xmlns:a16="http://schemas.microsoft.com/office/drawing/2014/main" id="{AAD7D6DC-84FB-9AB3-5CDA-77D37639647D}"/>
-              </a:ext>
-            </a:extLst>
-          </p:cNvPr>
-          <p:cNvSpPr txBox="1"/>
-          <p:nvPr/>
-        </p:nvSpPr>
-        <p:spPr>
-          <a:xfrm>
-            <a:off x="0" y="868680"/>
-            <a:ext cx="10257936" cy="2308324"/>
-          </a:xfrm>
-          <a:prstGeom prst="rect">
-            <a:avLst/>
-          </a:prstGeom>
-          <a:noFill/>
-        </p:spPr>
-        <p:txBody>
-          <a:bodyPr wrap="none" rtlCol="0">
-            <a:spAutoFit/>
-          </a:bodyPr>
-          <a:lstStyle/>
-          <a:p>
-            <a:r>
-              <a:rPr lang="ko-KR" altLang="en-US" dirty="0"/>
-              <a:t>공간을 </a:t>
-            </a:r>
-            <a:r>
-              <a:rPr lang="ko-KR" altLang="en-US" dirty="0" err="1"/>
-              <a:t>청크로</a:t>
-            </a:r>
-            <a:r>
-              <a:rPr lang="ko-KR" altLang="en-US" dirty="0"/>
-              <a:t> 나누었다</a:t>
-            </a:r>
-            <a:r>
-              <a:rPr lang="en-US" altLang="ko-KR" dirty="0"/>
-              <a:t>.</a:t>
-            </a:r>
-          </a:p>
-          <a:p>
-            <a:r>
-              <a:rPr lang="en-US" altLang="ko-KR" dirty="0"/>
-              <a:t>&gt;&gt; </a:t>
-            </a:r>
-            <a:r>
-              <a:rPr lang="ko-KR" altLang="en-US" dirty="0"/>
-              <a:t>왜 나누었는가</a:t>
-            </a:r>
-            <a:r>
-              <a:rPr lang="en-US" altLang="ko-KR" dirty="0"/>
-              <a:t>?</a:t>
-            </a:r>
-          </a:p>
-          <a:p>
-            <a:r>
-              <a:rPr lang="en-US" altLang="ko-KR" dirty="0"/>
-              <a:t>1. Render</a:t>
-            </a:r>
-            <a:r>
-              <a:rPr lang="ko-KR" altLang="en-US" dirty="0"/>
-              <a:t>에서 오브젝트가 많아지더라도 뷰 </a:t>
-            </a:r>
-            <a:r>
-              <a:rPr lang="ko-KR" altLang="en-US" dirty="0" err="1"/>
-              <a:t>프러스텀</a:t>
-            </a:r>
-            <a:r>
-              <a:rPr lang="ko-KR" altLang="en-US" dirty="0"/>
-              <a:t> </a:t>
-            </a:r>
-            <a:r>
-              <a:rPr lang="ko-KR" altLang="en-US" dirty="0" err="1"/>
-              <a:t>컬링을</a:t>
-            </a:r>
-            <a:r>
-              <a:rPr lang="ko-KR" altLang="en-US" dirty="0"/>
-              <a:t> 빠르게 하고 싶었음</a:t>
-            </a:r>
-            <a:r>
-              <a:rPr lang="en-US" altLang="ko-KR" dirty="0"/>
-              <a:t>.</a:t>
-            </a:r>
-          </a:p>
-          <a:p>
-            <a:r>
-              <a:rPr lang="en-US" altLang="ko-KR" dirty="0"/>
-              <a:t>	</a:t>
-            </a:r>
-            <a:r>
-              <a:rPr lang="ko-KR" altLang="en-US" dirty="0"/>
-              <a:t>만약 </a:t>
-            </a:r>
-            <a:r>
-              <a:rPr lang="ko-KR" altLang="en-US" dirty="0" err="1"/>
-              <a:t>청크가</a:t>
-            </a:r>
-            <a:r>
-              <a:rPr lang="ko-KR" altLang="en-US" dirty="0"/>
-              <a:t> 없다면 오브젝트마다 </a:t>
-            </a:r>
-            <a:r>
-              <a:rPr lang="ko-KR" altLang="en-US" dirty="0" err="1"/>
-              <a:t>프러스텀에</a:t>
-            </a:r>
-            <a:r>
-              <a:rPr lang="ko-KR" altLang="en-US" dirty="0"/>
-              <a:t> 들어가는지 체크를 했어야 했음</a:t>
-            </a:r>
-            <a:r>
-              <a:rPr lang="en-US" altLang="ko-KR" dirty="0"/>
-              <a:t>.</a:t>
-            </a:r>
-          </a:p>
-          <a:p>
-            <a:r>
-              <a:rPr lang="en-US" altLang="ko-KR" dirty="0"/>
-              <a:t>2. </a:t>
-            </a:r>
-            <a:r>
-              <a:rPr lang="ko-KR" altLang="en-US" dirty="0"/>
-              <a:t>서버에서 충돌검사를 할 것을 염두에 두었다</a:t>
-            </a:r>
-            <a:r>
-              <a:rPr lang="en-US" altLang="ko-KR" dirty="0"/>
-              <a:t>. </a:t>
-            </a:r>
-            <a:r>
-              <a:rPr lang="ko-KR" altLang="en-US" dirty="0"/>
-              <a:t>충돌의 검사는 </a:t>
-            </a:r>
-            <a:r>
-              <a:rPr lang="en-US" altLang="ko-KR" dirty="0"/>
-              <a:t>O(N^2)</a:t>
-            </a:r>
-            <a:r>
-              <a:rPr lang="ko-KR" altLang="en-US" dirty="0"/>
-              <a:t>의 복잡도를 가지기 때문에</a:t>
-            </a:r>
-            <a:endParaRPr lang="en-US" altLang="ko-KR" dirty="0"/>
-          </a:p>
-          <a:p>
-            <a:r>
-              <a:rPr lang="en-US" altLang="ko-KR" dirty="0"/>
-              <a:t>	</a:t>
-            </a:r>
-            <a:r>
-              <a:rPr lang="ko-KR" altLang="en-US" dirty="0"/>
-              <a:t>작업을 잘게 분할을 하지 않으면 </a:t>
-            </a:r>
-            <a:r>
-              <a:rPr lang="en-US" altLang="ko-KR" dirty="0" err="1"/>
-              <a:t>cpu</a:t>
-            </a:r>
-            <a:r>
-              <a:rPr lang="en-US" altLang="ko-KR" dirty="0"/>
-              <a:t> </a:t>
-            </a:r>
-            <a:r>
-              <a:rPr lang="ko-KR" altLang="en-US" dirty="0"/>
-              <a:t>의 부담이 심해질 것 같았다</a:t>
-            </a:r>
-            <a:r>
-              <a:rPr lang="en-US" altLang="ko-KR" dirty="0"/>
-              <a:t>.</a:t>
-            </a:r>
-          </a:p>
-          <a:p>
-            <a:r>
-              <a:rPr lang="en-US" altLang="ko-KR" dirty="0"/>
-              <a:t>&gt;&gt; </a:t>
-            </a:r>
-            <a:r>
-              <a:rPr lang="ko-KR" altLang="en-US" dirty="0"/>
-              <a:t>때문에 기본적으로 모든 오브젝트들은 </a:t>
-            </a:r>
-            <a:r>
-              <a:rPr lang="en-US" altLang="ko-KR" dirty="0"/>
-              <a:t>Chunk </a:t>
-            </a:r>
-            <a:r>
-              <a:rPr lang="ko-KR" altLang="en-US" dirty="0"/>
-              <a:t>안에 있어야 했고</a:t>
-            </a:r>
-            <a:r>
-              <a:rPr lang="en-US" altLang="ko-KR" dirty="0"/>
-              <a:t>, </a:t>
-            </a:r>
-            <a:r>
-              <a:rPr lang="en-US" altLang="ko-KR" dirty="0" err="1"/>
-              <a:t>chunck</a:t>
-            </a:r>
-            <a:r>
-              <a:rPr lang="en-US" altLang="ko-KR" dirty="0"/>
-              <a:t> </a:t>
-            </a:r>
-            <a:r>
-              <a:rPr lang="ko-KR" altLang="en-US" dirty="0"/>
-              <a:t>안에 </a:t>
-            </a:r>
-            <a:endParaRPr lang="en-US" altLang="ko-KR" dirty="0"/>
-          </a:p>
-          <a:p>
-            <a:r>
-              <a:rPr lang="en-US" altLang="ko-KR" dirty="0" err="1"/>
-              <a:t>StaticObjectVecset</a:t>
-            </a:r>
-            <a:r>
-              <a:rPr lang="en-US" altLang="ko-KR" dirty="0"/>
-              <a:t>, </a:t>
-            </a:r>
-            <a:r>
-              <a:rPr lang="en-US" altLang="ko-KR" dirty="0" err="1"/>
-              <a:t>DynamicObjectVecset</a:t>
-            </a:r>
-            <a:r>
-              <a:rPr lang="en-US" altLang="ko-KR" dirty="0"/>
-              <a:t>, </a:t>
-            </a:r>
-            <a:r>
-              <a:rPr lang="en-US" altLang="ko-KR" dirty="0" err="1"/>
-              <a:t>SkinMeshObjectVecset</a:t>
-            </a:r>
-            <a:r>
-              <a:rPr lang="ko-KR" altLang="en-US" dirty="0"/>
-              <a:t>을 분리하여 저장한다</a:t>
-            </a:r>
-            <a:r>
-              <a:rPr lang="en-US" altLang="ko-KR" dirty="0"/>
-              <a:t>.</a:t>
-            </a:r>
-          </a:p>
-        </p:txBody>
-      </p:sp>
-      <mc:AlternateContent xmlns:mc="http://schemas.openxmlformats.org/markup-compatibility/2006" xmlns:pslz="http://schemas.microsoft.com/office/powerpoint/2016/slidezoom">
-        <mc:Choice Requires="pslz">
-          <p:graphicFrame>
-            <p:nvGraphicFramePr>
-              <p:cNvPr id="5" name="슬라이드 확대/축소 4">
-                <a:extLst>
-                  <a:ext uri="{FF2B5EF4-FFF2-40B4-BE49-F238E27FC236}">
-                    <a16:creationId xmlns:a16="http://schemas.microsoft.com/office/drawing/2014/main" id="{A32FD096-4D7D-DA8D-5C6D-B259A786D223}"/>
-                  </a:ext>
-                </a:extLst>
-              </p:cNvPr>
-              <p:cNvGraphicFramePr>
-                <a:graphicFrameLocks noChangeAspect="1"/>
-              </p:cNvGraphicFramePr>
-              <p:nvPr>
-                <p:extLst>
-                  <p:ext uri="{D42A27DB-BD31-4B8C-83A1-F6EECF244321}">
-                    <p14:modId xmlns:p14="http://schemas.microsoft.com/office/powerpoint/2010/main" val="331875436"/>
-                  </p:ext>
-                </p:extLst>
-              </p:nvPr>
-            </p:nvGraphicFramePr>
-            <p:xfrm>
-              <a:off x="176980" y="3177004"/>
-              <a:ext cx="6235507" cy="3507473"/>
-            </p:xfrm>
-            <a:graphic>
-              <a:graphicData uri="http://schemas.microsoft.com/office/powerpoint/2016/slidezoom">
-                <pslz:sldZm>
-                  <pslz:sldZmObj sldId="284" cId="1005892815">
-                    <pslz:zmPr id="{FE25BFE4-38C9-478C-8B0E-F498B0B711D0}" returnToParent="0" transitionDur="1000">
-                      <p166:blipFill xmlns:p166="http://schemas.microsoft.com/office/powerpoint/2016/6/main">
-                        <a:blip r:embed="rId2"/>
-                        <a:stretch>
-                          <a:fillRect/>
-                        </a:stretch>
-                      </p166:blipFill>
-                      <p166:spPr xmlns:p166="http://schemas.microsoft.com/office/powerpoint/2016/6/main">
-                        <a:xfrm>
-                          <a:off x="0" y="0"/>
-                          <a:ext cx="6235507" cy="3507473"/>
-                        </a:xfrm>
-                        <a:prstGeom prst="rect">
-                          <a:avLst/>
-                        </a:prstGeom>
-                        <a:ln w="3175">
-                          <a:solidFill>
-                            <a:prstClr val="ltGray"/>
-                          </a:solidFill>
-                        </a:ln>
-                      </p166:spPr>
-                    </pslz:zmPr>
-                  </pslz:sldZmObj>
-                </pslz:sldZm>
-              </a:graphicData>
-            </a:graphic>
-          </p:graphicFrame>
-        </mc:Choice>
-        <mc:Fallback xmlns="">
-          <p:pic>
-            <p:nvPicPr>
-              <p:cNvPr id="5" name="슬라이드 확대/축소 4">
-                <a:hlinkClick r:id="rId3" action="ppaction://hlinksldjump"/>
-                <a:extLst>
-                  <a:ext uri="{FF2B5EF4-FFF2-40B4-BE49-F238E27FC236}">
-                    <a16:creationId xmlns:a16="http://schemas.microsoft.com/office/drawing/2014/main" id="{A32FD096-4D7D-DA8D-5C6D-B259A786D223}"/>
-                  </a:ext>
-                </a:extLst>
-              </p:cNvPr>
-              <p:cNvPicPr>
-                <a:picLocks noGrp="1" noRot="1" noChangeAspect="1" noMove="1" noResize="1" noEditPoints="1" noAdjustHandles="1" noChangeArrowheads="1" noChangeShapeType="1"/>
-              </p:cNvPicPr>
-              <p:nvPr/>
-            </p:nvPicPr>
-            <p:blipFill>
-              <a:blip r:embed="rId4"/>
-              <a:stretch>
-                <a:fillRect/>
-              </a:stretch>
-            </p:blipFill>
-            <p:spPr>
-              <a:xfrm>
-                <a:off x="176980" y="3177004"/>
-                <a:ext cx="6235507" cy="3507473"/>
-              </a:xfrm>
-              <a:prstGeom prst="rect">
-                <a:avLst/>
-              </a:prstGeom>
-              <a:ln w="3175">
-                <a:solidFill>
-                  <a:prstClr val="ltGray"/>
-                </a:solidFill>
-              </a:ln>
-            </p:spPr>
-          </p:pic>
-        </mc:Fallback>
-      </mc:AlternateContent>
-    </p:spTree>
-    <p:extLst>
-      <p:ext uri="{BB962C8B-B14F-4D97-AF65-F5344CB8AC3E}">
-        <p14:creationId xmlns:p14="http://schemas.microsoft.com/office/powerpoint/2010/main" val="2927238059"/>
-      </p:ext>
-    </p:extLst>
-  </p:cSld>
-  <p:clrMapOvr>
-    <a:masterClrMapping/>
-  </p:clrMapOvr>
-</p:sld>
-</file>
-
-<file path=ppt/slides/slide29.xml><?xml version="1.0" encoding="utf-8"?>
-<p:sld xmlns:a="http://schemas.openxmlformats.org/drawingml/2006/main" xmlns:r="http://schemas.openxmlformats.org/officeDocument/2006/relationships" xmlns:p="http://schemas.openxmlformats.org/presentationml/2006/main">
-  <p:cSld>
-    <p:spTree>
-      <p:nvGrpSpPr>
-        <p:cNvPr id="1" name="">
-          <a:extLst>
-            <a:ext uri="{FF2B5EF4-FFF2-40B4-BE49-F238E27FC236}">
-              <a16:creationId xmlns:a16="http://schemas.microsoft.com/office/drawing/2014/main" id="{599985CC-4D03-1292-E226-C319E963240D}"/>
-            </a:ext>
-          </a:extLst>
-        </p:cNvPr>
-        <p:cNvGrpSpPr/>
-        <p:nvPr/>
-      </p:nvGrpSpPr>
-      <p:grpSpPr>
-        <a:xfrm>
-          <a:off x="0" y="0"/>
-          <a:ext cx="0" cy="0"/>
-          <a:chOff x="0" y="0"/>
-          <a:chExt cx="0" cy="0"/>
-        </a:xfrm>
-      </p:grpSpPr>
-      <p:sp>
-        <p:nvSpPr>
-          <p:cNvPr id="2" name="제목 1">
-            <a:extLst>
-              <a:ext uri="{FF2B5EF4-FFF2-40B4-BE49-F238E27FC236}">
-                <a16:creationId xmlns:a16="http://schemas.microsoft.com/office/drawing/2014/main" id="{350DCC37-3080-F4E8-AA7B-4FF66D6E925E}"/>
-              </a:ext>
-            </a:extLst>
-          </p:cNvPr>
-          <p:cNvSpPr>
-            <a:spLocks noGrp="1"/>
-          </p:cNvSpPr>
-          <p:nvPr>
-            <p:ph type="title"/>
-          </p:nvPr>
-        </p:nvSpPr>
-        <p:spPr>
-          <a:xfrm>
-            <a:off x="0" y="18255"/>
-            <a:ext cx="10515600" cy="850425"/>
-          </a:xfrm>
-        </p:spPr>
-        <p:txBody>
-          <a:bodyPr>
-            <a:normAutofit/>
-          </a:bodyPr>
-          <a:lstStyle/>
-          <a:p>
-            <a:r>
-              <a:rPr lang="en-US" altLang="ko-KR" sz="5400" dirty="0" err="1"/>
-              <a:t>Chunck</a:t>
-            </a:r>
-            <a:r>
-              <a:rPr lang="ko-KR" altLang="en-US" sz="5400" dirty="0"/>
-              <a:t>의 문제점과 해결</a:t>
-            </a:r>
-          </a:p>
-        </p:txBody>
-      </p:sp>
-      <p:sp>
-        <p:nvSpPr>
-          <p:cNvPr id="4" name="TextBox 3">
-            <a:extLst>
-              <a:ext uri="{FF2B5EF4-FFF2-40B4-BE49-F238E27FC236}">
-                <a16:creationId xmlns:a16="http://schemas.microsoft.com/office/drawing/2014/main" id="{FB24A892-2A66-07AB-B5AA-3F07562002E2}"/>
-              </a:ext>
-            </a:extLst>
-          </p:cNvPr>
-          <p:cNvSpPr txBox="1"/>
-          <p:nvPr/>
-        </p:nvSpPr>
-        <p:spPr>
-          <a:xfrm>
-            <a:off x="1" y="868680"/>
-            <a:ext cx="12090400" cy="2308324"/>
-          </a:xfrm>
-          <a:prstGeom prst="rect">
-            <a:avLst/>
-          </a:prstGeom>
-          <a:noFill/>
-        </p:spPr>
-        <p:txBody>
-          <a:bodyPr wrap="square" rtlCol="0">
-            <a:spAutoFit/>
-          </a:bodyPr>
-          <a:lstStyle/>
-          <a:p>
-            <a:r>
-              <a:rPr lang="ko-KR" altLang="en-US" dirty="0"/>
-              <a:t>다만 특정 오브젝트는 여러 </a:t>
-            </a:r>
-            <a:r>
-              <a:rPr lang="ko-KR" altLang="en-US" dirty="0" err="1"/>
-              <a:t>청크에</a:t>
-            </a:r>
-            <a:r>
-              <a:rPr lang="ko-KR" altLang="en-US" dirty="0"/>
-              <a:t> 속해 있을 수 있다</a:t>
-            </a:r>
-            <a:r>
-              <a:rPr lang="en-US" altLang="ko-KR" dirty="0"/>
-              <a:t>. (</a:t>
-            </a:r>
-            <a:r>
-              <a:rPr lang="ko-KR" altLang="en-US" dirty="0"/>
-              <a:t>중간에 걸친 경우</a:t>
-            </a:r>
-            <a:r>
-              <a:rPr lang="en-US" altLang="ko-KR" dirty="0"/>
-              <a:t>)</a:t>
-            </a:r>
-          </a:p>
-          <a:p>
-            <a:r>
-              <a:rPr lang="ko-KR" altLang="en-US" dirty="0"/>
-              <a:t>이럴 경우 오브젝트의 일부를 포함하는 모든 </a:t>
-            </a:r>
-            <a:r>
-              <a:rPr lang="ko-KR" altLang="en-US" dirty="0" err="1"/>
-              <a:t>청크들의</a:t>
-            </a:r>
-            <a:r>
-              <a:rPr lang="ko-KR" altLang="en-US" dirty="0"/>
-              <a:t> </a:t>
-            </a:r>
-            <a:r>
-              <a:rPr lang="en-US" altLang="ko-KR" dirty="0" err="1"/>
-              <a:t>vecset</a:t>
-            </a:r>
-            <a:r>
-              <a:rPr lang="ko-KR" altLang="en-US" dirty="0"/>
-              <a:t>에 해당 오브젝트가 들어가게 된다</a:t>
-            </a:r>
-            <a:r>
-              <a:rPr lang="en-US" altLang="ko-KR" dirty="0"/>
-              <a:t>.</a:t>
-            </a:r>
-          </a:p>
-          <a:p>
-            <a:r>
-              <a:rPr lang="ko-KR" altLang="en-US" dirty="0"/>
-              <a:t>다만 이럴 경우 여러 문제가 생기는데</a:t>
-            </a:r>
-            <a:r>
-              <a:rPr lang="en-US" altLang="ko-KR" dirty="0"/>
-              <a:t>, </a:t>
-            </a:r>
-            <a:r>
-              <a:rPr lang="ko-KR" altLang="en-US" dirty="0"/>
-              <a:t>그것은 다음과 같다</a:t>
-            </a:r>
-            <a:r>
-              <a:rPr lang="en-US" altLang="ko-KR" dirty="0"/>
-              <a:t>.</a:t>
-            </a:r>
-          </a:p>
-          <a:p>
-            <a:pPr marL="342900" indent="-342900">
-              <a:buAutoNum type="arabicPeriod"/>
-            </a:pPr>
-            <a:r>
-              <a:rPr lang="ko-KR" altLang="en-US" dirty="0"/>
-              <a:t>오브젝트마다 한번씩 </a:t>
-            </a:r>
-            <a:r>
-              <a:rPr lang="en-US" altLang="ko-KR" dirty="0"/>
-              <a:t>Update</a:t>
-            </a:r>
-            <a:r>
-              <a:rPr lang="ko-KR" altLang="en-US" dirty="0"/>
-              <a:t>나 </a:t>
-            </a:r>
-            <a:r>
-              <a:rPr lang="en-US" altLang="ko-KR" dirty="0"/>
-              <a:t>Render</a:t>
-            </a:r>
-            <a:r>
-              <a:rPr lang="ko-KR" altLang="en-US" dirty="0"/>
-              <a:t>를 수행해야 </a:t>
-            </a:r>
-            <a:r>
-              <a:rPr lang="ko-KR" altLang="en-US" dirty="0" err="1"/>
-              <a:t>할때는</a:t>
-            </a:r>
-            <a:r>
-              <a:rPr lang="ko-KR" altLang="en-US" dirty="0"/>
-              <a:t> 어떻게 하는가</a:t>
-            </a:r>
-            <a:r>
-              <a:rPr lang="en-US" altLang="ko-KR" dirty="0"/>
-              <a:t>? </a:t>
-            </a:r>
-            <a:r>
-              <a:rPr lang="ko-KR" altLang="en-US" dirty="0"/>
-              <a:t>그럴 때마다 각자가 이미 해당 동작을</a:t>
-            </a:r>
-            <a:r>
-              <a:rPr lang="en-US" altLang="ko-KR" dirty="0"/>
-              <a:t> </a:t>
-            </a:r>
-            <a:r>
-              <a:rPr lang="ko-KR" altLang="en-US" dirty="0"/>
-              <a:t>수행했다는 표시를 해야 하는데</a:t>
-            </a:r>
-            <a:r>
-              <a:rPr lang="en-US" altLang="ko-KR" dirty="0"/>
-              <a:t>, </a:t>
-            </a:r>
-            <a:r>
-              <a:rPr lang="ko-KR" altLang="en-US" dirty="0"/>
-              <a:t>어디에 어떻게 할 것인가</a:t>
-            </a:r>
-            <a:endParaRPr lang="en-US" altLang="ko-KR" dirty="0"/>
-          </a:p>
-          <a:p>
-            <a:pPr marL="342900" indent="-342900">
-              <a:buAutoNum type="arabicPeriod"/>
-            </a:pPr>
-            <a:r>
-              <a:rPr lang="ko-KR" altLang="en-US" dirty="0"/>
-              <a:t>해당 오브젝트가 이동을 하게 된다면</a:t>
-            </a:r>
-            <a:r>
-              <a:rPr lang="en-US" altLang="ko-KR" dirty="0"/>
-              <a:t>, </a:t>
-            </a:r>
-            <a:r>
-              <a:rPr lang="ko-KR" altLang="en-US" dirty="0" err="1"/>
-              <a:t>청크에서</a:t>
-            </a:r>
-            <a:r>
-              <a:rPr lang="ko-KR" altLang="en-US" dirty="0"/>
-              <a:t> 해당 오브젝트가 빠져나가야 한다</a:t>
-            </a:r>
-            <a:r>
-              <a:rPr lang="en-US" altLang="ko-KR" dirty="0"/>
-              <a:t>. </a:t>
-            </a:r>
-            <a:r>
-              <a:rPr lang="ko-KR" altLang="en-US" dirty="0"/>
-              <a:t>그러나 </a:t>
-            </a:r>
-            <a:r>
-              <a:rPr lang="en-US" altLang="ko-KR" dirty="0" err="1"/>
-              <a:t>vecset</a:t>
-            </a:r>
-            <a:r>
-              <a:rPr lang="ko-KR" altLang="en-US" dirty="0"/>
-              <a:t>은 해당 오브젝트가 자신이 어떤 인덱스를 가지고 있었는지 기억해야만 </a:t>
-            </a:r>
-            <a:r>
-              <a:rPr lang="en-US" altLang="ko-KR" dirty="0"/>
-              <a:t>Free</a:t>
-            </a:r>
-            <a:r>
-              <a:rPr lang="ko-KR" altLang="en-US" dirty="0"/>
-              <a:t>를 할 수 있었다</a:t>
-            </a:r>
-            <a:r>
-              <a:rPr lang="en-US" altLang="ko-KR" dirty="0"/>
-              <a:t>. </a:t>
-            </a:r>
-            <a:r>
-              <a:rPr lang="ko-KR" altLang="en-US" dirty="0"/>
-              <a:t>그럼 어떻게 이동을 정상적으로 처리할 수 있겠는가</a:t>
-            </a:r>
-            <a:r>
-              <a:rPr lang="en-US" altLang="ko-KR" dirty="0"/>
-              <a:t>?</a:t>
-            </a:r>
-          </a:p>
-        </p:txBody>
-      </p:sp>
-      <mc:AlternateContent xmlns:mc="http://schemas.openxmlformats.org/markup-compatibility/2006" xmlns:pslz="http://schemas.microsoft.com/office/powerpoint/2016/slidezoom">
-        <mc:Choice Requires="pslz">
-          <p:graphicFrame>
-            <p:nvGraphicFramePr>
-              <p:cNvPr id="6" name="슬라이드 확대/축소 5">
-                <a:extLst>
-                  <a:ext uri="{FF2B5EF4-FFF2-40B4-BE49-F238E27FC236}">
-                    <a16:creationId xmlns:a16="http://schemas.microsoft.com/office/drawing/2014/main" id="{0354CA0C-3B8C-BF9F-4B32-34158CC93393}"/>
-                  </a:ext>
-                </a:extLst>
-              </p:cNvPr>
-              <p:cNvGraphicFramePr>
-                <a:graphicFrameLocks noChangeAspect="1"/>
-              </p:cNvGraphicFramePr>
-              <p:nvPr>
-                <p:extLst>
-                  <p:ext uri="{D42A27DB-BD31-4B8C-83A1-F6EECF244321}">
-                    <p14:modId xmlns:p14="http://schemas.microsoft.com/office/powerpoint/2010/main" val="2554558329"/>
-                  </p:ext>
-                </p:extLst>
-              </p:nvPr>
-            </p:nvGraphicFramePr>
-            <p:xfrm>
-              <a:off x="101599" y="3177004"/>
-              <a:ext cx="6381135" cy="3589388"/>
-            </p:xfrm>
-            <a:graphic>
-              <a:graphicData uri="http://schemas.microsoft.com/office/powerpoint/2016/slidezoom">
-                <pslz:sldZm>
-                  <pslz:sldZmObj sldId="285" cId="1008121533">
-                    <pslz:zmPr id="{1F90038D-034A-4EAB-AB1E-5F294533117C}" returnToParent="0" transitionDur="1000">
-                      <p166:blipFill xmlns:p166="http://schemas.microsoft.com/office/powerpoint/2016/6/main">
-                        <a:blip r:embed="rId2"/>
-                        <a:stretch>
-                          <a:fillRect/>
-                        </a:stretch>
-                      </p166:blipFill>
-                      <p166:spPr xmlns:p166="http://schemas.microsoft.com/office/powerpoint/2016/6/main">
-                        <a:xfrm>
-                          <a:off x="0" y="0"/>
-                          <a:ext cx="6381135" cy="3589388"/>
-                        </a:xfrm>
-                        <a:prstGeom prst="rect">
-                          <a:avLst/>
-                        </a:prstGeom>
-                        <a:ln w="3175">
-                          <a:solidFill>
-                            <a:prstClr val="ltGray"/>
-                          </a:solidFill>
-                        </a:ln>
-                      </p166:spPr>
-                    </pslz:zmPr>
-                  </pslz:sldZmObj>
-                </pslz:sldZm>
-              </a:graphicData>
-            </a:graphic>
-          </p:graphicFrame>
-        </mc:Choice>
-        <mc:Fallback xmlns="">
-          <p:pic>
-            <p:nvPicPr>
-              <p:cNvPr id="6" name="슬라이드 확대/축소 5">
-                <a:hlinkClick r:id="rId3" action="ppaction://hlinksldjump"/>
-                <a:extLst>
-                  <a:ext uri="{FF2B5EF4-FFF2-40B4-BE49-F238E27FC236}">
-                    <a16:creationId xmlns:a16="http://schemas.microsoft.com/office/drawing/2014/main" id="{0354CA0C-3B8C-BF9F-4B32-34158CC93393}"/>
-                  </a:ext>
-                </a:extLst>
-              </p:cNvPr>
-              <p:cNvPicPr>
-                <a:picLocks noGrp="1" noRot="1" noChangeAspect="1" noMove="1" noResize="1" noEditPoints="1" noAdjustHandles="1" noChangeArrowheads="1" noChangeShapeType="1"/>
-              </p:cNvPicPr>
-              <p:nvPr/>
-            </p:nvPicPr>
-            <p:blipFill>
-              <a:blip r:embed="rId4"/>
-              <a:stretch>
-                <a:fillRect/>
-              </a:stretch>
-            </p:blipFill>
-            <p:spPr>
-              <a:xfrm>
-                <a:off x="101599" y="3177004"/>
-                <a:ext cx="6381135" cy="3589388"/>
-              </a:xfrm>
-              <a:prstGeom prst="rect">
-                <a:avLst/>
-              </a:prstGeom>
-              <a:ln w="3175">
-                <a:solidFill>
-                  <a:prstClr val="ltGray"/>
-                </a:solidFill>
-              </a:ln>
-            </p:spPr>
-          </p:pic>
-        </mc:Fallback>
-      </mc:AlternateContent>
-    </p:spTree>
-    <p:extLst>
-      <p:ext uri="{BB962C8B-B14F-4D97-AF65-F5344CB8AC3E}">
-        <p14:creationId xmlns:p14="http://schemas.microsoft.com/office/powerpoint/2010/main" val="1005892815"/>
-      </p:ext>
-    </p:extLst>
-  </p:cSld>
-  <p:clrMapOvr>
-    <a:masterClrMapping/>
-  </p:clrMapOvr>
-</p:sld>
-</file>
-
 <file path=ppt/slides/slide3.xml><?xml version="1.0" encoding="utf-8"?>
 <p:sld xmlns:a="http://schemas.openxmlformats.org/drawingml/2006/main" xmlns:r="http://schemas.openxmlformats.org/officeDocument/2006/relationships" xmlns:p="http://schemas.openxmlformats.org/presentationml/2006/main">
   <p:cSld>
@@ -8897,7 +11354,7 @@
             <a:spLocks noGrp="1"/>
           </p:cNvSpPr>
           <p:nvPr>
-            <p:ph type="title"/>
+            <p:ph type="title" idx="4294967295"/>
           </p:nvPr>
         </p:nvSpPr>
         <p:spPr>
@@ -9180,6 +11637,1452 @@
         <p:cNvPr id="1" name="">
           <a:extLst>
             <a:ext uri="{FF2B5EF4-FFF2-40B4-BE49-F238E27FC236}">
+              <a16:creationId xmlns:a16="http://schemas.microsoft.com/office/drawing/2014/main" id="{096B4EB2-09FD-458F-0E89-D6CD0EE844E3}"/>
+            </a:ext>
+          </a:extLst>
+        </p:cNvPr>
+        <p:cNvGrpSpPr/>
+        <p:nvPr/>
+      </p:nvGrpSpPr>
+      <p:grpSpPr>
+        <a:xfrm>
+          <a:off x="0" y="0"/>
+          <a:ext cx="0" cy="0"/>
+          <a:chOff x="0" y="0"/>
+          <a:chExt cx="0" cy="0"/>
+        </a:xfrm>
+      </p:grpSpPr>
+      <p:sp>
+        <p:nvSpPr>
+          <p:cNvPr id="2" name="제목 1">
+            <a:extLst>
+              <a:ext uri="{FF2B5EF4-FFF2-40B4-BE49-F238E27FC236}">
+                <a16:creationId xmlns:a16="http://schemas.microsoft.com/office/drawing/2014/main" id="{9DC4AF71-758F-BA8D-6192-FEC04D1D8F92}"/>
+              </a:ext>
+            </a:extLst>
+          </p:cNvPr>
+          <p:cNvSpPr>
+            <a:spLocks noGrp="1"/>
+          </p:cNvSpPr>
+          <p:nvPr>
+            <p:ph type="title" idx="4294967295"/>
+          </p:nvPr>
+        </p:nvSpPr>
+        <p:spPr>
+          <a:xfrm>
+            <a:off x="0" y="18255"/>
+            <a:ext cx="10515600" cy="850425"/>
+          </a:xfrm>
+        </p:spPr>
+        <p:txBody>
+          <a:bodyPr>
+            <a:normAutofit/>
+          </a:bodyPr>
+          <a:lstStyle/>
+          <a:p>
+            <a:r>
+              <a:rPr lang="en-US" altLang="ko-KR" sz="5400" dirty="0" err="1"/>
+              <a:t>BitAlloter</a:t>
+            </a:r>
+            <a:endParaRPr lang="ko-KR" altLang="en-US" sz="5400" dirty="0"/>
+          </a:p>
+        </p:txBody>
+      </p:sp>
+      <p:sp>
+        <p:nvSpPr>
+          <p:cNvPr id="4" name="TextBox 3">
+            <a:extLst>
+              <a:ext uri="{FF2B5EF4-FFF2-40B4-BE49-F238E27FC236}">
+                <a16:creationId xmlns:a16="http://schemas.microsoft.com/office/drawing/2014/main" id="{03D14BEE-5B9D-F77C-1F44-F02DDDD9145C}"/>
+              </a:ext>
+            </a:extLst>
+          </p:cNvPr>
+          <p:cNvSpPr txBox="1"/>
+          <p:nvPr/>
+        </p:nvSpPr>
+        <p:spPr>
+          <a:xfrm>
+            <a:off x="137160" y="868680"/>
+            <a:ext cx="12317796" cy="2031325"/>
+          </a:xfrm>
+          <a:prstGeom prst="rect">
+            <a:avLst/>
+          </a:prstGeom>
+          <a:noFill/>
+        </p:spPr>
+        <p:txBody>
+          <a:bodyPr wrap="none" rtlCol="0">
+            <a:spAutoFit/>
+          </a:bodyPr>
+          <a:lstStyle/>
+          <a:p>
+            <a:r>
+              <a:rPr lang="en-US" altLang="ko-KR" dirty="0" err="1"/>
+              <a:t>bitAlloter</a:t>
+            </a:r>
+            <a:r>
+              <a:rPr lang="ko-KR" altLang="en-US" dirty="0"/>
+              <a:t>는 각 배열의 자리의 활성</a:t>
+            </a:r>
+            <a:r>
+              <a:rPr lang="en-US" altLang="ko-KR" dirty="0"/>
+              <a:t>/</a:t>
+            </a:r>
+            <a:r>
+              <a:rPr lang="ko-KR" altLang="en-US" dirty="0"/>
+              <a:t>비활성 혹은 할당</a:t>
+            </a:r>
+            <a:r>
+              <a:rPr lang="en-US" altLang="ko-KR" dirty="0"/>
+              <a:t>/</a:t>
+            </a:r>
+            <a:r>
+              <a:rPr lang="ko-KR" altLang="en-US" dirty="0" err="1"/>
+              <a:t>비할당</a:t>
+            </a:r>
+            <a:r>
+              <a:rPr lang="ko-KR" altLang="en-US" dirty="0"/>
+              <a:t> 여부를 </a:t>
+            </a:r>
+            <a:r>
+              <a:rPr lang="en-US" altLang="ko-KR" dirty="0"/>
+              <a:t>bit </a:t>
+            </a:r>
+            <a:r>
+              <a:rPr lang="ko-KR" altLang="en-US" dirty="0"/>
+              <a:t>배열로 나타낸다</a:t>
+            </a:r>
+            <a:r>
+              <a:rPr lang="en-US" altLang="ko-KR" dirty="0"/>
+              <a:t>.</a:t>
+            </a:r>
+          </a:p>
+          <a:p>
+            <a:r>
+              <a:rPr lang="en-US" altLang="ko-KR" dirty="0" err="1"/>
+              <a:t>Alloc</a:t>
+            </a:r>
+            <a:r>
+              <a:rPr lang="en-US" altLang="ko-KR" dirty="0"/>
+              <a:t>()</a:t>
+            </a:r>
+            <a:r>
+              <a:rPr lang="ko-KR" altLang="en-US" dirty="0"/>
+              <a:t>을 하면 비트가 </a:t>
+            </a:r>
+            <a:r>
+              <a:rPr lang="en-US" altLang="ko-KR" dirty="0"/>
+              <a:t>0</a:t>
+            </a:r>
+            <a:r>
+              <a:rPr lang="ko-KR" altLang="en-US" dirty="0"/>
+              <a:t>인 자리를 선택하여 </a:t>
+            </a:r>
+            <a:r>
+              <a:rPr lang="en-US" altLang="ko-KR" dirty="0"/>
+              <a:t>1</a:t>
+            </a:r>
+            <a:r>
+              <a:rPr lang="ko-KR" altLang="en-US" dirty="0"/>
+              <a:t>로 만들고 해당 위치를 </a:t>
+            </a:r>
+            <a:r>
+              <a:rPr lang="en-US" altLang="ko-KR" dirty="0"/>
+              <a:t>int </a:t>
+            </a:r>
+            <a:r>
+              <a:rPr lang="ko-KR" altLang="en-US" dirty="0"/>
+              <a:t>인덱스로 반환한다</a:t>
+            </a:r>
+            <a:r>
+              <a:rPr lang="en-US" altLang="ko-KR" dirty="0"/>
+              <a:t>.</a:t>
+            </a:r>
+          </a:p>
+          <a:p>
+            <a:r>
+              <a:rPr lang="ko-KR" altLang="en-US" dirty="0"/>
+              <a:t>그 인덱스를 오브젝트가 가지고 있다가 </a:t>
+            </a:r>
+            <a:r>
+              <a:rPr lang="en-US" altLang="ko-KR" dirty="0"/>
+              <a:t>Free(index) </a:t>
+            </a:r>
+            <a:r>
+              <a:rPr lang="ko-KR" altLang="en-US" dirty="0"/>
+              <a:t>를 호출하여 다시 해제할 수 있다</a:t>
+            </a:r>
+            <a:r>
+              <a:rPr lang="en-US" altLang="ko-KR" dirty="0"/>
+              <a:t>.</a:t>
+            </a:r>
+          </a:p>
+          <a:p>
+            <a:r>
+              <a:rPr lang="ko-KR" altLang="en-US" dirty="0"/>
+              <a:t>할당과정은 꽤나 빠르다</a:t>
+            </a:r>
+            <a:r>
+              <a:rPr lang="en-US" altLang="ko-KR" dirty="0"/>
+              <a:t>. </a:t>
+            </a:r>
+            <a:r>
+              <a:rPr lang="ko-KR" altLang="en-US" dirty="0"/>
+              <a:t>왜냐하면 가장 마지막 </a:t>
+            </a:r>
+            <a:r>
+              <a:rPr lang="en-US" altLang="ko-KR" dirty="0"/>
+              <a:t>0</a:t>
+            </a:r>
+            <a:r>
+              <a:rPr lang="ko-KR" altLang="en-US" dirty="0"/>
+              <a:t>을 항상 저장하게끔 알고리즘이 </a:t>
+            </a:r>
+            <a:r>
+              <a:rPr lang="ko-KR" altLang="en-US" dirty="0" err="1"/>
+              <a:t>짜여있기도</a:t>
+            </a:r>
+            <a:r>
+              <a:rPr lang="ko-KR" altLang="en-US" dirty="0"/>
+              <a:t> 하고</a:t>
+            </a:r>
+            <a:r>
+              <a:rPr lang="en-US" altLang="ko-KR" dirty="0"/>
+              <a:t>, (</a:t>
+            </a:r>
+            <a:r>
+              <a:rPr lang="ko-KR" altLang="en-US" dirty="0"/>
+              <a:t>곧바로 그걸 선택</a:t>
+            </a:r>
+            <a:r>
+              <a:rPr lang="en-US" altLang="ko-KR" dirty="0"/>
+              <a:t>)</a:t>
+            </a:r>
+          </a:p>
+          <a:p>
+            <a:r>
+              <a:rPr lang="ko-KR" altLang="en-US" dirty="0"/>
+              <a:t>또한 </a:t>
+            </a:r>
+            <a:r>
+              <a:rPr lang="en-US" altLang="ko-KR" dirty="0"/>
+              <a:t>bit </a:t>
+            </a:r>
+            <a:r>
+              <a:rPr lang="ko-KR" altLang="en-US" dirty="0"/>
+              <a:t>배열로 되어있기 때문에 </a:t>
+            </a:r>
+            <a:r>
+              <a:rPr lang="en-US" altLang="ko-KR" dirty="0"/>
+              <a:t>32</a:t>
+            </a:r>
+            <a:r>
+              <a:rPr lang="ko-KR" altLang="en-US" dirty="0"/>
+              <a:t>개의 오브젝트의 할당여부를 한번에 검사할 수 있다</a:t>
+            </a:r>
+            <a:r>
+              <a:rPr lang="en-US" altLang="ko-KR" dirty="0"/>
+              <a:t>. 0xFFFFFFFF</a:t>
+            </a:r>
+            <a:r>
+              <a:rPr lang="ko-KR" altLang="en-US" dirty="0"/>
+              <a:t>가 아니라면</a:t>
+            </a:r>
+            <a:endParaRPr lang="en-US" altLang="ko-KR" dirty="0"/>
+          </a:p>
+          <a:p>
+            <a:r>
+              <a:rPr lang="ko-KR" altLang="en-US" dirty="0"/>
+              <a:t>그곳에 </a:t>
+            </a:r>
+            <a:r>
+              <a:rPr lang="en-US" altLang="ko-KR" dirty="0"/>
+              <a:t>0</a:t>
+            </a:r>
+            <a:r>
+              <a:rPr lang="ko-KR" altLang="en-US" dirty="0"/>
+              <a:t>이 있다는 것이니 해당 </a:t>
+            </a:r>
+            <a:r>
+              <a:rPr lang="en-US" altLang="ko-KR" dirty="0"/>
+              <a:t>doubleword </a:t>
+            </a:r>
+            <a:r>
+              <a:rPr lang="ko-KR" altLang="en-US" dirty="0"/>
+              <a:t>를 </a:t>
+            </a:r>
+            <a:r>
+              <a:rPr lang="en-US" altLang="ko-KR" dirty="0"/>
+              <a:t>bit </a:t>
+            </a:r>
+            <a:r>
+              <a:rPr lang="ko-KR" altLang="en-US" dirty="0"/>
+              <a:t>순회한다</a:t>
+            </a:r>
+            <a:r>
+              <a:rPr lang="en-US" altLang="ko-KR" dirty="0"/>
+              <a:t>.</a:t>
+            </a:r>
+          </a:p>
+          <a:p>
+            <a:endParaRPr lang="en-US" altLang="ko-KR" dirty="0"/>
+          </a:p>
+        </p:txBody>
+      </p:sp>
+      <mc:AlternateContent xmlns:mc="http://schemas.openxmlformats.org/markup-compatibility/2006" xmlns:pslz="http://schemas.microsoft.com/office/powerpoint/2016/slidezoom">
+        <mc:Choice Requires="pslz">
+          <p:graphicFrame>
+            <p:nvGraphicFramePr>
+              <p:cNvPr id="8" name="슬라이드 확대/축소 7">
+                <a:extLst>
+                  <a:ext uri="{FF2B5EF4-FFF2-40B4-BE49-F238E27FC236}">
+                    <a16:creationId xmlns:a16="http://schemas.microsoft.com/office/drawing/2014/main" id="{D507B324-09B3-7B73-FD30-77FD1CC0027B}"/>
+                  </a:ext>
+                </a:extLst>
+              </p:cNvPr>
+              <p:cNvGraphicFramePr>
+                <a:graphicFrameLocks noChangeAspect="1"/>
+              </p:cNvGraphicFramePr>
+              <p:nvPr>
+                <p:extLst>
+                  <p:ext uri="{D42A27DB-BD31-4B8C-83A1-F6EECF244321}">
+                    <p14:modId xmlns:p14="http://schemas.microsoft.com/office/powerpoint/2010/main" val="3257729037"/>
+                  </p:ext>
+                </p:extLst>
+              </p:nvPr>
+            </p:nvGraphicFramePr>
+            <p:xfrm>
+              <a:off x="205986" y="2768395"/>
+              <a:ext cx="6617109" cy="3722124"/>
+            </p:xfrm>
+            <a:graphic>
+              <a:graphicData uri="http://schemas.microsoft.com/office/powerpoint/2016/slidezoom">
+                <pslz:sldZm>
+                  <pslz:sldZmObj sldId="283" cId="977256668">
+                    <pslz:zmPr id="{64EB6C04-2ACE-4F0E-BEC1-03A316A8B18C}" returnToParent="0" transitionDur="1000">
+                      <p166:blipFill xmlns:p166="http://schemas.microsoft.com/office/powerpoint/2016/6/main">
+                        <a:blip r:embed="rId2"/>
+                        <a:stretch>
+                          <a:fillRect/>
+                        </a:stretch>
+                      </p166:blipFill>
+                      <p166:spPr xmlns:p166="http://schemas.microsoft.com/office/powerpoint/2016/6/main">
+                        <a:xfrm>
+                          <a:off x="0" y="0"/>
+                          <a:ext cx="6617109" cy="3722124"/>
+                        </a:xfrm>
+                        <a:prstGeom prst="rect">
+                          <a:avLst/>
+                        </a:prstGeom>
+                        <a:ln w="3175">
+                          <a:solidFill>
+                            <a:prstClr val="ltGray"/>
+                          </a:solidFill>
+                        </a:ln>
+                      </p166:spPr>
+                    </pslz:zmPr>
+                  </pslz:sldZmObj>
+                </pslz:sldZm>
+              </a:graphicData>
+            </a:graphic>
+          </p:graphicFrame>
+        </mc:Choice>
+        <mc:Fallback xmlns="">
+          <p:pic>
+            <p:nvPicPr>
+              <p:cNvPr id="8" name="슬라이드 확대/축소 7">
+                <a:hlinkClick r:id="rId3" action="ppaction://hlinksldjump"/>
+                <a:extLst>
+                  <a:ext uri="{FF2B5EF4-FFF2-40B4-BE49-F238E27FC236}">
+                    <a16:creationId xmlns:a16="http://schemas.microsoft.com/office/drawing/2014/main" id="{D507B324-09B3-7B73-FD30-77FD1CC0027B}"/>
+                  </a:ext>
+                </a:extLst>
+              </p:cNvPr>
+              <p:cNvPicPr>
+                <a:picLocks noGrp="1" noRot="1" noChangeAspect="1" noMove="1" noResize="1" noEditPoints="1" noAdjustHandles="1" noChangeArrowheads="1" noChangeShapeType="1"/>
+              </p:cNvPicPr>
+              <p:nvPr/>
+            </p:nvPicPr>
+            <p:blipFill>
+              <a:blip r:embed="rId4"/>
+              <a:stretch>
+                <a:fillRect/>
+              </a:stretch>
+            </p:blipFill>
+            <p:spPr>
+              <a:xfrm>
+                <a:off x="205986" y="2768395"/>
+                <a:ext cx="6617109" cy="3722124"/>
+              </a:xfrm>
+              <a:prstGeom prst="rect">
+                <a:avLst/>
+              </a:prstGeom>
+              <a:ln w="3175">
+                <a:solidFill>
+                  <a:prstClr val="ltGray"/>
+                </a:solidFill>
+              </a:ln>
+            </p:spPr>
+          </p:pic>
+        </mc:Fallback>
+      </mc:AlternateContent>
+    </p:spTree>
+    <p:extLst>
+      <p:ext uri="{BB962C8B-B14F-4D97-AF65-F5344CB8AC3E}">
+        <p14:creationId xmlns:p14="http://schemas.microsoft.com/office/powerpoint/2010/main" val="3420612943"/>
+      </p:ext>
+    </p:extLst>
+  </p:cSld>
+  <p:clrMapOvr>
+    <a:masterClrMapping/>
+  </p:clrMapOvr>
+</p:sld>
+</file>
+
+<file path=ppt/slides/slide31.xml><?xml version="1.0" encoding="utf-8"?>
+<p:sld xmlns:a="http://schemas.openxmlformats.org/drawingml/2006/main" xmlns:r="http://schemas.openxmlformats.org/officeDocument/2006/relationships" xmlns:p="http://schemas.openxmlformats.org/presentationml/2006/main">
+  <p:cSld>
+    <p:spTree>
+      <p:nvGrpSpPr>
+        <p:cNvPr id="1" name="">
+          <a:extLst>
+            <a:ext uri="{FF2B5EF4-FFF2-40B4-BE49-F238E27FC236}">
+              <a16:creationId xmlns:a16="http://schemas.microsoft.com/office/drawing/2014/main" id="{DF16BDEE-4E30-B33C-786A-A062222B609B}"/>
+            </a:ext>
+          </a:extLst>
+        </p:cNvPr>
+        <p:cNvGrpSpPr/>
+        <p:nvPr/>
+      </p:nvGrpSpPr>
+      <p:grpSpPr>
+        <a:xfrm>
+          <a:off x="0" y="0"/>
+          <a:ext cx="0" cy="0"/>
+          <a:chOff x="0" y="0"/>
+          <a:chExt cx="0" cy="0"/>
+        </a:xfrm>
+      </p:grpSpPr>
+      <p:sp>
+        <p:nvSpPr>
+          <p:cNvPr id="2" name="제목 1">
+            <a:extLst>
+              <a:ext uri="{FF2B5EF4-FFF2-40B4-BE49-F238E27FC236}">
+                <a16:creationId xmlns:a16="http://schemas.microsoft.com/office/drawing/2014/main" id="{FDF51FA0-2288-B9C4-6639-D7C68CFC2A26}"/>
+              </a:ext>
+            </a:extLst>
+          </p:cNvPr>
+          <p:cNvSpPr>
+            <a:spLocks noGrp="1"/>
+          </p:cNvSpPr>
+          <p:nvPr>
+            <p:ph type="title" idx="4294967295"/>
+          </p:nvPr>
+        </p:nvSpPr>
+        <p:spPr>
+          <a:xfrm>
+            <a:off x="0" y="18255"/>
+            <a:ext cx="10515600" cy="850425"/>
+          </a:xfrm>
+        </p:spPr>
+        <p:txBody>
+          <a:bodyPr>
+            <a:normAutofit/>
+          </a:bodyPr>
+          <a:lstStyle/>
+          <a:p>
+            <a:r>
+              <a:rPr lang="en-US" altLang="ko-KR" sz="5400" dirty="0" err="1"/>
+              <a:t>BitAlloter</a:t>
+            </a:r>
+            <a:r>
+              <a:rPr lang="ko-KR" altLang="en-US" sz="5400" dirty="0"/>
+              <a:t>의 순회 방법</a:t>
+            </a:r>
+          </a:p>
+        </p:txBody>
+      </p:sp>
+      <p:sp>
+        <p:nvSpPr>
+          <p:cNvPr id="4" name="TextBox 3">
+            <a:extLst>
+              <a:ext uri="{FF2B5EF4-FFF2-40B4-BE49-F238E27FC236}">
+                <a16:creationId xmlns:a16="http://schemas.microsoft.com/office/drawing/2014/main" id="{8207CD42-075F-59E4-8451-B20704309C2E}"/>
+              </a:ext>
+            </a:extLst>
+          </p:cNvPr>
+          <p:cNvSpPr txBox="1"/>
+          <p:nvPr/>
+        </p:nvSpPr>
+        <p:spPr>
+          <a:xfrm>
+            <a:off x="159773" y="970455"/>
+            <a:ext cx="11766755" cy="1200329"/>
+          </a:xfrm>
+          <a:prstGeom prst="rect">
+            <a:avLst/>
+          </a:prstGeom>
+          <a:noFill/>
+        </p:spPr>
+        <p:txBody>
+          <a:bodyPr wrap="square">
+            <a:spAutoFit/>
+          </a:bodyPr>
+          <a:lstStyle/>
+          <a:p>
+            <a:r>
+              <a:rPr lang="en-US" altLang="ko-KR" dirty="0" err="1"/>
+              <a:t>bitAlloter</a:t>
+            </a:r>
+            <a:r>
+              <a:rPr lang="ko-KR" altLang="en-US" dirty="0"/>
+              <a:t>로 관리되는 오브젝트의 순회는 결국 활성화 비트 </a:t>
+            </a:r>
+            <a:r>
+              <a:rPr lang="en-US" altLang="ko-KR" dirty="0"/>
+              <a:t>(1)</a:t>
+            </a:r>
+            <a:r>
+              <a:rPr lang="ko-KR" altLang="en-US" dirty="0"/>
+              <a:t>로 켜진 오브젝트만을 대상으로 이루어지는데</a:t>
+            </a:r>
+            <a:r>
+              <a:rPr lang="en-US" altLang="ko-KR" dirty="0"/>
+              <a:t>,</a:t>
+            </a:r>
+          </a:p>
+          <a:p>
+            <a:r>
+              <a:rPr lang="ko-KR" altLang="en-US" dirty="0"/>
+              <a:t>이는 </a:t>
+            </a:r>
+            <a:r>
+              <a:rPr lang="en-US" altLang="ko-KR" dirty="0" err="1"/>
+              <a:t>IndexRange</a:t>
+            </a:r>
+            <a:r>
+              <a:rPr lang="ko-KR" altLang="en-US" dirty="0"/>
+              <a:t>의 배열로 해당하는 오브젝트 대상을 미리 뽑아두고 순회를 할 수 있다</a:t>
+            </a:r>
+            <a:r>
+              <a:rPr lang="en-US" altLang="ko-KR" dirty="0"/>
+              <a:t>. (</a:t>
+            </a:r>
+            <a:r>
+              <a:rPr lang="ko-KR" altLang="en-US" dirty="0"/>
+              <a:t>가장 빠른 방식</a:t>
+            </a:r>
+            <a:r>
+              <a:rPr lang="en-US" altLang="ko-KR" dirty="0"/>
+              <a:t>)</a:t>
+            </a:r>
+          </a:p>
+          <a:p>
+            <a:r>
+              <a:rPr lang="en-US" altLang="ko-KR" dirty="0" err="1"/>
+              <a:t>GetTourPairs</a:t>
+            </a:r>
+            <a:r>
+              <a:rPr lang="en-US" altLang="ko-KR" dirty="0"/>
+              <a:t> range</a:t>
+            </a:r>
+            <a:r>
+              <a:rPr lang="ko-KR" altLang="en-US" dirty="0"/>
+              <a:t>의 </a:t>
+            </a:r>
+            <a:r>
+              <a:rPr lang="en-US" altLang="ko-KR" dirty="0" err="1"/>
+              <a:t>startindex</a:t>
+            </a:r>
+            <a:r>
+              <a:rPr lang="en-US" altLang="ko-KR" dirty="0"/>
+              <a:t>, </a:t>
+            </a:r>
+            <a:r>
+              <a:rPr lang="en-US" altLang="ko-KR" dirty="0" err="1"/>
+              <a:t>endindex</a:t>
+            </a:r>
+            <a:r>
+              <a:rPr lang="ko-KR" altLang="en-US" dirty="0"/>
+              <a:t>를 담은 </a:t>
+            </a:r>
+            <a:r>
+              <a:rPr lang="en-US" altLang="ko-KR" dirty="0"/>
+              <a:t>pair</a:t>
+            </a:r>
+            <a:r>
+              <a:rPr lang="ko-KR" altLang="en-US" dirty="0"/>
+              <a:t>들을 순회하며 오브젝트를 처리하면 된다</a:t>
+            </a:r>
+            <a:r>
+              <a:rPr lang="en-US" altLang="ko-KR" dirty="0"/>
+              <a:t>.</a:t>
+            </a:r>
+          </a:p>
+          <a:p>
+            <a:r>
+              <a:rPr lang="ko-KR" altLang="en-US" dirty="0"/>
+              <a:t>아래 코드 </a:t>
+            </a:r>
+            <a:r>
+              <a:rPr lang="ko-KR" altLang="en-US" dirty="0" err="1"/>
+              <a:t>처럼</a:t>
+            </a:r>
+            <a:r>
+              <a:rPr lang="ko-KR" altLang="en-US" dirty="0"/>
+              <a:t> 사용된다</a:t>
+            </a:r>
+            <a:r>
+              <a:rPr lang="en-US" altLang="ko-KR" dirty="0"/>
+              <a:t>.</a:t>
+            </a:r>
+          </a:p>
+        </p:txBody>
+      </p:sp>
+      <p:pic>
+        <p:nvPicPr>
+          <p:cNvPr id="6" name="그림 5">
+            <a:extLst>
+              <a:ext uri="{FF2B5EF4-FFF2-40B4-BE49-F238E27FC236}">
+                <a16:creationId xmlns:a16="http://schemas.microsoft.com/office/drawing/2014/main" id="{048A0B7B-D6B7-55EF-F9E4-3607956E6BB7}"/>
+              </a:ext>
+            </a:extLst>
+          </p:cNvPr>
+          <p:cNvPicPr>
+            <a:picLocks noChangeAspect="1"/>
+          </p:cNvPicPr>
+          <p:nvPr/>
+        </p:nvPicPr>
+        <p:blipFill>
+          <a:blip r:embed="rId2"/>
+          <a:stretch>
+            <a:fillRect/>
+          </a:stretch>
+        </p:blipFill>
+        <p:spPr>
+          <a:xfrm>
+            <a:off x="159773" y="2247697"/>
+            <a:ext cx="7025640" cy="2362605"/>
+          </a:xfrm>
+          <a:prstGeom prst="rect">
+            <a:avLst/>
+          </a:prstGeom>
+        </p:spPr>
+      </p:pic>
+    </p:spTree>
+    <p:extLst>
+      <p:ext uri="{BB962C8B-B14F-4D97-AF65-F5344CB8AC3E}">
+        <p14:creationId xmlns:p14="http://schemas.microsoft.com/office/powerpoint/2010/main" val="977256668"/>
+      </p:ext>
+    </p:extLst>
+  </p:cSld>
+  <p:clrMapOvr>
+    <a:masterClrMapping/>
+  </p:clrMapOvr>
+</p:sld>
+</file>
+
+<file path=ppt/slides/slide32.xml><?xml version="1.0" encoding="utf-8"?>
+<p:sld xmlns:a="http://schemas.openxmlformats.org/drawingml/2006/main" xmlns:r="http://schemas.openxmlformats.org/officeDocument/2006/relationships" xmlns:p="http://schemas.openxmlformats.org/presentationml/2006/main">
+  <p:cSld>
+    <p:spTree>
+      <p:nvGrpSpPr>
+        <p:cNvPr id="1" name="">
+          <a:extLst>
+            <a:ext uri="{FF2B5EF4-FFF2-40B4-BE49-F238E27FC236}">
+              <a16:creationId xmlns:a16="http://schemas.microsoft.com/office/drawing/2014/main" id="{78F40CFE-B1DF-AF97-9299-369ACD561ADB}"/>
+            </a:ext>
+          </a:extLst>
+        </p:cNvPr>
+        <p:cNvGrpSpPr/>
+        <p:nvPr/>
+      </p:nvGrpSpPr>
+      <p:grpSpPr>
+        <a:xfrm>
+          <a:off x="0" y="0"/>
+          <a:ext cx="0" cy="0"/>
+          <a:chOff x="0" y="0"/>
+          <a:chExt cx="0" cy="0"/>
+        </a:xfrm>
+      </p:grpSpPr>
+      <p:sp>
+        <p:nvSpPr>
+          <p:cNvPr id="2" name="제목 1">
+            <a:extLst>
+              <a:ext uri="{FF2B5EF4-FFF2-40B4-BE49-F238E27FC236}">
+                <a16:creationId xmlns:a16="http://schemas.microsoft.com/office/drawing/2014/main" id="{0A894679-0F0F-9BFC-2144-B64E52D6530D}"/>
+              </a:ext>
+            </a:extLst>
+          </p:cNvPr>
+          <p:cNvSpPr>
+            <a:spLocks noGrp="1"/>
+          </p:cNvSpPr>
+          <p:nvPr>
+            <p:ph type="title" idx="4294967295"/>
+          </p:nvPr>
+        </p:nvSpPr>
+        <p:spPr>
+          <a:xfrm>
+            <a:off x="0" y="18255"/>
+            <a:ext cx="10515600" cy="850425"/>
+          </a:xfrm>
+        </p:spPr>
+        <p:txBody>
+          <a:bodyPr>
+            <a:normAutofit/>
+          </a:bodyPr>
+          <a:lstStyle/>
+          <a:p>
+            <a:r>
+              <a:rPr lang="en-US" altLang="ko-KR" sz="5400" dirty="0" err="1"/>
+              <a:t>Chunck</a:t>
+            </a:r>
+            <a:endParaRPr lang="ko-KR" altLang="en-US" sz="5400" dirty="0"/>
+          </a:p>
+        </p:txBody>
+      </p:sp>
+      <p:sp>
+        <p:nvSpPr>
+          <p:cNvPr id="3" name="TextBox 2">
+            <a:extLst>
+              <a:ext uri="{FF2B5EF4-FFF2-40B4-BE49-F238E27FC236}">
+                <a16:creationId xmlns:a16="http://schemas.microsoft.com/office/drawing/2014/main" id="{AAD7D6DC-84FB-9AB3-5CDA-77D37639647D}"/>
+              </a:ext>
+            </a:extLst>
+          </p:cNvPr>
+          <p:cNvSpPr txBox="1"/>
+          <p:nvPr/>
+        </p:nvSpPr>
+        <p:spPr>
+          <a:xfrm>
+            <a:off x="0" y="868680"/>
+            <a:ext cx="10257936" cy="2308324"/>
+          </a:xfrm>
+          <a:prstGeom prst="rect">
+            <a:avLst/>
+          </a:prstGeom>
+          <a:noFill/>
+        </p:spPr>
+        <p:txBody>
+          <a:bodyPr wrap="none" rtlCol="0">
+            <a:spAutoFit/>
+          </a:bodyPr>
+          <a:lstStyle/>
+          <a:p>
+            <a:r>
+              <a:rPr lang="ko-KR" altLang="en-US" dirty="0"/>
+              <a:t>공간을 </a:t>
+            </a:r>
+            <a:r>
+              <a:rPr lang="ko-KR" altLang="en-US" dirty="0" err="1"/>
+              <a:t>청크로</a:t>
+            </a:r>
+            <a:r>
+              <a:rPr lang="ko-KR" altLang="en-US" dirty="0"/>
+              <a:t> 나누었다</a:t>
+            </a:r>
+            <a:r>
+              <a:rPr lang="en-US" altLang="ko-KR" dirty="0"/>
+              <a:t>.</a:t>
+            </a:r>
+          </a:p>
+          <a:p>
+            <a:r>
+              <a:rPr lang="en-US" altLang="ko-KR" dirty="0"/>
+              <a:t>&gt;&gt; </a:t>
+            </a:r>
+            <a:r>
+              <a:rPr lang="ko-KR" altLang="en-US" dirty="0"/>
+              <a:t>왜 나누었는가</a:t>
+            </a:r>
+            <a:r>
+              <a:rPr lang="en-US" altLang="ko-KR" dirty="0"/>
+              <a:t>?</a:t>
+            </a:r>
+          </a:p>
+          <a:p>
+            <a:r>
+              <a:rPr lang="en-US" altLang="ko-KR" dirty="0"/>
+              <a:t>1. Render</a:t>
+            </a:r>
+            <a:r>
+              <a:rPr lang="ko-KR" altLang="en-US" dirty="0"/>
+              <a:t>에서 오브젝트가 많아지더라도 뷰 </a:t>
+            </a:r>
+            <a:r>
+              <a:rPr lang="ko-KR" altLang="en-US" dirty="0" err="1"/>
+              <a:t>프러스텀</a:t>
+            </a:r>
+            <a:r>
+              <a:rPr lang="ko-KR" altLang="en-US" dirty="0"/>
+              <a:t> </a:t>
+            </a:r>
+            <a:r>
+              <a:rPr lang="ko-KR" altLang="en-US" dirty="0" err="1"/>
+              <a:t>컬링을</a:t>
+            </a:r>
+            <a:r>
+              <a:rPr lang="ko-KR" altLang="en-US" dirty="0"/>
+              <a:t> 빠르게 하고 싶었음</a:t>
+            </a:r>
+            <a:r>
+              <a:rPr lang="en-US" altLang="ko-KR" dirty="0"/>
+              <a:t>.</a:t>
+            </a:r>
+          </a:p>
+          <a:p>
+            <a:r>
+              <a:rPr lang="en-US" altLang="ko-KR" dirty="0"/>
+              <a:t>	</a:t>
+            </a:r>
+            <a:r>
+              <a:rPr lang="ko-KR" altLang="en-US" dirty="0"/>
+              <a:t>만약 </a:t>
+            </a:r>
+            <a:r>
+              <a:rPr lang="ko-KR" altLang="en-US" dirty="0" err="1"/>
+              <a:t>청크가</a:t>
+            </a:r>
+            <a:r>
+              <a:rPr lang="ko-KR" altLang="en-US" dirty="0"/>
+              <a:t> 없다면 오브젝트마다 </a:t>
+            </a:r>
+            <a:r>
+              <a:rPr lang="ko-KR" altLang="en-US" dirty="0" err="1"/>
+              <a:t>프러스텀에</a:t>
+            </a:r>
+            <a:r>
+              <a:rPr lang="ko-KR" altLang="en-US" dirty="0"/>
+              <a:t> 들어가는지 체크를 했어야 했음</a:t>
+            </a:r>
+            <a:r>
+              <a:rPr lang="en-US" altLang="ko-KR" dirty="0"/>
+              <a:t>.</a:t>
+            </a:r>
+          </a:p>
+          <a:p>
+            <a:r>
+              <a:rPr lang="en-US" altLang="ko-KR" dirty="0"/>
+              <a:t>2. </a:t>
+            </a:r>
+            <a:r>
+              <a:rPr lang="ko-KR" altLang="en-US" dirty="0"/>
+              <a:t>서버에서 충돌검사를 할 것을 염두에 두었다</a:t>
+            </a:r>
+            <a:r>
+              <a:rPr lang="en-US" altLang="ko-KR" dirty="0"/>
+              <a:t>. </a:t>
+            </a:r>
+            <a:r>
+              <a:rPr lang="ko-KR" altLang="en-US" dirty="0"/>
+              <a:t>충돌의 검사는 </a:t>
+            </a:r>
+            <a:r>
+              <a:rPr lang="en-US" altLang="ko-KR" dirty="0"/>
+              <a:t>O(N^2)</a:t>
+            </a:r>
+            <a:r>
+              <a:rPr lang="ko-KR" altLang="en-US" dirty="0"/>
+              <a:t>의 복잡도를 가지기 때문에</a:t>
+            </a:r>
+            <a:endParaRPr lang="en-US" altLang="ko-KR" dirty="0"/>
+          </a:p>
+          <a:p>
+            <a:r>
+              <a:rPr lang="en-US" altLang="ko-KR" dirty="0"/>
+              <a:t>	</a:t>
+            </a:r>
+            <a:r>
+              <a:rPr lang="ko-KR" altLang="en-US" dirty="0"/>
+              <a:t>작업을 잘게 분할을 하지 않으면 </a:t>
+            </a:r>
+            <a:r>
+              <a:rPr lang="en-US" altLang="ko-KR" dirty="0" err="1"/>
+              <a:t>cpu</a:t>
+            </a:r>
+            <a:r>
+              <a:rPr lang="en-US" altLang="ko-KR" dirty="0"/>
+              <a:t> </a:t>
+            </a:r>
+            <a:r>
+              <a:rPr lang="ko-KR" altLang="en-US" dirty="0"/>
+              <a:t>의 부담이 심해질 것 같았다</a:t>
+            </a:r>
+            <a:r>
+              <a:rPr lang="en-US" altLang="ko-KR" dirty="0"/>
+              <a:t>.</a:t>
+            </a:r>
+          </a:p>
+          <a:p>
+            <a:r>
+              <a:rPr lang="en-US" altLang="ko-KR" dirty="0"/>
+              <a:t>&gt;&gt; </a:t>
+            </a:r>
+            <a:r>
+              <a:rPr lang="ko-KR" altLang="en-US" dirty="0"/>
+              <a:t>때문에 기본적으로 모든 오브젝트들은 </a:t>
+            </a:r>
+            <a:r>
+              <a:rPr lang="en-US" altLang="ko-KR" dirty="0"/>
+              <a:t>Chunk </a:t>
+            </a:r>
+            <a:r>
+              <a:rPr lang="ko-KR" altLang="en-US" dirty="0"/>
+              <a:t>안에 있어야 했고</a:t>
+            </a:r>
+            <a:r>
+              <a:rPr lang="en-US" altLang="ko-KR" dirty="0"/>
+              <a:t>, </a:t>
+            </a:r>
+            <a:r>
+              <a:rPr lang="en-US" altLang="ko-KR" dirty="0" err="1"/>
+              <a:t>chunck</a:t>
+            </a:r>
+            <a:r>
+              <a:rPr lang="en-US" altLang="ko-KR" dirty="0"/>
+              <a:t> </a:t>
+            </a:r>
+            <a:r>
+              <a:rPr lang="ko-KR" altLang="en-US" dirty="0"/>
+              <a:t>안에 </a:t>
+            </a:r>
+            <a:endParaRPr lang="en-US" altLang="ko-KR" dirty="0"/>
+          </a:p>
+          <a:p>
+            <a:r>
+              <a:rPr lang="en-US" altLang="ko-KR" dirty="0" err="1"/>
+              <a:t>StaticObjectVecset</a:t>
+            </a:r>
+            <a:r>
+              <a:rPr lang="en-US" altLang="ko-KR" dirty="0"/>
+              <a:t>, </a:t>
+            </a:r>
+            <a:r>
+              <a:rPr lang="en-US" altLang="ko-KR" dirty="0" err="1"/>
+              <a:t>DynamicObjectVecset</a:t>
+            </a:r>
+            <a:r>
+              <a:rPr lang="en-US" altLang="ko-KR" dirty="0"/>
+              <a:t>, </a:t>
+            </a:r>
+            <a:r>
+              <a:rPr lang="en-US" altLang="ko-KR" dirty="0" err="1"/>
+              <a:t>SkinMeshObjectVecset</a:t>
+            </a:r>
+            <a:r>
+              <a:rPr lang="ko-KR" altLang="en-US" dirty="0"/>
+              <a:t>을 분리하여 저장한다</a:t>
+            </a:r>
+            <a:r>
+              <a:rPr lang="en-US" altLang="ko-KR" dirty="0"/>
+              <a:t>.</a:t>
+            </a:r>
+          </a:p>
+        </p:txBody>
+      </p:sp>
+      <mc:AlternateContent xmlns:mc="http://schemas.openxmlformats.org/markup-compatibility/2006" xmlns:pslz="http://schemas.microsoft.com/office/powerpoint/2016/slidezoom">
+        <mc:Choice Requires="pslz">
+          <p:graphicFrame>
+            <p:nvGraphicFramePr>
+              <p:cNvPr id="5" name="슬라이드 확대/축소 4">
+                <a:extLst>
+                  <a:ext uri="{FF2B5EF4-FFF2-40B4-BE49-F238E27FC236}">
+                    <a16:creationId xmlns:a16="http://schemas.microsoft.com/office/drawing/2014/main" id="{A32FD096-4D7D-DA8D-5C6D-B259A786D223}"/>
+                  </a:ext>
+                </a:extLst>
+              </p:cNvPr>
+              <p:cNvGraphicFramePr>
+                <a:graphicFrameLocks noChangeAspect="1"/>
+              </p:cNvGraphicFramePr>
+              <p:nvPr>
+                <p:extLst>
+                  <p:ext uri="{D42A27DB-BD31-4B8C-83A1-F6EECF244321}">
+                    <p14:modId xmlns:p14="http://schemas.microsoft.com/office/powerpoint/2010/main" val="331875436"/>
+                  </p:ext>
+                </p:extLst>
+              </p:nvPr>
+            </p:nvGraphicFramePr>
+            <p:xfrm>
+              <a:off x="176980" y="3177004"/>
+              <a:ext cx="6235507" cy="3507473"/>
+            </p:xfrm>
+            <a:graphic>
+              <a:graphicData uri="http://schemas.microsoft.com/office/powerpoint/2016/slidezoom">
+                <pslz:sldZm>
+                  <pslz:sldZmObj sldId="284" cId="1005892815">
+                    <pslz:zmPr id="{FE25BFE4-38C9-478C-8B0E-F498B0B711D0}" returnToParent="0" transitionDur="1000">
+                      <p166:blipFill xmlns:p166="http://schemas.microsoft.com/office/powerpoint/2016/6/main">
+                        <a:blip r:embed="rId2"/>
+                        <a:stretch>
+                          <a:fillRect/>
+                        </a:stretch>
+                      </p166:blipFill>
+                      <p166:spPr xmlns:p166="http://schemas.microsoft.com/office/powerpoint/2016/6/main">
+                        <a:xfrm>
+                          <a:off x="0" y="0"/>
+                          <a:ext cx="6235507" cy="3507473"/>
+                        </a:xfrm>
+                        <a:prstGeom prst="rect">
+                          <a:avLst/>
+                        </a:prstGeom>
+                        <a:ln w="3175">
+                          <a:solidFill>
+                            <a:prstClr val="ltGray"/>
+                          </a:solidFill>
+                        </a:ln>
+                      </p166:spPr>
+                    </pslz:zmPr>
+                  </pslz:sldZmObj>
+                </pslz:sldZm>
+              </a:graphicData>
+            </a:graphic>
+          </p:graphicFrame>
+        </mc:Choice>
+        <mc:Fallback xmlns="">
+          <p:pic>
+            <p:nvPicPr>
+              <p:cNvPr id="5" name="슬라이드 확대/축소 4">
+                <a:hlinkClick r:id="rId3" action="ppaction://hlinksldjump"/>
+                <a:extLst>
+                  <a:ext uri="{FF2B5EF4-FFF2-40B4-BE49-F238E27FC236}">
+                    <a16:creationId xmlns:a16="http://schemas.microsoft.com/office/drawing/2014/main" id="{A32FD096-4D7D-DA8D-5C6D-B259A786D223}"/>
+                  </a:ext>
+                </a:extLst>
+              </p:cNvPr>
+              <p:cNvPicPr>
+                <a:picLocks noGrp="1" noRot="1" noChangeAspect="1" noMove="1" noResize="1" noEditPoints="1" noAdjustHandles="1" noChangeArrowheads="1" noChangeShapeType="1"/>
+              </p:cNvPicPr>
+              <p:nvPr/>
+            </p:nvPicPr>
+            <p:blipFill>
+              <a:blip r:embed="rId4"/>
+              <a:stretch>
+                <a:fillRect/>
+              </a:stretch>
+            </p:blipFill>
+            <p:spPr>
+              <a:xfrm>
+                <a:off x="176980" y="3177004"/>
+                <a:ext cx="6235507" cy="3507473"/>
+              </a:xfrm>
+              <a:prstGeom prst="rect">
+                <a:avLst/>
+              </a:prstGeom>
+              <a:ln w="3175">
+                <a:solidFill>
+                  <a:prstClr val="ltGray"/>
+                </a:solidFill>
+              </a:ln>
+            </p:spPr>
+          </p:pic>
+        </mc:Fallback>
+      </mc:AlternateContent>
+    </p:spTree>
+    <p:extLst>
+      <p:ext uri="{BB962C8B-B14F-4D97-AF65-F5344CB8AC3E}">
+        <p14:creationId xmlns:p14="http://schemas.microsoft.com/office/powerpoint/2010/main" val="2927238059"/>
+      </p:ext>
+    </p:extLst>
+  </p:cSld>
+  <p:clrMapOvr>
+    <a:masterClrMapping/>
+  </p:clrMapOvr>
+</p:sld>
+</file>
+
+<file path=ppt/slides/slide33.xml><?xml version="1.0" encoding="utf-8"?>
+<p:sld xmlns:a="http://schemas.openxmlformats.org/drawingml/2006/main" xmlns:r="http://schemas.openxmlformats.org/officeDocument/2006/relationships" xmlns:p="http://schemas.openxmlformats.org/presentationml/2006/main">
+  <p:cSld>
+    <p:spTree>
+      <p:nvGrpSpPr>
+        <p:cNvPr id="1" name="">
+          <a:extLst>
+            <a:ext uri="{FF2B5EF4-FFF2-40B4-BE49-F238E27FC236}">
+              <a16:creationId xmlns:a16="http://schemas.microsoft.com/office/drawing/2014/main" id="{599985CC-4D03-1292-E226-C319E963240D}"/>
+            </a:ext>
+          </a:extLst>
+        </p:cNvPr>
+        <p:cNvGrpSpPr/>
+        <p:nvPr/>
+      </p:nvGrpSpPr>
+      <p:grpSpPr>
+        <a:xfrm>
+          <a:off x="0" y="0"/>
+          <a:ext cx="0" cy="0"/>
+          <a:chOff x="0" y="0"/>
+          <a:chExt cx="0" cy="0"/>
+        </a:xfrm>
+      </p:grpSpPr>
+      <p:sp>
+        <p:nvSpPr>
+          <p:cNvPr id="2" name="제목 1">
+            <a:extLst>
+              <a:ext uri="{FF2B5EF4-FFF2-40B4-BE49-F238E27FC236}">
+                <a16:creationId xmlns:a16="http://schemas.microsoft.com/office/drawing/2014/main" id="{350DCC37-3080-F4E8-AA7B-4FF66D6E925E}"/>
+              </a:ext>
+            </a:extLst>
+          </p:cNvPr>
+          <p:cNvSpPr>
+            <a:spLocks noGrp="1"/>
+          </p:cNvSpPr>
+          <p:nvPr>
+            <p:ph type="title" idx="4294967295"/>
+          </p:nvPr>
+        </p:nvSpPr>
+        <p:spPr>
+          <a:xfrm>
+            <a:off x="0" y="18255"/>
+            <a:ext cx="10515600" cy="850425"/>
+          </a:xfrm>
+        </p:spPr>
+        <p:txBody>
+          <a:bodyPr>
+            <a:normAutofit/>
+          </a:bodyPr>
+          <a:lstStyle/>
+          <a:p>
+            <a:r>
+              <a:rPr lang="en-US" altLang="ko-KR" sz="5400" dirty="0" err="1"/>
+              <a:t>Chunck</a:t>
+            </a:r>
+            <a:r>
+              <a:rPr lang="ko-KR" altLang="en-US" sz="5400" dirty="0"/>
+              <a:t>의 문제점과 해결</a:t>
+            </a:r>
+          </a:p>
+        </p:txBody>
+      </p:sp>
+      <p:sp>
+        <p:nvSpPr>
+          <p:cNvPr id="4" name="TextBox 3">
+            <a:extLst>
+              <a:ext uri="{FF2B5EF4-FFF2-40B4-BE49-F238E27FC236}">
+                <a16:creationId xmlns:a16="http://schemas.microsoft.com/office/drawing/2014/main" id="{FB24A892-2A66-07AB-B5AA-3F07562002E2}"/>
+              </a:ext>
+            </a:extLst>
+          </p:cNvPr>
+          <p:cNvSpPr txBox="1"/>
+          <p:nvPr/>
+        </p:nvSpPr>
+        <p:spPr>
+          <a:xfrm>
+            <a:off x="1" y="868680"/>
+            <a:ext cx="12090400" cy="2308324"/>
+          </a:xfrm>
+          <a:prstGeom prst="rect">
+            <a:avLst/>
+          </a:prstGeom>
+          <a:noFill/>
+        </p:spPr>
+        <p:txBody>
+          <a:bodyPr wrap="square" rtlCol="0">
+            <a:spAutoFit/>
+          </a:bodyPr>
+          <a:lstStyle/>
+          <a:p>
+            <a:r>
+              <a:rPr lang="ko-KR" altLang="en-US" dirty="0"/>
+              <a:t>다만 특정 오브젝트는 여러 </a:t>
+            </a:r>
+            <a:r>
+              <a:rPr lang="ko-KR" altLang="en-US" dirty="0" err="1"/>
+              <a:t>청크에</a:t>
+            </a:r>
+            <a:r>
+              <a:rPr lang="ko-KR" altLang="en-US" dirty="0"/>
+              <a:t> 속해 있을 수 있다</a:t>
+            </a:r>
+            <a:r>
+              <a:rPr lang="en-US" altLang="ko-KR" dirty="0"/>
+              <a:t>. (</a:t>
+            </a:r>
+            <a:r>
+              <a:rPr lang="ko-KR" altLang="en-US" dirty="0"/>
+              <a:t>중간에 걸친 경우</a:t>
+            </a:r>
+            <a:r>
+              <a:rPr lang="en-US" altLang="ko-KR" dirty="0"/>
+              <a:t>)</a:t>
+            </a:r>
+          </a:p>
+          <a:p>
+            <a:r>
+              <a:rPr lang="ko-KR" altLang="en-US" dirty="0"/>
+              <a:t>이럴 경우 오브젝트의 일부를 포함하는 모든 </a:t>
+            </a:r>
+            <a:r>
+              <a:rPr lang="ko-KR" altLang="en-US" dirty="0" err="1"/>
+              <a:t>청크들의</a:t>
+            </a:r>
+            <a:r>
+              <a:rPr lang="ko-KR" altLang="en-US" dirty="0"/>
+              <a:t> </a:t>
+            </a:r>
+            <a:r>
+              <a:rPr lang="en-US" altLang="ko-KR" dirty="0" err="1"/>
+              <a:t>vecset</a:t>
+            </a:r>
+            <a:r>
+              <a:rPr lang="ko-KR" altLang="en-US" dirty="0"/>
+              <a:t>에 해당 오브젝트가 들어가게 된다</a:t>
+            </a:r>
+            <a:r>
+              <a:rPr lang="en-US" altLang="ko-KR" dirty="0"/>
+              <a:t>.</a:t>
+            </a:r>
+          </a:p>
+          <a:p>
+            <a:r>
+              <a:rPr lang="ko-KR" altLang="en-US" dirty="0"/>
+              <a:t>다만 이럴 경우 여러 문제가 생기는데</a:t>
+            </a:r>
+            <a:r>
+              <a:rPr lang="en-US" altLang="ko-KR" dirty="0"/>
+              <a:t>, </a:t>
+            </a:r>
+            <a:r>
+              <a:rPr lang="ko-KR" altLang="en-US" dirty="0"/>
+              <a:t>그것은 다음과 같다</a:t>
+            </a:r>
+            <a:r>
+              <a:rPr lang="en-US" altLang="ko-KR" dirty="0"/>
+              <a:t>.</a:t>
+            </a:r>
+          </a:p>
+          <a:p>
+            <a:pPr marL="342900" indent="-342900">
+              <a:buAutoNum type="arabicPeriod"/>
+            </a:pPr>
+            <a:r>
+              <a:rPr lang="ko-KR" altLang="en-US" dirty="0"/>
+              <a:t>오브젝트마다 한번씩 </a:t>
+            </a:r>
+            <a:r>
+              <a:rPr lang="en-US" altLang="ko-KR" dirty="0"/>
+              <a:t>Update</a:t>
+            </a:r>
+            <a:r>
+              <a:rPr lang="ko-KR" altLang="en-US" dirty="0"/>
+              <a:t>나 </a:t>
+            </a:r>
+            <a:r>
+              <a:rPr lang="en-US" altLang="ko-KR" dirty="0"/>
+              <a:t>Render</a:t>
+            </a:r>
+            <a:r>
+              <a:rPr lang="ko-KR" altLang="en-US" dirty="0"/>
+              <a:t>를 수행해야 </a:t>
+            </a:r>
+            <a:r>
+              <a:rPr lang="ko-KR" altLang="en-US" dirty="0" err="1"/>
+              <a:t>할때는</a:t>
+            </a:r>
+            <a:r>
+              <a:rPr lang="ko-KR" altLang="en-US" dirty="0"/>
+              <a:t> 어떻게 하는가</a:t>
+            </a:r>
+            <a:r>
+              <a:rPr lang="en-US" altLang="ko-KR" dirty="0"/>
+              <a:t>? </a:t>
+            </a:r>
+            <a:r>
+              <a:rPr lang="ko-KR" altLang="en-US" dirty="0"/>
+              <a:t>그럴 때마다 각자가 이미 해당 동작을</a:t>
+            </a:r>
+            <a:r>
+              <a:rPr lang="en-US" altLang="ko-KR" dirty="0"/>
+              <a:t> </a:t>
+            </a:r>
+            <a:r>
+              <a:rPr lang="ko-KR" altLang="en-US" dirty="0"/>
+              <a:t>수행했다는 표시를 해야 하는데</a:t>
+            </a:r>
+            <a:r>
+              <a:rPr lang="en-US" altLang="ko-KR" dirty="0"/>
+              <a:t>, </a:t>
+            </a:r>
+            <a:r>
+              <a:rPr lang="ko-KR" altLang="en-US" dirty="0"/>
+              <a:t>어디에 어떻게 할 것인가</a:t>
+            </a:r>
+            <a:endParaRPr lang="en-US" altLang="ko-KR" dirty="0"/>
+          </a:p>
+          <a:p>
+            <a:pPr marL="342900" indent="-342900">
+              <a:buAutoNum type="arabicPeriod"/>
+            </a:pPr>
+            <a:r>
+              <a:rPr lang="ko-KR" altLang="en-US" dirty="0"/>
+              <a:t>해당 오브젝트가 이동을 하게 된다면</a:t>
+            </a:r>
+            <a:r>
+              <a:rPr lang="en-US" altLang="ko-KR" dirty="0"/>
+              <a:t>, </a:t>
+            </a:r>
+            <a:r>
+              <a:rPr lang="ko-KR" altLang="en-US" dirty="0" err="1"/>
+              <a:t>청크에서</a:t>
+            </a:r>
+            <a:r>
+              <a:rPr lang="ko-KR" altLang="en-US" dirty="0"/>
+              <a:t> 해당 오브젝트가 빠져나가야 한다</a:t>
+            </a:r>
+            <a:r>
+              <a:rPr lang="en-US" altLang="ko-KR" dirty="0"/>
+              <a:t>. </a:t>
+            </a:r>
+            <a:r>
+              <a:rPr lang="ko-KR" altLang="en-US" dirty="0"/>
+              <a:t>그러나 </a:t>
+            </a:r>
+            <a:r>
+              <a:rPr lang="en-US" altLang="ko-KR" dirty="0" err="1"/>
+              <a:t>vecset</a:t>
+            </a:r>
+            <a:r>
+              <a:rPr lang="ko-KR" altLang="en-US" dirty="0"/>
+              <a:t>은 해당 오브젝트가 자신이 어떤 인덱스를 가지고 있었는지 기억해야만 </a:t>
+            </a:r>
+            <a:r>
+              <a:rPr lang="en-US" altLang="ko-KR" dirty="0"/>
+              <a:t>Free</a:t>
+            </a:r>
+            <a:r>
+              <a:rPr lang="ko-KR" altLang="en-US" dirty="0"/>
+              <a:t>를 할 수 있었다</a:t>
+            </a:r>
+            <a:r>
+              <a:rPr lang="en-US" altLang="ko-KR" dirty="0"/>
+              <a:t>. </a:t>
+            </a:r>
+            <a:r>
+              <a:rPr lang="ko-KR" altLang="en-US" dirty="0"/>
+              <a:t>그럼 어떻게 이동을 정상적으로 처리할 수 있겠는가</a:t>
+            </a:r>
+            <a:r>
+              <a:rPr lang="en-US" altLang="ko-KR" dirty="0"/>
+              <a:t>?</a:t>
+            </a:r>
+          </a:p>
+        </p:txBody>
+      </p:sp>
+      <mc:AlternateContent xmlns:mc="http://schemas.openxmlformats.org/markup-compatibility/2006" xmlns:pslz="http://schemas.microsoft.com/office/powerpoint/2016/slidezoom">
+        <mc:Choice Requires="pslz">
+          <p:graphicFrame>
+            <p:nvGraphicFramePr>
+              <p:cNvPr id="6" name="슬라이드 확대/축소 5">
+                <a:extLst>
+                  <a:ext uri="{FF2B5EF4-FFF2-40B4-BE49-F238E27FC236}">
+                    <a16:creationId xmlns:a16="http://schemas.microsoft.com/office/drawing/2014/main" id="{0354CA0C-3B8C-BF9F-4B32-34158CC93393}"/>
+                  </a:ext>
+                </a:extLst>
+              </p:cNvPr>
+              <p:cNvGraphicFramePr>
+                <a:graphicFrameLocks noChangeAspect="1"/>
+              </p:cNvGraphicFramePr>
+              <p:nvPr>
+                <p:extLst>
+                  <p:ext uri="{D42A27DB-BD31-4B8C-83A1-F6EECF244321}">
+                    <p14:modId xmlns:p14="http://schemas.microsoft.com/office/powerpoint/2010/main" val="2554558329"/>
+                  </p:ext>
+                </p:extLst>
+              </p:nvPr>
+            </p:nvGraphicFramePr>
+            <p:xfrm>
+              <a:off x="101599" y="3177004"/>
+              <a:ext cx="6381135" cy="3589388"/>
+            </p:xfrm>
+            <a:graphic>
+              <a:graphicData uri="http://schemas.microsoft.com/office/powerpoint/2016/slidezoom">
+                <pslz:sldZm>
+                  <pslz:sldZmObj sldId="285" cId="1008121533">
+                    <pslz:zmPr id="{1F90038D-034A-4EAB-AB1E-5F294533117C}" returnToParent="0" transitionDur="1000">
+                      <p166:blipFill xmlns:p166="http://schemas.microsoft.com/office/powerpoint/2016/6/main">
+                        <a:blip r:embed="rId2"/>
+                        <a:stretch>
+                          <a:fillRect/>
+                        </a:stretch>
+                      </p166:blipFill>
+                      <p166:spPr xmlns:p166="http://schemas.microsoft.com/office/powerpoint/2016/6/main">
+                        <a:xfrm>
+                          <a:off x="0" y="0"/>
+                          <a:ext cx="6381135" cy="3589388"/>
+                        </a:xfrm>
+                        <a:prstGeom prst="rect">
+                          <a:avLst/>
+                        </a:prstGeom>
+                        <a:ln w="3175">
+                          <a:solidFill>
+                            <a:prstClr val="ltGray"/>
+                          </a:solidFill>
+                        </a:ln>
+                      </p166:spPr>
+                    </pslz:zmPr>
+                  </pslz:sldZmObj>
+                </pslz:sldZm>
+              </a:graphicData>
+            </a:graphic>
+          </p:graphicFrame>
+        </mc:Choice>
+        <mc:Fallback xmlns="">
+          <p:pic>
+            <p:nvPicPr>
+              <p:cNvPr id="6" name="슬라이드 확대/축소 5">
+                <a:hlinkClick r:id="rId3" action="ppaction://hlinksldjump"/>
+                <a:extLst>
+                  <a:ext uri="{FF2B5EF4-FFF2-40B4-BE49-F238E27FC236}">
+                    <a16:creationId xmlns:a16="http://schemas.microsoft.com/office/drawing/2014/main" id="{0354CA0C-3B8C-BF9F-4B32-34158CC93393}"/>
+                  </a:ext>
+                </a:extLst>
+              </p:cNvPr>
+              <p:cNvPicPr>
+                <a:picLocks noGrp="1" noRot="1" noChangeAspect="1" noMove="1" noResize="1" noEditPoints="1" noAdjustHandles="1" noChangeArrowheads="1" noChangeShapeType="1"/>
+              </p:cNvPicPr>
+              <p:nvPr/>
+            </p:nvPicPr>
+            <p:blipFill>
+              <a:blip r:embed="rId4"/>
+              <a:stretch>
+                <a:fillRect/>
+              </a:stretch>
+            </p:blipFill>
+            <p:spPr>
+              <a:xfrm>
+                <a:off x="101599" y="3177004"/>
+                <a:ext cx="6381135" cy="3589388"/>
+              </a:xfrm>
+              <a:prstGeom prst="rect">
+                <a:avLst/>
+              </a:prstGeom>
+              <a:ln w="3175">
+                <a:solidFill>
+                  <a:prstClr val="ltGray"/>
+                </a:solidFill>
+              </a:ln>
+            </p:spPr>
+          </p:pic>
+        </mc:Fallback>
+      </mc:AlternateContent>
+    </p:spTree>
+    <p:extLst>
+      <p:ext uri="{BB962C8B-B14F-4D97-AF65-F5344CB8AC3E}">
+        <p14:creationId xmlns:p14="http://schemas.microsoft.com/office/powerpoint/2010/main" val="1005892815"/>
+      </p:ext>
+    </p:extLst>
+  </p:cSld>
+  <p:clrMapOvr>
+    <a:masterClrMapping/>
+  </p:clrMapOvr>
+</p:sld>
+</file>
+
+<file path=ppt/slides/slide34.xml><?xml version="1.0" encoding="utf-8"?>
+<p:sld xmlns:a="http://schemas.openxmlformats.org/drawingml/2006/main" xmlns:r="http://schemas.openxmlformats.org/officeDocument/2006/relationships" xmlns:p="http://schemas.openxmlformats.org/presentationml/2006/main">
+  <p:cSld>
+    <p:spTree>
+      <p:nvGrpSpPr>
+        <p:cNvPr id="1" name="">
+          <a:extLst>
+            <a:ext uri="{FF2B5EF4-FFF2-40B4-BE49-F238E27FC236}">
               <a16:creationId xmlns:a16="http://schemas.microsoft.com/office/drawing/2014/main" id="{B038583A-7194-4E96-4BF8-C3EB893F3FC1}"/>
             </a:ext>
           </a:extLst>
@@ -9208,7 +13111,7 @@
             <a:spLocks noGrp="1"/>
           </p:cNvSpPr>
           <p:nvPr>
-            <p:ph type="title"/>
+            <p:ph type="title" idx="4294967295"/>
           </p:nvPr>
         </p:nvSpPr>
         <p:spPr>
@@ -9612,7 +13515,7 @@
 </p:sld>
 </file>
 
-<file path=ppt/slides/slide31.xml><?xml version="1.0" encoding="utf-8"?>
+<file path=ppt/slides/slide35.xml><?xml version="1.0" encoding="utf-8"?>
 <p:sld xmlns:a="http://schemas.openxmlformats.org/drawingml/2006/main" xmlns:r="http://schemas.openxmlformats.org/officeDocument/2006/relationships" xmlns:p="http://schemas.openxmlformats.org/presentationml/2006/main">
   <p:cSld>
     <p:spTree>
@@ -9648,7 +13551,7 @@
             <a:spLocks noGrp="1"/>
           </p:cNvSpPr>
           <p:nvPr>
-            <p:ph type="title"/>
+            <p:ph type="title" idx="4294967295"/>
           </p:nvPr>
         </p:nvSpPr>
         <p:spPr>
@@ -9821,7 +13724,7 @@
 </p:sld>
 </file>
 
-<file path=ppt/slides/slide32.xml><?xml version="1.0" encoding="utf-8"?>
+<file path=ppt/slides/slide36.xml><?xml version="1.0" encoding="utf-8"?>
 <p:sld xmlns:a="http://schemas.openxmlformats.org/drawingml/2006/main" xmlns:r="http://schemas.openxmlformats.org/officeDocument/2006/relationships" xmlns:p="http://schemas.openxmlformats.org/presentationml/2006/main">
   <p:cSld>
     <p:spTree>
@@ -9857,7 +13760,7 @@
             <a:spLocks noGrp="1"/>
           </p:cNvSpPr>
           <p:nvPr>
-            <p:ph type="title"/>
+            <p:ph type="title" idx="4294967295"/>
           </p:nvPr>
         </p:nvSpPr>
         <p:spPr>
@@ -11456,7 +15359,7 @@
 </p:sld>
 </file>
 
-<file path=ppt/slides/slide33.xml><?xml version="1.0" encoding="utf-8"?>
+<file path=ppt/slides/slide37.xml><?xml version="1.0" encoding="utf-8"?>
 <p:sld xmlns:a="http://schemas.openxmlformats.org/drawingml/2006/main" xmlns:r="http://schemas.openxmlformats.org/officeDocument/2006/relationships" xmlns:p="http://schemas.openxmlformats.org/presentationml/2006/main">
   <p:cSld>
     <p:spTree>
@@ -11548,7 +15451,7 @@
             <a:spLocks noGrp="1"/>
           </p:cNvSpPr>
           <p:nvPr>
-            <p:ph type="title"/>
+            <p:ph type="title" idx="4294967295"/>
           </p:nvPr>
         </p:nvSpPr>
         <p:spPr>
@@ -13000,7 +16903,7 @@
 </p:sld>
 </file>
 
-<file path=ppt/slides/slide34.xml><?xml version="1.0" encoding="utf-8"?>
+<file path=ppt/slides/slide38.xml><?xml version="1.0" encoding="utf-8"?>
 <p:sld xmlns:a="http://schemas.openxmlformats.org/drawingml/2006/main" xmlns:r="http://schemas.openxmlformats.org/officeDocument/2006/relationships" xmlns:p="http://schemas.openxmlformats.org/presentationml/2006/main">
   <p:cSld>
     <p:spTree>
@@ -13030,10 +16933,15 @@
             <a:spLocks noGrp="1"/>
           </p:cNvSpPr>
           <p:nvPr>
-            <p:ph type="title"/>
+            <p:ph type="title" idx="4294967295"/>
           </p:nvPr>
         </p:nvSpPr>
-        <p:spPr/>
+        <p:spPr>
+          <a:xfrm>
+            <a:off x="838200" y="365125"/>
+            <a:ext cx="10515600" cy="1325563"/>
+          </a:xfrm>
+        </p:spPr>
         <p:txBody>
           <a:bodyPr/>
           <a:lstStyle/>
@@ -13154,7 +17062,7 @@
             <a:spLocks noGrp="1"/>
           </p:cNvSpPr>
           <p:nvPr>
-            <p:ph type="title"/>
+            <p:ph type="title" idx="4294967295"/>
           </p:nvPr>
         </p:nvSpPr>
         <p:spPr>
@@ -13673,6 +17581,103 @@
           </a:p>
         </p:txBody>
       </p:sp>
+      <mc:AlternateContent xmlns:mc="http://schemas.openxmlformats.org/markup-compatibility/2006" xmlns:pslz="http://schemas.microsoft.com/office/powerpoint/2016/slidezoom">
+        <mc:Choice Requires="pslz">
+          <p:graphicFrame>
+            <p:nvGraphicFramePr>
+              <p:cNvPr id="6" name="슬라이드 확대/축소 5">
+                <a:extLst>
+                  <a:ext uri="{FF2B5EF4-FFF2-40B4-BE49-F238E27FC236}">
+                    <a16:creationId xmlns:a16="http://schemas.microsoft.com/office/drawing/2014/main" id="{B0EEB9EE-D82A-E42E-FCD7-842ED158415C}"/>
+                  </a:ext>
+                </a:extLst>
+              </p:cNvPr>
+              <p:cNvGraphicFramePr>
+                <a:graphicFrameLocks noChangeAspect="1"/>
+              </p:cNvGraphicFramePr>
+              <p:nvPr>
+                <p:extLst>
+                  <p:ext uri="{D42A27DB-BD31-4B8C-83A1-F6EECF244321}">
+                    <p14:modId xmlns:p14="http://schemas.microsoft.com/office/powerpoint/2010/main" val="1978750524"/>
+                  </p:ext>
+                </p:extLst>
+              </p:nvPr>
+            </p:nvGraphicFramePr>
+            <p:xfrm>
+              <a:off x="8003662" y="4925607"/>
+              <a:ext cx="3241000" cy="1823062"/>
+            </p:xfrm>
+            <a:graphic>
+              <a:graphicData uri="http://schemas.microsoft.com/office/powerpoint/2016/slidezoom">
+                <pslz:sldZm>
+                  <pslz:sldZmObj sldId="288" cId="1454281042">
+                    <pslz:zmPr id="{93A88EC4-656D-4BAB-B1B7-CE9C3F364338}" returnToParent="0" transitionDur="1000">
+                      <p166:blipFill xmlns:p166="http://schemas.microsoft.com/office/powerpoint/2016/6/main">
+                        <a:blip r:embed="rId11"/>
+                        <a:stretch>
+                          <a:fillRect/>
+                        </a:stretch>
+                      </p166:blipFill>
+                      <p166:spPr xmlns:p166="http://schemas.microsoft.com/office/powerpoint/2016/6/main">
+                        <a:xfrm>
+                          <a:off x="0" y="0"/>
+                          <a:ext cx="3241000" cy="1823062"/>
+                        </a:xfrm>
+                        <a:prstGeom prst="rect">
+                          <a:avLst/>
+                        </a:prstGeom>
+                        <a:ln w="3175">
+                          <a:solidFill>
+                            <a:prstClr val="ltGray"/>
+                          </a:solidFill>
+                        </a:ln>
+                      </p166:spPr>
+                    </pslz:zmPr>
+                  </pslz:sldZmObj>
+                </pslz:sldZm>
+              </a:graphicData>
+            </a:graphic>
+          </p:graphicFrame>
+        </mc:Choice>
+        <mc:Fallback xmlns="">
+          <p:pic>
+            <p:nvPicPr>
+              <p:cNvPr id="6" name="슬라이드 확대/축소 5">
+                <a:hlinkClick r:id="rId12" action="ppaction://hlinksldjump"/>
+                <a:extLst>
+                  <a:ext uri="{FF2B5EF4-FFF2-40B4-BE49-F238E27FC236}">
+                    <a16:creationId xmlns:a16="http://schemas.microsoft.com/office/drawing/2014/main" id="{B0EEB9EE-D82A-E42E-FCD7-842ED158415C}"/>
+                  </a:ext>
+                </a:extLst>
+              </p:cNvPr>
+              <p:cNvPicPr>
+                <a:picLocks noGrp="1" noRot="1" noChangeAspect="1" noMove="1" noResize="1" noEditPoints="1" noAdjustHandles="1" noChangeArrowheads="1" noChangeShapeType="1"/>
+              </p:cNvPicPr>
+              <p:nvPr/>
+            </p:nvPicPr>
+            <p:blipFill>
+              <a:blip r:embed="rId13"/>
+              <a:stretch>
+                <a:fillRect/>
+              </a:stretch>
+            </p:blipFill>
+            <p:spPr>
+              <a:xfrm>
+                <a:off x="8003662" y="4925607"/>
+                <a:ext cx="3241000" cy="1823062"/>
+              </a:xfrm>
+              <a:prstGeom prst="rect">
+                <a:avLst/>
+              </a:prstGeom>
+              <a:ln w="3175">
+                <a:solidFill>
+                  <a:prstClr val="ltGray"/>
+                </a:solidFill>
+              </a:ln>
+            </p:spPr>
+          </p:pic>
+        </mc:Fallback>
+      </mc:AlternateContent>
     </p:spTree>
     <p:extLst>
       <p:ext uri="{BB962C8B-B14F-4D97-AF65-F5344CB8AC3E}">
@@ -13722,7 +17727,7 @@
             <a:spLocks noGrp="1"/>
           </p:cNvSpPr>
           <p:nvPr>
-            <p:ph type="title"/>
+            <p:ph type="title" idx="4294967295"/>
           </p:nvPr>
         </p:nvSpPr>
         <p:spPr>
@@ -14363,7 +18368,7 @@
             <a:spLocks noGrp="1"/>
           </p:cNvSpPr>
           <p:nvPr>
-            <p:ph type="title"/>
+            <p:ph type="title" idx="4294967295"/>
           </p:nvPr>
         </p:nvSpPr>
         <p:spPr>
@@ -16198,7 +20203,7 @@
             <a:spLocks noGrp="1"/>
           </p:cNvSpPr>
           <p:nvPr>
-            <p:ph type="title"/>
+            <p:ph type="title" idx="4294967295"/>
           </p:nvPr>
         </p:nvSpPr>
         <p:spPr>
@@ -17556,7 +21561,7 @@
             <a:spLocks noGrp="1"/>
           </p:cNvSpPr>
           <p:nvPr>
-            <p:ph type="title"/>
+            <p:ph type="title" idx="4294967295"/>
           </p:nvPr>
         </p:nvSpPr>
         <p:spPr>
@@ -18875,7 +22880,7 @@
             <a:spLocks noGrp="1"/>
           </p:cNvSpPr>
           <p:nvPr>
-            <p:ph type="title"/>
+            <p:ph type="title" idx="4294967295"/>
           </p:nvPr>
         </p:nvSpPr>
         <p:spPr>
@@ -19604,6 +23609,19 @@
         </a:fontRef>
       </a:style>
     </a:lnDef>
+    <a:txDef>
+      <a:spPr>
+        <a:noFill/>
+      </a:spPr>
+      <a:bodyPr wrap="none" rtlCol="0">
+        <a:spAutoFit/>
+      </a:bodyPr>
+      <a:lstStyle>
+        <a:defPPr algn="l">
+          <a:defRPr kern="0" smtClean="0"/>
+        </a:defPPr>
+      </a:lstStyle>
+    </a:txDef>
   </a:objectDefaults>
   <a:extraClrSchemeLst/>
   <a:extLst>

--- a/Conference/GraphicsStudy/GraphicsHighLevelDesign.pptx
+++ b/Conference/GraphicsStudy/GraphicsHighLevelDesign.pptx
@@ -5,7 +5,7 @@
     <p:sldMasterId id="2147483648" r:id="rId1"/>
   </p:sldMasterIdLst>
   <p:notesMasterIdLst>
-    <p:notesMasterId r:id="rId40"/>
+    <p:notesMasterId r:id="rId41"/>
   </p:notesMasterIdLst>
   <p:sldIdLst>
     <p:sldId id="256" r:id="rId2"/>
@@ -14,38 +14,39 @@
     <p:sldId id="261" r:id="rId5"/>
     <p:sldId id="277" r:id="rId6"/>
     <p:sldId id="280" r:id="rId7"/>
-    <p:sldId id="282" r:id="rId8"/>
-    <p:sldId id="264" r:id="rId9"/>
-    <p:sldId id="265" r:id="rId10"/>
-    <p:sldId id="266" r:id="rId11"/>
-    <p:sldId id="267" r:id="rId12"/>
-    <p:sldId id="268" r:id="rId13"/>
-    <p:sldId id="269" r:id="rId14"/>
-    <p:sldId id="270" r:id="rId15"/>
-    <p:sldId id="271" r:id="rId16"/>
-    <p:sldId id="272" r:id="rId17"/>
-    <p:sldId id="273" r:id="rId18"/>
-    <p:sldId id="274" r:id="rId19"/>
-    <p:sldId id="263" r:id="rId20"/>
-    <p:sldId id="286" r:id="rId21"/>
-    <p:sldId id="275" r:id="rId22"/>
-    <p:sldId id="276" r:id="rId23"/>
-    <p:sldId id="262" r:id="rId24"/>
-    <p:sldId id="290" r:id="rId25"/>
-    <p:sldId id="291" r:id="rId26"/>
-    <p:sldId id="292" r:id="rId27"/>
-    <p:sldId id="293" r:id="rId28"/>
-    <p:sldId id="259" r:id="rId29"/>
-    <p:sldId id="260" r:id="rId30"/>
-    <p:sldId id="278" r:id="rId31"/>
-    <p:sldId id="283" r:id="rId32"/>
-    <p:sldId id="279" r:id="rId33"/>
-    <p:sldId id="284" r:id="rId34"/>
-    <p:sldId id="285" r:id="rId35"/>
-    <p:sldId id="281" r:id="rId36"/>
-    <p:sldId id="287" r:id="rId37"/>
-    <p:sldId id="288" r:id="rId38"/>
-    <p:sldId id="289" r:id="rId39"/>
+    <p:sldId id="294" r:id="rId8"/>
+    <p:sldId id="282" r:id="rId9"/>
+    <p:sldId id="264" r:id="rId10"/>
+    <p:sldId id="265" r:id="rId11"/>
+    <p:sldId id="266" r:id="rId12"/>
+    <p:sldId id="267" r:id="rId13"/>
+    <p:sldId id="268" r:id="rId14"/>
+    <p:sldId id="269" r:id="rId15"/>
+    <p:sldId id="270" r:id="rId16"/>
+    <p:sldId id="271" r:id="rId17"/>
+    <p:sldId id="272" r:id="rId18"/>
+    <p:sldId id="273" r:id="rId19"/>
+    <p:sldId id="274" r:id="rId20"/>
+    <p:sldId id="263" r:id="rId21"/>
+    <p:sldId id="286" r:id="rId22"/>
+    <p:sldId id="275" r:id="rId23"/>
+    <p:sldId id="276" r:id="rId24"/>
+    <p:sldId id="262" r:id="rId25"/>
+    <p:sldId id="290" r:id="rId26"/>
+    <p:sldId id="291" r:id="rId27"/>
+    <p:sldId id="292" r:id="rId28"/>
+    <p:sldId id="293" r:id="rId29"/>
+    <p:sldId id="259" r:id="rId30"/>
+    <p:sldId id="260" r:id="rId31"/>
+    <p:sldId id="278" r:id="rId32"/>
+    <p:sldId id="283" r:id="rId33"/>
+    <p:sldId id="279" r:id="rId34"/>
+    <p:sldId id="284" r:id="rId35"/>
+    <p:sldId id="285" r:id="rId36"/>
+    <p:sldId id="281" r:id="rId37"/>
+    <p:sldId id="287" r:id="rId38"/>
+    <p:sldId id="288" r:id="rId39"/>
+    <p:sldId id="289" r:id="rId40"/>
   </p:sldIdLst>
   <p:sldSz cx="12192000" cy="6858000"/>
   <p:notesSz cx="6858000" cy="9144000"/>
@@ -566,7 +567,7 @@
           <a:p>
             <a:fld id="{DF195A5E-4983-45AC-854B-86DE2CB70077}" type="slidenum">
               <a:rPr lang="ko-KR" altLang="en-US" smtClean="0"/>
-              <a:t>37</a:t>
+              <a:t>38</a:t>
             </a:fld>
             <a:endParaRPr lang="ko-KR" altLang="en-US"/>
           </a:p>
@@ -3724,6 +3725,466 @@
         <p:cNvPr id="1" name="">
           <a:extLst>
             <a:ext uri="{FF2B5EF4-FFF2-40B4-BE49-F238E27FC236}">
+              <a16:creationId xmlns:a16="http://schemas.microsoft.com/office/drawing/2014/main" id="{63DC0FAD-80DD-3F81-E810-F6E3C6FEEAB3}"/>
+            </a:ext>
+          </a:extLst>
+        </p:cNvPr>
+        <p:cNvGrpSpPr/>
+        <p:nvPr/>
+      </p:nvGrpSpPr>
+      <p:grpSpPr>
+        <a:xfrm>
+          <a:off x="0" y="0"/>
+          <a:ext cx="0" cy="0"/>
+          <a:chOff x="0" y="0"/>
+          <a:chExt cx="0" cy="0"/>
+        </a:xfrm>
+      </p:grpSpPr>
+      <p:sp>
+        <p:nvSpPr>
+          <p:cNvPr id="2" name="제목 1">
+            <a:extLst>
+              <a:ext uri="{FF2B5EF4-FFF2-40B4-BE49-F238E27FC236}">
+                <a16:creationId xmlns:a16="http://schemas.microsoft.com/office/drawing/2014/main" id="{EF2EA518-73B9-C10A-263D-8BA9BCFAF9A9}"/>
+              </a:ext>
+            </a:extLst>
+          </p:cNvPr>
+          <p:cNvSpPr>
+            <a:spLocks noGrp="1"/>
+          </p:cNvSpPr>
+          <p:nvPr>
+            <p:ph type="title" idx="4294967295"/>
+          </p:nvPr>
+        </p:nvSpPr>
+        <p:spPr>
+          <a:xfrm>
+            <a:off x="0" y="18255"/>
+            <a:ext cx="10515600" cy="850425"/>
+          </a:xfrm>
+        </p:spPr>
+        <p:txBody>
+          <a:bodyPr>
+            <a:normAutofit/>
+          </a:bodyPr>
+          <a:lstStyle/>
+          <a:p>
+            <a:r>
+              <a:rPr lang="en-US" altLang="ko-KR" sz="5400" dirty="0"/>
+              <a:t>View</a:t>
+            </a:r>
+            <a:r>
+              <a:rPr lang="ko-KR" altLang="en-US" sz="5400" dirty="0"/>
+              <a:t> </a:t>
+            </a:r>
+            <a:r>
+              <a:rPr lang="en-US" altLang="ko-KR" sz="5400" dirty="0"/>
+              <a:t>Frustum</a:t>
+            </a:r>
+            <a:r>
+              <a:rPr lang="ko-KR" altLang="en-US" sz="5400" dirty="0"/>
+              <a:t> </a:t>
+            </a:r>
+            <a:r>
+              <a:rPr lang="en-US" altLang="ko-KR" sz="5400" dirty="0"/>
+              <a:t>Culling</a:t>
+            </a:r>
+            <a:endParaRPr lang="ko-KR" altLang="en-US" sz="5400" dirty="0"/>
+          </a:p>
+        </p:txBody>
+      </p:sp>
+      <p:sp>
+        <p:nvSpPr>
+          <p:cNvPr id="3" name="TextBox 2">
+            <a:extLst>
+              <a:ext uri="{FF2B5EF4-FFF2-40B4-BE49-F238E27FC236}">
+                <a16:creationId xmlns:a16="http://schemas.microsoft.com/office/drawing/2014/main" id="{CAC6FA67-470F-213F-77A3-0454538B1C1D}"/>
+              </a:ext>
+            </a:extLst>
+          </p:cNvPr>
+          <p:cNvSpPr txBox="1"/>
+          <p:nvPr/>
+        </p:nvSpPr>
+        <p:spPr>
+          <a:xfrm>
+            <a:off x="12404" y="796412"/>
+            <a:ext cx="11704999" cy="3970318"/>
+          </a:xfrm>
+          <a:prstGeom prst="rect">
+            <a:avLst/>
+          </a:prstGeom>
+          <a:noFill/>
+        </p:spPr>
+        <p:txBody>
+          <a:bodyPr wrap="none" rtlCol="0">
+            <a:spAutoFit/>
+          </a:bodyPr>
+          <a:lstStyle/>
+          <a:p>
+            <a:r>
+              <a:rPr lang="ko-KR" altLang="en-US" dirty="0"/>
+              <a:t>하나의 뷰 포트는 두개의 </a:t>
+            </a:r>
+            <a:r>
+              <a:rPr lang="ko-KR" altLang="en-US" dirty="0" err="1"/>
+              <a:t>프러스텀을</a:t>
+            </a:r>
+            <a:r>
+              <a:rPr lang="ko-KR" altLang="en-US" dirty="0"/>
+              <a:t> 가질 수 있다</a:t>
+            </a:r>
+            <a:r>
+              <a:rPr lang="en-US" altLang="ko-KR" dirty="0"/>
+              <a:t>.</a:t>
+            </a:r>
+          </a:p>
+          <a:p>
+            <a:pPr marL="342900" indent="-342900">
+              <a:buAutoNum type="arabicPeriod"/>
+            </a:pPr>
+            <a:r>
+              <a:rPr lang="ko-KR" altLang="en-US" dirty="0"/>
+              <a:t>직교 </a:t>
+            </a:r>
+            <a:r>
+              <a:rPr lang="ko-KR" altLang="en-US" dirty="0" err="1"/>
+              <a:t>프러스텀</a:t>
+            </a:r>
+            <a:endParaRPr lang="en-US" altLang="ko-KR" dirty="0"/>
+          </a:p>
+          <a:p>
+            <a:pPr marL="342900" indent="-342900">
+              <a:buAutoNum type="arabicPeriod"/>
+            </a:pPr>
+            <a:r>
+              <a:rPr lang="ko-KR" altLang="en-US" dirty="0"/>
+              <a:t>원근 </a:t>
+            </a:r>
+            <a:r>
+              <a:rPr lang="ko-KR" altLang="en-US" dirty="0" err="1"/>
+              <a:t>프러스텀</a:t>
+            </a:r>
+            <a:endParaRPr lang="en-US" altLang="ko-KR" dirty="0"/>
+          </a:p>
+          <a:p>
+            <a:r>
+              <a:rPr lang="ko-KR" altLang="en-US" dirty="0"/>
+              <a:t>직교는 </a:t>
+            </a:r>
+            <a:r>
+              <a:rPr lang="ko-KR" altLang="en-US" dirty="0" err="1"/>
+              <a:t>디렉션</a:t>
+            </a:r>
+            <a:r>
+              <a:rPr lang="ko-KR" altLang="en-US" dirty="0"/>
+              <a:t> </a:t>
+            </a:r>
+            <a:r>
+              <a:rPr lang="ko-KR" altLang="en-US" dirty="0" err="1"/>
+              <a:t>라이팅의</a:t>
+            </a:r>
+            <a:r>
+              <a:rPr lang="ko-KR" altLang="en-US" dirty="0"/>
+              <a:t> 쉐도우 매핑과 같은 작업을 </a:t>
+            </a:r>
+            <a:r>
+              <a:rPr lang="ko-KR" altLang="en-US" dirty="0" err="1"/>
+              <a:t>할때</a:t>
+            </a:r>
+            <a:r>
+              <a:rPr lang="ko-KR" altLang="en-US" dirty="0"/>
+              <a:t> 오브젝트들을 직교로 거르기 위해 사용된다</a:t>
+            </a:r>
+            <a:r>
+              <a:rPr lang="en-US" altLang="ko-KR" dirty="0"/>
+              <a:t>.</a:t>
+            </a:r>
+          </a:p>
+          <a:p>
+            <a:r>
+              <a:rPr lang="ko-KR" altLang="en-US" dirty="0"/>
+              <a:t>원근은 화면 렌더링</a:t>
+            </a:r>
+            <a:r>
+              <a:rPr lang="en-US" altLang="ko-KR" dirty="0"/>
+              <a:t>, </a:t>
+            </a:r>
+            <a:r>
+              <a:rPr lang="ko-KR" altLang="en-US" dirty="0" err="1"/>
+              <a:t>오쿨루션</a:t>
+            </a:r>
+            <a:r>
+              <a:rPr lang="ko-KR" altLang="en-US" dirty="0"/>
+              <a:t> </a:t>
+            </a:r>
+            <a:r>
+              <a:rPr lang="ko-KR" altLang="en-US" dirty="0" err="1"/>
+              <a:t>컬링</a:t>
+            </a:r>
+            <a:r>
+              <a:rPr lang="en-US" altLang="ko-KR" dirty="0"/>
+              <a:t>, </a:t>
+            </a:r>
+            <a:r>
+              <a:rPr lang="ko-KR" altLang="en-US" dirty="0"/>
+              <a:t>그리고 </a:t>
+            </a:r>
+            <a:r>
+              <a:rPr lang="ko-KR" altLang="en-US" dirty="0" err="1"/>
+              <a:t>레이트레이싱에서</a:t>
+            </a:r>
+            <a:r>
+              <a:rPr lang="ko-KR" altLang="en-US" dirty="0"/>
+              <a:t> </a:t>
+            </a:r>
+            <a:r>
+              <a:rPr lang="en-US" altLang="ko-KR" dirty="0" err="1"/>
+              <a:t>SkinMeshBLASUpdate</a:t>
+            </a:r>
+            <a:r>
+              <a:rPr lang="ko-KR" altLang="en-US" dirty="0"/>
+              <a:t>를 위해 사용된다</a:t>
+            </a:r>
+            <a:r>
+              <a:rPr lang="en-US" altLang="ko-KR" dirty="0"/>
+              <a:t>.</a:t>
+            </a:r>
+          </a:p>
+          <a:p>
+            <a:r>
+              <a:rPr lang="ko-KR" altLang="en-US" dirty="0"/>
+              <a:t>직교나 원근이나 </a:t>
+            </a:r>
+            <a:r>
+              <a:rPr lang="ko-KR" altLang="en-US" dirty="0" err="1"/>
+              <a:t>프러스텀</a:t>
+            </a:r>
+            <a:r>
+              <a:rPr lang="ko-KR" altLang="en-US" dirty="0"/>
+              <a:t> </a:t>
+            </a:r>
+            <a:r>
+              <a:rPr lang="ko-KR" altLang="en-US" dirty="0" err="1"/>
+              <a:t>컬링을</a:t>
+            </a:r>
+            <a:r>
+              <a:rPr lang="ko-KR" altLang="en-US" dirty="0"/>
+              <a:t> 하는 방법은 간단하다</a:t>
+            </a:r>
+            <a:r>
+              <a:rPr lang="en-US" altLang="ko-KR" dirty="0"/>
+              <a:t>.</a:t>
+            </a:r>
+          </a:p>
+          <a:p>
+            <a:r>
+              <a:rPr lang="ko-KR" altLang="en-US" dirty="0"/>
+              <a:t>그저 </a:t>
+            </a:r>
+            <a:r>
+              <a:rPr lang="en-US" altLang="ko-KR" dirty="0"/>
+              <a:t>Game </a:t>
+            </a:r>
+            <a:r>
+              <a:rPr lang="ko-KR" altLang="en-US" dirty="0"/>
+              <a:t>구조체에 있는 </a:t>
+            </a:r>
+            <a:r>
+              <a:rPr lang="en-US" altLang="ko-KR" dirty="0" err="1"/>
+              <a:t>RenderTour</a:t>
+            </a:r>
+            <a:r>
+              <a:rPr lang="en-US" altLang="ko-KR" dirty="0"/>
+              <a:t> </a:t>
+            </a:r>
+            <a:r>
+              <a:rPr lang="ko-KR" altLang="en-US" dirty="0"/>
+              <a:t>함수를 호출하면 된다</a:t>
+            </a:r>
+            <a:r>
+              <a:rPr lang="en-US" altLang="ko-KR" dirty="0"/>
+              <a:t>.</a:t>
+            </a:r>
+          </a:p>
+          <a:p>
+            <a:endParaRPr lang="en-US" altLang="ko-KR" dirty="0"/>
+          </a:p>
+          <a:p>
+            <a:r>
+              <a:rPr lang="ko-KR" altLang="en-US" dirty="0"/>
+              <a:t>그럼 오브젝트마다 클래스의 </a:t>
+            </a:r>
+            <a:r>
+              <a:rPr lang="en-US" altLang="ko-KR" dirty="0"/>
+              <a:t>inline static </a:t>
+            </a:r>
+            <a:r>
+              <a:rPr lang="ko-KR" altLang="en-US" dirty="0"/>
+              <a:t>함수 포인터를 이용해 자신의 </a:t>
+            </a:r>
+            <a:r>
+              <a:rPr lang="ko-KR" altLang="en-US" dirty="0" err="1"/>
+              <a:t>맴버함수처럼</a:t>
+            </a:r>
+            <a:r>
+              <a:rPr lang="ko-KR" altLang="en-US" dirty="0"/>
+              <a:t> 호출을 하게 된다</a:t>
+            </a:r>
+            <a:r>
+              <a:rPr lang="en-US" altLang="ko-KR" dirty="0"/>
+              <a:t>.</a:t>
+            </a:r>
+          </a:p>
+          <a:p>
+            <a:r>
+              <a:rPr lang="ko-KR" altLang="en-US" dirty="0"/>
+              <a:t>해당 </a:t>
+            </a:r>
+            <a:r>
+              <a:rPr lang="ko-KR" altLang="en-US" dirty="0" err="1"/>
+              <a:t>함수포인터는</a:t>
+            </a:r>
+            <a:r>
+              <a:rPr lang="ko-KR" altLang="en-US" dirty="0"/>
+              <a:t> 작업을 시작하기 전에 프로그래머가 정할 수 있으며</a:t>
+            </a:r>
+            <a:r>
+              <a:rPr lang="en-US" altLang="ko-KR" dirty="0"/>
+              <a:t>, </a:t>
+            </a:r>
+            <a:r>
+              <a:rPr lang="ko-KR" altLang="en-US" dirty="0"/>
+              <a:t>그것은 </a:t>
+            </a:r>
+            <a:r>
+              <a:rPr lang="en-US" altLang="ko-KR" dirty="0"/>
+              <a:t>Update, Render, </a:t>
+            </a:r>
+            <a:r>
+              <a:rPr lang="en-US" altLang="ko-KR" dirty="0" err="1"/>
+              <a:t>BLASUpdate</a:t>
+            </a:r>
+            <a:r>
+              <a:rPr lang="ko-KR" altLang="en-US" dirty="0"/>
+              <a:t>등</a:t>
+            </a:r>
+            <a:endParaRPr lang="en-US" altLang="ko-KR" dirty="0"/>
+          </a:p>
+          <a:p>
+            <a:r>
+              <a:rPr lang="ko-KR" altLang="en-US" dirty="0"/>
+              <a:t>다양한 작업을 할 수 있다</a:t>
+            </a:r>
+            <a:r>
+              <a:rPr lang="en-US" altLang="ko-KR" dirty="0"/>
+              <a:t>.</a:t>
+            </a:r>
+          </a:p>
+          <a:p>
+            <a:r>
+              <a:rPr lang="ko-KR" altLang="en-US" dirty="0"/>
+              <a:t>또한 </a:t>
+            </a:r>
+            <a:r>
+              <a:rPr lang="en-US" altLang="ko-KR" dirty="0" err="1"/>
+              <a:t>RenderTour</a:t>
+            </a:r>
+            <a:r>
+              <a:rPr lang="en-US" altLang="ko-KR" dirty="0"/>
+              <a:t> </a:t>
+            </a:r>
+            <a:r>
+              <a:rPr lang="ko-KR" altLang="en-US" dirty="0"/>
+              <a:t>함수는 </a:t>
+            </a:r>
+            <a:r>
+              <a:rPr lang="en-US" altLang="ko-KR" dirty="0"/>
+              <a:t>template</a:t>
+            </a:r>
+            <a:r>
+              <a:rPr lang="ko-KR" altLang="en-US" dirty="0"/>
+              <a:t>함수이기 때문에</a:t>
+            </a:r>
+            <a:r>
+              <a:rPr lang="en-US" altLang="ko-KR" dirty="0"/>
+              <a:t>, </a:t>
+            </a:r>
+            <a:r>
+              <a:rPr lang="ko-KR" altLang="en-US" dirty="0" err="1"/>
+              <a:t>탬플릿</a:t>
+            </a:r>
+            <a:r>
+              <a:rPr lang="ko-KR" altLang="en-US" dirty="0"/>
+              <a:t> 변수로 </a:t>
+            </a:r>
+            <a:endParaRPr lang="en-US" altLang="ko-KR" dirty="0"/>
+          </a:p>
+          <a:p>
+            <a:r>
+              <a:rPr lang="ko-KR" altLang="en-US" dirty="0"/>
+              <a:t>어떤 오브젝트에 대해 연산을 </a:t>
+            </a:r>
+            <a:r>
+              <a:rPr lang="ko-KR" altLang="en-US" dirty="0" err="1"/>
+              <a:t>수행할건지도</a:t>
+            </a:r>
+            <a:r>
+              <a:rPr lang="ko-KR" altLang="en-US" dirty="0"/>
+              <a:t> 선택이 가능하다</a:t>
+            </a:r>
+            <a:r>
+              <a:rPr lang="en-US" altLang="ko-KR" dirty="0"/>
+              <a:t>.</a:t>
+            </a:r>
+          </a:p>
+          <a:p>
+            <a:r>
+              <a:rPr lang="ko-KR" altLang="en-US" dirty="0"/>
+              <a:t>내부적으로 </a:t>
+            </a:r>
+            <a:r>
+              <a:rPr lang="en-US" altLang="ko-KR" dirty="0"/>
+              <a:t>if </a:t>
+            </a:r>
+            <a:r>
+              <a:rPr lang="en-US" altLang="ko-KR" dirty="0" err="1"/>
+              <a:t>constexpr</a:t>
+            </a:r>
+            <a:r>
+              <a:rPr lang="en-US" altLang="ko-KR" dirty="0"/>
+              <a:t> </a:t>
+            </a:r>
+            <a:r>
+              <a:rPr lang="ko-KR" altLang="en-US" dirty="0"/>
+              <a:t>로 되어있어서 변수가 다르면 컴파일러는 다른 코드를 만든다</a:t>
+            </a:r>
+            <a:r>
+              <a:rPr lang="en-US" altLang="ko-KR" dirty="0"/>
+              <a:t>.</a:t>
+            </a:r>
+          </a:p>
+        </p:txBody>
+      </p:sp>
+    </p:spTree>
+    <p:extLst>
+      <p:ext uri="{BB962C8B-B14F-4D97-AF65-F5344CB8AC3E}">
+        <p14:creationId xmlns:p14="http://schemas.microsoft.com/office/powerpoint/2010/main" val="263221488"/>
+      </p:ext>
+    </p:extLst>
+  </p:cSld>
+  <p:clrMapOvr>
+    <a:masterClrMapping/>
+  </p:clrMapOvr>
+</p:sld>
+</file>
+
+<file path=ppt/slides/slide11.xml><?xml version="1.0" encoding="utf-8"?>
+<p:sld xmlns:a="http://schemas.openxmlformats.org/drawingml/2006/main" xmlns:r="http://schemas.openxmlformats.org/officeDocument/2006/relationships" xmlns:p="http://schemas.openxmlformats.org/presentationml/2006/main">
+  <p:cSld>
+    <p:spTree>
+      <p:nvGrpSpPr>
+        <p:cNvPr id="1" name="">
+          <a:extLst>
+            <a:ext uri="{FF2B5EF4-FFF2-40B4-BE49-F238E27FC236}">
               <a16:creationId xmlns:a16="http://schemas.microsoft.com/office/drawing/2014/main" id="{3644986B-4189-A705-595E-FAD18984A058}"/>
             </a:ext>
           </a:extLst>
@@ -3832,7 +4293,7 @@
 </p:sld>
 </file>
 
-<file path=ppt/slides/slide11.xml><?xml version="1.0" encoding="utf-8"?>
+<file path=ppt/slides/slide12.xml><?xml version="1.0" encoding="utf-8"?>
 <p:sld xmlns:a="http://schemas.openxmlformats.org/drawingml/2006/main" xmlns:r="http://schemas.openxmlformats.org/officeDocument/2006/relationships" xmlns:p="http://schemas.openxmlformats.org/presentationml/2006/main">
   <p:cSld>
     <p:spTree>
@@ -3904,7 +4365,7 @@
 </p:sld>
 </file>
 
-<file path=ppt/slides/slide12.xml><?xml version="1.0" encoding="utf-8"?>
+<file path=ppt/slides/slide13.xml><?xml version="1.0" encoding="utf-8"?>
 <p:sld xmlns:a="http://schemas.openxmlformats.org/drawingml/2006/main" xmlns:r="http://schemas.openxmlformats.org/officeDocument/2006/relationships" xmlns:p="http://schemas.openxmlformats.org/presentationml/2006/main">
   <p:cSld>
     <p:spTree>
@@ -4020,7 +4481,7 @@
 </p:sld>
 </file>
 
-<file path=ppt/slides/slide13.xml><?xml version="1.0" encoding="utf-8"?>
+<file path=ppt/slides/slide14.xml><?xml version="1.0" encoding="utf-8"?>
 <p:sld xmlns:a="http://schemas.openxmlformats.org/drawingml/2006/main" xmlns:r="http://schemas.openxmlformats.org/officeDocument/2006/relationships" xmlns:p="http://schemas.openxmlformats.org/presentationml/2006/main">
   <p:cSld>
     <p:spTree>
@@ -4092,7 +4553,7 @@
 </p:sld>
 </file>
 
-<file path=ppt/slides/slide14.xml><?xml version="1.0" encoding="utf-8"?>
+<file path=ppt/slides/slide15.xml><?xml version="1.0" encoding="utf-8"?>
 <p:sld xmlns:a="http://schemas.openxmlformats.org/drawingml/2006/main" xmlns:r="http://schemas.openxmlformats.org/officeDocument/2006/relationships" xmlns:p="http://schemas.openxmlformats.org/presentationml/2006/main">
   <p:cSld>
     <p:spTree>
@@ -4164,7 +4625,7 @@
 </p:sld>
 </file>
 
-<file path=ppt/slides/slide15.xml><?xml version="1.0" encoding="utf-8"?>
+<file path=ppt/slides/slide16.xml><?xml version="1.0" encoding="utf-8"?>
 <p:sld xmlns:a="http://schemas.openxmlformats.org/drawingml/2006/main" xmlns:r="http://schemas.openxmlformats.org/officeDocument/2006/relationships" xmlns:p="http://schemas.openxmlformats.org/presentationml/2006/main">
   <p:cSld>
     <p:spTree>
@@ -4236,7 +4697,7 @@
 </p:sld>
 </file>
 
-<file path=ppt/slides/slide16.xml><?xml version="1.0" encoding="utf-8"?>
+<file path=ppt/slides/slide17.xml><?xml version="1.0" encoding="utf-8"?>
 <p:sld xmlns:a="http://schemas.openxmlformats.org/drawingml/2006/main" xmlns:r="http://schemas.openxmlformats.org/officeDocument/2006/relationships" xmlns:p="http://schemas.openxmlformats.org/presentationml/2006/main">
   <p:cSld>
     <p:spTree>
@@ -4312,7 +4773,7 @@
 </p:sld>
 </file>
 
-<file path=ppt/slides/slide17.xml><?xml version="1.0" encoding="utf-8"?>
+<file path=ppt/slides/slide18.xml><?xml version="1.0" encoding="utf-8"?>
 <p:sld xmlns:a="http://schemas.openxmlformats.org/drawingml/2006/main" xmlns:r="http://schemas.openxmlformats.org/officeDocument/2006/relationships" xmlns:p="http://schemas.openxmlformats.org/presentationml/2006/main">
   <p:cSld>
     <p:spTree>
@@ -4384,7 +4845,7 @@
 </p:sld>
 </file>
 
-<file path=ppt/slides/slide18.xml><?xml version="1.0" encoding="utf-8"?>
+<file path=ppt/slides/slide19.xml><?xml version="1.0" encoding="utf-8"?>
 <p:sld xmlns:a="http://schemas.openxmlformats.org/drawingml/2006/main" xmlns:r="http://schemas.openxmlformats.org/officeDocument/2006/relationships" xmlns:p="http://schemas.openxmlformats.org/presentationml/2006/main">
   <p:cSld>
     <p:spTree>
@@ -5053,728 +5514,6 @@
     <p:extLst>
       <p:ext uri="{BB962C8B-B14F-4D97-AF65-F5344CB8AC3E}">
         <p14:creationId xmlns:p14="http://schemas.microsoft.com/office/powerpoint/2010/main" val="2958472303"/>
-      </p:ext>
-    </p:extLst>
-  </p:cSld>
-  <p:clrMapOvr>
-    <a:masterClrMapping/>
-  </p:clrMapOvr>
-</p:sld>
-</file>
-
-<file path=ppt/slides/slide19.xml><?xml version="1.0" encoding="utf-8"?>
-<p:sld xmlns:a="http://schemas.openxmlformats.org/drawingml/2006/main" xmlns:r="http://schemas.openxmlformats.org/officeDocument/2006/relationships" xmlns:p="http://schemas.openxmlformats.org/presentationml/2006/main">
-  <p:cSld>
-    <p:spTree>
-      <p:nvGrpSpPr>
-        <p:cNvPr id="1" name="">
-          <a:extLst>
-            <a:ext uri="{FF2B5EF4-FFF2-40B4-BE49-F238E27FC236}">
-              <a16:creationId xmlns:a16="http://schemas.microsoft.com/office/drawing/2014/main" id="{F1BEC5B2-FCBE-B8B8-ED5E-04C115E9B7DB}"/>
-            </a:ext>
-          </a:extLst>
-        </p:cNvPr>
-        <p:cNvGrpSpPr/>
-        <p:nvPr/>
-      </p:nvGrpSpPr>
-      <p:grpSpPr>
-        <a:xfrm>
-          <a:off x="0" y="0"/>
-          <a:ext cx="0" cy="0"/>
-          <a:chOff x="0" y="0"/>
-          <a:chExt cx="0" cy="0"/>
-        </a:xfrm>
-      </p:grpSpPr>
-      <p:sp>
-        <p:nvSpPr>
-          <p:cNvPr id="2" name="제목 1">
-            <a:extLst>
-              <a:ext uri="{FF2B5EF4-FFF2-40B4-BE49-F238E27FC236}">
-                <a16:creationId xmlns:a16="http://schemas.microsoft.com/office/drawing/2014/main" id="{91E04B38-937C-7497-BCE3-E08EE548A656}"/>
-              </a:ext>
-            </a:extLst>
-          </p:cNvPr>
-          <p:cNvSpPr>
-            <a:spLocks noGrp="1"/>
-          </p:cNvSpPr>
-          <p:nvPr>
-            <p:ph type="title" idx="4294967295"/>
-          </p:nvPr>
-        </p:nvSpPr>
-        <p:spPr>
-          <a:xfrm>
-            <a:off x="0" y="18255"/>
-            <a:ext cx="10515600" cy="850425"/>
-          </a:xfrm>
-        </p:spPr>
-        <p:txBody>
-          <a:bodyPr>
-            <a:normAutofit/>
-          </a:bodyPr>
-          <a:lstStyle/>
-          <a:p>
-            <a:r>
-              <a:rPr lang="en-US" altLang="ko-KR" sz="5400" dirty="0"/>
-              <a:t>Raytracing</a:t>
-            </a:r>
-            <a:endParaRPr lang="ko-KR" altLang="en-US" sz="5400" dirty="0"/>
-          </a:p>
-        </p:txBody>
-      </p:sp>
-      <p:sp>
-        <p:nvSpPr>
-          <p:cNvPr id="3" name="TextBox 2">
-            <a:extLst>
-              <a:ext uri="{FF2B5EF4-FFF2-40B4-BE49-F238E27FC236}">
-                <a16:creationId xmlns:a16="http://schemas.microsoft.com/office/drawing/2014/main" id="{8EDD4CD7-816C-FA9A-C461-BB44F19645FC}"/>
-              </a:ext>
-            </a:extLst>
-          </p:cNvPr>
-          <p:cNvSpPr txBox="1"/>
-          <p:nvPr/>
-        </p:nvSpPr>
-        <p:spPr>
-          <a:xfrm>
-            <a:off x="180093" y="1053319"/>
-            <a:ext cx="1412566" cy="369332"/>
-          </a:xfrm>
-          <a:prstGeom prst="rect">
-            <a:avLst/>
-          </a:prstGeom>
-          <a:noFill/>
-          <a:ln w="25400">
-            <a:solidFill>
-              <a:schemeClr val="tx1"/>
-            </a:solidFill>
-          </a:ln>
-        </p:spPr>
-        <p:txBody>
-          <a:bodyPr wrap="none" rtlCol="0">
-            <a:spAutoFit/>
-          </a:bodyPr>
-          <a:lstStyle/>
-          <a:p>
-            <a:r>
-              <a:rPr lang="en-US" altLang="ko-KR" dirty="0"/>
-              <a:t>Object</a:t>
-            </a:r>
-            <a:r>
-              <a:rPr lang="ko-KR" altLang="en-US" dirty="0"/>
-              <a:t> </a:t>
-            </a:r>
-            <a:r>
-              <a:rPr lang="ko-KR" altLang="en-US" dirty="0" err="1"/>
-              <a:t>컬링</a:t>
-            </a:r>
-            <a:endParaRPr lang="ko-KR" altLang="en-US" dirty="0"/>
-          </a:p>
-        </p:txBody>
-      </p:sp>
-      <p:sp>
-        <p:nvSpPr>
-          <p:cNvPr id="4" name="TextBox 3">
-            <a:extLst>
-              <a:ext uri="{FF2B5EF4-FFF2-40B4-BE49-F238E27FC236}">
-                <a16:creationId xmlns:a16="http://schemas.microsoft.com/office/drawing/2014/main" id="{2A3B1B66-3C57-318E-9C76-6DC14B0977E1}"/>
-              </a:ext>
-            </a:extLst>
-          </p:cNvPr>
-          <p:cNvSpPr txBox="1"/>
-          <p:nvPr/>
-        </p:nvSpPr>
-        <p:spPr>
-          <a:xfrm>
-            <a:off x="6096000" y="1053319"/>
-            <a:ext cx="2778325" cy="369332"/>
-          </a:xfrm>
-          <a:prstGeom prst="rect">
-            <a:avLst/>
-          </a:prstGeom>
-          <a:noFill/>
-          <a:ln w="25400">
-            <a:solidFill>
-              <a:schemeClr val="tx1"/>
-            </a:solidFill>
-          </a:ln>
-        </p:spPr>
-        <p:txBody>
-          <a:bodyPr wrap="none" rtlCol="0">
-            <a:spAutoFit/>
-          </a:bodyPr>
-          <a:lstStyle/>
-          <a:p>
-            <a:r>
-              <a:rPr lang="ko-KR" altLang="en-US" dirty="0"/>
-              <a:t>드로우 콜 </a:t>
-            </a:r>
-            <a:r>
-              <a:rPr lang="en-US" altLang="ko-KR" dirty="0"/>
-              <a:t>&amp; </a:t>
-            </a:r>
-            <a:r>
-              <a:rPr lang="ko-KR" altLang="en-US" dirty="0" err="1"/>
-              <a:t>버택스</a:t>
-            </a:r>
-            <a:r>
-              <a:rPr lang="ko-KR" altLang="en-US" dirty="0"/>
-              <a:t> 처리</a:t>
-            </a:r>
-          </a:p>
-        </p:txBody>
-      </p:sp>
-      <p:sp>
-        <p:nvSpPr>
-          <p:cNvPr id="5" name="TextBox 4">
-            <a:extLst>
-              <a:ext uri="{FF2B5EF4-FFF2-40B4-BE49-F238E27FC236}">
-                <a16:creationId xmlns:a16="http://schemas.microsoft.com/office/drawing/2014/main" id="{69ACBFBB-3512-2E4D-9613-056B18232163}"/>
-              </a:ext>
-            </a:extLst>
-          </p:cNvPr>
-          <p:cNvSpPr txBox="1"/>
-          <p:nvPr/>
-        </p:nvSpPr>
-        <p:spPr>
-          <a:xfrm>
-            <a:off x="180093" y="3127925"/>
-            <a:ext cx="1790875" cy="369332"/>
-          </a:xfrm>
-          <a:prstGeom prst="rect">
-            <a:avLst/>
-          </a:prstGeom>
-          <a:noFill/>
-          <a:ln w="25400">
-            <a:solidFill>
-              <a:schemeClr val="tx1"/>
-            </a:solidFill>
-          </a:ln>
-        </p:spPr>
-        <p:txBody>
-          <a:bodyPr wrap="none" rtlCol="0">
-            <a:spAutoFit/>
-          </a:bodyPr>
-          <a:lstStyle/>
-          <a:p>
-            <a:r>
-              <a:rPr lang="en-US" altLang="ko-KR" dirty="0"/>
-              <a:t>Light </a:t>
-            </a:r>
-            <a:r>
-              <a:rPr lang="ko-KR" altLang="en-US" dirty="0"/>
-              <a:t>처리</a:t>
-            </a:r>
-            <a:r>
-              <a:rPr lang="en-US" altLang="ko-KR" dirty="0"/>
-              <a:t> </a:t>
-            </a:r>
-            <a:r>
-              <a:rPr lang="ko-KR" altLang="en-US" dirty="0"/>
-              <a:t>방법</a:t>
-            </a:r>
-          </a:p>
-        </p:txBody>
-      </p:sp>
-      <p:sp>
-        <p:nvSpPr>
-          <p:cNvPr id="6" name="TextBox 5">
-            <a:extLst>
-              <a:ext uri="{FF2B5EF4-FFF2-40B4-BE49-F238E27FC236}">
-                <a16:creationId xmlns:a16="http://schemas.microsoft.com/office/drawing/2014/main" id="{8336F82D-A44D-11C5-642B-D050A1486AA0}"/>
-              </a:ext>
-            </a:extLst>
-          </p:cNvPr>
-          <p:cNvSpPr txBox="1"/>
-          <p:nvPr/>
-        </p:nvSpPr>
-        <p:spPr>
-          <a:xfrm>
-            <a:off x="6096000" y="3145596"/>
-            <a:ext cx="2252540" cy="369332"/>
-          </a:xfrm>
-          <a:prstGeom prst="rect">
-            <a:avLst/>
-          </a:prstGeom>
-          <a:noFill/>
-          <a:ln w="25400">
-            <a:solidFill>
-              <a:schemeClr val="tx1"/>
-            </a:solidFill>
-          </a:ln>
-        </p:spPr>
-        <p:txBody>
-          <a:bodyPr wrap="none" rtlCol="0">
-            <a:spAutoFit/>
-          </a:bodyPr>
-          <a:lstStyle/>
-          <a:p>
-            <a:r>
-              <a:rPr lang="en-US" altLang="ko-KR" dirty="0" err="1"/>
-              <a:t>GameObject</a:t>
-            </a:r>
-            <a:r>
-              <a:rPr lang="ko-KR" altLang="en-US" dirty="0"/>
-              <a:t>의 종류</a:t>
-            </a:r>
-          </a:p>
-        </p:txBody>
-      </p:sp>
-      <p:sp>
-        <p:nvSpPr>
-          <p:cNvPr id="7" name="TextBox 6">
-            <a:extLst>
-              <a:ext uri="{FF2B5EF4-FFF2-40B4-BE49-F238E27FC236}">
-                <a16:creationId xmlns:a16="http://schemas.microsoft.com/office/drawing/2014/main" id="{6FB941C1-8B60-2278-B4C7-C5F999B335D3}"/>
-              </a:ext>
-            </a:extLst>
-          </p:cNvPr>
-          <p:cNvSpPr txBox="1"/>
-          <p:nvPr/>
-        </p:nvSpPr>
-        <p:spPr>
-          <a:xfrm>
-            <a:off x="180092" y="5202531"/>
-            <a:ext cx="877163" cy="369332"/>
-          </a:xfrm>
-          <a:prstGeom prst="rect">
-            <a:avLst/>
-          </a:prstGeom>
-          <a:noFill/>
-          <a:ln w="25400">
-            <a:solidFill>
-              <a:schemeClr val="tx1"/>
-            </a:solidFill>
-          </a:ln>
-        </p:spPr>
-        <p:txBody>
-          <a:bodyPr wrap="none" rtlCol="0">
-            <a:spAutoFit/>
-          </a:bodyPr>
-          <a:lstStyle/>
-          <a:p>
-            <a:r>
-              <a:rPr lang="ko-KR" altLang="en-US" dirty="0"/>
-              <a:t>그림자</a:t>
-            </a:r>
-          </a:p>
-        </p:txBody>
-      </p:sp>
-      <p:sp>
-        <p:nvSpPr>
-          <p:cNvPr id="8" name="TextBox 7">
-            <a:extLst>
-              <a:ext uri="{FF2B5EF4-FFF2-40B4-BE49-F238E27FC236}">
-                <a16:creationId xmlns:a16="http://schemas.microsoft.com/office/drawing/2014/main" id="{B7A03762-B42B-6DE9-B229-6BA898BFAE60}"/>
-              </a:ext>
-            </a:extLst>
-          </p:cNvPr>
-          <p:cNvSpPr txBox="1"/>
-          <p:nvPr/>
-        </p:nvSpPr>
-        <p:spPr>
-          <a:xfrm>
-            <a:off x="6096000" y="5215181"/>
-            <a:ext cx="646331" cy="369332"/>
-          </a:xfrm>
-          <a:prstGeom prst="rect">
-            <a:avLst/>
-          </a:prstGeom>
-          <a:noFill/>
-          <a:ln w="25400">
-            <a:solidFill>
-              <a:schemeClr val="tx1"/>
-            </a:solidFill>
-          </a:ln>
-        </p:spPr>
-        <p:txBody>
-          <a:bodyPr wrap="none" rtlCol="0">
-            <a:spAutoFit/>
-          </a:bodyPr>
-          <a:lstStyle/>
-          <a:p>
-            <a:r>
-              <a:rPr lang="ko-KR" altLang="en-US" dirty="0"/>
-              <a:t>반사</a:t>
-            </a:r>
-          </a:p>
-        </p:txBody>
-      </p:sp>
-      <mc:AlternateContent xmlns:mc="http://schemas.openxmlformats.org/markup-compatibility/2006" xmlns:pslz="http://schemas.microsoft.com/office/powerpoint/2016/slidezoom">
-        <mc:Choice Requires="pslz">
-          <p:graphicFrame>
-            <p:nvGraphicFramePr>
-              <p:cNvPr id="10" name="슬라이드 확대/축소 9">
-                <a:extLst>
-                  <a:ext uri="{FF2B5EF4-FFF2-40B4-BE49-F238E27FC236}">
-                    <a16:creationId xmlns:a16="http://schemas.microsoft.com/office/drawing/2014/main" id="{377F04DF-8C5B-CA8D-4197-8F4BF5B5FFF6}"/>
-                  </a:ext>
-                </a:extLst>
-              </p:cNvPr>
-              <p:cNvGraphicFramePr>
-                <a:graphicFrameLocks noChangeAspect="1"/>
-              </p:cNvGraphicFramePr>
-              <p:nvPr>
-                <p:extLst>
-                  <p:ext uri="{D42A27DB-BD31-4B8C-83A1-F6EECF244321}">
-                    <p14:modId xmlns:p14="http://schemas.microsoft.com/office/powerpoint/2010/main" val="1309643042"/>
-                  </p:ext>
-                </p:extLst>
-              </p:nvPr>
-            </p:nvGraphicFramePr>
-            <p:xfrm>
-              <a:off x="6096000" y="3623153"/>
-              <a:ext cx="2615381" cy="1471152"/>
-            </p:xfrm>
-            <a:graphic>
-              <a:graphicData uri="http://schemas.microsoft.com/office/powerpoint/2016/slidezoom">
-                <pslz:sldZm>
-                  <pslz:sldZmObj sldId="275" cId="1216493664">
-                    <pslz:zmPr id="{8943EDC0-607D-41EF-AEAF-4ED0CAF5FDEC}" returnToParent="0" transitionDur="1000">
-                      <p166:blipFill xmlns:p166="http://schemas.microsoft.com/office/powerpoint/2016/6/main">
-                        <a:blip r:embed="rId2"/>
-                        <a:stretch>
-                          <a:fillRect/>
-                        </a:stretch>
-                      </p166:blipFill>
-                      <p166:spPr xmlns:p166="http://schemas.microsoft.com/office/powerpoint/2016/6/main">
-                        <a:xfrm>
-                          <a:off x="0" y="0"/>
-                          <a:ext cx="2615381" cy="1471152"/>
-                        </a:xfrm>
-                        <a:prstGeom prst="rect">
-                          <a:avLst/>
-                        </a:prstGeom>
-                        <a:ln w="3175">
-                          <a:solidFill>
-                            <a:prstClr val="ltGray"/>
-                          </a:solidFill>
-                        </a:ln>
-                      </p166:spPr>
-                    </pslz:zmPr>
-                  </pslz:sldZmObj>
-                </pslz:sldZm>
-              </a:graphicData>
-            </a:graphic>
-          </p:graphicFrame>
-        </mc:Choice>
-        <mc:Fallback xmlns="">
-          <p:pic>
-            <p:nvPicPr>
-              <p:cNvPr id="10" name="슬라이드 확대/축소 9">
-                <a:hlinkClick r:id="rId3" action="ppaction://hlinksldjump"/>
-                <a:extLst>
-                  <a:ext uri="{FF2B5EF4-FFF2-40B4-BE49-F238E27FC236}">
-                    <a16:creationId xmlns:a16="http://schemas.microsoft.com/office/drawing/2014/main" id="{377F04DF-8C5B-CA8D-4197-8F4BF5B5FFF6}"/>
-                  </a:ext>
-                </a:extLst>
-              </p:cNvPr>
-              <p:cNvPicPr>
-                <a:picLocks noGrp="1" noRot="1" noChangeAspect="1" noMove="1" noResize="1" noEditPoints="1" noAdjustHandles="1" noChangeArrowheads="1" noChangeShapeType="1"/>
-              </p:cNvPicPr>
-              <p:nvPr/>
-            </p:nvPicPr>
-            <p:blipFill>
-              <a:blip r:embed="rId4"/>
-              <a:stretch>
-                <a:fillRect/>
-              </a:stretch>
-            </p:blipFill>
-            <p:spPr>
-              <a:xfrm>
-                <a:off x="6096000" y="3623153"/>
-                <a:ext cx="2615381" cy="1471152"/>
-              </a:xfrm>
-              <a:prstGeom prst="rect">
-                <a:avLst/>
-              </a:prstGeom>
-              <a:ln w="3175">
-                <a:solidFill>
-                  <a:prstClr val="ltGray"/>
-                </a:solidFill>
-              </a:ln>
-            </p:spPr>
-          </p:pic>
-        </mc:Fallback>
-      </mc:AlternateContent>
-      <mc:AlternateContent xmlns:mc="http://schemas.openxmlformats.org/markup-compatibility/2006" xmlns:pslz="http://schemas.microsoft.com/office/powerpoint/2016/slidezoom">
-        <mc:Choice Requires="pslz">
-          <p:graphicFrame>
-            <p:nvGraphicFramePr>
-              <p:cNvPr id="12" name="슬라이드 확대/축소 11">
-                <a:extLst>
-                  <a:ext uri="{FF2B5EF4-FFF2-40B4-BE49-F238E27FC236}">
-                    <a16:creationId xmlns:a16="http://schemas.microsoft.com/office/drawing/2014/main" id="{8F29BC11-36B9-45F7-4879-A46D2C89FB68}"/>
-                  </a:ext>
-                </a:extLst>
-              </p:cNvPr>
-              <p:cNvGraphicFramePr>
-                <a:graphicFrameLocks noChangeAspect="1"/>
-              </p:cNvGraphicFramePr>
-              <p:nvPr>
-                <p:extLst>
-                  <p:ext uri="{D42A27DB-BD31-4B8C-83A1-F6EECF244321}">
-                    <p14:modId xmlns:p14="http://schemas.microsoft.com/office/powerpoint/2010/main" val="3106977482"/>
-                  </p:ext>
-                </p:extLst>
-              </p:nvPr>
-            </p:nvGraphicFramePr>
-            <p:xfrm>
-              <a:off x="8711381" y="3623153"/>
-              <a:ext cx="2615381" cy="1471152"/>
-            </p:xfrm>
-            <a:graphic>
-              <a:graphicData uri="http://schemas.microsoft.com/office/powerpoint/2016/slidezoom">
-                <pslz:sldZm>
-                  <pslz:sldZmObj sldId="276" cId="904325592">
-                    <pslz:zmPr id="{9E0EBCD9-BD83-4563-B14E-89E01394AE33}" returnToParent="0" transitionDur="1000">
-                      <p166:blipFill xmlns:p166="http://schemas.microsoft.com/office/powerpoint/2016/6/main">
-                        <a:blip r:embed="rId5"/>
-                        <a:stretch>
-                          <a:fillRect/>
-                        </a:stretch>
-                      </p166:blipFill>
-                      <p166:spPr xmlns:p166="http://schemas.microsoft.com/office/powerpoint/2016/6/main">
-                        <a:xfrm>
-                          <a:off x="0" y="0"/>
-                          <a:ext cx="2615381" cy="1471152"/>
-                        </a:xfrm>
-                        <a:prstGeom prst="rect">
-                          <a:avLst/>
-                        </a:prstGeom>
-                        <a:ln w="3175">
-                          <a:solidFill>
-                            <a:prstClr val="ltGray"/>
-                          </a:solidFill>
-                        </a:ln>
-                      </p166:spPr>
-                    </pslz:zmPr>
-                  </pslz:sldZmObj>
-                </pslz:sldZm>
-              </a:graphicData>
-            </a:graphic>
-          </p:graphicFrame>
-        </mc:Choice>
-        <mc:Fallback xmlns="">
-          <p:pic>
-            <p:nvPicPr>
-              <p:cNvPr id="12" name="슬라이드 확대/축소 11">
-                <a:hlinkClick r:id="rId6" action="ppaction://hlinksldjump"/>
-                <a:extLst>
-                  <a:ext uri="{FF2B5EF4-FFF2-40B4-BE49-F238E27FC236}">
-                    <a16:creationId xmlns:a16="http://schemas.microsoft.com/office/drawing/2014/main" id="{8F29BC11-36B9-45F7-4879-A46D2C89FB68}"/>
-                  </a:ext>
-                </a:extLst>
-              </p:cNvPr>
-              <p:cNvPicPr>
-                <a:picLocks noGrp="1" noRot="1" noChangeAspect="1" noMove="1" noResize="1" noEditPoints="1" noAdjustHandles="1" noChangeArrowheads="1" noChangeShapeType="1"/>
-              </p:cNvPicPr>
-              <p:nvPr/>
-            </p:nvPicPr>
-            <p:blipFill>
-              <a:blip r:embed="rId7"/>
-              <a:stretch>
-                <a:fillRect/>
-              </a:stretch>
-            </p:blipFill>
-            <p:spPr>
-              <a:xfrm>
-                <a:off x="8711381" y="3623153"/>
-                <a:ext cx="2615381" cy="1471152"/>
-              </a:xfrm>
-              <a:prstGeom prst="rect">
-                <a:avLst/>
-              </a:prstGeom>
-              <a:ln w="3175">
-                <a:solidFill>
-                  <a:prstClr val="ltGray"/>
-                </a:solidFill>
-              </a:ln>
-            </p:spPr>
-          </p:pic>
-        </mc:Fallback>
-      </mc:AlternateContent>
-      <p:sp>
-        <p:nvSpPr>
-          <p:cNvPr id="13" name="TextBox 12">
-            <a:extLst>
-              <a:ext uri="{FF2B5EF4-FFF2-40B4-BE49-F238E27FC236}">
-                <a16:creationId xmlns:a16="http://schemas.microsoft.com/office/drawing/2014/main" id="{2995F415-D58E-73A2-0A6E-7795F7D25400}"/>
-              </a:ext>
-            </a:extLst>
-          </p:cNvPr>
-          <p:cNvSpPr txBox="1"/>
-          <p:nvPr/>
-        </p:nvSpPr>
-        <p:spPr>
-          <a:xfrm>
-            <a:off x="91601" y="1467599"/>
-            <a:ext cx="5779018" cy="923330"/>
-          </a:xfrm>
-          <a:prstGeom prst="rect">
-            <a:avLst/>
-          </a:prstGeom>
-          <a:noFill/>
-        </p:spPr>
-        <p:txBody>
-          <a:bodyPr wrap="none" rtlCol="0">
-            <a:spAutoFit/>
-          </a:bodyPr>
-          <a:lstStyle/>
-          <a:p>
-            <a:r>
-              <a:rPr lang="en-US" altLang="ko-KR" dirty="0" err="1"/>
-              <a:t>SkinMesh</a:t>
-            </a:r>
-            <a:r>
-              <a:rPr lang="ko-KR" altLang="en-US" dirty="0"/>
-              <a:t>의 </a:t>
-            </a:r>
-            <a:r>
-              <a:rPr lang="en-US" altLang="ko-KR" dirty="0"/>
-              <a:t>BLAS Update</a:t>
-            </a:r>
-            <a:r>
-              <a:rPr lang="ko-KR" altLang="en-US" dirty="0"/>
-              <a:t>의 경우 </a:t>
-            </a:r>
-            <a:r>
-              <a:rPr lang="en-US" altLang="ko-KR" dirty="0" err="1"/>
-              <a:t>game.RenderTour</a:t>
-            </a:r>
-            <a:r>
-              <a:rPr lang="ko-KR" altLang="en-US" dirty="0"/>
-              <a:t>를</a:t>
-            </a:r>
-            <a:endParaRPr lang="en-US" altLang="ko-KR" dirty="0"/>
-          </a:p>
-          <a:p>
-            <a:r>
-              <a:rPr lang="ko-KR" altLang="en-US" dirty="0"/>
-              <a:t>사용해 보이는 스킨 </a:t>
-            </a:r>
-            <a:r>
-              <a:rPr lang="ko-KR" altLang="en-US" dirty="0" err="1"/>
-              <a:t>메쉬에</a:t>
-            </a:r>
-            <a:r>
-              <a:rPr lang="ko-KR" altLang="en-US" dirty="0"/>
-              <a:t> 대해서만 </a:t>
-            </a:r>
-            <a:endParaRPr lang="en-US" altLang="ko-KR" dirty="0"/>
-          </a:p>
-          <a:p>
-            <a:r>
-              <a:rPr lang="ko-KR" altLang="en-US" dirty="0"/>
-              <a:t>업데이트를 수행한다</a:t>
-            </a:r>
-            <a:r>
-              <a:rPr lang="en-US" altLang="ko-KR" dirty="0"/>
-              <a:t>.</a:t>
-            </a:r>
-            <a:endParaRPr lang="ko-KR" altLang="en-US" dirty="0"/>
-          </a:p>
-        </p:txBody>
-      </p:sp>
-      <mc:AlternateContent xmlns:mc="http://schemas.openxmlformats.org/markup-compatibility/2006" xmlns:pslz="http://schemas.microsoft.com/office/powerpoint/2016/slidezoom">
-        <mc:Choice Requires="pslz">
-          <p:graphicFrame>
-            <p:nvGraphicFramePr>
-              <p:cNvPr id="11" name="슬라이드 확대/축소 10">
-                <a:extLst>
-                  <a:ext uri="{FF2B5EF4-FFF2-40B4-BE49-F238E27FC236}">
-                    <a16:creationId xmlns:a16="http://schemas.microsoft.com/office/drawing/2014/main" id="{5D85872A-69A6-B12A-6362-54B353177F6F}"/>
-                  </a:ext>
-                </a:extLst>
-              </p:cNvPr>
-              <p:cNvGraphicFramePr>
-                <a:graphicFrameLocks noChangeAspect="1"/>
-              </p:cNvGraphicFramePr>
-              <p:nvPr>
-                <p:extLst>
-                  <p:ext uri="{D42A27DB-BD31-4B8C-83A1-F6EECF244321}">
-                    <p14:modId xmlns:p14="http://schemas.microsoft.com/office/powerpoint/2010/main" val="1374667222"/>
-                  </p:ext>
-                </p:extLst>
-              </p:nvPr>
-            </p:nvGraphicFramePr>
-            <p:xfrm>
-              <a:off x="6096000" y="1520347"/>
-              <a:ext cx="2778325" cy="1562808"/>
-            </p:xfrm>
-            <a:graphic>
-              <a:graphicData uri="http://schemas.microsoft.com/office/powerpoint/2016/slidezoom">
-                <pslz:sldZm>
-                  <pslz:sldZmObj sldId="286" cId="471672495">
-                    <pslz:zmPr id="{47ADBA83-62CC-4C39-B974-4F5B113AD202}" returnToParent="0" transitionDur="1000">
-                      <p166:blipFill xmlns:p166="http://schemas.microsoft.com/office/powerpoint/2016/6/main">
-                        <a:blip r:embed="rId8"/>
-                        <a:stretch>
-                          <a:fillRect/>
-                        </a:stretch>
-                      </p166:blipFill>
-                      <p166:spPr xmlns:p166="http://schemas.microsoft.com/office/powerpoint/2016/6/main">
-                        <a:xfrm>
-                          <a:off x="0" y="0"/>
-                          <a:ext cx="2778325" cy="1562808"/>
-                        </a:xfrm>
-                        <a:prstGeom prst="rect">
-                          <a:avLst/>
-                        </a:prstGeom>
-                        <a:ln w="3175">
-                          <a:solidFill>
-                            <a:prstClr val="ltGray"/>
-                          </a:solidFill>
-                        </a:ln>
-                      </p166:spPr>
-                    </pslz:zmPr>
-                  </pslz:sldZmObj>
-                </pslz:sldZm>
-              </a:graphicData>
-            </a:graphic>
-          </p:graphicFrame>
-        </mc:Choice>
-        <mc:Fallback xmlns="">
-          <p:pic>
-            <p:nvPicPr>
-              <p:cNvPr id="11" name="슬라이드 확대/축소 10">
-                <a:hlinkClick r:id="rId3" action="ppaction://hlinksldjump"/>
-                <a:extLst>
-                  <a:ext uri="{FF2B5EF4-FFF2-40B4-BE49-F238E27FC236}">
-                    <a16:creationId xmlns:a16="http://schemas.microsoft.com/office/drawing/2014/main" id="{5D85872A-69A6-B12A-6362-54B353177F6F}"/>
-                  </a:ext>
-                </a:extLst>
-              </p:cNvPr>
-              <p:cNvPicPr>
-                <a:picLocks noGrp="1" noRot="1" noChangeAspect="1" noMove="1" noResize="1" noEditPoints="1" noAdjustHandles="1" noChangeArrowheads="1" noChangeShapeType="1"/>
-              </p:cNvPicPr>
-              <p:nvPr/>
-            </p:nvPicPr>
-            <p:blipFill>
-              <a:blip r:embed="rId9"/>
-              <a:stretch>
-                <a:fillRect/>
-              </a:stretch>
-            </p:blipFill>
-            <p:spPr>
-              <a:xfrm>
-                <a:off x="6096000" y="1520347"/>
-                <a:ext cx="2778325" cy="1562808"/>
-              </a:xfrm>
-              <a:prstGeom prst="rect">
-                <a:avLst/>
-              </a:prstGeom>
-              <a:ln w="3175">
-                <a:solidFill>
-                  <a:prstClr val="ltGray"/>
-                </a:solidFill>
-              </a:ln>
-            </p:spPr>
-          </p:pic>
-        </mc:Fallback>
-      </mc:AlternateContent>
-    </p:spTree>
-    <p:extLst>
-      <p:ext uri="{BB962C8B-B14F-4D97-AF65-F5344CB8AC3E}">
-        <p14:creationId xmlns:p14="http://schemas.microsoft.com/office/powerpoint/2010/main" val="3813102566"/>
       </p:ext>
     </p:extLst>
   </p:cSld>
@@ -6147,6 +5886,728 @@
         <p:cNvPr id="1" name="">
           <a:extLst>
             <a:ext uri="{FF2B5EF4-FFF2-40B4-BE49-F238E27FC236}">
+              <a16:creationId xmlns:a16="http://schemas.microsoft.com/office/drawing/2014/main" id="{F1BEC5B2-FCBE-B8B8-ED5E-04C115E9B7DB}"/>
+            </a:ext>
+          </a:extLst>
+        </p:cNvPr>
+        <p:cNvGrpSpPr/>
+        <p:nvPr/>
+      </p:nvGrpSpPr>
+      <p:grpSpPr>
+        <a:xfrm>
+          <a:off x="0" y="0"/>
+          <a:ext cx="0" cy="0"/>
+          <a:chOff x="0" y="0"/>
+          <a:chExt cx="0" cy="0"/>
+        </a:xfrm>
+      </p:grpSpPr>
+      <p:sp>
+        <p:nvSpPr>
+          <p:cNvPr id="2" name="제목 1">
+            <a:extLst>
+              <a:ext uri="{FF2B5EF4-FFF2-40B4-BE49-F238E27FC236}">
+                <a16:creationId xmlns:a16="http://schemas.microsoft.com/office/drawing/2014/main" id="{91E04B38-937C-7497-BCE3-E08EE548A656}"/>
+              </a:ext>
+            </a:extLst>
+          </p:cNvPr>
+          <p:cNvSpPr>
+            <a:spLocks noGrp="1"/>
+          </p:cNvSpPr>
+          <p:nvPr>
+            <p:ph type="title" idx="4294967295"/>
+          </p:nvPr>
+        </p:nvSpPr>
+        <p:spPr>
+          <a:xfrm>
+            <a:off x="0" y="18255"/>
+            <a:ext cx="10515600" cy="850425"/>
+          </a:xfrm>
+        </p:spPr>
+        <p:txBody>
+          <a:bodyPr>
+            <a:normAutofit/>
+          </a:bodyPr>
+          <a:lstStyle/>
+          <a:p>
+            <a:r>
+              <a:rPr lang="en-US" altLang="ko-KR" sz="5400" dirty="0"/>
+              <a:t>Raytracing</a:t>
+            </a:r>
+            <a:endParaRPr lang="ko-KR" altLang="en-US" sz="5400" dirty="0"/>
+          </a:p>
+        </p:txBody>
+      </p:sp>
+      <p:sp>
+        <p:nvSpPr>
+          <p:cNvPr id="3" name="TextBox 2">
+            <a:extLst>
+              <a:ext uri="{FF2B5EF4-FFF2-40B4-BE49-F238E27FC236}">
+                <a16:creationId xmlns:a16="http://schemas.microsoft.com/office/drawing/2014/main" id="{8EDD4CD7-816C-FA9A-C461-BB44F19645FC}"/>
+              </a:ext>
+            </a:extLst>
+          </p:cNvPr>
+          <p:cNvSpPr txBox="1"/>
+          <p:nvPr/>
+        </p:nvSpPr>
+        <p:spPr>
+          <a:xfrm>
+            <a:off x="180093" y="1053319"/>
+            <a:ext cx="1412566" cy="369332"/>
+          </a:xfrm>
+          <a:prstGeom prst="rect">
+            <a:avLst/>
+          </a:prstGeom>
+          <a:noFill/>
+          <a:ln w="25400">
+            <a:solidFill>
+              <a:schemeClr val="tx1"/>
+            </a:solidFill>
+          </a:ln>
+        </p:spPr>
+        <p:txBody>
+          <a:bodyPr wrap="none" rtlCol="0">
+            <a:spAutoFit/>
+          </a:bodyPr>
+          <a:lstStyle/>
+          <a:p>
+            <a:r>
+              <a:rPr lang="en-US" altLang="ko-KR" dirty="0"/>
+              <a:t>Object</a:t>
+            </a:r>
+            <a:r>
+              <a:rPr lang="ko-KR" altLang="en-US" dirty="0"/>
+              <a:t> </a:t>
+            </a:r>
+            <a:r>
+              <a:rPr lang="ko-KR" altLang="en-US" dirty="0" err="1"/>
+              <a:t>컬링</a:t>
+            </a:r>
+            <a:endParaRPr lang="ko-KR" altLang="en-US" dirty="0"/>
+          </a:p>
+        </p:txBody>
+      </p:sp>
+      <p:sp>
+        <p:nvSpPr>
+          <p:cNvPr id="4" name="TextBox 3">
+            <a:extLst>
+              <a:ext uri="{FF2B5EF4-FFF2-40B4-BE49-F238E27FC236}">
+                <a16:creationId xmlns:a16="http://schemas.microsoft.com/office/drawing/2014/main" id="{2A3B1B66-3C57-318E-9C76-6DC14B0977E1}"/>
+              </a:ext>
+            </a:extLst>
+          </p:cNvPr>
+          <p:cNvSpPr txBox="1"/>
+          <p:nvPr/>
+        </p:nvSpPr>
+        <p:spPr>
+          <a:xfrm>
+            <a:off x="6096000" y="1053319"/>
+            <a:ext cx="2778325" cy="369332"/>
+          </a:xfrm>
+          <a:prstGeom prst="rect">
+            <a:avLst/>
+          </a:prstGeom>
+          <a:noFill/>
+          <a:ln w="25400">
+            <a:solidFill>
+              <a:schemeClr val="tx1"/>
+            </a:solidFill>
+          </a:ln>
+        </p:spPr>
+        <p:txBody>
+          <a:bodyPr wrap="none" rtlCol="0">
+            <a:spAutoFit/>
+          </a:bodyPr>
+          <a:lstStyle/>
+          <a:p>
+            <a:r>
+              <a:rPr lang="ko-KR" altLang="en-US" dirty="0"/>
+              <a:t>드로우 콜 </a:t>
+            </a:r>
+            <a:r>
+              <a:rPr lang="en-US" altLang="ko-KR" dirty="0"/>
+              <a:t>&amp; </a:t>
+            </a:r>
+            <a:r>
+              <a:rPr lang="ko-KR" altLang="en-US" dirty="0" err="1"/>
+              <a:t>버택스</a:t>
+            </a:r>
+            <a:r>
+              <a:rPr lang="ko-KR" altLang="en-US" dirty="0"/>
+              <a:t> 처리</a:t>
+            </a:r>
+          </a:p>
+        </p:txBody>
+      </p:sp>
+      <p:sp>
+        <p:nvSpPr>
+          <p:cNvPr id="5" name="TextBox 4">
+            <a:extLst>
+              <a:ext uri="{FF2B5EF4-FFF2-40B4-BE49-F238E27FC236}">
+                <a16:creationId xmlns:a16="http://schemas.microsoft.com/office/drawing/2014/main" id="{69ACBFBB-3512-2E4D-9613-056B18232163}"/>
+              </a:ext>
+            </a:extLst>
+          </p:cNvPr>
+          <p:cNvSpPr txBox="1"/>
+          <p:nvPr/>
+        </p:nvSpPr>
+        <p:spPr>
+          <a:xfrm>
+            <a:off x="180093" y="3127925"/>
+            <a:ext cx="1790875" cy="369332"/>
+          </a:xfrm>
+          <a:prstGeom prst="rect">
+            <a:avLst/>
+          </a:prstGeom>
+          <a:noFill/>
+          <a:ln w="25400">
+            <a:solidFill>
+              <a:schemeClr val="tx1"/>
+            </a:solidFill>
+          </a:ln>
+        </p:spPr>
+        <p:txBody>
+          <a:bodyPr wrap="none" rtlCol="0">
+            <a:spAutoFit/>
+          </a:bodyPr>
+          <a:lstStyle/>
+          <a:p>
+            <a:r>
+              <a:rPr lang="en-US" altLang="ko-KR" dirty="0"/>
+              <a:t>Light </a:t>
+            </a:r>
+            <a:r>
+              <a:rPr lang="ko-KR" altLang="en-US" dirty="0"/>
+              <a:t>처리</a:t>
+            </a:r>
+            <a:r>
+              <a:rPr lang="en-US" altLang="ko-KR" dirty="0"/>
+              <a:t> </a:t>
+            </a:r>
+            <a:r>
+              <a:rPr lang="ko-KR" altLang="en-US" dirty="0"/>
+              <a:t>방법</a:t>
+            </a:r>
+          </a:p>
+        </p:txBody>
+      </p:sp>
+      <p:sp>
+        <p:nvSpPr>
+          <p:cNvPr id="6" name="TextBox 5">
+            <a:extLst>
+              <a:ext uri="{FF2B5EF4-FFF2-40B4-BE49-F238E27FC236}">
+                <a16:creationId xmlns:a16="http://schemas.microsoft.com/office/drawing/2014/main" id="{8336F82D-A44D-11C5-642B-D050A1486AA0}"/>
+              </a:ext>
+            </a:extLst>
+          </p:cNvPr>
+          <p:cNvSpPr txBox="1"/>
+          <p:nvPr/>
+        </p:nvSpPr>
+        <p:spPr>
+          <a:xfrm>
+            <a:off x="6096000" y="3145596"/>
+            <a:ext cx="2252540" cy="369332"/>
+          </a:xfrm>
+          <a:prstGeom prst="rect">
+            <a:avLst/>
+          </a:prstGeom>
+          <a:noFill/>
+          <a:ln w="25400">
+            <a:solidFill>
+              <a:schemeClr val="tx1"/>
+            </a:solidFill>
+          </a:ln>
+        </p:spPr>
+        <p:txBody>
+          <a:bodyPr wrap="none" rtlCol="0">
+            <a:spAutoFit/>
+          </a:bodyPr>
+          <a:lstStyle/>
+          <a:p>
+            <a:r>
+              <a:rPr lang="en-US" altLang="ko-KR" dirty="0" err="1"/>
+              <a:t>GameObject</a:t>
+            </a:r>
+            <a:r>
+              <a:rPr lang="ko-KR" altLang="en-US" dirty="0"/>
+              <a:t>의 종류</a:t>
+            </a:r>
+          </a:p>
+        </p:txBody>
+      </p:sp>
+      <p:sp>
+        <p:nvSpPr>
+          <p:cNvPr id="7" name="TextBox 6">
+            <a:extLst>
+              <a:ext uri="{FF2B5EF4-FFF2-40B4-BE49-F238E27FC236}">
+                <a16:creationId xmlns:a16="http://schemas.microsoft.com/office/drawing/2014/main" id="{6FB941C1-8B60-2278-B4C7-C5F999B335D3}"/>
+              </a:ext>
+            </a:extLst>
+          </p:cNvPr>
+          <p:cNvSpPr txBox="1"/>
+          <p:nvPr/>
+        </p:nvSpPr>
+        <p:spPr>
+          <a:xfrm>
+            <a:off x="180092" y="5202531"/>
+            <a:ext cx="877163" cy="369332"/>
+          </a:xfrm>
+          <a:prstGeom prst="rect">
+            <a:avLst/>
+          </a:prstGeom>
+          <a:noFill/>
+          <a:ln w="25400">
+            <a:solidFill>
+              <a:schemeClr val="tx1"/>
+            </a:solidFill>
+          </a:ln>
+        </p:spPr>
+        <p:txBody>
+          <a:bodyPr wrap="none" rtlCol="0">
+            <a:spAutoFit/>
+          </a:bodyPr>
+          <a:lstStyle/>
+          <a:p>
+            <a:r>
+              <a:rPr lang="ko-KR" altLang="en-US" dirty="0"/>
+              <a:t>그림자</a:t>
+            </a:r>
+          </a:p>
+        </p:txBody>
+      </p:sp>
+      <p:sp>
+        <p:nvSpPr>
+          <p:cNvPr id="8" name="TextBox 7">
+            <a:extLst>
+              <a:ext uri="{FF2B5EF4-FFF2-40B4-BE49-F238E27FC236}">
+                <a16:creationId xmlns:a16="http://schemas.microsoft.com/office/drawing/2014/main" id="{B7A03762-B42B-6DE9-B229-6BA898BFAE60}"/>
+              </a:ext>
+            </a:extLst>
+          </p:cNvPr>
+          <p:cNvSpPr txBox="1"/>
+          <p:nvPr/>
+        </p:nvSpPr>
+        <p:spPr>
+          <a:xfrm>
+            <a:off x="6096000" y="5215181"/>
+            <a:ext cx="646331" cy="369332"/>
+          </a:xfrm>
+          <a:prstGeom prst="rect">
+            <a:avLst/>
+          </a:prstGeom>
+          <a:noFill/>
+          <a:ln w="25400">
+            <a:solidFill>
+              <a:schemeClr val="tx1"/>
+            </a:solidFill>
+          </a:ln>
+        </p:spPr>
+        <p:txBody>
+          <a:bodyPr wrap="none" rtlCol="0">
+            <a:spAutoFit/>
+          </a:bodyPr>
+          <a:lstStyle/>
+          <a:p>
+            <a:r>
+              <a:rPr lang="ko-KR" altLang="en-US" dirty="0"/>
+              <a:t>반사</a:t>
+            </a:r>
+          </a:p>
+        </p:txBody>
+      </p:sp>
+      <mc:AlternateContent xmlns:mc="http://schemas.openxmlformats.org/markup-compatibility/2006" xmlns:pslz="http://schemas.microsoft.com/office/powerpoint/2016/slidezoom">
+        <mc:Choice Requires="pslz">
+          <p:graphicFrame>
+            <p:nvGraphicFramePr>
+              <p:cNvPr id="10" name="슬라이드 확대/축소 9">
+                <a:extLst>
+                  <a:ext uri="{FF2B5EF4-FFF2-40B4-BE49-F238E27FC236}">
+                    <a16:creationId xmlns:a16="http://schemas.microsoft.com/office/drawing/2014/main" id="{377F04DF-8C5B-CA8D-4197-8F4BF5B5FFF6}"/>
+                  </a:ext>
+                </a:extLst>
+              </p:cNvPr>
+              <p:cNvGraphicFramePr>
+                <a:graphicFrameLocks noChangeAspect="1"/>
+              </p:cNvGraphicFramePr>
+              <p:nvPr>
+                <p:extLst>
+                  <p:ext uri="{D42A27DB-BD31-4B8C-83A1-F6EECF244321}">
+                    <p14:modId xmlns:p14="http://schemas.microsoft.com/office/powerpoint/2010/main" val="1309643042"/>
+                  </p:ext>
+                </p:extLst>
+              </p:nvPr>
+            </p:nvGraphicFramePr>
+            <p:xfrm>
+              <a:off x="6096000" y="3623153"/>
+              <a:ext cx="2615381" cy="1471152"/>
+            </p:xfrm>
+            <a:graphic>
+              <a:graphicData uri="http://schemas.microsoft.com/office/powerpoint/2016/slidezoom">
+                <pslz:sldZm>
+                  <pslz:sldZmObj sldId="275" cId="1216493664">
+                    <pslz:zmPr id="{8943EDC0-607D-41EF-AEAF-4ED0CAF5FDEC}" returnToParent="0" transitionDur="1000">
+                      <p166:blipFill xmlns:p166="http://schemas.microsoft.com/office/powerpoint/2016/6/main">
+                        <a:blip r:embed="rId2"/>
+                        <a:stretch>
+                          <a:fillRect/>
+                        </a:stretch>
+                      </p166:blipFill>
+                      <p166:spPr xmlns:p166="http://schemas.microsoft.com/office/powerpoint/2016/6/main">
+                        <a:xfrm>
+                          <a:off x="0" y="0"/>
+                          <a:ext cx="2615381" cy="1471152"/>
+                        </a:xfrm>
+                        <a:prstGeom prst="rect">
+                          <a:avLst/>
+                        </a:prstGeom>
+                        <a:ln w="3175">
+                          <a:solidFill>
+                            <a:prstClr val="ltGray"/>
+                          </a:solidFill>
+                        </a:ln>
+                      </p166:spPr>
+                    </pslz:zmPr>
+                  </pslz:sldZmObj>
+                </pslz:sldZm>
+              </a:graphicData>
+            </a:graphic>
+          </p:graphicFrame>
+        </mc:Choice>
+        <mc:Fallback xmlns="">
+          <p:pic>
+            <p:nvPicPr>
+              <p:cNvPr id="10" name="슬라이드 확대/축소 9">
+                <a:hlinkClick r:id="rId3" action="ppaction://hlinksldjump"/>
+                <a:extLst>
+                  <a:ext uri="{FF2B5EF4-FFF2-40B4-BE49-F238E27FC236}">
+                    <a16:creationId xmlns:a16="http://schemas.microsoft.com/office/drawing/2014/main" id="{377F04DF-8C5B-CA8D-4197-8F4BF5B5FFF6}"/>
+                  </a:ext>
+                </a:extLst>
+              </p:cNvPr>
+              <p:cNvPicPr>
+                <a:picLocks noGrp="1" noRot="1" noChangeAspect="1" noMove="1" noResize="1" noEditPoints="1" noAdjustHandles="1" noChangeArrowheads="1" noChangeShapeType="1"/>
+              </p:cNvPicPr>
+              <p:nvPr/>
+            </p:nvPicPr>
+            <p:blipFill>
+              <a:blip r:embed="rId4"/>
+              <a:stretch>
+                <a:fillRect/>
+              </a:stretch>
+            </p:blipFill>
+            <p:spPr>
+              <a:xfrm>
+                <a:off x="6096000" y="3623153"/>
+                <a:ext cx="2615381" cy="1471152"/>
+              </a:xfrm>
+              <a:prstGeom prst="rect">
+                <a:avLst/>
+              </a:prstGeom>
+              <a:ln w="3175">
+                <a:solidFill>
+                  <a:prstClr val="ltGray"/>
+                </a:solidFill>
+              </a:ln>
+            </p:spPr>
+          </p:pic>
+        </mc:Fallback>
+      </mc:AlternateContent>
+      <mc:AlternateContent xmlns:mc="http://schemas.openxmlformats.org/markup-compatibility/2006" xmlns:pslz="http://schemas.microsoft.com/office/powerpoint/2016/slidezoom">
+        <mc:Choice Requires="pslz">
+          <p:graphicFrame>
+            <p:nvGraphicFramePr>
+              <p:cNvPr id="12" name="슬라이드 확대/축소 11">
+                <a:extLst>
+                  <a:ext uri="{FF2B5EF4-FFF2-40B4-BE49-F238E27FC236}">
+                    <a16:creationId xmlns:a16="http://schemas.microsoft.com/office/drawing/2014/main" id="{8F29BC11-36B9-45F7-4879-A46D2C89FB68}"/>
+                  </a:ext>
+                </a:extLst>
+              </p:cNvPr>
+              <p:cNvGraphicFramePr>
+                <a:graphicFrameLocks noChangeAspect="1"/>
+              </p:cNvGraphicFramePr>
+              <p:nvPr>
+                <p:extLst>
+                  <p:ext uri="{D42A27DB-BD31-4B8C-83A1-F6EECF244321}">
+                    <p14:modId xmlns:p14="http://schemas.microsoft.com/office/powerpoint/2010/main" val="3106977482"/>
+                  </p:ext>
+                </p:extLst>
+              </p:nvPr>
+            </p:nvGraphicFramePr>
+            <p:xfrm>
+              <a:off x="8711381" y="3623153"/>
+              <a:ext cx="2615381" cy="1471152"/>
+            </p:xfrm>
+            <a:graphic>
+              <a:graphicData uri="http://schemas.microsoft.com/office/powerpoint/2016/slidezoom">
+                <pslz:sldZm>
+                  <pslz:sldZmObj sldId="276" cId="904325592">
+                    <pslz:zmPr id="{9E0EBCD9-BD83-4563-B14E-89E01394AE33}" returnToParent="0" transitionDur="1000">
+                      <p166:blipFill xmlns:p166="http://schemas.microsoft.com/office/powerpoint/2016/6/main">
+                        <a:blip r:embed="rId5"/>
+                        <a:stretch>
+                          <a:fillRect/>
+                        </a:stretch>
+                      </p166:blipFill>
+                      <p166:spPr xmlns:p166="http://schemas.microsoft.com/office/powerpoint/2016/6/main">
+                        <a:xfrm>
+                          <a:off x="0" y="0"/>
+                          <a:ext cx="2615381" cy="1471152"/>
+                        </a:xfrm>
+                        <a:prstGeom prst="rect">
+                          <a:avLst/>
+                        </a:prstGeom>
+                        <a:ln w="3175">
+                          <a:solidFill>
+                            <a:prstClr val="ltGray"/>
+                          </a:solidFill>
+                        </a:ln>
+                      </p166:spPr>
+                    </pslz:zmPr>
+                  </pslz:sldZmObj>
+                </pslz:sldZm>
+              </a:graphicData>
+            </a:graphic>
+          </p:graphicFrame>
+        </mc:Choice>
+        <mc:Fallback xmlns="">
+          <p:pic>
+            <p:nvPicPr>
+              <p:cNvPr id="12" name="슬라이드 확대/축소 11">
+                <a:hlinkClick r:id="rId6" action="ppaction://hlinksldjump"/>
+                <a:extLst>
+                  <a:ext uri="{FF2B5EF4-FFF2-40B4-BE49-F238E27FC236}">
+                    <a16:creationId xmlns:a16="http://schemas.microsoft.com/office/drawing/2014/main" id="{8F29BC11-36B9-45F7-4879-A46D2C89FB68}"/>
+                  </a:ext>
+                </a:extLst>
+              </p:cNvPr>
+              <p:cNvPicPr>
+                <a:picLocks noGrp="1" noRot="1" noChangeAspect="1" noMove="1" noResize="1" noEditPoints="1" noAdjustHandles="1" noChangeArrowheads="1" noChangeShapeType="1"/>
+              </p:cNvPicPr>
+              <p:nvPr/>
+            </p:nvPicPr>
+            <p:blipFill>
+              <a:blip r:embed="rId7"/>
+              <a:stretch>
+                <a:fillRect/>
+              </a:stretch>
+            </p:blipFill>
+            <p:spPr>
+              <a:xfrm>
+                <a:off x="8711381" y="3623153"/>
+                <a:ext cx="2615381" cy="1471152"/>
+              </a:xfrm>
+              <a:prstGeom prst="rect">
+                <a:avLst/>
+              </a:prstGeom>
+              <a:ln w="3175">
+                <a:solidFill>
+                  <a:prstClr val="ltGray"/>
+                </a:solidFill>
+              </a:ln>
+            </p:spPr>
+          </p:pic>
+        </mc:Fallback>
+      </mc:AlternateContent>
+      <p:sp>
+        <p:nvSpPr>
+          <p:cNvPr id="13" name="TextBox 12">
+            <a:extLst>
+              <a:ext uri="{FF2B5EF4-FFF2-40B4-BE49-F238E27FC236}">
+                <a16:creationId xmlns:a16="http://schemas.microsoft.com/office/drawing/2014/main" id="{2995F415-D58E-73A2-0A6E-7795F7D25400}"/>
+              </a:ext>
+            </a:extLst>
+          </p:cNvPr>
+          <p:cNvSpPr txBox="1"/>
+          <p:nvPr/>
+        </p:nvSpPr>
+        <p:spPr>
+          <a:xfrm>
+            <a:off x="91601" y="1467599"/>
+            <a:ext cx="5779018" cy="923330"/>
+          </a:xfrm>
+          <a:prstGeom prst="rect">
+            <a:avLst/>
+          </a:prstGeom>
+          <a:noFill/>
+        </p:spPr>
+        <p:txBody>
+          <a:bodyPr wrap="none" rtlCol="0">
+            <a:spAutoFit/>
+          </a:bodyPr>
+          <a:lstStyle/>
+          <a:p>
+            <a:r>
+              <a:rPr lang="en-US" altLang="ko-KR" dirty="0" err="1"/>
+              <a:t>SkinMesh</a:t>
+            </a:r>
+            <a:r>
+              <a:rPr lang="ko-KR" altLang="en-US" dirty="0"/>
+              <a:t>의 </a:t>
+            </a:r>
+            <a:r>
+              <a:rPr lang="en-US" altLang="ko-KR" dirty="0"/>
+              <a:t>BLAS Update</a:t>
+            </a:r>
+            <a:r>
+              <a:rPr lang="ko-KR" altLang="en-US" dirty="0"/>
+              <a:t>의 경우 </a:t>
+            </a:r>
+            <a:r>
+              <a:rPr lang="en-US" altLang="ko-KR" dirty="0" err="1"/>
+              <a:t>game.RenderTour</a:t>
+            </a:r>
+            <a:r>
+              <a:rPr lang="ko-KR" altLang="en-US" dirty="0"/>
+              <a:t>를</a:t>
+            </a:r>
+            <a:endParaRPr lang="en-US" altLang="ko-KR" dirty="0"/>
+          </a:p>
+          <a:p>
+            <a:r>
+              <a:rPr lang="ko-KR" altLang="en-US" dirty="0"/>
+              <a:t>사용해 보이는 스킨 </a:t>
+            </a:r>
+            <a:r>
+              <a:rPr lang="ko-KR" altLang="en-US" dirty="0" err="1"/>
+              <a:t>메쉬에</a:t>
+            </a:r>
+            <a:r>
+              <a:rPr lang="ko-KR" altLang="en-US" dirty="0"/>
+              <a:t> 대해서만 </a:t>
+            </a:r>
+            <a:endParaRPr lang="en-US" altLang="ko-KR" dirty="0"/>
+          </a:p>
+          <a:p>
+            <a:r>
+              <a:rPr lang="ko-KR" altLang="en-US" dirty="0"/>
+              <a:t>업데이트를 수행한다</a:t>
+            </a:r>
+            <a:r>
+              <a:rPr lang="en-US" altLang="ko-KR" dirty="0"/>
+              <a:t>.</a:t>
+            </a:r>
+            <a:endParaRPr lang="ko-KR" altLang="en-US" dirty="0"/>
+          </a:p>
+        </p:txBody>
+      </p:sp>
+      <mc:AlternateContent xmlns:mc="http://schemas.openxmlformats.org/markup-compatibility/2006" xmlns:pslz="http://schemas.microsoft.com/office/powerpoint/2016/slidezoom">
+        <mc:Choice Requires="pslz">
+          <p:graphicFrame>
+            <p:nvGraphicFramePr>
+              <p:cNvPr id="11" name="슬라이드 확대/축소 10">
+                <a:extLst>
+                  <a:ext uri="{FF2B5EF4-FFF2-40B4-BE49-F238E27FC236}">
+                    <a16:creationId xmlns:a16="http://schemas.microsoft.com/office/drawing/2014/main" id="{5D85872A-69A6-B12A-6362-54B353177F6F}"/>
+                  </a:ext>
+                </a:extLst>
+              </p:cNvPr>
+              <p:cNvGraphicFramePr>
+                <a:graphicFrameLocks noChangeAspect="1"/>
+              </p:cNvGraphicFramePr>
+              <p:nvPr>
+                <p:extLst>
+                  <p:ext uri="{D42A27DB-BD31-4B8C-83A1-F6EECF244321}">
+                    <p14:modId xmlns:p14="http://schemas.microsoft.com/office/powerpoint/2010/main" val="1374667222"/>
+                  </p:ext>
+                </p:extLst>
+              </p:nvPr>
+            </p:nvGraphicFramePr>
+            <p:xfrm>
+              <a:off x="6096000" y="1520347"/>
+              <a:ext cx="2778325" cy="1562808"/>
+            </p:xfrm>
+            <a:graphic>
+              <a:graphicData uri="http://schemas.microsoft.com/office/powerpoint/2016/slidezoom">
+                <pslz:sldZm>
+                  <pslz:sldZmObj sldId="286" cId="471672495">
+                    <pslz:zmPr id="{47ADBA83-62CC-4C39-B974-4F5B113AD202}" returnToParent="0" transitionDur="1000">
+                      <p166:blipFill xmlns:p166="http://schemas.microsoft.com/office/powerpoint/2016/6/main">
+                        <a:blip r:embed="rId8"/>
+                        <a:stretch>
+                          <a:fillRect/>
+                        </a:stretch>
+                      </p166:blipFill>
+                      <p166:spPr xmlns:p166="http://schemas.microsoft.com/office/powerpoint/2016/6/main">
+                        <a:xfrm>
+                          <a:off x="0" y="0"/>
+                          <a:ext cx="2778325" cy="1562808"/>
+                        </a:xfrm>
+                        <a:prstGeom prst="rect">
+                          <a:avLst/>
+                        </a:prstGeom>
+                        <a:ln w="3175">
+                          <a:solidFill>
+                            <a:prstClr val="ltGray"/>
+                          </a:solidFill>
+                        </a:ln>
+                      </p166:spPr>
+                    </pslz:zmPr>
+                  </pslz:sldZmObj>
+                </pslz:sldZm>
+              </a:graphicData>
+            </a:graphic>
+          </p:graphicFrame>
+        </mc:Choice>
+        <mc:Fallback xmlns="">
+          <p:pic>
+            <p:nvPicPr>
+              <p:cNvPr id="11" name="슬라이드 확대/축소 10">
+                <a:hlinkClick r:id="rId3" action="ppaction://hlinksldjump"/>
+                <a:extLst>
+                  <a:ext uri="{FF2B5EF4-FFF2-40B4-BE49-F238E27FC236}">
+                    <a16:creationId xmlns:a16="http://schemas.microsoft.com/office/drawing/2014/main" id="{5D85872A-69A6-B12A-6362-54B353177F6F}"/>
+                  </a:ext>
+                </a:extLst>
+              </p:cNvPr>
+              <p:cNvPicPr>
+                <a:picLocks noGrp="1" noRot="1" noChangeAspect="1" noMove="1" noResize="1" noEditPoints="1" noAdjustHandles="1" noChangeArrowheads="1" noChangeShapeType="1"/>
+              </p:cNvPicPr>
+              <p:nvPr/>
+            </p:nvPicPr>
+            <p:blipFill>
+              <a:blip r:embed="rId9"/>
+              <a:stretch>
+                <a:fillRect/>
+              </a:stretch>
+            </p:blipFill>
+            <p:spPr>
+              <a:xfrm>
+                <a:off x="6096000" y="1520347"/>
+                <a:ext cx="2778325" cy="1562808"/>
+              </a:xfrm>
+              <a:prstGeom prst="rect">
+                <a:avLst/>
+              </a:prstGeom>
+              <a:ln w="3175">
+                <a:solidFill>
+                  <a:prstClr val="ltGray"/>
+                </a:solidFill>
+              </a:ln>
+            </p:spPr>
+          </p:pic>
+        </mc:Fallback>
+      </mc:AlternateContent>
+    </p:spTree>
+    <p:extLst>
+      <p:ext uri="{BB962C8B-B14F-4D97-AF65-F5344CB8AC3E}">
+        <p14:creationId xmlns:p14="http://schemas.microsoft.com/office/powerpoint/2010/main" val="3813102566"/>
+      </p:ext>
+    </p:extLst>
+  </p:cSld>
+  <p:clrMapOvr>
+    <a:masterClrMapping/>
+  </p:clrMapOvr>
+</p:sld>
+</file>
+
+<file path=ppt/slides/slide21.xml><?xml version="1.0" encoding="utf-8"?>
+<p:sld xmlns:a="http://schemas.openxmlformats.org/drawingml/2006/main" xmlns:r="http://schemas.openxmlformats.org/officeDocument/2006/relationships" xmlns:p="http://schemas.openxmlformats.org/presentationml/2006/main">
+  <p:cSld>
+    <p:spTree>
+      <p:nvGrpSpPr>
+        <p:cNvPr id="1" name="">
+          <a:extLst>
+            <a:ext uri="{FF2B5EF4-FFF2-40B4-BE49-F238E27FC236}">
               <a16:creationId xmlns:a16="http://schemas.microsoft.com/office/drawing/2014/main" id="{128D3EA2-2F9A-BBA9-FCED-EA621E860D7B}"/>
             </a:ext>
           </a:extLst>
@@ -6669,7 +7130,7 @@
 </p:sld>
 </file>
 
-<file path=ppt/slides/slide21.xml><?xml version="1.0" encoding="utf-8"?>
+<file path=ppt/slides/slide22.xml><?xml version="1.0" encoding="utf-8"?>
 <p:sld xmlns:a="http://schemas.openxmlformats.org/drawingml/2006/main" xmlns:r="http://schemas.openxmlformats.org/officeDocument/2006/relationships" xmlns:p="http://schemas.openxmlformats.org/presentationml/2006/main">
   <p:cSld>
     <p:spTree>
@@ -6741,7 +7202,7 @@
 </p:sld>
 </file>
 
-<file path=ppt/slides/slide22.xml><?xml version="1.0" encoding="utf-8"?>
+<file path=ppt/slides/slide23.xml><?xml version="1.0" encoding="utf-8"?>
 <p:sld xmlns:a="http://schemas.openxmlformats.org/drawingml/2006/main" xmlns:r="http://schemas.openxmlformats.org/officeDocument/2006/relationships" xmlns:p="http://schemas.openxmlformats.org/presentationml/2006/main">
   <p:cSld>
     <p:spTree>
@@ -6817,7 +7278,7 @@
 </p:sld>
 </file>
 
-<file path=ppt/slides/slide23.xml><?xml version="1.0" encoding="utf-8"?>
+<file path=ppt/slides/slide24.xml><?xml version="1.0" encoding="utf-8"?>
 <p:sld xmlns:a="http://schemas.openxmlformats.org/drawingml/2006/main" xmlns:r="http://schemas.openxmlformats.org/officeDocument/2006/relationships" xmlns:p="http://schemas.openxmlformats.org/presentationml/2006/main">
   <p:cSld>
     <p:spTree>
@@ -6986,7 +7447,7 @@
 </p:sld>
 </file>
 
-<file path=ppt/slides/slide24.xml><?xml version="1.0" encoding="utf-8"?>
+<file path=ppt/slides/slide25.xml><?xml version="1.0" encoding="utf-8"?>
 <p:sld xmlns:a="http://schemas.openxmlformats.org/drawingml/2006/main" xmlns:r="http://schemas.openxmlformats.org/officeDocument/2006/relationships" xmlns:p="http://schemas.openxmlformats.org/presentationml/2006/main">
   <p:cSld>
     <p:spTree>
@@ -8424,8 +8885,8 @@
           </a:p>
         </p:txBody>
       </p:sp>
-      <mc:AlternateContent xmlns:mc="http://schemas.openxmlformats.org/markup-compatibility/2006">
-        <mc:Choice xmlns:pslz="http://schemas.microsoft.com/office/powerpoint/2016/slidezoom" Requires="pslz">
+      <mc:AlternateContent xmlns:mc="http://schemas.openxmlformats.org/markup-compatibility/2006" xmlns:pslz="http://schemas.microsoft.com/office/powerpoint/2016/slidezoom">
+        <mc:Choice Requires="pslz">
           <p:graphicFrame>
             <p:nvGraphicFramePr>
               <p:cNvPr id="41" name="슬라이드 확대/축소 40">
@@ -8482,7 +8943,7 @@
             </a:graphic>
           </p:graphicFrame>
         </mc:Choice>
-        <mc:Fallback>
+        <mc:Fallback xmlns="">
           <p:pic>
             <p:nvPicPr>
               <p:cNvPr id="41" name="슬라이드 확대/축소 40">
@@ -8499,7 +8960,7 @@
               <p:nvPr/>
             </p:nvPicPr>
             <p:blipFill>
-              <a:blip r:embed="rId2"/>
+              <a:blip r:embed="rId4"/>
               <a:stretch>
                 <a:fillRect/>
               </a:stretch>
@@ -8534,7 +8995,7 @@
 </p:sld>
 </file>
 
-<file path=ppt/slides/slide25.xml><?xml version="1.0" encoding="utf-8"?>
+<file path=ppt/slides/slide26.xml><?xml version="1.0" encoding="utf-8"?>
 <p:sld xmlns:a="http://schemas.openxmlformats.org/drawingml/2006/main" xmlns:r="http://schemas.openxmlformats.org/officeDocument/2006/relationships" xmlns:p="http://schemas.openxmlformats.org/presentationml/2006/main">
   <p:cSld>
     <p:spTree>
@@ -8606,8 +9067,8 @@
           </a:p>
         </p:txBody>
       </p:sp>
-      <mc:AlternateContent xmlns:mc="http://schemas.openxmlformats.org/markup-compatibility/2006">
-        <mc:Choice xmlns:pslz="http://schemas.microsoft.com/office/powerpoint/2016/slidezoom" Requires="pslz">
+      <mc:AlternateContent xmlns:mc="http://schemas.openxmlformats.org/markup-compatibility/2006" xmlns:pslz="http://schemas.microsoft.com/office/powerpoint/2016/slidezoom">
+        <mc:Choice Requires="pslz">
           <p:graphicFrame>
             <p:nvGraphicFramePr>
               <p:cNvPr id="4" name="슬라이드 확대/축소 3">
@@ -8664,7 +9125,7 @@
             </a:graphic>
           </p:graphicFrame>
         </mc:Choice>
-        <mc:Fallback>
+        <mc:Fallback xmlns="">
           <p:pic>
             <p:nvPicPr>
               <p:cNvPr id="4" name="슬라이드 확대/축소 3">
@@ -8681,7 +9142,7 @@
               <p:nvPr/>
             </p:nvPicPr>
             <p:blipFill>
-              <a:blip r:embed="rId2"/>
+              <a:blip r:embed="rId4"/>
               <a:stretch>
                 <a:fillRect/>
               </a:stretch>
@@ -8703,8 +9164,8 @@
           </p:pic>
         </mc:Fallback>
       </mc:AlternateContent>
-      <mc:AlternateContent xmlns:mc="http://schemas.openxmlformats.org/markup-compatibility/2006">
-        <mc:Choice xmlns:pslz="http://schemas.microsoft.com/office/powerpoint/2016/slidezoom" Requires="pslz">
+      <mc:AlternateContent xmlns:mc="http://schemas.openxmlformats.org/markup-compatibility/2006" xmlns:pslz="http://schemas.microsoft.com/office/powerpoint/2016/slidezoom">
+        <mc:Choice Requires="pslz">
           <p:graphicFrame>
             <p:nvGraphicFramePr>
               <p:cNvPr id="6" name="슬라이드 확대/축소 5">
@@ -8735,7 +9196,7 @@
                   <pslz:sldZmObj sldId="293" cId="1363661584">
                     <pslz:zmPr id="{34B19A3E-D23A-4CB2-B7BE-6C99D0540849}" returnToParent="0" transitionDur="1000">
                       <p166:blipFill xmlns:p166="http://schemas.microsoft.com/office/powerpoint/2016/6/main">
-                        <a:blip r:embed="rId4"/>
+                        <a:blip r:embed="rId5"/>
                         <a:stretch>
                           <a:fillRect/>
                         </a:stretch>
@@ -8761,11 +9222,11 @@
             </a:graphic>
           </p:graphicFrame>
         </mc:Choice>
-        <mc:Fallback>
+        <mc:Fallback xmlns="">
           <p:pic>
             <p:nvPicPr>
               <p:cNvPr id="6" name="슬라이드 확대/축소 5">
-                <a:hlinkClick r:id="rId5" action="ppaction://hlinksldjump"/>
+                <a:hlinkClick r:id="rId6" action="ppaction://hlinksldjump"/>
                 <a:extLst>
                   <a:ext uri="{FF2B5EF4-FFF2-40B4-BE49-F238E27FC236}">
                     <a16:creationId xmlns:a16="http://schemas.microsoft.com/office/drawing/2014/main" id="{CBA8C4E7-233E-71CC-52E3-C51F7996FA49}"/>
@@ -8778,7 +9239,7 @@
               <p:nvPr/>
             </p:nvPicPr>
             <p:blipFill>
-              <a:blip r:embed="rId4"/>
+              <a:blip r:embed="rId7"/>
               <a:stretch>
                 <a:fillRect/>
               </a:stretch>
@@ -8815,7 +9276,7 @@
           <p:nvPr/>
         </p:nvPicPr>
         <p:blipFill>
-          <a:blip r:embed="rId6"/>
+          <a:blip r:embed="rId8"/>
           <a:stretch>
             <a:fillRect/>
           </a:stretch>
@@ -8845,7 +9306,7 @@
           <p:nvPr/>
         </p:nvPicPr>
         <p:blipFill>
-          <a:blip r:embed="rId7"/>
+          <a:blip r:embed="rId9"/>
           <a:stretch>
             <a:fillRect/>
           </a:stretch>
@@ -9025,7 +9486,7 @@
 </p:sld>
 </file>
 
-<file path=ppt/slides/slide26.xml><?xml version="1.0" encoding="utf-8"?>
+<file path=ppt/slides/slide27.xml><?xml version="1.0" encoding="utf-8"?>
 <p:sld xmlns:a="http://schemas.openxmlformats.org/drawingml/2006/main" xmlns:r="http://schemas.openxmlformats.org/officeDocument/2006/relationships" xmlns:p="http://schemas.openxmlformats.org/presentationml/2006/main">
   <p:cSld>
     <p:spTree>
@@ -10561,7 +11022,7 @@
 </p:sld>
 </file>
 
-<file path=ppt/slides/slide27.xml><?xml version="1.0" encoding="utf-8"?>
+<file path=ppt/slides/slide28.xml><?xml version="1.0" encoding="utf-8"?>
 <p:sld xmlns:a="http://schemas.openxmlformats.org/drawingml/2006/main" xmlns:r="http://schemas.openxmlformats.org/officeDocument/2006/relationships" xmlns:p="http://schemas.openxmlformats.org/presentationml/2006/main">
   <p:cSld>
     <p:spTree>
@@ -10956,7 +11417,7 @@
 </p:sld>
 </file>
 
-<file path=ppt/slides/slide28.xml><?xml version="1.0" encoding="utf-8"?>
+<file path=ppt/slides/slide29.xml><?xml version="1.0" encoding="utf-8"?>
 <p:sld xmlns:a="http://schemas.openxmlformats.org/drawingml/2006/main" xmlns:r="http://schemas.openxmlformats.org/officeDocument/2006/relationships" xmlns:p="http://schemas.openxmlformats.org/presentationml/2006/main">
   <p:cSld>
     <p:spTree>
@@ -11058,7 +11519,312 @@
 </p:sld>
 </file>
 
-<file path=ppt/slides/slide29.xml><?xml version="1.0" encoding="utf-8"?>
+<file path=ppt/slides/slide3.xml><?xml version="1.0" encoding="utf-8"?>
+<p:sld xmlns:a="http://schemas.openxmlformats.org/drawingml/2006/main" xmlns:r="http://schemas.openxmlformats.org/officeDocument/2006/relationships" xmlns:p="http://schemas.openxmlformats.org/presentationml/2006/main">
+  <p:cSld>
+    <p:spTree>
+      <p:nvGrpSpPr>
+        <p:cNvPr id="1" name=""/>
+        <p:cNvGrpSpPr/>
+        <p:nvPr/>
+      </p:nvGrpSpPr>
+      <p:grpSpPr>
+        <a:xfrm>
+          <a:off x="0" y="0"/>
+          <a:ext cx="0" cy="0"/>
+          <a:chOff x="0" y="0"/>
+          <a:chExt cx="0" cy="0"/>
+        </a:xfrm>
+      </p:grpSpPr>
+      <p:sp>
+        <p:nvSpPr>
+          <p:cNvPr id="2" name="제목 1">
+            <a:extLst>
+              <a:ext uri="{FF2B5EF4-FFF2-40B4-BE49-F238E27FC236}">
+                <a16:creationId xmlns:a16="http://schemas.microsoft.com/office/drawing/2014/main" id="{85E16178-17B0-5641-76A2-7A0CA77DB6EB}"/>
+              </a:ext>
+            </a:extLst>
+          </p:cNvPr>
+          <p:cNvSpPr>
+            <a:spLocks noGrp="1"/>
+          </p:cNvSpPr>
+          <p:nvPr>
+            <p:ph type="title" idx="4294967295"/>
+          </p:nvPr>
+        </p:nvSpPr>
+        <p:spPr>
+          <a:xfrm>
+            <a:off x="0" y="18255"/>
+            <a:ext cx="10515600" cy="850425"/>
+          </a:xfrm>
+        </p:spPr>
+        <p:txBody>
+          <a:bodyPr>
+            <a:normAutofit/>
+          </a:bodyPr>
+          <a:lstStyle/>
+          <a:p>
+            <a:r>
+              <a:rPr lang="en-US" altLang="ko-KR" sz="5400" dirty="0"/>
+              <a:t>Render</a:t>
+            </a:r>
+            <a:endParaRPr lang="ko-KR" altLang="en-US" sz="5400" dirty="0"/>
+          </a:p>
+        </p:txBody>
+      </p:sp>
+      <mc:AlternateContent xmlns:mc="http://schemas.openxmlformats.org/markup-compatibility/2006" xmlns:pslz="http://schemas.microsoft.com/office/powerpoint/2016/slidezoom">
+        <mc:Choice Requires="pslz">
+          <p:graphicFrame>
+            <p:nvGraphicFramePr>
+              <p:cNvPr id="5" name="슬라이드 확대/축소 4">
+                <a:extLst>
+                  <a:ext uri="{FF2B5EF4-FFF2-40B4-BE49-F238E27FC236}">
+                    <a16:creationId xmlns:a16="http://schemas.microsoft.com/office/drawing/2014/main" id="{03BEAF41-04DA-51CD-9AA7-45495F5B0EFB}"/>
+                  </a:ext>
+                </a:extLst>
+              </p:cNvPr>
+              <p:cNvGraphicFramePr>
+                <a:graphicFrameLocks noChangeAspect="1"/>
+              </p:cNvGraphicFramePr>
+              <p:nvPr>
+                <p:extLst>
+                  <p:ext uri="{D42A27DB-BD31-4B8C-83A1-F6EECF244321}">
+                    <p14:modId xmlns:p14="http://schemas.microsoft.com/office/powerpoint/2010/main" val="1674305885"/>
+                  </p:ext>
+                </p:extLst>
+              </p:nvPr>
+            </p:nvGraphicFramePr>
+            <p:xfrm>
+              <a:off x="0" y="1428084"/>
+              <a:ext cx="7792774" cy="4383435"/>
+            </p:xfrm>
+            <a:graphic>
+              <a:graphicData uri="http://schemas.microsoft.com/office/powerpoint/2016/slidezoom">
+                <pslz:sldZm>
+                  <pslz:sldZmObj sldId="261" cId="3409075809">
+                    <pslz:zmPr id="{87D8E69D-5F44-4570-B3F7-073FACC1EEA8}" returnToParent="0" transitionDur="1000">
+                      <p166:blipFill xmlns:p166="http://schemas.microsoft.com/office/powerpoint/2016/6/main">
+                        <a:blip r:embed="rId2"/>
+                        <a:stretch>
+                          <a:fillRect/>
+                        </a:stretch>
+                      </p166:blipFill>
+                      <p166:spPr xmlns:p166="http://schemas.microsoft.com/office/powerpoint/2016/6/main">
+                        <a:xfrm>
+                          <a:off x="0" y="0"/>
+                          <a:ext cx="7792774" cy="4383435"/>
+                        </a:xfrm>
+                        <a:prstGeom prst="rect">
+                          <a:avLst/>
+                        </a:prstGeom>
+                        <a:ln w="3175">
+                          <a:solidFill>
+                            <a:prstClr val="ltGray"/>
+                          </a:solidFill>
+                        </a:ln>
+                      </p166:spPr>
+                    </pslz:zmPr>
+                  </pslz:sldZmObj>
+                </pslz:sldZm>
+              </a:graphicData>
+            </a:graphic>
+          </p:graphicFrame>
+        </mc:Choice>
+        <mc:Fallback xmlns="">
+          <p:pic>
+            <p:nvPicPr>
+              <p:cNvPr id="5" name="슬라이드 확대/축소 4">
+                <a:hlinkClick r:id="rId3" action="ppaction://hlinksldjump"/>
+                <a:extLst>
+                  <a:ext uri="{FF2B5EF4-FFF2-40B4-BE49-F238E27FC236}">
+                    <a16:creationId xmlns:a16="http://schemas.microsoft.com/office/drawing/2014/main" id="{03BEAF41-04DA-51CD-9AA7-45495F5B0EFB}"/>
+                  </a:ext>
+                </a:extLst>
+              </p:cNvPr>
+              <p:cNvPicPr>
+                <a:picLocks noGrp="1" noRot="1" noChangeAspect="1" noMove="1" noResize="1" noEditPoints="1" noAdjustHandles="1" noChangeArrowheads="1" noChangeShapeType="1"/>
+              </p:cNvPicPr>
+              <p:nvPr/>
+            </p:nvPicPr>
+            <p:blipFill>
+              <a:blip r:embed="rId4"/>
+              <a:stretch>
+                <a:fillRect/>
+              </a:stretch>
+            </p:blipFill>
+            <p:spPr>
+              <a:xfrm>
+                <a:off x="0" y="1428084"/>
+                <a:ext cx="7792774" cy="4383435"/>
+              </a:xfrm>
+              <a:prstGeom prst="rect">
+                <a:avLst/>
+              </a:prstGeom>
+              <a:ln w="3175">
+                <a:solidFill>
+                  <a:prstClr val="ltGray"/>
+                </a:solidFill>
+              </a:ln>
+            </p:spPr>
+          </p:pic>
+        </mc:Fallback>
+      </mc:AlternateContent>
+      <mc:AlternateContent xmlns:mc="http://schemas.openxmlformats.org/markup-compatibility/2006" xmlns:pslz="http://schemas.microsoft.com/office/powerpoint/2016/slidezoom">
+        <mc:Choice Requires="pslz">
+          <p:graphicFrame>
+            <p:nvGraphicFramePr>
+              <p:cNvPr id="7" name="슬라이드 확대/축소 6">
+                <a:extLst>
+                  <a:ext uri="{FF2B5EF4-FFF2-40B4-BE49-F238E27FC236}">
+                    <a16:creationId xmlns:a16="http://schemas.microsoft.com/office/drawing/2014/main" id="{5C497EDE-4B29-D25D-0F65-A42F6799D2DD}"/>
+                  </a:ext>
+                </a:extLst>
+              </p:cNvPr>
+              <p:cNvGraphicFramePr>
+                <a:graphicFrameLocks noChangeAspect="1"/>
+              </p:cNvGraphicFramePr>
+              <p:nvPr>
+                <p:extLst>
+                  <p:ext uri="{D42A27DB-BD31-4B8C-83A1-F6EECF244321}">
+                    <p14:modId xmlns:p14="http://schemas.microsoft.com/office/powerpoint/2010/main" val="998267273"/>
+                  </p:ext>
+                </p:extLst>
+              </p:nvPr>
+            </p:nvGraphicFramePr>
+            <p:xfrm>
+              <a:off x="7792774" y="3358483"/>
+              <a:ext cx="4360953" cy="2453036"/>
+            </p:xfrm>
+            <a:graphic>
+              <a:graphicData uri="http://schemas.microsoft.com/office/powerpoint/2016/slidezoom">
+                <pslz:sldZm>
+                  <pslz:sldZmObj sldId="262" cId="1872162543">
+                    <pslz:zmPr id="{BDC9DA41-B291-4C0C-B1ED-02A85E5FF9C0}" returnToParent="0" transitionDur="1000">
+                      <p166:blipFill xmlns:p166="http://schemas.microsoft.com/office/powerpoint/2016/6/main">
+                        <a:blip r:embed="rId5"/>
+                        <a:stretch>
+                          <a:fillRect/>
+                        </a:stretch>
+                      </p166:blipFill>
+                      <p166:spPr xmlns:p166="http://schemas.microsoft.com/office/powerpoint/2016/6/main">
+                        <a:xfrm>
+                          <a:off x="0" y="0"/>
+                          <a:ext cx="4360953" cy="2453036"/>
+                        </a:xfrm>
+                        <a:prstGeom prst="rect">
+                          <a:avLst/>
+                        </a:prstGeom>
+                        <a:ln w="3175">
+                          <a:solidFill>
+                            <a:prstClr val="ltGray"/>
+                          </a:solidFill>
+                        </a:ln>
+                      </p166:spPr>
+                    </pslz:zmPr>
+                  </pslz:sldZmObj>
+                </pslz:sldZm>
+              </a:graphicData>
+            </a:graphic>
+          </p:graphicFrame>
+        </mc:Choice>
+        <mc:Fallback xmlns="">
+          <p:pic>
+            <p:nvPicPr>
+              <p:cNvPr id="7" name="슬라이드 확대/축소 6">
+                <a:hlinkClick r:id="rId6" action="ppaction://hlinksldjump"/>
+                <a:extLst>
+                  <a:ext uri="{FF2B5EF4-FFF2-40B4-BE49-F238E27FC236}">
+                    <a16:creationId xmlns:a16="http://schemas.microsoft.com/office/drawing/2014/main" id="{5C497EDE-4B29-D25D-0F65-A42F6799D2DD}"/>
+                  </a:ext>
+                </a:extLst>
+              </p:cNvPr>
+              <p:cNvPicPr>
+                <a:picLocks noGrp="1" noRot="1" noChangeAspect="1" noMove="1" noResize="1" noEditPoints="1" noAdjustHandles="1" noChangeArrowheads="1" noChangeShapeType="1"/>
+              </p:cNvPicPr>
+              <p:nvPr/>
+            </p:nvPicPr>
+            <p:blipFill>
+              <a:blip r:embed="rId7"/>
+              <a:stretch>
+                <a:fillRect/>
+              </a:stretch>
+            </p:blipFill>
+            <p:spPr>
+              <a:xfrm>
+                <a:off x="7792774" y="3358483"/>
+                <a:ext cx="4360953" cy="2453036"/>
+              </a:xfrm>
+              <a:prstGeom prst="rect">
+                <a:avLst/>
+              </a:prstGeom>
+              <a:ln w="3175">
+                <a:solidFill>
+                  <a:prstClr val="ltGray"/>
+                </a:solidFill>
+              </a:ln>
+            </p:spPr>
+          </p:pic>
+        </mc:Fallback>
+      </mc:AlternateContent>
+      <p:sp>
+        <p:nvSpPr>
+          <p:cNvPr id="8" name="TextBox 7">
+            <a:extLst>
+              <a:ext uri="{FF2B5EF4-FFF2-40B4-BE49-F238E27FC236}">
+                <a16:creationId xmlns:a16="http://schemas.microsoft.com/office/drawing/2014/main" id="{4D13AE43-1128-595C-DAD6-A48CA2EF3E1B}"/>
+              </a:ext>
+            </a:extLst>
+          </p:cNvPr>
+          <p:cNvSpPr txBox="1"/>
+          <p:nvPr/>
+        </p:nvSpPr>
+        <p:spPr>
+          <a:xfrm>
+            <a:off x="0" y="784433"/>
+            <a:ext cx="2300630" cy="369332"/>
+          </a:xfrm>
+          <a:prstGeom prst="rect">
+            <a:avLst/>
+          </a:prstGeom>
+          <a:noFill/>
+          <a:ln w="25400">
+            <a:solidFill>
+              <a:schemeClr val="tx1"/>
+            </a:solidFill>
+          </a:ln>
+        </p:spPr>
+        <p:txBody>
+          <a:bodyPr wrap="none" rtlCol="0">
+            <a:spAutoFit/>
+          </a:bodyPr>
+          <a:lstStyle/>
+          <a:p>
+            <a:r>
+              <a:rPr lang="ko-KR" altLang="en-US" dirty="0"/>
+              <a:t>무엇을 그릴 것인가</a:t>
+            </a:r>
+            <a:r>
+              <a:rPr lang="en-US" altLang="ko-KR" dirty="0"/>
+              <a:t>?</a:t>
+            </a:r>
+            <a:endParaRPr lang="ko-KR" altLang="en-US" dirty="0"/>
+          </a:p>
+        </p:txBody>
+      </p:sp>
+    </p:spTree>
+    <p:extLst>
+      <p:ext uri="{BB962C8B-B14F-4D97-AF65-F5344CB8AC3E}">
+        <p14:creationId xmlns:p14="http://schemas.microsoft.com/office/powerpoint/2010/main" val="1942532360"/>
+      </p:ext>
+    </p:extLst>
+  </p:cSld>
+  <p:clrMapOvr>
+    <a:masterClrMapping/>
+  </p:clrMapOvr>
+</p:sld>
+</file>
+
+<file path=ppt/slides/slide30.xml><?xml version="1.0" encoding="utf-8"?>
 <p:sld xmlns:a="http://schemas.openxmlformats.org/drawingml/2006/main" xmlns:r="http://schemas.openxmlformats.org/officeDocument/2006/relationships" xmlns:p="http://schemas.openxmlformats.org/presentationml/2006/main">
   <p:cSld>
     <p:spTree>
@@ -11324,312 +12090,7 @@
 </p:sld>
 </file>
 
-<file path=ppt/slides/slide3.xml><?xml version="1.0" encoding="utf-8"?>
-<p:sld xmlns:a="http://schemas.openxmlformats.org/drawingml/2006/main" xmlns:r="http://schemas.openxmlformats.org/officeDocument/2006/relationships" xmlns:p="http://schemas.openxmlformats.org/presentationml/2006/main">
-  <p:cSld>
-    <p:spTree>
-      <p:nvGrpSpPr>
-        <p:cNvPr id="1" name=""/>
-        <p:cNvGrpSpPr/>
-        <p:nvPr/>
-      </p:nvGrpSpPr>
-      <p:grpSpPr>
-        <a:xfrm>
-          <a:off x="0" y="0"/>
-          <a:ext cx="0" cy="0"/>
-          <a:chOff x="0" y="0"/>
-          <a:chExt cx="0" cy="0"/>
-        </a:xfrm>
-      </p:grpSpPr>
-      <p:sp>
-        <p:nvSpPr>
-          <p:cNvPr id="2" name="제목 1">
-            <a:extLst>
-              <a:ext uri="{FF2B5EF4-FFF2-40B4-BE49-F238E27FC236}">
-                <a16:creationId xmlns:a16="http://schemas.microsoft.com/office/drawing/2014/main" id="{85E16178-17B0-5641-76A2-7A0CA77DB6EB}"/>
-              </a:ext>
-            </a:extLst>
-          </p:cNvPr>
-          <p:cNvSpPr>
-            <a:spLocks noGrp="1"/>
-          </p:cNvSpPr>
-          <p:nvPr>
-            <p:ph type="title" idx="4294967295"/>
-          </p:nvPr>
-        </p:nvSpPr>
-        <p:spPr>
-          <a:xfrm>
-            <a:off x="0" y="18255"/>
-            <a:ext cx="10515600" cy="850425"/>
-          </a:xfrm>
-        </p:spPr>
-        <p:txBody>
-          <a:bodyPr>
-            <a:normAutofit/>
-          </a:bodyPr>
-          <a:lstStyle/>
-          <a:p>
-            <a:r>
-              <a:rPr lang="en-US" altLang="ko-KR" sz="5400" dirty="0"/>
-              <a:t>Render</a:t>
-            </a:r>
-            <a:endParaRPr lang="ko-KR" altLang="en-US" sz="5400" dirty="0"/>
-          </a:p>
-        </p:txBody>
-      </p:sp>
-      <mc:AlternateContent xmlns:mc="http://schemas.openxmlformats.org/markup-compatibility/2006" xmlns:pslz="http://schemas.microsoft.com/office/powerpoint/2016/slidezoom">
-        <mc:Choice Requires="pslz">
-          <p:graphicFrame>
-            <p:nvGraphicFramePr>
-              <p:cNvPr id="5" name="슬라이드 확대/축소 4">
-                <a:extLst>
-                  <a:ext uri="{FF2B5EF4-FFF2-40B4-BE49-F238E27FC236}">
-                    <a16:creationId xmlns:a16="http://schemas.microsoft.com/office/drawing/2014/main" id="{03BEAF41-04DA-51CD-9AA7-45495F5B0EFB}"/>
-                  </a:ext>
-                </a:extLst>
-              </p:cNvPr>
-              <p:cNvGraphicFramePr>
-                <a:graphicFrameLocks noChangeAspect="1"/>
-              </p:cNvGraphicFramePr>
-              <p:nvPr>
-                <p:extLst>
-                  <p:ext uri="{D42A27DB-BD31-4B8C-83A1-F6EECF244321}">
-                    <p14:modId xmlns:p14="http://schemas.microsoft.com/office/powerpoint/2010/main" val="1674305885"/>
-                  </p:ext>
-                </p:extLst>
-              </p:nvPr>
-            </p:nvGraphicFramePr>
-            <p:xfrm>
-              <a:off x="0" y="1428084"/>
-              <a:ext cx="7792774" cy="4383435"/>
-            </p:xfrm>
-            <a:graphic>
-              <a:graphicData uri="http://schemas.microsoft.com/office/powerpoint/2016/slidezoom">
-                <pslz:sldZm>
-                  <pslz:sldZmObj sldId="261" cId="3409075809">
-                    <pslz:zmPr id="{87D8E69D-5F44-4570-B3F7-073FACC1EEA8}" returnToParent="0" transitionDur="1000">
-                      <p166:blipFill xmlns:p166="http://schemas.microsoft.com/office/powerpoint/2016/6/main">
-                        <a:blip r:embed="rId2"/>
-                        <a:stretch>
-                          <a:fillRect/>
-                        </a:stretch>
-                      </p166:blipFill>
-                      <p166:spPr xmlns:p166="http://schemas.microsoft.com/office/powerpoint/2016/6/main">
-                        <a:xfrm>
-                          <a:off x="0" y="0"/>
-                          <a:ext cx="7792774" cy="4383435"/>
-                        </a:xfrm>
-                        <a:prstGeom prst="rect">
-                          <a:avLst/>
-                        </a:prstGeom>
-                        <a:ln w="3175">
-                          <a:solidFill>
-                            <a:prstClr val="ltGray"/>
-                          </a:solidFill>
-                        </a:ln>
-                      </p166:spPr>
-                    </pslz:zmPr>
-                  </pslz:sldZmObj>
-                </pslz:sldZm>
-              </a:graphicData>
-            </a:graphic>
-          </p:graphicFrame>
-        </mc:Choice>
-        <mc:Fallback xmlns="">
-          <p:pic>
-            <p:nvPicPr>
-              <p:cNvPr id="5" name="슬라이드 확대/축소 4">
-                <a:hlinkClick r:id="rId3" action="ppaction://hlinksldjump"/>
-                <a:extLst>
-                  <a:ext uri="{FF2B5EF4-FFF2-40B4-BE49-F238E27FC236}">
-                    <a16:creationId xmlns:a16="http://schemas.microsoft.com/office/drawing/2014/main" id="{03BEAF41-04DA-51CD-9AA7-45495F5B0EFB}"/>
-                  </a:ext>
-                </a:extLst>
-              </p:cNvPr>
-              <p:cNvPicPr>
-                <a:picLocks noGrp="1" noRot="1" noChangeAspect="1" noMove="1" noResize="1" noEditPoints="1" noAdjustHandles="1" noChangeArrowheads="1" noChangeShapeType="1"/>
-              </p:cNvPicPr>
-              <p:nvPr/>
-            </p:nvPicPr>
-            <p:blipFill>
-              <a:blip r:embed="rId4"/>
-              <a:stretch>
-                <a:fillRect/>
-              </a:stretch>
-            </p:blipFill>
-            <p:spPr>
-              <a:xfrm>
-                <a:off x="0" y="1428084"/>
-                <a:ext cx="7792774" cy="4383435"/>
-              </a:xfrm>
-              <a:prstGeom prst="rect">
-                <a:avLst/>
-              </a:prstGeom>
-              <a:ln w="3175">
-                <a:solidFill>
-                  <a:prstClr val="ltGray"/>
-                </a:solidFill>
-              </a:ln>
-            </p:spPr>
-          </p:pic>
-        </mc:Fallback>
-      </mc:AlternateContent>
-      <mc:AlternateContent xmlns:mc="http://schemas.openxmlformats.org/markup-compatibility/2006" xmlns:pslz="http://schemas.microsoft.com/office/powerpoint/2016/slidezoom">
-        <mc:Choice Requires="pslz">
-          <p:graphicFrame>
-            <p:nvGraphicFramePr>
-              <p:cNvPr id="7" name="슬라이드 확대/축소 6">
-                <a:extLst>
-                  <a:ext uri="{FF2B5EF4-FFF2-40B4-BE49-F238E27FC236}">
-                    <a16:creationId xmlns:a16="http://schemas.microsoft.com/office/drawing/2014/main" id="{5C497EDE-4B29-D25D-0F65-A42F6799D2DD}"/>
-                  </a:ext>
-                </a:extLst>
-              </p:cNvPr>
-              <p:cNvGraphicFramePr>
-                <a:graphicFrameLocks noChangeAspect="1"/>
-              </p:cNvGraphicFramePr>
-              <p:nvPr>
-                <p:extLst>
-                  <p:ext uri="{D42A27DB-BD31-4B8C-83A1-F6EECF244321}">
-                    <p14:modId xmlns:p14="http://schemas.microsoft.com/office/powerpoint/2010/main" val="998267273"/>
-                  </p:ext>
-                </p:extLst>
-              </p:nvPr>
-            </p:nvGraphicFramePr>
-            <p:xfrm>
-              <a:off x="7792774" y="3358483"/>
-              <a:ext cx="4360953" cy="2453036"/>
-            </p:xfrm>
-            <a:graphic>
-              <a:graphicData uri="http://schemas.microsoft.com/office/powerpoint/2016/slidezoom">
-                <pslz:sldZm>
-                  <pslz:sldZmObj sldId="262" cId="1872162543">
-                    <pslz:zmPr id="{BDC9DA41-B291-4C0C-B1ED-02A85E5FF9C0}" returnToParent="0" transitionDur="1000">
-                      <p166:blipFill xmlns:p166="http://schemas.microsoft.com/office/powerpoint/2016/6/main">
-                        <a:blip r:embed="rId5"/>
-                        <a:stretch>
-                          <a:fillRect/>
-                        </a:stretch>
-                      </p166:blipFill>
-                      <p166:spPr xmlns:p166="http://schemas.microsoft.com/office/powerpoint/2016/6/main">
-                        <a:xfrm>
-                          <a:off x="0" y="0"/>
-                          <a:ext cx="4360953" cy="2453036"/>
-                        </a:xfrm>
-                        <a:prstGeom prst="rect">
-                          <a:avLst/>
-                        </a:prstGeom>
-                        <a:ln w="3175">
-                          <a:solidFill>
-                            <a:prstClr val="ltGray"/>
-                          </a:solidFill>
-                        </a:ln>
-                      </p166:spPr>
-                    </pslz:zmPr>
-                  </pslz:sldZmObj>
-                </pslz:sldZm>
-              </a:graphicData>
-            </a:graphic>
-          </p:graphicFrame>
-        </mc:Choice>
-        <mc:Fallback xmlns="">
-          <p:pic>
-            <p:nvPicPr>
-              <p:cNvPr id="7" name="슬라이드 확대/축소 6">
-                <a:hlinkClick r:id="rId6" action="ppaction://hlinksldjump"/>
-                <a:extLst>
-                  <a:ext uri="{FF2B5EF4-FFF2-40B4-BE49-F238E27FC236}">
-                    <a16:creationId xmlns:a16="http://schemas.microsoft.com/office/drawing/2014/main" id="{5C497EDE-4B29-D25D-0F65-A42F6799D2DD}"/>
-                  </a:ext>
-                </a:extLst>
-              </p:cNvPr>
-              <p:cNvPicPr>
-                <a:picLocks noGrp="1" noRot="1" noChangeAspect="1" noMove="1" noResize="1" noEditPoints="1" noAdjustHandles="1" noChangeArrowheads="1" noChangeShapeType="1"/>
-              </p:cNvPicPr>
-              <p:nvPr/>
-            </p:nvPicPr>
-            <p:blipFill>
-              <a:blip r:embed="rId7"/>
-              <a:stretch>
-                <a:fillRect/>
-              </a:stretch>
-            </p:blipFill>
-            <p:spPr>
-              <a:xfrm>
-                <a:off x="7792774" y="3358483"/>
-                <a:ext cx="4360953" cy="2453036"/>
-              </a:xfrm>
-              <a:prstGeom prst="rect">
-                <a:avLst/>
-              </a:prstGeom>
-              <a:ln w="3175">
-                <a:solidFill>
-                  <a:prstClr val="ltGray"/>
-                </a:solidFill>
-              </a:ln>
-            </p:spPr>
-          </p:pic>
-        </mc:Fallback>
-      </mc:AlternateContent>
-      <p:sp>
-        <p:nvSpPr>
-          <p:cNvPr id="8" name="TextBox 7">
-            <a:extLst>
-              <a:ext uri="{FF2B5EF4-FFF2-40B4-BE49-F238E27FC236}">
-                <a16:creationId xmlns:a16="http://schemas.microsoft.com/office/drawing/2014/main" id="{4D13AE43-1128-595C-DAD6-A48CA2EF3E1B}"/>
-              </a:ext>
-            </a:extLst>
-          </p:cNvPr>
-          <p:cNvSpPr txBox="1"/>
-          <p:nvPr/>
-        </p:nvSpPr>
-        <p:spPr>
-          <a:xfrm>
-            <a:off x="0" y="784433"/>
-            <a:ext cx="2300630" cy="369332"/>
-          </a:xfrm>
-          <a:prstGeom prst="rect">
-            <a:avLst/>
-          </a:prstGeom>
-          <a:noFill/>
-          <a:ln w="25400">
-            <a:solidFill>
-              <a:schemeClr val="tx1"/>
-            </a:solidFill>
-          </a:ln>
-        </p:spPr>
-        <p:txBody>
-          <a:bodyPr wrap="none" rtlCol="0">
-            <a:spAutoFit/>
-          </a:bodyPr>
-          <a:lstStyle/>
-          <a:p>
-            <a:r>
-              <a:rPr lang="ko-KR" altLang="en-US" dirty="0"/>
-              <a:t>무엇을 그릴 것인가</a:t>
-            </a:r>
-            <a:r>
-              <a:rPr lang="en-US" altLang="ko-KR" dirty="0"/>
-              <a:t>?</a:t>
-            </a:r>
-            <a:endParaRPr lang="ko-KR" altLang="en-US" dirty="0"/>
-          </a:p>
-        </p:txBody>
-      </p:sp>
-    </p:spTree>
-    <p:extLst>
-      <p:ext uri="{BB962C8B-B14F-4D97-AF65-F5344CB8AC3E}">
-        <p14:creationId xmlns:p14="http://schemas.microsoft.com/office/powerpoint/2010/main" val="1942532360"/>
-      </p:ext>
-    </p:extLst>
-  </p:cSld>
-  <p:clrMapOvr>
-    <a:masterClrMapping/>
-  </p:clrMapOvr>
-</p:sld>
-</file>
-
-<file path=ppt/slides/slide30.xml><?xml version="1.0" encoding="utf-8"?>
+<file path=ppt/slides/slide31.xml><?xml version="1.0" encoding="utf-8"?>
 <p:sld xmlns:a="http://schemas.openxmlformats.org/drawingml/2006/main" xmlns:r="http://schemas.openxmlformats.org/officeDocument/2006/relationships" xmlns:p="http://schemas.openxmlformats.org/presentationml/2006/main">
   <p:cSld>
     <p:spTree>
@@ -12039,7 +12500,7 @@
 </p:sld>
 </file>
 
-<file path=ppt/slides/slide31.xml><?xml version="1.0" encoding="utf-8"?>
+<file path=ppt/slides/slide32.xml><?xml version="1.0" encoding="utf-8"?>
 <p:sld xmlns:a="http://schemas.openxmlformats.org/drawingml/2006/main" xmlns:r="http://schemas.openxmlformats.org/officeDocument/2006/relationships" xmlns:p="http://schemas.openxmlformats.org/presentationml/2006/main">
   <p:cSld>
     <p:spTree>
@@ -12281,7 +12742,7 @@
 </p:sld>
 </file>
 
-<file path=ppt/slides/slide32.xml><?xml version="1.0" encoding="utf-8"?>
+<file path=ppt/slides/slide33.xml><?xml version="1.0" encoding="utf-8"?>
 <p:sld xmlns:a="http://schemas.openxmlformats.org/drawingml/2006/main" xmlns:r="http://schemas.openxmlformats.org/officeDocument/2006/relationships" xmlns:p="http://schemas.openxmlformats.org/presentationml/2006/main">
   <p:cSld>
     <p:spTree>
@@ -12689,7 +13150,7 @@
 </p:sld>
 </file>
 
-<file path=ppt/slides/slide33.xml><?xml version="1.0" encoding="utf-8"?>
+<file path=ppt/slides/slide34.xml><?xml version="1.0" encoding="utf-8"?>
 <p:sld xmlns:a="http://schemas.openxmlformats.org/drawingml/2006/main" xmlns:r="http://schemas.openxmlformats.org/officeDocument/2006/relationships" xmlns:p="http://schemas.openxmlformats.org/presentationml/2006/main">
   <p:cSld>
     <p:spTree>
@@ -13075,7 +13536,7 @@
 </p:sld>
 </file>
 
-<file path=ppt/slides/slide34.xml><?xml version="1.0" encoding="utf-8"?>
+<file path=ppt/slides/slide35.xml><?xml version="1.0" encoding="utf-8"?>
 <p:sld xmlns:a="http://schemas.openxmlformats.org/drawingml/2006/main" xmlns:r="http://schemas.openxmlformats.org/officeDocument/2006/relationships" xmlns:p="http://schemas.openxmlformats.org/presentationml/2006/main">
   <p:cSld>
     <p:spTree>
@@ -13515,7 +13976,7 @@
 </p:sld>
 </file>
 
-<file path=ppt/slides/slide35.xml><?xml version="1.0" encoding="utf-8"?>
+<file path=ppt/slides/slide36.xml><?xml version="1.0" encoding="utf-8"?>
 <p:sld xmlns:a="http://schemas.openxmlformats.org/drawingml/2006/main" xmlns:r="http://schemas.openxmlformats.org/officeDocument/2006/relationships" xmlns:p="http://schemas.openxmlformats.org/presentationml/2006/main">
   <p:cSld>
     <p:spTree>
@@ -13724,7 +14185,7 @@
 </p:sld>
 </file>
 
-<file path=ppt/slides/slide36.xml><?xml version="1.0" encoding="utf-8"?>
+<file path=ppt/slides/slide37.xml><?xml version="1.0" encoding="utf-8"?>
 <p:sld xmlns:a="http://schemas.openxmlformats.org/drawingml/2006/main" xmlns:r="http://schemas.openxmlformats.org/officeDocument/2006/relationships" xmlns:p="http://schemas.openxmlformats.org/presentationml/2006/main">
   <p:cSld>
     <p:spTree>
@@ -15359,7 +15820,7 @@
 </p:sld>
 </file>
 
-<file path=ppt/slides/slide37.xml><?xml version="1.0" encoding="utf-8"?>
+<file path=ppt/slides/slide38.xml><?xml version="1.0" encoding="utf-8"?>
 <p:sld xmlns:a="http://schemas.openxmlformats.org/drawingml/2006/main" xmlns:r="http://schemas.openxmlformats.org/officeDocument/2006/relationships" xmlns:p="http://schemas.openxmlformats.org/presentationml/2006/main">
   <p:cSld>
     <p:spTree>
@@ -16903,7 +17364,7 @@
 </p:sld>
 </file>
 
-<file path=ppt/slides/slide38.xml><?xml version="1.0" encoding="utf-8"?>
+<file path=ppt/slides/slide39.xml><?xml version="1.0" encoding="utf-8"?>
 <p:sld xmlns:a="http://schemas.openxmlformats.org/drawingml/2006/main" xmlns:r="http://schemas.openxmlformats.org/officeDocument/2006/relationships" xmlns:p="http://schemas.openxmlformats.org/presentationml/2006/main">
   <p:cSld>
     <p:spTree>
@@ -18657,7 +19118,7 @@
         </p:nvSpPr>
         <p:spPr>
           <a:xfrm>
-            <a:off x="510734" y="2978131"/>
+            <a:off x="510734" y="2471238"/>
             <a:ext cx="1265090" cy="369332"/>
           </a:xfrm>
           <a:prstGeom prst="rect">
@@ -18693,7 +19154,7 @@
         </p:nvSpPr>
         <p:spPr>
           <a:xfrm>
-            <a:off x="140150" y="5970336"/>
+            <a:off x="140150" y="4269988"/>
             <a:ext cx="1288558" cy="369332"/>
           </a:xfrm>
           <a:prstGeom prst="rect">
@@ -18843,7 +19304,7 @@
         </p:nvSpPr>
         <p:spPr>
           <a:xfrm>
-            <a:off x="440128" y="2598797"/>
+            <a:off x="440128" y="2091904"/>
             <a:ext cx="690581" cy="369332"/>
           </a:xfrm>
           <a:prstGeom prst="rect">
@@ -18884,7 +19345,7 @@
         </p:nvSpPr>
         <p:spPr>
           <a:xfrm>
-            <a:off x="1130708" y="2598797"/>
+            <a:off x="1130708" y="2091904"/>
             <a:ext cx="1759975" cy="369332"/>
           </a:xfrm>
           <a:prstGeom prst="rect">
@@ -18925,7 +19386,7 @@
         </p:nvSpPr>
         <p:spPr>
           <a:xfrm>
-            <a:off x="2890682" y="2598797"/>
+            <a:off x="2890682" y="2091904"/>
             <a:ext cx="3156153" cy="369332"/>
           </a:xfrm>
           <a:prstGeom prst="rect">
@@ -18966,7 +19427,7 @@
         </p:nvSpPr>
         <p:spPr>
           <a:xfrm>
-            <a:off x="6046832" y="2598797"/>
+            <a:off x="6046832" y="2091904"/>
             <a:ext cx="1691151" cy="369332"/>
           </a:xfrm>
           <a:prstGeom prst="rect">
@@ -19007,7 +19468,7 @@
         </p:nvSpPr>
         <p:spPr>
           <a:xfrm>
-            <a:off x="7737977" y="2598797"/>
+            <a:off x="7737977" y="2091904"/>
             <a:ext cx="3549444" cy="369332"/>
           </a:xfrm>
           <a:prstGeom prst="rect">
@@ -19050,8 +19511,8 @@
         </p:nvCxnSpPr>
         <p:spPr>
           <a:xfrm flipH="1">
-            <a:off x="414792" y="1757213"/>
-            <a:ext cx="25336" cy="841584"/>
+            <a:off x="440127" y="1757213"/>
+            <a:ext cx="1" cy="280011"/>
           </a:xfrm>
           <a:prstGeom prst="straightConnector1">
             <a:avLst/>
@@ -19095,7 +19556,7 @@
         <p:spPr>
           <a:xfrm>
             <a:off x="1130707" y="1757213"/>
-            <a:ext cx="0" cy="861588"/>
+            <a:ext cx="7382" cy="334691"/>
           </a:xfrm>
           <a:prstGeom prst="straightConnector1">
             <a:avLst/>
@@ -19137,9 +19598,9 @@
           <p:nvPr/>
         </p:nvCxnSpPr>
         <p:spPr>
-          <a:xfrm>
-            <a:off x="2890683" y="1747211"/>
-            <a:ext cx="0" cy="861588"/>
+          <a:xfrm flipH="1">
+            <a:off x="2890682" y="1747211"/>
+            <a:ext cx="1" cy="344693"/>
           </a:xfrm>
           <a:prstGeom prst="straightConnector1">
             <a:avLst/>
@@ -19183,7 +19644,7 @@
         <p:spPr>
           <a:xfrm>
             <a:off x="4355689" y="1757213"/>
-            <a:ext cx="0" cy="841584"/>
+            <a:ext cx="0" cy="334691"/>
           </a:xfrm>
           <a:prstGeom prst="straightConnector1">
             <a:avLst/>
@@ -19227,7 +19688,7 @@
         <p:spPr>
           <a:xfrm>
             <a:off x="4355689" y="1757213"/>
-            <a:ext cx="1698520" cy="841584"/>
+            <a:ext cx="1740311" cy="334691"/>
           </a:xfrm>
           <a:prstGeom prst="straightConnector1">
             <a:avLst/>
@@ -19271,7 +19732,7 @@
         <p:spPr>
           <a:xfrm>
             <a:off x="6046832" y="1757213"/>
-            <a:ext cx="1683771" cy="841584"/>
+            <a:ext cx="1683761" cy="326177"/>
           </a:xfrm>
           <a:prstGeom prst="straightConnector1">
             <a:avLst/>
@@ -19312,7 +19773,7 @@
         </p:nvSpPr>
         <p:spPr>
           <a:xfrm>
-            <a:off x="4395031" y="2598797"/>
+            <a:off x="4395031" y="2091904"/>
             <a:ext cx="1644420" cy="369332"/>
           </a:xfrm>
           <a:prstGeom prst="rect">
@@ -19353,7 +19814,7 @@
         </p:nvSpPr>
         <p:spPr>
           <a:xfrm>
-            <a:off x="8554634" y="3034550"/>
+            <a:off x="8554634" y="2527657"/>
             <a:ext cx="3529556" cy="276999"/>
           </a:xfrm>
           <a:prstGeom prst="rect">
@@ -19400,7 +19861,7 @@
         </p:nvSpPr>
         <p:spPr>
           <a:xfrm>
-            <a:off x="121798" y="4361035"/>
+            <a:off x="121798" y="3267732"/>
             <a:ext cx="1604863" cy="369332"/>
           </a:xfrm>
           <a:prstGeom prst="rect">
@@ -19438,8 +19899,8 @@
         </p:nvCxnSpPr>
         <p:spPr>
           <a:xfrm flipH="1">
-            <a:off x="427460" y="2988384"/>
-            <a:ext cx="20048" cy="1027032"/>
+            <a:off x="433793" y="2481491"/>
+            <a:ext cx="13715" cy="451997"/>
           </a:xfrm>
           <a:prstGeom prst="straightConnector1">
             <a:avLst/>
@@ -19480,7 +19941,7 @@
         </p:nvSpPr>
         <p:spPr>
           <a:xfrm>
-            <a:off x="447509" y="4001705"/>
+            <a:off x="447509" y="2908402"/>
             <a:ext cx="690581" cy="369332"/>
           </a:xfrm>
           <a:prstGeom prst="rect">
@@ -19521,7 +19982,7 @@
         </p:nvSpPr>
         <p:spPr>
           <a:xfrm>
-            <a:off x="1138089" y="4001705"/>
+            <a:off x="1138089" y="2908402"/>
             <a:ext cx="1759975" cy="369332"/>
           </a:xfrm>
           <a:prstGeom prst="rect">
@@ -19562,7 +20023,7 @@
         </p:nvSpPr>
         <p:spPr>
           <a:xfrm>
-            <a:off x="2898063" y="4001705"/>
+            <a:off x="2898063" y="2908402"/>
             <a:ext cx="3156153" cy="369332"/>
           </a:xfrm>
           <a:prstGeom prst="rect">
@@ -19603,7 +20064,7 @@
         </p:nvSpPr>
         <p:spPr>
           <a:xfrm>
-            <a:off x="6054213" y="4001705"/>
+            <a:off x="6054213" y="2908402"/>
             <a:ext cx="1691151" cy="369332"/>
           </a:xfrm>
           <a:prstGeom prst="rect">
@@ -19644,7 +20105,7 @@
         </p:nvSpPr>
         <p:spPr>
           <a:xfrm>
-            <a:off x="7745358" y="4001705"/>
+            <a:off x="7745358" y="2908402"/>
             <a:ext cx="3549444" cy="369332"/>
           </a:xfrm>
           <a:prstGeom prst="rect">
@@ -19685,7 +20146,7 @@
         </p:nvSpPr>
         <p:spPr>
           <a:xfrm>
-            <a:off x="4402412" y="4001705"/>
+            <a:off x="4402412" y="2908402"/>
             <a:ext cx="1644420" cy="369332"/>
           </a:xfrm>
           <a:prstGeom prst="rect">
@@ -19727,9 +20188,9 @@
           <p:nvPr/>
         </p:nvCxnSpPr>
         <p:spPr>
-          <a:xfrm flipH="1">
-            <a:off x="7737974" y="2988384"/>
-            <a:ext cx="20048" cy="1027032"/>
+          <a:xfrm>
+            <a:off x="7758022" y="2481491"/>
+            <a:ext cx="0" cy="426911"/>
           </a:xfrm>
           <a:prstGeom prst="straightConnector1">
             <a:avLst/>
@@ -19770,7 +20231,7 @@
         </p:nvSpPr>
         <p:spPr>
           <a:xfrm>
-            <a:off x="6651573" y="4453368"/>
+            <a:off x="6651573" y="3360065"/>
             <a:ext cx="5540427" cy="276999"/>
           </a:xfrm>
           <a:prstGeom prst="rect">
@@ -19834,7 +20295,7 @@
         </p:nvSpPr>
         <p:spPr>
           <a:xfrm>
-            <a:off x="447509" y="5611006"/>
+            <a:off x="447509" y="3910658"/>
             <a:ext cx="690581" cy="369332"/>
           </a:xfrm>
           <a:prstGeom prst="rect">
@@ -19875,7 +20336,7 @@
         </p:nvSpPr>
         <p:spPr>
           <a:xfrm>
-            <a:off x="1138089" y="5611006"/>
+            <a:off x="1138089" y="3910658"/>
             <a:ext cx="1759975" cy="369332"/>
           </a:xfrm>
           <a:prstGeom prst="rect">
@@ -19916,7 +20377,7 @@
         </p:nvSpPr>
         <p:spPr>
           <a:xfrm>
-            <a:off x="2898063" y="5611006"/>
+            <a:off x="2898063" y="3910658"/>
             <a:ext cx="3156153" cy="369332"/>
           </a:xfrm>
           <a:prstGeom prst="rect">
@@ -19957,7 +20418,7 @@
         </p:nvSpPr>
         <p:spPr>
           <a:xfrm>
-            <a:off x="6054213" y="5611006"/>
+            <a:off x="6054213" y="3910658"/>
             <a:ext cx="1691151" cy="369332"/>
           </a:xfrm>
           <a:prstGeom prst="rect">
@@ -19998,7 +20459,7 @@
         </p:nvSpPr>
         <p:spPr>
           <a:xfrm>
-            <a:off x="7745358" y="5611006"/>
+            <a:off x="7745358" y="3910658"/>
             <a:ext cx="3549444" cy="369332"/>
           </a:xfrm>
           <a:prstGeom prst="rect">
@@ -20039,7 +20500,7 @@
         </p:nvSpPr>
         <p:spPr>
           <a:xfrm>
-            <a:off x="4402412" y="5611006"/>
+            <a:off x="4402412" y="3910658"/>
             <a:ext cx="1644420" cy="369332"/>
           </a:xfrm>
           <a:prstGeom prst="rect">
@@ -20081,9 +20542,9 @@
           <p:nvPr/>
         </p:nvCxnSpPr>
         <p:spPr>
-          <a:xfrm>
-            <a:off x="447508" y="4805301"/>
-            <a:ext cx="0" cy="841287"/>
+          <a:xfrm flipH="1">
+            <a:off x="440128" y="3292818"/>
+            <a:ext cx="7380" cy="617840"/>
           </a:xfrm>
           <a:prstGeom prst="straightConnector1">
             <a:avLst/>
@@ -20125,9 +20586,9 @@
           <p:nvPr/>
         </p:nvCxnSpPr>
         <p:spPr>
-          <a:xfrm flipH="1">
-            <a:off x="7745358" y="4730367"/>
-            <a:ext cx="7387" cy="880639"/>
+          <a:xfrm>
+            <a:off x="7745358" y="3267732"/>
+            <a:ext cx="7387" cy="642926"/>
           </a:xfrm>
           <a:prstGeom prst="straightConnector1">
             <a:avLst/>
@@ -20154,6 +20615,103 @@
           </a:fontRef>
         </p:style>
       </p:cxnSp>
+      <mc:AlternateContent xmlns:mc="http://schemas.openxmlformats.org/markup-compatibility/2006">
+        <mc:Choice xmlns:pslz="http://schemas.microsoft.com/office/powerpoint/2016/slidezoom" Requires="pslz">
+          <p:graphicFrame>
+            <p:nvGraphicFramePr>
+              <p:cNvPr id="33" name="슬라이드 확대/축소 32">
+                <a:extLst>
+                  <a:ext uri="{FF2B5EF4-FFF2-40B4-BE49-F238E27FC236}">
+                    <a16:creationId xmlns:a16="http://schemas.microsoft.com/office/drawing/2014/main" id="{719920B9-52AF-7979-CBF3-6D4417F30F18}"/>
+                  </a:ext>
+                </a:extLst>
+              </p:cNvPr>
+              <p:cNvGraphicFramePr>
+                <a:graphicFrameLocks noChangeAspect="1"/>
+              </p:cNvGraphicFramePr>
+              <p:nvPr>
+                <p:extLst>
+                  <p:ext uri="{D42A27DB-BD31-4B8C-83A1-F6EECF244321}">
+                    <p14:modId xmlns:p14="http://schemas.microsoft.com/office/powerpoint/2010/main" val="1671951764"/>
+                  </p:ext>
+                </p:extLst>
+              </p:nvPr>
+            </p:nvGraphicFramePr>
+            <p:xfrm>
+              <a:off x="433793" y="4639320"/>
+              <a:ext cx="3785294" cy="2129228"/>
+            </p:xfrm>
+            <a:graphic>
+              <a:graphicData uri="http://schemas.microsoft.com/office/powerpoint/2016/slidezoom">
+                <pslz:sldZm>
+                  <pslz:sldZmObj sldId="294" cId="932065989">
+                    <pslz:zmPr id="{5073C7AB-0B7C-4532-8F90-51F0BDE4C8D2}" returnToParent="0" transitionDur="1000">
+                      <p166:blipFill xmlns:p166="http://schemas.microsoft.com/office/powerpoint/2016/6/main">
+                        <a:blip r:embed="rId2"/>
+                        <a:stretch>
+                          <a:fillRect/>
+                        </a:stretch>
+                      </p166:blipFill>
+                      <p166:spPr xmlns:p166="http://schemas.microsoft.com/office/powerpoint/2016/6/main">
+                        <a:xfrm>
+                          <a:off x="0" y="0"/>
+                          <a:ext cx="3785294" cy="2129228"/>
+                        </a:xfrm>
+                        <a:prstGeom prst="rect">
+                          <a:avLst/>
+                        </a:prstGeom>
+                        <a:ln w="3175">
+                          <a:solidFill>
+                            <a:prstClr val="ltGray"/>
+                          </a:solidFill>
+                        </a:ln>
+                      </p166:spPr>
+                    </pslz:zmPr>
+                  </pslz:sldZmObj>
+                </pslz:sldZm>
+              </a:graphicData>
+            </a:graphic>
+          </p:graphicFrame>
+        </mc:Choice>
+        <mc:Fallback>
+          <p:pic>
+            <p:nvPicPr>
+              <p:cNvPr id="33" name="슬라이드 확대/축소 32">
+                <a:hlinkClick r:id="rId3" action="ppaction://hlinksldjump"/>
+                <a:extLst>
+                  <a:ext uri="{FF2B5EF4-FFF2-40B4-BE49-F238E27FC236}">
+                    <a16:creationId xmlns:a16="http://schemas.microsoft.com/office/drawing/2014/main" id="{719920B9-52AF-7979-CBF3-6D4417F30F18}"/>
+                  </a:ext>
+                </a:extLst>
+              </p:cNvPr>
+              <p:cNvPicPr>
+                <a:picLocks noGrp="1" noRot="1" noChangeAspect="1" noMove="1" noResize="1" noEditPoints="1" noAdjustHandles="1" noChangeArrowheads="1" noChangeShapeType="1"/>
+              </p:cNvPicPr>
+              <p:nvPr/>
+            </p:nvPicPr>
+            <p:blipFill>
+              <a:blip r:embed="rId2"/>
+              <a:stretch>
+                <a:fillRect/>
+              </a:stretch>
+            </p:blipFill>
+            <p:spPr>
+              <a:xfrm>
+                <a:off x="433793" y="4639320"/>
+                <a:ext cx="3785294" cy="2129228"/>
+              </a:xfrm>
+              <a:prstGeom prst="rect">
+                <a:avLst/>
+              </a:prstGeom>
+              <a:ln w="3175">
+                <a:solidFill>
+                  <a:prstClr val="ltGray"/>
+                </a:solidFill>
+              </a:ln>
+            </p:spPr>
+          </p:pic>
+        </mc:Fallback>
+      </mc:AlternateContent>
     </p:spTree>
     <p:extLst>
       <p:ext uri="{BB962C8B-B14F-4D97-AF65-F5344CB8AC3E}">
@@ -20168,6 +20726,99 @@
 </file>
 
 <file path=ppt/slides/slide7.xml><?xml version="1.0" encoding="utf-8"?>
+<p:sld xmlns:a="http://schemas.openxmlformats.org/drawingml/2006/main" xmlns:r="http://schemas.openxmlformats.org/officeDocument/2006/relationships" xmlns:p="http://schemas.openxmlformats.org/presentationml/2006/main">
+  <p:cSld>
+    <p:spTree>
+      <p:nvGrpSpPr>
+        <p:cNvPr id="1" name=""/>
+        <p:cNvGrpSpPr/>
+        <p:nvPr/>
+      </p:nvGrpSpPr>
+      <p:grpSpPr>
+        <a:xfrm>
+          <a:off x="0" y="0"/>
+          <a:ext cx="0" cy="0"/>
+          <a:chOff x="0" y="0"/>
+          <a:chExt cx="0" cy="0"/>
+        </a:xfrm>
+      </p:grpSpPr>
+      <p:sp>
+        <p:nvSpPr>
+          <p:cNvPr id="2" name="제목 1">
+            <a:extLst>
+              <a:ext uri="{FF2B5EF4-FFF2-40B4-BE49-F238E27FC236}">
+                <a16:creationId xmlns:a16="http://schemas.microsoft.com/office/drawing/2014/main" id="{AB09E2D0-F179-5758-E73D-F3AE2D0B7249}"/>
+              </a:ext>
+            </a:extLst>
+          </p:cNvPr>
+          <p:cNvSpPr txBox="1">
+            <a:spLocks/>
+          </p:cNvSpPr>
+          <p:nvPr/>
+        </p:nvSpPr>
+        <p:spPr>
+          <a:xfrm>
+            <a:off x="0" y="18255"/>
+            <a:ext cx="11866880" cy="850425"/>
+          </a:xfrm>
+          <a:prstGeom prst="rect">
+            <a:avLst/>
+          </a:prstGeom>
+        </p:spPr>
+        <p:txBody>
+          <a:bodyPr vert="horz" lIns="91440" tIns="45720" rIns="91440" bIns="45720" rtlCol="0" anchor="ctr">
+            <a:normAutofit fontScale="97500"/>
+          </a:bodyPr>
+          <a:lstStyle>
+            <a:lvl1pPr algn="l" defTabSz="914400" rtl="0" eaLnBrk="1" latinLnBrk="1" hangingPunct="1">
+              <a:lnSpc>
+                <a:spcPct val="90000"/>
+              </a:lnSpc>
+              <a:spcBef>
+                <a:spcPct val="0"/>
+              </a:spcBef>
+              <a:buNone/>
+              <a:defRPr sz="4400" kern="1200">
+                <a:solidFill>
+                  <a:schemeClr val="tx1"/>
+                </a:solidFill>
+                <a:latin typeface="+mj-lt"/>
+                <a:ea typeface="+mj-ea"/>
+                <a:cs typeface="+mj-cs"/>
+              </a:defRPr>
+            </a:lvl1pPr>
+          </a:lstStyle>
+          <a:p>
+            <a:r>
+              <a:rPr lang="en-US" altLang="ko-KR" sz="5400"/>
+              <a:t>Zone</a:t>
+            </a:r>
+            <a:r>
+              <a:rPr lang="ko-KR" altLang="en-US" sz="5400"/>
+              <a:t>이 변할때의 </a:t>
+            </a:r>
+            <a:r>
+              <a:rPr lang="en-US" altLang="ko-KR" sz="5400"/>
+              <a:t>SVDescHeap</a:t>
+            </a:r>
+            <a:endParaRPr lang="ko-KR" altLang="en-US" sz="5400" dirty="0"/>
+          </a:p>
+        </p:txBody>
+      </p:sp>
+    </p:spTree>
+    <p:extLst>
+      <p:ext uri="{BB962C8B-B14F-4D97-AF65-F5344CB8AC3E}">
+        <p14:creationId xmlns:p14="http://schemas.microsoft.com/office/powerpoint/2010/main" val="932065989"/>
+      </p:ext>
+    </p:extLst>
+  </p:cSld>
+  <p:clrMapOvr>
+    <a:masterClrMapping/>
+  </p:clrMapOvr>
+</p:sld>
+</file>
+
+<file path=ppt/slides/slide8.xml><?xml version="1.0" encoding="utf-8"?>
 <p:sld xmlns:a="http://schemas.openxmlformats.org/drawingml/2006/main" xmlns:r="http://schemas.openxmlformats.org/officeDocument/2006/relationships" xmlns:p="http://schemas.openxmlformats.org/presentationml/2006/main">
   <p:cSld>
     <p:spTree>
@@ -21525,7 +22176,7 @@
 </p:sld>
 </file>
 
-<file path=ppt/slides/slide8.xml><?xml version="1.0" encoding="utf-8"?>
+<file path=ppt/slides/slide9.xml><?xml version="1.0" encoding="utf-8"?>
 <p:sld xmlns:a="http://schemas.openxmlformats.org/drawingml/2006/main" xmlns:r="http://schemas.openxmlformats.org/officeDocument/2006/relationships" xmlns:p="http://schemas.openxmlformats.org/presentationml/2006/main">
   <p:cSld>
     <p:spTree>
@@ -22844,466 +23495,6 @@
 </p:sld>
 </file>
 
-<file path=ppt/slides/slide9.xml><?xml version="1.0" encoding="utf-8"?>
-<p:sld xmlns:a="http://schemas.openxmlformats.org/drawingml/2006/main" xmlns:r="http://schemas.openxmlformats.org/officeDocument/2006/relationships" xmlns:p="http://schemas.openxmlformats.org/presentationml/2006/main">
-  <p:cSld>
-    <p:spTree>
-      <p:nvGrpSpPr>
-        <p:cNvPr id="1" name="">
-          <a:extLst>
-            <a:ext uri="{FF2B5EF4-FFF2-40B4-BE49-F238E27FC236}">
-              <a16:creationId xmlns:a16="http://schemas.microsoft.com/office/drawing/2014/main" id="{63DC0FAD-80DD-3F81-E810-F6E3C6FEEAB3}"/>
-            </a:ext>
-          </a:extLst>
-        </p:cNvPr>
-        <p:cNvGrpSpPr/>
-        <p:nvPr/>
-      </p:nvGrpSpPr>
-      <p:grpSpPr>
-        <a:xfrm>
-          <a:off x="0" y="0"/>
-          <a:ext cx="0" cy="0"/>
-          <a:chOff x="0" y="0"/>
-          <a:chExt cx="0" cy="0"/>
-        </a:xfrm>
-      </p:grpSpPr>
-      <p:sp>
-        <p:nvSpPr>
-          <p:cNvPr id="2" name="제목 1">
-            <a:extLst>
-              <a:ext uri="{FF2B5EF4-FFF2-40B4-BE49-F238E27FC236}">
-                <a16:creationId xmlns:a16="http://schemas.microsoft.com/office/drawing/2014/main" id="{EF2EA518-73B9-C10A-263D-8BA9BCFAF9A9}"/>
-              </a:ext>
-            </a:extLst>
-          </p:cNvPr>
-          <p:cNvSpPr>
-            <a:spLocks noGrp="1"/>
-          </p:cNvSpPr>
-          <p:nvPr>
-            <p:ph type="title" idx="4294967295"/>
-          </p:nvPr>
-        </p:nvSpPr>
-        <p:spPr>
-          <a:xfrm>
-            <a:off x="0" y="18255"/>
-            <a:ext cx="10515600" cy="850425"/>
-          </a:xfrm>
-        </p:spPr>
-        <p:txBody>
-          <a:bodyPr>
-            <a:normAutofit/>
-          </a:bodyPr>
-          <a:lstStyle/>
-          <a:p>
-            <a:r>
-              <a:rPr lang="en-US" altLang="ko-KR" sz="5400" dirty="0"/>
-              <a:t>View</a:t>
-            </a:r>
-            <a:r>
-              <a:rPr lang="ko-KR" altLang="en-US" sz="5400" dirty="0"/>
-              <a:t> </a:t>
-            </a:r>
-            <a:r>
-              <a:rPr lang="en-US" altLang="ko-KR" sz="5400" dirty="0"/>
-              <a:t>Frustum</a:t>
-            </a:r>
-            <a:r>
-              <a:rPr lang="ko-KR" altLang="en-US" sz="5400" dirty="0"/>
-              <a:t> </a:t>
-            </a:r>
-            <a:r>
-              <a:rPr lang="en-US" altLang="ko-KR" sz="5400" dirty="0"/>
-              <a:t>Culling</a:t>
-            </a:r>
-            <a:endParaRPr lang="ko-KR" altLang="en-US" sz="5400" dirty="0"/>
-          </a:p>
-        </p:txBody>
-      </p:sp>
-      <p:sp>
-        <p:nvSpPr>
-          <p:cNvPr id="3" name="TextBox 2">
-            <a:extLst>
-              <a:ext uri="{FF2B5EF4-FFF2-40B4-BE49-F238E27FC236}">
-                <a16:creationId xmlns:a16="http://schemas.microsoft.com/office/drawing/2014/main" id="{CAC6FA67-470F-213F-77A3-0454538B1C1D}"/>
-              </a:ext>
-            </a:extLst>
-          </p:cNvPr>
-          <p:cNvSpPr txBox="1"/>
-          <p:nvPr/>
-        </p:nvSpPr>
-        <p:spPr>
-          <a:xfrm>
-            <a:off x="12404" y="796412"/>
-            <a:ext cx="11704999" cy="3970318"/>
-          </a:xfrm>
-          <a:prstGeom prst="rect">
-            <a:avLst/>
-          </a:prstGeom>
-          <a:noFill/>
-        </p:spPr>
-        <p:txBody>
-          <a:bodyPr wrap="none" rtlCol="0">
-            <a:spAutoFit/>
-          </a:bodyPr>
-          <a:lstStyle/>
-          <a:p>
-            <a:r>
-              <a:rPr lang="ko-KR" altLang="en-US" dirty="0"/>
-              <a:t>하나의 뷰 포트는 두개의 </a:t>
-            </a:r>
-            <a:r>
-              <a:rPr lang="ko-KR" altLang="en-US" dirty="0" err="1"/>
-              <a:t>프러스텀을</a:t>
-            </a:r>
-            <a:r>
-              <a:rPr lang="ko-KR" altLang="en-US" dirty="0"/>
-              <a:t> 가질 수 있다</a:t>
-            </a:r>
-            <a:r>
-              <a:rPr lang="en-US" altLang="ko-KR" dirty="0"/>
-              <a:t>.</a:t>
-            </a:r>
-          </a:p>
-          <a:p>
-            <a:pPr marL="342900" indent="-342900">
-              <a:buAutoNum type="arabicPeriod"/>
-            </a:pPr>
-            <a:r>
-              <a:rPr lang="ko-KR" altLang="en-US" dirty="0"/>
-              <a:t>직교 </a:t>
-            </a:r>
-            <a:r>
-              <a:rPr lang="ko-KR" altLang="en-US" dirty="0" err="1"/>
-              <a:t>프러스텀</a:t>
-            </a:r>
-            <a:endParaRPr lang="en-US" altLang="ko-KR" dirty="0"/>
-          </a:p>
-          <a:p>
-            <a:pPr marL="342900" indent="-342900">
-              <a:buAutoNum type="arabicPeriod"/>
-            </a:pPr>
-            <a:r>
-              <a:rPr lang="ko-KR" altLang="en-US" dirty="0"/>
-              <a:t>원근 </a:t>
-            </a:r>
-            <a:r>
-              <a:rPr lang="ko-KR" altLang="en-US" dirty="0" err="1"/>
-              <a:t>프러스텀</a:t>
-            </a:r>
-            <a:endParaRPr lang="en-US" altLang="ko-KR" dirty="0"/>
-          </a:p>
-          <a:p>
-            <a:r>
-              <a:rPr lang="ko-KR" altLang="en-US" dirty="0"/>
-              <a:t>직교는 </a:t>
-            </a:r>
-            <a:r>
-              <a:rPr lang="ko-KR" altLang="en-US" dirty="0" err="1"/>
-              <a:t>디렉션</a:t>
-            </a:r>
-            <a:r>
-              <a:rPr lang="ko-KR" altLang="en-US" dirty="0"/>
-              <a:t> </a:t>
-            </a:r>
-            <a:r>
-              <a:rPr lang="ko-KR" altLang="en-US" dirty="0" err="1"/>
-              <a:t>라이팅의</a:t>
-            </a:r>
-            <a:r>
-              <a:rPr lang="ko-KR" altLang="en-US" dirty="0"/>
-              <a:t> 쉐도우 매핑과 같은 작업을 </a:t>
-            </a:r>
-            <a:r>
-              <a:rPr lang="ko-KR" altLang="en-US" dirty="0" err="1"/>
-              <a:t>할때</a:t>
-            </a:r>
-            <a:r>
-              <a:rPr lang="ko-KR" altLang="en-US" dirty="0"/>
-              <a:t> 오브젝트들을 직교로 거르기 위해 사용된다</a:t>
-            </a:r>
-            <a:r>
-              <a:rPr lang="en-US" altLang="ko-KR" dirty="0"/>
-              <a:t>.</a:t>
-            </a:r>
-          </a:p>
-          <a:p>
-            <a:r>
-              <a:rPr lang="ko-KR" altLang="en-US" dirty="0"/>
-              <a:t>원근은 화면 렌더링</a:t>
-            </a:r>
-            <a:r>
-              <a:rPr lang="en-US" altLang="ko-KR" dirty="0"/>
-              <a:t>, </a:t>
-            </a:r>
-            <a:r>
-              <a:rPr lang="ko-KR" altLang="en-US" dirty="0" err="1"/>
-              <a:t>오쿨루션</a:t>
-            </a:r>
-            <a:r>
-              <a:rPr lang="ko-KR" altLang="en-US" dirty="0"/>
-              <a:t> </a:t>
-            </a:r>
-            <a:r>
-              <a:rPr lang="ko-KR" altLang="en-US" dirty="0" err="1"/>
-              <a:t>컬링</a:t>
-            </a:r>
-            <a:r>
-              <a:rPr lang="en-US" altLang="ko-KR" dirty="0"/>
-              <a:t>, </a:t>
-            </a:r>
-            <a:r>
-              <a:rPr lang="ko-KR" altLang="en-US" dirty="0"/>
-              <a:t>그리고 </a:t>
-            </a:r>
-            <a:r>
-              <a:rPr lang="ko-KR" altLang="en-US" dirty="0" err="1"/>
-              <a:t>레이트레이싱에서</a:t>
-            </a:r>
-            <a:r>
-              <a:rPr lang="ko-KR" altLang="en-US" dirty="0"/>
-              <a:t> </a:t>
-            </a:r>
-            <a:r>
-              <a:rPr lang="en-US" altLang="ko-KR" dirty="0" err="1"/>
-              <a:t>SkinMeshBLASUpdate</a:t>
-            </a:r>
-            <a:r>
-              <a:rPr lang="ko-KR" altLang="en-US" dirty="0"/>
-              <a:t>를 위해 사용된다</a:t>
-            </a:r>
-            <a:r>
-              <a:rPr lang="en-US" altLang="ko-KR" dirty="0"/>
-              <a:t>.</a:t>
-            </a:r>
-          </a:p>
-          <a:p>
-            <a:r>
-              <a:rPr lang="ko-KR" altLang="en-US" dirty="0"/>
-              <a:t>직교나 원근이나 </a:t>
-            </a:r>
-            <a:r>
-              <a:rPr lang="ko-KR" altLang="en-US" dirty="0" err="1"/>
-              <a:t>프러스텀</a:t>
-            </a:r>
-            <a:r>
-              <a:rPr lang="ko-KR" altLang="en-US" dirty="0"/>
-              <a:t> </a:t>
-            </a:r>
-            <a:r>
-              <a:rPr lang="ko-KR" altLang="en-US" dirty="0" err="1"/>
-              <a:t>컬링을</a:t>
-            </a:r>
-            <a:r>
-              <a:rPr lang="ko-KR" altLang="en-US" dirty="0"/>
-              <a:t> 하는 방법은 간단하다</a:t>
-            </a:r>
-            <a:r>
-              <a:rPr lang="en-US" altLang="ko-KR" dirty="0"/>
-              <a:t>.</a:t>
-            </a:r>
-          </a:p>
-          <a:p>
-            <a:r>
-              <a:rPr lang="ko-KR" altLang="en-US" dirty="0"/>
-              <a:t>그저 </a:t>
-            </a:r>
-            <a:r>
-              <a:rPr lang="en-US" altLang="ko-KR" dirty="0"/>
-              <a:t>Game </a:t>
-            </a:r>
-            <a:r>
-              <a:rPr lang="ko-KR" altLang="en-US" dirty="0"/>
-              <a:t>구조체에 있는 </a:t>
-            </a:r>
-            <a:r>
-              <a:rPr lang="en-US" altLang="ko-KR" dirty="0" err="1"/>
-              <a:t>RenderTour</a:t>
-            </a:r>
-            <a:r>
-              <a:rPr lang="en-US" altLang="ko-KR" dirty="0"/>
-              <a:t> </a:t>
-            </a:r>
-            <a:r>
-              <a:rPr lang="ko-KR" altLang="en-US" dirty="0"/>
-              <a:t>함수를 호출하면 된다</a:t>
-            </a:r>
-            <a:r>
-              <a:rPr lang="en-US" altLang="ko-KR" dirty="0"/>
-              <a:t>.</a:t>
-            </a:r>
-          </a:p>
-          <a:p>
-            <a:endParaRPr lang="en-US" altLang="ko-KR" dirty="0"/>
-          </a:p>
-          <a:p>
-            <a:r>
-              <a:rPr lang="ko-KR" altLang="en-US" dirty="0"/>
-              <a:t>그럼 오브젝트마다 클래스의 </a:t>
-            </a:r>
-            <a:r>
-              <a:rPr lang="en-US" altLang="ko-KR" dirty="0"/>
-              <a:t>inline static </a:t>
-            </a:r>
-            <a:r>
-              <a:rPr lang="ko-KR" altLang="en-US" dirty="0"/>
-              <a:t>함수 포인터를 이용해 자신의 </a:t>
-            </a:r>
-            <a:r>
-              <a:rPr lang="ko-KR" altLang="en-US" dirty="0" err="1"/>
-              <a:t>맴버함수처럼</a:t>
-            </a:r>
-            <a:r>
-              <a:rPr lang="ko-KR" altLang="en-US" dirty="0"/>
-              <a:t> 호출을 하게 된다</a:t>
-            </a:r>
-            <a:r>
-              <a:rPr lang="en-US" altLang="ko-KR" dirty="0"/>
-              <a:t>.</a:t>
-            </a:r>
-          </a:p>
-          <a:p>
-            <a:r>
-              <a:rPr lang="ko-KR" altLang="en-US" dirty="0"/>
-              <a:t>해당 </a:t>
-            </a:r>
-            <a:r>
-              <a:rPr lang="ko-KR" altLang="en-US" dirty="0" err="1"/>
-              <a:t>함수포인터는</a:t>
-            </a:r>
-            <a:r>
-              <a:rPr lang="ko-KR" altLang="en-US" dirty="0"/>
-              <a:t> 작업을 시작하기 전에 프로그래머가 정할 수 있으며</a:t>
-            </a:r>
-            <a:r>
-              <a:rPr lang="en-US" altLang="ko-KR" dirty="0"/>
-              <a:t>, </a:t>
-            </a:r>
-            <a:r>
-              <a:rPr lang="ko-KR" altLang="en-US" dirty="0"/>
-              <a:t>그것은 </a:t>
-            </a:r>
-            <a:r>
-              <a:rPr lang="en-US" altLang="ko-KR" dirty="0"/>
-              <a:t>Update, Render, </a:t>
-            </a:r>
-            <a:r>
-              <a:rPr lang="en-US" altLang="ko-KR" dirty="0" err="1"/>
-              <a:t>BLASUpdate</a:t>
-            </a:r>
-            <a:r>
-              <a:rPr lang="ko-KR" altLang="en-US" dirty="0"/>
-              <a:t>등</a:t>
-            </a:r>
-            <a:endParaRPr lang="en-US" altLang="ko-KR" dirty="0"/>
-          </a:p>
-          <a:p>
-            <a:r>
-              <a:rPr lang="ko-KR" altLang="en-US" dirty="0"/>
-              <a:t>다양한 작업을 할 수 있다</a:t>
-            </a:r>
-            <a:r>
-              <a:rPr lang="en-US" altLang="ko-KR" dirty="0"/>
-              <a:t>.</a:t>
-            </a:r>
-          </a:p>
-          <a:p>
-            <a:r>
-              <a:rPr lang="ko-KR" altLang="en-US" dirty="0"/>
-              <a:t>또한 </a:t>
-            </a:r>
-            <a:r>
-              <a:rPr lang="en-US" altLang="ko-KR" dirty="0" err="1"/>
-              <a:t>RenderTour</a:t>
-            </a:r>
-            <a:r>
-              <a:rPr lang="en-US" altLang="ko-KR" dirty="0"/>
-              <a:t> </a:t>
-            </a:r>
-            <a:r>
-              <a:rPr lang="ko-KR" altLang="en-US" dirty="0"/>
-              <a:t>함수는 </a:t>
-            </a:r>
-            <a:r>
-              <a:rPr lang="en-US" altLang="ko-KR" dirty="0"/>
-              <a:t>template</a:t>
-            </a:r>
-            <a:r>
-              <a:rPr lang="ko-KR" altLang="en-US" dirty="0"/>
-              <a:t>함수이기 때문에</a:t>
-            </a:r>
-            <a:r>
-              <a:rPr lang="en-US" altLang="ko-KR" dirty="0"/>
-              <a:t>, </a:t>
-            </a:r>
-            <a:r>
-              <a:rPr lang="ko-KR" altLang="en-US" dirty="0" err="1"/>
-              <a:t>탬플릿</a:t>
-            </a:r>
-            <a:r>
-              <a:rPr lang="ko-KR" altLang="en-US" dirty="0"/>
-              <a:t> 변수로 </a:t>
-            </a:r>
-            <a:endParaRPr lang="en-US" altLang="ko-KR" dirty="0"/>
-          </a:p>
-          <a:p>
-            <a:r>
-              <a:rPr lang="ko-KR" altLang="en-US" dirty="0"/>
-              <a:t>어떤 오브젝트에 대해 연산을 </a:t>
-            </a:r>
-            <a:r>
-              <a:rPr lang="ko-KR" altLang="en-US" dirty="0" err="1"/>
-              <a:t>수행할건지도</a:t>
-            </a:r>
-            <a:r>
-              <a:rPr lang="ko-KR" altLang="en-US" dirty="0"/>
-              <a:t> 선택이 가능하다</a:t>
-            </a:r>
-            <a:r>
-              <a:rPr lang="en-US" altLang="ko-KR" dirty="0"/>
-              <a:t>.</a:t>
-            </a:r>
-          </a:p>
-          <a:p>
-            <a:r>
-              <a:rPr lang="ko-KR" altLang="en-US" dirty="0"/>
-              <a:t>내부적으로 </a:t>
-            </a:r>
-            <a:r>
-              <a:rPr lang="en-US" altLang="ko-KR" dirty="0"/>
-              <a:t>if </a:t>
-            </a:r>
-            <a:r>
-              <a:rPr lang="en-US" altLang="ko-KR" dirty="0" err="1"/>
-              <a:t>constexpr</a:t>
-            </a:r>
-            <a:r>
-              <a:rPr lang="en-US" altLang="ko-KR" dirty="0"/>
-              <a:t> </a:t>
-            </a:r>
-            <a:r>
-              <a:rPr lang="ko-KR" altLang="en-US" dirty="0"/>
-              <a:t>로 되어있어서 변수가 다르면 컴파일러는 다른 코드를 만든다</a:t>
-            </a:r>
-            <a:r>
-              <a:rPr lang="en-US" altLang="ko-KR" dirty="0"/>
-              <a:t>.</a:t>
-            </a:r>
-          </a:p>
-        </p:txBody>
-      </p:sp>
-    </p:spTree>
-    <p:extLst>
-      <p:ext uri="{BB962C8B-B14F-4D97-AF65-F5344CB8AC3E}">
-        <p14:creationId xmlns:p14="http://schemas.microsoft.com/office/powerpoint/2010/main" val="263221488"/>
-      </p:ext>
-    </p:extLst>
-  </p:cSld>
-  <p:clrMapOvr>
-    <a:masterClrMapping/>
-  </p:clrMapOvr>
-</p:sld>
-</file>
-
 <file path=ppt/theme/theme1.xml><?xml version="1.0" encoding="utf-8"?>
 <a:theme xmlns:a="http://schemas.openxmlformats.org/drawingml/2006/main" name="Office 테마">
   <a:themeElements>

--- a/Conference/GraphicsStudy/GraphicsHighLevelDesign.pptx
+++ b/Conference/GraphicsStudy/GraphicsHighLevelDesign.pptx
@@ -235,7 +235,7 @@
           <a:p>
             <a:fld id="{708C81D3-5E4D-495D-8DE1-4F2327BCEE89}" type="datetimeFigureOut">
               <a:rPr lang="ko-KR" altLang="en-US" smtClean="0"/>
-              <a:t>2026-04-13</a:t>
+              <a:t>2026-04-26</a:t>
             </a:fld>
             <a:endParaRPr lang="ko-KR" altLang="en-US"/>
           </a:p>
@@ -733,7 +733,7 @@
           <a:p>
             <a:fld id="{D8810A9B-0CC6-4053-BA0B-965178095DC3}" type="datetimeFigureOut">
               <a:rPr lang="ko-KR" altLang="en-US" smtClean="0"/>
-              <a:t>2026-04-13</a:t>
+              <a:t>2026-04-26</a:t>
             </a:fld>
             <a:endParaRPr lang="ko-KR" altLang="en-US"/>
           </a:p>
@@ -931,7 +931,7 @@
           <a:p>
             <a:fld id="{D8810A9B-0CC6-4053-BA0B-965178095DC3}" type="datetimeFigureOut">
               <a:rPr lang="ko-KR" altLang="en-US" smtClean="0"/>
-              <a:t>2026-04-13</a:t>
+              <a:t>2026-04-26</a:t>
             </a:fld>
             <a:endParaRPr lang="ko-KR" altLang="en-US"/>
           </a:p>
@@ -1139,7 +1139,7 @@
           <a:p>
             <a:fld id="{D8810A9B-0CC6-4053-BA0B-965178095DC3}" type="datetimeFigureOut">
               <a:rPr lang="ko-KR" altLang="en-US" smtClean="0"/>
-              <a:t>2026-04-13</a:t>
+              <a:t>2026-04-26</a:t>
             </a:fld>
             <a:endParaRPr lang="ko-KR" altLang="en-US"/>
           </a:p>
@@ -1444,7 +1444,7 @@
           <a:p>
             <a:fld id="{D8810A9B-0CC6-4053-BA0B-965178095DC3}" type="datetimeFigureOut">
               <a:rPr lang="ko-KR" altLang="en-US" smtClean="0"/>
-              <a:t>2026-04-13</a:t>
+              <a:t>2026-04-26</a:t>
             </a:fld>
             <a:endParaRPr lang="ko-KR" altLang="en-US"/>
           </a:p>
@@ -1709,7 +1709,7 @@
           <a:p>
             <a:fld id="{D8810A9B-0CC6-4053-BA0B-965178095DC3}" type="datetimeFigureOut">
               <a:rPr lang="ko-KR" altLang="en-US" smtClean="0"/>
-              <a:t>2026-04-13</a:t>
+              <a:t>2026-04-26</a:t>
             </a:fld>
             <a:endParaRPr lang="ko-KR" altLang="en-US"/>
           </a:p>
@@ -2121,7 +2121,7 @@
           <a:p>
             <a:fld id="{D8810A9B-0CC6-4053-BA0B-965178095DC3}" type="datetimeFigureOut">
               <a:rPr lang="ko-KR" altLang="en-US" smtClean="0"/>
-              <a:t>2026-04-13</a:t>
+              <a:t>2026-04-26</a:t>
             </a:fld>
             <a:endParaRPr lang="ko-KR" altLang="en-US"/>
           </a:p>
@@ -2262,7 +2262,7 @@
           <a:p>
             <a:fld id="{D8810A9B-0CC6-4053-BA0B-965178095DC3}" type="datetimeFigureOut">
               <a:rPr lang="ko-KR" altLang="en-US" smtClean="0"/>
-              <a:t>2026-04-13</a:t>
+              <a:t>2026-04-26</a:t>
             </a:fld>
             <a:endParaRPr lang="ko-KR" altLang="en-US"/>
           </a:p>
@@ -2375,7 +2375,7 @@
           <a:p>
             <a:fld id="{D8810A9B-0CC6-4053-BA0B-965178095DC3}" type="datetimeFigureOut">
               <a:rPr lang="ko-KR" altLang="en-US" smtClean="0"/>
-              <a:t>2026-04-13</a:t>
+              <a:t>2026-04-26</a:t>
             </a:fld>
             <a:endParaRPr lang="ko-KR" altLang="en-US"/>
           </a:p>
@@ -2686,7 +2686,7 @@
           <a:p>
             <a:fld id="{D8810A9B-0CC6-4053-BA0B-965178095DC3}" type="datetimeFigureOut">
               <a:rPr lang="ko-KR" altLang="en-US" smtClean="0"/>
-              <a:t>2026-04-13</a:t>
+              <a:t>2026-04-26</a:t>
             </a:fld>
             <a:endParaRPr lang="ko-KR" altLang="en-US"/>
           </a:p>
@@ -2974,7 +2974,7 @@
           <a:p>
             <a:fld id="{D8810A9B-0CC6-4053-BA0B-965178095DC3}" type="datetimeFigureOut">
               <a:rPr lang="ko-KR" altLang="en-US" smtClean="0"/>
-              <a:t>2026-04-13</a:t>
+              <a:t>2026-04-26</a:t>
             </a:fld>
             <a:endParaRPr lang="ko-KR" altLang="en-US"/>
           </a:p>
@@ -3215,7 +3215,7 @@
           <a:p>
             <a:fld id="{D8810A9B-0CC6-4053-BA0B-965178095DC3}" type="datetimeFigureOut">
               <a:rPr lang="ko-KR" altLang="en-US" smtClean="0"/>
-              <a:t>2026-04-13</a:t>
+              <a:t>2026-04-26</a:t>
             </a:fld>
             <a:endParaRPr lang="ko-KR" altLang="en-US"/>
           </a:p>
@@ -20615,8 +20615,8 @@
           </a:fontRef>
         </p:style>
       </p:cxnSp>
-      <mc:AlternateContent xmlns:mc="http://schemas.openxmlformats.org/markup-compatibility/2006">
-        <mc:Choice xmlns:pslz="http://schemas.microsoft.com/office/powerpoint/2016/slidezoom" Requires="pslz">
+      <mc:AlternateContent xmlns:mc="http://schemas.openxmlformats.org/markup-compatibility/2006" xmlns:pslz="http://schemas.microsoft.com/office/powerpoint/2016/slidezoom">
+        <mc:Choice Requires="pslz">
           <p:graphicFrame>
             <p:nvGraphicFramePr>
               <p:cNvPr id="33" name="슬라이드 확대/축소 32">
@@ -20673,7 +20673,7 @@
             </a:graphic>
           </p:graphicFrame>
         </mc:Choice>
-        <mc:Fallback>
+        <mc:Fallback xmlns="">
           <p:pic>
             <p:nvPicPr>
               <p:cNvPr id="33" name="슬라이드 확대/축소 32">
@@ -20690,7 +20690,7 @@
               <p:nvPr/>
             </p:nvPicPr>
             <p:blipFill>
-              <a:blip r:embed="rId2"/>
+              <a:blip r:embed="rId4"/>
               <a:stretch>
                 <a:fillRect/>
               </a:stretch>
